--- a/Field-CTO-XArch-Business-Case.pptx
+++ b/Field-CTO-XArch-Business-Case.pptx
@@ -29,6 +29,8 @@
     <p:sldId id="277" r:id="rId29"/>
     <p:sldId id="278" r:id="rId30"/>
     <p:sldId id="279" r:id="rId31"/>
+    <p:sldId id="280" r:id="rId32"/>
+    <p:sldId id="281" r:id="rId33"/>
   </p:sldIdLst>
   <p:sldSz cx="12191695" cy="6858000" type="screen4x3"/>
   <p:notesSz cx="6858000" cy="9144000"/>
@@ -595,7 +597,7 @@
           <a:lstStyle/>
           <a:p>
             <a:r>
-              <a:t>Show this is systematized, not dependent on a few heroes. The play library codifies the knowledge so the motion scales and survives key-person risk. Source: 05 §1–2.</a:t>
+              <a:t>Chosen on three criteria: high cross-attach, strong regulatory/resilience pull, and joint Cisco+Splunk strength. The list is swappable without changing the operating design. Source: 02 §5; 04 master matrix.</a:t>
             </a:r>
           </a:p>
         </p:txBody>
@@ -665,7 +667,7 @@
           <a:lstStyle/>
           <a:p>
             <a:r>
-              <a:t>The money slide. Anchor on break-even: ~$9M bookings (about five deals) covers the entire $5.4M cost; everything above is upside. Reinforce these are illustrative and parameterized. Source: 01 §6; 06 §2–3.</a:t>
+              <a:t>Show this is systematized, not dependent on a few heroes. The play library codifies the knowledge so the motion scales and survives key-person risk. Source: 05 §1–2.</a:t>
             </a:r>
           </a:p>
         </p:txBody>
@@ -735,7 +737,7 @@
           <a:lstStyle/>
           <a:p>
             <a:r>
-              <a:t>State the ask plainly and immediately bound the downside: small, senior team; defined spend; a real stop gate at Q3. Ask for the decision. Source: 01 §5; 06 §1.</a:t>
+              <a:t>The end-to-end proof. Walk the transformation: stalled + SI-locked → executive breakthrough → one co-authored architecture → multi-year program. Stress the OT safety boundary as the trust-winner with airport engineering. Source: 10.</a:t>
             </a:r>
           </a:p>
         </p:txBody>
@@ -805,7 +807,7 @@
           <a:lstStyle/>
           <a:p>
             <a:r>
-              <a:t>De-risk the financials. The three scenarios all clear break-even; the difference is how fast we scale, not whether it pays back. Source: 06 §5.</a:t>
+              <a:t>The money slide. Anchor on break-even: ~$9M bookings (about five deals) covers the entire $5.4M cost; everything above is upside. Reinforce these are illustrative and parameterized. Source: 01 §6; 06 §2–3.</a:t>
             </a:r>
           </a:p>
         </p:txBody>
@@ -875,7 +877,7 @@
           <a:lstStyle/>
           <a:p>
             <a:r>
-              <a:t>Address the skeptic. We measure with control accounts, so influence is proven not asserted; and we can stop at Q3 if the deltas aren't there. Source: 07 §1–3; 05 §7.</a:t>
+              <a:t>State the ask plainly and immediately bound the downside: small, senior team; defined spend; a real stop gate at Q3. Ask for the decision. Source: 01 §5; 06 §1.</a:t>
             </a:r>
           </a:p>
         </p:txBody>
@@ -945,7 +947,7 @@
           <a:lstStyle/>
           <a:p>
             <a:r>
-              <a:t>Close with a clear call to action and a concrete near-term timeline so approval feels actionable, not open-ended. Restate: bounded downside, differentiated upside. Ask for the yes. Source: 01 §9; README one-screen summary.</a:t>
+              <a:t>De-risk the financials. The three scenarios all clear break-even; the difference is how fast we scale, not whether it pays back. Source: 06 §5.</a:t>
             </a:r>
           </a:p>
         </p:txBody>
@@ -1015,7 +1017,7 @@
           <a:lstStyle/>
           <a:p>
             <a:r>
-              <a:t>Use these only if the room asks. Don't present them by default.</a:t>
+              <a:t>Address the skeptic. We measure with control accounts, so influence is proven not asserted; and we can stop at Q3 if the deltas aren't there. Source: 07 §1–3; 05 §7.</a:t>
             </a:r>
           </a:p>
         </p:txBody>
@@ -1085,7 +1087,7 @@
           <a:lstStyle/>
           <a:p>
             <a:r>
-              <a:t>Detail for HR/org-design questions. Source: 03 §1–3.</a:t>
+              <a:t>Close with a clear call to action and a concrete near-term timeline so approval feels actionable, not open-ended. Restate: bounded downside, differentiated upside. Ask for the yes. Source: 01 §9; README one-screen summary.</a:t>
             </a:r>
           </a:p>
         </p:txBody>
@@ -1155,7 +1157,7 @@
           <a:lstStyle/>
           <a:p>
             <a:r>
-              <a:t>For 'where does it sit / who owns what' questions. Source: 03 §5, §8.</a:t>
+              <a:t>Use these only if the room asks. Don't present them by default.</a:t>
             </a:r>
           </a:p>
         </p:txBody>
@@ -1225,7 +1227,7 @@
           <a:lstStyle/>
           <a:p>
             <a:r>
-              <a:t>For 'how do we actually sell this' questions. Source: 04 §1–4.</a:t>
+              <a:t>Detail for HR/org-design questions. Source: 03 §1–3.</a:t>
             </a:r>
           </a:p>
         </p:txBody>
@@ -1365,7 +1367,7 @@
           <a:lstStyle/>
           <a:p>
             <a:r>
-              <a:t>For OT/operations stakeholders. Source: 04 OT safety boundary.</a:t>
+              <a:t>For 'where does it sit / who owns what' questions. Source: 03 §5, §8.</a:t>
             </a:r>
           </a:p>
         </p:txBody>
@@ -1435,7 +1437,7 @@
           <a:lstStyle/>
           <a:p>
             <a:r>
-              <a:t>For finance deep-dives. Source: 06 §0, §4.</a:t>
+              <a:t>For 'how do we actually sell this' questions. Source: 04 §1–4.</a:t>
             </a:r>
           </a:p>
         </p:txBody>
@@ -1505,7 +1507,7 @@
           <a:lstStyle/>
           <a:p>
             <a:r>
-              <a:t>For comp/quota questions. Source: 05 §6.</a:t>
+              <a:t>For OT/operations stakeholders. Source: 04 OT safety boundary.</a:t>
             </a:r>
           </a:p>
         </p:txBody>
@@ -1575,7 +1577,7 @@
           <a:lstStyle/>
           <a:p>
             <a:r>
-              <a:t>For competitive/positioning questions. Source: 02 §7.</a:t>
+              <a:t>For finance deep-dives. Source: 06 §0, §4.</a:t>
             </a:r>
           </a:p>
         </p:txBody>
@@ -1645,6 +1647,146 @@
           <a:lstStyle/>
           <a:p>
             <a:r>
+              <a:t>For comp/quota questions. Source: 05 §6.</a:t>
+            </a:r>
+          </a:p>
+        </p:txBody>
+      </p:sp>
+      <p:sp>
+        <p:nvSpPr>
+          <p:cNvPr id="4" name="Slide Number Placeholder 3"/>
+          <p:cNvSpPr>
+            <a:spLocks noGrp="1"/>
+          </p:cNvSpPr>
+          <p:nvPr>
+            <p:ph type="sldNum" idx="5" sz="quarter"/>
+          </p:nvPr>
+        </p:nvSpPr>
+        <p:spPr/>
+      </p:sp>
+    </p:spTree>
+  </p:cSld>
+  <p:clrMapOvr>
+    <a:masterClrMapping/>
+  </p:clrMapOvr>
+</p:notes>
+</file>
+
+<file path=ppt/notesSlides/notesSlide25.xml><?xml version="1.0" encoding="utf-8"?>
+<p:notes xmlns:a="http://schemas.openxmlformats.org/drawingml/2006/main" xmlns:p="http://schemas.openxmlformats.org/presentationml/2006/main" xmlns:r="http://schemas.openxmlformats.org/officeDocument/2006/relationships">
+  <p:cSld>
+    <p:spTree>
+      <p:nvGrpSpPr>
+        <p:cNvPr id="1" name=""/>
+        <p:cNvGrpSpPr/>
+        <p:nvPr/>
+      </p:nvGrpSpPr>
+      <p:grpSpPr>
+        <a:xfrm>
+          <a:off x="0" y="0"/>
+          <a:ext cx="0" cy="0"/>
+          <a:chOff x="0" y="0"/>
+          <a:chExt cx="0" cy="0"/>
+        </a:xfrm>
+      </p:grpSpPr>
+      <p:sp>
+        <p:nvSpPr>
+          <p:cNvPr id="2" name="Slide Image Placeholder 1"/>
+          <p:cNvSpPr>
+            <a:spLocks noGrp="1"/>
+          </p:cNvSpPr>
+          <p:nvPr>
+            <p:ph type="sldImg" idx="2"/>
+          </p:nvPr>
+        </p:nvSpPr>
+        <p:spPr/>
+      </p:sp>
+      <p:sp>
+        <p:nvSpPr>
+          <p:cNvPr id="3" name="Notes Placeholder 2"/>
+          <p:cNvSpPr>
+            <a:spLocks noGrp="1"/>
+          </p:cNvSpPr>
+          <p:nvPr>
+            <p:ph type="body" idx="3" sz="quarter"/>
+          </p:nvPr>
+        </p:nvSpPr>
+        <p:spPr/>
+        <p:txBody>
+          <a:bodyPr/>
+          <a:lstStyle/>
+          <a:p>
+            <a:r>
+              <a:t>For competitive/positioning questions. Source: 02 §7.</a:t>
+            </a:r>
+          </a:p>
+        </p:txBody>
+      </p:sp>
+      <p:sp>
+        <p:nvSpPr>
+          <p:cNvPr id="4" name="Slide Number Placeholder 3"/>
+          <p:cNvSpPr>
+            <a:spLocks noGrp="1"/>
+          </p:cNvSpPr>
+          <p:nvPr>
+            <p:ph type="sldNum" idx="5" sz="quarter"/>
+          </p:nvPr>
+        </p:nvSpPr>
+        <p:spPr/>
+      </p:sp>
+    </p:spTree>
+  </p:cSld>
+  <p:clrMapOvr>
+    <a:masterClrMapping/>
+  </p:clrMapOvr>
+</p:notes>
+</file>
+
+<file path=ppt/notesSlides/notesSlide26.xml><?xml version="1.0" encoding="utf-8"?>
+<p:notes xmlns:a="http://schemas.openxmlformats.org/drawingml/2006/main" xmlns:p="http://schemas.openxmlformats.org/presentationml/2006/main" xmlns:r="http://schemas.openxmlformats.org/officeDocument/2006/relationships">
+  <p:cSld>
+    <p:spTree>
+      <p:nvGrpSpPr>
+        <p:cNvPr id="1" name=""/>
+        <p:cNvGrpSpPr/>
+        <p:nvPr/>
+      </p:nvGrpSpPr>
+      <p:grpSpPr>
+        <a:xfrm>
+          <a:off x="0" y="0"/>
+          <a:ext cx="0" cy="0"/>
+          <a:chOff x="0" y="0"/>
+          <a:chExt cx="0" cy="0"/>
+        </a:xfrm>
+      </p:grpSpPr>
+      <p:sp>
+        <p:nvSpPr>
+          <p:cNvPr id="2" name="Slide Image Placeholder 1"/>
+          <p:cNvSpPr>
+            <a:spLocks noGrp="1"/>
+          </p:cNvSpPr>
+          <p:nvPr>
+            <p:ph type="sldImg" idx="2"/>
+          </p:nvPr>
+        </p:nvSpPr>
+        <p:spPr/>
+      </p:sp>
+      <p:sp>
+        <p:nvSpPr>
+          <p:cNvPr id="3" name="Notes Placeholder 2"/>
+          <p:cNvSpPr>
+            <a:spLocks noGrp="1"/>
+          </p:cNvSpPr>
+          <p:nvPr>
+            <p:ph type="body" idx="3" sz="quarter"/>
+          </p:nvPr>
+        </p:nvSpPr>
+        <p:spPr/>
+        <p:txBody>
+          <a:bodyPr/>
+          <a:lstStyle/>
+          <a:p>
+            <a:r>
               <a:t>For risk/governance questions. Source: 07 §3.</a:t>
             </a:r>
           </a:p>
@@ -1995,7 +2137,7 @@
           <a:lstStyle/>
           <a:p>
             <a:r>
-              <a:t>The port-operator vignette makes the abstract concrete. Contrast the two paths visually. The punchline: the customer co-authors the architecture, so Cisco is the partner, not one of several suppliers. Source: 01 §3 vignette.</a:t>
+              <a:t>Introduce the tiger team as a mode, not separate headcount. Emphasize two things: it always hands the account back (no hoarding), and 'Black Ops' is a special-forces posture metaphor — fully ethical, nothing hidden from the customer. Source: 09.</a:t>
             </a:r>
           </a:p>
         </p:txBody>
@@ -2065,7 +2207,7 @@
           <a:lstStyle/>
           <a:p>
             <a:r>
-              <a:t>We deliberately don't boil the ocean. Three anchor pillars with the clearest boardroom narrative, plus AI-ready infra as an adjacency. Collaboration and pure compute are attach, not lead. Source: 02 §4.</a:t>
+              <a:t>The port-operator vignette makes the abstract concrete. Contrast the two paths visually. The punchline: the customer co-authors the architecture, so Cisco is the partner, not one of several suppliers. Source: 01 §3 vignette.</a:t>
             </a:r>
           </a:p>
         </p:txBody>
@@ -2135,7 +2277,7 @@
           <a:lstStyle/>
           <a:p>
             <a:r>
-              <a:t>Chosen on three criteria: high cross-attach, strong regulatory/resilience pull, and joint Cisco+Splunk strength. The list is swappable without changing the operating design. Source: 02 §5; 04 master matrix.</a:t>
+              <a:t>We deliberately don't boil the ocean. Three anchor pillars with the clearest boardroom narrative, plus AI-ready infra as an adjacency. Collaboration and pure compute are attach, not lead. Source: 02 §4.</a:t>
             </a:r>
           </a:p>
         </p:txBody>
@@ -5480,7 +5622,7 @@
                 </a:solidFill>
                 <a:latin typeface="Calibri"/>
               </a:rPr>
-              <a:t>THE MOTION</a:t>
+              <a:t>FOCUS · VERTICALS</a:t>
             </a:r>
           </a:p>
         </p:txBody>
@@ -5562,7 +5704,7 @@
                 </a:solidFill>
                 <a:latin typeface="Calibri"/>
               </a:rPr>
-              <a:t>A repeatable lifecycle and a library of plays — not heroics</a:t>
+              <a:t>Four verticals chosen for cross-attach and regulatory pull</a:t>
             </a:r>
           </a:p>
         </p:txBody>
@@ -5655,7 +5797,7 @@
                 </a:solidFill>
                 <a:latin typeface="Calibri"/>
               </a:rPr>
-              <a:t>Select &amp; trigger → Executive framing → X-Arch architecture</a:t>
+              <a:t>Transportation &amp; Logistics — distributed sites, IoT, transport-OT (NIS2)</a:t>
             </a:r>
           </a:p>
           <a:p>
@@ -5680,7 +5822,7 @@
                 </a:solidFill>
                 <a:latin typeface="Calibri"/>
               </a:rPr>
-              <a:t>→ Value case → Orchestrate &amp; close → Land &amp; expand</a:t>
+              <a:t>Financial Services — resilience (DORA), fraud, SecOps, observability</a:t>
             </a:r>
           </a:p>
           <a:p>
@@ -5705,7 +5847,7 @@
                 </a:solidFill>
                 <a:latin typeface="Calibri"/>
               </a:rPr>
-              <a:t>Plays: Splunk-attach-to-network, SOC modernization, full-stack DX, passive OT, consolidation TCO</a:t>
+              <a:t>Healthcare — IoMT security, clinical-app observability, HIPAA</a:t>
             </a:r>
           </a:p>
           <a:p>
@@ -5730,7 +5872,7 @@
                 </a:solidFill>
                 <a:latin typeface="Calibri"/>
               </a:rPr>
-              <a:t>Each play = discovery script + reference architecture + value case + proof points</a:t>
+              <a:t>Public Sector / Critical Infrastructure — NERC-CIP/NIS2, SOC modernization</a:t>
             </a:r>
           </a:p>
         </p:txBody>
@@ -5870,7 +6012,7 @@
                 </a:solidFill>
                 <a:latin typeface="Calibri"/>
               </a:rPr>
-              <a:t>THE RETURN</a:t>
+              <a:t>THE MOTION</a:t>
             </a:r>
           </a:p>
         </p:txBody>
@@ -5952,7 +6094,7 @@
                 </a:solidFill>
                 <a:latin typeface="Calibri"/>
               </a:rPr>
-              <a:t>~$180M influenced pipeline, ~$60M incremental bookings, payback &lt; 12 months</a:t>
+              <a:t>A repeatable lifecycle and a library of plays — not heroics</a:t>
             </a:r>
           </a:p>
         </p:txBody>
@@ -6045,7 +6187,7 @@
                 </a:solidFill>
                 <a:latin typeface="Calibri"/>
               </a:rPr>
-              <a:t>Year-1 targets (illustrative): $180M influenced pipeline</a:t>
+              <a:t>Select &amp; trigger → Executive framing → X-Arch architecture</a:t>
             </a:r>
           </a:p>
           <a:p>
@@ -6070,7 +6212,7 @@
                 </a:solidFill>
                 <a:latin typeface="Calibri"/>
               </a:rPr>
-              <a:t>~$60M incremental/accelerated bookings → ~$36M incremental gross margin</a:t>
+              <a:t>→ Value case → Orchestrate &amp; close → Land &amp; expand</a:t>
             </a:r>
           </a:p>
           <a:p>
@@ -6095,7 +6237,7 @@
                 </a:solidFill>
                 <a:latin typeface="Calibri"/>
               </a:rPr>
-              <a:t>Break-even at just ~$9M bookings — roughly FIVE deals cover the whole cost</a:t>
+              <a:t>Plays: Splunk-attach-to-network, SOC modernization, full-stack DX, passive OT, consolidation TCO</a:t>
             </a:r>
           </a:p>
           <a:p>
@@ -6120,7 +6262,7 @@
                 </a:solidFill>
                 <a:latin typeface="Calibri"/>
               </a:rPr>
-              <a:t>Splunk cross-attach and deal-size uplift are the leading indicators</a:t>
+              <a:t>Each play = discovery script + reference architecture + value case + proof points</a:t>
             </a:r>
           </a:p>
         </p:txBody>
@@ -6260,7 +6402,7 @@
                 </a:solidFill>
                 <a:latin typeface="Calibri"/>
               </a:rPr>
-              <a:t>THE ASK</a:t>
+              <a:t>WORKED EXAMPLE · AVIATION</a:t>
             </a:r>
           </a:p>
         </p:txBody>
@@ -6342,7 +6484,7 @@
                 </a:solidFill>
                 <a:latin typeface="Calibri"/>
               </a:rPr>
-              <a:t>Fund a 12-person, 4-quarter pilot (~$5.4M illustrative)</a:t>
+              <a:t>Airport operator: Black Ops broke open a stalled 'smart airport' program</a:t>
             </a:r>
           </a:p>
         </p:txBody>
@@ -6435,7 +6577,7 @@
                 </a:solidFill>
                 <a:latin typeface="Calibri"/>
               </a:rPr>
-              <a:t>8 Field CTOs + 1 group lead + 2 X-Arch architects + 1 deal desk/ops</a:t>
+              <a:t>OT-heavy hub (baggage, jet bridges, airfield lighting) + NIS2 + Terminal 4 build</a:t>
             </a:r>
           </a:p>
           <a:p>
@@ -6460,7 +6602,7 @@
                 </a:solidFill>
                 <a:latin typeface="Calibri"/>
               </a:rPr>
-              <a:t>Fully-loaded ~$5.4M/yr including enablement, tooling, travel</a:t>
+              <a:t>SI was about to lock the architecture — Black Ops criteria met, pod convened</a:t>
             </a:r>
           </a:p>
           <a:p>
@@ -6485,7 +6627,7 @@
                 </a:solidFill>
                 <a:latin typeface="Calibri"/>
               </a:rPr>
-              <a:t>Internal-first staffing; ~40–60 named accounts with paired controls</a:t>
+              <a:t>Executive breakthrough reframed it as board-level operational resilience</a:t>
             </a:r>
           </a:p>
           <a:p>
@@ -6510,7 +6652,32 @@
                 </a:solidFill>
                 <a:latin typeface="Calibri"/>
               </a:rPr>
-              <a:t>Q3 go/expand/stop gate tied to explicit success criteria</a:t>
+              <a:t>One X-Arch architecture: passive OT + segmentation + SD-WAN + modern SOC + edge AI</a:t>
+            </a:r>
+          </a:p>
+          <a:p>
+            <a:pPr algn="l">
+              <a:spcAft>
+                <a:spcPts val="1000"/>
+              </a:spcAft>
+            </a:pPr>
+            <a:r>
+              <a:rPr sz="1700" b="1">
+                <a:solidFill>
+                  <a:srgbClr val="00BCEB"/>
+                </a:solidFill>
+                <a:latin typeface="Calibri"/>
+              </a:rPr>
+              <a:t>•  </a:t>
+            </a:r>
+            <a:r>
+              <a:rPr sz="1700" b="0">
+                <a:solidFill>
+                  <a:srgbClr val="F2F4F8"/>
+                </a:solidFill>
+                <a:latin typeface="Calibri"/>
+              </a:rPr>
+              <a:t>Won OT engineering's trust via read-only, human-in-the-loop — then handed back to scale</a:t>
             </a:r>
           </a:p>
         </p:txBody>
@@ -6650,7 +6817,7 @@
                 </a:solidFill>
                 <a:latin typeface="Calibri"/>
               </a:rPr>
-              <a:t>IT PAYS BACK</a:t>
+              <a:t>THE RETURN</a:t>
             </a:r>
           </a:p>
         </p:txBody>
@@ -6732,7 +6899,7 @@
                 </a:solidFill>
                 <a:latin typeface="Calibri"/>
               </a:rPr>
-              <a:t>Profitable from conservative to upside — the question is pace, not payback</a:t>
+              <a:t>~$180M influenced pipeline, ~$60M incremental bookings, payback &lt; 12 months</a:t>
             </a:r>
           </a:p>
         </p:txBody>
@@ -6825,7 +6992,7 @@
                 </a:solidFill>
                 <a:latin typeface="Calibri"/>
               </a:rPr>
-              <a:t>Conservative ~$25M bookings → ~$9M net (continue, tune targeting)</a:t>
+              <a:t>Year-1 targets (illustrative): $180M influenced pipeline</a:t>
             </a:r>
           </a:p>
           <a:p>
@@ -6850,7 +7017,7 @@
                 </a:solidFill>
                 <a:latin typeface="Calibri"/>
               </a:rPr>
-              <a:t>Base (plan) ~$60M → ~$31M net (expand per 3-year path)</a:t>
+              <a:t>~$60M incremental/accelerated bookings → ~$36M incremental gross margin</a:t>
             </a:r>
           </a:p>
           <a:p>
@@ -6875,7 +7042,7 @@
                 </a:solidFill>
                 <a:latin typeface="Calibri"/>
               </a:rPr>
-              <a:t>Upside ~$90M → ~$46M net (accelerate hiring)</a:t>
+              <a:t>Break-even at just ~$9M bookings — roughly FIVE deals cover the whole cost</a:t>
             </a:r>
           </a:p>
           <a:p>
@@ -6900,7 +7067,7 @@
                 </a:solidFill>
                 <a:latin typeface="Calibri"/>
               </a:rPr>
-              <a:t>Even $20M @ 50% margin returns +$4.6M net — profitable across the range</a:t>
+              <a:t>Splunk cross-attach and deal-size uplift are the leading indicators</a:t>
             </a:r>
           </a:p>
         </p:txBody>
@@ -7040,7 +7207,7 @@
                 </a:solidFill>
                 <a:latin typeface="Calibri"/>
               </a:rPr>
-              <a:t>BOUNDED RISK + PROOF</a:t>
+              <a:t>THE ASK</a:t>
             </a:r>
           </a:p>
         </p:txBody>
@@ -7122,7 +7289,7 @@
                 </a:solidFill>
                 <a:latin typeface="Calibri"/>
               </a:rPr>
-              <a:t>A Q3 gate and control-account measurement make this low-risk</a:t>
+              <a:t>Fund a 12-person, 4-quarter pilot (~$5.4M illustrative)</a:t>
             </a:r>
           </a:p>
         </p:txBody>
@@ -7215,7 +7382,7 @@
                 </a:solidFill>
                 <a:latin typeface="Calibri"/>
               </a:rPr>
-              <a:t>Q3 go/expand/stop gate stops spend before it can turn negative</a:t>
+              <a:t>8 Field CTOs + 1 group lead + 2 X-Arch architects + 1 deal desk/ops</a:t>
             </a:r>
           </a:p>
           <a:p>
@@ -7240,7 +7407,7 @@
                 </a:solidFill>
                 <a:latin typeface="Calibri"/>
               </a:rPr>
-              <a:t>Proof by matched control accounts: attach, deal size, win rate deltas</a:t>
+              <a:t>Fully-loaded ~$5.4M/yr including enablement, tooling, travel</a:t>
             </a:r>
           </a:p>
           <a:p>
@@ -7265,7 +7432,7 @@
                 </a:solidFill>
                 <a:latin typeface="Calibri"/>
               </a:rPr>
-              <a:t>Top risks (talent, comp friction, attribution) have concrete mitigations</a:t>
+              <a:t>Internal-first staffing; ~40–60 named accounts with paired controls</a:t>
             </a:r>
           </a:p>
           <a:p>
@@ -7290,7 +7457,7 @@
                 </a:solidFill>
                 <a:latin typeface="Calibri"/>
               </a:rPr>
-              <a:t>Influence ledger prevents over-claiming and BU disputes</a:t>
+              <a:t>Q3 go/expand/stop gate tied to explicit success criteria</a:t>
             </a:r>
           </a:p>
         </p:txBody>
@@ -7430,7 +7597,7 @@
                 </a:solidFill>
                 <a:latin typeface="Calibri"/>
               </a:rPr>
-              <a:t>RECOMMENDATION</a:t>
+              <a:t>IT PAYS BACK</a:t>
             </a:r>
           </a:p>
         </p:txBody>
@@ -7512,7 +7679,7 @@
                 </a:solidFill>
                 <a:latin typeface="Calibri"/>
               </a:rPr>
-              <a:t>Approve the pilot; first executive framings within 90 days</a:t>
+              <a:t>Profitable from conservative to upside — the question is pace, not payback</a:t>
             </a:r>
           </a:p>
         </p:txBody>
@@ -7605,7 +7772,7 @@
                 </a:solidFill>
                 <a:latin typeface="Calibri"/>
               </a:rPr>
-              <a:t>Approve the 12-person, 4-quarter funded pilot with a Q3 gate</a:t>
+              <a:t>Conservative ~$25M bookings → ~$9M net (continue, tune targeting)</a:t>
             </a:r>
           </a:p>
           <a:p>
@@ -7630,7 +7797,7 @@
                 </a:solidFill>
                 <a:latin typeface="Calibri"/>
               </a:rPr>
-              <a:t>+30d: group lead named; charter, comp, metrics baselined</a:t>
+              <a:t>Base (plan) ~$60M → ~$31M net (expand per 3-year path)</a:t>
             </a:r>
           </a:p>
           <a:p>
@@ -7655,7 +7822,7 @@
                 </a:solidFill>
                 <a:latin typeface="Calibri"/>
               </a:rPr>
-              <a:t>+60d: cohort staffed (internal-first); accounts + controls selected</a:t>
+              <a:t>Upside ~$90M → ~$46M net (accelerate hiring)</a:t>
             </a:r>
           </a:p>
           <a:p>
@@ -7680,7 +7847,7 @@
                 </a:solidFill>
                 <a:latin typeface="Calibri"/>
               </a:rPr>
-              <a:t>+90d: first X-Arch opportunities framed; enablement ramp underway</a:t>
+              <a:t>Even $20M @ 50% margin returns +$4.6M net — profitable across the range</a:t>
             </a:r>
           </a:p>
         </p:txBody>
@@ -7794,8 +7961,8 @@
         </p:nvSpPr>
         <p:spPr>
           <a:xfrm>
-            <a:off x="731520" y="2743200"/>
-            <a:ext cx="10698480" cy="914400"/>
+            <a:off x="548640" y="411480"/>
+            <a:ext cx="11064240" cy="365760"/>
           </a:xfrm>
           <a:prstGeom prst="rect">
             <a:avLst/>
@@ -7814,27 +7981,70 @@
               </a:spcAft>
             </a:pPr>
             <a:r>
-              <a:rPr sz="1600" b="1">
+              <a:rPr sz="1200" b="1">
                 <a:solidFill>
                   <a:srgbClr val="00BCEB"/>
                 </a:solidFill>
                 <a:latin typeface="Calibri"/>
               </a:rPr>
-              <a:t>APPENDIX</a:t>
-            </a:r>
-          </a:p>
-        </p:txBody>
-      </p:sp>
-      <p:sp>
-        <p:nvSpPr>
-          <p:cNvPr id="4" name="TextBox 3"/>
+              <a:t>BOUNDED RISK + PROOF</a:t>
+            </a:r>
+          </a:p>
+        </p:txBody>
+      </p:sp>
+      <p:sp>
+        <p:nvSpPr>
+          <p:cNvPr id="4" name="Rectangle 3"/>
+          <p:cNvSpPr/>
+          <p:nvPr/>
+        </p:nvSpPr>
+        <p:spPr>
+          <a:xfrm>
+            <a:off x="548640" y="868680"/>
+            <a:ext cx="1280160" cy="50800"/>
+          </a:xfrm>
+          <a:prstGeom prst="rect">
+            <a:avLst/>
+          </a:prstGeom>
+          <a:solidFill>
+            <a:srgbClr val="00BCEB"/>
+          </a:solidFill>
+          <a:ln>
+            <a:noFill/>
+          </a:ln>
+        </p:spPr>
+        <p:style>
+          <a:lnRef idx="1">
+            <a:schemeClr val="accent1"/>
+          </a:lnRef>
+          <a:fillRef idx="3">
+            <a:schemeClr val="accent1"/>
+          </a:fillRef>
+          <a:effectRef idx="2">
+            <a:schemeClr val="accent1"/>
+          </a:effectRef>
+          <a:fontRef idx="minor">
+            <a:schemeClr val="lt1"/>
+          </a:fontRef>
+        </p:style>
+        <p:txBody>
+          <a:bodyPr rtlCol="0" anchor="ctr"/>
+          <a:lstStyle/>
+          <a:p>
+            <a:pPr algn="ctr"/>
+          </a:p>
+        </p:txBody>
+      </p:sp>
+      <p:sp>
+        <p:nvSpPr>
+          <p:cNvPr id="5" name="TextBox 4"/>
           <p:cNvSpPr txBox="1"/>
           <p:nvPr/>
         </p:nvSpPr>
         <p:spPr>
           <a:xfrm>
-            <a:off x="731520" y="3200400"/>
-            <a:ext cx="10698480" cy="914400"/>
+            <a:off x="548640" y="1051560"/>
+            <a:ext cx="11064240" cy="1005840"/>
           </a:xfrm>
           <a:prstGeom prst="rect">
             <a:avLst/>
@@ -7853,13 +8063,220 @@
               </a:spcAft>
             </a:pPr>
             <a:r>
-              <a:rPr sz="3000" b="1">
+              <a:rPr sz="2800" b="1">
                 <a:solidFill>
                   <a:srgbClr val="F2F4F8"/>
                 </a:solidFill>
                 <a:latin typeface="Calibri"/>
               </a:rPr>
-              <a:t>Detail held in reserve for Q&amp;A</a:t>
+              <a:t>A Q3 gate and control-account measurement make this low-risk</a:t>
+            </a:r>
+          </a:p>
+        </p:txBody>
+      </p:sp>
+      <p:sp>
+        <p:nvSpPr>
+          <p:cNvPr id="6" name="Rectangle 5"/>
+          <p:cNvSpPr/>
+          <p:nvPr/>
+        </p:nvSpPr>
+        <p:spPr>
+          <a:xfrm>
+            <a:off x="548640" y="2331720"/>
+            <a:ext cx="11064240" cy="3931920"/>
+          </a:xfrm>
+          <a:prstGeom prst="rect">
+            <a:avLst/>
+          </a:prstGeom>
+          <a:solidFill>
+            <a:srgbClr val="1A1A2E"/>
+          </a:solidFill>
+          <a:ln w="12700">
+            <a:solidFill>
+              <a:srgbClr val="2C2C3A"/>
+            </a:solidFill>
+          </a:ln>
+        </p:spPr>
+        <p:style>
+          <a:lnRef idx="1">
+            <a:schemeClr val="accent1"/>
+          </a:lnRef>
+          <a:fillRef idx="3">
+            <a:schemeClr val="accent1"/>
+          </a:fillRef>
+          <a:effectRef idx="2">
+            <a:schemeClr val="accent1"/>
+          </a:effectRef>
+          <a:fontRef idx="minor">
+            <a:schemeClr val="lt1"/>
+          </a:fontRef>
+        </p:style>
+        <p:txBody>
+          <a:bodyPr rtlCol="0" anchor="ctr"/>
+          <a:lstStyle/>
+          <a:p>
+            <a:pPr algn="ctr"/>
+          </a:p>
+        </p:txBody>
+      </p:sp>
+      <p:sp>
+        <p:nvSpPr>
+          <p:cNvPr id="7" name="TextBox 6"/>
+          <p:cNvSpPr txBox="1"/>
+          <p:nvPr/>
+        </p:nvSpPr>
+        <p:spPr>
+          <a:xfrm>
+            <a:off x="914400" y="2560320"/>
+            <a:ext cx="10332720" cy="3566160"/>
+          </a:xfrm>
+          <a:prstGeom prst="rect">
+            <a:avLst/>
+          </a:prstGeom>
+          <a:noFill/>
+        </p:spPr>
+        <p:txBody>
+          <a:bodyPr wrap="square" anchor="t">
+            <a:spAutoFit/>
+          </a:bodyPr>
+          <a:lstStyle/>
+          <a:p>
+            <a:pPr algn="l">
+              <a:spcAft>
+                <a:spcPts val="1000"/>
+              </a:spcAft>
+            </a:pPr>
+            <a:r>
+              <a:rPr sz="1700" b="1">
+                <a:solidFill>
+                  <a:srgbClr val="00BCEB"/>
+                </a:solidFill>
+                <a:latin typeface="Calibri"/>
+              </a:rPr>
+              <a:t>•  </a:t>
+            </a:r>
+            <a:r>
+              <a:rPr sz="1700" b="0">
+                <a:solidFill>
+                  <a:srgbClr val="F2F4F8"/>
+                </a:solidFill>
+                <a:latin typeface="Calibri"/>
+              </a:rPr>
+              <a:t>Q3 go/expand/stop gate stops spend before it can turn negative</a:t>
+            </a:r>
+          </a:p>
+          <a:p>
+            <a:pPr algn="l">
+              <a:spcAft>
+                <a:spcPts val="1000"/>
+              </a:spcAft>
+            </a:pPr>
+            <a:r>
+              <a:rPr sz="1700" b="1">
+                <a:solidFill>
+                  <a:srgbClr val="00BCEB"/>
+                </a:solidFill>
+                <a:latin typeface="Calibri"/>
+              </a:rPr>
+              <a:t>•  </a:t>
+            </a:r>
+            <a:r>
+              <a:rPr sz="1700" b="0">
+                <a:solidFill>
+                  <a:srgbClr val="F2F4F8"/>
+                </a:solidFill>
+                <a:latin typeface="Calibri"/>
+              </a:rPr>
+              <a:t>Proof by matched control accounts: attach, deal size, win rate deltas</a:t>
+            </a:r>
+          </a:p>
+          <a:p>
+            <a:pPr algn="l">
+              <a:spcAft>
+                <a:spcPts val="1000"/>
+              </a:spcAft>
+            </a:pPr>
+            <a:r>
+              <a:rPr sz="1700" b="1">
+                <a:solidFill>
+                  <a:srgbClr val="00BCEB"/>
+                </a:solidFill>
+                <a:latin typeface="Calibri"/>
+              </a:rPr>
+              <a:t>•  </a:t>
+            </a:r>
+            <a:r>
+              <a:rPr sz="1700" b="0">
+                <a:solidFill>
+                  <a:srgbClr val="F2F4F8"/>
+                </a:solidFill>
+                <a:latin typeface="Calibri"/>
+              </a:rPr>
+              <a:t>Top risks (talent, comp friction, attribution) have concrete mitigations</a:t>
+            </a:r>
+          </a:p>
+          <a:p>
+            <a:pPr algn="l">
+              <a:spcAft>
+                <a:spcPts val="1000"/>
+              </a:spcAft>
+            </a:pPr>
+            <a:r>
+              <a:rPr sz="1700" b="1">
+                <a:solidFill>
+                  <a:srgbClr val="00BCEB"/>
+                </a:solidFill>
+                <a:latin typeface="Calibri"/>
+              </a:rPr>
+              <a:t>•  </a:t>
+            </a:r>
+            <a:r>
+              <a:rPr sz="1700" b="0">
+                <a:solidFill>
+                  <a:srgbClr val="F2F4F8"/>
+                </a:solidFill>
+                <a:latin typeface="Calibri"/>
+              </a:rPr>
+              <a:t>Influence ledger prevents over-claiming and BU disputes</a:t>
+            </a:r>
+          </a:p>
+        </p:txBody>
+      </p:sp>
+      <p:sp>
+        <p:nvSpPr>
+          <p:cNvPr id="8" name="TextBox 7"/>
+          <p:cNvSpPr txBox="1"/>
+          <p:nvPr/>
+        </p:nvSpPr>
+        <p:spPr>
+          <a:xfrm>
+            <a:off x="548640" y="6419088"/>
+            <a:ext cx="11064240" cy="320040"/>
+          </a:xfrm>
+          <a:prstGeom prst="rect">
+            <a:avLst/>
+          </a:prstGeom>
+          <a:noFill/>
+        </p:spPr>
+        <p:txBody>
+          <a:bodyPr wrap="square" anchor="t">
+            <a:spAutoFit/>
+          </a:bodyPr>
+          <a:lstStyle/>
+          <a:p>
+            <a:pPr algn="l">
+              <a:spcAft>
+                <a:spcPts val="600"/>
+              </a:spcAft>
+            </a:pPr>
+            <a:r>
+              <a:rPr sz="1000" b="0">
+                <a:solidFill>
+                  <a:srgbClr val="9AA3B2"/>
+                </a:solidFill>
+                <a:latin typeface="Calibri"/>
+              </a:rPr>
+              <a:t>Illustrative figures — replace with actuals before presenting.</a:t>
             </a:r>
           </a:p>
         </p:txBody>
@@ -7960,7 +8377,7 @@
                 </a:solidFill>
                 <a:latin typeface="Calibri"/>
               </a:rPr>
-              <a:t>APPENDIX · A1</a:t>
+              <a:t>RECOMMENDATION</a:t>
             </a:r>
           </a:p>
         </p:txBody>
@@ -8042,7 +8459,7 @@
                 </a:solidFill>
                 <a:latin typeface="Calibri"/>
               </a:rPr>
-              <a:t>Role, competencies, and skills matrix</a:t>
+              <a:t>Approve the pilot; first executive framings within 90 days</a:t>
             </a:r>
           </a:p>
         </p:txBody>
@@ -8135,7 +8552,7 @@
                 </a:solidFill>
                 <a:latin typeface="Calibri"/>
               </a:rPr>
-              <a:t>Four competency pillars: business fluency, X-arch depth, exec presence, orchestration</a:t>
+              <a:t>Approve the 12-person, 4-quarter funded pilot with a Q3 gate</a:t>
             </a:r>
           </a:p>
           <a:p>
@@ -8160,7 +8577,7 @@
                 </a:solidFill>
                 <a:latin typeface="Calibri"/>
               </a:rPr>
-              <a:t>Proficiency targets per domain; deep in ≥2 pillars, conversant in all</a:t>
+              <a:t>+30d: group lead named; charter, comp, metrics baselined</a:t>
             </a:r>
           </a:p>
           <a:p>
@@ -8185,7 +8602,32 @@
                 </a:solidFill>
                 <a:latin typeface="Calibri"/>
               </a:rPr>
-              <a:t>Deep in one vertical; team covers all four at expert level</a:t>
+              <a:t>+60d: cohort staffed (internal-first); accounts + controls selected</a:t>
+            </a:r>
+          </a:p>
+          <a:p>
+            <a:pPr algn="l">
+              <a:spcAft>
+                <a:spcPts val="1000"/>
+              </a:spcAft>
+            </a:pPr>
+            <a:r>
+              <a:rPr sz="1700" b="1">
+                <a:solidFill>
+                  <a:srgbClr val="00BCEB"/>
+                </a:solidFill>
+                <a:latin typeface="Calibri"/>
+              </a:rPr>
+              <a:t>•  </a:t>
+            </a:r>
+            <a:r>
+              <a:rPr sz="1700" b="0">
+                <a:solidFill>
+                  <a:srgbClr val="F2F4F8"/>
+                </a:solidFill>
+                <a:latin typeface="Calibri"/>
+              </a:rPr>
+              <a:t>+90d: first X-Arch opportunities framed; enablement ramp underway</a:t>
             </a:r>
           </a:p>
         </p:txBody>
@@ -8224,7 +8666,7 @@
                 </a:solidFill>
                 <a:latin typeface="Calibri"/>
               </a:rPr>
-              <a:t>Appendix — reserve for Q&amp;A. Illustrative figures.</a:t>
+              <a:t>Illustrative figures — replace with actuals before presenting.</a:t>
             </a:r>
           </a:p>
         </p:txBody>
@@ -8299,8 +8741,8 @@
         </p:nvSpPr>
         <p:spPr>
           <a:xfrm>
-            <a:off x="548640" y="411480"/>
-            <a:ext cx="11064240" cy="365760"/>
+            <a:off x="731520" y="2743200"/>
+            <a:ext cx="10698480" cy="914400"/>
           </a:xfrm>
           <a:prstGeom prst="rect">
             <a:avLst/>
@@ -8319,70 +8761,27 @@
               </a:spcAft>
             </a:pPr>
             <a:r>
-              <a:rPr sz="1200" b="1">
+              <a:rPr sz="1600" b="1">
                 <a:solidFill>
                   <a:srgbClr val="00BCEB"/>
                 </a:solidFill>
                 <a:latin typeface="Calibri"/>
               </a:rPr>
-              <a:t>APPENDIX · A2</a:t>
-            </a:r>
-          </a:p>
-        </p:txBody>
-      </p:sp>
-      <p:sp>
-        <p:nvSpPr>
-          <p:cNvPr id="4" name="Rectangle 3"/>
-          <p:cNvSpPr/>
-          <p:nvPr/>
-        </p:nvSpPr>
-        <p:spPr>
-          <a:xfrm>
-            <a:off x="548640" y="868680"/>
-            <a:ext cx="1280160" cy="50800"/>
-          </a:xfrm>
-          <a:prstGeom prst="rect">
-            <a:avLst/>
-          </a:prstGeom>
-          <a:solidFill>
-            <a:srgbClr val="00BCEB"/>
-          </a:solidFill>
-          <a:ln>
-            <a:noFill/>
-          </a:ln>
-        </p:spPr>
-        <p:style>
-          <a:lnRef idx="1">
-            <a:schemeClr val="accent1"/>
-          </a:lnRef>
-          <a:fillRef idx="3">
-            <a:schemeClr val="accent1"/>
-          </a:fillRef>
-          <a:effectRef idx="2">
-            <a:schemeClr val="accent1"/>
-          </a:effectRef>
-          <a:fontRef idx="minor">
-            <a:schemeClr val="lt1"/>
-          </a:fontRef>
-        </p:style>
-        <p:txBody>
-          <a:bodyPr rtlCol="0" anchor="ctr"/>
-          <a:lstStyle/>
-          <a:p>
-            <a:pPr algn="ctr"/>
-          </a:p>
-        </p:txBody>
-      </p:sp>
-      <p:sp>
-        <p:nvSpPr>
-          <p:cNvPr id="5" name="TextBox 4"/>
+              <a:t>APPENDIX</a:t>
+            </a:r>
+          </a:p>
+        </p:txBody>
+      </p:sp>
+      <p:sp>
+        <p:nvSpPr>
+          <p:cNvPr id="4" name="TextBox 3"/>
           <p:cNvSpPr txBox="1"/>
           <p:nvPr/>
         </p:nvSpPr>
         <p:spPr>
           <a:xfrm>
-            <a:off x="548640" y="1051560"/>
-            <a:ext cx="11064240" cy="1005840"/>
+            <a:off x="731520" y="3200400"/>
+            <a:ext cx="10698480" cy="914400"/>
           </a:xfrm>
           <a:prstGeom prst="rect">
             <a:avLst/>
@@ -8401,195 +8800,13 @@
               </a:spcAft>
             </a:pPr>
             <a:r>
-              <a:rPr sz="2800" b="1">
+              <a:rPr sz="3000" b="1">
                 <a:solidFill>
                   <a:srgbClr val="F2F4F8"/>
                 </a:solidFill>
                 <a:latin typeface="Calibri"/>
               </a:rPr>
-              <a:t>Org placement and RACI</a:t>
-            </a:r>
-          </a:p>
-        </p:txBody>
-      </p:sp>
-      <p:sp>
-        <p:nvSpPr>
-          <p:cNvPr id="6" name="Rectangle 5"/>
-          <p:cNvSpPr/>
-          <p:nvPr/>
-        </p:nvSpPr>
-        <p:spPr>
-          <a:xfrm>
-            <a:off x="548640" y="2331720"/>
-            <a:ext cx="11064240" cy="3931920"/>
-          </a:xfrm>
-          <a:prstGeom prst="rect">
-            <a:avLst/>
-          </a:prstGeom>
-          <a:solidFill>
-            <a:srgbClr val="1A1A2E"/>
-          </a:solidFill>
-          <a:ln w="12700">
-            <a:solidFill>
-              <a:srgbClr val="2C2C3A"/>
-            </a:solidFill>
-          </a:ln>
-        </p:spPr>
-        <p:style>
-          <a:lnRef idx="1">
-            <a:schemeClr val="accent1"/>
-          </a:lnRef>
-          <a:fillRef idx="3">
-            <a:schemeClr val="accent1"/>
-          </a:fillRef>
-          <a:effectRef idx="2">
-            <a:schemeClr val="accent1"/>
-          </a:effectRef>
-          <a:fontRef idx="minor">
-            <a:schemeClr val="lt1"/>
-          </a:fontRef>
-        </p:style>
-        <p:txBody>
-          <a:bodyPr rtlCol="0" anchor="ctr"/>
-          <a:lstStyle/>
-          <a:p>
-            <a:pPr algn="ctr"/>
-          </a:p>
-        </p:txBody>
-      </p:sp>
-      <p:sp>
-        <p:nvSpPr>
-          <p:cNvPr id="7" name="TextBox 6"/>
-          <p:cNvSpPr txBox="1"/>
-          <p:nvPr/>
-        </p:nvSpPr>
-        <p:spPr>
-          <a:xfrm>
-            <a:off x="914400" y="2560320"/>
-            <a:ext cx="10332720" cy="3566160"/>
-          </a:xfrm>
-          <a:prstGeom prst="rect">
-            <a:avLst/>
-          </a:prstGeom>
-          <a:noFill/>
-        </p:spPr>
-        <p:txBody>
-          <a:bodyPr wrap="square" anchor="t">
-            <a:spAutoFit/>
-          </a:bodyPr>
-          <a:lstStyle/>
-          <a:p>
-            <a:pPr algn="l">
-              <a:spcAft>
-                <a:spcPts val="1000"/>
-              </a:spcAft>
-            </a:pPr>
-            <a:r>
-              <a:rPr sz="1700" b="1">
-                <a:solidFill>
-                  <a:srgbClr val="00BCEB"/>
-                </a:solidFill>
-                <a:latin typeface="Calibri"/>
-              </a:rPr>
-              <a:t>•  </a:t>
-            </a:r>
-            <a:r>
-              <a:rPr sz="1700" b="0">
-                <a:solidFill>
-                  <a:srgbClr val="F2F4F8"/>
-                </a:solidFill>
-                <a:latin typeface="Calibri"/>
-              </a:rPr>
-              <a:t>GTM-primary reporting with a strong dotted line to the CTO/engineering org</a:t>
-            </a:r>
-          </a:p>
-          <a:p>
-            <a:pPr algn="l">
-              <a:spcAft>
-                <a:spcPts val="1000"/>
-              </a:spcAft>
-            </a:pPr>
-            <a:r>
-              <a:rPr sz="1700" b="1">
-                <a:solidFill>
-                  <a:srgbClr val="00BCEB"/>
-                </a:solidFill>
-                <a:latin typeface="Calibri"/>
-              </a:rPr>
-              <a:t>•  </a:t>
-            </a:r>
-            <a:r>
-              <a:rPr sz="1700" b="0">
-                <a:solidFill>
-                  <a:srgbClr val="F2F4F8"/>
-                </a:solidFill>
-                <a:latin typeface="Calibri"/>
-              </a:rPr>
-              <a:t>Keeps it revenue-accountable AND cross-BU neutral</a:t>
-            </a:r>
-          </a:p>
-          <a:p>
-            <a:pPr algn="l">
-              <a:spcAft>
-                <a:spcPts val="1000"/>
-              </a:spcAft>
-            </a:pPr>
-            <a:r>
-              <a:rPr sz="1700" b="1">
-                <a:solidFill>
-                  <a:srgbClr val="00BCEB"/>
-                </a:solidFill>
-                <a:latin typeface="Calibri"/>
-              </a:rPr>
-              <a:t>•  </a:t>
-            </a:r>
-            <a:r>
-              <a:rPr sz="1700" b="0">
-                <a:solidFill>
-                  <a:srgbClr val="F2F4F8"/>
-                </a:solidFill>
-                <a:latin typeface="Calibri"/>
-              </a:rPr>
-              <a:t>RACI: Field CTO accountable for the frame; AE accountable for the account</a:t>
-            </a:r>
-          </a:p>
-        </p:txBody>
-      </p:sp>
-      <p:sp>
-        <p:nvSpPr>
-          <p:cNvPr id="8" name="TextBox 7"/>
-          <p:cNvSpPr txBox="1"/>
-          <p:nvPr/>
-        </p:nvSpPr>
-        <p:spPr>
-          <a:xfrm>
-            <a:off x="548640" y="6419088"/>
-            <a:ext cx="11064240" cy="320040"/>
-          </a:xfrm>
-          <a:prstGeom prst="rect">
-            <a:avLst/>
-          </a:prstGeom>
-          <a:noFill/>
-        </p:spPr>
-        <p:txBody>
-          <a:bodyPr wrap="square" anchor="t">
-            <a:spAutoFit/>
-          </a:bodyPr>
-          <a:lstStyle/>
-          <a:p>
-            <a:pPr algn="l">
-              <a:spcAft>
-                <a:spcPts val="600"/>
-              </a:spcAft>
-            </a:pPr>
-            <a:r>
-              <a:rPr sz="1000" b="0">
-                <a:solidFill>
-                  <a:srgbClr val="9AA3B2"/>
-                </a:solidFill>
-                <a:latin typeface="Calibri"/>
-              </a:rPr>
-              <a:t>Appendix — reserve for Q&amp;A. Illustrative figures.</a:t>
+              <a:t>Detail held in reserve for Q&amp;A</a:t>
             </a:r>
           </a:p>
         </p:txBody>
@@ -8690,7 +8907,7 @@
                 </a:solidFill>
                 <a:latin typeface="Calibri"/>
               </a:rPr>
-              <a:t>APPENDIX · A3</a:t>
+              <a:t>APPENDIX · A1</a:t>
             </a:r>
           </a:p>
         </p:txBody>
@@ -8772,7 +8989,7 @@
                 </a:solidFill>
                 <a:latin typeface="Calibri"/>
               </a:rPr>
-              <a:t>Per-vertical field engagement kits</a:t>
+              <a:t>Role, competencies, and skills matrix</a:t>
             </a:r>
           </a:p>
         </p:txBody>
@@ -8865,7 +9082,7 @@
                 </a:solidFill>
                 <a:latin typeface="Calibri"/>
               </a:rPr>
-              <a:t>Buyers, discovery questions, outcome hypotheses, objection handling</a:t>
+              <a:t>Four competency pillars: business fluency, X-arch depth, exec presence, orchestration</a:t>
             </a:r>
           </a:p>
           <a:p>
@@ -8890,7 +9107,7 @@
                 </a:solidFill>
                 <a:latin typeface="Calibri"/>
               </a:rPr>
-              <a:t>One kit per vertical: Transportation, FinServ, Healthcare, Public Sector</a:t>
+              <a:t>Proficiency targets per domain; deep in ≥2 pillars, conversant in all</a:t>
             </a:r>
           </a:p>
           <a:p>
@@ -8915,7 +9132,7 @@
                 </a:solidFill>
                 <a:latin typeface="Calibri"/>
               </a:rPr>
-              <a:t>Turns the strategy into a field-ready playbook</a:t>
+              <a:t>Deep in one vertical; team covers all four at expert level</a:t>
             </a:r>
           </a:p>
         </p:txBody>
@@ -9445,7 +9662,7 @@
                 </a:solidFill>
                 <a:latin typeface="Calibri"/>
               </a:rPr>
-              <a:t>APPENDIX · A4</a:t>
+              <a:t>APPENDIX · A2</a:t>
             </a:r>
           </a:p>
         </p:txBody>
@@ -9527,7 +9744,7 @@
                 </a:solidFill>
                 <a:latin typeface="Calibri"/>
               </a:rPr>
-              <a:t>OT safety boundary</a:t>
+              <a:t>Org placement and RACI</a:t>
             </a:r>
           </a:p>
         </p:txBody>
@@ -9620,7 +9837,7 @@
                 </a:solidFill>
                 <a:latin typeface="Calibri"/>
               </a:rPr>
-              <a:t>Read-only / passive acquisition for safety-related signals</a:t>
+              <a:t>GTM-primary reporting with a strong dotted line to the CTO/engineering org</a:t>
             </a:r>
           </a:p>
           <a:p>
@@ -9645,7 +9862,7 @@
                 </a:solidFill>
                 <a:latin typeface="Calibri"/>
               </a:rPr>
-              <a:t>Never write config to PLCs/HMIs/DCS/RTUs/SIS; human-in-the-loop response</a:t>
+              <a:t>Keeps it revenue-accountable AND cross-BU neutral</a:t>
             </a:r>
           </a:p>
           <a:p>
@@ -9670,7 +9887,7 @@
                 </a:solidFill>
                 <a:latin typeface="Calibri"/>
               </a:rPr>
-              <a:t>A hard guardrail AND a competitive differentiator that earns OT trust</a:t>
+              <a:t>RACI: Field CTO accountable for the frame; AE accountable for the account</a:t>
             </a:r>
           </a:p>
         </p:txBody>
@@ -9810,7 +10027,7 @@
                 </a:solidFill>
                 <a:latin typeface="Calibri"/>
               </a:rPr>
-              <a:t>APPENDIX · A5</a:t>
+              <a:t>APPENDIX · A3</a:t>
             </a:r>
           </a:p>
         </p:txBody>
@@ -9892,7 +10109,7 @@
                 </a:solidFill>
                 <a:latin typeface="Calibri"/>
               </a:rPr>
-              <a:t>Assumptions register and 3-year P&amp;L</a:t>
+              <a:t>Per-vertical field engagement kits</a:t>
             </a:r>
           </a:p>
         </p:txBody>
@@ -9985,7 +10202,7 @@
                 </a:solidFill>
                 <a:latin typeface="Calibri"/>
               </a:rPr>
-              <a:t>Every financial input (A1–A13) is visible and editable</a:t>
+              <a:t>Buyers, discovery questions, outcome hypotheses, objection handling</a:t>
             </a:r>
           </a:p>
           <a:p>
@@ -10010,7 +10227,7 @@
                 </a:solidFill>
                 <a:latin typeface="Calibri"/>
               </a:rPr>
-              <a:t>3-year scale path with improving ROI multiple</a:t>
+              <a:t>One kit per vertical: Transportation, FinServ, Healthcare, Public Sector</a:t>
             </a:r>
           </a:p>
           <a:p>
@@ -10035,7 +10252,7 @@
                 </a:solidFill>
                 <a:latin typeface="Calibri"/>
               </a:rPr>
-              <a:t>Structure holds; only inputs change when actuals are plugged in</a:t>
+              <a:t>Turns the strategy into a field-ready playbook</a:t>
             </a:r>
           </a:p>
         </p:txBody>
@@ -10175,7 +10392,7 @@
                 </a:solidFill>
                 <a:latin typeface="Calibri"/>
               </a:rPr>
-              <a:t>APPENDIX · A6</a:t>
+              <a:t>APPENDIX · A4</a:t>
             </a:r>
           </a:p>
         </p:txBody>
@@ -10257,7 +10474,7 @@
                 </a:solidFill>
                 <a:latin typeface="Calibri"/>
               </a:rPr>
-              <a:t>Compensation design</a:t>
+              <a:t>OT safety boundary</a:t>
             </a:r>
           </a:p>
         </p:txBody>
@@ -10350,7 +10567,7 @@
                 </a:solidFill>
                 <a:latin typeface="Calibri"/>
               </a:rPr>
-              <a:t>Influence credit is additive — BU sellers keep 100% of product credit</a:t>
+              <a:t>Read-only / passive acquisition for safety-related signals</a:t>
             </a:r>
           </a:p>
           <a:p>
@@ -10375,7 +10592,7 @@
                 </a:solidFill>
                 <a:latin typeface="Calibri"/>
               </a:rPr>
-              <a:t>Weighting: 50% influenced bookings, 20% Splunk attach, 15% leading, 15% MBOs</a:t>
+              <a:t>Never write config to PLCs/HMIs/DCS/RTUs/SIS; human-in-the-loop response</a:t>
             </a:r>
           </a:p>
           <a:p>
@@ -10400,7 +10617,7 @@
                 </a:solidFill>
                 <a:latin typeface="Calibri"/>
               </a:rPr>
-              <a:t>Deal desk arbitrates via the influence ledger</a:t>
+              <a:t>A hard guardrail AND a competitive differentiator that earns OT trust</a:t>
             </a:r>
           </a:p>
         </p:txBody>
@@ -10540,7 +10757,7 @@
                 </a:solidFill>
                 <a:latin typeface="Calibri"/>
               </a:rPr>
-              <a:t>APPENDIX · A7</a:t>
+              <a:t>APPENDIX · A5</a:t>
             </a:r>
           </a:p>
         </p:txBody>
@@ -10622,7 +10839,7 @@
                 </a:solidFill>
                 <a:latin typeface="Calibri"/>
               </a:rPr>
-              <a:t>Competitive framing</a:t>
+              <a:t>Assumptions register and 3-year P&amp;L</a:t>
             </a:r>
           </a:p>
         </p:txBody>
@@ -10715,7 +10932,7 @@
                 </a:solidFill>
                 <a:latin typeface="Calibri"/>
               </a:rPr>
-              <a:t>Point vendors, SIEM/observability specialists, SIs, hyperscalers</a:t>
+              <a:t>Every financial input (A1–A13) is visible and editable</a:t>
             </a:r>
           </a:p>
           <a:p>
@@ -10740,7 +10957,7 @@
                 </a:solidFill>
                 <a:latin typeface="Calibri"/>
               </a:rPr>
-              <a:t>The SI dynamic is the biggest structural risk — co-author the architecture</a:t>
+              <a:t>3-year scale path with improving ROI multiple</a:t>
             </a:r>
           </a:p>
           <a:p>
@@ -10765,7 +10982,7 @@
                 </a:solidFill>
                 <a:latin typeface="Calibri"/>
               </a:rPr>
-              <a:t>Whoever frames the architecture wins the budget</a:t>
+              <a:t>Structure holds; only inputs change when actuals are plugged in</a:t>
             </a:r>
           </a:p>
         </p:txBody>
@@ -10905,6 +11122,736 @@
                 </a:solidFill>
                 <a:latin typeface="Calibri"/>
               </a:rPr>
+              <a:t>APPENDIX · A6</a:t>
+            </a:r>
+          </a:p>
+        </p:txBody>
+      </p:sp>
+      <p:sp>
+        <p:nvSpPr>
+          <p:cNvPr id="4" name="Rectangle 3"/>
+          <p:cNvSpPr/>
+          <p:nvPr/>
+        </p:nvSpPr>
+        <p:spPr>
+          <a:xfrm>
+            <a:off x="548640" y="868680"/>
+            <a:ext cx="1280160" cy="50800"/>
+          </a:xfrm>
+          <a:prstGeom prst="rect">
+            <a:avLst/>
+          </a:prstGeom>
+          <a:solidFill>
+            <a:srgbClr val="00BCEB"/>
+          </a:solidFill>
+          <a:ln>
+            <a:noFill/>
+          </a:ln>
+        </p:spPr>
+        <p:style>
+          <a:lnRef idx="1">
+            <a:schemeClr val="accent1"/>
+          </a:lnRef>
+          <a:fillRef idx="3">
+            <a:schemeClr val="accent1"/>
+          </a:fillRef>
+          <a:effectRef idx="2">
+            <a:schemeClr val="accent1"/>
+          </a:effectRef>
+          <a:fontRef idx="minor">
+            <a:schemeClr val="lt1"/>
+          </a:fontRef>
+        </p:style>
+        <p:txBody>
+          <a:bodyPr rtlCol="0" anchor="ctr"/>
+          <a:lstStyle/>
+          <a:p>
+            <a:pPr algn="ctr"/>
+          </a:p>
+        </p:txBody>
+      </p:sp>
+      <p:sp>
+        <p:nvSpPr>
+          <p:cNvPr id="5" name="TextBox 4"/>
+          <p:cNvSpPr txBox="1"/>
+          <p:nvPr/>
+        </p:nvSpPr>
+        <p:spPr>
+          <a:xfrm>
+            <a:off x="548640" y="1051560"/>
+            <a:ext cx="11064240" cy="1005840"/>
+          </a:xfrm>
+          <a:prstGeom prst="rect">
+            <a:avLst/>
+          </a:prstGeom>
+          <a:noFill/>
+        </p:spPr>
+        <p:txBody>
+          <a:bodyPr wrap="square" anchor="t">
+            <a:spAutoFit/>
+          </a:bodyPr>
+          <a:lstStyle/>
+          <a:p>
+            <a:pPr algn="l">
+              <a:spcAft>
+                <a:spcPts val="600"/>
+              </a:spcAft>
+            </a:pPr>
+            <a:r>
+              <a:rPr sz="2800" b="1">
+                <a:solidFill>
+                  <a:srgbClr val="F2F4F8"/>
+                </a:solidFill>
+                <a:latin typeface="Calibri"/>
+              </a:rPr>
+              <a:t>Compensation design</a:t>
+            </a:r>
+          </a:p>
+        </p:txBody>
+      </p:sp>
+      <p:sp>
+        <p:nvSpPr>
+          <p:cNvPr id="6" name="Rectangle 5"/>
+          <p:cNvSpPr/>
+          <p:nvPr/>
+        </p:nvSpPr>
+        <p:spPr>
+          <a:xfrm>
+            <a:off x="548640" y="2331720"/>
+            <a:ext cx="11064240" cy="3931920"/>
+          </a:xfrm>
+          <a:prstGeom prst="rect">
+            <a:avLst/>
+          </a:prstGeom>
+          <a:solidFill>
+            <a:srgbClr val="1A1A2E"/>
+          </a:solidFill>
+          <a:ln w="12700">
+            <a:solidFill>
+              <a:srgbClr val="2C2C3A"/>
+            </a:solidFill>
+          </a:ln>
+        </p:spPr>
+        <p:style>
+          <a:lnRef idx="1">
+            <a:schemeClr val="accent1"/>
+          </a:lnRef>
+          <a:fillRef idx="3">
+            <a:schemeClr val="accent1"/>
+          </a:fillRef>
+          <a:effectRef idx="2">
+            <a:schemeClr val="accent1"/>
+          </a:effectRef>
+          <a:fontRef idx="minor">
+            <a:schemeClr val="lt1"/>
+          </a:fontRef>
+        </p:style>
+        <p:txBody>
+          <a:bodyPr rtlCol="0" anchor="ctr"/>
+          <a:lstStyle/>
+          <a:p>
+            <a:pPr algn="ctr"/>
+          </a:p>
+        </p:txBody>
+      </p:sp>
+      <p:sp>
+        <p:nvSpPr>
+          <p:cNvPr id="7" name="TextBox 6"/>
+          <p:cNvSpPr txBox="1"/>
+          <p:nvPr/>
+        </p:nvSpPr>
+        <p:spPr>
+          <a:xfrm>
+            <a:off x="914400" y="2560320"/>
+            <a:ext cx="10332720" cy="3566160"/>
+          </a:xfrm>
+          <a:prstGeom prst="rect">
+            <a:avLst/>
+          </a:prstGeom>
+          <a:noFill/>
+        </p:spPr>
+        <p:txBody>
+          <a:bodyPr wrap="square" anchor="t">
+            <a:spAutoFit/>
+          </a:bodyPr>
+          <a:lstStyle/>
+          <a:p>
+            <a:pPr algn="l">
+              <a:spcAft>
+                <a:spcPts val="1000"/>
+              </a:spcAft>
+            </a:pPr>
+            <a:r>
+              <a:rPr sz="1700" b="1">
+                <a:solidFill>
+                  <a:srgbClr val="00BCEB"/>
+                </a:solidFill>
+                <a:latin typeface="Calibri"/>
+              </a:rPr>
+              <a:t>•  </a:t>
+            </a:r>
+            <a:r>
+              <a:rPr sz="1700" b="0">
+                <a:solidFill>
+                  <a:srgbClr val="F2F4F8"/>
+                </a:solidFill>
+                <a:latin typeface="Calibri"/>
+              </a:rPr>
+              <a:t>Influence credit is additive — BU sellers keep 100% of product credit</a:t>
+            </a:r>
+          </a:p>
+          <a:p>
+            <a:pPr algn="l">
+              <a:spcAft>
+                <a:spcPts val="1000"/>
+              </a:spcAft>
+            </a:pPr>
+            <a:r>
+              <a:rPr sz="1700" b="1">
+                <a:solidFill>
+                  <a:srgbClr val="00BCEB"/>
+                </a:solidFill>
+                <a:latin typeface="Calibri"/>
+              </a:rPr>
+              <a:t>•  </a:t>
+            </a:r>
+            <a:r>
+              <a:rPr sz="1700" b="0">
+                <a:solidFill>
+                  <a:srgbClr val="F2F4F8"/>
+                </a:solidFill>
+                <a:latin typeface="Calibri"/>
+              </a:rPr>
+              <a:t>Weighting: 50% influenced bookings, 20% Splunk attach, 15% leading, 15% MBOs</a:t>
+            </a:r>
+          </a:p>
+          <a:p>
+            <a:pPr algn="l">
+              <a:spcAft>
+                <a:spcPts val="1000"/>
+              </a:spcAft>
+            </a:pPr>
+            <a:r>
+              <a:rPr sz="1700" b="1">
+                <a:solidFill>
+                  <a:srgbClr val="00BCEB"/>
+                </a:solidFill>
+                <a:latin typeface="Calibri"/>
+              </a:rPr>
+              <a:t>•  </a:t>
+            </a:r>
+            <a:r>
+              <a:rPr sz="1700" b="0">
+                <a:solidFill>
+                  <a:srgbClr val="F2F4F8"/>
+                </a:solidFill>
+                <a:latin typeface="Calibri"/>
+              </a:rPr>
+              <a:t>Deal desk arbitrates via the influence ledger</a:t>
+            </a:r>
+          </a:p>
+        </p:txBody>
+      </p:sp>
+      <p:sp>
+        <p:nvSpPr>
+          <p:cNvPr id="8" name="TextBox 7"/>
+          <p:cNvSpPr txBox="1"/>
+          <p:nvPr/>
+        </p:nvSpPr>
+        <p:spPr>
+          <a:xfrm>
+            <a:off x="548640" y="6419088"/>
+            <a:ext cx="11064240" cy="320040"/>
+          </a:xfrm>
+          <a:prstGeom prst="rect">
+            <a:avLst/>
+          </a:prstGeom>
+          <a:noFill/>
+        </p:spPr>
+        <p:txBody>
+          <a:bodyPr wrap="square" anchor="t">
+            <a:spAutoFit/>
+          </a:bodyPr>
+          <a:lstStyle/>
+          <a:p>
+            <a:pPr algn="l">
+              <a:spcAft>
+                <a:spcPts val="600"/>
+              </a:spcAft>
+            </a:pPr>
+            <a:r>
+              <a:rPr sz="1000" b="0">
+                <a:solidFill>
+                  <a:srgbClr val="9AA3B2"/>
+                </a:solidFill>
+                <a:latin typeface="Calibri"/>
+              </a:rPr>
+              <a:t>Appendix — reserve for Q&amp;A. Illustrative figures.</a:t>
+            </a:r>
+          </a:p>
+        </p:txBody>
+      </p:sp>
+    </p:spTree>
+  </p:cSld>
+  <p:clrMapOvr>
+    <a:masterClrMapping/>
+  </p:clrMapOvr>
+</p:sld>
+</file>
+
+<file path=ppt/slides/slide25.xml><?xml version="1.0" encoding="utf-8"?>
+<p:sld xmlns:a="http://schemas.openxmlformats.org/drawingml/2006/main" xmlns:p="http://schemas.openxmlformats.org/presentationml/2006/main" xmlns:r="http://schemas.openxmlformats.org/officeDocument/2006/relationships">
+  <p:cSld>
+    <p:spTree>
+      <p:nvGrpSpPr>
+        <p:cNvPr id="1" name=""/>
+        <p:cNvGrpSpPr/>
+        <p:nvPr/>
+      </p:nvGrpSpPr>
+      <p:grpSpPr/>
+      <p:sp>
+        <p:nvSpPr>
+          <p:cNvPr id="2" name="Rectangle 1"/>
+          <p:cNvSpPr/>
+          <p:nvPr/>
+        </p:nvSpPr>
+        <p:spPr>
+          <a:xfrm>
+            <a:off x="0" y="0"/>
+            <a:ext cx="12191695" cy="6858000"/>
+          </a:xfrm>
+          <a:prstGeom prst="rect">
+            <a:avLst/>
+          </a:prstGeom>
+          <a:solidFill>
+            <a:srgbClr val="101014"/>
+          </a:solidFill>
+          <a:ln>
+            <a:noFill/>
+          </a:ln>
+          <a:effectLst/>
+        </p:spPr>
+        <p:style>
+          <a:lnRef idx="1">
+            <a:schemeClr val="accent1"/>
+          </a:lnRef>
+          <a:fillRef idx="3">
+            <a:schemeClr val="accent1"/>
+          </a:fillRef>
+          <a:effectRef idx="2">
+            <a:schemeClr val="accent1"/>
+          </a:effectRef>
+          <a:fontRef idx="minor">
+            <a:schemeClr val="lt1"/>
+          </a:fontRef>
+        </p:style>
+        <p:txBody>
+          <a:bodyPr rtlCol="0" anchor="ctr"/>
+          <a:lstStyle/>
+          <a:p>
+            <a:pPr algn="ctr"/>
+          </a:p>
+        </p:txBody>
+      </p:sp>
+      <p:sp>
+        <p:nvSpPr>
+          <p:cNvPr id="3" name="TextBox 2"/>
+          <p:cNvSpPr txBox="1"/>
+          <p:nvPr/>
+        </p:nvSpPr>
+        <p:spPr>
+          <a:xfrm>
+            <a:off x="548640" y="411480"/>
+            <a:ext cx="11064240" cy="365760"/>
+          </a:xfrm>
+          <a:prstGeom prst="rect">
+            <a:avLst/>
+          </a:prstGeom>
+          <a:noFill/>
+        </p:spPr>
+        <p:txBody>
+          <a:bodyPr wrap="square" anchor="t">
+            <a:spAutoFit/>
+          </a:bodyPr>
+          <a:lstStyle/>
+          <a:p>
+            <a:pPr algn="l">
+              <a:spcAft>
+                <a:spcPts val="600"/>
+              </a:spcAft>
+            </a:pPr>
+            <a:r>
+              <a:rPr sz="1200" b="1">
+                <a:solidFill>
+                  <a:srgbClr val="00BCEB"/>
+                </a:solidFill>
+                <a:latin typeface="Calibri"/>
+              </a:rPr>
+              <a:t>APPENDIX · A7</a:t>
+            </a:r>
+          </a:p>
+        </p:txBody>
+      </p:sp>
+      <p:sp>
+        <p:nvSpPr>
+          <p:cNvPr id="4" name="Rectangle 3"/>
+          <p:cNvSpPr/>
+          <p:nvPr/>
+        </p:nvSpPr>
+        <p:spPr>
+          <a:xfrm>
+            <a:off x="548640" y="868680"/>
+            <a:ext cx="1280160" cy="50800"/>
+          </a:xfrm>
+          <a:prstGeom prst="rect">
+            <a:avLst/>
+          </a:prstGeom>
+          <a:solidFill>
+            <a:srgbClr val="00BCEB"/>
+          </a:solidFill>
+          <a:ln>
+            <a:noFill/>
+          </a:ln>
+        </p:spPr>
+        <p:style>
+          <a:lnRef idx="1">
+            <a:schemeClr val="accent1"/>
+          </a:lnRef>
+          <a:fillRef idx="3">
+            <a:schemeClr val="accent1"/>
+          </a:fillRef>
+          <a:effectRef idx="2">
+            <a:schemeClr val="accent1"/>
+          </a:effectRef>
+          <a:fontRef idx="minor">
+            <a:schemeClr val="lt1"/>
+          </a:fontRef>
+        </p:style>
+        <p:txBody>
+          <a:bodyPr rtlCol="0" anchor="ctr"/>
+          <a:lstStyle/>
+          <a:p>
+            <a:pPr algn="ctr"/>
+          </a:p>
+        </p:txBody>
+      </p:sp>
+      <p:sp>
+        <p:nvSpPr>
+          <p:cNvPr id="5" name="TextBox 4"/>
+          <p:cNvSpPr txBox="1"/>
+          <p:nvPr/>
+        </p:nvSpPr>
+        <p:spPr>
+          <a:xfrm>
+            <a:off x="548640" y="1051560"/>
+            <a:ext cx="11064240" cy="1005840"/>
+          </a:xfrm>
+          <a:prstGeom prst="rect">
+            <a:avLst/>
+          </a:prstGeom>
+          <a:noFill/>
+        </p:spPr>
+        <p:txBody>
+          <a:bodyPr wrap="square" anchor="t">
+            <a:spAutoFit/>
+          </a:bodyPr>
+          <a:lstStyle/>
+          <a:p>
+            <a:pPr algn="l">
+              <a:spcAft>
+                <a:spcPts val="600"/>
+              </a:spcAft>
+            </a:pPr>
+            <a:r>
+              <a:rPr sz="2800" b="1">
+                <a:solidFill>
+                  <a:srgbClr val="F2F4F8"/>
+                </a:solidFill>
+                <a:latin typeface="Calibri"/>
+              </a:rPr>
+              <a:t>Competitive framing</a:t>
+            </a:r>
+          </a:p>
+        </p:txBody>
+      </p:sp>
+      <p:sp>
+        <p:nvSpPr>
+          <p:cNvPr id="6" name="Rectangle 5"/>
+          <p:cNvSpPr/>
+          <p:nvPr/>
+        </p:nvSpPr>
+        <p:spPr>
+          <a:xfrm>
+            <a:off x="548640" y="2331720"/>
+            <a:ext cx="11064240" cy="3931920"/>
+          </a:xfrm>
+          <a:prstGeom prst="rect">
+            <a:avLst/>
+          </a:prstGeom>
+          <a:solidFill>
+            <a:srgbClr val="1A1A2E"/>
+          </a:solidFill>
+          <a:ln w="12700">
+            <a:solidFill>
+              <a:srgbClr val="2C2C3A"/>
+            </a:solidFill>
+          </a:ln>
+        </p:spPr>
+        <p:style>
+          <a:lnRef idx="1">
+            <a:schemeClr val="accent1"/>
+          </a:lnRef>
+          <a:fillRef idx="3">
+            <a:schemeClr val="accent1"/>
+          </a:fillRef>
+          <a:effectRef idx="2">
+            <a:schemeClr val="accent1"/>
+          </a:effectRef>
+          <a:fontRef idx="minor">
+            <a:schemeClr val="lt1"/>
+          </a:fontRef>
+        </p:style>
+        <p:txBody>
+          <a:bodyPr rtlCol="0" anchor="ctr"/>
+          <a:lstStyle/>
+          <a:p>
+            <a:pPr algn="ctr"/>
+          </a:p>
+        </p:txBody>
+      </p:sp>
+      <p:sp>
+        <p:nvSpPr>
+          <p:cNvPr id="7" name="TextBox 6"/>
+          <p:cNvSpPr txBox="1"/>
+          <p:nvPr/>
+        </p:nvSpPr>
+        <p:spPr>
+          <a:xfrm>
+            <a:off x="914400" y="2560320"/>
+            <a:ext cx="10332720" cy="3566160"/>
+          </a:xfrm>
+          <a:prstGeom prst="rect">
+            <a:avLst/>
+          </a:prstGeom>
+          <a:noFill/>
+        </p:spPr>
+        <p:txBody>
+          <a:bodyPr wrap="square" anchor="t">
+            <a:spAutoFit/>
+          </a:bodyPr>
+          <a:lstStyle/>
+          <a:p>
+            <a:pPr algn="l">
+              <a:spcAft>
+                <a:spcPts val="1000"/>
+              </a:spcAft>
+            </a:pPr>
+            <a:r>
+              <a:rPr sz="1700" b="1">
+                <a:solidFill>
+                  <a:srgbClr val="00BCEB"/>
+                </a:solidFill>
+                <a:latin typeface="Calibri"/>
+              </a:rPr>
+              <a:t>•  </a:t>
+            </a:r>
+            <a:r>
+              <a:rPr sz="1700" b="0">
+                <a:solidFill>
+                  <a:srgbClr val="F2F4F8"/>
+                </a:solidFill>
+                <a:latin typeface="Calibri"/>
+              </a:rPr>
+              <a:t>Point vendors, SIEM/observability specialists, SIs, hyperscalers</a:t>
+            </a:r>
+          </a:p>
+          <a:p>
+            <a:pPr algn="l">
+              <a:spcAft>
+                <a:spcPts val="1000"/>
+              </a:spcAft>
+            </a:pPr>
+            <a:r>
+              <a:rPr sz="1700" b="1">
+                <a:solidFill>
+                  <a:srgbClr val="00BCEB"/>
+                </a:solidFill>
+                <a:latin typeface="Calibri"/>
+              </a:rPr>
+              <a:t>•  </a:t>
+            </a:r>
+            <a:r>
+              <a:rPr sz="1700" b="0">
+                <a:solidFill>
+                  <a:srgbClr val="F2F4F8"/>
+                </a:solidFill>
+                <a:latin typeface="Calibri"/>
+              </a:rPr>
+              <a:t>The SI dynamic is the biggest structural risk — co-author the architecture</a:t>
+            </a:r>
+          </a:p>
+          <a:p>
+            <a:pPr algn="l">
+              <a:spcAft>
+                <a:spcPts val="1000"/>
+              </a:spcAft>
+            </a:pPr>
+            <a:r>
+              <a:rPr sz="1700" b="1">
+                <a:solidFill>
+                  <a:srgbClr val="00BCEB"/>
+                </a:solidFill>
+                <a:latin typeface="Calibri"/>
+              </a:rPr>
+              <a:t>•  </a:t>
+            </a:r>
+            <a:r>
+              <a:rPr sz="1700" b="0">
+                <a:solidFill>
+                  <a:srgbClr val="F2F4F8"/>
+                </a:solidFill>
+                <a:latin typeface="Calibri"/>
+              </a:rPr>
+              <a:t>Whoever frames the architecture wins the budget</a:t>
+            </a:r>
+          </a:p>
+        </p:txBody>
+      </p:sp>
+      <p:sp>
+        <p:nvSpPr>
+          <p:cNvPr id="8" name="TextBox 7"/>
+          <p:cNvSpPr txBox="1"/>
+          <p:nvPr/>
+        </p:nvSpPr>
+        <p:spPr>
+          <a:xfrm>
+            <a:off x="548640" y="6419088"/>
+            <a:ext cx="11064240" cy="320040"/>
+          </a:xfrm>
+          <a:prstGeom prst="rect">
+            <a:avLst/>
+          </a:prstGeom>
+          <a:noFill/>
+        </p:spPr>
+        <p:txBody>
+          <a:bodyPr wrap="square" anchor="t">
+            <a:spAutoFit/>
+          </a:bodyPr>
+          <a:lstStyle/>
+          <a:p>
+            <a:pPr algn="l">
+              <a:spcAft>
+                <a:spcPts val="600"/>
+              </a:spcAft>
+            </a:pPr>
+            <a:r>
+              <a:rPr sz="1000" b="0">
+                <a:solidFill>
+                  <a:srgbClr val="9AA3B2"/>
+                </a:solidFill>
+                <a:latin typeface="Calibri"/>
+              </a:rPr>
+              <a:t>Appendix — reserve for Q&amp;A. Illustrative figures.</a:t>
+            </a:r>
+          </a:p>
+        </p:txBody>
+      </p:sp>
+    </p:spTree>
+  </p:cSld>
+  <p:clrMapOvr>
+    <a:masterClrMapping/>
+  </p:clrMapOvr>
+</p:sld>
+</file>
+
+<file path=ppt/slides/slide26.xml><?xml version="1.0" encoding="utf-8"?>
+<p:sld xmlns:a="http://schemas.openxmlformats.org/drawingml/2006/main" xmlns:p="http://schemas.openxmlformats.org/presentationml/2006/main" xmlns:r="http://schemas.openxmlformats.org/officeDocument/2006/relationships">
+  <p:cSld>
+    <p:spTree>
+      <p:nvGrpSpPr>
+        <p:cNvPr id="1" name=""/>
+        <p:cNvGrpSpPr/>
+        <p:nvPr/>
+      </p:nvGrpSpPr>
+      <p:grpSpPr/>
+      <p:sp>
+        <p:nvSpPr>
+          <p:cNvPr id="2" name="Rectangle 1"/>
+          <p:cNvSpPr/>
+          <p:nvPr/>
+        </p:nvSpPr>
+        <p:spPr>
+          <a:xfrm>
+            <a:off x="0" y="0"/>
+            <a:ext cx="12191695" cy="6858000"/>
+          </a:xfrm>
+          <a:prstGeom prst="rect">
+            <a:avLst/>
+          </a:prstGeom>
+          <a:solidFill>
+            <a:srgbClr val="101014"/>
+          </a:solidFill>
+          <a:ln>
+            <a:noFill/>
+          </a:ln>
+          <a:effectLst/>
+        </p:spPr>
+        <p:style>
+          <a:lnRef idx="1">
+            <a:schemeClr val="accent1"/>
+          </a:lnRef>
+          <a:fillRef idx="3">
+            <a:schemeClr val="accent1"/>
+          </a:fillRef>
+          <a:effectRef idx="2">
+            <a:schemeClr val="accent1"/>
+          </a:effectRef>
+          <a:fontRef idx="minor">
+            <a:schemeClr val="lt1"/>
+          </a:fontRef>
+        </p:style>
+        <p:txBody>
+          <a:bodyPr rtlCol="0" anchor="ctr"/>
+          <a:lstStyle/>
+          <a:p>
+            <a:pPr algn="ctr"/>
+          </a:p>
+        </p:txBody>
+      </p:sp>
+      <p:sp>
+        <p:nvSpPr>
+          <p:cNvPr id="3" name="TextBox 2"/>
+          <p:cNvSpPr txBox="1"/>
+          <p:nvPr/>
+        </p:nvSpPr>
+        <p:spPr>
+          <a:xfrm>
+            <a:off x="548640" y="411480"/>
+            <a:ext cx="11064240" cy="365760"/>
+          </a:xfrm>
+          <a:prstGeom prst="rect">
+            <a:avLst/>
+          </a:prstGeom>
+          <a:noFill/>
+        </p:spPr>
+        <p:txBody>
+          <a:bodyPr wrap="square" anchor="t">
+            <a:spAutoFit/>
+          </a:bodyPr>
+          <a:lstStyle/>
+          <a:p>
+            <a:pPr algn="l">
+              <a:spcAft>
+                <a:spcPts val="600"/>
+              </a:spcAft>
+            </a:pPr>
+            <a:r>
+              <a:rPr sz="1200" b="1">
+                <a:solidFill>
+                  <a:srgbClr val="00BCEB"/>
+                </a:solidFill>
+                <a:latin typeface="Calibri"/>
+              </a:rPr>
               <a:t>APPENDIX · A8</a:t>
             </a:r>
           </a:p>
@@ -12830,7 +13777,7 @@
                 </a:solidFill>
                 <a:latin typeface="Calibri"/>
               </a:rPr>
-              <a:t>IN PRACTICE</a:t>
+              <a:t>EXTENDING THE MODEL</a:t>
             </a:r>
           </a:p>
         </p:txBody>
@@ -12912,7 +13859,7 @@
                 </a:solidFill>
                 <a:latin typeface="Calibri"/>
               </a:rPr>
-              <a:t>One frame, one architecture, one strategic relationship</a:t>
+              <a:t>Black Ops: an elite tiger team for the accounts nobody else can crack</a:t>
             </a:r>
           </a:p>
         </p:txBody>
@@ -13005,7 +13952,7 @@
                 </a:solidFill>
                 <a:latin typeface="Calibri"/>
               </a:rPr>
-              <a:t>Siloed: 3 sellers call on 3 managers about 3 disconnected deals</a:t>
+              <a:t>The Field CTO group runs the marathon; Black Ops runs the sprint</a:t>
             </a:r>
           </a:p>
           <a:p>
@@ -13030,7 +13977,7 @@
                 </a:solidFill>
                 <a:latin typeface="Calibri"/>
               </a:rPr>
-              <a:t>X-Arch: one CxO session framed as 'keep cargo moving under attack'</a:t>
+              <a:t>Parachutes into stalled whales / SI-locked / narrow-window accounts</a:t>
             </a:r>
           </a:p>
           <a:p>
@@ -13055,7 +14002,7 @@
                 </a:solidFill>
                 <a:latin typeface="Calibri"/>
               </a:rPr>
-              <a:t>One reference architecture: passive OT + segmentation + SD-WAN + modern SOC</a:t>
+              <a:t>Mission-scoped, time-boxed (60–120 days); breaks the account open, then HANDS BACK</a:t>
             </a:r>
           </a:p>
           <a:p>
@@ -13080,7 +14027,7 @@
                 </a:solidFill>
                 <a:latin typeface="Calibri"/>
               </a:rPr>
-              <a:t>Result: a larger, multi-year program the customer co-authored</a:t>
+              <a:t>Ethical and above-board; all OT-safety and read-only guardrails still apply</a:t>
             </a:r>
           </a:p>
         </p:txBody>
@@ -13220,7 +14167,7 @@
                 </a:solidFill>
                 <a:latin typeface="Calibri"/>
               </a:rPr>
-              <a:t>FOCUS · ARCHITECTURES</a:t>
+              <a:t>IN PRACTICE</a:t>
             </a:r>
           </a:p>
         </p:txBody>
@@ -13302,7 +14249,7 @@
                 </a:solidFill>
                 <a:latin typeface="Calibri"/>
               </a:rPr>
-              <a:t>We lead with the three highest-attach architectures, plus one adjacency</a:t>
+              <a:t>One frame, one architecture, one strategic relationship</a:t>
             </a:r>
           </a:p>
         </p:txBody>
@@ -13395,7 +14342,7 @@
                 </a:solidFill>
                 <a:latin typeface="Calibri"/>
               </a:rPr>
-              <a:t>Secure Networking — Catalyst/Meraki/SD-WAN + Firewall/ISE/XDR/Duo</a:t>
+              <a:t>Siloed: 3 sellers call on 3 managers about 3 disconnected deals</a:t>
             </a:r>
           </a:p>
           <a:p>
@@ -13420,7 +14367,7 @@
                 </a:solidFill>
                 <a:latin typeface="Calibri"/>
               </a:rPr>
-              <a:t>Full-Stack Observability &amp; Data — Splunk, ThousandEyes, AppDynamics</a:t>
+              <a:t>X-Arch: one CxO session framed as 'keep cargo moving under attack'</a:t>
             </a:r>
           </a:p>
           <a:p>
@@ -13445,7 +14392,7 @@
                 </a:solidFill>
                 <a:latin typeface="Calibri"/>
               </a:rPr>
-              <a:t>Resilience &amp; Security Operations — Splunk ES + XDR + SOAR</a:t>
+              <a:t>One reference architecture: passive OT + segmentation + SD-WAN + modern SOC</a:t>
             </a:r>
           </a:p>
           <a:p>
@@ -13470,7 +14417,7 @@
                 </a:solidFill>
                 <a:latin typeface="Calibri"/>
               </a:rPr>
-              <a:t>(+1) AI-Ready Infrastructure — UCS/Nexus/AI PODs as pull-through</a:t>
+              <a:t>Result: a larger, multi-year program the customer co-authored</a:t>
             </a:r>
           </a:p>
         </p:txBody>
@@ -13610,7 +14557,7 @@
                 </a:solidFill>
                 <a:latin typeface="Calibri"/>
               </a:rPr>
-              <a:t>FOCUS · VERTICALS</a:t>
+              <a:t>FOCUS · ARCHITECTURES</a:t>
             </a:r>
           </a:p>
         </p:txBody>
@@ -13692,7 +14639,7 @@
                 </a:solidFill>
                 <a:latin typeface="Calibri"/>
               </a:rPr>
-              <a:t>Four verticals chosen for cross-attach and regulatory pull</a:t>
+              <a:t>We lead with the three highest-attach architectures, plus one adjacency</a:t>
             </a:r>
           </a:p>
         </p:txBody>
@@ -13785,7 +14732,7 @@
                 </a:solidFill>
                 <a:latin typeface="Calibri"/>
               </a:rPr>
-              <a:t>Transportation &amp; Logistics — distributed sites, IoT, transport-OT (NIS2)</a:t>
+              <a:t>Secure Networking — Catalyst/Meraki/SD-WAN + Firewall/ISE/XDR/Duo</a:t>
             </a:r>
           </a:p>
           <a:p>
@@ -13810,7 +14757,7 @@
                 </a:solidFill>
                 <a:latin typeface="Calibri"/>
               </a:rPr>
-              <a:t>Financial Services — resilience (DORA), fraud, SecOps, observability</a:t>
+              <a:t>Full-Stack Observability &amp; Data — Splunk, ThousandEyes, AppDynamics</a:t>
             </a:r>
           </a:p>
           <a:p>
@@ -13835,7 +14782,7 @@
                 </a:solidFill>
                 <a:latin typeface="Calibri"/>
               </a:rPr>
-              <a:t>Healthcare — IoMT security, clinical-app observability, HIPAA</a:t>
+              <a:t>Resilience &amp; Security Operations — Splunk ES + XDR + SOAR</a:t>
             </a:r>
           </a:p>
           <a:p>
@@ -13860,7 +14807,7 @@
                 </a:solidFill>
                 <a:latin typeface="Calibri"/>
               </a:rPr>
-              <a:t>Public Sector / Critical Infrastructure — NERC-CIP/NIS2, SOC modernization</a:t>
+              <a:t>(+1) AI-Ready Infrastructure — UCS/Nexus/AI PODs as pull-through</a:t>
             </a:r>
           </a:p>
         </p:txBody>

--- a/Field-CTO-XArch-Business-Case.pptx
+++ b/Field-CTO-XArch-Business-Case.pptx
@@ -27,10 +27,6 @@
     <p:sldId id="275" r:id="rId27"/>
     <p:sldId id="276" r:id="rId28"/>
     <p:sldId id="277" r:id="rId29"/>
-    <p:sldId id="278" r:id="rId30"/>
-    <p:sldId id="279" r:id="rId31"/>
-    <p:sldId id="280" r:id="rId32"/>
-    <p:sldId id="281" r:id="rId33"/>
   </p:sldIdLst>
   <p:sldSz cx="12191695" cy="6858000" type="screen4x3"/>
   <p:notesSz cx="6858000" cy="9144000"/>
@@ -597,7 +593,7 @@
           <a:lstStyle/>
           <a:p>
             <a:r>
-              <a:t>Chosen on three criteria: high cross-attach, strong regulatory/resilience pull, and joint Cisco+Splunk strength. The list is swappable without changing the operating design. Source: 02 §5; 04 master matrix.</a:t>
+              <a:t>The money slide. Anchor on break-even (~$9M bookings, about five deals, covers the entire $5.4M cost); everything above is upside. All three scenarios clear break-even — the question is pace, not payback. Illustrative and parameterized. Source: 01 §6; 06 §2–3, §5.</a:t>
             </a:r>
           </a:p>
         </p:txBody>
@@ -667,7 +663,7 @@
           <a:lstStyle/>
           <a:p>
             <a:r>
-              <a:t>Show this is systematized, not dependent on a few heroes. The play library codifies the knowledge so the motion scales and survives key-person risk. Source: 05 §1–2.</a:t>
+              <a:t>State the ask plainly and immediately bound the downside: small, senior team; defined spend; a real stop gate at Q3. Ask for the decision. Source: 01 §5; 06 §1.</a:t>
             </a:r>
           </a:p>
         </p:txBody>
@@ -737,7 +733,7 @@
           <a:lstStyle/>
           <a:p>
             <a:r>
-              <a:t>The end-to-end proof. Walk the transformation: stalled + SI-locked → executive breakthrough → one co-authored architecture → multi-year program. Stress the OT safety boundary as the trust-winner with airport engineering. Source: 10.</a:t>
+              <a:t>Address the skeptic. We measure with control accounts, so influence is proven not asserted; and we can stop at Q3 if the deltas aren't there. Source: 07 §1–3; 05 §7.</a:t>
             </a:r>
           </a:p>
         </p:txBody>
@@ -807,7 +803,7 @@
           <a:lstStyle/>
           <a:p>
             <a:r>
-              <a:t>The money slide. Anchor on break-even: ~$9M bookings (about five deals) covers the entire $5.4M cost; everything above is upside. Reinforce these are illustrative and parameterized. Source: 01 §6; 06 §2–3.</a:t>
+              <a:t>Close with a clear call to action and a concrete near-term timeline so approval feels actionable, not open-ended. Restate: bounded downside, differentiated upside. Ask for the yes. Source: 01 §9; README one-screen summary.</a:t>
             </a:r>
           </a:p>
         </p:txBody>
@@ -877,7 +873,7 @@
           <a:lstStyle/>
           <a:p>
             <a:r>
-              <a:t>State the ask plainly and immediately bound the downside: small, senior team; defined spend; a real stop gate at Q3. Ask for the decision. Source: 01 §5; 06 §1.</a:t>
+              <a:t>Use these only if the room asks. Don't present them by default.</a:t>
             </a:r>
           </a:p>
         </p:txBody>
@@ -947,7 +943,7 @@
           <a:lstStyle/>
           <a:p>
             <a:r>
-              <a:t>De-risk the financials. The three scenarios all clear break-even; the difference is how fast we scale, not whether it pays back. Source: 06 §5.</a:t>
+              <a:t>Detail for HR/org-design questions. Source: 03 §1–3.</a:t>
             </a:r>
           </a:p>
         </p:txBody>
@@ -1017,7 +1013,7 @@
           <a:lstStyle/>
           <a:p>
             <a:r>
-              <a:t>Address the skeptic. We measure with control accounts, so influence is proven not asserted; and we can stop at Q3 if the deltas aren't there. Source: 07 §1–3; 05 §7.</a:t>
+              <a:t>For 'where does it sit / who owns what' questions. Source: 03 §5, §8.</a:t>
             </a:r>
           </a:p>
         </p:txBody>
@@ -1087,7 +1083,7 @@
           <a:lstStyle/>
           <a:p>
             <a:r>
-              <a:t>Close with a clear call to action and a concrete near-term timeline so approval feels actionable, not open-ended. Restate: bounded downside, differentiated upside. Ask for the yes. Source: 01 §9; README one-screen summary.</a:t>
+              <a:t>For 'how do we actually sell this' questions. Source: 04 §1–4.</a:t>
             </a:r>
           </a:p>
         </p:txBody>
@@ -1157,7 +1153,7 @@
           <a:lstStyle/>
           <a:p>
             <a:r>
-              <a:t>Use these only if the room asks. Don't present them by default.</a:t>
+              <a:t>For OT/operations stakeholders. Source: 04 OT safety boundary.</a:t>
             </a:r>
           </a:p>
         </p:txBody>
@@ -1227,7 +1223,7 @@
           <a:lstStyle/>
           <a:p>
             <a:r>
-              <a:t>Detail for HR/org-design questions. Source: 03 §1–3.</a:t>
+              <a:t>For finance deep-dives. Source: 06 §0, §4.</a:t>
             </a:r>
           </a:p>
         </p:txBody>
@@ -1297,7 +1293,7 @@
           <a:lstStyle/>
           <a:p>
             <a:r>
-              <a:t>The core tension: portfolio completeness without a motion to sell it as one. Land the line: 'the customer experiences four Cisco conversations, not one.' This is why deals stay small and Splunk synergy is under-realized. Source: 01 §1.</a:t>
+              <a:t>The core tension: portfolio completeness without a motion to sell it as one. Land the line: 'the customer experiences four Cisco conversations, not one.' Then make inaction concrete: the GAP between a flat renewal and an X-Arch reframe, repeated across ~50 strategic accounts a year, is recurring, not one-time. Source: 01 §1 (problem + cost-of-inaction box).</a:t>
             </a:r>
           </a:p>
         </p:txBody>
@@ -1367,7 +1363,7 @@
           <a:lstStyle/>
           <a:p>
             <a:r>
-              <a:t>For 'where does it sit / who owns what' questions. Source: 03 §5, §8.</a:t>
+              <a:t>For comp/quota questions. Source: 05 §6.</a:t>
             </a:r>
           </a:p>
         </p:txBody>
@@ -1437,7 +1433,7 @@
           <a:lstStyle/>
           <a:p>
             <a:r>
-              <a:t>For 'how do we actually sell this' questions. Source: 04 §1–4.</a:t>
+              <a:t>For competitive/positioning questions. Source: 02 §7.</a:t>
             </a:r>
           </a:p>
         </p:txBody>
@@ -1507,286 +1503,6 @@
           <a:lstStyle/>
           <a:p>
             <a:r>
-              <a:t>For OT/operations stakeholders. Source: 04 OT safety boundary.</a:t>
-            </a:r>
-          </a:p>
-        </p:txBody>
-      </p:sp>
-      <p:sp>
-        <p:nvSpPr>
-          <p:cNvPr id="4" name="Slide Number Placeholder 3"/>
-          <p:cNvSpPr>
-            <a:spLocks noGrp="1"/>
-          </p:cNvSpPr>
-          <p:nvPr>
-            <p:ph type="sldNum" idx="5" sz="quarter"/>
-          </p:nvPr>
-        </p:nvSpPr>
-        <p:spPr/>
-      </p:sp>
-    </p:spTree>
-  </p:cSld>
-  <p:clrMapOvr>
-    <a:masterClrMapping/>
-  </p:clrMapOvr>
-</p:notes>
-</file>
-
-<file path=ppt/notesSlides/notesSlide23.xml><?xml version="1.0" encoding="utf-8"?>
-<p:notes xmlns:a="http://schemas.openxmlformats.org/drawingml/2006/main" xmlns:p="http://schemas.openxmlformats.org/presentationml/2006/main" xmlns:r="http://schemas.openxmlformats.org/officeDocument/2006/relationships">
-  <p:cSld>
-    <p:spTree>
-      <p:nvGrpSpPr>
-        <p:cNvPr id="1" name=""/>
-        <p:cNvGrpSpPr/>
-        <p:nvPr/>
-      </p:nvGrpSpPr>
-      <p:grpSpPr>
-        <a:xfrm>
-          <a:off x="0" y="0"/>
-          <a:ext cx="0" cy="0"/>
-          <a:chOff x="0" y="0"/>
-          <a:chExt cx="0" cy="0"/>
-        </a:xfrm>
-      </p:grpSpPr>
-      <p:sp>
-        <p:nvSpPr>
-          <p:cNvPr id="2" name="Slide Image Placeholder 1"/>
-          <p:cNvSpPr>
-            <a:spLocks noGrp="1"/>
-          </p:cNvSpPr>
-          <p:nvPr>
-            <p:ph type="sldImg" idx="2"/>
-          </p:nvPr>
-        </p:nvSpPr>
-        <p:spPr/>
-      </p:sp>
-      <p:sp>
-        <p:nvSpPr>
-          <p:cNvPr id="3" name="Notes Placeholder 2"/>
-          <p:cNvSpPr>
-            <a:spLocks noGrp="1"/>
-          </p:cNvSpPr>
-          <p:nvPr>
-            <p:ph type="body" idx="3" sz="quarter"/>
-          </p:nvPr>
-        </p:nvSpPr>
-        <p:spPr/>
-        <p:txBody>
-          <a:bodyPr/>
-          <a:lstStyle/>
-          <a:p>
-            <a:r>
-              <a:t>For finance deep-dives. Source: 06 §0, §4.</a:t>
-            </a:r>
-          </a:p>
-        </p:txBody>
-      </p:sp>
-      <p:sp>
-        <p:nvSpPr>
-          <p:cNvPr id="4" name="Slide Number Placeholder 3"/>
-          <p:cNvSpPr>
-            <a:spLocks noGrp="1"/>
-          </p:cNvSpPr>
-          <p:nvPr>
-            <p:ph type="sldNum" idx="5" sz="quarter"/>
-          </p:nvPr>
-        </p:nvSpPr>
-        <p:spPr/>
-      </p:sp>
-    </p:spTree>
-  </p:cSld>
-  <p:clrMapOvr>
-    <a:masterClrMapping/>
-  </p:clrMapOvr>
-</p:notes>
-</file>
-
-<file path=ppt/notesSlides/notesSlide24.xml><?xml version="1.0" encoding="utf-8"?>
-<p:notes xmlns:a="http://schemas.openxmlformats.org/drawingml/2006/main" xmlns:p="http://schemas.openxmlformats.org/presentationml/2006/main" xmlns:r="http://schemas.openxmlformats.org/officeDocument/2006/relationships">
-  <p:cSld>
-    <p:spTree>
-      <p:nvGrpSpPr>
-        <p:cNvPr id="1" name=""/>
-        <p:cNvGrpSpPr/>
-        <p:nvPr/>
-      </p:nvGrpSpPr>
-      <p:grpSpPr>
-        <a:xfrm>
-          <a:off x="0" y="0"/>
-          <a:ext cx="0" cy="0"/>
-          <a:chOff x="0" y="0"/>
-          <a:chExt cx="0" cy="0"/>
-        </a:xfrm>
-      </p:grpSpPr>
-      <p:sp>
-        <p:nvSpPr>
-          <p:cNvPr id="2" name="Slide Image Placeholder 1"/>
-          <p:cNvSpPr>
-            <a:spLocks noGrp="1"/>
-          </p:cNvSpPr>
-          <p:nvPr>
-            <p:ph type="sldImg" idx="2"/>
-          </p:nvPr>
-        </p:nvSpPr>
-        <p:spPr/>
-      </p:sp>
-      <p:sp>
-        <p:nvSpPr>
-          <p:cNvPr id="3" name="Notes Placeholder 2"/>
-          <p:cNvSpPr>
-            <a:spLocks noGrp="1"/>
-          </p:cNvSpPr>
-          <p:nvPr>
-            <p:ph type="body" idx="3" sz="quarter"/>
-          </p:nvPr>
-        </p:nvSpPr>
-        <p:spPr/>
-        <p:txBody>
-          <a:bodyPr/>
-          <a:lstStyle/>
-          <a:p>
-            <a:r>
-              <a:t>For comp/quota questions. Source: 05 §6.</a:t>
-            </a:r>
-          </a:p>
-        </p:txBody>
-      </p:sp>
-      <p:sp>
-        <p:nvSpPr>
-          <p:cNvPr id="4" name="Slide Number Placeholder 3"/>
-          <p:cNvSpPr>
-            <a:spLocks noGrp="1"/>
-          </p:cNvSpPr>
-          <p:nvPr>
-            <p:ph type="sldNum" idx="5" sz="quarter"/>
-          </p:nvPr>
-        </p:nvSpPr>
-        <p:spPr/>
-      </p:sp>
-    </p:spTree>
-  </p:cSld>
-  <p:clrMapOvr>
-    <a:masterClrMapping/>
-  </p:clrMapOvr>
-</p:notes>
-</file>
-
-<file path=ppt/notesSlides/notesSlide25.xml><?xml version="1.0" encoding="utf-8"?>
-<p:notes xmlns:a="http://schemas.openxmlformats.org/drawingml/2006/main" xmlns:p="http://schemas.openxmlformats.org/presentationml/2006/main" xmlns:r="http://schemas.openxmlformats.org/officeDocument/2006/relationships">
-  <p:cSld>
-    <p:spTree>
-      <p:nvGrpSpPr>
-        <p:cNvPr id="1" name=""/>
-        <p:cNvGrpSpPr/>
-        <p:nvPr/>
-      </p:nvGrpSpPr>
-      <p:grpSpPr>
-        <a:xfrm>
-          <a:off x="0" y="0"/>
-          <a:ext cx="0" cy="0"/>
-          <a:chOff x="0" y="0"/>
-          <a:chExt cx="0" cy="0"/>
-        </a:xfrm>
-      </p:grpSpPr>
-      <p:sp>
-        <p:nvSpPr>
-          <p:cNvPr id="2" name="Slide Image Placeholder 1"/>
-          <p:cNvSpPr>
-            <a:spLocks noGrp="1"/>
-          </p:cNvSpPr>
-          <p:nvPr>
-            <p:ph type="sldImg" idx="2"/>
-          </p:nvPr>
-        </p:nvSpPr>
-        <p:spPr/>
-      </p:sp>
-      <p:sp>
-        <p:nvSpPr>
-          <p:cNvPr id="3" name="Notes Placeholder 2"/>
-          <p:cNvSpPr>
-            <a:spLocks noGrp="1"/>
-          </p:cNvSpPr>
-          <p:nvPr>
-            <p:ph type="body" idx="3" sz="quarter"/>
-          </p:nvPr>
-        </p:nvSpPr>
-        <p:spPr/>
-        <p:txBody>
-          <a:bodyPr/>
-          <a:lstStyle/>
-          <a:p>
-            <a:r>
-              <a:t>For competitive/positioning questions. Source: 02 §7.</a:t>
-            </a:r>
-          </a:p>
-        </p:txBody>
-      </p:sp>
-      <p:sp>
-        <p:nvSpPr>
-          <p:cNvPr id="4" name="Slide Number Placeholder 3"/>
-          <p:cNvSpPr>
-            <a:spLocks noGrp="1"/>
-          </p:cNvSpPr>
-          <p:nvPr>
-            <p:ph type="sldNum" idx="5" sz="quarter"/>
-          </p:nvPr>
-        </p:nvSpPr>
-        <p:spPr/>
-      </p:sp>
-    </p:spTree>
-  </p:cSld>
-  <p:clrMapOvr>
-    <a:masterClrMapping/>
-  </p:clrMapOvr>
-</p:notes>
-</file>
-
-<file path=ppt/notesSlides/notesSlide26.xml><?xml version="1.0" encoding="utf-8"?>
-<p:notes xmlns:a="http://schemas.openxmlformats.org/drawingml/2006/main" xmlns:p="http://schemas.openxmlformats.org/presentationml/2006/main" xmlns:r="http://schemas.openxmlformats.org/officeDocument/2006/relationships">
-  <p:cSld>
-    <p:spTree>
-      <p:nvGrpSpPr>
-        <p:cNvPr id="1" name=""/>
-        <p:cNvGrpSpPr/>
-        <p:nvPr/>
-      </p:nvGrpSpPr>
-      <p:grpSpPr>
-        <a:xfrm>
-          <a:off x="0" y="0"/>
-          <a:ext cx="0" cy="0"/>
-          <a:chOff x="0" y="0"/>
-          <a:chExt cx="0" cy="0"/>
-        </a:xfrm>
-      </p:grpSpPr>
-      <p:sp>
-        <p:nvSpPr>
-          <p:cNvPr id="2" name="Slide Image Placeholder 1"/>
-          <p:cNvSpPr>
-            <a:spLocks noGrp="1"/>
-          </p:cNvSpPr>
-          <p:nvPr>
-            <p:ph type="sldImg" idx="2"/>
-          </p:nvPr>
-        </p:nvSpPr>
-        <p:spPr/>
-      </p:sp>
-      <p:sp>
-        <p:nvSpPr>
-          <p:cNvPr id="3" name="Notes Placeholder 2"/>
-          <p:cNvSpPr>
-            <a:spLocks noGrp="1"/>
-          </p:cNvSpPr>
-          <p:nvPr>
-            <p:ph type="body" idx="3" sz="quarter"/>
-          </p:nvPr>
-        </p:nvSpPr>
-        <p:spPr/>
-        <p:txBody>
-          <a:bodyPr/>
-          <a:lstStyle/>
-          <a:p>
-            <a:r>
               <a:t>For risk/governance questions. Source: 07 §3.</a:t>
             </a:r>
           </a:p>
@@ -1857,7 +1573,7 @@
           <a:lstStyle/>
           <a:p>
             <a:r>
-              <a:t>Make inaction concrete and expensive. The number that matters is the GAP between the two paths, repeated across the strategic base. Emphasize this is recurring, not one-time. Source: 01 §1 (cost-of-inaction box).</a:t>
+              <a:t>Urgency without hype. The integrations are real and fresh; consolidation and AI builds create cross-architecture entry points right now. First mover on the motion compounds. Source: 01 §2.</a:t>
             </a:r>
           </a:p>
         </p:txBody>
@@ -1927,7 +1643,7 @@
           <a:lstStyle/>
           <a:p>
             <a:r>
-              <a:t>Urgency without hype. The integrations are real and fresh; consolidation and AI builds are creating cross-architecture entry points right now. First mover on the motion compounds. Source: 01 §2.</a:t>
+              <a:t>The story competitors can't match end-to-end. Walk the loop once, slowly, and point at the arrows — that's where the incremental value lives. Source: 02 §2.</a:t>
             </a:r>
           </a:p>
         </p:txBody>
@@ -1997,7 +1713,7 @@
           <a:lstStyle/>
           <a:p>
             <a:r>
-              <a:t>This is the story competitors can't match end-to-end. Walk the loop once, slowly, and point at the arrows: that's where the incremental value lives. Source: 02 §2.</a:t>
+              <a:t>Define the role crisply and pre-empt the 'another overlay team' objection: this is leverage that makes existing teams MORE productive. Thin, senior, orchestration-first. Source: 01 §3; 03 §1.</a:t>
             </a:r>
           </a:p>
         </p:txBody>
@@ -2067,7 +1783,7 @@
           <a:lstStyle/>
           <a:p>
             <a:r>
-              <a:t>Define the role crisply and pre-empt the 'another overlay team' objection: this is leverage that makes existing teams MORE productive. Thin, senior, orchestration-first. Source: 01 §3; 03 §1.</a:t>
+              <a:t>A mode, not separate headcount. Two things to stress: the mission is focused but the point is durable, multi-year growth for Cisco (it always hands the account back — no hoarding), and 'Black Ops' is a special-forces posture metaphor — fully ethical, nothing hidden from the customer. Source: 09.</a:t>
             </a:r>
           </a:p>
         </p:txBody>
@@ -2137,7 +1853,7 @@
           <a:lstStyle/>
           <a:p>
             <a:r>
-              <a:t>Introduce the tiger team as a mode, not separate headcount. Emphasize two things: it always hands the account back (no hoarding), and 'Black Ops' is a special-forces posture metaphor — fully ethical, nothing hidden from the customer. Source: 09.</a:t>
+              <a:t>We deliberately don't boil the ocean: three anchor pillars with the clearest boardroom narrative, plus AI-ready infra as adjacency. Four verticals chosen for high cross-attach, regulatory/resilience pull, and joint Cisco+Splunk strength — swappable without changing the operating design. Source: 02 §4–5; 04 master matrix.</a:t>
             </a:r>
           </a:p>
         </p:txBody>
@@ -2207,7 +1923,7 @@
           <a:lstStyle/>
           <a:p>
             <a:r>
-              <a:t>The port-operator vignette makes the abstract concrete. Contrast the two paths visually. The punchline: the customer co-authors the architecture, so Cisco is the partner, not one of several suppliers. Source: 01 §3 vignette.</a:t>
+              <a:t>Show this is systematized, not dependent on a few heroes. The play library codifies the knowledge so the motion scales and survives key-person risk. Source: 05 §1–2.</a:t>
             </a:r>
           </a:p>
         </p:txBody>
@@ -2277,7 +1993,7 @@
           <a:lstStyle/>
           <a:p>
             <a:r>
-              <a:t>We deliberately don't boil the ocean. Three anchor pillars with the clearest boardroom narrative, plus AI-ready infra as an adjacency. Collaboration and pure compute are attach, not lead. Source: 02 §4.</a:t>
+              <a:t>The end-to-end proof. Walk the transformation: stalled + SI-locked → executive breakthrough → one co-authored architecture → multi-year program. Stress the OT safety boundary as the trust-winner with airport engineering. Source: 10.</a:t>
             </a:r>
           </a:p>
         </p:txBody>
@@ -5622,7 +5338,7 @@
                 </a:solidFill>
                 <a:latin typeface="Calibri"/>
               </a:rPr>
-              <a:t>FOCUS · VERTICALS</a:t>
+              <a:t>THE RETURN</a:t>
             </a:r>
           </a:p>
         </p:txBody>
@@ -5704,7 +5420,7 @@
                 </a:solidFill>
                 <a:latin typeface="Calibri"/>
               </a:rPr>
-              <a:t>Four verticals chosen for cross-attach and regulatory pull</a:t>
+              <a:t>~$180M influenced pipeline, ~$60M bookings, payback &lt; 12 months</a:t>
             </a:r>
           </a:p>
         </p:txBody>
@@ -5778,11 +5494,11 @@
           <a:p>
             <a:pPr algn="l">
               <a:spcAft>
-                <a:spcPts val="1000"/>
-              </a:spcAft>
-            </a:pPr>
-            <a:r>
-              <a:rPr sz="1700" b="1">
+                <a:spcPts val="1200"/>
+              </a:spcAft>
+            </a:pPr>
+            <a:r>
+              <a:rPr sz="1800" b="1">
                 <a:solidFill>
                   <a:srgbClr val="00BCEB"/>
                 </a:solidFill>
@@ -5791,23 +5507,23 @@
               <a:t>•  </a:t>
             </a:r>
             <a:r>
-              <a:rPr sz="1700" b="0">
+              <a:rPr sz="1800" b="0">
                 <a:solidFill>
                   <a:srgbClr val="F2F4F8"/>
                 </a:solidFill>
                 <a:latin typeface="Calibri"/>
               </a:rPr>
-              <a:t>Transportation &amp; Logistics — distributed sites, IoT, transport-OT (NIS2)</a:t>
-            </a:r>
-          </a:p>
-          <a:p>
-            <a:pPr algn="l">
-              <a:spcAft>
-                <a:spcPts val="1000"/>
-              </a:spcAft>
-            </a:pPr>
-            <a:r>
-              <a:rPr sz="1700" b="1">
+              <a:t>Year-1 (illustrative): ~$180M influenced pipeline</a:t>
+            </a:r>
+          </a:p>
+          <a:p>
+            <a:pPr algn="l">
+              <a:spcAft>
+                <a:spcPts val="1200"/>
+              </a:spcAft>
+            </a:pPr>
+            <a:r>
+              <a:rPr sz="1800" b="1">
                 <a:solidFill>
                   <a:srgbClr val="00BCEB"/>
                 </a:solidFill>
@@ -5816,23 +5532,23 @@
               <a:t>•  </a:t>
             </a:r>
             <a:r>
-              <a:rPr sz="1700" b="0">
+              <a:rPr sz="1800" b="0">
                 <a:solidFill>
                   <a:srgbClr val="F2F4F8"/>
                 </a:solidFill>
                 <a:latin typeface="Calibri"/>
               </a:rPr>
-              <a:t>Financial Services — resilience (DORA), fraud, SecOps, observability</a:t>
-            </a:r>
-          </a:p>
-          <a:p>
-            <a:pPr algn="l">
-              <a:spcAft>
-                <a:spcPts val="1000"/>
-              </a:spcAft>
-            </a:pPr>
-            <a:r>
-              <a:rPr sz="1700" b="1">
+              <a:t>~$60M incremental bookings → ~$36M incremental gross margin</a:t>
+            </a:r>
+          </a:p>
+          <a:p>
+            <a:pPr algn="l">
+              <a:spcAft>
+                <a:spcPts val="1200"/>
+              </a:spcAft>
+            </a:pPr>
+            <a:r>
+              <a:rPr sz="1800" b="1">
                 <a:solidFill>
                   <a:srgbClr val="00BCEB"/>
                 </a:solidFill>
@@ -5841,23 +5557,23 @@
               <a:t>•  </a:t>
             </a:r>
             <a:r>
-              <a:rPr sz="1700" b="0">
+              <a:rPr sz="1800" b="0">
                 <a:solidFill>
                   <a:srgbClr val="F2F4F8"/>
                 </a:solidFill>
                 <a:latin typeface="Calibri"/>
               </a:rPr>
-              <a:t>Healthcare — IoMT security, clinical-app observability, HIPAA</a:t>
-            </a:r>
-          </a:p>
-          <a:p>
-            <a:pPr algn="l">
-              <a:spcAft>
-                <a:spcPts val="1000"/>
-              </a:spcAft>
-            </a:pPr>
-            <a:r>
-              <a:rPr sz="1700" b="1">
+              <a:t>Break-even ~$9M bookings — roughly FIVE deals cover the whole cost</a:t>
+            </a:r>
+          </a:p>
+          <a:p>
+            <a:pPr algn="l">
+              <a:spcAft>
+                <a:spcPts val="1200"/>
+              </a:spcAft>
+            </a:pPr>
+            <a:r>
+              <a:rPr sz="1800" b="1">
                 <a:solidFill>
                   <a:srgbClr val="00BCEB"/>
                 </a:solidFill>
@@ -5866,13 +5582,13 @@
               <a:t>•  </a:t>
             </a:r>
             <a:r>
-              <a:rPr sz="1700" b="0">
+              <a:rPr sz="1800" b="0">
                 <a:solidFill>
                   <a:srgbClr val="F2F4F8"/>
                 </a:solidFill>
                 <a:latin typeface="Calibri"/>
               </a:rPr>
-              <a:t>Public Sector / Critical Infrastructure — NERC-CIP/NIS2, SOC modernization</a:t>
+              <a:t>Profitable across scenarios: ~$25M / $60M / $90M → ~$9M / $31M / $46M net</a:t>
             </a:r>
           </a:p>
         </p:txBody>
@@ -6012,7 +5728,7 @@
                 </a:solidFill>
                 <a:latin typeface="Calibri"/>
               </a:rPr>
-              <a:t>THE MOTION</a:t>
+              <a:t>THE ASK</a:t>
             </a:r>
           </a:p>
         </p:txBody>
@@ -6094,7 +5810,7 @@
                 </a:solidFill>
                 <a:latin typeface="Calibri"/>
               </a:rPr>
-              <a:t>A repeatable lifecycle and a library of plays — not heroics</a:t>
+              <a:t>Fund a 12-person, 4-quarter pilot (~$5.4M illustrative)</a:t>
             </a:r>
           </a:p>
         </p:txBody>
@@ -6168,11 +5884,11 @@
           <a:p>
             <a:pPr algn="l">
               <a:spcAft>
-                <a:spcPts val="1000"/>
-              </a:spcAft>
-            </a:pPr>
-            <a:r>
-              <a:rPr sz="1700" b="1">
+                <a:spcPts val="1200"/>
+              </a:spcAft>
+            </a:pPr>
+            <a:r>
+              <a:rPr sz="1800" b="1">
                 <a:solidFill>
                   <a:srgbClr val="00BCEB"/>
                 </a:solidFill>
@@ -6181,23 +5897,23 @@
               <a:t>•  </a:t>
             </a:r>
             <a:r>
-              <a:rPr sz="1700" b="0">
+              <a:rPr sz="1800" b="0">
                 <a:solidFill>
                   <a:srgbClr val="F2F4F8"/>
                 </a:solidFill>
                 <a:latin typeface="Calibri"/>
               </a:rPr>
-              <a:t>Select &amp; trigger → Executive framing → X-Arch architecture</a:t>
-            </a:r>
-          </a:p>
-          <a:p>
-            <a:pPr algn="l">
-              <a:spcAft>
-                <a:spcPts val="1000"/>
-              </a:spcAft>
-            </a:pPr>
-            <a:r>
-              <a:rPr sz="1700" b="1">
+              <a:t>8 Field CTOs + 1 group lead + 2 X-Arch architects + 1 deal desk/ops</a:t>
+            </a:r>
+          </a:p>
+          <a:p>
+            <a:pPr algn="l">
+              <a:spcAft>
+                <a:spcPts val="1200"/>
+              </a:spcAft>
+            </a:pPr>
+            <a:r>
+              <a:rPr sz="1800" b="1">
                 <a:solidFill>
                   <a:srgbClr val="00BCEB"/>
                 </a:solidFill>
@@ -6206,23 +5922,23 @@
               <a:t>•  </a:t>
             </a:r>
             <a:r>
-              <a:rPr sz="1700" b="0">
+              <a:rPr sz="1800" b="0">
                 <a:solidFill>
                   <a:srgbClr val="F2F4F8"/>
                 </a:solidFill>
                 <a:latin typeface="Calibri"/>
               </a:rPr>
-              <a:t>→ Value case → Orchestrate &amp; close → Land &amp; expand</a:t>
-            </a:r>
-          </a:p>
-          <a:p>
-            <a:pPr algn="l">
-              <a:spcAft>
-                <a:spcPts val="1000"/>
-              </a:spcAft>
-            </a:pPr>
-            <a:r>
-              <a:rPr sz="1700" b="1">
+              <a:t>~$5.4M/yr fully loaded (enablement, tooling, travel)</a:t>
+            </a:r>
+          </a:p>
+          <a:p>
+            <a:pPr algn="l">
+              <a:spcAft>
+                <a:spcPts val="1200"/>
+              </a:spcAft>
+            </a:pPr>
+            <a:r>
+              <a:rPr sz="1800" b="1">
                 <a:solidFill>
                   <a:srgbClr val="00BCEB"/>
                 </a:solidFill>
@@ -6231,23 +5947,23 @@
               <a:t>•  </a:t>
             </a:r>
             <a:r>
-              <a:rPr sz="1700" b="0">
+              <a:rPr sz="1800" b="0">
                 <a:solidFill>
                   <a:srgbClr val="F2F4F8"/>
                 </a:solidFill>
                 <a:latin typeface="Calibri"/>
               </a:rPr>
-              <a:t>Plays: Splunk-attach-to-network, SOC modernization, full-stack DX, passive OT, consolidation TCO</a:t>
-            </a:r>
-          </a:p>
-          <a:p>
-            <a:pPr algn="l">
-              <a:spcAft>
-                <a:spcPts val="1000"/>
-              </a:spcAft>
-            </a:pPr>
-            <a:r>
-              <a:rPr sz="1700" b="1">
+              <a:t>Internal-first staffing; ~40–60 named accounts with paired controls</a:t>
+            </a:r>
+          </a:p>
+          <a:p>
+            <a:pPr algn="l">
+              <a:spcAft>
+                <a:spcPts val="1200"/>
+              </a:spcAft>
+            </a:pPr>
+            <a:r>
+              <a:rPr sz="1800" b="1">
                 <a:solidFill>
                   <a:srgbClr val="00BCEB"/>
                 </a:solidFill>
@@ -6256,13 +5972,13 @@
               <a:t>•  </a:t>
             </a:r>
             <a:r>
-              <a:rPr sz="1700" b="0">
+              <a:rPr sz="1800" b="0">
                 <a:solidFill>
                   <a:srgbClr val="F2F4F8"/>
                 </a:solidFill>
                 <a:latin typeface="Calibri"/>
               </a:rPr>
-              <a:t>Each play = discovery script + reference architecture + value case + proof points</a:t>
+              <a:t>Q3 go/expand/stop gate tied to explicit success criteria</a:t>
             </a:r>
           </a:p>
         </p:txBody>
@@ -6402,7 +6118,7 @@
                 </a:solidFill>
                 <a:latin typeface="Calibri"/>
               </a:rPr>
-              <a:t>WORKED EXAMPLE · AVIATION</a:t>
+              <a:t>BOUNDED RISK + PROOF</a:t>
             </a:r>
           </a:p>
         </p:txBody>
@@ -6484,7 +6200,7 @@
                 </a:solidFill>
                 <a:latin typeface="Calibri"/>
               </a:rPr>
-              <a:t>Airport operator: Black Ops broke open a stalled 'smart airport' program</a:t>
+              <a:t>A Q3 gate and control-account measurement make this low-risk</a:t>
             </a:r>
           </a:p>
         </p:txBody>
@@ -6558,11 +6274,11 @@
           <a:p>
             <a:pPr algn="l">
               <a:spcAft>
-                <a:spcPts val="1000"/>
-              </a:spcAft>
-            </a:pPr>
-            <a:r>
-              <a:rPr sz="1700" b="1">
+                <a:spcPts val="1200"/>
+              </a:spcAft>
+            </a:pPr>
+            <a:r>
+              <a:rPr sz="1800" b="1">
                 <a:solidFill>
                   <a:srgbClr val="00BCEB"/>
                 </a:solidFill>
@@ -6571,23 +6287,23 @@
               <a:t>•  </a:t>
             </a:r>
             <a:r>
-              <a:rPr sz="1700" b="0">
+              <a:rPr sz="1800" b="0">
                 <a:solidFill>
                   <a:srgbClr val="F2F4F8"/>
                 </a:solidFill>
                 <a:latin typeface="Calibri"/>
               </a:rPr>
-              <a:t>OT-heavy hub (baggage, jet bridges, airfield lighting) + NIS2 + Terminal 4 build</a:t>
-            </a:r>
-          </a:p>
-          <a:p>
-            <a:pPr algn="l">
-              <a:spcAft>
-                <a:spcPts val="1000"/>
-              </a:spcAft>
-            </a:pPr>
-            <a:r>
-              <a:rPr sz="1700" b="1">
+              <a:t>Q3 go/expand/stop gate stops spend before it turns negative</a:t>
+            </a:r>
+          </a:p>
+          <a:p>
+            <a:pPr algn="l">
+              <a:spcAft>
+                <a:spcPts val="1200"/>
+              </a:spcAft>
+            </a:pPr>
+            <a:r>
+              <a:rPr sz="1800" b="1">
                 <a:solidFill>
                   <a:srgbClr val="00BCEB"/>
                 </a:solidFill>
@@ -6596,23 +6312,23 @@
               <a:t>•  </a:t>
             </a:r>
             <a:r>
-              <a:rPr sz="1700" b="0">
+              <a:rPr sz="1800" b="0">
                 <a:solidFill>
                   <a:srgbClr val="F2F4F8"/>
                 </a:solidFill>
                 <a:latin typeface="Calibri"/>
               </a:rPr>
-              <a:t>SI was about to lock the architecture — Black Ops criteria met, pod convened</a:t>
-            </a:r>
-          </a:p>
-          <a:p>
-            <a:pPr algn="l">
-              <a:spcAft>
-                <a:spcPts val="1000"/>
-              </a:spcAft>
-            </a:pPr>
-            <a:r>
-              <a:rPr sz="1700" b="1">
+              <a:t>Matched control accounts prove attach, deal-size, win-rate deltas</a:t>
+            </a:r>
+          </a:p>
+          <a:p>
+            <a:pPr algn="l">
+              <a:spcAft>
+                <a:spcPts val="1200"/>
+              </a:spcAft>
+            </a:pPr>
+            <a:r>
+              <a:rPr sz="1800" b="1">
                 <a:solidFill>
                   <a:srgbClr val="00BCEB"/>
                 </a:solidFill>
@@ -6621,23 +6337,23 @@
               <a:t>•  </a:t>
             </a:r>
             <a:r>
-              <a:rPr sz="1700" b="0">
+              <a:rPr sz="1800" b="0">
                 <a:solidFill>
                   <a:srgbClr val="F2F4F8"/>
                 </a:solidFill>
                 <a:latin typeface="Calibri"/>
               </a:rPr>
-              <a:t>Executive breakthrough reframed it as board-level operational resilience</a:t>
-            </a:r>
-          </a:p>
-          <a:p>
-            <a:pPr algn="l">
-              <a:spcAft>
-                <a:spcPts val="1000"/>
-              </a:spcAft>
-            </a:pPr>
-            <a:r>
-              <a:rPr sz="1700" b="1">
+              <a:t>Top risks (talent, comp friction, attribution) have concrete mitigations</a:t>
+            </a:r>
+          </a:p>
+          <a:p>
+            <a:pPr algn="l">
+              <a:spcAft>
+                <a:spcPts val="1200"/>
+              </a:spcAft>
+            </a:pPr>
+            <a:r>
+              <a:rPr sz="1800" b="1">
                 <a:solidFill>
                   <a:srgbClr val="00BCEB"/>
                 </a:solidFill>
@@ -6646,38 +6362,13 @@
               <a:t>•  </a:t>
             </a:r>
             <a:r>
-              <a:rPr sz="1700" b="0">
+              <a:rPr sz="1800" b="0">
                 <a:solidFill>
                   <a:srgbClr val="F2F4F8"/>
                 </a:solidFill>
                 <a:latin typeface="Calibri"/>
               </a:rPr>
-              <a:t>One X-Arch architecture: passive OT + segmentation + SD-WAN + modern SOC + edge AI</a:t>
-            </a:r>
-          </a:p>
-          <a:p>
-            <a:pPr algn="l">
-              <a:spcAft>
-                <a:spcPts val="1000"/>
-              </a:spcAft>
-            </a:pPr>
-            <a:r>
-              <a:rPr sz="1700" b="1">
-                <a:solidFill>
-                  <a:srgbClr val="00BCEB"/>
-                </a:solidFill>
-                <a:latin typeface="Calibri"/>
-              </a:rPr>
-              <a:t>•  </a:t>
-            </a:r>
-            <a:r>
-              <a:rPr sz="1700" b="0">
-                <a:solidFill>
-                  <a:srgbClr val="F2F4F8"/>
-                </a:solidFill>
-                <a:latin typeface="Calibri"/>
-              </a:rPr>
-              <a:t>Won OT engineering's trust via read-only, human-in-the-loop — then handed back to scale</a:t>
+              <a:t>Influence ledger prevents over-claiming and BU disputes</a:t>
             </a:r>
           </a:p>
         </p:txBody>
@@ -6817,7 +6508,7 @@
                 </a:solidFill>
                 <a:latin typeface="Calibri"/>
               </a:rPr>
-              <a:t>THE RETURN</a:t>
+              <a:t>RECOMMENDATION</a:t>
             </a:r>
           </a:p>
         </p:txBody>
@@ -6899,7 +6590,7 @@
                 </a:solidFill>
                 <a:latin typeface="Calibri"/>
               </a:rPr>
-              <a:t>~$180M influenced pipeline, ~$60M incremental bookings, payback &lt; 12 months</a:t>
+              <a:t>Approve the pilot; first executive framings within 90 days</a:t>
             </a:r>
           </a:p>
         </p:txBody>
@@ -6973,11 +6664,11 @@
           <a:p>
             <a:pPr algn="l">
               <a:spcAft>
-                <a:spcPts val="1000"/>
-              </a:spcAft>
-            </a:pPr>
-            <a:r>
-              <a:rPr sz="1700" b="1">
+                <a:spcPts val="1200"/>
+              </a:spcAft>
+            </a:pPr>
+            <a:r>
+              <a:rPr sz="1800" b="1">
                 <a:solidFill>
                   <a:srgbClr val="00BCEB"/>
                 </a:solidFill>
@@ -6986,23 +6677,23 @@
               <a:t>•  </a:t>
             </a:r>
             <a:r>
-              <a:rPr sz="1700" b="0">
+              <a:rPr sz="1800" b="0">
                 <a:solidFill>
                   <a:srgbClr val="F2F4F8"/>
                 </a:solidFill>
                 <a:latin typeface="Calibri"/>
               </a:rPr>
-              <a:t>Year-1 targets (illustrative): $180M influenced pipeline</a:t>
-            </a:r>
-          </a:p>
-          <a:p>
-            <a:pPr algn="l">
-              <a:spcAft>
-                <a:spcPts val="1000"/>
-              </a:spcAft>
-            </a:pPr>
-            <a:r>
-              <a:rPr sz="1700" b="1">
+              <a:t>Approve the 12-person, 4-quarter pilot with a Q3 gate</a:t>
+            </a:r>
+          </a:p>
+          <a:p>
+            <a:pPr algn="l">
+              <a:spcAft>
+                <a:spcPts val="1200"/>
+              </a:spcAft>
+            </a:pPr>
+            <a:r>
+              <a:rPr sz="1800" b="1">
                 <a:solidFill>
                   <a:srgbClr val="00BCEB"/>
                 </a:solidFill>
@@ -7011,23 +6702,23 @@
               <a:t>•  </a:t>
             </a:r>
             <a:r>
-              <a:rPr sz="1700" b="0">
+              <a:rPr sz="1800" b="0">
                 <a:solidFill>
                   <a:srgbClr val="F2F4F8"/>
                 </a:solidFill>
                 <a:latin typeface="Calibri"/>
               </a:rPr>
-              <a:t>~$60M incremental/accelerated bookings → ~$36M incremental gross margin</a:t>
-            </a:r>
-          </a:p>
-          <a:p>
-            <a:pPr algn="l">
-              <a:spcAft>
-                <a:spcPts val="1000"/>
-              </a:spcAft>
-            </a:pPr>
-            <a:r>
-              <a:rPr sz="1700" b="1">
+              <a:t>+30d: group lead named; charter, comp, metrics baselined</a:t>
+            </a:r>
+          </a:p>
+          <a:p>
+            <a:pPr algn="l">
+              <a:spcAft>
+                <a:spcPts val="1200"/>
+              </a:spcAft>
+            </a:pPr>
+            <a:r>
+              <a:rPr sz="1800" b="1">
                 <a:solidFill>
                   <a:srgbClr val="00BCEB"/>
                 </a:solidFill>
@@ -7036,23 +6727,23 @@
               <a:t>•  </a:t>
             </a:r>
             <a:r>
-              <a:rPr sz="1700" b="0">
+              <a:rPr sz="1800" b="0">
                 <a:solidFill>
                   <a:srgbClr val="F2F4F8"/>
                 </a:solidFill>
                 <a:latin typeface="Calibri"/>
               </a:rPr>
-              <a:t>Break-even at just ~$9M bookings — roughly FIVE deals cover the whole cost</a:t>
-            </a:r>
-          </a:p>
-          <a:p>
-            <a:pPr algn="l">
-              <a:spcAft>
-                <a:spcPts val="1000"/>
-              </a:spcAft>
-            </a:pPr>
-            <a:r>
-              <a:rPr sz="1700" b="1">
+              <a:t>+60d: cohort staffed (internal-first); accounts + controls selected</a:t>
+            </a:r>
+          </a:p>
+          <a:p>
+            <a:pPr algn="l">
+              <a:spcAft>
+                <a:spcPts val="1200"/>
+              </a:spcAft>
+            </a:pPr>
+            <a:r>
+              <a:rPr sz="1800" b="1">
                 <a:solidFill>
                   <a:srgbClr val="00BCEB"/>
                 </a:solidFill>
@@ -7061,13 +6752,13 @@
               <a:t>•  </a:t>
             </a:r>
             <a:r>
-              <a:rPr sz="1700" b="0">
+              <a:rPr sz="1800" b="0">
                 <a:solidFill>
                   <a:srgbClr val="F2F4F8"/>
                 </a:solidFill>
                 <a:latin typeface="Calibri"/>
               </a:rPr>
-              <a:t>Splunk cross-attach and deal-size uplift are the leading indicators</a:t>
+              <a:t>+90d: first X-Arch opportunities framed; enablement underway</a:t>
             </a:r>
           </a:p>
         </p:txBody>
@@ -7181,8 +6872,8 @@
         </p:nvSpPr>
         <p:spPr>
           <a:xfrm>
-            <a:off x="548640" y="411480"/>
-            <a:ext cx="11064240" cy="365760"/>
+            <a:off x="731520" y="2743200"/>
+            <a:ext cx="10698480" cy="914400"/>
           </a:xfrm>
           <a:prstGeom prst="rect">
             <a:avLst/>
@@ -7201,70 +6892,27 @@
               </a:spcAft>
             </a:pPr>
             <a:r>
-              <a:rPr sz="1200" b="1">
+              <a:rPr sz="1600" b="1">
                 <a:solidFill>
                   <a:srgbClr val="00BCEB"/>
                 </a:solidFill>
                 <a:latin typeface="Calibri"/>
               </a:rPr>
-              <a:t>THE ASK</a:t>
-            </a:r>
-          </a:p>
-        </p:txBody>
-      </p:sp>
-      <p:sp>
-        <p:nvSpPr>
-          <p:cNvPr id="4" name="Rectangle 3"/>
-          <p:cNvSpPr/>
-          <p:nvPr/>
-        </p:nvSpPr>
-        <p:spPr>
-          <a:xfrm>
-            <a:off x="548640" y="868680"/>
-            <a:ext cx="1280160" cy="50800"/>
-          </a:xfrm>
-          <a:prstGeom prst="rect">
-            <a:avLst/>
-          </a:prstGeom>
-          <a:solidFill>
-            <a:srgbClr val="00BCEB"/>
-          </a:solidFill>
-          <a:ln>
-            <a:noFill/>
-          </a:ln>
-        </p:spPr>
-        <p:style>
-          <a:lnRef idx="1">
-            <a:schemeClr val="accent1"/>
-          </a:lnRef>
-          <a:fillRef idx="3">
-            <a:schemeClr val="accent1"/>
-          </a:fillRef>
-          <a:effectRef idx="2">
-            <a:schemeClr val="accent1"/>
-          </a:effectRef>
-          <a:fontRef idx="minor">
-            <a:schemeClr val="lt1"/>
-          </a:fontRef>
-        </p:style>
-        <p:txBody>
-          <a:bodyPr rtlCol="0" anchor="ctr"/>
-          <a:lstStyle/>
-          <a:p>
-            <a:pPr algn="ctr"/>
-          </a:p>
-        </p:txBody>
-      </p:sp>
-      <p:sp>
-        <p:nvSpPr>
-          <p:cNvPr id="5" name="TextBox 4"/>
+              <a:t>APPENDIX</a:t>
+            </a:r>
+          </a:p>
+        </p:txBody>
+      </p:sp>
+      <p:sp>
+        <p:nvSpPr>
+          <p:cNvPr id="4" name="TextBox 3"/>
           <p:cNvSpPr txBox="1"/>
           <p:nvPr/>
         </p:nvSpPr>
         <p:spPr>
           <a:xfrm>
-            <a:off x="548640" y="1051560"/>
-            <a:ext cx="11064240" cy="1005840"/>
+            <a:off x="731520" y="3200400"/>
+            <a:ext cx="10698480" cy="914400"/>
           </a:xfrm>
           <a:prstGeom prst="rect">
             <a:avLst/>
@@ -7283,220 +6931,13 @@
               </a:spcAft>
             </a:pPr>
             <a:r>
-              <a:rPr sz="2800" b="1">
+              <a:rPr sz="3000" b="1">
                 <a:solidFill>
                   <a:srgbClr val="F2F4F8"/>
                 </a:solidFill>
                 <a:latin typeface="Calibri"/>
               </a:rPr>
-              <a:t>Fund a 12-person, 4-quarter pilot (~$5.4M illustrative)</a:t>
-            </a:r>
-          </a:p>
-        </p:txBody>
-      </p:sp>
-      <p:sp>
-        <p:nvSpPr>
-          <p:cNvPr id="6" name="Rectangle 5"/>
-          <p:cNvSpPr/>
-          <p:nvPr/>
-        </p:nvSpPr>
-        <p:spPr>
-          <a:xfrm>
-            <a:off x="548640" y="2331720"/>
-            <a:ext cx="11064240" cy="3931920"/>
-          </a:xfrm>
-          <a:prstGeom prst="rect">
-            <a:avLst/>
-          </a:prstGeom>
-          <a:solidFill>
-            <a:srgbClr val="1A1A2E"/>
-          </a:solidFill>
-          <a:ln w="12700">
-            <a:solidFill>
-              <a:srgbClr val="2C2C3A"/>
-            </a:solidFill>
-          </a:ln>
-        </p:spPr>
-        <p:style>
-          <a:lnRef idx="1">
-            <a:schemeClr val="accent1"/>
-          </a:lnRef>
-          <a:fillRef idx="3">
-            <a:schemeClr val="accent1"/>
-          </a:fillRef>
-          <a:effectRef idx="2">
-            <a:schemeClr val="accent1"/>
-          </a:effectRef>
-          <a:fontRef idx="minor">
-            <a:schemeClr val="lt1"/>
-          </a:fontRef>
-        </p:style>
-        <p:txBody>
-          <a:bodyPr rtlCol="0" anchor="ctr"/>
-          <a:lstStyle/>
-          <a:p>
-            <a:pPr algn="ctr"/>
-          </a:p>
-        </p:txBody>
-      </p:sp>
-      <p:sp>
-        <p:nvSpPr>
-          <p:cNvPr id="7" name="TextBox 6"/>
-          <p:cNvSpPr txBox="1"/>
-          <p:nvPr/>
-        </p:nvSpPr>
-        <p:spPr>
-          <a:xfrm>
-            <a:off x="914400" y="2560320"/>
-            <a:ext cx="10332720" cy="3566160"/>
-          </a:xfrm>
-          <a:prstGeom prst="rect">
-            <a:avLst/>
-          </a:prstGeom>
-          <a:noFill/>
-        </p:spPr>
-        <p:txBody>
-          <a:bodyPr wrap="square" anchor="t">
-            <a:spAutoFit/>
-          </a:bodyPr>
-          <a:lstStyle/>
-          <a:p>
-            <a:pPr algn="l">
-              <a:spcAft>
-                <a:spcPts val="1000"/>
-              </a:spcAft>
-            </a:pPr>
-            <a:r>
-              <a:rPr sz="1700" b="1">
-                <a:solidFill>
-                  <a:srgbClr val="00BCEB"/>
-                </a:solidFill>
-                <a:latin typeface="Calibri"/>
-              </a:rPr>
-              <a:t>•  </a:t>
-            </a:r>
-            <a:r>
-              <a:rPr sz="1700" b="0">
-                <a:solidFill>
-                  <a:srgbClr val="F2F4F8"/>
-                </a:solidFill>
-                <a:latin typeface="Calibri"/>
-              </a:rPr>
-              <a:t>8 Field CTOs + 1 group lead + 2 X-Arch architects + 1 deal desk/ops</a:t>
-            </a:r>
-          </a:p>
-          <a:p>
-            <a:pPr algn="l">
-              <a:spcAft>
-                <a:spcPts val="1000"/>
-              </a:spcAft>
-            </a:pPr>
-            <a:r>
-              <a:rPr sz="1700" b="1">
-                <a:solidFill>
-                  <a:srgbClr val="00BCEB"/>
-                </a:solidFill>
-                <a:latin typeface="Calibri"/>
-              </a:rPr>
-              <a:t>•  </a:t>
-            </a:r>
-            <a:r>
-              <a:rPr sz="1700" b="0">
-                <a:solidFill>
-                  <a:srgbClr val="F2F4F8"/>
-                </a:solidFill>
-                <a:latin typeface="Calibri"/>
-              </a:rPr>
-              <a:t>Fully-loaded ~$5.4M/yr including enablement, tooling, travel</a:t>
-            </a:r>
-          </a:p>
-          <a:p>
-            <a:pPr algn="l">
-              <a:spcAft>
-                <a:spcPts val="1000"/>
-              </a:spcAft>
-            </a:pPr>
-            <a:r>
-              <a:rPr sz="1700" b="1">
-                <a:solidFill>
-                  <a:srgbClr val="00BCEB"/>
-                </a:solidFill>
-                <a:latin typeface="Calibri"/>
-              </a:rPr>
-              <a:t>•  </a:t>
-            </a:r>
-            <a:r>
-              <a:rPr sz="1700" b="0">
-                <a:solidFill>
-                  <a:srgbClr val="F2F4F8"/>
-                </a:solidFill>
-                <a:latin typeface="Calibri"/>
-              </a:rPr>
-              <a:t>Internal-first staffing; ~40–60 named accounts with paired controls</a:t>
-            </a:r>
-          </a:p>
-          <a:p>
-            <a:pPr algn="l">
-              <a:spcAft>
-                <a:spcPts val="1000"/>
-              </a:spcAft>
-            </a:pPr>
-            <a:r>
-              <a:rPr sz="1700" b="1">
-                <a:solidFill>
-                  <a:srgbClr val="00BCEB"/>
-                </a:solidFill>
-                <a:latin typeface="Calibri"/>
-              </a:rPr>
-              <a:t>•  </a:t>
-            </a:r>
-            <a:r>
-              <a:rPr sz="1700" b="0">
-                <a:solidFill>
-                  <a:srgbClr val="F2F4F8"/>
-                </a:solidFill>
-                <a:latin typeface="Calibri"/>
-              </a:rPr>
-              <a:t>Q3 go/expand/stop gate tied to explicit success criteria</a:t>
-            </a:r>
-          </a:p>
-        </p:txBody>
-      </p:sp>
-      <p:sp>
-        <p:nvSpPr>
-          <p:cNvPr id="8" name="TextBox 7"/>
-          <p:cNvSpPr txBox="1"/>
-          <p:nvPr/>
-        </p:nvSpPr>
-        <p:spPr>
-          <a:xfrm>
-            <a:off x="548640" y="6419088"/>
-            <a:ext cx="11064240" cy="320040"/>
-          </a:xfrm>
-          <a:prstGeom prst="rect">
-            <a:avLst/>
-          </a:prstGeom>
-          <a:noFill/>
-        </p:spPr>
-        <p:txBody>
-          <a:bodyPr wrap="square" anchor="t">
-            <a:spAutoFit/>
-          </a:bodyPr>
-          <a:lstStyle/>
-          <a:p>
-            <a:pPr algn="l">
-              <a:spcAft>
-                <a:spcPts val="600"/>
-              </a:spcAft>
-            </a:pPr>
-            <a:r>
-              <a:rPr sz="1000" b="0">
-                <a:solidFill>
-                  <a:srgbClr val="9AA3B2"/>
-                </a:solidFill>
-                <a:latin typeface="Calibri"/>
-              </a:rPr>
-              <a:t>Illustrative figures — replace with actuals before presenting.</a:t>
+              <a:t>Detail held in reserve for Q&amp;A</a:t>
             </a:r>
           </a:p>
         </p:txBody>
@@ -7597,7 +7038,7 @@
                 </a:solidFill>
                 <a:latin typeface="Calibri"/>
               </a:rPr>
-              <a:t>IT PAYS BACK</a:t>
+              <a:t>APPENDIX · A1</a:t>
             </a:r>
           </a:p>
         </p:txBody>
@@ -7679,7 +7120,7 @@
                 </a:solidFill>
                 <a:latin typeface="Calibri"/>
               </a:rPr>
-              <a:t>Profitable from conservative to upside — the question is pace, not payback</a:t>
+              <a:t>Role, competencies, and skills matrix</a:t>
             </a:r>
           </a:p>
         </p:txBody>
@@ -7753,11 +7194,11 @@
           <a:p>
             <a:pPr algn="l">
               <a:spcAft>
-                <a:spcPts val="1000"/>
-              </a:spcAft>
-            </a:pPr>
-            <a:r>
-              <a:rPr sz="1700" b="1">
+                <a:spcPts val="1200"/>
+              </a:spcAft>
+            </a:pPr>
+            <a:r>
+              <a:rPr sz="1800" b="1">
                 <a:solidFill>
                   <a:srgbClr val="00BCEB"/>
                 </a:solidFill>
@@ -7766,23 +7207,23 @@
               <a:t>•  </a:t>
             </a:r>
             <a:r>
-              <a:rPr sz="1700" b="0">
+              <a:rPr sz="1800" b="0">
                 <a:solidFill>
                   <a:srgbClr val="F2F4F8"/>
                 </a:solidFill>
                 <a:latin typeface="Calibri"/>
               </a:rPr>
-              <a:t>Conservative ~$25M bookings → ~$9M net (continue, tune targeting)</a:t>
-            </a:r>
-          </a:p>
-          <a:p>
-            <a:pPr algn="l">
-              <a:spcAft>
-                <a:spcPts val="1000"/>
-              </a:spcAft>
-            </a:pPr>
-            <a:r>
-              <a:rPr sz="1700" b="1">
+              <a:t>Four pillars: business fluency, X-arch depth, exec presence, orchestration</a:t>
+            </a:r>
+          </a:p>
+          <a:p>
+            <a:pPr algn="l">
+              <a:spcAft>
+                <a:spcPts val="1200"/>
+              </a:spcAft>
+            </a:pPr>
+            <a:r>
+              <a:rPr sz="1800" b="1">
                 <a:solidFill>
                   <a:srgbClr val="00BCEB"/>
                 </a:solidFill>
@@ -7791,23 +7232,23 @@
               <a:t>•  </a:t>
             </a:r>
             <a:r>
-              <a:rPr sz="1700" b="0">
+              <a:rPr sz="1800" b="0">
                 <a:solidFill>
                   <a:srgbClr val="F2F4F8"/>
                 </a:solidFill>
                 <a:latin typeface="Calibri"/>
               </a:rPr>
-              <a:t>Base (plan) ~$60M → ~$31M net (expand per 3-year path)</a:t>
-            </a:r>
-          </a:p>
-          <a:p>
-            <a:pPr algn="l">
-              <a:spcAft>
-                <a:spcPts val="1000"/>
-              </a:spcAft>
-            </a:pPr>
-            <a:r>
-              <a:rPr sz="1700" b="1">
+              <a:t>Deep in ≥2 pillars; conversant in all</a:t>
+            </a:r>
+          </a:p>
+          <a:p>
+            <a:pPr algn="l">
+              <a:spcAft>
+                <a:spcPts val="1200"/>
+              </a:spcAft>
+            </a:pPr>
+            <a:r>
+              <a:rPr sz="1800" b="1">
                 <a:solidFill>
                   <a:srgbClr val="00BCEB"/>
                 </a:solidFill>
@@ -7816,38 +7257,13 @@
               <a:t>•  </a:t>
             </a:r>
             <a:r>
-              <a:rPr sz="1700" b="0">
+              <a:rPr sz="1800" b="0">
                 <a:solidFill>
                   <a:srgbClr val="F2F4F8"/>
                 </a:solidFill>
                 <a:latin typeface="Calibri"/>
               </a:rPr>
-              <a:t>Upside ~$90M → ~$46M net (accelerate hiring)</a:t>
-            </a:r>
-          </a:p>
-          <a:p>
-            <a:pPr algn="l">
-              <a:spcAft>
-                <a:spcPts val="1000"/>
-              </a:spcAft>
-            </a:pPr>
-            <a:r>
-              <a:rPr sz="1700" b="1">
-                <a:solidFill>
-                  <a:srgbClr val="00BCEB"/>
-                </a:solidFill>
-                <a:latin typeface="Calibri"/>
-              </a:rPr>
-              <a:t>•  </a:t>
-            </a:r>
-            <a:r>
-              <a:rPr sz="1700" b="0">
-                <a:solidFill>
-                  <a:srgbClr val="F2F4F8"/>
-                </a:solidFill>
-                <a:latin typeface="Calibri"/>
-              </a:rPr>
-              <a:t>Even $20M @ 50% margin returns +$4.6M net — profitable across the range</a:t>
+              <a:t>Deep in one vertical; team covers all four</a:t>
             </a:r>
           </a:p>
         </p:txBody>
@@ -7886,7 +7302,7 @@
                 </a:solidFill>
                 <a:latin typeface="Calibri"/>
               </a:rPr>
-              <a:t>Illustrative figures — replace with actuals before presenting.</a:t>
+              <a:t>Appendix — reserve for Q&amp;A. Illustrative figures.</a:t>
             </a:r>
           </a:p>
         </p:txBody>
@@ -7987,7 +7403,7 @@
                 </a:solidFill>
                 <a:latin typeface="Calibri"/>
               </a:rPr>
-              <a:t>BOUNDED RISK + PROOF</a:t>
+              <a:t>APPENDIX · A2</a:t>
             </a:r>
           </a:p>
         </p:txBody>
@@ -8069,7 +7485,7 @@
                 </a:solidFill>
                 <a:latin typeface="Calibri"/>
               </a:rPr>
-              <a:t>A Q3 gate and control-account measurement make this low-risk</a:t>
+              <a:t>Org placement and RACI</a:t>
             </a:r>
           </a:p>
         </p:txBody>
@@ -8143,11 +7559,11 @@
           <a:p>
             <a:pPr algn="l">
               <a:spcAft>
-                <a:spcPts val="1000"/>
-              </a:spcAft>
-            </a:pPr>
-            <a:r>
-              <a:rPr sz="1700" b="1">
+                <a:spcPts val="1200"/>
+              </a:spcAft>
+            </a:pPr>
+            <a:r>
+              <a:rPr sz="1800" b="1">
                 <a:solidFill>
                   <a:srgbClr val="00BCEB"/>
                 </a:solidFill>
@@ -8156,23 +7572,23 @@
               <a:t>•  </a:t>
             </a:r>
             <a:r>
-              <a:rPr sz="1700" b="0">
+              <a:rPr sz="1800" b="0">
                 <a:solidFill>
                   <a:srgbClr val="F2F4F8"/>
                 </a:solidFill>
                 <a:latin typeface="Calibri"/>
               </a:rPr>
-              <a:t>Q3 go/expand/stop gate stops spend before it can turn negative</a:t>
-            </a:r>
-          </a:p>
-          <a:p>
-            <a:pPr algn="l">
-              <a:spcAft>
-                <a:spcPts val="1000"/>
-              </a:spcAft>
-            </a:pPr>
-            <a:r>
-              <a:rPr sz="1700" b="1">
+              <a:t>GTM-primary; strong dotted line to CTO/engineering</a:t>
+            </a:r>
+          </a:p>
+          <a:p>
+            <a:pPr algn="l">
+              <a:spcAft>
+                <a:spcPts val="1200"/>
+              </a:spcAft>
+            </a:pPr>
+            <a:r>
+              <a:rPr sz="1800" b="1">
                 <a:solidFill>
                   <a:srgbClr val="00BCEB"/>
                 </a:solidFill>
@@ -8181,23 +7597,23 @@
               <a:t>•  </a:t>
             </a:r>
             <a:r>
-              <a:rPr sz="1700" b="0">
+              <a:rPr sz="1800" b="0">
                 <a:solidFill>
                   <a:srgbClr val="F2F4F8"/>
                 </a:solidFill>
                 <a:latin typeface="Calibri"/>
               </a:rPr>
-              <a:t>Proof by matched control accounts: attach, deal size, win rate deltas</a:t>
-            </a:r>
-          </a:p>
-          <a:p>
-            <a:pPr algn="l">
-              <a:spcAft>
-                <a:spcPts val="1000"/>
-              </a:spcAft>
-            </a:pPr>
-            <a:r>
-              <a:rPr sz="1700" b="1">
+              <a:t>Revenue-accountable AND cross-BU neutral</a:t>
+            </a:r>
+          </a:p>
+          <a:p>
+            <a:pPr algn="l">
+              <a:spcAft>
+                <a:spcPts val="1200"/>
+              </a:spcAft>
+            </a:pPr>
+            <a:r>
+              <a:rPr sz="1800" b="1">
                 <a:solidFill>
                   <a:srgbClr val="00BCEB"/>
                 </a:solidFill>
@@ -8206,38 +7622,13 @@
               <a:t>•  </a:t>
             </a:r>
             <a:r>
-              <a:rPr sz="1700" b="0">
+              <a:rPr sz="1800" b="0">
                 <a:solidFill>
                   <a:srgbClr val="F2F4F8"/>
                 </a:solidFill>
                 <a:latin typeface="Calibri"/>
               </a:rPr>
-              <a:t>Top risks (talent, comp friction, attribution) have concrete mitigations</a:t>
-            </a:r>
-          </a:p>
-          <a:p>
-            <a:pPr algn="l">
-              <a:spcAft>
-                <a:spcPts val="1000"/>
-              </a:spcAft>
-            </a:pPr>
-            <a:r>
-              <a:rPr sz="1700" b="1">
-                <a:solidFill>
-                  <a:srgbClr val="00BCEB"/>
-                </a:solidFill>
-                <a:latin typeface="Calibri"/>
-              </a:rPr>
-              <a:t>•  </a:t>
-            </a:r>
-            <a:r>
-              <a:rPr sz="1700" b="0">
-                <a:solidFill>
-                  <a:srgbClr val="F2F4F8"/>
-                </a:solidFill>
-                <a:latin typeface="Calibri"/>
-              </a:rPr>
-              <a:t>Influence ledger prevents over-claiming and BU disputes</a:t>
+              <a:t>Field CTO owns the frame; AE owns the account</a:t>
             </a:r>
           </a:p>
         </p:txBody>
@@ -8276,7 +7667,7 @@
                 </a:solidFill>
                 <a:latin typeface="Calibri"/>
               </a:rPr>
-              <a:t>Illustrative figures — replace with actuals before presenting.</a:t>
+              <a:t>Appendix — reserve for Q&amp;A. Illustrative figures.</a:t>
             </a:r>
           </a:p>
         </p:txBody>
@@ -8377,7 +7768,7 @@
                 </a:solidFill>
                 <a:latin typeface="Calibri"/>
               </a:rPr>
-              <a:t>RECOMMENDATION</a:t>
+              <a:t>APPENDIX · A3</a:t>
             </a:r>
           </a:p>
         </p:txBody>
@@ -8459,7 +7850,7 @@
                 </a:solidFill>
                 <a:latin typeface="Calibri"/>
               </a:rPr>
-              <a:t>Approve the pilot; first executive framings within 90 days</a:t>
+              <a:t>Per-vertical field engagement kits</a:t>
             </a:r>
           </a:p>
         </p:txBody>
@@ -8533,11 +7924,11 @@
           <a:p>
             <a:pPr algn="l">
               <a:spcAft>
-                <a:spcPts val="1000"/>
-              </a:spcAft>
-            </a:pPr>
-            <a:r>
-              <a:rPr sz="1700" b="1">
+                <a:spcPts val="1200"/>
+              </a:spcAft>
+            </a:pPr>
+            <a:r>
+              <a:rPr sz="1800" b="1">
                 <a:solidFill>
                   <a:srgbClr val="00BCEB"/>
                 </a:solidFill>
@@ -8546,23 +7937,23 @@
               <a:t>•  </a:t>
             </a:r>
             <a:r>
-              <a:rPr sz="1700" b="0">
+              <a:rPr sz="1800" b="0">
                 <a:solidFill>
                   <a:srgbClr val="F2F4F8"/>
                 </a:solidFill>
                 <a:latin typeface="Calibri"/>
               </a:rPr>
-              <a:t>Approve the 12-person, 4-quarter funded pilot with a Q3 gate</a:t>
-            </a:r>
-          </a:p>
-          <a:p>
-            <a:pPr algn="l">
-              <a:spcAft>
-                <a:spcPts val="1000"/>
-              </a:spcAft>
-            </a:pPr>
-            <a:r>
-              <a:rPr sz="1700" b="1">
+              <a:t>Buyers, discovery questions, outcome hypotheses, objections</a:t>
+            </a:r>
+          </a:p>
+          <a:p>
+            <a:pPr algn="l">
+              <a:spcAft>
+                <a:spcPts val="1200"/>
+              </a:spcAft>
+            </a:pPr>
+            <a:r>
+              <a:rPr sz="1800" b="1">
                 <a:solidFill>
                   <a:srgbClr val="00BCEB"/>
                 </a:solidFill>
@@ -8571,23 +7962,23 @@
               <a:t>•  </a:t>
             </a:r>
             <a:r>
-              <a:rPr sz="1700" b="0">
+              <a:rPr sz="1800" b="0">
                 <a:solidFill>
                   <a:srgbClr val="F2F4F8"/>
                 </a:solidFill>
                 <a:latin typeface="Calibri"/>
               </a:rPr>
-              <a:t>+30d: group lead named; charter, comp, metrics baselined</a:t>
-            </a:r>
-          </a:p>
-          <a:p>
-            <a:pPr algn="l">
-              <a:spcAft>
-                <a:spcPts val="1000"/>
-              </a:spcAft>
-            </a:pPr>
-            <a:r>
-              <a:rPr sz="1700" b="1">
+              <a:t>One kit per vertical (x4)</a:t>
+            </a:r>
+          </a:p>
+          <a:p>
+            <a:pPr algn="l">
+              <a:spcAft>
+                <a:spcPts val="1200"/>
+              </a:spcAft>
+            </a:pPr>
+            <a:r>
+              <a:rPr sz="1800" b="1">
                 <a:solidFill>
                   <a:srgbClr val="00BCEB"/>
                 </a:solidFill>
@@ -8596,38 +7987,13 @@
               <a:t>•  </a:t>
             </a:r>
             <a:r>
-              <a:rPr sz="1700" b="0">
+              <a:rPr sz="1800" b="0">
                 <a:solidFill>
                   <a:srgbClr val="F2F4F8"/>
                 </a:solidFill>
                 <a:latin typeface="Calibri"/>
               </a:rPr>
-              <a:t>+60d: cohort staffed (internal-first); accounts + controls selected</a:t>
-            </a:r>
-          </a:p>
-          <a:p>
-            <a:pPr algn="l">
-              <a:spcAft>
-                <a:spcPts val="1000"/>
-              </a:spcAft>
-            </a:pPr>
-            <a:r>
-              <a:rPr sz="1700" b="1">
-                <a:solidFill>
-                  <a:srgbClr val="00BCEB"/>
-                </a:solidFill>
-                <a:latin typeface="Calibri"/>
-              </a:rPr>
-              <a:t>•  </a:t>
-            </a:r>
-            <a:r>
-              <a:rPr sz="1700" b="0">
-                <a:solidFill>
-                  <a:srgbClr val="F2F4F8"/>
-                </a:solidFill>
-                <a:latin typeface="Calibri"/>
-              </a:rPr>
-              <a:t>+90d: first X-Arch opportunities framed; enablement ramp underway</a:t>
+              <a:t>Strategy → field-ready playbook</a:t>
             </a:r>
           </a:p>
         </p:txBody>
@@ -8666,7 +8032,7 @@
                 </a:solidFill>
                 <a:latin typeface="Calibri"/>
               </a:rPr>
-              <a:t>Illustrative figures — replace with actuals before presenting.</a:t>
+              <a:t>Appendix — reserve for Q&amp;A. Illustrative figures.</a:t>
             </a:r>
           </a:p>
         </p:txBody>
@@ -8741,8 +8107,8 @@
         </p:nvSpPr>
         <p:spPr>
           <a:xfrm>
-            <a:off x="731520" y="2743200"/>
-            <a:ext cx="10698480" cy="914400"/>
+            <a:off x="548640" y="411480"/>
+            <a:ext cx="11064240" cy="365760"/>
           </a:xfrm>
           <a:prstGeom prst="rect">
             <a:avLst/>
@@ -8761,27 +8127,70 @@
               </a:spcAft>
             </a:pPr>
             <a:r>
-              <a:rPr sz="1600" b="1">
+              <a:rPr sz="1200" b="1">
                 <a:solidFill>
                   <a:srgbClr val="00BCEB"/>
                 </a:solidFill>
                 <a:latin typeface="Calibri"/>
               </a:rPr>
-              <a:t>APPENDIX</a:t>
-            </a:r>
-          </a:p>
-        </p:txBody>
-      </p:sp>
-      <p:sp>
-        <p:nvSpPr>
-          <p:cNvPr id="4" name="TextBox 3"/>
+              <a:t>APPENDIX · A4</a:t>
+            </a:r>
+          </a:p>
+        </p:txBody>
+      </p:sp>
+      <p:sp>
+        <p:nvSpPr>
+          <p:cNvPr id="4" name="Rectangle 3"/>
+          <p:cNvSpPr/>
+          <p:nvPr/>
+        </p:nvSpPr>
+        <p:spPr>
+          <a:xfrm>
+            <a:off x="548640" y="868680"/>
+            <a:ext cx="1280160" cy="50800"/>
+          </a:xfrm>
+          <a:prstGeom prst="rect">
+            <a:avLst/>
+          </a:prstGeom>
+          <a:solidFill>
+            <a:srgbClr val="00BCEB"/>
+          </a:solidFill>
+          <a:ln>
+            <a:noFill/>
+          </a:ln>
+        </p:spPr>
+        <p:style>
+          <a:lnRef idx="1">
+            <a:schemeClr val="accent1"/>
+          </a:lnRef>
+          <a:fillRef idx="3">
+            <a:schemeClr val="accent1"/>
+          </a:fillRef>
+          <a:effectRef idx="2">
+            <a:schemeClr val="accent1"/>
+          </a:effectRef>
+          <a:fontRef idx="minor">
+            <a:schemeClr val="lt1"/>
+          </a:fontRef>
+        </p:style>
+        <p:txBody>
+          <a:bodyPr rtlCol="0" anchor="ctr"/>
+          <a:lstStyle/>
+          <a:p>
+            <a:pPr algn="ctr"/>
+          </a:p>
+        </p:txBody>
+      </p:sp>
+      <p:sp>
+        <p:nvSpPr>
+          <p:cNvPr id="5" name="TextBox 4"/>
           <p:cNvSpPr txBox="1"/>
           <p:nvPr/>
         </p:nvSpPr>
         <p:spPr>
           <a:xfrm>
-            <a:off x="731520" y="3200400"/>
-            <a:ext cx="10698480" cy="914400"/>
+            <a:off x="548640" y="1051560"/>
+            <a:ext cx="11064240" cy="1005840"/>
           </a:xfrm>
           <a:prstGeom prst="rect">
             <a:avLst/>
@@ -8800,13 +8209,195 @@
               </a:spcAft>
             </a:pPr>
             <a:r>
-              <a:rPr sz="3000" b="1">
+              <a:rPr sz="2800" b="1">
                 <a:solidFill>
                   <a:srgbClr val="F2F4F8"/>
                 </a:solidFill>
                 <a:latin typeface="Calibri"/>
               </a:rPr>
-              <a:t>Detail held in reserve for Q&amp;A</a:t>
+              <a:t>OT safety boundary</a:t>
+            </a:r>
+          </a:p>
+        </p:txBody>
+      </p:sp>
+      <p:sp>
+        <p:nvSpPr>
+          <p:cNvPr id="6" name="Rectangle 5"/>
+          <p:cNvSpPr/>
+          <p:nvPr/>
+        </p:nvSpPr>
+        <p:spPr>
+          <a:xfrm>
+            <a:off x="548640" y="2331720"/>
+            <a:ext cx="11064240" cy="3931920"/>
+          </a:xfrm>
+          <a:prstGeom prst="rect">
+            <a:avLst/>
+          </a:prstGeom>
+          <a:solidFill>
+            <a:srgbClr val="1A1A2E"/>
+          </a:solidFill>
+          <a:ln w="12700">
+            <a:solidFill>
+              <a:srgbClr val="2C2C3A"/>
+            </a:solidFill>
+          </a:ln>
+        </p:spPr>
+        <p:style>
+          <a:lnRef idx="1">
+            <a:schemeClr val="accent1"/>
+          </a:lnRef>
+          <a:fillRef idx="3">
+            <a:schemeClr val="accent1"/>
+          </a:fillRef>
+          <a:effectRef idx="2">
+            <a:schemeClr val="accent1"/>
+          </a:effectRef>
+          <a:fontRef idx="minor">
+            <a:schemeClr val="lt1"/>
+          </a:fontRef>
+        </p:style>
+        <p:txBody>
+          <a:bodyPr rtlCol="0" anchor="ctr"/>
+          <a:lstStyle/>
+          <a:p>
+            <a:pPr algn="ctr"/>
+          </a:p>
+        </p:txBody>
+      </p:sp>
+      <p:sp>
+        <p:nvSpPr>
+          <p:cNvPr id="7" name="TextBox 6"/>
+          <p:cNvSpPr txBox="1"/>
+          <p:nvPr/>
+        </p:nvSpPr>
+        <p:spPr>
+          <a:xfrm>
+            <a:off x="914400" y="2560320"/>
+            <a:ext cx="10332720" cy="3566160"/>
+          </a:xfrm>
+          <a:prstGeom prst="rect">
+            <a:avLst/>
+          </a:prstGeom>
+          <a:noFill/>
+        </p:spPr>
+        <p:txBody>
+          <a:bodyPr wrap="square" anchor="t">
+            <a:spAutoFit/>
+          </a:bodyPr>
+          <a:lstStyle/>
+          <a:p>
+            <a:pPr algn="l">
+              <a:spcAft>
+                <a:spcPts val="1200"/>
+              </a:spcAft>
+            </a:pPr>
+            <a:r>
+              <a:rPr sz="1800" b="1">
+                <a:solidFill>
+                  <a:srgbClr val="00BCEB"/>
+                </a:solidFill>
+                <a:latin typeface="Calibri"/>
+              </a:rPr>
+              <a:t>•  </a:t>
+            </a:r>
+            <a:r>
+              <a:rPr sz="1800" b="0">
+                <a:solidFill>
+                  <a:srgbClr val="F2F4F8"/>
+                </a:solidFill>
+                <a:latin typeface="Calibri"/>
+              </a:rPr>
+              <a:t>Read-only / passive acquisition for safety signals</a:t>
+            </a:r>
+          </a:p>
+          <a:p>
+            <a:pPr algn="l">
+              <a:spcAft>
+                <a:spcPts val="1200"/>
+              </a:spcAft>
+            </a:pPr>
+            <a:r>
+              <a:rPr sz="1800" b="1">
+                <a:solidFill>
+                  <a:srgbClr val="00BCEB"/>
+                </a:solidFill>
+                <a:latin typeface="Calibri"/>
+              </a:rPr>
+              <a:t>•  </a:t>
+            </a:r>
+            <a:r>
+              <a:rPr sz="1800" b="0">
+                <a:solidFill>
+                  <a:srgbClr val="F2F4F8"/>
+                </a:solidFill>
+                <a:latin typeface="Calibri"/>
+              </a:rPr>
+              <a:t>Never write config to PLC/HMI/DCS/RTU/SIS</a:t>
+            </a:r>
+          </a:p>
+          <a:p>
+            <a:pPr algn="l">
+              <a:spcAft>
+                <a:spcPts val="1200"/>
+              </a:spcAft>
+            </a:pPr>
+            <a:r>
+              <a:rPr sz="1800" b="1">
+                <a:solidFill>
+                  <a:srgbClr val="00BCEB"/>
+                </a:solidFill>
+                <a:latin typeface="Calibri"/>
+              </a:rPr>
+              <a:t>•  </a:t>
+            </a:r>
+            <a:r>
+              <a:rPr sz="1800" b="0">
+                <a:solidFill>
+                  <a:srgbClr val="F2F4F8"/>
+                </a:solidFill>
+                <a:latin typeface="Calibri"/>
+              </a:rPr>
+              <a:t>A hard guardrail AND a trust-winning differentiator</a:t>
+            </a:r>
+          </a:p>
+        </p:txBody>
+      </p:sp>
+      <p:sp>
+        <p:nvSpPr>
+          <p:cNvPr id="8" name="TextBox 7"/>
+          <p:cNvSpPr txBox="1"/>
+          <p:nvPr/>
+        </p:nvSpPr>
+        <p:spPr>
+          <a:xfrm>
+            <a:off x="548640" y="6419088"/>
+            <a:ext cx="11064240" cy="320040"/>
+          </a:xfrm>
+          <a:prstGeom prst="rect">
+            <a:avLst/>
+          </a:prstGeom>
+          <a:noFill/>
+        </p:spPr>
+        <p:txBody>
+          <a:bodyPr wrap="square" anchor="t">
+            <a:spAutoFit/>
+          </a:bodyPr>
+          <a:lstStyle/>
+          <a:p>
+            <a:pPr algn="l">
+              <a:spcAft>
+                <a:spcPts val="600"/>
+              </a:spcAft>
+            </a:pPr>
+            <a:r>
+              <a:rPr sz="1000" b="0">
+                <a:solidFill>
+                  <a:srgbClr val="9AA3B2"/>
+                </a:solidFill>
+                <a:latin typeface="Calibri"/>
+              </a:rPr>
+              <a:t>Appendix — reserve for Q&amp;A. Illustrative figures.</a:t>
             </a:r>
           </a:p>
         </p:txBody>
@@ -8907,7 +8498,7 @@
                 </a:solidFill>
                 <a:latin typeface="Calibri"/>
               </a:rPr>
-              <a:t>APPENDIX · A1</a:t>
+              <a:t>APPENDIX · A5</a:t>
             </a:r>
           </a:p>
         </p:txBody>
@@ -8989,7 +8580,7 @@
                 </a:solidFill>
                 <a:latin typeface="Calibri"/>
               </a:rPr>
-              <a:t>Role, competencies, and skills matrix</a:t>
+              <a:t>Assumptions register and 3-year P&amp;L</a:t>
             </a:r>
           </a:p>
         </p:txBody>
@@ -9063,11 +8654,11 @@
           <a:p>
             <a:pPr algn="l">
               <a:spcAft>
-                <a:spcPts val="1000"/>
-              </a:spcAft>
-            </a:pPr>
-            <a:r>
-              <a:rPr sz="1700" b="1">
+                <a:spcPts val="1200"/>
+              </a:spcAft>
+            </a:pPr>
+            <a:r>
+              <a:rPr sz="1800" b="1">
                 <a:solidFill>
                   <a:srgbClr val="00BCEB"/>
                 </a:solidFill>
@@ -9076,23 +8667,23 @@
               <a:t>•  </a:t>
             </a:r>
             <a:r>
-              <a:rPr sz="1700" b="0">
+              <a:rPr sz="1800" b="0">
                 <a:solidFill>
                   <a:srgbClr val="F2F4F8"/>
                 </a:solidFill>
                 <a:latin typeface="Calibri"/>
               </a:rPr>
-              <a:t>Four competency pillars: business fluency, X-arch depth, exec presence, orchestration</a:t>
-            </a:r>
-          </a:p>
-          <a:p>
-            <a:pPr algn="l">
-              <a:spcAft>
-                <a:spcPts val="1000"/>
-              </a:spcAft>
-            </a:pPr>
-            <a:r>
-              <a:rPr sz="1700" b="1">
+              <a:t>Every input (A1–A13) is visible and editable</a:t>
+            </a:r>
+          </a:p>
+          <a:p>
+            <a:pPr algn="l">
+              <a:spcAft>
+                <a:spcPts val="1200"/>
+              </a:spcAft>
+            </a:pPr>
+            <a:r>
+              <a:rPr sz="1800" b="1">
                 <a:solidFill>
                   <a:srgbClr val="00BCEB"/>
                 </a:solidFill>
@@ -9101,23 +8692,23 @@
               <a:t>•  </a:t>
             </a:r>
             <a:r>
-              <a:rPr sz="1700" b="0">
+              <a:rPr sz="1800" b="0">
                 <a:solidFill>
                   <a:srgbClr val="F2F4F8"/>
                 </a:solidFill>
                 <a:latin typeface="Calibri"/>
               </a:rPr>
-              <a:t>Proficiency targets per domain; deep in ≥2 pillars, conversant in all</a:t>
-            </a:r>
-          </a:p>
-          <a:p>
-            <a:pPr algn="l">
-              <a:spcAft>
-                <a:spcPts val="1000"/>
-              </a:spcAft>
-            </a:pPr>
-            <a:r>
-              <a:rPr sz="1700" b="1">
+              <a:t>3-year scale path with improving ROI</a:t>
+            </a:r>
+          </a:p>
+          <a:p>
+            <a:pPr algn="l">
+              <a:spcAft>
+                <a:spcPts val="1200"/>
+              </a:spcAft>
+            </a:pPr>
+            <a:r>
+              <a:rPr sz="1800" b="1">
                 <a:solidFill>
                   <a:srgbClr val="00BCEB"/>
                 </a:solidFill>
@@ -9126,13 +8717,13 @@
               <a:t>•  </a:t>
             </a:r>
             <a:r>
-              <a:rPr sz="1700" b="0">
+              <a:rPr sz="1800" b="0">
                 <a:solidFill>
                   <a:srgbClr val="F2F4F8"/>
                 </a:solidFill>
                 <a:latin typeface="Calibri"/>
               </a:rPr>
-              <a:t>Deep in one vertical; team covers all four at expert level</a:t>
+              <a:t>Structure holds; only inputs change</a:t>
             </a:r>
           </a:p>
         </p:txBody>
@@ -9428,11 +9019,11 @@
           <a:p>
             <a:pPr algn="l">
               <a:spcAft>
-                <a:spcPts val="1000"/>
-              </a:spcAft>
-            </a:pPr>
-            <a:r>
-              <a:rPr sz="1700" b="1">
+                <a:spcPts val="1200"/>
+              </a:spcAft>
+            </a:pPr>
+            <a:r>
+              <a:rPr sz="1800" b="1">
                 <a:solidFill>
                   <a:srgbClr val="00BCEB"/>
                 </a:solidFill>
@@ -9441,23 +9032,23 @@
               <a:t>•  </a:t>
             </a:r>
             <a:r>
-              <a:rPr sz="1700" b="0">
+              <a:rPr sz="1800" b="0">
                 <a:solidFill>
                   <a:srgbClr val="F2F4F8"/>
                 </a:solidFill>
                 <a:latin typeface="Calibri"/>
               </a:rPr>
-              <a:t>We sell in silos: four Cisco conversations, not one integrated outcome</a:t>
-            </a:r>
-          </a:p>
-          <a:p>
-            <a:pPr algn="l">
-              <a:spcAft>
-                <a:spcPts val="1000"/>
-              </a:spcAft>
-            </a:pPr>
-            <a:r>
-              <a:rPr sz="1700" b="1">
+              <a:t>Four Cisco conversations, not one integrated outcome</a:t>
+            </a:r>
+          </a:p>
+          <a:p>
+            <a:pPr algn="l">
+              <a:spcAft>
+                <a:spcPts val="1200"/>
+              </a:spcAft>
+            </a:pPr>
+            <a:r>
+              <a:rPr sz="1800" b="1">
                 <a:solidFill>
                   <a:srgbClr val="00BCEB"/>
                 </a:solidFill>
@@ -9466,23 +9057,23 @@
               <a:t>•  </a:t>
             </a:r>
             <a:r>
-              <a:rPr sz="1700" b="0">
+              <a:rPr sz="1800" b="0">
                 <a:solidFill>
                   <a:srgbClr val="F2F4F8"/>
                 </a:solidFill>
                 <a:latin typeface="Calibri"/>
               </a:rPr>
-              <a:t>We talk speeds-and-feeds, not the business outcomes buyers fund</a:t>
-            </a:r>
-          </a:p>
-          <a:p>
-            <a:pPr algn="l">
-              <a:spcAft>
-                <a:spcPts val="1000"/>
-              </a:spcAft>
-            </a:pPr>
-            <a:r>
-              <a:rPr sz="1700" b="1">
+              <a:t>Speeds-and-feeds, not the outcomes buyers fund</a:t>
+            </a:r>
+          </a:p>
+          <a:p>
+            <a:pPr algn="l">
+              <a:spcAft>
+                <a:spcPts val="1200"/>
+              </a:spcAft>
+            </a:pPr>
+            <a:r>
+              <a:rPr sz="1800" b="1">
                 <a:solidFill>
                   <a:srgbClr val="00BCEB"/>
                 </a:solidFill>
@@ -9491,23 +9082,23 @@
               <a:t>•  </a:t>
             </a:r>
             <a:r>
-              <a:rPr sz="1700" b="0">
+              <a:rPr sz="1800" b="0">
                 <a:solidFill>
                   <a:srgbClr val="F2F4F8"/>
                 </a:solidFill>
                 <a:latin typeface="Calibri"/>
               </a:rPr>
-              <a:t>Splunk cross-sell is under-attached to the Cisco install base (and vice versa)</a:t>
-            </a:r>
-          </a:p>
-          <a:p>
-            <a:pPr algn="l">
-              <a:spcAft>
-                <a:spcPts val="1000"/>
-              </a:spcAft>
-            </a:pPr>
-            <a:r>
-              <a:rPr sz="1700" b="1">
+              <a:t>Splunk ↔ Cisco cross-sell is under-attached</a:t>
+            </a:r>
+          </a:p>
+          <a:p>
+            <a:pPr algn="l">
+              <a:spcAft>
+                <a:spcPts val="1200"/>
+              </a:spcAft>
+            </a:pPr>
+            <a:r>
+              <a:rPr sz="1800" b="1">
                 <a:solidFill>
                   <a:srgbClr val="00BCEB"/>
                 </a:solidFill>
@@ -9516,13 +9107,38 @@
               <a:t>•  </a:t>
             </a:r>
             <a:r>
-              <a:rPr sz="1700" b="0">
+              <a:rPr sz="1800" b="0">
                 <a:solidFill>
                   <a:srgbClr val="F2F4F8"/>
                 </a:solidFill>
                 <a:latin typeface="Calibri"/>
               </a:rPr>
-              <a:t>We lose the 'architecture of the deal' — SIs and competitors own the frame</a:t>
+              <a:t>SIs and competitors own the 'architecture of the deal'</a:t>
+            </a:r>
+          </a:p>
+          <a:p>
+            <a:pPr algn="l">
+              <a:spcAft>
+                <a:spcPts val="1200"/>
+              </a:spcAft>
+            </a:pPr>
+            <a:r>
+              <a:rPr sz="1800" b="1">
+                <a:solidFill>
+                  <a:srgbClr val="00BCEB"/>
+                </a:solidFill>
+                <a:latin typeface="Calibri"/>
+              </a:rPr>
+              <a:t>•  </a:t>
+            </a:r>
+            <a:r>
+              <a:rPr sz="1800" b="0">
+                <a:solidFill>
+                  <a:srgbClr val="F2F4F8"/>
+                </a:solidFill>
+                <a:latin typeface="Calibri"/>
+              </a:rPr>
+              <a:t>Cost of inaction: nine figures of influenceable pipeline left on the table</a:t>
             </a:r>
           </a:p>
         </p:txBody>
@@ -9662,7 +9278,7 @@
                 </a:solidFill>
                 <a:latin typeface="Calibri"/>
               </a:rPr>
-              <a:t>APPENDIX · A2</a:t>
+              <a:t>APPENDIX · A6</a:t>
             </a:r>
           </a:p>
         </p:txBody>
@@ -9744,7 +9360,7 @@
                 </a:solidFill>
                 <a:latin typeface="Calibri"/>
               </a:rPr>
-              <a:t>Org placement and RACI</a:t>
+              <a:t>Compensation design</a:t>
             </a:r>
           </a:p>
         </p:txBody>
@@ -9818,11 +9434,11 @@
           <a:p>
             <a:pPr algn="l">
               <a:spcAft>
-                <a:spcPts val="1000"/>
-              </a:spcAft>
-            </a:pPr>
-            <a:r>
-              <a:rPr sz="1700" b="1">
+                <a:spcPts val="1200"/>
+              </a:spcAft>
+            </a:pPr>
+            <a:r>
+              <a:rPr sz="1800" b="1">
                 <a:solidFill>
                   <a:srgbClr val="00BCEB"/>
                 </a:solidFill>
@@ -9831,23 +9447,23 @@
               <a:t>•  </a:t>
             </a:r>
             <a:r>
-              <a:rPr sz="1700" b="0">
+              <a:rPr sz="1800" b="0">
                 <a:solidFill>
                   <a:srgbClr val="F2F4F8"/>
                 </a:solidFill>
                 <a:latin typeface="Calibri"/>
               </a:rPr>
-              <a:t>GTM-primary reporting with a strong dotted line to the CTO/engineering org</a:t>
-            </a:r>
-          </a:p>
-          <a:p>
-            <a:pPr algn="l">
-              <a:spcAft>
-                <a:spcPts val="1000"/>
-              </a:spcAft>
-            </a:pPr>
-            <a:r>
-              <a:rPr sz="1700" b="1">
+              <a:t>Influence credit is additive — BUs keep 100%</a:t>
+            </a:r>
+          </a:p>
+          <a:p>
+            <a:pPr algn="l">
+              <a:spcAft>
+                <a:spcPts val="1200"/>
+              </a:spcAft>
+            </a:pPr>
+            <a:r>
+              <a:rPr sz="1800" b="1">
                 <a:solidFill>
                   <a:srgbClr val="00BCEB"/>
                 </a:solidFill>
@@ -9856,23 +9472,23 @@
               <a:t>•  </a:t>
             </a:r>
             <a:r>
-              <a:rPr sz="1700" b="0">
+              <a:rPr sz="1800" b="0">
                 <a:solidFill>
                   <a:srgbClr val="F2F4F8"/>
                 </a:solidFill>
                 <a:latin typeface="Calibri"/>
               </a:rPr>
-              <a:t>Keeps it revenue-accountable AND cross-BU neutral</a:t>
-            </a:r>
-          </a:p>
-          <a:p>
-            <a:pPr algn="l">
-              <a:spcAft>
-                <a:spcPts val="1000"/>
-              </a:spcAft>
-            </a:pPr>
-            <a:r>
-              <a:rPr sz="1700" b="1">
+              <a:t>50% bookings / 20% Splunk attach / 15% leading / 15% MBOs</a:t>
+            </a:r>
+          </a:p>
+          <a:p>
+            <a:pPr algn="l">
+              <a:spcAft>
+                <a:spcPts val="1200"/>
+              </a:spcAft>
+            </a:pPr>
+            <a:r>
+              <a:rPr sz="1800" b="1">
                 <a:solidFill>
                   <a:srgbClr val="00BCEB"/>
                 </a:solidFill>
@@ -9881,13 +9497,13 @@
               <a:t>•  </a:t>
             </a:r>
             <a:r>
-              <a:rPr sz="1700" b="0">
+              <a:rPr sz="1800" b="0">
                 <a:solidFill>
                   <a:srgbClr val="F2F4F8"/>
                 </a:solidFill>
                 <a:latin typeface="Calibri"/>
               </a:rPr>
-              <a:t>RACI: Field CTO accountable for the frame; AE accountable for the account</a:t>
+              <a:t>Deal desk arbitrates via the influence ledger</a:t>
             </a:r>
           </a:p>
         </p:txBody>
@@ -10027,7 +9643,7 @@
                 </a:solidFill>
                 <a:latin typeface="Calibri"/>
               </a:rPr>
-              <a:t>APPENDIX · A3</a:t>
+              <a:t>APPENDIX · A7</a:t>
             </a:r>
           </a:p>
         </p:txBody>
@@ -10109,7 +9725,7 @@
                 </a:solidFill>
                 <a:latin typeface="Calibri"/>
               </a:rPr>
-              <a:t>Per-vertical field engagement kits</a:t>
+              <a:t>Competitive framing</a:t>
             </a:r>
           </a:p>
         </p:txBody>
@@ -10183,11 +9799,11 @@
           <a:p>
             <a:pPr algn="l">
               <a:spcAft>
-                <a:spcPts val="1000"/>
-              </a:spcAft>
-            </a:pPr>
-            <a:r>
-              <a:rPr sz="1700" b="1">
+                <a:spcPts val="1200"/>
+              </a:spcAft>
+            </a:pPr>
+            <a:r>
+              <a:rPr sz="1800" b="1">
                 <a:solidFill>
                   <a:srgbClr val="00BCEB"/>
                 </a:solidFill>
@@ -10196,23 +9812,23 @@
               <a:t>•  </a:t>
             </a:r>
             <a:r>
-              <a:rPr sz="1700" b="0">
+              <a:rPr sz="1800" b="0">
                 <a:solidFill>
                   <a:srgbClr val="F2F4F8"/>
                 </a:solidFill>
                 <a:latin typeface="Calibri"/>
               </a:rPr>
-              <a:t>Buyers, discovery questions, outcome hypotheses, objection handling</a:t>
-            </a:r>
-          </a:p>
-          <a:p>
-            <a:pPr algn="l">
-              <a:spcAft>
-                <a:spcPts val="1000"/>
-              </a:spcAft>
-            </a:pPr>
-            <a:r>
-              <a:rPr sz="1700" b="1">
+              <a:t>Point vendors, SIEM/observability, SIs, hyperscalers</a:t>
+            </a:r>
+          </a:p>
+          <a:p>
+            <a:pPr algn="l">
+              <a:spcAft>
+                <a:spcPts val="1200"/>
+              </a:spcAft>
+            </a:pPr>
+            <a:r>
+              <a:rPr sz="1800" b="1">
                 <a:solidFill>
                   <a:srgbClr val="00BCEB"/>
                 </a:solidFill>
@@ -10221,23 +9837,23 @@
               <a:t>•  </a:t>
             </a:r>
             <a:r>
-              <a:rPr sz="1700" b="0">
+              <a:rPr sz="1800" b="0">
                 <a:solidFill>
                   <a:srgbClr val="F2F4F8"/>
                 </a:solidFill>
                 <a:latin typeface="Calibri"/>
               </a:rPr>
-              <a:t>One kit per vertical: Transportation, FinServ, Healthcare, Public Sector</a:t>
-            </a:r>
-          </a:p>
-          <a:p>
-            <a:pPr algn="l">
-              <a:spcAft>
-                <a:spcPts val="1000"/>
-              </a:spcAft>
-            </a:pPr>
-            <a:r>
-              <a:rPr sz="1700" b="1">
+              <a:t>The SI dynamic is the biggest structural risk</a:t>
+            </a:r>
+          </a:p>
+          <a:p>
+            <a:pPr algn="l">
+              <a:spcAft>
+                <a:spcPts val="1200"/>
+              </a:spcAft>
+            </a:pPr>
+            <a:r>
+              <a:rPr sz="1800" b="1">
                 <a:solidFill>
                   <a:srgbClr val="00BCEB"/>
                 </a:solidFill>
@@ -10246,13 +9862,13 @@
               <a:t>•  </a:t>
             </a:r>
             <a:r>
-              <a:rPr sz="1700" b="0">
+              <a:rPr sz="1800" b="0">
                 <a:solidFill>
                   <a:srgbClr val="F2F4F8"/>
                 </a:solidFill>
                 <a:latin typeface="Calibri"/>
               </a:rPr>
-              <a:t>Turns the strategy into a field-ready playbook</a:t>
+              <a:t>Whoever frames the architecture wins the budget</a:t>
             </a:r>
           </a:p>
         </p:txBody>
@@ -10392,7 +10008,7 @@
                 </a:solidFill>
                 <a:latin typeface="Calibri"/>
               </a:rPr>
-              <a:t>APPENDIX · A4</a:t>
+              <a:t>APPENDIX · A8</a:t>
             </a:r>
           </a:p>
         </p:txBody>
@@ -10474,7 +10090,7 @@
                 </a:solidFill>
                 <a:latin typeface="Calibri"/>
               </a:rPr>
-              <a:t>OT safety boundary</a:t>
+              <a:t>Full risk register and early-warning indicators</a:t>
             </a:r>
           </a:p>
         </p:txBody>
@@ -10548,11 +10164,11 @@
           <a:p>
             <a:pPr algn="l">
               <a:spcAft>
-                <a:spcPts val="1000"/>
-              </a:spcAft>
-            </a:pPr>
-            <a:r>
-              <a:rPr sz="1700" b="1">
+                <a:spcPts val="1200"/>
+              </a:spcAft>
+            </a:pPr>
+            <a:r>
+              <a:rPr sz="1800" b="1">
                 <a:solidFill>
                   <a:srgbClr val="00BCEB"/>
                 </a:solidFill>
@@ -10561,23 +10177,23 @@
               <a:t>•  </a:t>
             </a:r>
             <a:r>
-              <a:rPr sz="1700" b="0">
+              <a:rPr sz="1800" b="0">
                 <a:solidFill>
                   <a:srgbClr val="F2F4F8"/>
                 </a:solidFill>
                 <a:latin typeface="Calibri"/>
               </a:rPr>
-              <a:t>Read-only / passive acquisition for safety-related signals</a:t>
-            </a:r>
-          </a:p>
-          <a:p>
-            <a:pPr algn="l">
-              <a:spcAft>
-                <a:spcPts val="1000"/>
-              </a:spcAft>
-            </a:pPr>
-            <a:r>
-              <a:rPr sz="1700" b="1">
+              <a:t>12 risks: likelihood, impact, mitigation, owner</a:t>
+            </a:r>
+          </a:p>
+          <a:p>
+            <a:pPr algn="l">
+              <a:spcAft>
+                <a:spcPts val="1200"/>
+              </a:spcAft>
+            </a:pPr>
+            <a:r>
+              <a:rPr sz="1800" b="1">
                 <a:solidFill>
                   <a:srgbClr val="00BCEB"/>
                 </a:solidFill>
@@ -10586,23 +10202,23 @@
               <a:t>•  </a:t>
             </a:r>
             <a:r>
-              <a:rPr sz="1700" b="0">
+              <a:rPr sz="1800" b="0">
                 <a:solidFill>
                   <a:srgbClr val="F2F4F8"/>
                 </a:solidFill>
                 <a:latin typeface="Calibri"/>
               </a:rPr>
-              <a:t>Never write config to PLCs/HMIs/DCS/RTUs/SIS; human-in-the-loop response</a:t>
-            </a:r>
-          </a:p>
-          <a:p>
-            <a:pPr algn="l">
-              <a:spcAft>
-                <a:spcPts val="1000"/>
-              </a:spcAft>
-            </a:pPr>
-            <a:r>
-              <a:rPr sz="1700" b="1">
+              <a:t>Leading signals with explicit action triggers</a:t>
+            </a:r>
+          </a:p>
+          <a:p>
+            <a:pPr algn="l">
+              <a:spcAft>
+                <a:spcPts val="1200"/>
+              </a:spcAft>
+            </a:pPr>
+            <a:r>
+              <a:rPr sz="1800" b="1">
                 <a:solidFill>
                   <a:srgbClr val="00BCEB"/>
                 </a:solidFill>
@@ -10611,1467 +10227,7 @@
               <a:t>•  </a:t>
             </a:r>
             <a:r>
-              <a:rPr sz="1700" b="0">
-                <a:solidFill>
-                  <a:srgbClr val="F2F4F8"/>
-                </a:solidFill>
-                <a:latin typeface="Calibri"/>
-              </a:rPr>
-              <a:t>A hard guardrail AND a competitive differentiator that earns OT trust</a:t>
-            </a:r>
-          </a:p>
-        </p:txBody>
-      </p:sp>
-      <p:sp>
-        <p:nvSpPr>
-          <p:cNvPr id="8" name="TextBox 7"/>
-          <p:cNvSpPr txBox="1"/>
-          <p:nvPr/>
-        </p:nvSpPr>
-        <p:spPr>
-          <a:xfrm>
-            <a:off x="548640" y="6419088"/>
-            <a:ext cx="11064240" cy="320040"/>
-          </a:xfrm>
-          <a:prstGeom prst="rect">
-            <a:avLst/>
-          </a:prstGeom>
-          <a:noFill/>
-        </p:spPr>
-        <p:txBody>
-          <a:bodyPr wrap="square" anchor="t">
-            <a:spAutoFit/>
-          </a:bodyPr>
-          <a:lstStyle/>
-          <a:p>
-            <a:pPr algn="l">
-              <a:spcAft>
-                <a:spcPts val="600"/>
-              </a:spcAft>
-            </a:pPr>
-            <a:r>
-              <a:rPr sz="1000" b="0">
-                <a:solidFill>
-                  <a:srgbClr val="9AA3B2"/>
-                </a:solidFill>
-                <a:latin typeface="Calibri"/>
-              </a:rPr>
-              <a:t>Appendix — reserve for Q&amp;A. Illustrative figures.</a:t>
-            </a:r>
-          </a:p>
-        </p:txBody>
-      </p:sp>
-    </p:spTree>
-  </p:cSld>
-  <p:clrMapOvr>
-    <a:masterClrMapping/>
-  </p:clrMapOvr>
-</p:sld>
-</file>
-
-<file path=ppt/slides/slide23.xml><?xml version="1.0" encoding="utf-8"?>
-<p:sld xmlns:a="http://schemas.openxmlformats.org/drawingml/2006/main" xmlns:p="http://schemas.openxmlformats.org/presentationml/2006/main" xmlns:r="http://schemas.openxmlformats.org/officeDocument/2006/relationships">
-  <p:cSld>
-    <p:spTree>
-      <p:nvGrpSpPr>
-        <p:cNvPr id="1" name=""/>
-        <p:cNvGrpSpPr/>
-        <p:nvPr/>
-      </p:nvGrpSpPr>
-      <p:grpSpPr/>
-      <p:sp>
-        <p:nvSpPr>
-          <p:cNvPr id="2" name="Rectangle 1"/>
-          <p:cNvSpPr/>
-          <p:nvPr/>
-        </p:nvSpPr>
-        <p:spPr>
-          <a:xfrm>
-            <a:off x="0" y="0"/>
-            <a:ext cx="12191695" cy="6858000"/>
-          </a:xfrm>
-          <a:prstGeom prst="rect">
-            <a:avLst/>
-          </a:prstGeom>
-          <a:solidFill>
-            <a:srgbClr val="101014"/>
-          </a:solidFill>
-          <a:ln>
-            <a:noFill/>
-          </a:ln>
-          <a:effectLst/>
-        </p:spPr>
-        <p:style>
-          <a:lnRef idx="1">
-            <a:schemeClr val="accent1"/>
-          </a:lnRef>
-          <a:fillRef idx="3">
-            <a:schemeClr val="accent1"/>
-          </a:fillRef>
-          <a:effectRef idx="2">
-            <a:schemeClr val="accent1"/>
-          </a:effectRef>
-          <a:fontRef idx="minor">
-            <a:schemeClr val="lt1"/>
-          </a:fontRef>
-        </p:style>
-        <p:txBody>
-          <a:bodyPr rtlCol="0" anchor="ctr"/>
-          <a:lstStyle/>
-          <a:p>
-            <a:pPr algn="ctr"/>
-          </a:p>
-        </p:txBody>
-      </p:sp>
-      <p:sp>
-        <p:nvSpPr>
-          <p:cNvPr id="3" name="TextBox 2"/>
-          <p:cNvSpPr txBox="1"/>
-          <p:nvPr/>
-        </p:nvSpPr>
-        <p:spPr>
-          <a:xfrm>
-            <a:off x="548640" y="411480"/>
-            <a:ext cx="11064240" cy="365760"/>
-          </a:xfrm>
-          <a:prstGeom prst="rect">
-            <a:avLst/>
-          </a:prstGeom>
-          <a:noFill/>
-        </p:spPr>
-        <p:txBody>
-          <a:bodyPr wrap="square" anchor="t">
-            <a:spAutoFit/>
-          </a:bodyPr>
-          <a:lstStyle/>
-          <a:p>
-            <a:pPr algn="l">
-              <a:spcAft>
-                <a:spcPts val="600"/>
-              </a:spcAft>
-            </a:pPr>
-            <a:r>
-              <a:rPr sz="1200" b="1">
-                <a:solidFill>
-                  <a:srgbClr val="00BCEB"/>
-                </a:solidFill>
-                <a:latin typeface="Calibri"/>
-              </a:rPr>
-              <a:t>APPENDIX · A5</a:t>
-            </a:r>
-          </a:p>
-        </p:txBody>
-      </p:sp>
-      <p:sp>
-        <p:nvSpPr>
-          <p:cNvPr id="4" name="Rectangle 3"/>
-          <p:cNvSpPr/>
-          <p:nvPr/>
-        </p:nvSpPr>
-        <p:spPr>
-          <a:xfrm>
-            <a:off x="548640" y="868680"/>
-            <a:ext cx="1280160" cy="50800"/>
-          </a:xfrm>
-          <a:prstGeom prst="rect">
-            <a:avLst/>
-          </a:prstGeom>
-          <a:solidFill>
-            <a:srgbClr val="00BCEB"/>
-          </a:solidFill>
-          <a:ln>
-            <a:noFill/>
-          </a:ln>
-        </p:spPr>
-        <p:style>
-          <a:lnRef idx="1">
-            <a:schemeClr val="accent1"/>
-          </a:lnRef>
-          <a:fillRef idx="3">
-            <a:schemeClr val="accent1"/>
-          </a:fillRef>
-          <a:effectRef idx="2">
-            <a:schemeClr val="accent1"/>
-          </a:effectRef>
-          <a:fontRef idx="minor">
-            <a:schemeClr val="lt1"/>
-          </a:fontRef>
-        </p:style>
-        <p:txBody>
-          <a:bodyPr rtlCol="0" anchor="ctr"/>
-          <a:lstStyle/>
-          <a:p>
-            <a:pPr algn="ctr"/>
-          </a:p>
-        </p:txBody>
-      </p:sp>
-      <p:sp>
-        <p:nvSpPr>
-          <p:cNvPr id="5" name="TextBox 4"/>
-          <p:cNvSpPr txBox="1"/>
-          <p:nvPr/>
-        </p:nvSpPr>
-        <p:spPr>
-          <a:xfrm>
-            <a:off x="548640" y="1051560"/>
-            <a:ext cx="11064240" cy="1005840"/>
-          </a:xfrm>
-          <a:prstGeom prst="rect">
-            <a:avLst/>
-          </a:prstGeom>
-          <a:noFill/>
-        </p:spPr>
-        <p:txBody>
-          <a:bodyPr wrap="square" anchor="t">
-            <a:spAutoFit/>
-          </a:bodyPr>
-          <a:lstStyle/>
-          <a:p>
-            <a:pPr algn="l">
-              <a:spcAft>
-                <a:spcPts val="600"/>
-              </a:spcAft>
-            </a:pPr>
-            <a:r>
-              <a:rPr sz="2800" b="1">
-                <a:solidFill>
-                  <a:srgbClr val="F2F4F8"/>
-                </a:solidFill>
-                <a:latin typeface="Calibri"/>
-              </a:rPr>
-              <a:t>Assumptions register and 3-year P&amp;L</a:t>
-            </a:r>
-          </a:p>
-        </p:txBody>
-      </p:sp>
-      <p:sp>
-        <p:nvSpPr>
-          <p:cNvPr id="6" name="Rectangle 5"/>
-          <p:cNvSpPr/>
-          <p:nvPr/>
-        </p:nvSpPr>
-        <p:spPr>
-          <a:xfrm>
-            <a:off x="548640" y="2331720"/>
-            <a:ext cx="11064240" cy="3931920"/>
-          </a:xfrm>
-          <a:prstGeom prst="rect">
-            <a:avLst/>
-          </a:prstGeom>
-          <a:solidFill>
-            <a:srgbClr val="1A1A2E"/>
-          </a:solidFill>
-          <a:ln w="12700">
-            <a:solidFill>
-              <a:srgbClr val="2C2C3A"/>
-            </a:solidFill>
-          </a:ln>
-        </p:spPr>
-        <p:style>
-          <a:lnRef idx="1">
-            <a:schemeClr val="accent1"/>
-          </a:lnRef>
-          <a:fillRef idx="3">
-            <a:schemeClr val="accent1"/>
-          </a:fillRef>
-          <a:effectRef idx="2">
-            <a:schemeClr val="accent1"/>
-          </a:effectRef>
-          <a:fontRef idx="minor">
-            <a:schemeClr val="lt1"/>
-          </a:fontRef>
-        </p:style>
-        <p:txBody>
-          <a:bodyPr rtlCol="0" anchor="ctr"/>
-          <a:lstStyle/>
-          <a:p>
-            <a:pPr algn="ctr"/>
-          </a:p>
-        </p:txBody>
-      </p:sp>
-      <p:sp>
-        <p:nvSpPr>
-          <p:cNvPr id="7" name="TextBox 6"/>
-          <p:cNvSpPr txBox="1"/>
-          <p:nvPr/>
-        </p:nvSpPr>
-        <p:spPr>
-          <a:xfrm>
-            <a:off x="914400" y="2560320"/>
-            <a:ext cx="10332720" cy="3566160"/>
-          </a:xfrm>
-          <a:prstGeom prst="rect">
-            <a:avLst/>
-          </a:prstGeom>
-          <a:noFill/>
-        </p:spPr>
-        <p:txBody>
-          <a:bodyPr wrap="square" anchor="t">
-            <a:spAutoFit/>
-          </a:bodyPr>
-          <a:lstStyle/>
-          <a:p>
-            <a:pPr algn="l">
-              <a:spcAft>
-                <a:spcPts val="1000"/>
-              </a:spcAft>
-            </a:pPr>
-            <a:r>
-              <a:rPr sz="1700" b="1">
-                <a:solidFill>
-                  <a:srgbClr val="00BCEB"/>
-                </a:solidFill>
-                <a:latin typeface="Calibri"/>
-              </a:rPr>
-              <a:t>•  </a:t>
-            </a:r>
-            <a:r>
-              <a:rPr sz="1700" b="0">
-                <a:solidFill>
-                  <a:srgbClr val="F2F4F8"/>
-                </a:solidFill>
-                <a:latin typeface="Calibri"/>
-              </a:rPr>
-              <a:t>Every financial input (A1–A13) is visible and editable</a:t>
-            </a:r>
-          </a:p>
-          <a:p>
-            <a:pPr algn="l">
-              <a:spcAft>
-                <a:spcPts val="1000"/>
-              </a:spcAft>
-            </a:pPr>
-            <a:r>
-              <a:rPr sz="1700" b="1">
-                <a:solidFill>
-                  <a:srgbClr val="00BCEB"/>
-                </a:solidFill>
-                <a:latin typeface="Calibri"/>
-              </a:rPr>
-              <a:t>•  </a:t>
-            </a:r>
-            <a:r>
-              <a:rPr sz="1700" b="0">
-                <a:solidFill>
-                  <a:srgbClr val="F2F4F8"/>
-                </a:solidFill>
-                <a:latin typeface="Calibri"/>
-              </a:rPr>
-              <a:t>3-year scale path with improving ROI multiple</a:t>
-            </a:r>
-          </a:p>
-          <a:p>
-            <a:pPr algn="l">
-              <a:spcAft>
-                <a:spcPts val="1000"/>
-              </a:spcAft>
-            </a:pPr>
-            <a:r>
-              <a:rPr sz="1700" b="1">
-                <a:solidFill>
-                  <a:srgbClr val="00BCEB"/>
-                </a:solidFill>
-                <a:latin typeface="Calibri"/>
-              </a:rPr>
-              <a:t>•  </a:t>
-            </a:r>
-            <a:r>
-              <a:rPr sz="1700" b="0">
-                <a:solidFill>
-                  <a:srgbClr val="F2F4F8"/>
-                </a:solidFill>
-                <a:latin typeface="Calibri"/>
-              </a:rPr>
-              <a:t>Structure holds; only inputs change when actuals are plugged in</a:t>
-            </a:r>
-          </a:p>
-        </p:txBody>
-      </p:sp>
-      <p:sp>
-        <p:nvSpPr>
-          <p:cNvPr id="8" name="TextBox 7"/>
-          <p:cNvSpPr txBox="1"/>
-          <p:nvPr/>
-        </p:nvSpPr>
-        <p:spPr>
-          <a:xfrm>
-            <a:off x="548640" y="6419088"/>
-            <a:ext cx="11064240" cy="320040"/>
-          </a:xfrm>
-          <a:prstGeom prst="rect">
-            <a:avLst/>
-          </a:prstGeom>
-          <a:noFill/>
-        </p:spPr>
-        <p:txBody>
-          <a:bodyPr wrap="square" anchor="t">
-            <a:spAutoFit/>
-          </a:bodyPr>
-          <a:lstStyle/>
-          <a:p>
-            <a:pPr algn="l">
-              <a:spcAft>
-                <a:spcPts val="600"/>
-              </a:spcAft>
-            </a:pPr>
-            <a:r>
-              <a:rPr sz="1000" b="0">
-                <a:solidFill>
-                  <a:srgbClr val="9AA3B2"/>
-                </a:solidFill>
-                <a:latin typeface="Calibri"/>
-              </a:rPr>
-              <a:t>Appendix — reserve for Q&amp;A. Illustrative figures.</a:t>
-            </a:r>
-          </a:p>
-        </p:txBody>
-      </p:sp>
-    </p:spTree>
-  </p:cSld>
-  <p:clrMapOvr>
-    <a:masterClrMapping/>
-  </p:clrMapOvr>
-</p:sld>
-</file>
-
-<file path=ppt/slides/slide24.xml><?xml version="1.0" encoding="utf-8"?>
-<p:sld xmlns:a="http://schemas.openxmlformats.org/drawingml/2006/main" xmlns:p="http://schemas.openxmlformats.org/presentationml/2006/main" xmlns:r="http://schemas.openxmlformats.org/officeDocument/2006/relationships">
-  <p:cSld>
-    <p:spTree>
-      <p:nvGrpSpPr>
-        <p:cNvPr id="1" name=""/>
-        <p:cNvGrpSpPr/>
-        <p:nvPr/>
-      </p:nvGrpSpPr>
-      <p:grpSpPr/>
-      <p:sp>
-        <p:nvSpPr>
-          <p:cNvPr id="2" name="Rectangle 1"/>
-          <p:cNvSpPr/>
-          <p:nvPr/>
-        </p:nvSpPr>
-        <p:spPr>
-          <a:xfrm>
-            <a:off x="0" y="0"/>
-            <a:ext cx="12191695" cy="6858000"/>
-          </a:xfrm>
-          <a:prstGeom prst="rect">
-            <a:avLst/>
-          </a:prstGeom>
-          <a:solidFill>
-            <a:srgbClr val="101014"/>
-          </a:solidFill>
-          <a:ln>
-            <a:noFill/>
-          </a:ln>
-          <a:effectLst/>
-        </p:spPr>
-        <p:style>
-          <a:lnRef idx="1">
-            <a:schemeClr val="accent1"/>
-          </a:lnRef>
-          <a:fillRef idx="3">
-            <a:schemeClr val="accent1"/>
-          </a:fillRef>
-          <a:effectRef idx="2">
-            <a:schemeClr val="accent1"/>
-          </a:effectRef>
-          <a:fontRef idx="minor">
-            <a:schemeClr val="lt1"/>
-          </a:fontRef>
-        </p:style>
-        <p:txBody>
-          <a:bodyPr rtlCol="0" anchor="ctr"/>
-          <a:lstStyle/>
-          <a:p>
-            <a:pPr algn="ctr"/>
-          </a:p>
-        </p:txBody>
-      </p:sp>
-      <p:sp>
-        <p:nvSpPr>
-          <p:cNvPr id="3" name="TextBox 2"/>
-          <p:cNvSpPr txBox="1"/>
-          <p:nvPr/>
-        </p:nvSpPr>
-        <p:spPr>
-          <a:xfrm>
-            <a:off x="548640" y="411480"/>
-            <a:ext cx="11064240" cy="365760"/>
-          </a:xfrm>
-          <a:prstGeom prst="rect">
-            <a:avLst/>
-          </a:prstGeom>
-          <a:noFill/>
-        </p:spPr>
-        <p:txBody>
-          <a:bodyPr wrap="square" anchor="t">
-            <a:spAutoFit/>
-          </a:bodyPr>
-          <a:lstStyle/>
-          <a:p>
-            <a:pPr algn="l">
-              <a:spcAft>
-                <a:spcPts val="600"/>
-              </a:spcAft>
-            </a:pPr>
-            <a:r>
-              <a:rPr sz="1200" b="1">
-                <a:solidFill>
-                  <a:srgbClr val="00BCEB"/>
-                </a:solidFill>
-                <a:latin typeface="Calibri"/>
-              </a:rPr>
-              <a:t>APPENDIX · A6</a:t>
-            </a:r>
-          </a:p>
-        </p:txBody>
-      </p:sp>
-      <p:sp>
-        <p:nvSpPr>
-          <p:cNvPr id="4" name="Rectangle 3"/>
-          <p:cNvSpPr/>
-          <p:nvPr/>
-        </p:nvSpPr>
-        <p:spPr>
-          <a:xfrm>
-            <a:off x="548640" y="868680"/>
-            <a:ext cx="1280160" cy="50800"/>
-          </a:xfrm>
-          <a:prstGeom prst="rect">
-            <a:avLst/>
-          </a:prstGeom>
-          <a:solidFill>
-            <a:srgbClr val="00BCEB"/>
-          </a:solidFill>
-          <a:ln>
-            <a:noFill/>
-          </a:ln>
-        </p:spPr>
-        <p:style>
-          <a:lnRef idx="1">
-            <a:schemeClr val="accent1"/>
-          </a:lnRef>
-          <a:fillRef idx="3">
-            <a:schemeClr val="accent1"/>
-          </a:fillRef>
-          <a:effectRef idx="2">
-            <a:schemeClr val="accent1"/>
-          </a:effectRef>
-          <a:fontRef idx="minor">
-            <a:schemeClr val="lt1"/>
-          </a:fontRef>
-        </p:style>
-        <p:txBody>
-          <a:bodyPr rtlCol="0" anchor="ctr"/>
-          <a:lstStyle/>
-          <a:p>
-            <a:pPr algn="ctr"/>
-          </a:p>
-        </p:txBody>
-      </p:sp>
-      <p:sp>
-        <p:nvSpPr>
-          <p:cNvPr id="5" name="TextBox 4"/>
-          <p:cNvSpPr txBox="1"/>
-          <p:nvPr/>
-        </p:nvSpPr>
-        <p:spPr>
-          <a:xfrm>
-            <a:off x="548640" y="1051560"/>
-            <a:ext cx="11064240" cy="1005840"/>
-          </a:xfrm>
-          <a:prstGeom prst="rect">
-            <a:avLst/>
-          </a:prstGeom>
-          <a:noFill/>
-        </p:spPr>
-        <p:txBody>
-          <a:bodyPr wrap="square" anchor="t">
-            <a:spAutoFit/>
-          </a:bodyPr>
-          <a:lstStyle/>
-          <a:p>
-            <a:pPr algn="l">
-              <a:spcAft>
-                <a:spcPts val="600"/>
-              </a:spcAft>
-            </a:pPr>
-            <a:r>
-              <a:rPr sz="2800" b="1">
-                <a:solidFill>
-                  <a:srgbClr val="F2F4F8"/>
-                </a:solidFill>
-                <a:latin typeface="Calibri"/>
-              </a:rPr>
-              <a:t>Compensation design</a:t>
-            </a:r>
-          </a:p>
-        </p:txBody>
-      </p:sp>
-      <p:sp>
-        <p:nvSpPr>
-          <p:cNvPr id="6" name="Rectangle 5"/>
-          <p:cNvSpPr/>
-          <p:nvPr/>
-        </p:nvSpPr>
-        <p:spPr>
-          <a:xfrm>
-            <a:off x="548640" y="2331720"/>
-            <a:ext cx="11064240" cy="3931920"/>
-          </a:xfrm>
-          <a:prstGeom prst="rect">
-            <a:avLst/>
-          </a:prstGeom>
-          <a:solidFill>
-            <a:srgbClr val="1A1A2E"/>
-          </a:solidFill>
-          <a:ln w="12700">
-            <a:solidFill>
-              <a:srgbClr val="2C2C3A"/>
-            </a:solidFill>
-          </a:ln>
-        </p:spPr>
-        <p:style>
-          <a:lnRef idx="1">
-            <a:schemeClr val="accent1"/>
-          </a:lnRef>
-          <a:fillRef idx="3">
-            <a:schemeClr val="accent1"/>
-          </a:fillRef>
-          <a:effectRef idx="2">
-            <a:schemeClr val="accent1"/>
-          </a:effectRef>
-          <a:fontRef idx="minor">
-            <a:schemeClr val="lt1"/>
-          </a:fontRef>
-        </p:style>
-        <p:txBody>
-          <a:bodyPr rtlCol="0" anchor="ctr"/>
-          <a:lstStyle/>
-          <a:p>
-            <a:pPr algn="ctr"/>
-          </a:p>
-        </p:txBody>
-      </p:sp>
-      <p:sp>
-        <p:nvSpPr>
-          <p:cNvPr id="7" name="TextBox 6"/>
-          <p:cNvSpPr txBox="1"/>
-          <p:nvPr/>
-        </p:nvSpPr>
-        <p:spPr>
-          <a:xfrm>
-            <a:off x="914400" y="2560320"/>
-            <a:ext cx="10332720" cy="3566160"/>
-          </a:xfrm>
-          <a:prstGeom prst="rect">
-            <a:avLst/>
-          </a:prstGeom>
-          <a:noFill/>
-        </p:spPr>
-        <p:txBody>
-          <a:bodyPr wrap="square" anchor="t">
-            <a:spAutoFit/>
-          </a:bodyPr>
-          <a:lstStyle/>
-          <a:p>
-            <a:pPr algn="l">
-              <a:spcAft>
-                <a:spcPts val="1000"/>
-              </a:spcAft>
-            </a:pPr>
-            <a:r>
-              <a:rPr sz="1700" b="1">
-                <a:solidFill>
-                  <a:srgbClr val="00BCEB"/>
-                </a:solidFill>
-                <a:latin typeface="Calibri"/>
-              </a:rPr>
-              <a:t>•  </a:t>
-            </a:r>
-            <a:r>
-              <a:rPr sz="1700" b="0">
-                <a:solidFill>
-                  <a:srgbClr val="F2F4F8"/>
-                </a:solidFill>
-                <a:latin typeface="Calibri"/>
-              </a:rPr>
-              <a:t>Influence credit is additive — BU sellers keep 100% of product credit</a:t>
-            </a:r>
-          </a:p>
-          <a:p>
-            <a:pPr algn="l">
-              <a:spcAft>
-                <a:spcPts val="1000"/>
-              </a:spcAft>
-            </a:pPr>
-            <a:r>
-              <a:rPr sz="1700" b="1">
-                <a:solidFill>
-                  <a:srgbClr val="00BCEB"/>
-                </a:solidFill>
-                <a:latin typeface="Calibri"/>
-              </a:rPr>
-              <a:t>•  </a:t>
-            </a:r>
-            <a:r>
-              <a:rPr sz="1700" b="0">
-                <a:solidFill>
-                  <a:srgbClr val="F2F4F8"/>
-                </a:solidFill>
-                <a:latin typeface="Calibri"/>
-              </a:rPr>
-              <a:t>Weighting: 50% influenced bookings, 20% Splunk attach, 15% leading, 15% MBOs</a:t>
-            </a:r>
-          </a:p>
-          <a:p>
-            <a:pPr algn="l">
-              <a:spcAft>
-                <a:spcPts val="1000"/>
-              </a:spcAft>
-            </a:pPr>
-            <a:r>
-              <a:rPr sz="1700" b="1">
-                <a:solidFill>
-                  <a:srgbClr val="00BCEB"/>
-                </a:solidFill>
-                <a:latin typeface="Calibri"/>
-              </a:rPr>
-              <a:t>•  </a:t>
-            </a:r>
-            <a:r>
-              <a:rPr sz="1700" b="0">
-                <a:solidFill>
-                  <a:srgbClr val="F2F4F8"/>
-                </a:solidFill>
-                <a:latin typeface="Calibri"/>
-              </a:rPr>
-              <a:t>Deal desk arbitrates via the influence ledger</a:t>
-            </a:r>
-          </a:p>
-        </p:txBody>
-      </p:sp>
-      <p:sp>
-        <p:nvSpPr>
-          <p:cNvPr id="8" name="TextBox 7"/>
-          <p:cNvSpPr txBox="1"/>
-          <p:nvPr/>
-        </p:nvSpPr>
-        <p:spPr>
-          <a:xfrm>
-            <a:off x="548640" y="6419088"/>
-            <a:ext cx="11064240" cy="320040"/>
-          </a:xfrm>
-          <a:prstGeom prst="rect">
-            <a:avLst/>
-          </a:prstGeom>
-          <a:noFill/>
-        </p:spPr>
-        <p:txBody>
-          <a:bodyPr wrap="square" anchor="t">
-            <a:spAutoFit/>
-          </a:bodyPr>
-          <a:lstStyle/>
-          <a:p>
-            <a:pPr algn="l">
-              <a:spcAft>
-                <a:spcPts val="600"/>
-              </a:spcAft>
-            </a:pPr>
-            <a:r>
-              <a:rPr sz="1000" b="0">
-                <a:solidFill>
-                  <a:srgbClr val="9AA3B2"/>
-                </a:solidFill>
-                <a:latin typeface="Calibri"/>
-              </a:rPr>
-              <a:t>Appendix — reserve for Q&amp;A. Illustrative figures.</a:t>
-            </a:r>
-          </a:p>
-        </p:txBody>
-      </p:sp>
-    </p:spTree>
-  </p:cSld>
-  <p:clrMapOvr>
-    <a:masterClrMapping/>
-  </p:clrMapOvr>
-</p:sld>
-</file>
-
-<file path=ppt/slides/slide25.xml><?xml version="1.0" encoding="utf-8"?>
-<p:sld xmlns:a="http://schemas.openxmlformats.org/drawingml/2006/main" xmlns:p="http://schemas.openxmlformats.org/presentationml/2006/main" xmlns:r="http://schemas.openxmlformats.org/officeDocument/2006/relationships">
-  <p:cSld>
-    <p:spTree>
-      <p:nvGrpSpPr>
-        <p:cNvPr id="1" name=""/>
-        <p:cNvGrpSpPr/>
-        <p:nvPr/>
-      </p:nvGrpSpPr>
-      <p:grpSpPr/>
-      <p:sp>
-        <p:nvSpPr>
-          <p:cNvPr id="2" name="Rectangle 1"/>
-          <p:cNvSpPr/>
-          <p:nvPr/>
-        </p:nvSpPr>
-        <p:spPr>
-          <a:xfrm>
-            <a:off x="0" y="0"/>
-            <a:ext cx="12191695" cy="6858000"/>
-          </a:xfrm>
-          <a:prstGeom prst="rect">
-            <a:avLst/>
-          </a:prstGeom>
-          <a:solidFill>
-            <a:srgbClr val="101014"/>
-          </a:solidFill>
-          <a:ln>
-            <a:noFill/>
-          </a:ln>
-          <a:effectLst/>
-        </p:spPr>
-        <p:style>
-          <a:lnRef idx="1">
-            <a:schemeClr val="accent1"/>
-          </a:lnRef>
-          <a:fillRef idx="3">
-            <a:schemeClr val="accent1"/>
-          </a:fillRef>
-          <a:effectRef idx="2">
-            <a:schemeClr val="accent1"/>
-          </a:effectRef>
-          <a:fontRef idx="minor">
-            <a:schemeClr val="lt1"/>
-          </a:fontRef>
-        </p:style>
-        <p:txBody>
-          <a:bodyPr rtlCol="0" anchor="ctr"/>
-          <a:lstStyle/>
-          <a:p>
-            <a:pPr algn="ctr"/>
-          </a:p>
-        </p:txBody>
-      </p:sp>
-      <p:sp>
-        <p:nvSpPr>
-          <p:cNvPr id="3" name="TextBox 2"/>
-          <p:cNvSpPr txBox="1"/>
-          <p:nvPr/>
-        </p:nvSpPr>
-        <p:spPr>
-          <a:xfrm>
-            <a:off x="548640" y="411480"/>
-            <a:ext cx="11064240" cy="365760"/>
-          </a:xfrm>
-          <a:prstGeom prst="rect">
-            <a:avLst/>
-          </a:prstGeom>
-          <a:noFill/>
-        </p:spPr>
-        <p:txBody>
-          <a:bodyPr wrap="square" anchor="t">
-            <a:spAutoFit/>
-          </a:bodyPr>
-          <a:lstStyle/>
-          <a:p>
-            <a:pPr algn="l">
-              <a:spcAft>
-                <a:spcPts val="600"/>
-              </a:spcAft>
-            </a:pPr>
-            <a:r>
-              <a:rPr sz="1200" b="1">
-                <a:solidFill>
-                  <a:srgbClr val="00BCEB"/>
-                </a:solidFill>
-                <a:latin typeface="Calibri"/>
-              </a:rPr>
-              <a:t>APPENDIX · A7</a:t>
-            </a:r>
-          </a:p>
-        </p:txBody>
-      </p:sp>
-      <p:sp>
-        <p:nvSpPr>
-          <p:cNvPr id="4" name="Rectangle 3"/>
-          <p:cNvSpPr/>
-          <p:nvPr/>
-        </p:nvSpPr>
-        <p:spPr>
-          <a:xfrm>
-            <a:off x="548640" y="868680"/>
-            <a:ext cx="1280160" cy="50800"/>
-          </a:xfrm>
-          <a:prstGeom prst="rect">
-            <a:avLst/>
-          </a:prstGeom>
-          <a:solidFill>
-            <a:srgbClr val="00BCEB"/>
-          </a:solidFill>
-          <a:ln>
-            <a:noFill/>
-          </a:ln>
-        </p:spPr>
-        <p:style>
-          <a:lnRef idx="1">
-            <a:schemeClr val="accent1"/>
-          </a:lnRef>
-          <a:fillRef idx="3">
-            <a:schemeClr val="accent1"/>
-          </a:fillRef>
-          <a:effectRef idx="2">
-            <a:schemeClr val="accent1"/>
-          </a:effectRef>
-          <a:fontRef idx="minor">
-            <a:schemeClr val="lt1"/>
-          </a:fontRef>
-        </p:style>
-        <p:txBody>
-          <a:bodyPr rtlCol="0" anchor="ctr"/>
-          <a:lstStyle/>
-          <a:p>
-            <a:pPr algn="ctr"/>
-          </a:p>
-        </p:txBody>
-      </p:sp>
-      <p:sp>
-        <p:nvSpPr>
-          <p:cNvPr id="5" name="TextBox 4"/>
-          <p:cNvSpPr txBox="1"/>
-          <p:nvPr/>
-        </p:nvSpPr>
-        <p:spPr>
-          <a:xfrm>
-            <a:off x="548640" y="1051560"/>
-            <a:ext cx="11064240" cy="1005840"/>
-          </a:xfrm>
-          <a:prstGeom prst="rect">
-            <a:avLst/>
-          </a:prstGeom>
-          <a:noFill/>
-        </p:spPr>
-        <p:txBody>
-          <a:bodyPr wrap="square" anchor="t">
-            <a:spAutoFit/>
-          </a:bodyPr>
-          <a:lstStyle/>
-          <a:p>
-            <a:pPr algn="l">
-              <a:spcAft>
-                <a:spcPts val="600"/>
-              </a:spcAft>
-            </a:pPr>
-            <a:r>
-              <a:rPr sz="2800" b="1">
-                <a:solidFill>
-                  <a:srgbClr val="F2F4F8"/>
-                </a:solidFill>
-                <a:latin typeface="Calibri"/>
-              </a:rPr>
-              <a:t>Competitive framing</a:t>
-            </a:r>
-          </a:p>
-        </p:txBody>
-      </p:sp>
-      <p:sp>
-        <p:nvSpPr>
-          <p:cNvPr id="6" name="Rectangle 5"/>
-          <p:cNvSpPr/>
-          <p:nvPr/>
-        </p:nvSpPr>
-        <p:spPr>
-          <a:xfrm>
-            <a:off x="548640" y="2331720"/>
-            <a:ext cx="11064240" cy="3931920"/>
-          </a:xfrm>
-          <a:prstGeom prst="rect">
-            <a:avLst/>
-          </a:prstGeom>
-          <a:solidFill>
-            <a:srgbClr val="1A1A2E"/>
-          </a:solidFill>
-          <a:ln w="12700">
-            <a:solidFill>
-              <a:srgbClr val="2C2C3A"/>
-            </a:solidFill>
-          </a:ln>
-        </p:spPr>
-        <p:style>
-          <a:lnRef idx="1">
-            <a:schemeClr val="accent1"/>
-          </a:lnRef>
-          <a:fillRef idx="3">
-            <a:schemeClr val="accent1"/>
-          </a:fillRef>
-          <a:effectRef idx="2">
-            <a:schemeClr val="accent1"/>
-          </a:effectRef>
-          <a:fontRef idx="minor">
-            <a:schemeClr val="lt1"/>
-          </a:fontRef>
-        </p:style>
-        <p:txBody>
-          <a:bodyPr rtlCol="0" anchor="ctr"/>
-          <a:lstStyle/>
-          <a:p>
-            <a:pPr algn="ctr"/>
-          </a:p>
-        </p:txBody>
-      </p:sp>
-      <p:sp>
-        <p:nvSpPr>
-          <p:cNvPr id="7" name="TextBox 6"/>
-          <p:cNvSpPr txBox="1"/>
-          <p:nvPr/>
-        </p:nvSpPr>
-        <p:spPr>
-          <a:xfrm>
-            <a:off x="914400" y="2560320"/>
-            <a:ext cx="10332720" cy="3566160"/>
-          </a:xfrm>
-          <a:prstGeom prst="rect">
-            <a:avLst/>
-          </a:prstGeom>
-          <a:noFill/>
-        </p:spPr>
-        <p:txBody>
-          <a:bodyPr wrap="square" anchor="t">
-            <a:spAutoFit/>
-          </a:bodyPr>
-          <a:lstStyle/>
-          <a:p>
-            <a:pPr algn="l">
-              <a:spcAft>
-                <a:spcPts val="1000"/>
-              </a:spcAft>
-            </a:pPr>
-            <a:r>
-              <a:rPr sz="1700" b="1">
-                <a:solidFill>
-                  <a:srgbClr val="00BCEB"/>
-                </a:solidFill>
-                <a:latin typeface="Calibri"/>
-              </a:rPr>
-              <a:t>•  </a:t>
-            </a:r>
-            <a:r>
-              <a:rPr sz="1700" b="0">
-                <a:solidFill>
-                  <a:srgbClr val="F2F4F8"/>
-                </a:solidFill>
-                <a:latin typeface="Calibri"/>
-              </a:rPr>
-              <a:t>Point vendors, SIEM/observability specialists, SIs, hyperscalers</a:t>
-            </a:r>
-          </a:p>
-          <a:p>
-            <a:pPr algn="l">
-              <a:spcAft>
-                <a:spcPts val="1000"/>
-              </a:spcAft>
-            </a:pPr>
-            <a:r>
-              <a:rPr sz="1700" b="1">
-                <a:solidFill>
-                  <a:srgbClr val="00BCEB"/>
-                </a:solidFill>
-                <a:latin typeface="Calibri"/>
-              </a:rPr>
-              <a:t>•  </a:t>
-            </a:r>
-            <a:r>
-              <a:rPr sz="1700" b="0">
-                <a:solidFill>
-                  <a:srgbClr val="F2F4F8"/>
-                </a:solidFill>
-                <a:latin typeface="Calibri"/>
-              </a:rPr>
-              <a:t>The SI dynamic is the biggest structural risk — co-author the architecture</a:t>
-            </a:r>
-          </a:p>
-          <a:p>
-            <a:pPr algn="l">
-              <a:spcAft>
-                <a:spcPts val="1000"/>
-              </a:spcAft>
-            </a:pPr>
-            <a:r>
-              <a:rPr sz="1700" b="1">
-                <a:solidFill>
-                  <a:srgbClr val="00BCEB"/>
-                </a:solidFill>
-                <a:latin typeface="Calibri"/>
-              </a:rPr>
-              <a:t>•  </a:t>
-            </a:r>
-            <a:r>
-              <a:rPr sz="1700" b="0">
-                <a:solidFill>
-                  <a:srgbClr val="F2F4F8"/>
-                </a:solidFill>
-                <a:latin typeface="Calibri"/>
-              </a:rPr>
-              <a:t>Whoever frames the architecture wins the budget</a:t>
-            </a:r>
-          </a:p>
-        </p:txBody>
-      </p:sp>
-      <p:sp>
-        <p:nvSpPr>
-          <p:cNvPr id="8" name="TextBox 7"/>
-          <p:cNvSpPr txBox="1"/>
-          <p:nvPr/>
-        </p:nvSpPr>
-        <p:spPr>
-          <a:xfrm>
-            <a:off x="548640" y="6419088"/>
-            <a:ext cx="11064240" cy="320040"/>
-          </a:xfrm>
-          <a:prstGeom prst="rect">
-            <a:avLst/>
-          </a:prstGeom>
-          <a:noFill/>
-        </p:spPr>
-        <p:txBody>
-          <a:bodyPr wrap="square" anchor="t">
-            <a:spAutoFit/>
-          </a:bodyPr>
-          <a:lstStyle/>
-          <a:p>
-            <a:pPr algn="l">
-              <a:spcAft>
-                <a:spcPts val="600"/>
-              </a:spcAft>
-            </a:pPr>
-            <a:r>
-              <a:rPr sz="1000" b="0">
-                <a:solidFill>
-                  <a:srgbClr val="9AA3B2"/>
-                </a:solidFill>
-                <a:latin typeface="Calibri"/>
-              </a:rPr>
-              <a:t>Appendix — reserve for Q&amp;A. Illustrative figures.</a:t>
-            </a:r>
-          </a:p>
-        </p:txBody>
-      </p:sp>
-    </p:spTree>
-  </p:cSld>
-  <p:clrMapOvr>
-    <a:masterClrMapping/>
-  </p:clrMapOvr>
-</p:sld>
-</file>
-
-<file path=ppt/slides/slide26.xml><?xml version="1.0" encoding="utf-8"?>
-<p:sld xmlns:a="http://schemas.openxmlformats.org/drawingml/2006/main" xmlns:p="http://schemas.openxmlformats.org/presentationml/2006/main" xmlns:r="http://schemas.openxmlformats.org/officeDocument/2006/relationships">
-  <p:cSld>
-    <p:spTree>
-      <p:nvGrpSpPr>
-        <p:cNvPr id="1" name=""/>
-        <p:cNvGrpSpPr/>
-        <p:nvPr/>
-      </p:nvGrpSpPr>
-      <p:grpSpPr/>
-      <p:sp>
-        <p:nvSpPr>
-          <p:cNvPr id="2" name="Rectangle 1"/>
-          <p:cNvSpPr/>
-          <p:nvPr/>
-        </p:nvSpPr>
-        <p:spPr>
-          <a:xfrm>
-            <a:off x="0" y="0"/>
-            <a:ext cx="12191695" cy="6858000"/>
-          </a:xfrm>
-          <a:prstGeom prst="rect">
-            <a:avLst/>
-          </a:prstGeom>
-          <a:solidFill>
-            <a:srgbClr val="101014"/>
-          </a:solidFill>
-          <a:ln>
-            <a:noFill/>
-          </a:ln>
-          <a:effectLst/>
-        </p:spPr>
-        <p:style>
-          <a:lnRef idx="1">
-            <a:schemeClr val="accent1"/>
-          </a:lnRef>
-          <a:fillRef idx="3">
-            <a:schemeClr val="accent1"/>
-          </a:fillRef>
-          <a:effectRef idx="2">
-            <a:schemeClr val="accent1"/>
-          </a:effectRef>
-          <a:fontRef idx="minor">
-            <a:schemeClr val="lt1"/>
-          </a:fontRef>
-        </p:style>
-        <p:txBody>
-          <a:bodyPr rtlCol="0" anchor="ctr"/>
-          <a:lstStyle/>
-          <a:p>
-            <a:pPr algn="ctr"/>
-          </a:p>
-        </p:txBody>
-      </p:sp>
-      <p:sp>
-        <p:nvSpPr>
-          <p:cNvPr id="3" name="TextBox 2"/>
-          <p:cNvSpPr txBox="1"/>
-          <p:nvPr/>
-        </p:nvSpPr>
-        <p:spPr>
-          <a:xfrm>
-            <a:off x="548640" y="411480"/>
-            <a:ext cx="11064240" cy="365760"/>
-          </a:xfrm>
-          <a:prstGeom prst="rect">
-            <a:avLst/>
-          </a:prstGeom>
-          <a:noFill/>
-        </p:spPr>
-        <p:txBody>
-          <a:bodyPr wrap="square" anchor="t">
-            <a:spAutoFit/>
-          </a:bodyPr>
-          <a:lstStyle/>
-          <a:p>
-            <a:pPr algn="l">
-              <a:spcAft>
-                <a:spcPts val="600"/>
-              </a:spcAft>
-            </a:pPr>
-            <a:r>
-              <a:rPr sz="1200" b="1">
-                <a:solidFill>
-                  <a:srgbClr val="00BCEB"/>
-                </a:solidFill>
-                <a:latin typeface="Calibri"/>
-              </a:rPr>
-              <a:t>APPENDIX · A8</a:t>
-            </a:r>
-          </a:p>
-        </p:txBody>
-      </p:sp>
-      <p:sp>
-        <p:nvSpPr>
-          <p:cNvPr id="4" name="Rectangle 3"/>
-          <p:cNvSpPr/>
-          <p:nvPr/>
-        </p:nvSpPr>
-        <p:spPr>
-          <a:xfrm>
-            <a:off x="548640" y="868680"/>
-            <a:ext cx="1280160" cy="50800"/>
-          </a:xfrm>
-          <a:prstGeom prst="rect">
-            <a:avLst/>
-          </a:prstGeom>
-          <a:solidFill>
-            <a:srgbClr val="00BCEB"/>
-          </a:solidFill>
-          <a:ln>
-            <a:noFill/>
-          </a:ln>
-        </p:spPr>
-        <p:style>
-          <a:lnRef idx="1">
-            <a:schemeClr val="accent1"/>
-          </a:lnRef>
-          <a:fillRef idx="3">
-            <a:schemeClr val="accent1"/>
-          </a:fillRef>
-          <a:effectRef idx="2">
-            <a:schemeClr val="accent1"/>
-          </a:effectRef>
-          <a:fontRef idx="minor">
-            <a:schemeClr val="lt1"/>
-          </a:fontRef>
-        </p:style>
-        <p:txBody>
-          <a:bodyPr rtlCol="0" anchor="ctr"/>
-          <a:lstStyle/>
-          <a:p>
-            <a:pPr algn="ctr"/>
-          </a:p>
-        </p:txBody>
-      </p:sp>
-      <p:sp>
-        <p:nvSpPr>
-          <p:cNvPr id="5" name="TextBox 4"/>
-          <p:cNvSpPr txBox="1"/>
-          <p:nvPr/>
-        </p:nvSpPr>
-        <p:spPr>
-          <a:xfrm>
-            <a:off x="548640" y="1051560"/>
-            <a:ext cx="11064240" cy="1005840"/>
-          </a:xfrm>
-          <a:prstGeom prst="rect">
-            <a:avLst/>
-          </a:prstGeom>
-          <a:noFill/>
-        </p:spPr>
-        <p:txBody>
-          <a:bodyPr wrap="square" anchor="t">
-            <a:spAutoFit/>
-          </a:bodyPr>
-          <a:lstStyle/>
-          <a:p>
-            <a:pPr algn="l">
-              <a:spcAft>
-                <a:spcPts val="600"/>
-              </a:spcAft>
-            </a:pPr>
-            <a:r>
-              <a:rPr sz="2800" b="1">
-                <a:solidFill>
-                  <a:srgbClr val="F2F4F8"/>
-                </a:solidFill>
-                <a:latin typeface="Calibri"/>
-              </a:rPr>
-              <a:t>Full risk register and early-warning indicators</a:t>
-            </a:r>
-          </a:p>
-        </p:txBody>
-      </p:sp>
-      <p:sp>
-        <p:nvSpPr>
-          <p:cNvPr id="6" name="Rectangle 5"/>
-          <p:cNvSpPr/>
-          <p:nvPr/>
-        </p:nvSpPr>
-        <p:spPr>
-          <a:xfrm>
-            <a:off x="548640" y="2331720"/>
-            <a:ext cx="11064240" cy="3931920"/>
-          </a:xfrm>
-          <a:prstGeom prst="rect">
-            <a:avLst/>
-          </a:prstGeom>
-          <a:solidFill>
-            <a:srgbClr val="1A1A2E"/>
-          </a:solidFill>
-          <a:ln w="12700">
-            <a:solidFill>
-              <a:srgbClr val="2C2C3A"/>
-            </a:solidFill>
-          </a:ln>
-        </p:spPr>
-        <p:style>
-          <a:lnRef idx="1">
-            <a:schemeClr val="accent1"/>
-          </a:lnRef>
-          <a:fillRef idx="3">
-            <a:schemeClr val="accent1"/>
-          </a:fillRef>
-          <a:effectRef idx="2">
-            <a:schemeClr val="accent1"/>
-          </a:effectRef>
-          <a:fontRef idx="minor">
-            <a:schemeClr val="lt1"/>
-          </a:fontRef>
-        </p:style>
-        <p:txBody>
-          <a:bodyPr rtlCol="0" anchor="ctr"/>
-          <a:lstStyle/>
-          <a:p>
-            <a:pPr algn="ctr"/>
-          </a:p>
-        </p:txBody>
-      </p:sp>
-      <p:sp>
-        <p:nvSpPr>
-          <p:cNvPr id="7" name="TextBox 6"/>
-          <p:cNvSpPr txBox="1"/>
-          <p:nvPr/>
-        </p:nvSpPr>
-        <p:spPr>
-          <a:xfrm>
-            <a:off x="914400" y="2560320"/>
-            <a:ext cx="10332720" cy="3566160"/>
-          </a:xfrm>
-          <a:prstGeom prst="rect">
-            <a:avLst/>
-          </a:prstGeom>
-          <a:noFill/>
-        </p:spPr>
-        <p:txBody>
-          <a:bodyPr wrap="square" anchor="t">
-            <a:spAutoFit/>
-          </a:bodyPr>
-          <a:lstStyle/>
-          <a:p>
-            <a:pPr algn="l">
-              <a:spcAft>
-                <a:spcPts val="1000"/>
-              </a:spcAft>
-            </a:pPr>
-            <a:r>
-              <a:rPr sz="1700" b="1">
-                <a:solidFill>
-                  <a:srgbClr val="00BCEB"/>
-                </a:solidFill>
-                <a:latin typeface="Calibri"/>
-              </a:rPr>
-              <a:t>•  </a:t>
-            </a:r>
-            <a:r>
-              <a:rPr sz="1700" b="0">
-                <a:solidFill>
-                  <a:srgbClr val="F2F4F8"/>
-                </a:solidFill>
-                <a:latin typeface="Calibri"/>
-              </a:rPr>
-              <a:t>12 risks with likelihood, impact, mitigation, and owner</a:t>
-            </a:r>
-          </a:p>
-          <a:p>
-            <a:pPr algn="l">
-              <a:spcAft>
-                <a:spcPts val="1000"/>
-              </a:spcAft>
-            </a:pPr>
-            <a:r>
-              <a:rPr sz="1700" b="1">
-                <a:solidFill>
-                  <a:srgbClr val="00BCEB"/>
-                </a:solidFill>
-                <a:latin typeface="Calibri"/>
-              </a:rPr>
-              <a:t>•  </a:t>
-            </a:r>
-            <a:r>
-              <a:rPr sz="1700" b="0">
-                <a:solidFill>
-                  <a:srgbClr val="F2F4F8"/>
-                </a:solidFill>
-                <a:latin typeface="Calibri"/>
-              </a:rPr>
-              <a:t>Leading signals with explicit action triggers</a:t>
-            </a:r>
-          </a:p>
-          <a:p>
-            <a:pPr algn="l">
-              <a:spcAft>
-                <a:spcPts val="1000"/>
-              </a:spcAft>
-            </a:pPr>
-            <a:r>
-              <a:rPr sz="1700" b="1">
-                <a:solidFill>
-                  <a:srgbClr val="00BCEB"/>
-                </a:solidFill>
-                <a:latin typeface="Calibri"/>
-              </a:rPr>
-              <a:t>•  </a:t>
-            </a:r>
-            <a:r>
-              <a:rPr sz="1700" b="0">
+              <a:rPr sz="1800" b="0">
                 <a:solidFill>
                   <a:srgbClr val="F2F4F8"/>
                 </a:solidFill>
@@ -12217,7 +10373,7 @@
                 </a:solidFill>
                 <a:latin typeface="Calibri"/>
               </a:rPr>
-              <a:t>COST OF INACTION</a:t>
+              <a:t>WHY NOW</a:t>
             </a:r>
           </a:p>
         </p:txBody>
@@ -12299,7 +10455,7 @@
                 </a:solidFill>
                 <a:latin typeface="Calibri"/>
               </a:rPr>
-              <a:t>Siloed selling leaves nine figures of influenceable pipeline on the table</a:t>
+              <a:t>The post-Splunk window is open — and closing</a:t>
             </a:r>
           </a:p>
         </p:txBody>
@@ -12373,11 +10529,11 @@
           <a:p>
             <a:pPr algn="l">
               <a:spcAft>
-                <a:spcPts val="1000"/>
-              </a:spcAft>
-            </a:pPr>
-            <a:r>
-              <a:rPr sz="1700" b="1">
+                <a:spcPts val="1200"/>
+              </a:spcAft>
+            </a:pPr>
+            <a:r>
+              <a:rPr sz="1800" b="1">
                 <a:solidFill>
                   <a:srgbClr val="00BCEB"/>
                 </a:solidFill>
@@ -12386,23 +10542,23 @@
               <a:t>•  </a:t>
             </a:r>
             <a:r>
-              <a:rPr sz="1700" b="0">
+              <a:rPr sz="1800" b="0">
                 <a:solidFill>
                   <a:srgbClr val="F2F4F8"/>
                 </a:solidFill>
                 <a:latin typeface="Calibri"/>
               </a:rPr>
-              <a:t>A ~$3M networking renewal stays flat; observability/SOC budget goes elsewhere</a:t>
-            </a:r>
-          </a:p>
-          <a:p>
-            <a:pPr algn="l">
-              <a:spcAft>
-                <a:spcPts val="1000"/>
-              </a:spcAft>
-            </a:pPr>
-            <a:r>
-              <a:rPr sz="1700" b="1">
+              <a:t>One vendor, edge to SOC</a:t>
+            </a:r>
+          </a:p>
+          <a:p>
+            <a:pPr algn="l">
+              <a:spcAft>
+                <a:spcPts val="1200"/>
+              </a:spcAft>
+            </a:pPr>
+            <a:r>
+              <a:rPr sz="1800" b="1">
                 <a:solidFill>
                   <a:srgbClr val="00BCEB"/>
                 </a:solidFill>
@@ -12411,23 +10567,23 @@
               <a:t>•  </a:t>
             </a:r>
             <a:r>
-              <a:rPr sz="1700" b="0">
+              <a:rPr sz="1800" b="0">
                 <a:solidFill>
                   <a:srgbClr val="F2F4F8"/>
                 </a:solidFill>
                 <a:latin typeface="Calibri"/>
               </a:rPr>
-              <a:t>X-Arch reframe turns it into a ~$5–6M multi-year, multi-architecture relationship</a:t>
-            </a:r>
-          </a:p>
-          <a:p>
-            <a:pPr algn="l">
-              <a:spcAft>
-                <a:spcPts val="1000"/>
-              </a:spcAft>
-            </a:pPr>
-            <a:r>
-              <a:rPr sz="1700" b="1">
+              <a:t>Live integrations: XDR+ES, ThousandEyes+AppD+Splunk, Cyber Vision+OT</a:t>
+            </a:r>
+          </a:p>
+          <a:p>
+            <a:pPr algn="l">
+              <a:spcAft>
+                <a:spcPts val="1200"/>
+              </a:spcAft>
+            </a:pPr>
+            <a:r>
+              <a:rPr sz="1800" b="1">
                 <a:solidFill>
                   <a:srgbClr val="00BCEB"/>
                 </a:solidFill>
@@ -12436,23 +10592,23 @@
               <a:t>•  </a:t>
             </a:r>
             <a:r>
-              <a:rPr sz="1700" b="0">
+              <a:rPr sz="1800" b="0">
                 <a:solidFill>
                   <a:srgbClr val="F2F4F8"/>
                 </a:solidFill>
                 <a:latin typeface="Calibri"/>
               </a:rPr>
-              <a:t>Multiply the GAP across ~50 strategic accounts each year</a:t>
-            </a:r>
-          </a:p>
-          <a:p>
-            <a:pPr algn="l">
-              <a:spcAft>
-                <a:spcPts val="1000"/>
-              </a:spcAft>
-            </a:pPr>
-            <a:r>
-              <a:rPr sz="1700" b="1">
+              <a:t>Vendor consolidation invites a C-suite frame</a:t>
+            </a:r>
+          </a:p>
+          <a:p>
+            <a:pPr algn="l">
+              <a:spcAft>
+                <a:spcPts val="1200"/>
+              </a:spcAft>
+            </a:pPr>
+            <a:r>
+              <a:rPr sz="1800" b="1">
                 <a:solidFill>
                   <a:srgbClr val="00BCEB"/>
                 </a:solidFill>
@@ -12461,13 +10617,13 @@
               <a:t>•  </a:t>
             </a:r>
             <a:r>
-              <a:rPr sz="1700" b="0">
+              <a:rPr sz="1800" b="0">
                 <a:solidFill>
                   <a:srgbClr val="F2F4F8"/>
                 </a:solidFill>
                 <a:latin typeface="Calibri"/>
               </a:rPr>
-              <a:t>'Do nothing' quietly cedes the largest, stickiest deals</a:t>
+              <a:t>AI build-outs pull networking, security, and data forward together</a:t>
             </a:r>
           </a:p>
         </p:txBody>
@@ -12607,7 +10763,7 @@
                 </a:solidFill>
                 <a:latin typeface="Calibri"/>
               </a:rPr>
-              <a:t>WHY NOW</a:t>
+              <a:t>THE DIFFERENTIATOR</a:t>
             </a:r>
           </a:p>
         </p:txBody>
@@ -12689,7 +10845,7 @@
                 </a:solidFill>
                 <a:latin typeface="Calibri"/>
               </a:rPr>
-              <a:t>The post-Splunk window is open — and closing</a:t>
+              <a:t>One vendor, edge to SOC — but only if someone tells it end-to-end</a:t>
             </a:r>
           </a:p>
         </p:txBody>
@@ -12763,11 +10919,11 @@
           <a:p>
             <a:pPr algn="l">
               <a:spcAft>
-                <a:spcPts val="1000"/>
-              </a:spcAft>
-            </a:pPr>
-            <a:r>
-              <a:rPr sz="1700" b="1">
+                <a:spcPts val="1200"/>
+              </a:spcAft>
+            </a:pPr>
+            <a:r>
+              <a:rPr sz="1800" b="1">
                 <a:solidFill>
                   <a:srgbClr val="00BCEB"/>
                 </a:solidFill>
@@ -12776,23 +10932,23 @@
               <a:t>•  </a:t>
             </a:r>
             <a:r>
-              <a:rPr sz="1700" b="0">
+              <a:rPr sz="1800" b="0">
                 <a:solidFill>
                   <a:srgbClr val="F2F4F8"/>
                 </a:solidFill>
                 <a:latin typeface="Calibri"/>
               </a:rPr>
-              <a:t>Portfolio completeness: one vendor from the edge to the SOC</a:t>
-            </a:r>
-          </a:p>
-          <a:p>
-            <a:pPr algn="l">
-              <a:spcAft>
-                <a:spcPts val="1000"/>
-              </a:spcAft>
-            </a:pPr>
-            <a:r>
-              <a:rPr sz="1700" b="1">
+              <a:t>The loop: sense → connect → secure → understand → act</a:t>
+            </a:r>
+          </a:p>
+          <a:p>
+            <a:pPr algn="l">
+              <a:spcAft>
+                <a:spcPts val="1200"/>
+              </a:spcAft>
+            </a:pPr>
+            <a:r>
+              <a:rPr sz="1800" b="1">
                 <a:solidFill>
                   <a:srgbClr val="00BCEB"/>
                 </a:solidFill>
@@ -12801,23 +10957,23 @@
               <a:t>•  </a:t>
             </a:r>
             <a:r>
-              <a:rPr sz="1700" b="0">
+              <a:rPr sz="1800" b="0">
                 <a:solidFill>
                   <a:srgbClr val="F2F4F8"/>
                 </a:solidFill>
                 <a:latin typeface="Calibri"/>
               </a:rPr>
-              <a:t>Integration momentum: XDR+ES, ThousandEyes+AppD+Splunk, Cyber Vision+Splunk OT</a:t>
-            </a:r>
-          </a:p>
-          <a:p>
-            <a:pPr algn="l">
-              <a:spcAft>
-                <a:spcPts val="1000"/>
-              </a:spcAft>
-            </a:pPr>
-            <a:r>
-              <a:rPr sz="1700" b="1">
+              <a:t>Every arrow between architectures is a cross-sell</a:t>
+            </a:r>
+          </a:p>
+          <a:p>
+            <a:pPr algn="l">
+              <a:spcAft>
+                <a:spcPts val="1200"/>
+              </a:spcAft>
+            </a:pPr>
+            <a:r>
+              <a:rPr sz="1800" b="1">
                 <a:solidFill>
                   <a:srgbClr val="00BCEB"/>
                 </a:solidFill>
@@ -12826,23 +10982,23 @@
               <a:t>•  </a:t>
             </a:r>
             <a:r>
-              <a:rPr sz="1700" b="0">
+              <a:rPr sz="1800" b="0">
                 <a:solidFill>
                   <a:srgbClr val="F2F4F8"/>
                 </a:solidFill>
                 <a:latin typeface="Calibri"/>
               </a:rPr>
-              <a:t>Vendor consolidation: a C-suite, cross-architecture conversation</a:t>
-            </a:r>
-          </a:p>
-          <a:p>
-            <a:pPr algn="l">
-              <a:spcAft>
-                <a:spcPts val="1000"/>
-              </a:spcAft>
-            </a:pPr>
-            <a:r>
-              <a:rPr sz="1700" b="1">
+              <a:t>Most sellers own one box; the Field CTO owns the arrows</a:t>
+            </a:r>
+          </a:p>
+          <a:p>
+            <a:pPr algn="l">
+              <a:spcAft>
+                <a:spcPts val="1200"/>
+              </a:spcAft>
+            </a:pPr>
+            <a:r>
+              <a:rPr sz="1800" b="1">
                 <a:solidFill>
                   <a:srgbClr val="00BCEB"/>
                 </a:solidFill>
@@ -12851,13 +11007,13 @@
               <a:t>•  </a:t>
             </a:r>
             <a:r>
-              <a:rPr sz="1700" b="0">
+              <a:rPr sz="1800" b="0">
                 <a:solidFill>
                   <a:srgbClr val="F2F4F8"/>
                 </a:solidFill>
                 <a:latin typeface="Calibri"/>
               </a:rPr>
-              <a:t>AI-infrastructure pull: builds drag networking, security, and data forward together</a:t>
+              <a:t>Splunk ↔ Cisco attach is the top under-executed play</a:t>
             </a:r>
           </a:p>
         </p:txBody>
@@ -12997,7 +11153,7 @@
                 </a:solidFill>
                 <a:latin typeface="Calibri"/>
               </a:rPr>
-              <a:t>THE DIFFERENTIATOR</a:t>
+              <a:t>THE SOLUTION</a:t>
             </a:r>
           </a:p>
         </p:txBody>
@@ -13079,7 +11235,7 @@
                 </a:solidFill>
                 <a:latin typeface="Calibri"/>
               </a:rPr>
-              <a:t>One vendor, edge to SOC — but only if someone tells it end-to-end</a:t>
+              <a:t>A thin, senior Field CTO seller group that leads across architectures</a:t>
             </a:r>
           </a:p>
         </p:txBody>
@@ -13153,11 +11309,11 @@
           <a:p>
             <a:pPr algn="l">
               <a:spcAft>
-                <a:spcPts val="1000"/>
-              </a:spcAft>
-            </a:pPr>
-            <a:r>
-              <a:rPr sz="1700" b="1">
+                <a:spcPts val="1200"/>
+              </a:spcAft>
+            </a:pPr>
+            <a:r>
+              <a:rPr sz="1800" b="1">
                 <a:solidFill>
                   <a:srgbClr val="00BCEB"/>
                 </a:solidFill>
@@ -13166,23 +11322,23 @@
               <a:t>•  </a:t>
             </a:r>
             <a:r>
-              <a:rPr sz="1700" b="0">
+              <a:rPr sz="1800" b="0">
                 <a:solidFill>
                   <a:srgbClr val="F2F4F8"/>
                 </a:solidFill>
                 <a:latin typeface="Calibri"/>
               </a:rPr>
-              <a:t>The loop: sense → connect → secure → understand → act</a:t>
-            </a:r>
-          </a:p>
-          <a:p>
-            <a:pPr algn="l">
-              <a:spcAft>
-                <a:spcPts val="1000"/>
-              </a:spcAft>
-            </a:pPr>
-            <a:r>
-              <a:rPr sz="1700" b="1">
+              <a:t>Owns the CxO conversation (risk, resilience, cost)</a:t>
+            </a:r>
+          </a:p>
+          <a:p>
+            <a:pPr algn="l">
+              <a:spcAft>
+                <a:spcPts val="1200"/>
+              </a:spcAft>
+            </a:pPr>
+            <a:r>
+              <a:rPr sz="1800" b="1">
                 <a:solidFill>
                   <a:srgbClr val="00BCEB"/>
                 </a:solidFill>
@@ -13191,23 +11347,23 @@
               <a:t>•  </a:t>
             </a:r>
             <a:r>
-              <a:rPr sz="1700" b="0">
+              <a:rPr sz="1800" b="0">
                 <a:solidFill>
                   <a:srgbClr val="F2F4F8"/>
                 </a:solidFill>
                 <a:latin typeface="Calibri"/>
               </a:rPr>
-              <a:t>Every arrow between architectures is a cross-sell opportunity</a:t>
-            </a:r>
-          </a:p>
-          <a:p>
-            <a:pPr algn="l">
-              <a:spcAft>
-                <a:spcPts val="1000"/>
-              </a:spcAft>
-            </a:pPr>
-            <a:r>
-              <a:rPr sz="1700" b="1">
+              <a:t>Architects across BUs; specialists detail and close</a:t>
+            </a:r>
+          </a:p>
+          <a:p>
+            <a:pPr algn="l">
+              <a:spcAft>
+                <a:spcPts val="1200"/>
+              </a:spcAft>
+            </a:pPr>
+            <a:r>
+              <a:rPr sz="1800" b="1">
                 <a:solidFill>
                   <a:srgbClr val="00BCEB"/>
                 </a:solidFill>
@@ -13216,23 +11372,23 @@
               <a:t>•  </a:t>
             </a:r>
             <a:r>
-              <a:rPr sz="1700" b="0">
+              <a:rPr sz="1800" b="0">
                 <a:solidFill>
                   <a:srgbClr val="F2F4F8"/>
                 </a:solidFill>
                 <a:latin typeface="Calibri"/>
               </a:rPr>
-              <a:t>Today most sellers own one box; the Field CTO owns the arrows</a:t>
-            </a:r>
-          </a:p>
-          <a:p>
-            <a:pPr algn="l">
-              <a:spcAft>
-                <a:spcPts val="1000"/>
-              </a:spcAft>
-            </a:pPr>
-            <a:r>
-              <a:rPr sz="1700" b="1">
+              <a:t>Leads with vertical credibility (NIS2, DORA, HIPAA, NERC-CIP)</a:t>
+            </a:r>
+          </a:p>
+          <a:p>
+            <a:pPr algn="l">
+              <a:spcAft>
+                <a:spcPts val="1200"/>
+              </a:spcAft>
+            </a:pPr>
+            <a:r>
+              <a:rPr sz="1800" b="1">
                 <a:solidFill>
                   <a:srgbClr val="00BCEB"/>
                 </a:solidFill>
@@ -13241,13 +11397,13 @@
               <a:t>•  </a:t>
             </a:r>
             <a:r>
-              <a:rPr sz="1700" b="0">
+              <a:rPr sz="1800" b="0">
                 <a:solidFill>
                   <a:srgbClr val="F2F4F8"/>
                 </a:solidFill>
                 <a:latin typeface="Calibri"/>
               </a:rPr>
-              <a:t>The bi-directional Splunk ↔ Cisco attach is the top under-executed play</a:t>
+              <a:t>Orchestrates — NOT another product-overlay SE team</a:t>
             </a:r>
           </a:p>
         </p:txBody>
@@ -13387,7 +11543,7 @@
                 </a:solidFill>
                 <a:latin typeface="Calibri"/>
               </a:rPr>
-              <a:t>THE SOLUTION</a:t>
+              <a:t>EXTENDING THE MODEL</a:t>
             </a:r>
           </a:p>
         </p:txBody>
@@ -13469,7 +11625,7 @@
                 </a:solidFill>
                 <a:latin typeface="Calibri"/>
               </a:rPr>
-              <a:t>A thin, senior Field CTO seller group that leads across architectures</a:t>
+              <a:t>Black Ops: an elite tiger team for the accounts nobody can crack</a:t>
             </a:r>
           </a:p>
         </p:txBody>
@@ -13543,11 +11699,11 @@
           <a:p>
             <a:pPr algn="l">
               <a:spcAft>
-                <a:spcPts val="1000"/>
-              </a:spcAft>
-            </a:pPr>
-            <a:r>
-              <a:rPr sz="1700" b="1">
+                <a:spcPts val="1200"/>
+              </a:spcAft>
+            </a:pPr>
+            <a:r>
+              <a:rPr sz="1800" b="1">
                 <a:solidFill>
                   <a:srgbClr val="00BCEB"/>
                 </a:solidFill>
@@ -13556,23 +11712,23 @@
               <a:t>•  </a:t>
             </a:r>
             <a:r>
-              <a:rPr sz="1700" b="0">
+              <a:rPr sz="1800" b="0">
                 <a:solidFill>
                   <a:srgbClr val="F2F4F8"/>
                 </a:solidFill>
                 <a:latin typeface="Calibri"/>
               </a:rPr>
-              <a:t>Owns the CxO conversation in the customer's language (risk, resilience, cost)</a:t>
-            </a:r>
-          </a:p>
-          <a:p>
-            <a:pPr algn="l">
-              <a:spcAft>
-                <a:spcPts val="1000"/>
-              </a:spcAft>
-            </a:pPr>
-            <a:r>
-              <a:rPr sz="1700" b="1">
+              <a:t>The group runs the marathon; Black Ops is the breakthrough</a:t>
+            </a:r>
+          </a:p>
+          <a:p>
+            <a:pPr algn="l">
+              <a:spcAft>
+                <a:spcPts val="1200"/>
+              </a:spcAft>
+            </a:pPr>
+            <a:r>
+              <a:rPr sz="1800" b="1">
                 <a:solidFill>
                   <a:srgbClr val="00BCEB"/>
                 </a:solidFill>
@@ -13581,23 +11737,23 @@
               <a:t>•  </a:t>
             </a:r>
             <a:r>
-              <a:rPr sz="1700" b="0">
+              <a:rPr sz="1800" b="0">
                 <a:solidFill>
                   <a:srgbClr val="F2F4F8"/>
                 </a:solidFill>
                 <a:latin typeface="Calibri"/>
               </a:rPr>
-              <a:t>Architects across BUs, then pulls specialists in to detail and close</a:t>
-            </a:r>
-          </a:p>
-          <a:p>
-            <a:pPr algn="l">
-              <a:spcAft>
-                <a:spcPts val="1000"/>
-              </a:spcAft>
-            </a:pPr>
-            <a:r>
-              <a:rPr sz="1700" b="1">
+              <a:t>Parachutes into stalled / SI-locked / narrow-window whales</a:t>
+            </a:r>
+          </a:p>
+          <a:p>
+            <a:pPr algn="l">
+              <a:spcAft>
+                <a:spcPts val="1200"/>
+              </a:spcAft>
+            </a:pPr>
+            <a:r>
+              <a:rPr sz="1800" b="1">
                 <a:solidFill>
                   <a:srgbClr val="00BCEB"/>
                 </a:solidFill>
@@ -13606,23 +11762,23 @@
               <a:t>•  </a:t>
             </a:r>
             <a:r>
-              <a:rPr sz="1700" b="0">
+              <a:rPr sz="1800" b="0">
                 <a:solidFill>
                   <a:srgbClr val="F2F4F8"/>
                 </a:solidFill>
                 <a:latin typeface="Calibri"/>
               </a:rPr>
-              <a:t>Leads with vertical credibility (NIS2, DORA, HIPAA, NERC-CIP)</a:t>
-            </a:r>
-          </a:p>
-          <a:p>
-            <a:pPr algn="l">
-              <a:spcAft>
-                <a:spcPts val="1000"/>
-              </a:spcAft>
-            </a:pPr>
-            <a:r>
-              <a:rPr sz="1700" b="1">
+              <a:t>Focused ~60–120-day mission that IGNITES DURABLE GROWTH, then hands back</a:t>
+            </a:r>
+          </a:p>
+          <a:p>
+            <a:pPr algn="l">
+              <a:spcAft>
+                <a:spcPts val="1200"/>
+              </a:spcAft>
+            </a:pPr>
+            <a:r>
+              <a:rPr sz="1800" b="1">
                 <a:solidFill>
                   <a:srgbClr val="00BCEB"/>
                 </a:solidFill>
@@ -13631,13 +11787,13 @@
               <a:t>•  </a:t>
             </a:r>
             <a:r>
-              <a:rPr sz="1700" b="0">
+              <a:rPr sz="1800" b="0">
                 <a:solidFill>
                   <a:srgbClr val="F2F4F8"/>
                 </a:solidFill>
                 <a:latin typeface="Calibri"/>
               </a:rPr>
-              <a:t>Orchestrates — doesn't hoard. NOT another product-overlay SE team</a:t>
+              <a:t>Fully ethical; OT-safety and read-only guardrails still apply</a:t>
             </a:r>
           </a:p>
         </p:txBody>
@@ -13777,7 +11933,7 @@
                 </a:solidFill>
                 <a:latin typeface="Calibri"/>
               </a:rPr>
-              <a:t>EXTENDING THE MODEL</a:t>
+              <a:t>FOCUS</a:t>
             </a:r>
           </a:p>
         </p:txBody>
@@ -13859,7 +12015,7 @@
                 </a:solidFill>
                 <a:latin typeface="Calibri"/>
               </a:rPr>
-              <a:t>Black Ops: an elite tiger team for the accounts nobody else can crack</a:t>
+              <a:t>Three high-attach architectures, four high-pull verticals</a:t>
             </a:r>
           </a:p>
         </p:txBody>
@@ -13933,11 +12089,11 @@
           <a:p>
             <a:pPr algn="l">
               <a:spcAft>
-                <a:spcPts val="1000"/>
-              </a:spcAft>
-            </a:pPr>
-            <a:r>
-              <a:rPr sz="1700" b="1">
+                <a:spcPts val="1200"/>
+              </a:spcAft>
+            </a:pPr>
+            <a:r>
+              <a:rPr sz="1800" b="1">
                 <a:solidFill>
                   <a:srgbClr val="00BCEB"/>
                 </a:solidFill>
@@ -13946,23 +12102,23 @@
               <a:t>•  </a:t>
             </a:r>
             <a:r>
-              <a:rPr sz="1700" b="0">
+              <a:rPr sz="1800" b="0">
                 <a:solidFill>
                   <a:srgbClr val="F2F4F8"/>
                 </a:solidFill>
                 <a:latin typeface="Calibri"/>
               </a:rPr>
-              <a:t>The Field CTO group runs the marathon; Black Ops runs the sprint</a:t>
-            </a:r>
-          </a:p>
-          <a:p>
-            <a:pPr algn="l">
-              <a:spcAft>
-                <a:spcPts val="1000"/>
-              </a:spcAft>
-            </a:pPr>
-            <a:r>
-              <a:rPr sz="1700" b="1">
+              <a:t>Secure Networking · Observability &amp; Data · Resilience &amp; SecOps</a:t>
+            </a:r>
+          </a:p>
+          <a:p>
+            <a:pPr algn="l">
+              <a:spcAft>
+                <a:spcPts val="1200"/>
+              </a:spcAft>
+            </a:pPr>
+            <a:r>
+              <a:rPr sz="1800" b="1">
                 <a:solidFill>
                   <a:srgbClr val="00BCEB"/>
                 </a:solidFill>
@@ -13971,23 +12127,23 @@
               <a:t>•  </a:t>
             </a:r>
             <a:r>
-              <a:rPr sz="1700" b="0">
+              <a:rPr sz="1800" b="0">
                 <a:solidFill>
                   <a:srgbClr val="F2F4F8"/>
                 </a:solidFill>
                 <a:latin typeface="Calibri"/>
               </a:rPr>
-              <a:t>Parachutes into stalled whales / SI-locked / narrow-window accounts</a:t>
-            </a:r>
-          </a:p>
-          <a:p>
-            <a:pPr algn="l">
-              <a:spcAft>
-                <a:spcPts val="1000"/>
-              </a:spcAft>
-            </a:pPr>
-            <a:r>
-              <a:rPr sz="1700" b="1">
+              <a:t>(+1) AI-Ready Infrastructure as a pull-through adjacency</a:t>
+            </a:r>
+          </a:p>
+          <a:p>
+            <a:pPr algn="l">
+              <a:spcAft>
+                <a:spcPts val="1200"/>
+              </a:spcAft>
+            </a:pPr>
+            <a:r>
+              <a:rPr sz="1800" b="1">
                 <a:solidFill>
                   <a:srgbClr val="00BCEB"/>
                 </a:solidFill>
@@ -13996,23 +12152,23 @@
               <a:t>•  </a:t>
             </a:r>
             <a:r>
-              <a:rPr sz="1700" b="0">
+              <a:rPr sz="1800" b="0">
                 <a:solidFill>
                   <a:srgbClr val="F2F4F8"/>
                 </a:solidFill>
                 <a:latin typeface="Calibri"/>
               </a:rPr>
-              <a:t>Mission-scoped, time-boxed (60–120 days); breaks the account open, then HANDS BACK</a:t>
-            </a:r>
-          </a:p>
-          <a:p>
-            <a:pPr algn="l">
-              <a:spcAft>
-                <a:spcPts val="1000"/>
-              </a:spcAft>
-            </a:pPr>
-            <a:r>
-              <a:rPr sz="1700" b="1">
+              <a:t>Transportation &amp; Logistics · Financial Services</a:t>
+            </a:r>
+          </a:p>
+          <a:p>
+            <a:pPr algn="l">
+              <a:spcAft>
+                <a:spcPts val="1200"/>
+              </a:spcAft>
+            </a:pPr>
+            <a:r>
+              <a:rPr sz="1800" b="1">
                 <a:solidFill>
                   <a:srgbClr val="00BCEB"/>
                 </a:solidFill>
@@ -14021,13 +12177,38 @@
               <a:t>•  </a:t>
             </a:r>
             <a:r>
-              <a:rPr sz="1700" b="0">
+              <a:rPr sz="1800" b="0">
                 <a:solidFill>
                   <a:srgbClr val="F2F4F8"/>
                 </a:solidFill>
                 <a:latin typeface="Calibri"/>
               </a:rPr>
-              <a:t>Ethical and above-board; all OT-safety and read-only guardrails still apply</a:t>
+              <a:t>Healthcare · Public Sector / Critical Infrastructure</a:t>
+            </a:r>
+          </a:p>
+          <a:p>
+            <a:pPr algn="l">
+              <a:spcAft>
+                <a:spcPts val="1200"/>
+              </a:spcAft>
+            </a:pPr>
+            <a:r>
+              <a:rPr sz="1800" b="1">
+                <a:solidFill>
+                  <a:srgbClr val="00BCEB"/>
+                </a:solidFill>
+                <a:latin typeface="Calibri"/>
+              </a:rPr>
+              <a:t>•  </a:t>
+            </a:r>
+            <a:r>
+              <a:rPr sz="1800" b="0">
+                <a:solidFill>
+                  <a:srgbClr val="F2F4F8"/>
+                </a:solidFill>
+                <a:latin typeface="Calibri"/>
+              </a:rPr>
+              <a:t>Chosen for cross-attach + regulatory pull; the list is swappable</a:t>
             </a:r>
           </a:p>
         </p:txBody>
@@ -14167,7 +12348,7 @@
                 </a:solidFill>
                 <a:latin typeface="Calibri"/>
               </a:rPr>
-              <a:t>IN PRACTICE</a:t>
+              <a:t>THE MOTION</a:t>
             </a:r>
           </a:p>
         </p:txBody>
@@ -14249,7 +12430,7 @@
                 </a:solidFill>
                 <a:latin typeface="Calibri"/>
               </a:rPr>
-              <a:t>One frame, one architecture, one strategic relationship</a:t>
+              <a:t>A repeatable lifecycle and a library of plays — not heroics</a:t>
             </a:r>
           </a:p>
         </p:txBody>
@@ -14323,11 +12504,11 @@
           <a:p>
             <a:pPr algn="l">
               <a:spcAft>
-                <a:spcPts val="1000"/>
-              </a:spcAft>
-            </a:pPr>
-            <a:r>
-              <a:rPr sz="1700" b="1">
+                <a:spcPts val="1200"/>
+              </a:spcAft>
+            </a:pPr>
+            <a:r>
+              <a:rPr sz="1800" b="1">
                 <a:solidFill>
                   <a:srgbClr val="00BCEB"/>
                 </a:solidFill>
@@ -14336,23 +12517,23 @@
               <a:t>•  </a:t>
             </a:r>
             <a:r>
-              <a:rPr sz="1700" b="0">
+              <a:rPr sz="1800" b="0">
                 <a:solidFill>
                   <a:srgbClr val="F2F4F8"/>
                 </a:solidFill>
                 <a:latin typeface="Calibri"/>
               </a:rPr>
-              <a:t>Siloed: 3 sellers call on 3 managers about 3 disconnected deals</a:t>
-            </a:r>
-          </a:p>
-          <a:p>
-            <a:pPr algn="l">
-              <a:spcAft>
-                <a:spcPts val="1000"/>
-              </a:spcAft>
-            </a:pPr>
-            <a:r>
-              <a:rPr sz="1700" b="1">
+              <a:t>Select → Frame → Architect → Value → Close → Expand</a:t>
+            </a:r>
+          </a:p>
+          <a:p>
+            <a:pPr algn="l">
+              <a:spcAft>
+                <a:spcPts val="1200"/>
+              </a:spcAft>
+            </a:pPr>
+            <a:r>
+              <a:rPr sz="1800" b="1">
                 <a:solidFill>
                   <a:srgbClr val="00BCEB"/>
                 </a:solidFill>
@@ -14361,23 +12542,23 @@
               <a:t>•  </a:t>
             </a:r>
             <a:r>
-              <a:rPr sz="1700" b="0">
+              <a:rPr sz="1800" b="0">
                 <a:solidFill>
                   <a:srgbClr val="F2F4F8"/>
                 </a:solidFill>
                 <a:latin typeface="Calibri"/>
               </a:rPr>
-              <a:t>X-Arch: one CxO session framed as 'keep cargo moving under attack'</a:t>
-            </a:r>
-          </a:p>
-          <a:p>
-            <a:pPr algn="l">
-              <a:spcAft>
-                <a:spcPts val="1000"/>
-              </a:spcAft>
-            </a:pPr>
-            <a:r>
-              <a:rPr sz="1700" b="1">
+              <a:t>Plays: Splunk-attach, SOC modernization, full-stack DX, passive OT, consolidation TCO</a:t>
+            </a:r>
+          </a:p>
+          <a:p>
+            <a:pPr algn="l">
+              <a:spcAft>
+                <a:spcPts val="1200"/>
+              </a:spcAft>
+            </a:pPr>
+            <a:r>
+              <a:rPr sz="1800" b="1">
                 <a:solidFill>
                   <a:srgbClr val="00BCEB"/>
                 </a:solidFill>
@@ -14386,38 +12567,13 @@
               <a:t>•  </a:t>
             </a:r>
             <a:r>
-              <a:rPr sz="1700" b="0">
+              <a:rPr sz="1800" b="0">
                 <a:solidFill>
                   <a:srgbClr val="F2F4F8"/>
                 </a:solidFill>
                 <a:latin typeface="Calibri"/>
               </a:rPr>
-              <a:t>One reference architecture: passive OT + segmentation + SD-WAN + modern SOC</a:t>
-            </a:r>
-          </a:p>
-          <a:p>
-            <a:pPr algn="l">
-              <a:spcAft>
-                <a:spcPts val="1000"/>
-              </a:spcAft>
-            </a:pPr>
-            <a:r>
-              <a:rPr sz="1700" b="1">
-                <a:solidFill>
-                  <a:srgbClr val="00BCEB"/>
-                </a:solidFill>
-                <a:latin typeface="Calibri"/>
-              </a:rPr>
-              <a:t>•  </a:t>
-            </a:r>
-            <a:r>
-              <a:rPr sz="1700" b="0">
-                <a:solidFill>
-                  <a:srgbClr val="F2F4F8"/>
-                </a:solidFill>
-                <a:latin typeface="Calibri"/>
-              </a:rPr>
-              <a:t>Result: a larger, multi-year program the customer co-authored</a:t>
+              <a:t>Each play = discovery script + reference architecture + value case + proof</a:t>
             </a:r>
           </a:p>
         </p:txBody>
@@ -14557,7 +12713,7 @@
                 </a:solidFill>
                 <a:latin typeface="Calibri"/>
               </a:rPr>
-              <a:t>FOCUS · ARCHITECTURES</a:t>
+              <a:t>WORKED EXAMPLE · AVIATION</a:t>
             </a:r>
           </a:p>
         </p:txBody>
@@ -14639,7 +12795,7 @@
                 </a:solidFill>
                 <a:latin typeface="Calibri"/>
               </a:rPr>
-              <a:t>We lead with the three highest-attach architectures, plus one adjacency</a:t>
+              <a:t>Airport operator: Black Ops broke open a stalled 'smart airport' program</a:t>
             </a:r>
           </a:p>
         </p:txBody>
@@ -14713,11 +12869,11 @@
           <a:p>
             <a:pPr algn="l">
               <a:spcAft>
-                <a:spcPts val="1000"/>
-              </a:spcAft>
-            </a:pPr>
-            <a:r>
-              <a:rPr sz="1700" b="1">
+                <a:spcPts val="1200"/>
+              </a:spcAft>
+            </a:pPr>
+            <a:r>
+              <a:rPr sz="1800" b="1">
                 <a:solidFill>
                   <a:srgbClr val="00BCEB"/>
                 </a:solidFill>
@@ -14726,23 +12882,23 @@
               <a:t>•  </a:t>
             </a:r>
             <a:r>
-              <a:rPr sz="1700" b="0">
+              <a:rPr sz="1800" b="0">
                 <a:solidFill>
                   <a:srgbClr val="F2F4F8"/>
                 </a:solidFill>
                 <a:latin typeface="Calibri"/>
               </a:rPr>
-              <a:t>Secure Networking — Catalyst/Meraki/SD-WAN + Firewall/ISE/XDR/Duo</a:t>
-            </a:r>
-          </a:p>
-          <a:p>
-            <a:pPr algn="l">
-              <a:spcAft>
-                <a:spcPts val="1000"/>
-              </a:spcAft>
-            </a:pPr>
-            <a:r>
-              <a:rPr sz="1700" b="1">
+              <a:t>OT-heavy hub + NIS2 + a Terminal 4 build</a:t>
+            </a:r>
+          </a:p>
+          <a:p>
+            <a:pPr algn="l">
+              <a:spcAft>
+                <a:spcPts val="1200"/>
+              </a:spcAft>
+            </a:pPr>
+            <a:r>
+              <a:rPr sz="1800" b="1">
                 <a:solidFill>
                   <a:srgbClr val="00BCEB"/>
                 </a:solidFill>
@@ -14751,23 +12907,23 @@
               <a:t>•  </a:t>
             </a:r>
             <a:r>
-              <a:rPr sz="1700" b="0">
+              <a:rPr sz="1800" b="0">
                 <a:solidFill>
                   <a:srgbClr val="F2F4F8"/>
                 </a:solidFill>
                 <a:latin typeface="Calibri"/>
               </a:rPr>
-              <a:t>Full-Stack Observability &amp; Data — Splunk, ThousandEyes, AppDynamics</a:t>
-            </a:r>
-          </a:p>
-          <a:p>
-            <a:pPr algn="l">
-              <a:spcAft>
-                <a:spcPts val="1000"/>
-              </a:spcAft>
-            </a:pPr>
-            <a:r>
-              <a:rPr sz="1700" b="1">
+              <a:t>SI about to lock the architecture — pod convened</a:t>
+            </a:r>
+          </a:p>
+          <a:p>
+            <a:pPr algn="l">
+              <a:spcAft>
+                <a:spcPts val="1200"/>
+              </a:spcAft>
+            </a:pPr>
+            <a:r>
+              <a:rPr sz="1800" b="1">
                 <a:solidFill>
                   <a:srgbClr val="00BCEB"/>
                 </a:solidFill>
@@ -14776,23 +12932,23 @@
               <a:t>•  </a:t>
             </a:r>
             <a:r>
-              <a:rPr sz="1700" b="0">
+              <a:rPr sz="1800" b="0">
                 <a:solidFill>
                   <a:srgbClr val="F2F4F8"/>
                 </a:solidFill>
                 <a:latin typeface="Calibri"/>
               </a:rPr>
-              <a:t>Resilience &amp; Security Operations — Splunk ES + XDR + SOAR</a:t>
-            </a:r>
-          </a:p>
-          <a:p>
-            <a:pPr algn="l">
-              <a:spcAft>
-                <a:spcPts val="1000"/>
-              </a:spcAft>
-            </a:pPr>
-            <a:r>
-              <a:rPr sz="1700" b="1">
+              <a:t>Reframed as board-level operational resilience</a:t>
+            </a:r>
+          </a:p>
+          <a:p>
+            <a:pPr algn="l">
+              <a:spcAft>
+                <a:spcPts val="1200"/>
+              </a:spcAft>
+            </a:pPr>
+            <a:r>
+              <a:rPr sz="1800" b="1">
                 <a:solidFill>
                   <a:srgbClr val="00BCEB"/>
                 </a:solidFill>
@@ -14801,13 +12957,38 @@
               <a:t>•  </a:t>
             </a:r>
             <a:r>
-              <a:rPr sz="1700" b="0">
+              <a:rPr sz="1800" b="0">
                 <a:solidFill>
                   <a:srgbClr val="F2F4F8"/>
                 </a:solidFill>
                 <a:latin typeface="Calibri"/>
               </a:rPr>
-              <a:t>(+1) AI-Ready Infrastructure — UCS/Nexus/AI PODs as pull-through</a:t>
+              <a:t>One X-Arch architecture: passive OT + segmentation + SD-WAN + SOC + edge AI</a:t>
+            </a:r>
+          </a:p>
+          <a:p>
+            <a:pPr algn="l">
+              <a:spcAft>
+                <a:spcPts val="1200"/>
+              </a:spcAft>
+            </a:pPr>
+            <a:r>
+              <a:rPr sz="1800" b="1">
+                <a:solidFill>
+                  <a:srgbClr val="00BCEB"/>
+                </a:solidFill>
+                <a:latin typeface="Calibri"/>
+              </a:rPr>
+              <a:t>•  </a:t>
+            </a:r>
+            <a:r>
+              <a:rPr sz="1800" b="0">
+                <a:solidFill>
+                  <a:srgbClr val="F2F4F8"/>
+                </a:solidFill>
+                <a:latin typeface="Calibri"/>
+              </a:rPr>
+              <a:t>Won OT trust (read-only), then handed back to scale</a:t>
             </a:r>
           </a:p>
         </p:txBody>

--- a/Field-CTO-XArch-Business-Case.pptx
+++ b/Field-CTO-XArch-Business-Case.pptx
@@ -5063,6 +5063,7 @@
           <a:ln>
             <a:noFill/>
           </a:ln>
+          <a:effectLst/>
         </p:spPr>
         <p:style>
           <a:lnRef idx="1">
@@ -5352,7 +5353,7 @@
         <p:spPr>
           <a:xfrm>
             <a:off x="548640" y="868680"/>
-            <a:ext cx="1280160" cy="50800"/>
+            <a:ext cx="1280160" cy="50292"/>
           </a:xfrm>
           <a:prstGeom prst="rect">
             <a:avLst/>
@@ -5363,6 +5364,7 @@
           <a:ln>
             <a:noFill/>
           </a:ln>
+          <a:effectLst/>
         </p:spPr>
         <p:style>
           <a:lnRef idx="1">
@@ -5414,7 +5416,7 @@
               </a:spcAft>
             </a:pPr>
             <a:r>
-              <a:rPr sz="2800" b="1">
+              <a:rPr sz="2700" b="1">
                 <a:solidFill>
                   <a:srgbClr val="F2F4F8"/>
                 </a:solidFill>
@@ -5434,7 +5436,7 @@
         <p:spPr>
           <a:xfrm>
             <a:off x="548640" y="2331720"/>
-            <a:ext cx="11064240" cy="3931920"/>
+            <a:ext cx="5486400" cy="3931920"/>
           </a:xfrm>
           <a:prstGeom prst="rect">
             <a:avLst/>
@@ -5447,6 +5449,7 @@
               <a:srgbClr val="2C2C3A"/>
             </a:solidFill>
           </a:ln>
+          <a:effectLst/>
         </p:spPr>
         <p:style>
           <a:lnRef idx="1">
@@ -5478,8 +5481,8 @@
         </p:nvSpPr>
         <p:spPr>
           <a:xfrm>
-            <a:off x="914400" y="2560320"/>
-            <a:ext cx="10332720" cy="3566160"/>
+            <a:off x="822960" y="2542032"/>
+            <a:ext cx="4937760" cy="3566160"/>
           </a:xfrm>
           <a:prstGeom prst="rect">
             <a:avLst/>
@@ -5494,11 +5497,11 @@
           <a:p>
             <a:pPr algn="l">
               <a:spcAft>
-                <a:spcPts val="1200"/>
+                <a:spcPts val="1100"/>
               </a:spcAft>
             </a:pPr>
             <a:r>
-              <a:rPr sz="1800" b="1">
+              <a:rPr sz="1600" b="1">
                 <a:solidFill>
                   <a:srgbClr val="00BCEB"/>
                 </a:solidFill>
@@ -5507,23 +5510,23 @@
               <a:t>•  </a:t>
             </a:r>
             <a:r>
-              <a:rPr sz="1800" b="0">
+              <a:rPr sz="1600" b="0">
                 <a:solidFill>
                   <a:srgbClr val="F2F4F8"/>
                 </a:solidFill>
                 <a:latin typeface="Calibri"/>
               </a:rPr>
-              <a:t>Year-1 (illustrative): ~$180M influenced pipeline</a:t>
+              <a:t>~$180M influenced pipeline (Yr 1)</a:t>
             </a:r>
           </a:p>
           <a:p>
             <a:pPr algn="l">
               <a:spcAft>
-                <a:spcPts val="1200"/>
+                <a:spcPts val="1100"/>
               </a:spcAft>
             </a:pPr>
             <a:r>
-              <a:rPr sz="1800" b="1">
+              <a:rPr sz="1600" b="1">
                 <a:solidFill>
                   <a:srgbClr val="00BCEB"/>
                 </a:solidFill>
@@ -5532,23 +5535,23 @@
               <a:t>•  </a:t>
             </a:r>
             <a:r>
-              <a:rPr sz="1800" b="0">
+              <a:rPr sz="1600" b="0">
                 <a:solidFill>
                   <a:srgbClr val="F2F4F8"/>
                 </a:solidFill>
                 <a:latin typeface="Calibri"/>
               </a:rPr>
-              <a:t>~$60M incremental bookings → ~$36M incremental gross margin</a:t>
+              <a:t>~$60M bookings → ~$36M margin</a:t>
             </a:r>
           </a:p>
           <a:p>
             <a:pPr algn="l">
               <a:spcAft>
-                <a:spcPts val="1200"/>
+                <a:spcPts val="1100"/>
               </a:spcAft>
             </a:pPr>
             <a:r>
-              <a:rPr sz="1800" b="1">
+              <a:rPr sz="1600" b="1">
                 <a:solidFill>
                   <a:srgbClr val="00BCEB"/>
                 </a:solidFill>
@@ -5557,23 +5560,23 @@
               <a:t>•  </a:t>
             </a:r>
             <a:r>
-              <a:rPr sz="1800" b="0">
+              <a:rPr sz="1600" b="0">
                 <a:solidFill>
                   <a:srgbClr val="F2F4F8"/>
                 </a:solidFill>
                 <a:latin typeface="Calibri"/>
               </a:rPr>
-              <a:t>Break-even ~$9M bookings — roughly FIVE deals cover the whole cost</a:t>
+              <a:t>Break-even ~$9M — about five deals</a:t>
             </a:r>
           </a:p>
           <a:p>
             <a:pPr algn="l">
               <a:spcAft>
-                <a:spcPts val="1200"/>
+                <a:spcPts val="1100"/>
               </a:spcAft>
             </a:pPr>
             <a:r>
-              <a:rPr sz="1800" b="1">
+              <a:rPr sz="1600" b="1">
                 <a:solidFill>
                   <a:srgbClr val="00BCEB"/>
                 </a:solidFill>
@@ -5582,20 +5585,507 @@
               <a:t>•  </a:t>
             </a:r>
             <a:r>
-              <a:rPr sz="1800" b="0">
+              <a:rPr sz="1600" b="0">
                 <a:solidFill>
                   <a:srgbClr val="F2F4F8"/>
                 </a:solidFill>
                 <a:latin typeface="Calibri"/>
               </a:rPr>
-              <a:t>Profitable across scenarios: ~$25M / $60M / $90M → ~$9M / $31M / $46M net</a:t>
-            </a:r>
-          </a:p>
-        </p:txBody>
-      </p:sp>
-      <p:sp>
-        <p:nvSpPr>
-          <p:cNvPr id="8" name="TextBox 7"/>
+              <a:t>Profitable across every scenario</a:t>
+            </a:r>
+          </a:p>
+        </p:txBody>
+      </p:sp>
+      <p:sp>
+        <p:nvSpPr>
+          <p:cNvPr id="8" name="Rectangle 7"/>
+          <p:cNvSpPr/>
+          <p:nvPr/>
+        </p:nvSpPr>
+        <p:spPr>
+          <a:xfrm>
+            <a:off x="6263640" y="2331720"/>
+            <a:ext cx="5349240" cy="3931920"/>
+          </a:xfrm>
+          <a:prstGeom prst="rect">
+            <a:avLst/>
+          </a:prstGeom>
+          <a:solidFill>
+            <a:srgbClr val="1A1A2E"/>
+          </a:solidFill>
+          <a:ln w="12700">
+            <a:solidFill>
+              <a:srgbClr val="2C2C3A"/>
+            </a:solidFill>
+          </a:ln>
+          <a:effectLst/>
+        </p:spPr>
+        <p:style>
+          <a:lnRef idx="1">
+            <a:schemeClr val="accent1"/>
+          </a:lnRef>
+          <a:fillRef idx="3">
+            <a:schemeClr val="accent1"/>
+          </a:fillRef>
+          <a:effectRef idx="2">
+            <a:schemeClr val="accent1"/>
+          </a:effectRef>
+          <a:fontRef idx="minor">
+            <a:schemeClr val="lt1"/>
+          </a:fontRef>
+        </p:style>
+        <p:txBody>
+          <a:bodyPr rtlCol="0" anchor="ctr"/>
+          <a:lstStyle/>
+          <a:p>
+            <a:pPr algn="ctr"/>
+          </a:p>
+        </p:txBody>
+      </p:sp>
+      <p:sp>
+        <p:nvSpPr>
+          <p:cNvPr id="9" name="TextBox 8"/>
+          <p:cNvSpPr txBox="1"/>
+          <p:nvPr/>
+        </p:nvSpPr>
+        <p:spPr>
+          <a:xfrm>
+            <a:off x="6537959" y="2441448"/>
+            <a:ext cx="4800600" cy="274320"/>
+          </a:xfrm>
+          <a:prstGeom prst="rect">
+            <a:avLst/>
+          </a:prstGeom>
+          <a:noFill/>
+        </p:spPr>
+        <p:txBody>
+          <a:bodyPr wrap="square" anchor="t">
+            <a:spAutoFit/>
+          </a:bodyPr>
+          <a:lstStyle/>
+          <a:p>
+            <a:pPr algn="ctr">
+              <a:spcAft>
+                <a:spcPts val="600"/>
+              </a:spcAft>
+            </a:pPr>
+            <a:r>
+              <a:rPr sz="1100" b="0">
+                <a:solidFill>
+                  <a:srgbClr val="9AA3B2"/>
+                </a:solidFill>
+                <a:latin typeface="Calibri"/>
+              </a:rPr>
+              <a:t>Net profit by scenario ($M, illustrative)</a:t>
+            </a:r>
+          </a:p>
+        </p:txBody>
+      </p:sp>
+      <p:sp>
+        <p:nvSpPr>
+          <p:cNvPr id="10" name="Rectangle 9"/>
+          <p:cNvSpPr/>
+          <p:nvPr/>
+        </p:nvSpPr>
+        <p:spPr>
+          <a:xfrm>
+            <a:off x="7128509" y="5148775"/>
+            <a:ext cx="723900" cy="474784"/>
+          </a:xfrm>
+          <a:prstGeom prst="rect">
+            <a:avLst/>
+          </a:prstGeom>
+          <a:solidFill>
+            <a:srgbClr val="00A4FD"/>
+          </a:solidFill>
+          <a:ln>
+            <a:noFill/>
+          </a:ln>
+          <a:effectLst/>
+        </p:spPr>
+        <p:style>
+          <a:lnRef idx="1">
+            <a:schemeClr val="accent1"/>
+          </a:lnRef>
+          <a:fillRef idx="3">
+            <a:schemeClr val="accent1"/>
+          </a:fillRef>
+          <a:effectRef idx="2">
+            <a:schemeClr val="accent1"/>
+          </a:effectRef>
+          <a:fontRef idx="minor">
+            <a:schemeClr val="lt1"/>
+          </a:fontRef>
+        </p:style>
+        <p:txBody>
+          <a:bodyPr rtlCol="0" anchor="ctr"/>
+          <a:lstStyle/>
+          <a:p>
+            <a:pPr algn="ctr"/>
+          </a:p>
+        </p:txBody>
+      </p:sp>
+      <p:sp>
+        <p:nvSpPr>
+          <p:cNvPr id="11" name="TextBox 10"/>
+          <p:cNvSpPr txBox="1"/>
+          <p:nvPr/>
+        </p:nvSpPr>
+        <p:spPr>
+          <a:xfrm>
+            <a:off x="6945629" y="4837879"/>
+            <a:ext cx="1089660" cy="274320"/>
+          </a:xfrm>
+          <a:prstGeom prst="rect">
+            <a:avLst/>
+          </a:prstGeom>
+          <a:noFill/>
+        </p:spPr>
+        <p:txBody>
+          <a:bodyPr wrap="square" anchor="t">
+            <a:spAutoFit/>
+          </a:bodyPr>
+          <a:lstStyle/>
+          <a:p>
+            <a:pPr algn="ctr">
+              <a:spcAft>
+                <a:spcPts val="600"/>
+              </a:spcAft>
+            </a:pPr>
+            <a:r>
+              <a:rPr sz="1200" b="1">
+                <a:solidFill>
+                  <a:srgbClr val="F2F4F8"/>
+                </a:solidFill>
+                <a:latin typeface="Calibri"/>
+              </a:rPr>
+              <a:t>$9M</a:t>
+            </a:r>
+          </a:p>
+        </p:txBody>
+      </p:sp>
+      <p:sp>
+        <p:nvSpPr>
+          <p:cNvPr id="12" name="TextBox 11"/>
+          <p:cNvSpPr txBox="1"/>
+          <p:nvPr/>
+        </p:nvSpPr>
+        <p:spPr>
+          <a:xfrm>
+            <a:off x="6899909" y="5678423"/>
+            <a:ext cx="1181099" cy="274320"/>
+          </a:xfrm>
+          <a:prstGeom prst="rect">
+            <a:avLst/>
+          </a:prstGeom>
+          <a:noFill/>
+        </p:spPr>
+        <p:txBody>
+          <a:bodyPr wrap="square" anchor="t">
+            <a:spAutoFit/>
+          </a:bodyPr>
+          <a:lstStyle/>
+          <a:p>
+            <a:pPr algn="ctr">
+              <a:spcAft>
+                <a:spcPts val="600"/>
+              </a:spcAft>
+            </a:pPr>
+            <a:r>
+              <a:rPr sz="1100" b="0">
+                <a:solidFill>
+                  <a:srgbClr val="9AA3B2"/>
+                </a:solidFill>
+                <a:latin typeface="Calibri"/>
+              </a:rPr>
+              <a:t>Conserv.</a:t>
+            </a:r>
+          </a:p>
+        </p:txBody>
+      </p:sp>
+      <p:sp>
+        <p:nvSpPr>
+          <p:cNvPr id="13" name="Rectangle 12"/>
+          <p:cNvSpPr/>
+          <p:nvPr/>
+        </p:nvSpPr>
+        <p:spPr>
+          <a:xfrm>
+            <a:off x="8576310" y="3988190"/>
+            <a:ext cx="723900" cy="1635369"/>
+          </a:xfrm>
+          <a:prstGeom prst="rect">
+            <a:avLst/>
+          </a:prstGeom>
+          <a:solidFill>
+            <a:srgbClr val="00BCEB"/>
+          </a:solidFill>
+          <a:ln>
+            <a:noFill/>
+          </a:ln>
+          <a:effectLst/>
+        </p:spPr>
+        <p:style>
+          <a:lnRef idx="1">
+            <a:schemeClr val="accent1"/>
+          </a:lnRef>
+          <a:fillRef idx="3">
+            <a:schemeClr val="accent1"/>
+          </a:fillRef>
+          <a:effectRef idx="2">
+            <a:schemeClr val="accent1"/>
+          </a:effectRef>
+          <a:fontRef idx="minor">
+            <a:schemeClr val="lt1"/>
+          </a:fontRef>
+        </p:style>
+        <p:txBody>
+          <a:bodyPr rtlCol="0" anchor="ctr"/>
+          <a:lstStyle/>
+          <a:p>
+            <a:pPr algn="ctr"/>
+          </a:p>
+        </p:txBody>
+      </p:sp>
+      <p:sp>
+        <p:nvSpPr>
+          <p:cNvPr id="14" name="TextBox 13"/>
+          <p:cNvSpPr txBox="1"/>
+          <p:nvPr/>
+        </p:nvSpPr>
+        <p:spPr>
+          <a:xfrm>
+            <a:off x="8393430" y="3677294"/>
+            <a:ext cx="1089660" cy="274320"/>
+          </a:xfrm>
+          <a:prstGeom prst="rect">
+            <a:avLst/>
+          </a:prstGeom>
+          <a:noFill/>
+        </p:spPr>
+        <p:txBody>
+          <a:bodyPr wrap="square" anchor="t">
+            <a:spAutoFit/>
+          </a:bodyPr>
+          <a:lstStyle/>
+          <a:p>
+            <a:pPr algn="ctr">
+              <a:spcAft>
+                <a:spcPts val="600"/>
+              </a:spcAft>
+            </a:pPr>
+            <a:r>
+              <a:rPr sz="1200" b="1">
+                <a:solidFill>
+                  <a:srgbClr val="F2F4F8"/>
+                </a:solidFill>
+                <a:latin typeface="Calibri"/>
+              </a:rPr>
+              <a:t>$31M</a:t>
+            </a:r>
+          </a:p>
+        </p:txBody>
+      </p:sp>
+      <p:sp>
+        <p:nvSpPr>
+          <p:cNvPr id="15" name="TextBox 14"/>
+          <p:cNvSpPr txBox="1"/>
+          <p:nvPr/>
+        </p:nvSpPr>
+        <p:spPr>
+          <a:xfrm>
+            <a:off x="8347710" y="5678423"/>
+            <a:ext cx="1181099" cy="274320"/>
+          </a:xfrm>
+          <a:prstGeom prst="rect">
+            <a:avLst/>
+          </a:prstGeom>
+          <a:noFill/>
+        </p:spPr>
+        <p:txBody>
+          <a:bodyPr wrap="square" anchor="t">
+            <a:spAutoFit/>
+          </a:bodyPr>
+          <a:lstStyle/>
+          <a:p>
+            <a:pPr algn="ctr">
+              <a:spcAft>
+                <a:spcPts val="600"/>
+              </a:spcAft>
+            </a:pPr>
+            <a:r>
+              <a:rPr sz="1100" b="0">
+                <a:solidFill>
+                  <a:srgbClr val="9AA3B2"/>
+                </a:solidFill>
+                <a:latin typeface="Calibri"/>
+              </a:rPr>
+              <a:t>Base</a:t>
+            </a:r>
+          </a:p>
+        </p:txBody>
+      </p:sp>
+      <p:sp>
+        <p:nvSpPr>
+          <p:cNvPr id="16" name="Rectangle 15"/>
+          <p:cNvSpPr/>
+          <p:nvPr/>
+        </p:nvSpPr>
+        <p:spPr>
+          <a:xfrm>
+            <a:off x="10024110" y="3196883"/>
+            <a:ext cx="723900" cy="2426676"/>
+          </a:xfrm>
+          <a:prstGeom prst="rect">
+            <a:avLst/>
+          </a:prstGeom>
+          <a:solidFill>
+            <a:srgbClr val="00A4FD"/>
+          </a:solidFill>
+          <a:ln>
+            <a:noFill/>
+          </a:ln>
+          <a:effectLst/>
+        </p:spPr>
+        <p:style>
+          <a:lnRef idx="1">
+            <a:schemeClr val="accent1"/>
+          </a:lnRef>
+          <a:fillRef idx="3">
+            <a:schemeClr val="accent1"/>
+          </a:fillRef>
+          <a:effectRef idx="2">
+            <a:schemeClr val="accent1"/>
+          </a:effectRef>
+          <a:fontRef idx="minor">
+            <a:schemeClr val="lt1"/>
+          </a:fontRef>
+        </p:style>
+        <p:txBody>
+          <a:bodyPr rtlCol="0" anchor="ctr"/>
+          <a:lstStyle/>
+          <a:p>
+            <a:pPr algn="ctr"/>
+          </a:p>
+        </p:txBody>
+      </p:sp>
+      <p:sp>
+        <p:nvSpPr>
+          <p:cNvPr id="17" name="TextBox 16"/>
+          <p:cNvSpPr txBox="1"/>
+          <p:nvPr/>
+        </p:nvSpPr>
+        <p:spPr>
+          <a:xfrm>
+            <a:off x="9841230" y="2885987"/>
+            <a:ext cx="1089660" cy="274320"/>
+          </a:xfrm>
+          <a:prstGeom prst="rect">
+            <a:avLst/>
+          </a:prstGeom>
+          <a:noFill/>
+        </p:spPr>
+        <p:txBody>
+          <a:bodyPr wrap="square" anchor="t">
+            <a:spAutoFit/>
+          </a:bodyPr>
+          <a:lstStyle/>
+          <a:p>
+            <a:pPr algn="ctr">
+              <a:spcAft>
+                <a:spcPts val="600"/>
+              </a:spcAft>
+            </a:pPr>
+            <a:r>
+              <a:rPr sz="1200" b="1">
+                <a:solidFill>
+                  <a:srgbClr val="F2F4F8"/>
+                </a:solidFill>
+                <a:latin typeface="Calibri"/>
+              </a:rPr>
+              <a:t>$46M</a:t>
+            </a:r>
+          </a:p>
+        </p:txBody>
+      </p:sp>
+      <p:sp>
+        <p:nvSpPr>
+          <p:cNvPr id="18" name="TextBox 17"/>
+          <p:cNvSpPr txBox="1"/>
+          <p:nvPr/>
+        </p:nvSpPr>
+        <p:spPr>
+          <a:xfrm>
+            <a:off x="9795510" y="5678423"/>
+            <a:ext cx="1181099" cy="274320"/>
+          </a:xfrm>
+          <a:prstGeom prst="rect">
+            <a:avLst/>
+          </a:prstGeom>
+          <a:noFill/>
+        </p:spPr>
+        <p:txBody>
+          <a:bodyPr wrap="square" anchor="t">
+            <a:spAutoFit/>
+          </a:bodyPr>
+          <a:lstStyle/>
+          <a:p>
+            <a:pPr algn="ctr">
+              <a:spcAft>
+                <a:spcPts val="600"/>
+              </a:spcAft>
+            </a:pPr>
+            <a:r>
+              <a:rPr sz="1100" b="0">
+                <a:solidFill>
+                  <a:srgbClr val="9AA3B2"/>
+                </a:solidFill>
+                <a:latin typeface="Calibri"/>
+              </a:rPr>
+              <a:t>Upside</a:t>
+            </a:r>
+          </a:p>
+        </p:txBody>
+      </p:sp>
+      <p:cxnSp>
+        <p:nvCxnSpPr>
+          <p:cNvPr id="19" name="Connector 18"/>
+          <p:cNvCxnSpPr/>
+          <p:nvPr/>
+        </p:nvCxnSpPr>
+        <p:spPr>
+          <a:xfrm>
+            <a:off x="6675120" y="5623559"/>
+            <a:ext cx="4526279" cy="0"/>
+          </a:xfrm>
+          <a:prstGeom prst="line">
+            <a:avLst/>
+          </a:prstGeom>
+          <a:ln w="12700">
+            <a:solidFill>
+              <a:srgbClr val="9AA3B2"/>
+            </a:solidFill>
+          </a:ln>
+          <a:effectLst/>
+        </p:spPr>
+        <p:style>
+          <a:lnRef idx="2">
+            <a:schemeClr val="accent1"/>
+          </a:lnRef>
+          <a:fillRef idx="0">
+            <a:schemeClr val="accent1"/>
+          </a:fillRef>
+          <a:effectRef idx="1">
+            <a:schemeClr val="accent1"/>
+          </a:effectRef>
+          <a:fontRef idx="minor">
+            <a:schemeClr val="tx1"/>
+          </a:fontRef>
+        </p:style>
+      </p:cxnSp>
+      <p:sp>
+        <p:nvSpPr>
+          <p:cNvPr id="20" name="TextBox 19"/>
           <p:cNvSpPr txBox="1"/>
           <p:nvPr/>
         </p:nvSpPr>
@@ -5742,7 +6232,7 @@
         <p:spPr>
           <a:xfrm>
             <a:off x="548640" y="868680"/>
-            <a:ext cx="1280160" cy="50800"/>
+            <a:ext cx="1280160" cy="50292"/>
           </a:xfrm>
           <a:prstGeom prst="rect">
             <a:avLst/>
@@ -5753,6 +6243,7 @@
           <a:ln>
             <a:noFill/>
           </a:ln>
+          <a:effectLst/>
         </p:spPr>
         <p:style>
           <a:lnRef idx="1">
@@ -5804,7 +6295,7 @@
               </a:spcAft>
             </a:pPr>
             <a:r>
-              <a:rPr sz="2800" b="1">
+              <a:rPr sz="2700" b="1">
                 <a:solidFill>
                   <a:srgbClr val="F2F4F8"/>
                 </a:solidFill>
@@ -5824,7 +6315,7 @@
         <p:spPr>
           <a:xfrm>
             <a:off x="548640" y="2331720"/>
-            <a:ext cx="11064240" cy="3931920"/>
+            <a:ext cx="5486400" cy="3931920"/>
           </a:xfrm>
           <a:prstGeom prst="rect">
             <a:avLst/>
@@ -5837,6 +6328,7 @@
               <a:srgbClr val="2C2C3A"/>
             </a:solidFill>
           </a:ln>
+          <a:effectLst/>
         </p:spPr>
         <p:style>
           <a:lnRef idx="1">
@@ -5868,8 +6360,8 @@
         </p:nvSpPr>
         <p:spPr>
           <a:xfrm>
-            <a:off x="914400" y="2560320"/>
-            <a:ext cx="10332720" cy="3566160"/>
+            <a:off x="822960" y="2542032"/>
+            <a:ext cx="4937760" cy="3566160"/>
           </a:xfrm>
           <a:prstGeom prst="rect">
             <a:avLst/>
@@ -5884,11 +6376,11 @@
           <a:p>
             <a:pPr algn="l">
               <a:spcAft>
-                <a:spcPts val="1200"/>
+                <a:spcPts val="1100"/>
               </a:spcAft>
             </a:pPr>
             <a:r>
-              <a:rPr sz="1800" b="1">
+              <a:rPr sz="1600" b="1">
                 <a:solidFill>
                   <a:srgbClr val="00BCEB"/>
                 </a:solidFill>
@@ -5897,23 +6389,23 @@
               <a:t>•  </a:t>
             </a:r>
             <a:r>
-              <a:rPr sz="1800" b="0">
+              <a:rPr sz="1600" b="0">
                 <a:solidFill>
                   <a:srgbClr val="F2F4F8"/>
                 </a:solidFill>
                 <a:latin typeface="Calibri"/>
               </a:rPr>
-              <a:t>8 Field CTOs + 1 group lead + 2 X-Arch architects + 1 deal desk/ops</a:t>
+              <a:t>12 people, 4 quarters</a:t>
             </a:r>
           </a:p>
           <a:p>
             <a:pPr algn="l">
               <a:spcAft>
-                <a:spcPts val="1200"/>
+                <a:spcPts val="1100"/>
               </a:spcAft>
             </a:pPr>
             <a:r>
-              <a:rPr sz="1800" b="1">
+              <a:rPr sz="1600" b="1">
                 <a:solidFill>
                   <a:srgbClr val="00BCEB"/>
                 </a:solidFill>
@@ -5922,23 +6414,23 @@
               <a:t>•  </a:t>
             </a:r>
             <a:r>
-              <a:rPr sz="1800" b="0">
+              <a:rPr sz="1600" b="0">
                 <a:solidFill>
                   <a:srgbClr val="F2F4F8"/>
                 </a:solidFill>
                 <a:latin typeface="Calibri"/>
               </a:rPr>
-              <a:t>~$5.4M/yr fully loaded (enablement, tooling, travel)</a:t>
+              <a:t>Internal-first staffing</a:t>
             </a:r>
           </a:p>
           <a:p>
             <a:pPr algn="l">
               <a:spcAft>
-                <a:spcPts val="1200"/>
+                <a:spcPts val="1100"/>
               </a:spcAft>
             </a:pPr>
             <a:r>
-              <a:rPr sz="1800" b="1">
+              <a:rPr sz="1600" b="1">
                 <a:solidFill>
                   <a:srgbClr val="00BCEB"/>
                 </a:solidFill>
@@ -5947,23 +6439,23 @@
               <a:t>•  </a:t>
             </a:r>
             <a:r>
-              <a:rPr sz="1800" b="0">
+              <a:rPr sz="1600" b="0">
                 <a:solidFill>
                   <a:srgbClr val="F2F4F8"/>
                 </a:solidFill>
                 <a:latin typeface="Calibri"/>
               </a:rPr>
-              <a:t>Internal-first staffing; ~40–60 named accounts with paired controls</a:t>
+              <a:t>~40–60 accounts + paired controls</a:t>
             </a:r>
           </a:p>
           <a:p>
             <a:pPr algn="l">
               <a:spcAft>
-                <a:spcPts val="1200"/>
+                <a:spcPts val="1100"/>
               </a:spcAft>
             </a:pPr>
             <a:r>
-              <a:rPr sz="1800" b="1">
+              <a:rPr sz="1600" b="1">
                 <a:solidFill>
                   <a:srgbClr val="00BCEB"/>
                 </a:solidFill>
@@ -5972,20 +6464,339 @@
               <a:t>•  </a:t>
             </a:r>
             <a:r>
-              <a:rPr sz="1800" b="0">
+              <a:rPr sz="1600" b="0">
                 <a:solidFill>
                   <a:srgbClr val="F2F4F8"/>
                 </a:solidFill>
                 <a:latin typeface="Calibri"/>
               </a:rPr>
-              <a:t>Q3 go/expand/stop gate tied to explicit success criteria</a:t>
-            </a:r>
-          </a:p>
-        </p:txBody>
-      </p:sp>
-      <p:sp>
-        <p:nvSpPr>
-          <p:cNvPr id="8" name="TextBox 7"/>
+              <a:t>Q3 go/expand/stop gate</a:t>
+            </a:r>
+          </a:p>
+        </p:txBody>
+      </p:sp>
+      <p:sp>
+        <p:nvSpPr>
+          <p:cNvPr id="8" name="Rectangle 7"/>
+          <p:cNvSpPr/>
+          <p:nvPr/>
+        </p:nvSpPr>
+        <p:spPr>
+          <a:xfrm>
+            <a:off x="6263640" y="2331720"/>
+            <a:ext cx="5349240" cy="3931920"/>
+          </a:xfrm>
+          <a:prstGeom prst="rect">
+            <a:avLst/>
+          </a:prstGeom>
+          <a:solidFill>
+            <a:srgbClr val="1A1A2E"/>
+          </a:solidFill>
+          <a:ln w="12700">
+            <a:solidFill>
+              <a:srgbClr val="2C2C3A"/>
+            </a:solidFill>
+          </a:ln>
+          <a:effectLst/>
+        </p:spPr>
+        <p:style>
+          <a:lnRef idx="1">
+            <a:schemeClr val="accent1"/>
+          </a:lnRef>
+          <a:fillRef idx="3">
+            <a:schemeClr val="accent1"/>
+          </a:fillRef>
+          <a:effectRef idx="2">
+            <a:schemeClr val="accent1"/>
+          </a:effectRef>
+          <a:fontRef idx="minor">
+            <a:schemeClr val="lt1"/>
+          </a:fontRef>
+        </p:style>
+        <p:txBody>
+          <a:bodyPr rtlCol="0" anchor="ctr"/>
+          <a:lstStyle/>
+          <a:p>
+            <a:pPr algn="ctr"/>
+          </a:p>
+        </p:txBody>
+      </p:sp>
+      <p:sp>
+        <p:nvSpPr>
+          <p:cNvPr id="9" name="Rounded Rectangle 8"/>
+          <p:cNvSpPr/>
+          <p:nvPr/>
+        </p:nvSpPr>
+        <p:spPr>
+          <a:xfrm>
+            <a:off x="6629400" y="2697479"/>
+            <a:ext cx="2171700" cy="731520"/>
+          </a:xfrm>
+          <a:prstGeom prst="roundRect">
+            <a:avLst/>
+          </a:prstGeom>
+          <a:solidFill>
+            <a:srgbClr val="24243C"/>
+          </a:solidFill>
+          <a:ln w="9525">
+            <a:solidFill>
+              <a:srgbClr val="9AA3B2"/>
+            </a:solidFill>
+          </a:ln>
+          <a:effectLst/>
+        </p:spPr>
+        <p:style>
+          <a:lnRef idx="1">
+            <a:schemeClr val="accent1"/>
+          </a:lnRef>
+          <a:fillRef idx="3">
+            <a:schemeClr val="accent1"/>
+          </a:fillRef>
+          <a:effectRef idx="2">
+            <a:schemeClr val="accent1"/>
+          </a:effectRef>
+          <a:fontRef idx="minor">
+            <a:schemeClr val="lt1"/>
+          </a:fontRef>
+        </p:style>
+        <p:txBody>
+          <a:bodyPr rtlCol="0" anchor="ctr" wrap="square" lIns="45720" rIns="45720" tIns="18288" bIns="18288"/>
+          <a:lstStyle/>
+          <a:p>
+            <a:pPr algn="ctr"/>
+            <a:r>
+              <a:rPr sz="1200" b="0">
+                <a:solidFill>
+                  <a:srgbClr val="F2F4F8"/>
+                </a:solidFill>
+                <a:latin typeface="Calibri"/>
+              </a:rPr>
+              <a:t>8 × Field CTO</a:t>
+            </a:r>
+          </a:p>
+        </p:txBody>
+      </p:sp>
+      <p:sp>
+        <p:nvSpPr>
+          <p:cNvPr id="10" name="Rounded Rectangle 9"/>
+          <p:cNvSpPr/>
+          <p:nvPr/>
+        </p:nvSpPr>
+        <p:spPr>
+          <a:xfrm>
+            <a:off x="9075420" y="2697479"/>
+            <a:ext cx="2171700" cy="731520"/>
+          </a:xfrm>
+          <a:prstGeom prst="roundRect">
+            <a:avLst/>
+          </a:prstGeom>
+          <a:solidFill>
+            <a:srgbClr val="24243C"/>
+          </a:solidFill>
+          <a:ln w="9525">
+            <a:solidFill>
+              <a:srgbClr val="9AA3B2"/>
+            </a:solidFill>
+          </a:ln>
+          <a:effectLst/>
+        </p:spPr>
+        <p:style>
+          <a:lnRef idx="1">
+            <a:schemeClr val="accent1"/>
+          </a:lnRef>
+          <a:fillRef idx="3">
+            <a:schemeClr val="accent1"/>
+          </a:fillRef>
+          <a:effectRef idx="2">
+            <a:schemeClr val="accent1"/>
+          </a:effectRef>
+          <a:fontRef idx="minor">
+            <a:schemeClr val="lt1"/>
+          </a:fontRef>
+        </p:style>
+        <p:txBody>
+          <a:bodyPr rtlCol="0" anchor="ctr" wrap="square" lIns="45720" rIns="45720" tIns="18288" bIns="18288"/>
+          <a:lstStyle/>
+          <a:p>
+            <a:pPr algn="ctr"/>
+            <a:r>
+              <a:rPr sz="1200" b="0">
+                <a:solidFill>
+                  <a:srgbClr val="F2F4F8"/>
+                </a:solidFill>
+                <a:latin typeface="Calibri"/>
+              </a:rPr>
+              <a:t>1 × Group lead</a:t>
+            </a:r>
+          </a:p>
+        </p:txBody>
+      </p:sp>
+      <p:sp>
+        <p:nvSpPr>
+          <p:cNvPr id="11" name="Rounded Rectangle 10"/>
+          <p:cNvSpPr/>
+          <p:nvPr/>
+        </p:nvSpPr>
+        <p:spPr>
+          <a:xfrm>
+            <a:off x="6629400" y="3657600"/>
+            <a:ext cx="2171700" cy="731520"/>
+          </a:xfrm>
+          <a:prstGeom prst="roundRect">
+            <a:avLst/>
+          </a:prstGeom>
+          <a:solidFill>
+            <a:srgbClr val="24243C"/>
+          </a:solidFill>
+          <a:ln w="9525">
+            <a:solidFill>
+              <a:srgbClr val="9AA3B2"/>
+            </a:solidFill>
+          </a:ln>
+          <a:effectLst/>
+        </p:spPr>
+        <p:style>
+          <a:lnRef idx="1">
+            <a:schemeClr val="accent1"/>
+          </a:lnRef>
+          <a:fillRef idx="3">
+            <a:schemeClr val="accent1"/>
+          </a:fillRef>
+          <a:effectRef idx="2">
+            <a:schemeClr val="accent1"/>
+          </a:effectRef>
+          <a:fontRef idx="minor">
+            <a:schemeClr val="lt1"/>
+          </a:fontRef>
+        </p:style>
+        <p:txBody>
+          <a:bodyPr rtlCol="0" anchor="ctr" wrap="square" lIns="45720" rIns="45720" tIns="18288" bIns="18288"/>
+          <a:lstStyle/>
+          <a:p>
+            <a:pPr algn="ctr"/>
+            <a:r>
+              <a:rPr sz="1200" b="0">
+                <a:solidFill>
+                  <a:srgbClr val="F2F4F8"/>
+                </a:solidFill>
+                <a:latin typeface="Calibri"/>
+              </a:rPr>
+              <a:t>2 × X-Arch architect</a:t>
+            </a:r>
+          </a:p>
+        </p:txBody>
+      </p:sp>
+      <p:sp>
+        <p:nvSpPr>
+          <p:cNvPr id="12" name="Rounded Rectangle 11"/>
+          <p:cNvSpPr/>
+          <p:nvPr/>
+        </p:nvSpPr>
+        <p:spPr>
+          <a:xfrm>
+            <a:off x="9075420" y="3657600"/>
+            <a:ext cx="2171700" cy="731520"/>
+          </a:xfrm>
+          <a:prstGeom prst="roundRect">
+            <a:avLst/>
+          </a:prstGeom>
+          <a:solidFill>
+            <a:srgbClr val="24243C"/>
+          </a:solidFill>
+          <a:ln w="9525">
+            <a:solidFill>
+              <a:srgbClr val="9AA3B2"/>
+            </a:solidFill>
+          </a:ln>
+          <a:effectLst/>
+        </p:spPr>
+        <p:style>
+          <a:lnRef idx="1">
+            <a:schemeClr val="accent1"/>
+          </a:lnRef>
+          <a:fillRef idx="3">
+            <a:schemeClr val="accent1"/>
+          </a:fillRef>
+          <a:effectRef idx="2">
+            <a:schemeClr val="accent1"/>
+          </a:effectRef>
+          <a:fontRef idx="minor">
+            <a:schemeClr val="lt1"/>
+          </a:fontRef>
+        </p:style>
+        <p:txBody>
+          <a:bodyPr rtlCol="0" anchor="ctr" wrap="square" lIns="45720" rIns="45720" tIns="18288" bIns="18288"/>
+          <a:lstStyle/>
+          <a:p>
+            <a:pPr algn="ctr"/>
+            <a:r>
+              <a:rPr sz="1200" b="0">
+                <a:solidFill>
+                  <a:srgbClr val="F2F4F8"/>
+                </a:solidFill>
+                <a:latin typeface="Calibri"/>
+              </a:rPr>
+              <a:t>1 × Deal desk / ops</a:t>
+            </a:r>
+          </a:p>
+        </p:txBody>
+      </p:sp>
+      <p:sp>
+        <p:nvSpPr>
+          <p:cNvPr id="13" name="Rounded Rectangle 12"/>
+          <p:cNvSpPr/>
+          <p:nvPr/>
+        </p:nvSpPr>
+        <p:spPr>
+          <a:xfrm>
+            <a:off x="6629400" y="4663440"/>
+            <a:ext cx="4617720" cy="777240"/>
+          </a:xfrm>
+          <a:prstGeom prst="roundRect">
+            <a:avLst/>
+          </a:prstGeom>
+          <a:solidFill>
+            <a:srgbClr val="00BCEB"/>
+          </a:solidFill>
+          <a:ln>
+            <a:noFill/>
+          </a:ln>
+          <a:effectLst/>
+        </p:spPr>
+        <p:style>
+          <a:lnRef idx="1">
+            <a:schemeClr val="accent1"/>
+          </a:lnRef>
+          <a:fillRef idx="3">
+            <a:schemeClr val="accent1"/>
+          </a:fillRef>
+          <a:effectRef idx="2">
+            <a:schemeClr val="accent1"/>
+          </a:effectRef>
+          <a:fontRef idx="minor">
+            <a:schemeClr val="lt1"/>
+          </a:fontRef>
+        </p:style>
+        <p:txBody>
+          <a:bodyPr rtlCol="0" anchor="ctr" wrap="square" lIns="45720" rIns="45720" tIns="18288" bIns="18288"/>
+          <a:lstStyle/>
+          <a:p>
+            <a:pPr algn="ctr"/>
+            <a:r>
+              <a:rPr sz="1400" b="1">
+                <a:solidFill>
+                  <a:srgbClr val="101014"/>
+                </a:solidFill>
+                <a:latin typeface="Calibri"/>
+              </a:rPr>
+              <a:t>~$5.4M / yr  ·  Q3 go/expand/stop gate</a:t>
+            </a:r>
+          </a:p>
+        </p:txBody>
+      </p:sp>
+      <p:sp>
+        <p:nvSpPr>
+          <p:cNvPr id="14" name="TextBox 13"/>
           <p:cNvSpPr txBox="1"/>
           <p:nvPr/>
         </p:nvSpPr>
@@ -6132,7 +6943,7 @@
         <p:spPr>
           <a:xfrm>
             <a:off x="548640" y="868680"/>
-            <a:ext cx="1280160" cy="50800"/>
+            <a:ext cx="1280160" cy="50292"/>
           </a:xfrm>
           <a:prstGeom prst="rect">
             <a:avLst/>
@@ -6143,6 +6954,7 @@
           <a:ln>
             <a:noFill/>
           </a:ln>
+          <a:effectLst/>
         </p:spPr>
         <p:style>
           <a:lnRef idx="1">
@@ -6194,7 +7006,7 @@
               </a:spcAft>
             </a:pPr>
             <a:r>
-              <a:rPr sz="2800" b="1">
+              <a:rPr sz="2700" b="1">
                 <a:solidFill>
                   <a:srgbClr val="F2F4F8"/>
                 </a:solidFill>
@@ -6214,7 +7026,7 @@
         <p:spPr>
           <a:xfrm>
             <a:off x="548640" y="2331720"/>
-            <a:ext cx="11064240" cy="3931920"/>
+            <a:ext cx="5486400" cy="3931920"/>
           </a:xfrm>
           <a:prstGeom prst="rect">
             <a:avLst/>
@@ -6227,6 +7039,7 @@
               <a:srgbClr val="2C2C3A"/>
             </a:solidFill>
           </a:ln>
+          <a:effectLst/>
         </p:spPr>
         <p:style>
           <a:lnRef idx="1">
@@ -6258,8 +7071,8 @@
         </p:nvSpPr>
         <p:spPr>
           <a:xfrm>
-            <a:off x="914400" y="2560320"/>
-            <a:ext cx="10332720" cy="3566160"/>
+            <a:off x="822960" y="2542032"/>
+            <a:ext cx="4937760" cy="3566160"/>
           </a:xfrm>
           <a:prstGeom prst="rect">
             <a:avLst/>
@@ -6274,11 +7087,11 @@
           <a:p>
             <a:pPr algn="l">
               <a:spcAft>
-                <a:spcPts val="1200"/>
+                <a:spcPts val="1100"/>
               </a:spcAft>
             </a:pPr>
             <a:r>
-              <a:rPr sz="1800" b="1">
+              <a:rPr sz="1600" b="1">
                 <a:solidFill>
                   <a:srgbClr val="00BCEB"/>
                 </a:solidFill>
@@ -6287,23 +7100,23 @@
               <a:t>•  </a:t>
             </a:r>
             <a:r>
-              <a:rPr sz="1800" b="0">
+              <a:rPr sz="1600" b="0">
                 <a:solidFill>
                   <a:srgbClr val="F2F4F8"/>
                 </a:solidFill>
                 <a:latin typeface="Calibri"/>
               </a:rPr>
-              <a:t>Q3 go/expand/stop gate stops spend before it turns negative</a:t>
+              <a:t>Q3 gate caps the downside</a:t>
             </a:r>
           </a:p>
           <a:p>
             <a:pPr algn="l">
               <a:spcAft>
-                <a:spcPts val="1200"/>
+                <a:spcPts val="1100"/>
               </a:spcAft>
             </a:pPr>
             <a:r>
-              <a:rPr sz="1800" b="1">
+              <a:rPr sz="1600" b="1">
                 <a:solidFill>
                   <a:srgbClr val="00BCEB"/>
                 </a:solidFill>
@@ -6312,23 +7125,23 @@
               <a:t>•  </a:t>
             </a:r>
             <a:r>
-              <a:rPr sz="1800" b="0">
+              <a:rPr sz="1600" b="0">
                 <a:solidFill>
                   <a:srgbClr val="F2F4F8"/>
                 </a:solidFill>
                 <a:latin typeface="Calibri"/>
               </a:rPr>
-              <a:t>Matched control accounts prove attach, deal-size, win-rate deltas</a:t>
+              <a:t>Control accounts prove the deltas</a:t>
             </a:r>
           </a:p>
           <a:p>
             <a:pPr algn="l">
               <a:spcAft>
-                <a:spcPts val="1200"/>
+                <a:spcPts val="1100"/>
               </a:spcAft>
             </a:pPr>
             <a:r>
-              <a:rPr sz="1800" b="1">
+              <a:rPr sz="1600" b="1">
                 <a:solidFill>
                   <a:srgbClr val="00BCEB"/>
                 </a:solidFill>
@@ -6337,23 +7150,23 @@
               <a:t>•  </a:t>
             </a:r>
             <a:r>
-              <a:rPr sz="1800" b="0">
+              <a:rPr sz="1600" b="0">
                 <a:solidFill>
                   <a:srgbClr val="F2F4F8"/>
                 </a:solidFill>
                 <a:latin typeface="Calibri"/>
               </a:rPr>
-              <a:t>Top risks (talent, comp friction, attribution) have concrete mitigations</a:t>
+              <a:t>Talent / comp / attribution mitigated</a:t>
             </a:r>
           </a:p>
           <a:p>
             <a:pPr algn="l">
               <a:spcAft>
-                <a:spcPts val="1200"/>
+                <a:spcPts val="1100"/>
               </a:spcAft>
             </a:pPr>
             <a:r>
-              <a:rPr sz="1800" b="1">
+              <a:rPr sz="1600" b="1">
                 <a:solidFill>
                   <a:srgbClr val="00BCEB"/>
                 </a:solidFill>
@@ -6362,20 +7175,338 @@
               <a:t>•  </a:t>
             </a:r>
             <a:r>
-              <a:rPr sz="1800" b="0">
+              <a:rPr sz="1600" b="0">
                 <a:solidFill>
                   <a:srgbClr val="F2F4F8"/>
                 </a:solidFill>
                 <a:latin typeface="Calibri"/>
               </a:rPr>
-              <a:t>Influence ledger prevents over-claiming and BU disputes</a:t>
-            </a:r>
-          </a:p>
-        </p:txBody>
-      </p:sp>
-      <p:sp>
-        <p:nvSpPr>
-          <p:cNvPr id="8" name="TextBox 7"/>
+              <a:t>Influence ledger prevents disputes</a:t>
+            </a:r>
+          </a:p>
+        </p:txBody>
+      </p:sp>
+      <p:sp>
+        <p:nvSpPr>
+          <p:cNvPr id="8" name="Rectangle 7"/>
+          <p:cNvSpPr/>
+          <p:nvPr/>
+        </p:nvSpPr>
+        <p:spPr>
+          <a:xfrm>
+            <a:off x="6263640" y="2331720"/>
+            <a:ext cx="5349240" cy="3931920"/>
+          </a:xfrm>
+          <a:prstGeom prst="rect">
+            <a:avLst/>
+          </a:prstGeom>
+          <a:solidFill>
+            <a:srgbClr val="1A1A2E"/>
+          </a:solidFill>
+          <a:ln w="12700">
+            <a:solidFill>
+              <a:srgbClr val="2C2C3A"/>
+            </a:solidFill>
+          </a:ln>
+          <a:effectLst/>
+        </p:spPr>
+        <p:style>
+          <a:lnRef idx="1">
+            <a:schemeClr val="accent1"/>
+          </a:lnRef>
+          <a:fillRef idx="3">
+            <a:schemeClr val="accent1"/>
+          </a:fillRef>
+          <a:effectRef idx="2">
+            <a:schemeClr val="accent1"/>
+          </a:effectRef>
+          <a:fontRef idx="minor">
+            <a:schemeClr val="lt1"/>
+          </a:fontRef>
+        </p:style>
+        <p:txBody>
+          <a:bodyPr rtlCol="0" anchor="ctr"/>
+          <a:lstStyle/>
+          <a:p>
+            <a:pPr algn="ctr"/>
+          </a:p>
+        </p:txBody>
+      </p:sp>
+      <p:sp>
+        <p:nvSpPr>
+          <p:cNvPr id="9" name="Diamond 8"/>
+          <p:cNvSpPr/>
+          <p:nvPr/>
+        </p:nvSpPr>
+        <p:spPr>
+          <a:xfrm>
+            <a:off x="8069579" y="2743200"/>
+            <a:ext cx="1737360" cy="1280160"/>
+          </a:xfrm>
+          <a:prstGeom prst="diamond">
+            <a:avLst/>
+          </a:prstGeom>
+          <a:solidFill>
+            <a:srgbClr val="00BCEB"/>
+          </a:solidFill>
+          <a:ln>
+            <a:noFill/>
+          </a:ln>
+          <a:effectLst/>
+        </p:spPr>
+        <p:style>
+          <a:lnRef idx="1">
+            <a:schemeClr val="accent1"/>
+          </a:lnRef>
+          <a:fillRef idx="3">
+            <a:schemeClr val="accent1"/>
+          </a:fillRef>
+          <a:effectRef idx="2">
+            <a:schemeClr val="accent1"/>
+          </a:effectRef>
+          <a:fontRef idx="minor">
+            <a:schemeClr val="lt1"/>
+          </a:fontRef>
+        </p:style>
+        <p:txBody>
+          <a:bodyPr rtlCol="0" anchor="ctr" wrap="square" lIns="45720" rIns="45720" tIns="18288" bIns="18288"/>
+          <a:lstStyle/>
+          <a:p>
+            <a:pPr algn="ctr"/>
+            <a:r>
+              <a:rPr sz="1400" b="1">
+                <a:solidFill>
+                  <a:srgbClr val="101014"/>
+                </a:solidFill>
+                <a:latin typeface="Calibri"/>
+              </a:rPr>
+              <a:t>Q3 GATE</a:t>
+            </a:r>
+          </a:p>
+        </p:txBody>
+      </p:sp>
+      <p:cxnSp>
+        <p:nvCxnSpPr>
+          <p:cNvPr id="10" name="Connector 9"/>
+          <p:cNvCxnSpPr/>
+          <p:nvPr/>
+        </p:nvCxnSpPr>
+        <p:spPr>
+          <a:xfrm flipH="1">
+            <a:off x="7692390" y="3931920"/>
+            <a:ext cx="925829" cy="411480"/>
+          </a:xfrm>
+          <a:prstGeom prst="line">
+            <a:avLst/>
+          </a:prstGeom>
+          <a:ln w="15875">
+            <a:solidFill>
+              <a:srgbClr val="00A4FD"/>
+            </a:solidFill>
+          </a:ln>
+          <a:effectLst/>
+        </p:spPr>
+        <p:style>
+          <a:lnRef idx="2">
+            <a:schemeClr val="accent1"/>
+          </a:lnRef>
+          <a:fillRef idx="0">
+            <a:schemeClr val="accent1"/>
+          </a:fillRef>
+          <a:effectRef idx="1">
+            <a:schemeClr val="accent1"/>
+          </a:effectRef>
+          <a:fontRef idx="minor">
+            <a:schemeClr val="tx1"/>
+          </a:fontRef>
+        </p:style>
+      </p:cxnSp>
+      <p:cxnSp>
+        <p:nvCxnSpPr>
+          <p:cNvPr id="11" name="Connector 10"/>
+          <p:cNvCxnSpPr/>
+          <p:nvPr/>
+        </p:nvCxnSpPr>
+        <p:spPr>
+          <a:xfrm>
+            <a:off x="9258299" y="3931920"/>
+            <a:ext cx="925831" cy="411480"/>
+          </a:xfrm>
+          <a:prstGeom prst="line">
+            <a:avLst/>
+          </a:prstGeom>
+          <a:ln w="15875">
+            <a:solidFill>
+              <a:srgbClr val="9AA3B2"/>
+            </a:solidFill>
+          </a:ln>
+          <a:effectLst/>
+        </p:spPr>
+        <p:style>
+          <a:lnRef idx="2">
+            <a:schemeClr val="accent1"/>
+          </a:lnRef>
+          <a:fillRef idx="0">
+            <a:schemeClr val="accent1"/>
+          </a:fillRef>
+          <a:effectRef idx="1">
+            <a:schemeClr val="accent1"/>
+          </a:effectRef>
+          <a:fontRef idx="minor">
+            <a:schemeClr val="tx1"/>
+          </a:fontRef>
+        </p:style>
+      </p:cxnSp>
+      <p:sp>
+        <p:nvSpPr>
+          <p:cNvPr id="12" name="Rounded Rectangle 11"/>
+          <p:cNvSpPr/>
+          <p:nvPr/>
+        </p:nvSpPr>
+        <p:spPr>
+          <a:xfrm>
+            <a:off x="6720840" y="4343400"/>
+            <a:ext cx="1943100" cy="640080"/>
+          </a:xfrm>
+          <a:prstGeom prst="roundRect">
+            <a:avLst/>
+          </a:prstGeom>
+          <a:solidFill>
+            <a:srgbClr val="00A4FD"/>
+          </a:solidFill>
+          <a:ln>
+            <a:noFill/>
+          </a:ln>
+          <a:effectLst/>
+        </p:spPr>
+        <p:style>
+          <a:lnRef idx="1">
+            <a:schemeClr val="accent1"/>
+          </a:lnRef>
+          <a:fillRef idx="3">
+            <a:schemeClr val="accent1"/>
+          </a:fillRef>
+          <a:effectRef idx="2">
+            <a:schemeClr val="accent1"/>
+          </a:effectRef>
+          <a:fontRef idx="minor">
+            <a:schemeClr val="lt1"/>
+          </a:fontRef>
+        </p:style>
+        <p:txBody>
+          <a:bodyPr rtlCol="0" anchor="ctr" wrap="square" lIns="45720" rIns="45720" tIns="18288" bIns="18288"/>
+          <a:lstStyle/>
+          <a:p>
+            <a:pPr algn="ctr"/>
+            <a:r>
+              <a:rPr sz="1200" b="1">
+                <a:solidFill>
+                  <a:srgbClr val="101014"/>
+                </a:solidFill>
+                <a:latin typeface="Calibri"/>
+              </a:rPr>
+              <a:t>Continue / expand</a:t>
+            </a:r>
+          </a:p>
+        </p:txBody>
+      </p:sp>
+      <p:sp>
+        <p:nvSpPr>
+          <p:cNvPr id="13" name="Rounded Rectangle 12"/>
+          <p:cNvSpPr/>
+          <p:nvPr/>
+        </p:nvSpPr>
+        <p:spPr>
+          <a:xfrm>
+            <a:off x="9212580" y="4343400"/>
+            <a:ext cx="1943100" cy="640080"/>
+          </a:xfrm>
+          <a:prstGeom prst="roundRect">
+            <a:avLst/>
+          </a:prstGeom>
+          <a:solidFill>
+            <a:srgbClr val="24243C"/>
+          </a:solidFill>
+          <a:ln w="9525">
+            <a:solidFill>
+              <a:srgbClr val="9AA3B2"/>
+            </a:solidFill>
+          </a:ln>
+          <a:effectLst/>
+        </p:spPr>
+        <p:style>
+          <a:lnRef idx="1">
+            <a:schemeClr val="accent1"/>
+          </a:lnRef>
+          <a:fillRef idx="3">
+            <a:schemeClr val="accent1"/>
+          </a:fillRef>
+          <a:effectRef idx="2">
+            <a:schemeClr val="accent1"/>
+          </a:effectRef>
+          <a:fontRef idx="minor">
+            <a:schemeClr val="lt1"/>
+          </a:fontRef>
+        </p:style>
+        <p:txBody>
+          <a:bodyPr rtlCol="0" anchor="ctr" wrap="square" lIns="45720" rIns="45720" tIns="18288" bIns="18288"/>
+          <a:lstStyle/>
+          <a:p>
+            <a:pPr algn="ctr"/>
+            <a:r>
+              <a:rPr sz="1200" b="0">
+                <a:solidFill>
+                  <a:srgbClr val="F2F4F8"/>
+                </a:solidFill>
+                <a:latin typeface="Calibri"/>
+              </a:rPr>
+              <a:t>Stop — spend capped</a:t>
+            </a:r>
+          </a:p>
+        </p:txBody>
+      </p:sp>
+      <p:sp>
+        <p:nvSpPr>
+          <p:cNvPr id="14" name="TextBox 13"/>
+          <p:cNvSpPr txBox="1"/>
+          <p:nvPr/>
+        </p:nvSpPr>
+        <p:spPr>
+          <a:xfrm>
+            <a:off x="6720840" y="5212080"/>
+            <a:ext cx="4434840" cy="640080"/>
+          </a:xfrm>
+          <a:prstGeom prst="rect">
+            <a:avLst/>
+          </a:prstGeom>
+          <a:noFill/>
+        </p:spPr>
+        <p:txBody>
+          <a:bodyPr wrap="square" anchor="t">
+            <a:spAutoFit/>
+          </a:bodyPr>
+          <a:lstStyle/>
+          <a:p>
+            <a:pPr algn="ctr">
+              <a:spcAft>
+                <a:spcPts val="600"/>
+              </a:spcAft>
+            </a:pPr>
+            <a:r>
+              <a:rPr sz="1100" b="0">
+                <a:solidFill>
+                  <a:srgbClr val="9AA3B2"/>
+                </a:solidFill>
+                <a:latin typeface="Calibri"/>
+              </a:rPr>
+              <a:t>Proof: touched vs. control — attach · deal size · win rate</a:t>
+            </a:r>
+          </a:p>
+        </p:txBody>
+      </p:sp>
+      <p:sp>
+        <p:nvSpPr>
+          <p:cNvPr id="15" name="TextBox 14"/>
           <p:cNvSpPr txBox="1"/>
           <p:nvPr/>
         </p:nvSpPr>
@@ -6522,7 +7653,7 @@
         <p:spPr>
           <a:xfrm>
             <a:off x="548640" y="868680"/>
-            <a:ext cx="1280160" cy="50800"/>
+            <a:ext cx="1280160" cy="50292"/>
           </a:xfrm>
           <a:prstGeom prst="rect">
             <a:avLst/>
@@ -6533,6 +7664,7 @@
           <a:ln>
             <a:noFill/>
           </a:ln>
+          <a:effectLst/>
         </p:spPr>
         <p:style>
           <a:lnRef idx="1">
@@ -6584,7 +7716,7 @@
               </a:spcAft>
             </a:pPr>
             <a:r>
-              <a:rPr sz="2800" b="1">
+              <a:rPr sz="2700" b="1">
                 <a:solidFill>
                   <a:srgbClr val="F2F4F8"/>
                 </a:solidFill>
@@ -6604,7 +7736,7 @@
         <p:spPr>
           <a:xfrm>
             <a:off x="548640" y="2331720"/>
-            <a:ext cx="11064240" cy="3931920"/>
+            <a:ext cx="5486400" cy="3931920"/>
           </a:xfrm>
           <a:prstGeom prst="rect">
             <a:avLst/>
@@ -6617,6 +7749,7 @@
               <a:srgbClr val="2C2C3A"/>
             </a:solidFill>
           </a:ln>
+          <a:effectLst/>
         </p:spPr>
         <p:style>
           <a:lnRef idx="1">
@@ -6648,8 +7781,8 @@
         </p:nvSpPr>
         <p:spPr>
           <a:xfrm>
-            <a:off x="914400" y="2560320"/>
-            <a:ext cx="10332720" cy="3566160"/>
+            <a:off x="822960" y="2542032"/>
+            <a:ext cx="4937760" cy="3566160"/>
           </a:xfrm>
           <a:prstGeom prst="rect">
             <a:avLst/>
@@ -6664,11 +7797,11 @@
           <a:p>
             <a:pPr algn="l">
               <a:spcAft>
-                <a:spcPts val="1200"/>
+                <a:spcPts val="1100"/>
               </a:spcAft>
             </a:pPr>
             <a:r>
-              <a:rPr sz="1800" b="1">
+              <a:rPr sz="1600" b="1">
                 <a:solidFill>
                   <a:srgbClr val="00BCEB"/>
                 </a:solidFill>
@@ -6677,23 +7810,23 @@
               <a:t>•  </a:t>
             </a:r>
             <a:r>
-              <a:rPr sz="1800" b="0">
+              <a:rPr sz="1600" b="0">
                 <a:solidFill>
                   <a:srgbClr val="F2F4F8"/>
                 </a:solidFill>
                 <a:latin typeface="Calibri"/>
               </a:rPr>
-              <a:t>Approve the 12-person, 4-quarter pilot with a Q3 gate</a:t>
+              <a:t>Approve: 12 people, 4 quarters, Q3 gate</a:t>
             </a:r>
           </a:p>
           <a:p>
             <a:pPr algn="l">
               <a:spcAft>
-                <a:spcPts val="1200"/>
+                <a:spcPts val="1100"/>
               </a:spcAft>
             </a:pPr>
             <a:r>
-              <a:rPr sz="1800" b="1">
+              <a:rPr sz="1600" b="1">
                 <a:solidFill>
                   <a:srgbClr val="00BCEB"/>
                 </a:solidFill>
@@ -6702,23 +7835,23 @@
               <a:t>•  </a:t>
             </a:r>
             <a:r>
-              <a:rPr sz="1800" b="0">
+              <a:rPr sz="1600" b="0">
                 <a:solidFill>
                   <a:srgbClr val="F2F4F8"/>
                 </a:solidFill>
                 <a:latin typeface="Calibri"/>
               </a:rPr>
-              <a:t>+30d: group lead named; charter, comp, metrics baselined</a:t>
+              <a:t>+30d: lead, charter, comp, metrics</a:t>
             </a:r>
           </a:p>
           <a:p>
             <a:pPr algn="l">
               <a:spcAft>
-                <a:spcPts val="1200"/>
+                <a:spcPts val="1100"/>
               </a:spcAft>
             </a:pPr>
             <a:r>
-              <a:rPr sz="1800" b="1">
+              <a:rPr sz="1600" b="1">
                 <a:solidFill>
                   <a:srgbClr val="00BCEB"/>
                 </a:solidFill>
@@ -6727,23 +7860,23 @@
               <a:t>•  </a:t>
             </a:r>
             <a:r>
-              <a:rPr sz="1800" b="0">
+              <a:rPr sz="1600" b="0">
                 <a:solidFill>
                   <a:srgbClr val="F2F4F8"/>
                 </a:solidFill>
                 <a:latin typeface="Calibri"/>
               </a:rPr>
-              <a:t>+60d: cohort staffed (internal-first); accounts + controls selected</a:t>
+              <a:t>+60d: cohort + accounts selected</a:t>
             </a:r>
           </a:p>
           <a:p>
             <a:pPr algn="l">
               <a:spcAft>
-                <a:spcPts val="1200"/>
+                <a:spcPts val="1100"/>
               </a:spcAft>
             </a:pPr>
             <a:r>
-              <a:rPr sz="1800" b="1">
+              <a:rPr sz="1600" b="1">
                 <a:solidFill>
                   <a:srgbClr val="00BCEB"/>
                 </a:solidFill>
@@ -6752,20 +7885,590 @@
               <a:t>•  </a:t>
             </a:r>
             <a:r>
-              <a:rPr sz="1800" b="0">
+              <a:rPr sz="1600" b="0">
                 <a:solidFill>
                   <a:srgbClr val="F2F4F8"/>
                 </a:solidFill>
                 <a:latin typeface="Calibri"/>
               </a:rPr>
-              <a:t>+90d: first X-Arch opportunities framed; enablement underway</a:t>
-            </a:r>
-          </a:p>
-        </p:txBody>
-      </p:sp>
-      <p:sp>
-        <p:nvSpPr>
-          <p:cNvPr id="8" name="TextBox 7"/>
+              <a:t>+90d: first framings; enablement on</a:t>
+            </a:r>
+          </a:p>
+        </p:txBody>
+      </p:sp>
+      <p:sp>
+        <p:nvSpPr>
+          <p:cNvPr id="8" name="Rectangle 7"/>
+          <p:cNvSpPr/>
+          <p:nvPr/>
+        </p:nvSpPr>
+        <p:spPr>
+          <a:xfrm>
+            <a:off x="6263640" y="2331720"/>
+            <a:ext cx="5349240" cy="3931920"/>
+          </a:xfrm>
+          <a:prstGeom prst="rect">
+            <a:avLst/>
+          </a:prstGeom>
+          <a:solidFill>
+            <a:srgbClr val="1A1A2E"/>
+          </a:solidFill>
+          <a:ln w="12700">
+            <a:solidFill>
+              <a:srgbClr val="2C2C3A"/>
+            </a:solidFill>
+          </a:ln>
+          <a:effectLst/>
+        </p:spPr>
+        <p:style>
+          <a:lnRef idx="1">
+            <a:schemeClr val="accent1"/>
+          </a:lnRef>
+          <a:fillRef idx="3">
+            <a:schemeClr val="accent1"/>
+          </a:fillRef>
+          <a:effectRef idx="2">
+            <a:schemeClr val="accent1"/>
+          </a:effectRef>
+          <a:fontRef idx="minor">
+            <a:schemeClr val="lt1"/>
+          </a:fontRef>
+        </p:style>
+        <p:txBody>
+          <a:bodyPr rtlCol="0" anchor="ctr"/>
+          <a:lstStyle/>
+          <a:p>
+            <a:pPr algn="ctr"/>
+          </a:p>
+        </p:txBody>
+      </p:sp>
+      <p:cxnSp>
+        <p:nvCxnSpPr>
+          <p:cNvPr id="9" name="Connector 8"/>
+          <p:cNvCxnSpPr/>
+          <p:nvPr/>
+        </p:nvCxnSpPr>
+        <p:spPr>
+          <a:xfrm>
+            <a:off x="6903720" y="4297679"/>
+            <a:ext cx="4069080" cy="0"/>
+          </a:xfrm>
+          <a:prstGeom prst="line">
+            <a:avLst/>
+          </a:prstGeom>
+          <a:ln w="25400">
+            <a:solidFill>
+              <a:srgbClr val="00BCEB"/>
+            </a:solidFill>
+          </a:ln>
+          <a:effectLst/>
+        </p:spPr>
+        <p:style>
+          <a:lnRef idx="2">
+            <a:schemeClr val="accent1"/>
+          </a:lnRef>
+          <a:fillRef idx="0">
+            <a:schemeClr val="accent1"/>
+          </a:fillRef>
+          <a:effectRef idx="1">
+            <a:schemeClr val="accent1"/>
+          </a:effectRef>
+          <a:fontRef idx="minor">
+            <a:schemeClr val="tx1"/>
+          </a:fontRef>
+        </p:style>
+      </p:cxnSp>
+      <p:sp>
+        <p:nvSpPr>
+          <p:cNvPr id="10" name="Oval 9"/>
+          <p:cNvSpPr/>
+          <p:nvPr/>
+        </p:nvSpPr>
+        <p:spPr>
+          <a:xfrm>
+            <a:off x="6784848" y="4178807"/>
+            <a:ext cx="237744" cy="237744"/>
+          </a:xfrm>
+          <a:prstGeom prst="ellipse">
+            <a:avLst/>
+          </a:prstGeom>
+          <a:solidFill>
+            <a:srgbClr val="00BCEB"/>
+          </a:solidFill>
+          <a:ln>
+            <a:noFill/>
+          </a:ln>
+          <a:effectLst/>
+        </p:spPr>
+        <p:style>
+          <a:lnRef idx="1">
+            <a:schemeClr val="accent1"/>
+          </a:lnRef>
+          <a:fillRef idx="3">
+            <a:schemeClr val="accent1"/>
+          </a:fillRef>
+          <a:effectRef idx="2">
+            <a:schemeClr val="accent1"/>
+          </a:effectRef>
+          <a:fontRef idx="minor">
+            <a:schemeClr val="lt1"/>
+          </a:fontRef>
+        </p:style>
+        <p:txBody>
+          <a:bodyPr rtlCol="0" anchor="ctr"/>
+          <a:lstStyle/>
+          <a:p>
+            <a:pPr algn="ctr"/>
+          </a:p>
+        </p:txBody>
+      </p:sp>
+      <p:sp>
+        <p:nvSpPr>
+          <p:cNvPr id="11" name="TextBox 10"/>
+          <p:cNvSpPr txBox="1"/>
+          <p:nvPr/>
+        </p:nvSpPr>
+        <p:spPr>
+          <a:xfrm>
+            <a:off x="6217920" y="3566159"/>
+            <a:ext cx="1371600" cy="411480"/>
+          </a:xfrm>
+          <a:prstGeom prst="rect">
+            <a:avLst/>
+          </a:prstGeom>
+          <a:noFill/>
+        </p:spPr>
+        <p:txBody>
+          <a:bodyPr wrap="square" anchor="t">
+            <a:spAutoFit/>
+          </a:bodyPr>
+          <a:lstStyle/>
+          <a:p>
+            <a:pPr algn="ctr">
+              <a:spcAft>
+                <a:spcPts val="600"/>
+              </a:spcAft>
+            </a:pPr>
+            <a:r>
+              <a:rPr sz="1300" b="1">
+                <a:solidFill>
+                  <a:srgbClr val="F2F4F8"/>
+                </a:solidFill>
+                <a:latin typeface="Calibri"/>
+              </a:rPr>
+              <a:t>Approve</a:t>
+            </a:r>
+          </a:p>
+        </p:txBody>
+      </p:sp>
+      <p:sp>
+        <p:nvSpPr>
+          <p:cNvPr id="12" name="TextBox 11"/>
+          <p:cNvSpPr txBox="1"/>
+          <p:nvPr/>
+        </p:nvSpPr>
+        <p:spPr>
+          <a:xfrm>
+            <a:off x="6080759" y="4498847"/>
+            <a:ext cx="1645920" cy="640080"/>
+          </a:xfrm>
+          <a:prstGeom prst="rect">
+            <a:avLst/>
+          </a:prstGeom>
+          <a:noFill/>
+        </p:spPr>
+        <p:txBody>
+          <a:bodyPr wrap="square" anchor="t">
+            <a:spAutoFit/>
+          </a:bodyPr>
+          <a:lstStyle/>
+          <a:p>
+            <a:pPr algn="ctr">
+              <a:spcAft>
+                <a:spcPts val="600"/>
+              </a:spcAft>
+            </a:pPr>
+            <a:r>
+              <a:rPr sz="1000" b="0">
+                <a:solidFill>
+                  <a:srgbClr val="9AA3B2"/>
+                </a:solidFill>
+                <a:latin typeface="Calibri"/>
+              </a:rPr>
+              <a:t>Day 0</a:t>
+            </a:r>
+          </a:p>
+        </p:txBody>
+      </p:sp>
+      <p:sp>
+        <p:nvSpPr>
+          <p:cNvPr id="13" name="Oval 12"/>
+          <p:cNvSpPr/>
+          <p:nvPr/>
+        </p:nvSpPr>
+        <p:spPr>
+          <a:xfrm>
+            <a:off x="8141207" y="4178807"/>
+            <a:ext cx="237744" cy="237744"/>
+          </a:xfrm>
+          <a:prstGeom prst="ellipse">
+            <a:avLst/>
+          </a:prstGeom>
+          <a:solidFill>
+            <a:srgbClr val="00BCEB"/>
+          </a:solidFill>
+          <a:ln>
+            <a:noFill/>
+          </a:ln>
+          <a:effectLst/>
+        </p:spPr>
+        <p:style>
+          <a:lnRef idx="1">
+            <a:schemeClr val="accent1"/>
+          </a:lnRef>
+          <a:fillRef idx="3">
+            <a:schemeClr val="accent1"/>
+          </a:fillRef>
+          <a:effectRef idx="2">
+            <a:schemeClr val="accent1"/>
+          </a:effectRef>
+          <a:fontRef idx="minor">
+            <a:schemeClr val="lt1"/>
+          </a:fontRef>
+        </p:style>
+        <p:txBody>
+          <a:bodyPr rtlCol="0" anchor="ctr"/>
+          <a:lstStyle/>
+          <a:p>
+            <a:pPr algn="ctr"/>
+          </a:p>
+        </p:txBody>
+      </p:sp>
+      <p:sp>
+        <p:nvSpPr>
+          <p:cNvPr id="14" name="TextBox 13"/>
+          <p:cNvSpPr txBox="1"/>
+          <p:nvPr/>
+        </p:nvSpPr>
+        <p:spPr>
+          <a:xfrm>
+            <a:off x="7574280" y="3566159"/>
+            <a:ext cx="1371600" cy="411480"/>
+          </a:xfrm>
+          <a:prstGeom prst="rect">
+            <a:avLst/>
+          </a:prstGeom>
+          <a:noFill/>
+        </p:spPr>
+        <p:txBody>
+          <a:bodyPr wrap="square" anchor="t">
+            <a:spAutoFit/>
+          </a:bodyPr>
+          <a:lstStyle/>
+          <a:p>
+            <a:pPr algn="ctr">
+              <a:spcAft>
+                <a:spcPts val="600"/>
+              </a:spcAft>
+            </a:pPr>
+            <a:r>
+              <a:rPr sz="1300" b="1">
+                <a:solidFill>
+                  <a:srgbClr val="F2F4F8"/>
+                </a:solidFill>
+                <a:latin typeface="Calibri"/>
+              </a:rPr>
+              <a:t>+30d</a:t>
+            </a:r>
+          </a:p>
+        </p:txBody>
+      </p:sp>
+      <p:sp>
+        <p:nvSpPr>
+          <p:cNvPr id="15" name="TextBox 14"/>
+          <p:cNvSpPr txBox="1"/>
+          <p:nvPr/>
+        </p:nvSpPr>
+        <p:spPr>
+          <a:xfrm>
+            <a:off x="7437120" y="4498847"/>
+            <a:ext cx="1645920" cy="640080"/>
+          </a:xfrm>
+          <a:prstGeom prst="rect">
+            <a:avLst/>
+          </a:prstGeom>
+          <a:noFill/>
+        </p:spPr>
+        <p:txBody>
+          <a:bodyPr wrap="square" anchor="t">
+            <a:spAutoFit/>
+          </a:bodyPr>
+          <a:lstStyle/>
+          <a:p>
+            <a:pPr algn="ctr">
+              <a:spcAft>
+                <a:spcPts val="600"/>
+              </a:spcAft>
+            </a:pPr>
+            <a:r>
+              <a:rPr sz="1000" b="0">
+                <a:solidFill>
+                  <a:srgbClr val="9AA3B2"/>
+                </a:solidFill>
+                <a:latin typeface="Calibri"/>
+              </a:rPr>
+              <a:t>Lead · charter · comp</a:t>
+            </a:r>
+          </a:p>
+        </p:txBody>
+      </p:sp>
+      <p:sp>
+        <p:nvSpPr>
+          <p:cNvPr id="16" name="Oval 15"/>
+          <p:cNvSpPr/>
+          <p:nvPr/>
+        </p:nvSpPr>
+        <p:spPr>
+          <a:xfrm>
+            <a:off x="9497567" y="4178807"/>
+            <a:ext cx="237744" cy="237744"/>
+          </a:xfrm>
+          <a:prstGeom prst="ellipse">
+            <a:avLst/>
+          </a:prstGeom>
+          <a:solidFill>
+            <a:srgbClr val="00BCEB"/>
+          </a:solidFill>
+          <a:ln>
+            <a:noFill/>
+          </a:ln>
+          <a:effectLst/>
+        </p:spPr>
+        <p:style>
+          <a:lnRef idx="1">
+            <a:schemeClr val="accent1"/>
+          </a:lnRef>
+          <a:fillRef idx="3">
+            <a:schemeClr val="accent1"/>
+          </a:fillRef>
+          <a:effectRef idx="2">
+            <a:schemeClr val="accent1"/>
+          </a:effectRef>
+          <a:fontRef idx="minor">
+            <a:schemeClr val="lt1"/>
+          </a:fontRef>
+        </p:style>
+        <p:txBody>
+          <a:bodyPr rtlCol="0" anchor="ctr"/>
+          <a:lstStyle/>
+          <a:p>
+            <a:pPr algn="ctr"/>
+          </a:p>
+        </p:txBody>
+      </p:sp>
+      <p:sp>
+        <p:nvSpPr>
+          <p:cNvPr id="17" name="TextBox 16"/>
+          <p:cNvSpPr txBox="1"/>
+          <p:nvPr/>
+        </p:nvSpPr>
+        <p:spPr>
+          <a:xfrm>
+            <a:off x="8930640" y="3566159"/>
+            <a:ext cx="1371600" cy="411480"/>
+          </a:xfrm>
+          <a:prstGeom prst="rect">
+            <a:avLst/>
+          </a:prstGeom>
+          <a:noFill/>
+        </p:spPr>
+        <p:txBody>
+          <a:bodyPr wrap="square" anchor="t">
+            <a:spAutoFit/>
+          </a:bodyPr>
+          <a:lstStyle/>
+          <a:p>
+            <a:pPr algn="ctr">
+              <a:spcAft>
+                <a:spcPts val="600"/>
+              </a:spcAft>
+            </a:pPr>
+            <a:r>
+              <a:rPr sz="1300" b="1">
+                <a:solidFill>
+                  <a:srgbClr val="F2F4F8"/>
+                </a:solidFill>
+                <a:latin typeface="Calibri"/>
+              </a:rPr>
+              <a:t>+60d</a:t>
+            </a:r>
+          </a:p>
+        </p:txBody>
+      </p:sp>
+      <p:sp>
+        <p:nvSpPr>
+          <p:cNvPr id="18" name="TextBox 17"/>
+          <p:cNvSpPr txBox="1"/>
+          <p:nvPr/>
+        </p:nvSpPr>
+        <p:spPr>
+          <a:xfrm>
+            <a:off x="8793479" y="4498847"/>
+            <a:ext cx="1645920" cy="640080"/>
+          </a:xfrm>
+          <a:prstGeom prst="rect">
+            <a:avLst/>
+          </a:prstGeom>
+          <a:noFill/>
+        </p:spPr>
+        <p:txBody>
+          <a:bodyPr wrap="square" anchor="t">
+            <a:spAutoFit/>
+          </a:bodyPr>
+          <a:lstStyle/>
+          <a:p>
+            <a:pPr algn="ctr">
+              <a:spcAft>
+                <a:spcPts val="600"/>
+              </a:spcAft>
+            </a:pPr>
+            <a:r>
+              <a:rPr sz="1000" b="0">
+                <a:solidFill>
+                  <a:srgbClr val="9AA3B2"/>
+                </a:solidFill>
+                <a:latin typeface="Calibri"/>
+              </a:rPr>
+              <a:t>Cohort + accounts</a:t>
+            </a:r>
+          </a:p>
+        </p:txBody>
+      </p:sp>
+      <p:sp>
+        <p:nvSpPr>
+          <p:cNvPr id="19" name="Oval 18"/>
+          <p:cNvSpPr/>
+          <p:nvPr/>
+        </p:nvSpPr>
+        <p:spPr>
+          <a:xfrm>
+            <a:off x="10853928" y="4178807"/>
+            <a:ext cx="237744" cy="237744"/>
+          </a:xfrm>
+          <a:prstGeom prst="ellipse">
+            <a:avLst/>
+          </a:prstGeom>
+          <a:solidFill>
+            <a:srgbClr val="00BCEB"/>
+          </a:solidFill>
+          <a:ln>
+            <a:noFill/>
+          </a:ln>
+          <a:effectLst/>
+        </p:spPr>
+        <p:style>
+          <a:lnRef idx="1">
+            <a:schemeClr val="accent1"/>
+          </a:lnRef>
+          <a:fillRef idx="3">
+            <a:schemeClr val="accent1"/>
+          </a:fillRef>
+          <a:effectRef idx="2">
+            <a:schemeClr val="accent1"/>
+          </a:effectRef>
+          <a:fontRef idx="minor">
+            <a:schemeClr val="lt1"/>
+          </a:fontRef>
+        </p:style>
+        <p:txBody>
+          <a:bodyPr rtlCol="0" anchor="ctr"/>
+          <a:lstStyle/>
+          <a:p>
+            <a:pPr algn="ctr"/>
+          </a:p>
+        </p:txBody>
+      </p:sp>
+      <p:sp>
+        <p:nvSpPr>
+          <p:cNvPr id="20" name="TextBox 19"/>
+          <p:cNvSpPr txBox="1"/>
+          <p:nvPr/>
+        </p:nvSpPr>
+        <p:spPr>
+          <a:xfrm>
+            <a:off x="10287000" y="3566159"/>
+            <a:ext cx="1371600" cy="411480"/>
+          </a:xfrm>
+          <a:prstGeom prst="rect">
+            <a:avLst/>
+          </a:prstGeom>
+          <a:noFill/>
+        </p:spPr>
+        <p:txBody>
+          <a:bodyPr wrap="square" anchor="t">
+            <a:spAutoFit/>
+          </a:bodyPr>
+          <a:lstStyle/>
+          <a:p>
+            <a:pPr algn="ctr">
+              <a:spcAft>
+                <a:spcPts val="600"/>
+              </a:spcAft>
+            </a:pPr>
+            <a:r>
+              <a:rPr sz="1300" b="1">
+                <a:solidFill>
+                  <a:srgbClr val="F2F4F8"/>
+                </a:solidFill>
+                <a:latin typeface="Calibri"/>
+              </a:rPr>
+              <a:t>+90d</a:t>
+            </a:r>
+          </a:p>
+        </p:txBody>
+      </p:sp>
+      <p:sp>
+        <p:nvSpPr>
+          <p:cNvPr id="21" name="TextBox 20"/>
+          <p:cNvSpPr txBox="1"/>
+          <p:nvPr/>
+        </p:nvSpPr>
+        <p:spPr>
+          <a:xfrm>
+            <a:off x="10149840" y="4498847"/>
+            <a:ext cx="1645920" cy="640080"/>
+          </a:xfrm>
+          <a:prstGeom prst="rect">
+            <a:avLst/>
+          </a:prstGeom>
+          <a:noFill/>
+        </p:spPr>
+        <p:txBody>
+          <a:bodyPr wrap="square" anchor="t">
+            <a:spAutoFit/>
+          </a:bodyPr>
+          <a:lstStyle/>
+          <a:p>
+            <a:pPr algn="ctr">
+              <a:spcAft>
+                <a:spcPts val="600"/>
+              </a:spcAft>
+            </a:pPr>
+            <a:r>
+              <a:rPr sz="1000" b="0">
+                <a:solidFill>
+                  <a:srgbClr val="9AA3B2"/>
+                </a:solidFill>
+                <a:latin typeface="Calibri"/>
+              </a:rPr>
+              <a:t>First framings</a:t>
+            </a:r>
+          </a:p>
+        </p:txBody>
+      </p:sp>
+      <p:sp>
+        <p:nvSpPr>
+          <p:cNvPr id="22" name="TextBox 21"/>
           <p:cNvSpPr txBox="1"/>
           <p:nvPr/>
         </p:nvSpPr>
@@ -7052,7 +8755,7 @@
         <p:spPr>
           <a:xfrm>
             <a:off x="548640" y="868680"/>
-            <a:ext cx="1280160" cy="50800"/>
+            <a:ext cx="1280160" cy="50292"/>
           </a:xfrm>
           <a:prstGeom prst="rect">
             <a:avLst/>
@@ -7063,6 +8766,7 @@
           <a:ln>
             <a:noFill/>
           </a:ln>
+          <a:effectLst/>
         </p:spPr>
         <p:style>
           <a:lnRef idx="1">
@@ -7114,7 +8818,7 @@
               </a:spcAft>
             </a:pPr>
             <a:r>
-              <a:rPr sz="2800" b="1">
+              <a:rPr sz="2700" b="1">
                 <a:solidFill>
                   <a:srgbClr val="F2F4F8"/>
                 </a:solidFill>
@@ -7147,6 +8851,7 @@
               <a:srgbClr val="2C2C3A"/>
             </a:solidFill>
           </a:ln>
+          <a:effectLst/>
         </p:spPr>
         <p:style>
           <a:lnRef idx="1">
@@ -7213,7 +8918,7 @@
                 </a:solidFill>
                 <a:latin typeface="Calibri"/>
               </a:rPr>
-              <a:t>Four pillars: business fluency, X-arch depth, exec presence, orchestration</a:t>
+              <a:t>4 pillars: business, X-arch, exec presence, orchestration</a:t>
             </a:r>
           </a:p>
           <a:p>
@@ -7263,7 +8968,7 @@
                 </a:solidFill>
                 <a:latin typeface="Calibri"/>
               </a:rPr>
-              <a:t>Deep in one vertical; team covers all four</a:t>
+              <a:t>Deep in one vertical; team covers four</a:t>
             </a:r>
           </a:p>
         </p:txBody>
@@ -7417,7 +9122,7 @@
         <p:spPr>
           <a:xfrm>
             <a:off x="548640" y="868680"/>
-            <a:ext cx="1280160" cy="50800"/>
+            <a:ext cx="1280160" cy="50292"/>
           </a:xfrm>
           <a:prstGeom prst="rect">
             <a:avLst/>
@@ -7428,6 +9133,7 @@
           <a:ln>
             <a:noFill/>
           </a:ln>
+          <a:effectLst/>
         </p:spPr>
         <p:style>
           <a:lnRef idx="1">
@@ -7479,7 +9185,7 @@
               </a:spcAft>
             </a:pPr>
             <a:r>
-              <a:rPr sz="2800" b="1">
+              <a:rPr sz="2700" b="1">
                 <a:solidFill>
                   <a:srgbClr val="F2F4F8"/>
                 </a:solidFill>
@@ -7512,6 +9218,7 @@
               <a:srgbClr val="2C2C3A"/>
             </a:solidFill>
           </a:ln>
+          <a:effectLst/>
         </p:spPr>
         <p:style>
           <a:lnRef idx="1">
@@ -7578,7 +9285,7 @@
                 </a:solidFill>
                 <a:latin typeface="Calibri"/>
               </a:rPr>
-              <a:t>GTM-primary; strong dotted line to CTO/engineering</a:t>
+              <a:t>GTM-primary; dotted line to CTO/eng</a:t>
             </a:r>
           </a:p>
           <a:p>
@@ -7603,7 +9310,7 @@
                 </a:solidFill>
                 <a:latin typeface="Calibri"/>
               </a:rPr>
-              <a:t>Revenue-accountable AND cross-BU neutral</a:t>
+              <a:t>Revenue-accountable AND BU-neutral</a:t>
             </a:r>
           </a:p>
           <a:p>
@@ -7628,7 +9335,7 @@
                 </a:solidFill>
                 <a:latin typeface="Calibri"/>
               </a:rPr>
-              <a:t>Field CTO owns the frame; AE owns the account</a:t>
+              <a:t>Field CTO owns frame; AE owns account</a:t>
             </a:r>
           </a:p>
         </p:txBody>
@@ -7782,7 +9489,7 @@
         <p:spPr>
           <a:xfrm>
             <a:off x="548640" y="868680"/>
-            <a:ext cx="1280160" cy="50800"/>
+            <a:ext cx="1280160" cy="50292"/>
           </a:xfrm>
           <a:prstGeom prst="rect">
             <a:avLst/>
@@ -7793,6 +9500,7 @@
           <a:ln>
             <a:noFill/>
           </a:ln>
+          <a:effectLst/>
         </p:spPr>
         <p:style>
           <a:lnRef idx="1">
@@ -7844,7 +9552,7 @@
               </a:spcAft>
             </a:pPr>
             <a:r>
-              <a:rPr sz="2800" b="1">
+              <a:rPr sz="2700" b="1">
                 <a:solidFill>
                   <a:srgbClr val="F2F4F8"/>
                 </a:solidFill>
@@ -7877,6 +9585,7 @@
               <a:srgbClr val="2C2C3A"/>
             </a:solidFill>
           </a:ln>
+          <a:effectLst/>
         </p:spPr>
         <p:style>
           <a:lnRef idx="1">
@@ -7943,7 +9652,7 @@
                 </a:solidFill>
                 <a:latin typeface="Calibri"/>
               </a:rPr>
-              <a:t>Buyers, discovery questions, outcome hypotheses, objections</a:t>
+              <a:t>Buyers, discovery, hypotheses, objections</a:t>
             </a:r>
           </a:p>
           <a:p>
@@ -8147,7 +9856,7 @@
         <p:spPr>
           <a:xfrm>
             <a:off x="548640" y="868680"/>
-            <a:ext cx="1280160" cy="50800"/>
+            <a:ext cx="1280160" cy="50292"/>
           </a:xfrm>
           <a:prstGeom prst="rect">
             <a:avLst/>
@@ -8158,6 +9867,7 @@
           <a:ln>
             <a:noFill/>
           </a:ln>
+          <a:effectLst/>
         </p:spPr>
         <p:style>
           <a:lnRef idx="1">
@@ -8209,7 +9919,7 @@
               </a:spcAft>
             </a:pPr>
             <a:r>
-              <a:rPr sz="2800" b="1">
+              <a:rPr sz="2700" b="1">
                 <a:solidFill>
                   <a:srgbClr val="F2F4F8"/>
                 </a:solidFill>
@@ -8242,6 +9952,7 @@
               <a:srgbClr val="2C2C3A"/>
             </a:solidFill>
           </a:ln>
+          <a:effectLst/>
         </p:spPr>
         <p:style>
           <a:lnRef idx="1">
@@ -8308,7 +10019,7 @@
                 </a:solidFill>
                 <a:latin typeface="Calibri"/>
               </a:rPr>
-              <a:t>Read-only / passive acquisition for safety signals</a:t>
+              <a:t>Read-only / passive acquisition only</a:t>
             </a:r>
           </a:p>
           <a:p>
@@ -8333,7 +10044,7 @@
                 </a:solidFill>
                 <a:latin typeface="Calibri"/>
               </a:rPr>
-              <a:t>Never write config to PLC/HMI/DCS/RTU/SIS</a:t>
+              <a:t>Never write to PLC/HMI/DCS/RTU/SIS</a:t>
             </a:r>
           </a:p>
           <a:p>
@@ -8358,7 +10069,7 @@
                 </a:solidFill>
                 <a:latin typeface="Calibri"/>
               </a:rPr>
-              <a:t>A hard guardrail AND a trust-winning differentiator</a:t>
+              <a:t>Guardrail AND trust-winning differentiator</a:t>
             </a:r>
           </a:p>
         </p:txBody>
@@ -8512,7 +10223,7 @@
         <p:spPr>
           <a:xfrm>
             <a:off x="548640" y="868680"/>
-            <a:ext cx="1280160" cy="50800"/>
+            <a:ext cx="1280160" cy="50292"/>
           </a:xfrm>
           <a:prstGeom prst="rect">
             <a:avLst/>
@@ -8523,6 +10234,7 @@
           <a:ln>
             <a:noFill/>
           </a:ln>
+          <a:effectLst/>
         </p:spPr>
         <p:style>
           <a:lnRef idx="1">
@@ -8574,7 +10286,7 @@
               </a:spcAft>
             </a:pPr>
             <a:r>
-              <a:rPr sz="2800" b="1">
+              <a:rPr sz="2700" b="1">
                 <a:solidFill>
                   <a:srgbClr val="F2F4F8"/>
                 </a:solidFill>
@@ -8607,6 +10319,7 @@
               <a:srgbClr val="2C2C3A"/>
             </a:solidFill>
           </a:ln>
+          <a:effectLst/>
         </p:spPr>
         <p:style>
           <a:lnRef idx="1">
@@ -8673,7 +10386,7 @@
                 </a:solidFill>
                 <a:latin typeface="Calibri"/>
               </a:rPr>
-              <a:t>Every input (A1–A13) is visible and editable</a:t>
+              <a:t>Every input (A1–A13) editable</a:t>
             </a:r>
           </a:p>
           <a:p>
@@ -8698,7 +10411,7 @@
                 </a:solidFill>
                 <a:latin typeface="Calibri"/>
               </a:rPr>
-              <a:t>3-year scale path with improving ROI</a:t>
+              <a:t>3-year scale path; improving ROI</a:t>
             </a:r>
           </a:p>
           <a:p>
@@ -8877,7 +10590,7 @@
         <p:spPr>
           <a:xfrm>
             <a:off x="548640" y="868680"/>
-            <a:ext cx="1280160" cy="50800"/>
+            <a:ext cx="1280160" cy="50292"/>
           </a:xfrm>
           <a:prstGeom prst="rect">
             <a:avLst/>
@@ -8888,6 +10601,7 @@
           <a:ln>
             <a:noFill/>
           </a:ln>
+          <a:effectLst/>
         </p:spPr>
         <p:style>
           <a:lnRef idx="1">
@@ -8939,7 +10653,7 @@
               </a:spcAft>
             </a:pPr>
             <a:r>
-              <a:rPr sz="2800" b="1">
+              <a:rPr sz="2700" b="1">
                 <a:solidFill>
                   <a:srgbClr val="F2F4F8"/>
                 </a:solidFill>
@@ -8959,7 +10673,7 @@
         <p:spPr>
           <a:xfrm>
             <a:off x="548640" y="2331720"/>
-            <a:ext cx="11064240" cy="3931920"/>
+            <a:ext cx="5486400" cy="3931920"/>
           </a:xfrm>
           <a:prstGeom prst="rect">
             <a:avLst/>
@@ -8972,6 +10686,7 @@
               <a:srgbClr val="2C2C3A"/>
             </a:solidFill>
           </a:ln>
+          <a:effectLst/>
         </p:spPr>
         <p:style>
           <a:lnRef idx="1">
@@ -9003,8 +10718,8 @@
         </p:nvSpPr>
         <p:spPr>
           <a:xfrm>
-            <a:off x="914400" y="2560320"/>
-            <a:ext cx="10332720" cy="3566160"/>
+            <a:off x="822960" y="2542032"/>
+            <a:ext cx="4937760" cy="3566160"/>
           </a:xfrm>
           <a:prstGeom prst="rect">
             <a:avLst/>
@@ -9019,11 +10734,11 @@
           <a:p>
             <a:pPr algn="l">
               <a:spcAft>
-                <a:spcPts val="1200"/>
+                <a:spcPts val="1100"/>
               </a:spcAft>
             </a:pPr>
             <a:r>
-              <a:rPr sz="1800" b="1">
+              <a:rPr sz="1600" b="1">
                 <a:solidFill>
                   <a:srgbClr val="00BCEB"/>
                 </a:solidFill>
@@ -9032,23 +10747,23 @@
               <a:t>•  </a:t>
             </a:r>
             <a:r>
-              <a:rPr sz="1800" b="0">
+              <a:rPr sz="1600" b="0">
                 <a:solidFill>
                   <a:srgbClr val="F2F4F8"/>
                 </a:solidFill>
                 <a:latin typeface="Calibri"/>
               </a:rPr>
-              <a:t>Four Cisco conversations, not one integrated outcome</a:t>
+              <a:t>Four Cisco conversations, not one outcome</a:t>
             </a:r>
           </a:p>
           <a:p>
             <a:pPr algn="l">
               <a:spcAft>
-                <a:spcPts val="1200"/>
+                <a:spcPts val="1100"/>
               </a:spcAft>
             </a:pPr>
             <a:r>
-              <a:rPr sz="1800" b="1">
+              <a:rPr sz="1600" b="1">
                 <a:solidFill>
                   <a:srgbClr val="00BCEB"/>
                 </a:solidFill>
@@ -9057,23 +10772,23 @@
               <a:t>•  </a:t>
             </a:r>
             <a:r>
-              <a:rPr sz="1800" b="0">
+              <a:rPr sz="1600" b="0">
                 <a:solidFill>
                   <a:srgbClr val="F2F4F8"/>
                 </a:solidFill>
                 <a:latin typeface="Calibri"/>
               </a:rPr>
-              <a:t>Speeds-and-feeds, not the outcomes buyers fund</a:t>
+              <a:t>Speeds-and-feeds, not funded outcomes</a:t>
             </a:r>
           </a:p>
           <a:p>
             <a:pPr algn="l">
               <a:spcAft>
-                <a:spcPts val="1200"/>
+                <a:spcPts val="1100"/>
               </a:spcAft>
             </a:pPr>
             <a:r>
-              <a:rPr sz="1800" b="1">
+              <a:rPr sz="1600" b="1">
                 <a:solidFill>
                   <a:srgbClr val="00BCEB"/>
                 </a:solidFill>
@@ -9082,23 +10797,23 @@
               <a:t>•  </a:t>
             </a:r>
             <a:r>
-              <a:rPr sz="1800" b="0">
+              <a:rPr sz="1600" b="0">
                 <a:solidFill>
                   <a:srgbClr val="F2F4F8"/>
                 </a:solidFill>
                 <a:latin typeface="Calibri"/>
               </a:rPr>
-              <a:t>Splunk ↔ Cisco cross-sell is under-attached</a:t>
+              <a:t>Splunk + Cisco attach under-realized</a:t>
             </a:r>
           </a:p>
           <a:p>
             <a:pPr algn="l">
               <a:spcAft>
-                <a:spcPts val="1200"/>
+                <a:spcPts val="1100"/>
               </a:spcAft>
             </a:pPr>
             <a:r>
-              <a:rPr sz="1800" b="1">
+              <a:rPr sz="1600" b="1">
                 <a:solidFill>
                   <a:srgbClr val="00BCEB"/>
                 </a:solidFill>
@@ -9107,23 +10822,23 @@
               <a:t>•  </a:t>
             </a:r>
             <a:r>
-              <a:rPr sz="1800" b="0">
+              <a:rPr sz="1600" b="0">
                 <a:solidFill>
                   <a:srgbClr val="F2F4F8"/>
                 </a:solidFill>
                 <a:latin typeface="Calibri"/>
               </a:rPr>
-              <a:t>SIs and competitors own the 'architecture of the deal'</a:t>
+              <a:t>SIs own the 'architecture of the deal'</a:t>
             </a:r>
           </a:p>
           <a:p>
             <a:pPr algn="l">
               <a:spcAft>
-                <a:spcPts val="1200"/>
+                <a:spcPts val="1100"/>
               </a:spcAft>
             </a:pPr>
             <a:r>
-              <a:rPr sz="1800" b="1">
+              <a:rPr sz="1600" b="1">
                 <a:solidFill>
                   <a:srgbClr val="00BCEB"/>
                 </a:solidFill>
@@ -9132,20 +10847,392 @@
               <a:t>•  </a:t>
             </a:r>
             <a:r>
-              <a:rPr sz="1800" b="0">
+              <a:rPr sz="1600" b="0">
                 <a:solidFill>
                   <a:srgbClr val="F2F4F8"/>
                 </a:solidFill>
                 <a:latin typeface="Calibri"/>
               </a:rPr>
-              <a:t>Cost of inaction: nine figures of influenceable pipeline left on the table</a:t>
-            </a:r>
-          </a:p>
-        </p:txBody>
-      </p:sp>
-      <p:sp>
-        <p:nvSpPr>
-          <p:cNvPr id="8" name="TextBox 7"/>
+              <a:t>Inaction: nine-figure pipeline, forgone yearly</a:t>
+            </a:r>
+          </a:p>
+        </p:txBody>
+      </p:sp>
+      <p:sp>
+        <p:nvSpPr>
+          <p:cNvPr id="8" name="Rectangle 7"/>
+          <p:cNvSpPr/>
+          <p:nvPr/>
+        </p:nvSpPr>
+        <p:spPr>
+          <a:xfrm>
+            <a:off x="6263640" y="2331720"/>
+            <a:ext cx="5349240" cy="3931920"/>
+          </a:xfrm>
+          <a:prstGeom prst="rect">
+            <a:avLst/>
+          </a:prstGeom>
+          <a:solidFill>
+            <a:srgbClr val="1A1A2E"/>
+          </a:solidFill>
+          <a:ln w="12700">
+            <a:solidFill>
+              <a:srgbClr val="2C2C3A"/>
+            </a:solidFill>
+          </a:ln>
+          <a:effectLst/>
+        </p:spPr>
+        <p:style>
+          <a:lnRef idx="1">
+            <a:schemeClr val="accent1"/>
+          </a:lnRef>
+          <a:fillRef idx="3">
+            <a:schemeClr val="accent1"/>
+          </a:fillRef>
+          <a:effectRef idx="2">
+            <a:schemeClr val="accent1"/>
+          </a:effectRef>
+          <a:fontRef idx="minor">
+            <a:schemeClr val="lt1"/>
+          </a:fontRef>
+        </p:style>
+        <p:txBody>
+          <a:bodyPr rtlCol="0" anchor="ctr"/>
+          <a:lstStyle/>
+          <a:p>
+            <a:pPr algn="ctr"/>
+          </a:p>
+        </p:txBody>
+      </p:sp>
+      <p:sp>
+        <p:nvSpPr>
+          <p:cNvPr id="9" name="Rounded Rectangle 8"/>
+          <p:cNvSpPr/>
+          <p:nvPr/>
+        </p:nvSpPr>
+        <p:spPr>
+          <a:xfrm>
+            <a:off x="6766559" y="2651760"/>
+            <a:ext cx="2034540" cy="566928"/>
+          </a:xfrm>
+          <a:prstGeom prst="roundRect">
+            <a:avLst/>
+          </a:prstGeom>
+          <a:solidFill>
+            <a:srgbClr val="24243C"/>
+          </a:solidFill>
+          <a:ln w="9525">
+            <a:solidFill>
+              <a:srgbClr val="9AA3B2"/>
+            </a:solidFill>
+          </a:ln>
+          <a:effectLst/>
+        </p:spPr>
+        <p:style>
+          <a:lnRef idx="1">
+            <a:schemeClr val="accent1"/>
+          </a:lnRef>
+          <a:fillRef idx="3">
+            <a:schemeClr val="accent1"/>
+          </a:fillRef>
+          <a:effectRef idx="2">
+            <a:schemeClr val="accent1"/>
+          </a:effectRef>
+          <a:fontRef idx="minor">
+            <a:schemeClr val="lt1"/>
+          </a:fontRef>
+        </p:style>
+        <p:txBody>
+          <a:bodyPr rtlCol="0" anchor="ctr" wrap="square" lIns="45720" rIns="45720" tIns="18288" bIns="18288"/>
+          <a:lstStyle/>
+          <a:p>
+            <a:pPr algn="ctr"/>
+            <a:r>
+              <a:rPr sz="1200" b="1">
+                <a:solidFill>
+                  <a:srgbClr val="F2F4F8"/>
+                </a:solidFill>
+                <a:latin typeface="Calibri"/>
+              </a:rPr>
+              <a:t>Networking</a:t>
+            </a:r>
+          </a:p>
+        </p:txBody>
+      </p:sp>
+      <p:sp>
+        <p:nvSpPr>
+          <p:cNvPr id="10" name="Rounded Rectangle 9"/>
+          <p:cNvSpPr/>
+          <p:nvPr/>
+        </p:nvSpPr>
+        <p:spPr>
+          <a:xfrm>
+            <a:off x="9075419" y="2651760"/>
+            <a:ext cx="2034540" cy="566928"/>
+          </a:xfrm>
+          <a:prstGeom prst="roundRect">
+            <a:avLst/>
+          </a:prstGeom>
+          <a:solidFill>
+            <a:srgbClr val="24243C"/>
+          </a:solidFill>
+          <a:ln w="9525">
+            <a:solidFill>
+              <a:srgbClr val="9AA3B2"/>
+            </a:solidFill>
+          </a:ln>
+          <a:effectLst/>
+        </p:spPr>
+        <p:style>
+          <a:lnRef idx="1">
+            <a:schemeClr val="accent1"/>
+          </a:lnRef>
+          <a:fillRef idx="3">
+            <a:schemeClr val="accent1"/>
+          </a:fillRef>
+          <a:effectRef idx="2">
+            <a:schemeClr val="accent1"/>
+          </a:effectRef>
+          <a:fontRef idx="minor">
+            <a:schemeClr val="lt1"/>
+          </a:fontRef>
+        </p:style>
+        <p:txBody>
+          <a:bodyPr rtlCol="0" anchor="ctr" wrap="square" lIns="45720" rIns="45720" tIns="18288" bIns="18288"/>
+          <a:lstStyle/>
+          <a:p>
+            <a:pPr algn="ctr"/>
+            <a:r>
+              <a:rPr sz="1200" b="1">
+                <a:solidFill>
+                  <a:srgbClr val="F2F4F8"/>
+                </a:solidFill>
+                <a:latin typeface="Calibri"/>
+              </a:rPr>
+              <a:t>Security</a:t>
+            </a:r>
+          </a:p>
+        </p:txBody>
+      </p:sp>
+      <p:sp>
+        <p:nvSpPr>
+          <p:cNvPr id="11" name="Rounded Rectangle 10"/>
+          <p:cNvSpPr/>
+          <p:nvPr/>
+        </p:nvSpPr>
+        <p:spPr>
+          <a:xfrm>
+            <a:off x="6766559" y="3401568"/>
+            <a:ext cx="2034540" cy="566928"/>
+          </a:xfrm>
+          <a:prstGeom prst="roundRect">
+            <a:avLst/>
+          </a:prstGeom>
+          <a:solidFill>
+            <a:srgbClr val="24243C"/>
+          </a:solidFill>
+          <a:ln w="9525">
+            <a:solidFill>
+              <a:srgbClr val="9AA3B2"/>
+            </a:solidFill>
+          </a:ln>
+          <a:effectLst/>
+        </p:spPr>
+        <p:style>
+          <a:lnRef idx="1">
+            <a:schemeClr val="accent1"/>
+          </a:lnRef>
+          <a:fillRef idx="3">
+            <a:schemeClr val="accent1"/>
+          </a:fillRef>
+          <a:effectRef idx="2">
+            <a:schemeClr val="accent1"/>
+          </a:effectRef>
+          <a:fontRef idx="minor">
+            <a:schemeClr val="lt1"/>
+          </a:fontRef>
+        </p:style>
+        <p:txBody>
+          <a:bodyPr rtlCol="0" anchor="ctr" wrap="square" lIns="45720" rIns="45720" tIns="18288" bIns="18288"/>
+          <a:lstStyle/>
+          <a:p>
+            <a:pPr algn="ctr"/>
+            <a:r>
+              <a:rPr sz="1200" b="1">
+                <a:solidFill>
+                  <a:srgbClr val="F2F4F8"/>
+                </a:solidFill>
+                <a:latin typeface="Calibri"/>
+              </a:rPr>
+              <a:t>Observability</a:t>
+            </a:r>
+          </a:p>
+        </p:txBody>
+      </p:sp>
+      <p:sp>
+        <p:nvSpPr>
+          <p:cNvPr id="12" name="Rounded Rectangle 11"/>
+          <p:cNvSpPr/>
+          <p:nvPr/>
+        </p:nvSpPr>
+        <p:spPr>
+          <a:xfrm>
+            <a:off x="9075419" y="3401568"/>
+            <a:ext cx="2034540" cy="566928"/>
+          </a:xfrm>
+          <a:prstGeom prst="roundRect">
+            <a:avLst/>
+          </a:prstGeom>
+          <a:solidFill>
+            <a:srgbClr val="24243C"/>
+          </a:solidFill>
+          <a:ln w="9525">
+            <a:solidFill>
+              <a:srgbClr val="9AA3B2"/>
+            </a:solidFill>
+          </a:ln>
+          <a:effectLst/>
+        </p:spPr>
+        <p:style>
+          <a:lnRef idx="1">
+            <a:schemeClr val="accent1"/>
+          </a:lnRef>
+          <a:fillRef idx="3">
+            <a:schemeClr val="accent1"/>
+          </a:fillRef>
+          <a:effectRef idx="2">
+            <a:schemeClr val="accent1"/>
+          </a:effectRef>
+          <a:fontRef idx="minor">
+            <a:schemeClr val="lt1"/>
+          </a:fontRef>
+        </p:style>
+        <p:txBody>
+          <a:bodyPr rtlCol="0" anchor="ctr" wrap="square" lIns="45720" rIns="45720" tIns="18288" bIns="18288"/>
+          <a:lstStyle/>
+          <a:p>
+            <a:pPr algn="ctr"/>
+            <a:r>
+              <a:rPr sz="1200" b="1">
+                <a:solidFill>
+                  <a:srgbClr val="F2F4F8"/>
+                </a:solidFill>
+                <a:latin typeface="Calibri"/>
+              </a:rPr>
+              <a:t>SecOps</a:t>
+            </a:r>
+          </a:p>
+        </p:txBody>
+      </p:sp>
+      <p:sp>
+        <p:nvSpPr>
+          <p:cNvPr id="13" name="Down Arrow 12"/>
+          <p:cNvSpPr/>
+          <p:nvPr/>
+        </p:nvSpPr>
+        <p:spPr>
+          <a:xfrm>
+            <a:off x="8709659" y="3995928"/>
+            <a:ext cx="457200" cy="384048"/>
+          </a:xfrm>
+          <a:prstGeom prst="downArrow">
+            <a:avLst/>
+          </a:prstGeom>
+          <a:solidFill>
+            <a:srgbClr val="00BCEB"/>
+          </a:solidFill>
+          <a:ln>
+            <a:noFill/>
+          </a:ln>
+          <a:effectLst/>
+        </p:spPr>
+        <p:style>
+          <a:lnRef idx="1">
+            <a:schemeClr val="accent1"/>
+          </a:lnRef>
+          <a:fillRef idx="3">
+            <a:schemeClr val="accent1"/>
+          </a:fillRef>
+          <a:effectRef idx="2">
+            <a:schemeClr val="accent1"/>
+          </a:effectRef>
+          <a:fontRef idx="minor">
+            <a:schemeClr val="lt1"/>
+          </a:fontRef>
+        </p:style>
+        <p:txBody>
+          <a:bodyPr rtlCol="0" anchor="ctr" wrap="square" lIns="45720" rIns="45720" tIns="18288" bIns="18288"/>
+          <a:lstStyle/>
+          <a:p>
+            <a:pPr algn="ctr"/>
+            <a:r>
+              <a:rPr sz="800" b="1">
+                <a:solidFill>
+                  <a:srgbClr val="101014"/>
+                </a:solidFill>
+                <a:latin typeface="Calibri"/>
+              </a:rPr>
+              <a:t/>
+            </a:r>
+          </a:p>
+        </p:txBody>
+      </p:sp>
+      <p:sp>
+        <p:nvSpPr>
+          <p:cNvPr id="14" name="Rounded Rectangle 13"/>
+          <p:cNvSpPr/>
+          <p:nvPr/>
+        </p:nvSpPr>
+        <p:spPr>
+          <a:xfrm>
+            <a:off x="6766559" y="4498848"/>
+            <a:ext cx="4343400" cy="731520"/>
+          </a:xfrm>
+          <a:prstGeom prst="roundRect">
+            <a:avLst/>
+          </a:prstGeom>
+          <a:solidFill>
+            <a:srgbClr val="00BCEB"/>
+          </a:solidFill>
+          <a:ln>
+            <a:noFill/>
+          </a:ln>
+          <a:effectLst/>
+        </p:spPr>
+        <p:style>
+          <a:lnRef idx="1">
+            <a:schemeClr val="accent1"/>
+          </a:lnRef>
+          <a:fillRef idx="3">
+            <a:schemeClr val="accent1"/>
+          </a:fillRef>
+          <a:effectRef idx="2">
+            <a:schemeClr val="accent1"/>
+          </a:effectRef>
+          <a:fontRef idx="minor">
+            <a:schemeClr val="lt1"/>
+          </a:fontRef>
+        </p:style>
+        <p:txBody>
+          <a:bodyPr rtlCol="0" anchor="ctr" wrap="square" lIns="45720" rIns="45720" tIns="18288" bIns="18288"/>
+          <a:lstStyle/>
+          <a:p>
+            <a:pPr algn="ctr"/>
+            <a:r>
+              <a:rPr sz="1500" b="1">
+                <a:solidFill>
+                  <a:srgbClr val="101014"/>
+                </a:solidFill>
+                <a:latin typeface="Calibri"/>
+              </a:rPr>
+              <a:t>One integrated outcome</a:t>
+            </a:r>
+          </a:p>
+        </p:txBody>
+      </p:sp>
+      <p:sp>
+        <p:nvSpPr>
+          <p:cNvPr id="15" name="TextBox 14"/>
           <p:cNvSpPr txBox="1"/>
           <p:nvPr/>
         </p:nvSpPr>
@@ -9292,7 +11379,7 @@
         <p:spPr>
           <a:xfrm>
             <a:off x="548640" y="868680"/>
-            <a:ext cx="1280160" cy="50800"/>
+            <a:ext cx="1280160" cy="50292"/>
           </a:xfrm>
           <a:prstGeom prst="rect">
             <a:avLst/>
@@ -9303,6 +11390,7 @@
           <a:ln>
             <a:noFill/>
           </a:ln>
+          <a:effectLst/>
         </p:spPr>
         <p:style>
           <a:lnRef idx="1">
@@ -9354,7 +11442,7 @@
               </a:spcAft>
             </a:pPr>
             <a:r>
-              <a:rPr sz="2800" b="1">
+              <a:rPr sz="2700" b="1">
                 <a:solidFill>
                   <a:srgbClr val="F2F4F8"/>
                 </a:solidFill>
@@ -9387,6 +11475,7 @@
               <a:srgbClr val="2C2C3A"/>
             </a:solidFill>
           </a:ln>
+          <a:effectLst/>
         </p:spPr>
         <p:style>
           <a:lnRef idx="1">
@@ -9478,7 +11567,7 @@
                 </a:solidFill>
                 <a:latin typeface="Calibri"/>
               </a:rPr>
-              <a:t>50% bookings / 20% Splunk attach / 15% leading / 15% MBOs</a:t>
+              <a:t>50% bookings / 20% attach / 15% leading / 15% MBO</a:t>
             </a:r>
           </a:p>
           <a:p>
@@ -9503,7 +11592,7 @@
                 </a:solidFill>
                 <a:latin typeface="Calibri"/>
               </a:rPr>
-              <a:t>Deal desk arbitrates via the influence ledger</a:t>
+              <a:t>Deal desk arbitrates via the ledger</a:t>
             </a:r>
           </a:p>
         </p:txBody>
@@ -9657,7 +11746,7 @@
         <p:spPr>
           <a:xfrm>
             <a:off x="548640" y="868680"/>
-            <a:ext cx="1280160" cy="50800"/>
+            <a:ext cx="1280160" cy="50292"/>
           </a:xfrm>
           <a:prstGeom prst="rect">
             <a:avLst/>
@@ -9668,6 +11757,7 @@
           <a:ln>
             <a:noFill/>
           </a:ln>
+          <a:effectLst/>
         </p:spPr>
         <p:style>
           <a:lnRef idx="1">
@@ -9719,7 +11809,7 @@
               </a:spcAft>
             </a:pPr>
             <a:r>
-              <a:rPr sz="2800" b="1">
+              <a:rPr sz="2700" b="1">
                 <a:solidFill>
                   <a:srgbClr val="F2F4F8"/>
                 </a:solidFill>
@@ -9752,6 +11842,7 @@
               <a:srgbClr val="2C2C3A"/>
             </a:solidFill>
           </a:ln>
+          <a:effectLst/>
         </p:spPr>
         <p:style>
           <a:lnRef idx="1">
@@ -9818,7 +11909,7 @@
                 </a:solidFill>
                 <a:latin typeface="Calibri"/>
               </a:rPr>
-              <a:t>Point vendors, SIEM/observability, SIs, hyperscalers</a:t>
+              <a:t>Point vendors, SIEM, SIs, hyperscalers</a:t>
             </a:r>
           </a:p>
           <a:p>
@@ -9843,7 +11934,7 @@
                 </a:solidFill>
                 <a:latin typeface="Calibri"/>
               </a:rPr>
-              <a:t>The SI dynamic is the biggest structural risk</a:t>
+              <a:t>SI dynamic is the biggest structural risk</a:t>
             </a:r>
           </a:p>
           <a:p>
@@ -9868,7 +11959,7 @@
                 </a:solidFill>
                 <a:latin typeface="Calibri"/>
               </a:rPr>
-              <a:t>Whoever frames the architecture wins the budget</a:t>
+              <a:t>Whoever frames the architecture wins</a:t>
             </a:r>
           </a:p>
         </p:txBody>
@@ -10022,7 +12113,7 @@
         <p:spPr>
           <a:xfrm>
             <a:off x="548640" y="868680"/>
-            <a:ext cx="1280160" cy="50800"/>
+            <a:ext cx="1280160" cy="50292"/>
           </a:xfrm>
           <a:prstGeom prst="rect">
             <a:avLst/>
@@ -10033,6 +12124,7 @@
           <a:ln>
             <a:noFill/>
           </a:ln>
+          <a:effectLst/>
         </p:spPr>
         <p:style>
           <a:lnRef idx="1">
@@ -10084,13 +12176,13 @@
               </a:spcAft>
             </a:pPr>
             <a:r>
-              <a:rPr sz="2800" b="1">
+              <a:rPr sz="2700" b="1">
                 <a:solidFill>
                   <a:srgbClr val="F2F4F8"/>
                 </a:solidFill>
                 <a:latin typeface="Calibri"/>
               </a:rPr>
-              <a:t>Full risk register and early-warning indicators</a:t>
+              <a:t>Full risk register + early warnings</a:t>
             </a:r>
           </a:p>
         </p:txBody>
@@ -10117,6 +12209,7 @@
               <a:srgbClr val="2C2C3A"/>
             </a:solidFill>
           </a:ln>
+          <a:effectLst/>
         </p:spPr>
         <p:style>
           <a:lnRef idx="1">
@@ -10208,7 +12301,7 @@
                 </a:solidFill>
                 <a:latin typeface="Calibri"/>
               </a:rPr>
-              <a:t>Leading signals with explicit action triggers</a:t>
+              <a:t>Leading signals with action triggers</a:t>
             </a:r>
           </a:p>
           <a:p>
@@ -10387,7 +12480,7 @@
         <p:spPr>
           <a:xfrm>
             <a:off x="548640" y="868680"/>
-            <a:ext cx="1280160" cy="50800"/>
+            <a:ext cx="1280160" cy="50292"/>
           </a:xfrm>
           <a:prstGeom prst="rect">
             <a:avLst/>
@@ -10398,6 +12491,7 @@
           <a:ln>
             <a:noFill/>
           </a:ln>
+          <a:effectLst/>
         </p:spPr>
         <p:style>
           <a:lnRef idx="1">
@@ -10449,7 +12543,7 @@
               </a:spcAft>
             </a:pPr>
             <a:r>
-              <a:rPr sz="2800" b="1">
+              <a:rPr sz="2700" b="1">
                 <a:solidFill>
                   <a:srgbClr val="F2F4F8"/>
                 </a:solidFill>
@@ -10469,7 +12563,7 @@
         <p:spPr>
           <a:xfrm>
             <a:off x="548640" y="2331720"/>
-            <a:ext cx="11064240" cy="3931920"/>
+            <a:ext cx="5486400" cy="3931920"/>
           </a:xfrm>
           <a:prstGeom prst="rect">
             <a:avLst/>
@@ -10482,6 +12576,7 @@
               <a:srgbClr val="2C2C3A"/>
             </a:solidFill>
           </a:ln>
+          <a:effectLst/>
         </p:spPr>
         <p:style>
           <a:lnRef idx="1">
@@ -10513,8 +12608,8 @@
         </p:nvSpPr>
         <p:spPr>
           <a:xfrm>
-            <a:off x="914400" y="2560320"/>
-            <a:ext cx="10332720" cy="3566160"/>
+            <a:off x="822960" y="2542032"/>
+            <a:ext cx="4937760" cy="3566160"/>
           </a:xfrm>
           <a:prstGeom prst="rect">
             <a:avLst/>
@@ -10529,11 +12624,11 @@
           <a:p>
             <a:pPr algn="l">
               <a:spcAft>
-                <a:spcPts val="1200"/>
+                <a:spcPts val="1100"/>
               </a:spcAft>
             </a:pPr>
             <a:r>
-              <a:rPr sz="1800" b="1">
+              <a:rPr sz="1600" b="1">
                 <a:solidFill>
                   <a:srgbClr val="00BCEB"/>
                 </a:solidFill>
@@ -10542,7 +12637,7 @@
               <a:t>•  </a:t>
             </a:r>
             <a:r>
-              <a:rPr sz="1800" b="0">
+              <a:rPr sz="1600" b="0">
                 <a:solidFill>
                   <a:srgbClr val="F2F4F8"/>
                 </a:solidFill>
@@ -10554,11 +12649,11 @@
           <a:p>
             <a:pPr algn="l">
               <a:spcAft>
-                <a:spcPts val="1200"/>
+                <a:spcPts val="1100"/>
               </a:spcAft>
             </a:pPr>
             <a:r>
-              <a:rPr sz="1800" b="1">
+              <a:rPr sz="1600" b="1">
                 <a:solidFill>
                   <a:srgbClr val="00BCEB"/>
                 </a:solidFill>
@@ -10567,23 +12662,23 @@
               <a:t>•  </a:t>
             </a:r>
             <a:r>
-              <a:rPr sz="1800" b="0">
+              <a:rPr sz="1600" b="0">
                 <a:solidFill>
                   <a:srgbClr val="F2F4F8"/>
                 </a:solidFill>
                 <a:latin typeface="Calibri"/>
               </a:rPr>
-              <a:t>Live integrations: XDR+ES, ThousandEyes+AppD+Splunk, Cyber Vision+OT</a:t>
+              <a:t>Integrations live and shipping</a:t>
             </a:r>
           </a:p>
           <a:p>
             <a:pPr algn="l">
               <a:spcAft>
-                <a:spcPts val="1200"/>
+                <a:spcPts val="1100"/>
               </a:spcAft>
             </a:pPr>
             <a:r>
-              <a:rPr sz="1800" b="1">
+              <a:rPr sz="1600" b="1">
                 <a:solidFill>
                   <a:srgbClr val="00BCEB"/>
                 </a:solidFill>
@@ -10592,23 +12687,23 @@
               <a:t>•  </a:t>
             </a:r>
             <a:r>
-              <a:rPr sz="1800" b="0">
+              <a:rPr sz="1600" b="0">
                 <a:solidFill>
                   <a:srgbClr val="F2F4F8"/>
                 </a:solidFill>
                 <a:latin typeface="Calibri"/>
               </a:rPr>
-              <a:t>Vendor consolidation invites a C-suite frame</a:t>
+              <a:t>Consolidation → a C-suite frame</a:t>
             </a:r>
           </a:p>
           <a:p>
             <a:pPr algn="l">
               <a:spcAft>
-                <a:spcPts val="1200"/>
+                <a:spcPts val="1100"/>
               </a:spcAft>
             </a:pPr>
             <a:r>
-              <a:rPr sz="1800" b="1">
+              <a:rPr sz="1600" b="1">
                 <a:solidFill>
                   <a:srgbClr val="00BCEB"/>
                 </a:solidFill>
@@ -10617,20 +12712,286 @@
               <a:t>•  </a:t>
             </a:r>
             <a:r>
-              <a:rPr sz="1800" b="0">
+              <a:rPr sz="1600" b="0">
                 <a:solidFill>
                   <a:srgbClr val="F2F4F8"/>
                 </a:solidFill>
                 <a:latin typeface="Calibri"/>
               </a:rPr>
-              <a:t>AI build-outs pull networking, security, and data forward together</a:t>
-            </a:r>
-          </a:p>
-        </p:txBody>
-      </p:sp>
-      <p:sp>
-        <p:nvSpPr>
-          <p:cNvPr id="8" name="TextBox 7"/>
+              <a:t>AI build-outs pull it all forward</a:t>
+            </a:r>
+          </a:p>
+        </p:txBody>
+      </p:sp>
+      <p:sp>
+        <p:nvSpPr>
+          <p:cNvPr id="8" name="Rectangle 7"/>
+          <p:cNvSpPr/>
+          <p:nvPr/>
+        </p:nvSpPr>
+        <p:spPr>
+          <a:xfrm>
+            <a:off x="6263640" y="2331720"/>
+            <a:ext cx="5349240" cy="3931920"/>
+          </a:xfrm>
+          <a:prstGeom prst="rect">
+            <a:avLst/>
+          </a:prstGeom>
+          <a:solidFill>
+            <a:srgbClr val="1A1A2E"/>
+          </a:solidFill>
+          <a:ln w="12700">
+            <a:solidFill>
+              <a:srgbClr val="2C2C3A"/>
+            </a:solidFill>
+          </a:ln>
+          <a:effectLst/>
+        </p:spPr>
+        <p:style>
+          <a:lnRef idx="1">
+            <a:schemeClr val="accent1"/>
+          </a:lnRef>
+          <a:fillRef idx="3">
+            <a:schemeClr val="accent1"/>
+          </a:fillRef>
+          <a:effectRef idx="2">
+            <a:schemeClr val="accent1"/>
+          </a:effectRef>
+          <a:fontRef idx="minor">
+            <a:schemeClr val="lt1"/>
+          </a:fontRef>
+        </p:style>
+        <p:txBody>
+          <a:bodyPr rtlCol="0" anchor="ctr"/>
+          <a:lstStyle/>
+          <a:p>
+            <a:pPr algn="ctr"/>
+          </a:p>
+        </p:txBody>
+      </p:sp>
+      <p:sp>
+        <p:nvSpPr>
+          <p:cNvPr id="9" name="Rounded Rectangle 8"/>
+          <p:cNvSpPr/>
+          <p:nvPr/>
+        </p:nvSpPr>
+        <p:spPr>
+          <a:xfrm>
+            <a:off x="6629400" y="2697479"/>
+            <a:ext cx="4617720" cy="628650"/>
+          </a:xfrm>
+          <a:prstGeom prst="roundRect">
+            <a:avLst/>
+          </a:prstGeom>
+          <a:solidFill>
+            <a:srgbClr val="24243C"/>
+          </a:solidFill>
+          <a:ln w="9525">
+            <a:solidFill>
+              <a:srgbClr val="9AA3B2"/>
+            </a:solidFill>
+          </a:ln>
+          <a:effectLst/>
+        </p:spPr>
+        <p:style>
+          <a:lnRef idx="1">
+            <a:schemeClr val="accent1"/>
+          </a:lnRef>
+          <a:fillRef idx="3">
+            <a:schemeClr val="accent1"/>
+          </a:fillRef>
+          <a:effectRef idx="2">
+            <a:schemeClr val="accent1"/>
+          </a:effectRef>
+          <a:fontRef idx="minor">
+            <a:schemeClr val="lt1"/>
+          </a:fontRef>
+        </p:style>
+        <p:txBody>
+          <a:bodyPr rtlCol="0" anchor="ctr" wrap="square" lIns="45720" rIns="45720" tIns="18288" bIns="18288"/>
+          <a:lstStyle/>
+          <a:p>
+            <a:pPr algn="ctr"/>
+            <a:r>
+              <a:rPr sz="1300" b="0">
+                <a:solidFill>
+                  <a:srgbClr val="F2F4F8"/>
+                </a:solidFill>
+                <a:latin typeface="Calibri"/>
+              </a:rPr>
+              <a:t>Portfolio complete: edge → SOC</a:t>
+            </a:r>
+          </a:p>
+        </p:txBody>
+      </p:sp>
+      <p:sp>
+        <p:nvSpPr>
+          <p:cNvPr id="10" name="Rounded Rectangle 9"/>
+          <p:cNvSpPr/>
+          <p:nvPr/>
+        </p:nvSpPr>
+        <p:spPr>
+          <a:xfrm>
+            <a:off x="6629400" y="3554729"/>
+            <a:ext cx="4617720" cy="628650"/>
+          </a:xfrm>
+          <a:prstGeom prst="roundRect">
+            <a:avLst/>
+          </a:prstGeom>
+          <a:solidFill>
+            <a:srgbClr val="24243C"/>
+          </a:solidFill>
+          <a:ln w="9525">
+            <a:solidFill>
+              <a:srgbClr val="9AA3B2"/>
+            </a:solidFill>
+          </a:ln>
+          <a:effectLst/>
+        </p:spPr>
+        <p:style>
+          <a:lnRef idx="1">
+            <a:schemeClr val="accent1"/>
+          </a:lnRef>
+          <a:fillRef idx="3">
+            <a:schemeClr val="accent1"/>
+          </a:fillRef>
+          <a:effectRef idx="2">
+            <a:schemeClr val="accent1"/>
+          </a:effectRef>
+          <a:fontRef idx="minor">
+            <a:schemeClr val="lt1"/>
+          </a:fontRef>
+        </p:style>
+        <p:txBody>
+          <a:bodyPr rtlCol="0" anchor="ctr" wrap="square" lIns="45720" rIns="45720" tIns="18288" bIns="18288"/>
+          <a:lstStyle/>
+          <a:p>
+            <a:pPr algn="ctr"/>
+            <a:r>
+              <a:rPr sz="1300" b="0">
+                <a:solidFill>
+                  <a:srgbClr val="F2F4F8"/>
+                </a:solidFill>
+                <a:latin typeface="Calibri"/>
+              </a:rPr>
+              <a:t>Integrations: XDR+ES, TE+AppD, Cyber Vision+OT</a:t>
+            </a:r>
+          </a:p>
+        </p:txBody>
+      </p:sp>
+      <p:sp>
+        <p:nvSpPr>
+          <p:cNvPr id="11" name="Rounded Rectangle 10"/>
+          <p:cNvSpPr/>
+          <p:nvPr/>
+        </p:nvSpPr>
+        <p:spPr>
+          <a:xfrm>
+            <a:off x="6629400" y="4411979"/>
+            <a:ext cx="4617720" cy="628650"/>
+          </a:xfrm>
+          <a:prstGeom prst="roundRect">
+            <a:avLst/>
+          </a:prstGeom>
+          <a:solidFill>
+            <a:srgbClr val="24243C"/>
+          </a:solidFill>
+          <a:ln w="9525">
+            <a:solidFill>
+              <a:srgbClr val="9AA3B2"/>
+            </a:solidFill>
+          </a:ln>
+          <a:effectLst/>
+        </p:spPr>
+        <p:style>
+          <a:lnRef idx="1">
+            <a:schemeClr val="accent1"/>
+          </a:lnRef>
+          <a:fillRef idx="3">
+            <a:schemeClr val="accent1"/>
+          </a:fillRef>
+          <a:effectRef idx="2">
+            <a:schemeClr val="accent1"/>
+          </a:effectRef>
+          <a:fontRef idx="minor">
+            <a:schemeClr val="lt1"/>
+          </a:fontRef>
+        </p:style>
+        <p:txBody>
+          <a:bodyPr rtlCol="0" anchor="ctr" wrap="square" lIns="45720" rIns="45720" tIns="18288" bIns="18288"/>
+          <a:lstStyle/>
+          <a:p>
+            <a:pPr algn="ctr"/>
+            <a:r>
+              <a:rPr sz="1300" b="0">
+                <a:solidFill>
+                  <a:srgbClr val="F2F4F8"/>
+                </a:solidFill>
+                <a:latin typeface="Calibri"/>
+              </a:rPr>
+              <a:t>Vendor consolidation → C-suite frame</a:t>
+            </a:r>
+          </a:p>
+        </p:txBody>
+      </p:sp>
+      <p:sp>
+        <p:nvSpPr>
+          <p:cNvPr id="12" name="Rounded Rectangle 11"/>
+          <p:cNvSpPr/>
+          <p:nvPr/>
+        </p:nvSpPr>
+        <p:spPr>
+          <a:xfrm>
+            <a:off x="6629400" y="5269229"/>
+            <a:ext cx="4617720" cy="628650"/>
+          </a:xfrm>
+          <a:prstGeom prst="roundRect">
+            <a:avLst/>
+          </a:prstGeom>
+          <a:solidFill>
+            <a:srgbClr val="24243C"/>
+          </a:solidFill>
+          <a:ln w="9525">
+            <a:solidFill>
+              <a:srgbClr val="9AA3B2"/>
+            </a:solidFill>
+          </a:ln>
+          <a:effectLst/>
+        </p:spPr>
+        <p:style>
+          <a:lnRef idx="1">
+            <a:schemeClr val="accent1"/>
+          </a:lnRef>
+          <a:fillRef idx="3">
+            <a:schemeClr val="accent1"/>
+          </a:fillRef>
+          <a:effectRef idx="2">
+            <a:schemeClr val="accent1"/>
+          </a:effectRef>
+          <a:fontRef idx="minor">
+            <a:schemeClr val="lt1"/>
+          </a:fontRef>
+        </p:style>
+        <p:txBody>
+          <a:bodyPr rtlCol="0" anchor="ctr" wrap="square" lIns="45720" rIns="45720" tIns="18288" bIns="18288"/>
+          <a:lstStyle/>
+          <a:p>
+            <a:pPr algn="ctr"/>
+            <a:r>
+              <a:rPr sz="1300" b="0">
+                <a:solidFill>
+                  <a:srgbClr val="F2F4F8"/>
+                </a:solidFill>
+                <a:latin typeface="Calibri"/>
+              </a:rPr>
+              <a:t>AI build-outs pull all pillars forward</a:t>
+            </a:r>
+          </a:p>
+        </p:txBody>
+      </p:sp>
+      <p:sp>
+        <p:nvSpPr>
+          <p:cNvPr id="13" name="TextBox 12"/>
           <p:cNvSpPr txBox="1"/>
           <p:nvPr/>
         </p:nvSpPr>
@@ -10777,7 +13138,7 @@
         <p:spPr>
           <a:xfrm>
             <a:off x="548640" y="868680"/>
-            <a:ext cx="1280160" cy="50800"/>
+            <a:ext cx="1280160" cy="50292"/>
           </a:xfrm>
           <a:prstGeom prst="rect">
             <a:avLst/>
@@ -10788,6 +13149,7 @@
           <a:ln>
             <a:noFill/>
           </a:ln>
+          <a:effectLst/>
         </p:spPr>
         <p:style>
           <a:lnRef idx="1">
@@ -10839,13 +13201,13 @@
               </a:spcAft>
             </a:pPr>
             <a:r>
-              <a:rPr sz="2800" b="1">
+              <a:rPr sz="2700" b="1">
                 <a:solidFill>
                   <a:srgbClr val="F2F4F8"/>
                 </a:solidFill>
                 <a:latin typeface="Calibri"/>
               </a:rPr>
-              <a:t>One vendor, edge to SOC — but only if someone tells it end-to-end</a:t>
+              <a:t>One vendor, edge to SOC — if someone tells it end-to-end</a:t>
             </a:r>
           </a:p>
         </p:txBody>
@@ -10859,7 +13221,7 @@
         <p:spPr>
           <a:xfrm>
             <a:off x="548640" y="2331720"/>
-            <a:ext cx="11064240" cy="3931920"/>
+            <a:ext cx="5486400" cy="3931920"/>
           </a:xfrm>
           <a:prstGeom prst="rect">
             <a:avLst/>
@@ -10872,6 +13234,7 @@
               <a:srgbClr val="2C2C3A"/>
             </a:solidFill>
           </a:ln>
+          <a:effectLst/>
         </p:spPr>
         <p:style>
           <a:lnRef idx="1">
@@ -10903,8 +13266,8 @@
         </p:nvSpPr>
         <p:spPr>
           <a:xfrm>
-            <a:off x="914400" y="2560320"/>
-            <a:ext cx="10332720" cy="3566160"/>
+            <a:off x="822960" y="2542032"/>
+            <a:ext cx="4937760" cy="3566160"/>
           </a:xfrm>
           <a:prstGeom prst="rect">
             <a:avLst/>
@@ -10919,11 +13282,11 @@
           <a:p>
             <a:pPr algn="l">
               <a:spcAft>
-                <a:spcPts val="1200"/>
+                <a:spcPts val="1100"/>
               </a:spcAft>
             </a:pPr>
             <a:r>
-              <a:rPr sz="1800" b="1">
+              <a:rPr sz="1600" b="1">
                 <a:solidFill>
                   <a:srgbClr val="00BCEB"/>
                 </a:solidFill>
@@ -10932,23 +13295,23 @@
               <a:t>•  </a:t>
             </a:r>
             <a:r>
-              <a:rPr sz="1800" b="0">
+              <a:rPr sz="1600" b="0">
                 <a:solidFill>
                   <a:srgbClr val="F2F4F8"/>
                 </a:solidFill>
                 <a:latin typeface="Calibri"/>
               </a:rPr>
-              <a:t>The loop: sense → connect → secure → understand → act</a:t>
+              <a:t>Every arrow between pillars = a cross-sell</a:t>
             </a:r>
           </a:p>
           <a:p>
             <a:pPr algn="l">
               <a:spcAft>
-                <a:spcPts val="1200"/>
+                <a:spcPts val="1100"/>
               </a:spcAft>
             </a:pPr>
             <a:r>
-              <a:rPr sz="1800" b="1">
+              <a:rPr sz="1600" b="1">
                 <a:solidFill>
                   <a:srgbClr val="00BCEB"/>
                 </a:solidFill>
@@ -10957,23 +13320,23 @@
               <a:t>•  </a:t>
             </a:r>
             <a:r>
-              <a:rPr sz="1800" b="0">
+              <a:rPr sz="1600" b="0">
                 <a:solidFill>
                   <a:srgbClr val="F2F4F8"/>
                 </a:solidFill>
                 <a:latin typeface="Calibri"/>
               </a:rPr>
-              <a:t>Every arrow between architectures is a cross-sell</a:t>
+              <a:t>Others own one box; we own the arrows</a:t>
             </a:r>
           </a:p>
           <a:p>
             <a:pPr algn="l">
               <a:spcAft>
-                <a:spcPts val="1200"/>
+                <a:spcPts val="1100"/>
               </a:spcAft>
             </a:pPr>
             <a:r>
-              <a:rPr sz="1800" b="1">
+              <a:rPr sz="1600" b="1">
                 <a:solidFill>
                   <a:srgbClr val="00BCEB"/>
                 </a:solidFill>
@@ -10982,23 +13345,23 @@
               <a:t>•  </a:t>
             </a:r>
             <a:r>
-              <a:rPr sz="1800" b="0">
+              <a:rPr sz="1600" b="0">
                 <a:solidFill>
                   <a:srgbClr val="F2F4F8"/>
                 </a:solidFill>
                 <a:latin typeface="Calibri"/>
               </a:rPr>
-              <a:t>Most sellers own one box; the Field CTO owns the arrows</a:t>
+              <a:t>Splunk + Cisco: top under-executed play</a:t>
             </a:r>
           </a:p>
           <a:p>
             <a:pPr algn="l">
               <a:spcAft>
-                <a:spcPts val="1200"/>
+                <a:spcPts val="1100"/>
               </a:spcAft>
             </a:pPr>
             <a:r>
-              <a:rPr sz="1800" b="1">
+              <a:rPr sz="1600" b="1">
                 <a:solidFill>
                   <a:srgbClr val="00BCEB"/>
                 </a:solidFill>
@@ -11007,20 +13370,507 @@
               <a:t>•  </a:t>
             </a:r>
             <a:r>
-              <a:rPr sz="1800" b="0">
+              <a:rPr sz="1600" b="0">
                 <a:solidFill>
                   <a:srgbClr val="F2F4F8"/>
                 </a:solidFill>
                 <a:latin typeface="Calibri"/>
               </a:rPr>
-              <a:t>Splunk ↔ Cisco attach is the top under-executed play</a:t>
-            </a:r>
-          </a:p>
-        </p:txBody>
-      </p:sp>
-      <p:sp>
-        <p:nvSpPr>
-          <p:cNvPr id="8" name="TextBox 7"/>
+              <a:t>The story rivals can't match end-to-end</a:t>
+            </a:r>
+          </a:p>
+        </p:txBody>
+      </p:sp>
+      <p:sp>
+        <p:nvSpPr>
+          <p:cNvPr id="8" name="Rectangle 7"/>
+          <p:cNvSpPr/>
+          <p:nvPr/>
+        </p:nvSpPr>
+        <p:spPr>
+          <a:xfrm>
+            <a:off x="6263640" y="2331720"/>
+            <a:ext cx="5349240" cy="3931920"/>
+          </a:xfrm>
+          <a:prstGeom prst="rect">
+            <a:avLst/>
+          </a:prstGeom>
+          <a:solidFill>
+            <a:srgbClr val="1A1A2E"/>
+          </a:solidFill>
+          <a:ln w="12700">
+            <a:solidFill>
+              <a:srgbClr val="2C2C3A"/>
+            </a:solidFill>
+          </a:ln>
+          <a:effectLst/>
+        </p:spPr>
+        <p:style>
+          <a:lnRef idx="1">
+            <a:schemeClr val="accent1"/>
+          </a:lnRef>
+          <a:fillRef idx="3">
+            <a:schemeClr val="accent1"/>
+          </a:fillRef>
+          <a:effectRef idx="2">
+            <a:schemeClr val="accent1"/>
+          </a:effectRef>
+          <a:fontRef idx="minor">
+            <a:schemeClr val="lt1"/>
+          </a:fontRef>
+        </p:style>
+        <p:txBody>
+          <a:bodyPr rtlCol="0" anchor="ctr"/>
+          <a:lstStyle/>
+          <a:p>
+            <a:pPr algn="ctr"/>
+          </a:p>
+        </p:txBody>
+      </p:sp>
+      <p:sp>
+        <p:nvSpPr>
+          <p:cNvPr id="9" name="Rounded Rectangle 8"/>
+          <p:cNvSpPr/>
+          <p:nvPr/>
+        </p:nvSpPr>
+        <p:spPr>
+          <a:xfrm>
+            <a:off x="6629400" y="2606039"/>
+            <a:ext cx="4617720" cy="486460"/>
+          </a:xfrm>
+          <a:prstGeom prst="roundRect">
+            <a:avLst/>
+          </a:prstGeom>
+          <a:solidFill>
+            <a:srgbClr val="00BCEB"/>
+          </a:solidFill>
+          <a:ln>
+            <a:noFill/>
+          </a:ln>
+          <a:effectLst/>
+        </p:spPr>
+        <p:style>
+          <a:lnRef idx="1">
+            <a:schemeClr val="accent1"/>
+          </a:lnRef>
+          <a:fillRef idx="3">
+            <a:schemeClr val="accent1"/>
+          </a:fillRef>
+          <a:effectRef idx="2">
+            <a:schemeClr val="accent1"/>
+          </a:effectRef>
+          <a:fontRef idx="minor">
+            <a:schemeClr val="lt1"/>
+          </a:fontRef>
+        </p:style>
+        <p:txBody>
+          <a:bodyPr rtlCol="0" anchor="ctr" wrap="square" lIns="45720" rIns="45720" tIns="18288" bIns="18288"/>
+          <a:lstStyle/>
+          <a:p>
+            <a:pPr algn="ctr"/>
+            <a:r>
+              <a:rPr sz="1200" b="1">
+                <a:solidFill>
+                  <a:srgbClr val="101014"/>
+                </a:solidFill>
+                <a:latin typeface="Calibri"/>
+              </a:rPr>
+              <a:t>Sense</a:t>
+            </a:r>
+          </a:p>
+        </p:txBody>
+      </p:sp>
+      <p:sp>
+        <p:nvSpPr>
+          <p:cNvPr id="10" name="Down Arrow 9"/>
+          <p:cNvSpPr/>
+          <p:nvPr/>
+        </p:nvSpPr>
+        <p:spPr>
+          <a:xfrm>
+            <a:off x="8791955" y="3110788"/>
+            <a:ext cx="292608" cy="192024"/>
+          </a:xfrm>
+          <a:prstGeom prst="downArrow">
+            <a:avLst/>
+          </a:prstGeom>
+          <a:solidFill>
+            <a:srgbClr val="00BCEB"/>
+          </a:solidFill>
+          <a:ln>
+            <a:noFill/>
+          </a:ln>
+          <a:effectLst/>
+        </p:spPr>
+        <p:style>
+          <a:lnRef idx="1">
+            <a:schemeClr val="accent1"/>
+          </a:lnRef>
+          <a:fillRef idx="3">
+            <a:schemeClr val="accent1"/>
+          </a:fillRef>
+          <a:effectRef idx="2">
+            <a:schemeClr val="accent1"/>
+          </a:effectRef>
+          <a:fontRef idx="minor">
+            <a:schemeClr val="lt1"/>
+          </a:fontRef>
+        </p:style>
+        <p:txBody>
+          <a:bodyPr rtlCol="0" anchor="ctr"/>
+          <a:lstStyle/>
+          <a:p>
+            <a:pPr algn="ctr"/>
+          </a:p>
+        </p:txBody>
+      </p:sp>
+      <p:sp>
+        <p:nvSpPr>
+          <p:cNvPr id="11" name="Rounded Rectangle 10"/>
+          <p:cNvSpPr/>
+          <p:nvPr/>
+        </p:nvSpPr>
+        <p:spPr>
+          <a:xfrm>
+            <a:off x="6629400" y="3330244"/>
+            <a:ext cx="4617720" cy="486460"/>
+          </a:xfrm>
+          <a:prstGeom prst="roundRect">
+            <a:avLst/>
+          </a:prstGeom>
+          <a:solidFill>
+            <a:srgbClr val="00BCEB"/>
+          </a:solidFill>
+          <a:ln>
+            <a:noFill/>
+          </a:ln>
+          <a:effectLst/>
+        </p:spPr>
+        <p:style>
+          <a:lnRef idx="1">
+            <a:schemeClr val="accent1"/>
+          </a:lnRef>
+          <a:fillRef idx="3">
+            <a:schemeClr val="accent1"/>
+          </a:fillRef>
+          <a:effectRef idx="2">
+            <a:schemeClr val="accent1"/>
+          </a:effectRef>
+          <a:fontRef idx="minor">
+            <a:schemeClr val="lt1"/>
+          </a:fontRef>
+        </p:style>
+        <p:txBody>
+          <a:bodyPr rtlCol="0" anchor="ctr" wrap="square" lIns="45720" rIns="45720" tIns="18288" bIns="18288"/>
+          <a:lstStyle/>
+          <a:p>
+            <a:pPr algn="ctr"/>
+            <a:r>
+              <a:rPr sz="1200" b="1">
+                <a:solidFill>
+                  <a:srgbClr val="101014"/>
+                </a:solidFill>
+                <a:latin typeface="Calibri"/>
+              </a:rPr>
+              <a:t>Connect</a:t>
+            </a:r>
+          </a:p>
+        </p:txBody>
+      </p:sp>
+      <p:sp>
+        <p:nvSpPr>
+          <p:cNvPr id="12" name="Down Arrow 11"/>
+          <p:cNvSpPr/>
+          <p:nvPr/>
+        </p:nvSpPr>
+        <p:spPr>
+          <a:xfrm>
+            <a:off x="8791955" y="3834993"/>
+            <a:ext cx="292608" cy="192024"/>
+          </a:xfrm>
+          <a:prstGeom prst="downArrow">
+            <a:avLst/>
+          </a:prstGeom>
+          <a:solidFill>
+            <a:srgbClr val="00BCEB"/>
+          </a:solidFill>
+          <a:ln>
+            <a:noFill/>
+          </a:ln>
+          <a:effectLst/>
+        </p:spPr>
+        <p:style>
+          <a:lnRef idx="1">
+            <a:schemeClr val="accent1"/>
+          </a:lnRef>
+          <a:fillRef idx="3">
+            <a:schemeClr val="accent1"/>
+          </a:fillRef>
+          <a:effectRef idx="2">
+            <a:schemeClr val="accent1"/>
+          </a:effectRef>
+          <a:fontRef idx="minor">
+            <a:schemeClr val="lt1"/>
+          </a:fontRef>
+        </p:style>
+        <p:txBody>
+          <a:bodyPr rtlCol="0" anchor="ctr"/>
+          <a:lstStyle/>
+          <a:p>
+            <a:pPr algn="ctr"/>
+          </a:p>
+        </p:txBody>
+      </p:sp>
+      <p:sp>
+        <p:nvSpPr>
+          <p:cNvPr id="13" name="Rounded Rectangle 12"/>
+          <p:cNvSpPr/>
+          <p:nvPr/>
+        </p:nvSpPr>
+        <p:spPr>
+          <a:xfrm>
+            <a:off x="6629400" y="4054449"/>
+            <a:ext cx="4617720" cy="486460"/>
+          </a:xfrm>
+          <a:prstGeom prst="roundRect">
+            <a:avLst/>
+          </a:prstGeom>
+          <a:solidFill>
+            <a:srgbClr val="00BCEB"/>
+          </a:solidFill>
+          <a:ln>
+            <a:noFill/>
+          </a:ln>
+          <a:effectLst/>
+        </p:spPr>
+        <p:style>
+          <a:lnRef idx="1">
+            <a:schemeClr val="accent1"/>
+          </a:lnRef>
+          <a:fillRef idx="3">
+            <a:schemeClr val="accent1"/>
+          </a:fillRef>
+          <a:effectRef idx="2">
+            <a:schemeClr val="accent1"/>
+          </a:effectRef>
+          <a:fontRef idx="minor">
+            <a:schemeClr val="lt1"/>
+          </a:fontRef>
+        </p:style>
+        <p:txBody>
+          <a:bodyPr rtlCol="0" anchor="ctr" wrap="square" lIns="45720" rIns="45720" tIns="18288" bIns="18288"/>
+          <a:lstStyle/>
+          <a:p>
+            <a:pPr algn="ctr"/>
+            <a:r>
+              <a:rPr sz="1200" b="1">
+                <a:solidFill>
+                  <a:srgbClr val="101014"/>
+                </a:solidFill>
+                <a:latin typeface="Calibri"/>
+              </a:rPr>
+              <a:t>Secure</a:t>
+            </a:r>
+          </a:p>
+        </p:txBody>
+      </p:sp>
+      <p:sp>
+        <p:nvSpPr>
+          <p:cNvPr id="14" name="Down Arrow 13"/>
+          <p:cNvSpPr/>
+          <p:nvPr/>
+        </p:nvSpPr>
+        <p:spPr>
+          <a:xfrm>
+            <a:off x="8791955" y="4559198"/>
+            <a:ext cx="292608" cy="192024"/>
+          </a:xfrm>
+          <a:prstGeom prst="downArrow">
+            <a:avLst/>
+          </a:prstGeom>
+          <a:solidFill>
+            <a:srgbClr val="00BCEB"/>
+          </a:solidFill>
+          <a:ln>
+            <a:noFill/>
+          </a:ln>
+          <a:effectLst/>
+        </p:spPr>
+        <p:style>
+          <a:lnRef idx="1">
+            <a:schemeClr val="accent1"/>
+          </a:lnRef>
+          <a:fillRef idx="3">
+            <a:schemeClr val="accent1"/>
+          </a:fillRef>
+          <a:effectRef idx="2">
+            <a:schemeClr val="accent1"/>
+          </a:effectRef>
+          <a:fontRef idx="minor">
+            <a:schemeClr val="lt1"/>
+          </a:fontRef>
+        </p:style>
+        <p:txBody>
+          <a:bodyPr rtlCol="0" anchor="ctr"/>
+          <a:lstStyle/>
+          <a:p>
+            <a:pPr algn="ctr"/>
+          </a:p>
+        </p:txBody>
+      </p:sp>
+      <p:sp>
+        <p:nvSpPr>
+          <p:cNvPr id="15" name="Rounded Rectangle 14"/>
+          <p:cNvSpPr/>
+          <p:nvPr/>
+        </p:nvSpPr>
+        <p:spPr>
+          <a:xfrm>
+            <a:off x="6629400" y="4778654"/>
+            <a:ext cx="4617720" cy="486460"/>
+          </a:xfrm>
+          <a:prstGeom prst="roundRect">
+            <a:avLst/>
+          </a:prstGeom>
+          <a:solidFill>
+            <a:srgbClr val="00BCEB"/>
+          </a:solidFill>
+          <a:ln>
+            <a:noFill/>
+          </a:ln>
+          <a:effectLst/>
+        </p:spPr>
+        <p:style>
+          <a:lnRef idx="1">
+            <a:schemeClr val="accent1"/>
+          </a:lnRef>
+          <a:fillRef idx="3">
+            <a:schemeClr val="accent1"/>
+          </a:fillRef>
+          <a:effectRef idx="2">
+            <a:schemeClr val="accent1"/>
+          </a:effectRef>
+          <a:fontRef idx="minor">
+            <a:schemeClr val="lt1"/>
+          </a:fontRef>
+        </p:style>
+        <p:txBody>
+          <a:bodyPr rtlCol="0" anchor="ctr" wrap="square" lIns="45720" rIns="45720" tIns="18288" bIns="18288"/>
+          <a:lstStyle/>
+          <a:p>
+            <a:pPr algn="ctr"/>
+            <a:r>
+              <a:rPr sz="1200" b="1">
+                <a:solidFill>
+                  <a:srgbClr val="101014"/>
+                </a:solidFill>
+                <a:latin typeface="Calibri"/>
+              </a:rPr>
+              <a:t>Understand</a:t>
+            </a:r>
+          </a:p>
+        </p:txBody>
+      </p:sp>
+      <p:sp>
+        <p:nvSpPr>
+          <p:cNvPr id="16" name="Down Arrow 15"/>
+          <p:cNvSpPr/>
+          <p:nvPr/>
+        </p:nvSpPr>
+        <p:spPr>
+          <a:xfrm>
+            <a:off x="8791955" y="5283403"/>
+            <a:ext cx="292608" cy="192024"/>
+          </a:xfrm>
+          <a:prstGeom prst="downArrow">
+            <a:avLst/>
+          </a:prstGeom>
+          <a:solidFill>
+            <a:srgbClr val="00BCEB"/>
+          </a:solidFill>
+          <a:ln>
+            <a:noFill/>
+          </a:ln>
+          <a:effectLst/>
+        </p:spPr>
+        <p:style>
+          <a:lnRef idx="1">
+            <a:schemeClr val="accent1"/>
+          </a:lnRef>
+          <a:fillRef idx="3">
+            <a:schemeClr val="accent1"/>
+          </a:fillRef>
+          <a:effectRef idx="2">
+            <a:schemeClr val="accent1"/>
+          </a:effectRef>
+          <a:fontRef idx="minor">
+            <a:schemeClr val="lt1"/>
+          </a:fontRef>
+        </p:style>
+        <p:txBody>
+          <a:bodyPr rtlCol="0" anchor="ctr"/>
+          <a:lstStyle/>
+          <a:p>
+            <a:pPr algn="ctr"/>
+          </a:p>
+        </p:txBody>
+      </p:sp>
+      <p:sp>
+        <p:nvSpPr>
+          <p:cNvPr id="17" name="Rounded Rectangle 16"/>
+          <p:cNvSpPr/>
+          <p:nvPr/>
+        </p:nvSpPr>
+        <p:spPr>
+          <a:xfrm>
+            <a:off x="6629400" y="5502859"/>
+            <a:ext cx="4617720" cy="486460"/>
+          </a:xfrm>
+          <a:prstGeom prst="roundRect">
+            <a:avLst/>
+          </a:prstGeom>
+          <a:solidFill>
+            <a:srgbClr val="00BCEB"/>
+          </a:solidFill>
+          <a:ln>
+            <a:noFill/>
+          </a:ln>
+          <a:effectLst/>
+        </p:spPr>
+        <p:style>
+          <a:lnRef idx="1">
+            <a:schemeClr val="accent1"/>
+          </a:lnRef>
+          <a:fillRef idx="3">
+            <a:schemeClr val="accent1"/>
+          </a:fillRef>
+          <a:effectRef idx="2">
+            <a:schemeClr val="accent1"/>
+          </a:effectRef>
+          <a:fontRef idx="minor">
+            <a:schemeClr val="lt1"/>
+          </a:fontRef>
+        </p:style>
+        <p:txBody>
+          <a:bodyPr rtlCol="0" anchor="ctr" wrap="square" lIns="45720" rIns="45720" tIns="18288" bIns="18288"/>
+          <a:lstStyle/>
+          <a:p>
+            <a:pPr algn="ctr"/>
+            <a:r>
+              <a:rPr sz="1200" b="1">
+                <a:solidFill>
+                  <a:srgbClr val="101014"/>
+                </a:solidFill>
+                <a:latin typeface="Calibri"/>
+              </a:rPr>
+              <a:t>Act</a:t>
+            </a:r>
+          </a:p>
+        </p:txBody>
+      </p:sp>
+      <p:sp>
+        <p:nvSpPr>
+          <p:cNvPr id="18" name="TextBox 17"/>
           <p:cNvSpPr txBox="1"/>
           <p:nvPr/>
         </p:nvSpPr>
@@ -11167,7 +14017,7 @@
         <p:spPr>
           <a:xfrm>
             <a:off x="548640" y="868680"/>
-            <a:ext cx="1280160" cy="50800"/>
+            <a:ext cx="1280160" cy="50292"/>
           </a:xfrm>
           <a:prstGeom prst="rect">
             <a:avLst/>
@@ -11178,6 +14028,7 @@
           <a:ln>
             <a:noFill/>
           </a:ln>
+          <a:effectLst/>
         </p:spPr>
         <p:style>
           <a:lnRef idx="1">
@@ -11229,7 +14080,7 @@
               </a:spcAft>
             </a:pPr>
             <a:r>
-              <a:rPr sz="2800" b="1">
+              <a:rPr sz="2700" b="1">
                 <a:solidFill>
                   <a:srgbClr val="F2F4F8"/>
                 </a:solidFill>
@@ -11249,7 +14100,7 @@
         <p:spPr>
           <a:xfrm>
             <a:off x="548640" y="2331720"/>
-            <a:ext cx="11064240" cy="3931920"/>
+            <a:ext cx="5486400" cy="3931920"/>
           </a:xfrm>
           <a:prstGeom prst="rect">
             <a:avLst/>
@@ -11262,6 +14113,7 @@
               <a:srgbClr val="2C2C3A"/>
             </a:solidFill>
           </a:ln>
+          <a:effectLst/>
         </p:spPr>
         <p:style>
           <a:lnRef idx="1">
@@ -11293,8 +14145,8 @@
         </p:nvSpPr>
         <p:spPr>
           <a:xfrm>
-            <a:off x="914400" y="2560320"/>
-            <a:ext cx="10332720" cy="3566160"/>
+            <a:off x="822960" y="2542032"/>
+            <a:ext cx="4937760" cy="3566160"/>
           </a:xfrm>
           <a:prstGeom prst="rect">
             <a:avLst/>
@@ -11309,11 +14161,11 @@
           <a:p>
             <a:pPr algn="l">
               <a:spcAft>
-                <a:spcPts val="1200"/>
+                <a:spcPts val="1100"/>
               </a:spcAft>
             </a:pPr>
             <a:r>
-              <a:rPr sz="1800" b="1">
+              <a:rPr sz="1600" b="1">
                 <a:solidFill>
                   <a:srgbClr val="00BCEB"/>
                 </a:solidFill>
@@ -11322,23 +14174,23 @@
               <a:t>•  </a:t>
             </a:r>
             <a:r>
-              <a:rPr sz="1800" b="0">
+              <a:rPr sz="1600" b="0">
                 <a:solidFill>
                   <a:srgbClr val="F2F4F8"/>
                 </a:solidFill>
                 <a:latin typeface="Calibri"/>
               </a:rPr>
-              <a:t>Owns the CxO conversation (risk, resilience, cost)</a:t>
+              <a:t>Owns the CxO outcome conversation</a:t>
             </a:r>
           </a:p>
           <a:p>
             <a:pPr algn="l">
               <a:spcAft>
-                <a:spcPts val="1200"/>
+                <a:spcPts val="1100"/>
               </a:spcAft>
             </a:pPr>
             <a:r>
-              <a:rPr sz="1800" b="1">
+              <a:rPr sz="1600" b="1">
                 <a:solidFill>
                   <a:srgbClr val="00BCEB"/>
                 </a:solidFill>
@@ -11347,23 +14199,23 @@
               <a:t>•  </a:t>
             </a:r>
             <a:r>
-              <a:rPr sz="1800" b="0">
+              <a:rPr sz="1600" b="0">
                 <a:solidFill>
                   <a:srgbClr val="F2F4F8"/>
                 </a:solidFill>
                 <a:latin typeface="Calibri"/>
               </a:rPr>
-              <a:t>Architects across BUs; specialists detail and close</a:t>
+              <a:t>Architects across BUs; specialists close</a:t>
             </a:r>
           </a:p>
           <a:p>
             <a:pPr algn="l">
               <a:spcAft>
-                <a:spcPts val="1200"/>
+                <a:spcPts val="1100"/>
               </a:spcAft>
             </a:pPr>
             <a:r>
-              <a:rPr sz="1800" b="1">
+              <a:rPr sz="1600" b="1">
                 <a:solidFill>
                   <a:srgbClr val="00BCEB"/>
                 </a:solidFill>
@@ -11372,23 +14224,23 @@
               <a:t>•  </a:t>
             </a:r>
             <a:r>
-              <a:rPr sz="1800" b="0">
+              <a:rPr sz="1600" b="0">
                 <a:solidFill>
                   <a:srgbClr val="F2F4F8"/>
                 </a:solidFill>
                 <a:latin typeface="Calibri"/>
               </a:rPr>
-              <a:t>Leads with vertical credibility (NIS2, DORA, HIPAA, NERC-CIP)</a:t>
+              <a:t>Vertical-credible (NIS2/DORA/HIPAA)</a:t>
             </a:r>
           </a:p>
           <a:p>
             <a:pPr algn="l">
               <a:spcAft>
-                <a:spcPts val="1200"/>
+                <a:spcPts val="1100"/>
               </a:spcAft>
             </a:pPr>
             <a:r>
-              <a:rPr sz="1800" b="1">
+              <a:rPr sz="1600" b="1">
                 <a:solidFill>
                   <a:srgbClr val="00BCEB"/>
                 </a:solidFill>
@@ -11397,20 +14249,574 @@
               <a:t>•  </a:t>
             </a:r>
             <a:r>
-              <a:rPr sz="1800" b="0">
+              <a:rPr sz="1600" b="0">
                 <a:solidFill>
                   <a:srgbClr val="F2F4F8"/>
                 </a:solidFill>
                 <a:latin typeface="Calibri"/>
               </a:rPr>
-              <a:t>Orchestrates — NOT another product-overlay SE team</a:t>
-            </a:r>
-          </a:p>
-        </p:txBody>
-      </p:sp>
-      <p:sp>
-        <p:nvSpPr>
-          <p:cNvPr id="8" name="TextBox 7"/>
+              <a:t>Orchestrates — not another overlay SE</a:t>
+            </a:r>
+          </a:p>
+        </p:txBody>
+      </p:sp>
+      <p:sp>
+        <p:nvSpPr>
+          <p:cNvPr id="8" name="Rectangle 7"/>
+          <p:cNvSpPr/>
+          <p:nvPr/>
+        </p:nvSpPr>
+        <p:spPr>
+          <a:xfrm>
+            <a:off x="6263640" y="2331720"/>
+            <a:ext cx="5349240" cy="3931920"/>
+          </a:xfrm>
+          <a:prstGeom prst="rect">
+            <a:avLst/>
+          </a:prstGeom>
+          <a:solidFill>
+            <a:srgbClr val="1A1A2E"/>
+          </a:solidFill>
+          <a:ln w="12700">
+            <a:solidFill>
+              <a:srgbClr val="2C2C3A"/>
+            </a:solidFill>
+          </a:ln>
+          <a:effectLst/>
+        </p:spPr>
+        <p:style>
+          <a:lnRef idx="1">
+            <a:schemeClr val="accent1"/>
+          </a:lnRef>
+          <a:fillRef idx="3">
+            <a:schemeClr val="accent1"/>
+          </a:fillRef>
+          <a:effectRef idx="2">
+            <a:schemeClr val="accent1"/>
+          </a:effectRef>
+          <a:fontRef idx="minor">
+            <a:schemeClr val="lt1"/>
+          </a:fontRef>
+        </p:style>
+        <p:txBody>
+          <a:bodyPr rtlCol="0" anchor="ctr"/>
+          <a:lstStyle/>
+          <a:p>
+            <a:pPr algn="ctr"/>
+          </a:p>
+        </p:txBody>
+      </p:sp>
+      <p:cxnSp>
+        <p:nvCxnSpPr>
+          <p:cNvPr id="9" name="Connector 8"/>
+          <p:cNvCxnSpPr/>
+          <p:nvPr/>
+        </p:nvCxnSpPr>
+        <p:spPr>
+          <a:xfrm flipV="1">
+            <a:off x="8938259" y="2971799"/>
+            <a:ext cx="0" cy="1325880"/>
+          </a:xfrm>
+          <a:prstGeom prst="line">
+            <a:avLst/>
+          </a:prstGeom>
+          <a:ln w="15875">
+            <a:solidFill>
+              <a:srgbClr val="00A4FD"/>
+            </a:solidFill>
+          </a:ln>
+          <a:effectLst/>
+        </p:spPr>
+        <p:style>
+          <a:lnRef idx="2">
+            <a:schemeClr val="accent1"/>
+          </a:lnRef>
+          <a:fillRef idx="0">
+            <a:schemeClr val="accent1"/>
+          </a:fillRef>
+          <a:effectRef idx="1">
+            <a:schemeClr val="accent1"/>
+          </a:effectRef>
+          <a:fontRef idx="minor">
+            <a:schemeClr val="tx1"/>
+          </a:fontRef>
+        </p:style>
+      </p:cxnSp>
+      <p:cxnSp>
+        <p:nvCxnSpPr>
+          <p:cNvPr id="10" name="Connector 9"/>
+          <p:cNvCxnSpPr/>
+          <p:nvPr/>
+        </p:nvCxnSpPr>
+        <p:spPr>
+          <a:xfrm flipV="1">
+            <a:off x="8938259" y="3887960"/>
+            <a:ext cx="1695810" cy="409719"/>
+          </a:xfrm>
+          <a:prstGeom prst="line">
+            <a:avLst/>
+          </a:prstGeom>
+          <a:ln w="15875">
+            <a:solidFill>
+              <a:srgbClr val="00A4FD"/>
+            </a:solidFill>
+          </a:ln>
+          <a:effectLst/>
+        </p:spPr>
+        <p:style>
+          <a:lnRef idx="2">
+            <a:schemeClr val="accent1"/>
+          </a:lnRef>
+          <a:fillRef idx="0">
+            <a:schemeClr val="accent1"/>
+          </a:fillRef>
+          <a:effectRef idx="1">
+            <a:schemeClr val="accent1"/>
+          </a:effectRef>
+          <a:fontRef idx="minor">
+            <a:schemeClr val="tx1"/>
+          </a:fontRef>
+        </p:style>
+      </p:cxnSp>
+      <p:cxnSp>
+        <p:nvCxnSpPr>
+          <p:cNvPr id="11" name="Connector 10"/>
+          <p:cNvCxnSpPr/>
+          <p:nvPr/>
+        </p:nvCxnSpPr>
+        <p:spPr>
+          <a:xfrm>
+            <a:off x="8938259" y="4297679"/>
+            <a:ext cx="1048069" cy="1072660"/>
+          </a:xfrm>
+          <a:prstGeom prst="line">
+            <a:avLst/>
+          </a:prstGeom>
+          <a:ln w="15875">
+            <a:solidFill>
+              <a:srgbClr val="00A4FD"/>
+            </a:solidFill>
+          </a:ln>
+          <a:effectLst/>
+        </p:spPr>
+        <p:style>
+          <a:lnRef idx="2">
+            <a:schemeClr val="accent1"/>
+          </a:lnRef>
+          <a:fillRef idx="0">
+            <a:schemeClr val="accent1"/>
+          </a:fillRef>
+          <a:effectRef idx="1">
+            <a:schemeClr val="accent1"/>
+          </a:effectRef>
+          <a:fontRef idx="minor">
+            <a:schemeClr val="tx1"/>
+          </a:fontRef>
+        </p:style>
+      </p:cxnSp>
+      <p:cxnSp>
+        <p:nvCxnSpPr>
+          <p:cNvPr id="12" name="Connector 11"/>
+          <p:cNvCxnSpPr/>
+          <p:nvPr/>
+        </p:nvCxnSpPr>
+        <p:spPr>
+          <a:xfrm flipH="1">
+            <a:off x="7890191" y="4297679"/>
+            <a:ext cx="1048068" cy="1072660"/>
+          </a:xfrm>
+          <a:prstGeom prst="line">
+            <a:avLst/>
+          </a:prstGeom>
+          <a:ln w="15875">
+            <a:solidFill>
+              <a:srgbClr val="00A4FD"/>
+            </a:solidFill>
+          </a:ln>
+          <a:effectLst/>
+        </p:spPr>
+        <p:style>
+          <a:lnRef idx="2">
+            <a:schemeClr val="accent1"/>
+          </a:lnRef>
+          <a:fillRef idx="0">
+            <a:schemeClr val="accent1"/>
+          </a:fillRef>
+          <a:effectRef idx="1">
+            <a:schemeClr val="accent1"/>
+          </a:effectRef>
+          <a:fontRef idx="minor">
+            <a:schemeClr val="tx1"/>
+          </a:fontRef>
+        </p:style>
+      </p:cxnSp>
+      <p:cxnSp>
+        <p:nvCxnSpPr>
+          <p:cNvPr id="13" name="Connector 12"/>
+          <p:cNvCxnSpPr/>
+          <p:nvPr/>
+        </p:nvCxnSpPr>
+        <p:spPr>
+          <a:xfrm flipH="1" flipV="1">
+            <a:off x="7242450" y="3887960"/>
+            <a:ext cx="1695809" cy="409719"/>
+          </a:xfrm>
+          <a:prstGeom prst="line">
+            <a:avLst/>
+          </a:prstGeom>
+          <a:ln w="15875">
+            <a:solidFill>
+              <a:srgbClr val="00A4FD"/>
+            </a:solidFill>
+          </a:ln>
+          <a:effectLst/>
+        </p:spPr>
+        <p:style>
+          <a:lnRef idx="2">
+            <a:schemeClr val="accent1"/>
+          </a:lnRef>
+          <a:fillRef idx="0">
+            <a:schemeClr val="accent1"/>
+          </a:fillRef>
+          <a:effectRef idx="1">
+            <a:schemeClr val="accent1"/>
+          </a:effectRef>
+          <a:fontRef idx="minor">
+            <a:schemeClr val="tx1"/>
+          </a:fontRef>
+        </p:style>
+      </p:cxnSp>
+      <p:sp>
+        <p:nvSpPr>
+          <p:cNvPr id="14" name="Rounded Rectangle 13"/>
+          <p:cNvSpPr/>
+          <p:nvPr/>
+        </p:nvSpPr>
+        <p:spPr>
+          <a:xfrm>
+            <a:off x="8275319" y="2720339"/>
+            <a:ext cx="1325880" cy="502920"/>
+          </a:xfrm>
+          <a:prstGeom prst="roundRect">
+            <a:avLst/>
+          </a:prstGeom>
+          <a:solidFill>
+            <a:srgbClr val="24243C"/>
+          </a:solidFill>
+          <a:ln w="9525">
+            <a:solidFill>
+              <a:srgbClr val="9AA3B2"/>
+            </a:solidFill>
+          </a:ln>
+          <a:effectLst/>
+        </p:spPr>
+        <p:style>
+          <a:lnRef idx="1">
+            <a:schemeClr val="accent1"/>
+          </a:lnRef>
+          <a:fillRef idx="3">
+            <a:schemeClr val="accent1"/>
+          </a:fillRef>
+          <a:effectRef idx="2">
+            <a:schemeClr val="accent1"/>
+          </a:effectRef>
+          <a:fontRef idx="minor">
+            <a:schemeClr val="lt1"/>
+          </a:fontRef>
+        </p:style>
+        <p:txBody>
+          <a:bodyPr rtlCol="0" anchor="ctr" wrap="square" lIns="45720" rIns="45720" tIns="18288" bIns="18288"/>
+          <a:lstStyle/>
+          <a:p>
+            <a:pPr algn="ctr"/>
+            <a:r>
+              <a:rPr sz="1100" b="0">
+                <a:solidFill>
+                  <a:srgbClr val="F2F4F8"/>
+                </a:solidFill>
+                <a:latin typeface="Calibri"/>
+              </a:rPr>
+              <a:t>CxO</a:t>
+            </a:r>
+          </a:p>
+        </p:txBody>
+      </p:sp>
+      <p:sp>
+        <p:nvSpPr>
+          <p:cNvPr id="15" name="Rounded Rectangle 14"/>
+          <p:cNvSpPr/>
+          <p:nvPr/>
+        </p:nvSpPr>
+        <p:spPr>
+          <a:xfrm>
+            <a:off x="9971129" y="3636500"/>
+            <a:ext cx="1325880" cy="502920"/>
+          </a:xfrm>
+          <a:prstGeom prst="roundRect">
+            <a:avLst/>
+          </a:prstGeom>
+          <a:solidFill>
+            <a:srgbClr val="24243C"/>
+          </a:solidFill>
+          <a:ln w="9525">
+            <a:solidFill>
+              <a:srgbClr val="9AA3B2"/>
+            </a:solidFill>
+          </a:ln>
+          <a:effectLst/>
+        </p:spPr>
+        <p:style>
+          <a:lnRef idx="1">
+            <a:schemeClr val="accent1"/>
+          </a:lnRef>
+          <a:fillRef idx="3">
+            <a:schemeClr val="accent1"/>
+          </a:fillRef>
+          <a:effectRef idx="2">
+            <a:schemeClr val="accent1"/>
+          </a:effectRef>
+          <a:fontRef idx="minor">
+            <a:schemeClr val="lt1"/>
+          </a:fontRef>
+        </p:style>
+        <p:txBody>
+          <a:bodyPr rtlCol="0" anchor="ctr" wrap="square" lIns="45720" rIns="45720" tIns="18288" bIns="18288"/>
+          <a:lstStyle/>
+          <a:p>
+            <a:pPr algn="ctr"/>
+            <a:r>
+              <a:rPr sz="1100" b="0">
+                <a:solidFill>
+                  <a:srgbClr val="F2F4F8"/>
+                </a:solidFill>
+                <a:latin typeface="Calibri"/>
+              </a:rPr>
+              <a:t>Networking</a:t>
+            </a:r>
+          </a:p>
+        </p:txBody>
+      </p:sp>
+      <p:sp>
+        <p:nvSpPr>
+          <p:cNvPr id="16" name="Rounded Rectangle 15"/>
+          <p:cNvSpPr/>
+          <p:nvPr/>
+        </p:nvSpPr>
+        <p:spPr>
+          <a:xfrm>
+            <a:off x="9323388" y="5118879"/>
+            <a:ext cx="1325880" cy="502920"/>
+          </a:xfrm>
+          <a:prstGeom prst="roundRect">
+            <a:avLst/>
+          </a:prstGeom>
+          <a:solidFill>
+            <a:srgbClr val="24243C"/>
+          </a:solidFill>
+          <a:ln w="9525">
+            <a:solidFill>
+              <a:srgbClr val="9AA3B2"/>
+            </a:solidFill>
+          </a:ln>
+          <a:effectLst/>
+        </p:spPr>
+        <p:style>
+          <a:lnRef idx="1">
+            <a:schemeClr val="accent1"/>
+          </a:lnRef>
+          <a:fillRef idx="3">
+            <a:schemeClr val="accent1"/>
+          </a:fillRef>
+          <a:effectRef idx="2">
+            <a:schemeClr val="accent1"/>
+          </a:effectRef>
+          <a:fontRef idx="minor">
+            <a:schemeClr val="lt1"/>
+          </a:fontRef>
+        </p:style>
+        <p:txBody>
+          <a:bodyPr rtlCol="0" anchor="ctr" wrap="square" lIns="45720" rIns="45720" tIns="18288" bIns="18288"/>
+          <a:lstStyle/>
+          <a:p>
+            <a:pPr algn="ctr"/>
+            <a:r>
+              <a:rPr sz="1100" b="0">
+                <a:solidFill>
+                  <a:srgbClr val="F2F4F8"/>
+                </a:solidFill>
+                <a:latin typeface="Calibri"/>
+              </a:rPr>
+              <a:t>Splunk</a:t>
+            </a:r>
+          </a:p>
+        </p:txBody>
+      </p:sp>
+      <p:sp>
+        <p:nvSpPr>
+          <p:cNvPr id="17" name="Rounded Rectangle 16"/>
+          <p:cNvSpPr/>
+          <p:nvPr/>
+        </p:nvSpPr>
+        <p:spPr>
+          <a:xfrm>
+            <a:off x="7227251" y="5118879"/>
+            <a:ext cx="1325880" cy="502920"/>
+          </a:xfrm>
+          <a:prstGeom prst="roundRect">
+            <a:avLst/>
+          </a:prstGeom>
+          <a:solidFill>
+            <a:srgbClr val="24243C"/>
+          </a:solidFill>
+          <a:ln w="9525">
+            <a:solidFill>
+              <a:srgbClr val="9AA3B2"/>
+            </a:solidFill>
+          </a:ln>
+          <a:effectLst/>
+        </p:spPr>
+        <p:style>
+          <a:lnRef idx="1">
+            <a:schemeClr val="accent1"/>
+          </a:lnRef>
+          <a:fillRef idx="3">
+            <a:schemeClr val="accent1"/>
+          </a:fillRef>
+          <a:effectRef idx="2">
+            <a:schemeClr val="accent1"/>
+          </a:effectRef>
+          <a:fontRef idx="minor">
+            <a:schemeClr val="lt1"/>
+          </a:fontRef>
+        </p:style>
+        <p:txBody>
+          <a:bodyPr rtlCol="0" anchor="ctr" wrap="square" lIns="45720" rIns="45720" tIns="18288" bIns="18288"/>
+          <a:lstStyle/>
+          <a:p>
+            <a:pPr algn="ctr"/>
+            <a:r>
+              <a:rPr sz="1100" b="0">
+                <a:solidFill>
+                  <a:srgbClr val="F2F4F8"/>
+                </a:solidFill>
+                <a:latin typeface="Calibri"/>
+              </a:rPr>
+              <a:t>Security</a:t>
+            </a:r>
+          </a:p>
+        </p:txBody>
+      </p:sp>
+      <p:sp>
+        <p:nvSpPr>
+          <p:cNvPr id="18" name="Rounded Rectangle 17"/>
+          <p:cNvSpPr/>
+          <p:nvPr/>
+        </p:nvSpPr>
+        <p:spPr>
+          <a:xfrm>
+            <a:off x="6579510" y="3636500"/>
+            <a:ext cx="1325880" cy="502920"/>
+          </a:xfrm>
+          <a:prstGeom prst="roundRect">
+            <a:avLst/>
+          </a:prstGeom>
+          <a:solidFill>
+            <a:srgbClr val="24243C"/>
+          </a:solidFill>
+          <a:ln w="9525">
+            <a:solidFill>
+              <a:srgbClr val="9AA3B2"/>
+            </a:solidFill>
+          </a:ln>
+          <a:effectLst/>
+        </p:spPr>
+        <p:style>
+          <a:lnRef idx="1">
+            <a:schemeClr val="accent1"/>
+          </a:lnRef>
+          <a:fillRef idx="3">
+            <a:schemeClr val="accent1"/>
+          </a:fillRef>
+          <a:effectRef idx="2">
+            <a:schemeClr val="accent1"/>
+          </a:effectRef>
+          <a:fontRef idx="minor">
+            <a:schemeClr val="lt1"/>
+          </a:fontRef>
+        </p:style>
+        <p:txBody>
+          <a:bodyPr rtlCol="0" anchor="ctr" wrap="square" lIns="45720" rIns="45720" tIns="18288" bIns="18288"/>
+          <a:lstStyle/>
+          <a:p>
+            <a:pPr algn="ctr"/>
+            <a:r>
+              <a:rPr sz="1100" b="0">
+                <a:solidFill>
+                  <a:srgbClr val="F2F4F8"/>
+                </a:solidFill>
+                <a:latin typeface="Calibri"/>
+              </a:rPr>
+              <a:t>Account Exec</a:t>
+            </a:r>
+          </a:p>
+        </p:txBody>
+      </p:sp>
+      <p:sp>
+        <p:nvSpPr>
+          <p:cNvPr id="19" name="Oval 18"/>
+          <p:cNvSpPr/>
+          <p:nvPr/>
+        </p:nvSpPr>
+        <p:spPr>
+          <a:xfrm>
+            <a:off x="8161019" y="3941063"/>
+            <a:ext cx="1554480" cy="713232"/>
+          </a:xfrm>
+          <a:prstGeom prst="ellipse">
+            <a:avLst/>
+          </a:prstGeom>
+          <a:solidFill>
+            <a:srgbClr val="00BCEB"/>
+          </a:solidFill>
+          <a:ln>
+            <a:noFill/>
+          </a:ln>
+          <a:effectLst/>
+        </p:spPr>
+        <p:style>
+          <a:lnRef idx="1">
+            <a:schemeClr val="accent1"/>
+          </a:lnRef>
+          <a:fillRef idx="3">
+            <a:schemeClr val="accent1"/>
+          </a:fillRef>
+          <a:effectRef idx="2">
+            <a:schemeClr val="accent1"/>
+          </a:effectRef>
+          <a:fontRef idx="minor">
+            <a:schemeClr val="lt1"/>
+          </a:fontRef>
+        </p:style>
+        <p:txBody>
+          <a:bodyPr rtlCol="0" anchor="ctr" wrap="square" lIns="45720" rIns="45720" tIns="18288" bIns="18288"/>
+          <a:lstStyle/>
+          <a:p>
+            <a:pPr algn="ctr"/>
+            <a:r>
+              <a:rPr sz="1400" b="1">
+                <a:solidFill>
+                  <a:srgbClr val="101014"/>
+                </a:solidFill>
+                <a:latin typeface="Calibri"/>
+              </a:rPr>
+              <a:t>Field CTO</a:t>
+            </a:r>
+          </a:p>
+        </p:txBody>
+      </p:sp>
+      <p:sp>
+        <p:nvSpPr>
+          <p:cNvPr id="20" name="TextBox 19"/>
           <p:cNvSpPr txBox="1"/>
           <p:nvPr/>
         </p:nvSpPr>
@@ -11557,7 +14963,7 @@
         <p:spPr>
           <a:xfrm>
             <a:off x="548640" y="868680"/>
-            <a:ext cx="1280160" cy="50800"/>
+            <a:ext cx="1280160" cy="50292"/>
           </a:xfrm>
           <a:prstGeom prst="rect">
             <a:avLst/>
@@ -11568,6 +14974,7 @@
           <a:ln>
             <a:noFill/>
           </a:ln>
+          <a:effectLst/>
         </p:spPr>
         <p:style>
           <a:lnRef idx="1">
@@ -11619,7 +15026,7 @@
               </a:spcAft>
             </a:pPr>
             <a:r>
-              <a:rPr sz="2800" b="1">
+              <a:rPr sz="2700" b="1">
                 <a:solidFill>
                   <a:srgbClr val="F2F4F8"/>
                 </a:solidFill>
@@ -11639,7 +15046,7 @@
         <p:spPr>
           <a:xfrm>
             <a:off x="548640" y="2331720"/>
-            <a:ext cx="11064240" cy="3931920"/>
+            <a:ext cx="5486400" cy="3931920"/>
           </a:xfrm>
           <a:prstGeom prst="rect">
             <a:avLst/>
@@ -11652,6 +15059,7 @@
               <a:srgbClr val="2C2C3A"/>
             </a:solidFill>
           </a:ln>
+          <a:effectLst/>
         </p:spPr>
         <p:style>
           <a:lnRef idx="1">
@@ -11683,8 +15091,8 @@
         </p:nvSpPr>
         <p:spPr>
           <a:xfrm>
-            <a:off x="914400" y="2560320"/>
-            <a:ext cx="10332720" cy="3566160"/>
+            <a:off x="822960" y="2542032"/>
+            <a:ext cx="4937760" cy="3566160"/>
           </a:xfrm>
           <a:prstGeom prst="rect">
             <a:avLst/>
@@ -11699,11 +15107,11 @@
           <a:p>
             <a:pPr algn="l">
               <a:spcAft>
-                <a:spcPts val="1200"/>
+                <a:spcPts val="1100"/>
               </a:spcAft>
             </a:pPr>
             <a:r>
-              <a:rPr sz="1800" b="1">
+              <a:rPr sz="1600" b="1">
                 <a:solidFill>
                   <a:srgbClr val="00BCEB"/>
                 </a:solidFill>
@@ -11712,23 +15120,23 @@
               <a:t>•  </a:t>
             </a:r>
             <a:r>
-              <a:rPr sz="1800" b="0">
+              <a:rPr sz="1600" b="0">
                 <a:solidFill>
                   <a:srgbClr val="F2F4F8"/>
                 </a:solidFill>
                 <a:latin typeface="Calibri"/>
               </a:rPr>
-              <a:t>The group runs the marathon; Black Ops is the breakthrough</a:t>
+              <a:t>Marathon coverage + breakthrough mission</a:t>
             </a:r>
           </a:p>
           <a:p>
             <a:pPr algn="l">
               <a:spcAft>
-                <a:spcPts val="1200"/>
+                <a:spcPts val="1100"/>
               </a:spcAft>
             </a:pPr>
             <a:r>
-              <a:rPr sz="1800" b="1">
+              <a:rPr sz="1600" b="1">
                 <a:solidFill>
                   <a:srgbClr val="00BCEB"/>
                 </a:solidFill>
@@ -11737,23 +15145,23 @@
               <a:t>•  </a:t>
             </a:r>
             <a:r>
-              <a:rPr sz="1800" b="0">
+              <a:rPr sz="1600" b="0">
                 <a:solidFill>
                   <a:srgbClr val="F2F4F8"/>
                 </a:solidFill>
                 <a:latin typeface="Calibri"/>
               </a:rPr>
-              <a:t>Parachutes into stalled / SI-locked / narrow-window whales</a:t>
+              <a:t>For stalled / SI-locked / narrow-window whales</a:t>
             </a:r>
           </a:p>
           <a:p>
             <a:pPr algn="l">
               <a:spcAft>
-                <a:spcPts val="1200"/>
+                <a:spcPts val="1100"/>
               </a:spcAft>
             </a:pPr>
             <a:r>
-              <a:rPr sz="1800" b="1">
+              <a:rPr sz="1600" b="1">
                 <a:solidFill>
                   <a:srgbClr val="00BCEB"/>
                 </a:solidFill>
@@ -11762,23 +15170,23 @@
               <a:t>•  </a:t>
             </a:r>
             <a:r>
-              <a:rPr sz="1800" b="0">
+              <a:rPr sz="1600" b="0">
                 <a:solidFill>
                   <a:srgbClr val="F2F4F8"/>
                 </a:solidFill>
                 <a:latin typeface="Calibri"/>
               </a:rPr>
-              <a:t>Focused ~60–120-day mission that IGNITES DURABLE GROWTH, then hands back</a:t>
+              <a:t>~60–120 days → durable multi-year growth</a:t>
             </a:r>
           </a:p>
           <a:p>
             <a:pPr algn="l">
               <a:spcAft>
-                <a:spcPts val="1200"/>
+                <a:spcPts val="1100"/>
               </a:spcAft>
             </a:pPr>
             <a:r>
-              <a:rPr sz="1800" b="1">
+              <a:rPr sz="1600" b="1">
                 <a:solidFill>
                   <a:srgbClr val="00BCEB"/>
                 </a:solidFill>
@@ -11787,20 +15195,379 @@
               <a:t>•  </a:t>
             </a:r>
             <a:r>
-              <a:rPr sz="1800" b="0">
+              <a:rPr sz="1600" b="0">
                 <a:solidFill>
                   <a:srgbClr val="F2F4F8"/>
                 </a:solidFill>
                 <a:latin typeface="Calibri"/>
               </a:rPr>
-              <a:t>Fully ethical; OT-safety and read-only guardrails still apply</a:t>
-            </a:r>
-          </a:p>
-        </p:txBody>
-      </p:sp>
-      <p:sp>
-        <p:nvSpPr>
-          <p:cNvPr id="8" name="TextBox 7"/>
+              <a:t>Always hands the account back</a:t>
+            </a:r>
+          </a:p>
+          <a:p>
+            <a:pPr algn="l">
+              <a:spcAft>
+                <a:spcPts val="1100"/>
+              </a:spcAft>
+            </a:pPr>
+            <a:r>
+              <a:rPr sz="1600" b="1">
+                <a:solidFill>
+                  <a:srgbClr val="00BCEB"/>
+                </a:solidFill>
+                <a:latin typeface="Calibri"/>
+              </a:rPr>
+              <a:t>•  </a:t>
+            </a:r>
+            <a:r>
+              <a:rPr sz="1600" b="0">
+                <a:solidFill>
+                  <a:srgbClr val="F2F4F8"/>
+                </a:solidFill>
+                <a:latin typeface="Calibri"/>
+              </a:rPr>
+              <a:t>Ethical; OT read-only guardrails hold</a:t>
+            </a:r>
+          </a:p>
+        </p:txBody>
+      </p:sp>
+      <p:sp>
+        <p:nvSpPr>
+          <p:cNvPr id="8" name="Rectangle 7"/>
+          <p:cNvSpPr/>
+          <p:nvPr/>
+        </p:nvSpPr>
+        <p:spPr>
+          <a:xfrm>
+            <a:off x="6263640" y="2331720"/>
+            <a:ext cx="5349240" cy="3931920"/>
+          </a:xfrm>
+          <a:prstGeom prst="rect">
+            <a:avLst/>
+          </a:prstGeom>
+          <a:solidFill>
+            <a:srgbClr val="1A1A2E"/>
+          </a:solidFill>
+          <a:ln w="12700">
+            <a:solidFill>
+              <a:srgbClr val="2C2C3A"/>
+            </a:solidFill>
+          </a:ln>
+          <a:effectLst/>
+        </p:spPr>
+        <p:style>
+          <a:lnRef idx="1">
+            <a:schemeClr val="accent1"/>
+          </a:lnRef>
+          <a:fillRef idx="3">
+            <a:schemeClr val="accent1"/>
+          </a:fillRef>
+          <a:effectRef idx="2">
+            <a:schemeClr val="accent1"/>
+          </a:effectRef>
+          <a:fontRef idx="minor">
+            <a:schemeClr val="lt1"/>
+          </a:fontRef>
+        </p:style>
+        <p:txBody>
+          <a:bodyPr rtlCol="0" anchor="ctr"/>
+          <a:lstStyle/>
+          <a:p>
+            <a:pPr algn="ctr"/>
+          </a:p>
+        </p:txBody>
+      </p:sp>
+      <p:sp>
+        <p:nvSpPr>
+          <p:cNvPr id="9" name="Rounded Rectangle 8"/>
+          <p:cNvSpPr/>
+          <p:nvPr/>
+        </p:nvSpPr>
+        <p:spPr>
+          <a:xfrm>
+            <a:off x="6629400" y="2651760"/>
+            <a:ext cx="4617720" cy="844295"/>
+          </a:xfrm>
+          <a:prstGeom prst="roundRect">
+            <a:avLst/>
+          </a:prstGeom>
+          <a:solidFill>
+            <a:srgbClr val="24243C"/>
+          </a:solidFill>
+          <a:ln w="9525">
+            <a:solidFill>
+              <a:srgbClr val="9AA3B2"/>
+            </a:solidFill>
+          </a:ln>
+          <a:effectLst/>
+        </p:spPr>
+        <p:style>
+          <a:lnRef idx="1">
+            <a:schemeClr val="accent1"/>
+          </a:lnRef>
+          <a:fillRef idx="3">
+            <a:schemeClr val="accent1"/>
+          </a:fillRef>
+          <a:effectRef idx="2">
+            <a:schemeClr val="accent1"/>
+          </a:effectRef>
+          <a:fontRef idx="minor">
+            <a:schemeClr val="lt1"/>
+          </a:fontRef>
+        </p:style>
+        <p:txBody>
+          <a:bodyPr rtlCol="0" anchor="ctr" wrap="square" lIns="45720" rIns="45720" tIns="18288" bIns="18288"/>
+          <a:lstStyle/>
+          <a:p>
+            <a:pPr algn="ctr"/>
+            <a:r>
+              <a:rPr sz="1300" b="0">
+                <a:solidFill>
+                  <a:srgbClr val="F2F4F8"/>
+                </a:solidFill>
+                <a:latin typeface="Calibri"/>
+              </a:rPr>
+              <a:t>Stalled / SI-locked whale</a:t>
+            </a:r>
+          </a:p>
+        </p:txBody>
+      </p:sp>
+      <p:sp>
+        <p:nvSpPr>
+          <p:cNvPr id="10" name="Down Arrow 9"/>
+          <p:cNvSpPr/>
+          <p:nvPr/>
+        </p:nvSpPr>
+        <p:spPr>
+          <a:xfrm>
+            <a:off x="8773667" y="3514344"/>
+            <a:ext cx="329184" cy="265176"/>
+          </a:xfrm>
+          <a:prstGeom prst="downArrow">
+            <a:avLst/>
+          </a:prstGeom>
+          <a:solidFill>
+            <a:srgbClr val="00BCEB"/>
+          </a:solidFill>
+          <a:ln>
+            <a:noFill/>
+          </a:ln>
+          <a:effectLst/>
+        </p:spPr>
+        <p:style>
+          <a:lnRef idx="1">
+            <a:schemeClr val="accent1"/>
+          </a:lnRef>
+          <a:fillRef idx="3">
+            <a:schemeClr val="accent1"/>
+          </a:fillRef>
+          <a:effectRef idx="2">
+            <a:schemeClr val="accent1"/>
+          </a:effectRef>
+          <a:fontRef idx="minor">
+            <a:schemeClr val="lt1"/>
+          </a:fontRef>
+        </p:style>
+        <p:txBody>
+          <a:bodyPr rtlCol="0" anchor="ctr"/>
+          <a:lstStyle/>
+          <a:p>
+            <a:pPr algn="ctr"/>
+          </a:p>
+        </p:txBody>
+      </p:sp>
+      <p:sp>
+        <p:nvSpPr>
+          <p:cNvPr id="11" name="Rounded Rectangle 10"/>
+          <p:cNvSpPr/>
+          <p:nvPr/>
+        </p:nvSpPr>
+        <p:spPr>
+          <a:xfrm>
+            <a:off x="6629400" y="3806952"/>
+            <a:ext cx="4617720" cy="844295"/>
+          </a:xfrm>
+          <a:prstGeom prst="roundRect">
+            <a:avLst/>
+          </a:prstGeom>
+          <a:solidFill>
+            <a:srgbClr val="00BCEB"/>
+          </a:solidFill>
+          <a:ln>
+            <a:noFill/>
+          </a:ln>
+          <a:effectLst/>
+        </p:spPr>
+        <p:style>
+          <a:lnRef idx="1">
+            <a:schemeClr val="accent1"/>
+          </a:lnRef>
+          <a:fillRef idx="3">
+            <a:schemeClr val="accent1"/>
+          </a:fillRef>
+          <a:effectRef idx="2">
+            <a:schemeClr val="accent1"/>
+          </a:effectRef>
+          <a:fontRef idx="minor">
+            <a:schemeClr val="lt1"/>
+          </a:fontRef>
+        </p:style>
+        <p:txBody>
+          <a:bodyPr rtlCol="0" anchor="ctr" wrap="square" lIns="45720" rIns="45720" tIns="18288" bIns="18288"/>
+          <a:lstStyle/>
+          <a:p>
+            <a:pPr algn="ctr"/>
+            <a:r>
+              <a:rPr sz="1300" b="1">
+                <a:solidFill>
+                  <a:srgbClr val="101014"/>
+                </a:solidFill>
+                <a:latin typeface="Calibri"/>
+              </a:rPr>
+              <a:t>BREAKTHROUGH · ~60–120 days</a:t>
+            </a:r>
+          </a:p>
+        </p:txBody>
+      </p:sp>
+      <p:sp>
+        <p:nvSpPr>
+          <p:cNvPr id="12" name="Down Arrow 11"/>
+          <p:cNvSpPr/>
+          <p:nvPr/>
+        </p:nvSpPr>
+        <p:spPr>
+          <a:xfrm>
+            <a:off x="8773667" y="4669535"/>
+            <a:ext cx="329184" cy="265176"/>
+          </a:xfrm>
+          <a:prstGeom prst="downArrow">
+            <a:avLst/>
+          </a:prstGeom>
+          <a:solidFill>
+            <a:srgbClr val="00BCEB"/>
+          </a:solidFill>
+          <a:ln>
+            <a:noFill/>
+          </a:ln>
+          <a:effectLst/>
+        </p:spPr>
+        <p:style>
+          <a:lnRef idx="1">
+            <a:schemeClr val="accent1"/>
+          </a:lnRef>
+          <a:fillRef idx="3">
+            <a:schemeClr val="accent1"/>
+          </a:fillRef>
+          <a:effectRef idx="2">
+            <a:schemeClr val="accent1"/>
+          </a:effectRef>
+          <a:fontRef idx="minor">
+            <a:schemeClr val="lt1"/>
+          </a:fontRef>
+        </p:style>
+        <p:txBody>
+          <a:bodyPr rtlCol="0" anchor="ctr"/>
+          <a:lstStyle/>
+          <a:p>
+            <a:pPr algn="ctr"/>
+          </a:p>
+        </p:txBody>
+      </p:sp>
+      <p:sp>
+        <p:nvSpPr>
+          <p:cNvPr id="13" name="Rounded Rectangle 12"/>
+          <p:cNvSpPr/>
+          <p:nvPr/>
+        </p:nvSpPr>
+        <p:spPr>
+          <a:xfrm>
+            <a:off x="6629400" y="4962143"/>
+            <a:ext cx="4617720" cy="844295"/>
+          </a:xfrm>
+          <a:prstGeom prst="roundRect">
+            <a:avLst/>
+          </a:prstGeom>
+          <a:solidFill>
+            <a:srgbClr val="00A4FD"/>
+          </a:solidFill>
+          <a:ln>
+            <a:noFill/>
+          </a:ln>
+          <a:effectLst/>
+        </p:spPr>
+        <p:style>
+          <a:lnRef idx="1">
+            <a:schemeClr val="accent1"/>
+          </a:lnRef>
+          <a:fillRef idx="3">
+            <a:schemeClr val="accent1"/>
+          </a:fillRef>
+          <a:effectRef idx="2">
+            <a:schemeClr val="accent1"/>
+          </a:effectRef>
+          <a:fontRef idx="minor">
+            <a:schemeClr val="lt1"/>
+          </a:fontRef>
+        </p:style>
+        <p:txBody>
+          <a:bodyPr rtlCol="0" anchor="ctr" wrap="square" lIns="45720" rIns="45720" tIns="18288" bIns="18288"/>
+          <a:lstStyle/>
+          <a:p>
+            <a:pPr algn="ctr"/>
+            <a:r>
+              <a:rPr sz="1300" b="1">
+                <a:solidFill>
+                  <a:srgbClr val="101014"/>
+                </a:solidFill>
+                <a:latin typeface="Calibri"/>
+              </a:rPr>
+              <a:t>Durable multi-year growth</a:t>
+            </a:r>
+          </a:p>
+        </p:txBody>
+      </p:sp>
+      <p:sp>
+        <p:nvSpPr>
+          <p:cNvPr id="14" name="TextBox 13"/>
+          <p:cNvSpPr txBox="1"/>
+          <p:nvPr/>
+        </p:nvSpPr>
+        <p:spPr>
+          <a:xfrm>
+            <a:off x="6629400" y="6135623"/>
+            <a:ext cx="4617720" cy="320040"/>
+          </a:xfrm>
+          <a:prstGeom prst="rect">
+            <a:avLst/>
+          </a:prstGeom>
+          <a:noFill/>
+        </p:spPr>
+        <p:txBody>
+          <a:bodyPr wrap="square" anchor="t">
+            <a:spAutoFit/>
+          </a:bodyPr>
+          <a:lstStyle/>
+          <a:p>
+            <a:pPr algn="ctr">
+              <a:spcAft>
+                <a:spcPts val="600"/>
+              </a:spcAft>
+            </a:pPr>
+            <a:r>
+              <a:rPr sz="1100" b="0">
+                <a:solidFill>
+                  <a:srgbClr val="9AA3B2"/>
+                </a:solidFill>
+                <a:latin typeface="Calibri"/>
+              </a:rPr>
+              <a:t>Always hands the account back</a:t>
+            </a:r>
+          </a:p>
+        </p:txBody>
+      </p:sp>
+      <p:sp>
+        <p:nvSpPr>
+          <p:cNvPr id="15" name="TextBox 14"/>
           <p:cNvSpPr txBox="1"/>
           <p:nvPr/>
         </p:nvSpPr>
@@ -11947,7 +15714,7 @@
         <p:spPr>
           <a:xfrm>
             <a:off x="548640" y="868680"/>
-            <a:ext cx="1280160" cy="50800"/>
+            <a:ext cx="1280160" cy="50292"/>
           </a:xfrm>
           <a:prstGeom prst="rect">
             <a:avLst/>
@@ -11958,6 +15725,7 @@
           <a:ln>
             <a:noFill/>
           </a:ln>
+          <a:effectLst/>
         </p:spPr>
         <p:style>
           <a:lnRef idx="1">
@@ -12009,7 +15777,7 @@
               </a:spcAft>
             </a:pPr>
             <a:r>
-              <a:rPr sz="2800" b="1">
+              <a:rPr sz="2700" b="1">
                 <a:solidFill>
                   <a:srgbClr val="F2F4F8"/>
                 </a:solidFill>
@@ -12029,7 +15797,7 @@
         <p:spPr>
           <a:xfrm>
             <a:off x="548640" y="2331720"/>
-            <a:ext cx="11064240" cy="3931920"/>
+            <a:ext cx="5486400" cy="3931920"/>
           </a:xfrm>
           <a:prstGeom prst="rect">
             <a:avLst/>
@@ -12042,6 +15810,7 @@
               <a:srgbClr val="2C2C3A"/>
             </a:solidFill>
           </a:ln>
+          <a:effectLst/>
         </p:spPr>
         <p:style>
           <a:lnRef idx="1">
@@ -12073,8 +15842,8 @@
         </p:nvSpPr>
         <p:spPr>
           <a:xfrm>
-            <a:off x="914400" y="2560320"/>
-            <a:ext cx="10332720" cy="3566160"/>
+            <a:off x="822960" y="2542032"/>
+            <a:ext cx="4937760" cy="3566160"/>
           </a:xfrm>
           <a:prstGeom prst="rect">
             <a:avLst/>
@@ -12089,11 +15858,11 @@
           <a:p>
             <a:pPr algn="l">
               <a:spcAft>
-                <a:spcPts val="1200"/>
+                <a:spcPts val="1100"/>
               </a:spcAft>
             </a:pPr>
             <a:r>
-              <a:rPr sz="1800" b="1">
+              <a:rPr sz="1600" b="1">
                 <a:solidFill>
                   <a:srgbClr val="00BCEB"/>
                 </a:solidFill>
@@ -12102,23 +15871,23 @@
               <a:t>•  </a:t>
             </a:r>
             <a:r>
-              <a:rPr sz="1800" b="0">
+              <a:rPr sz="1600" b="0">
                 <a:solidFill>
                   <a:srgbClr val="F2F4F8"/>
                 </a:solidFill>
                 <a:latin typeface="Calibri"/>
               </a:rPr>
-              <a:t>Secure Networking · Observability &amp; Data · Resilience &amp; SecOps</a:t>
+              <a:t>3 anchor pillars + 1 adjacency</a:t>
             </a:r>
           </a:p>
           <a:p>
             <a:pPr algn="l">
               <a:spcAft>
-                <a:spcPts val="1200"/>
+                <a:spcPts val="1100"/>
               </a:spcAft>
             </a:pPr>
             <a:r>
-              <a:rPr sz="1800" b="1">
+              <a:rPr sz="1600" b="1">
                 <a:solidFill>
                   <a:srgbClr val="00BCEB"/>
                 </a:solidFill>
@@ -12127,23 +15896,23 @@
               <a:t>•  </a:t>
             </a:r>
             <a:r>
-              <a:rPr sz="1800" b="0">
+              <a:rPr sz="1600" b="0">
                 <a:solidFill>
                   <a:srgbClr val="F2F4F8"/>
                 </a:solidFill>
                 <a:latin typeface="Calibri"/>
               </a:rPr>
-              <a:t>(+1) AI-Ready Infrastructure as a pull-through adjacency</a:t>
+              <a:t>Chosen for cross-attach + regulatory pull</a:t>
             </a:r>
           </a:p>
           <a:p>
             <a:pPr algn="l">
               <a:spcAft>
-                <a:spcPts val="1200"/>
+                <a:spcPts val="1100"/>
               </a:spcAft>
             </a:pPr>
             <a:r>
-              <a:rPr sz="1800" b="1">
+              <a:rPr sz="1600" b="1">
                 <a:solidFill>
                   <a:srgbClr val="00BCEB"/>
                 </a:solidFill>
@@ -12152,23 +15921,23 @@
               <a:t>•  </a:t>
             </a:r>
             <a:r>
-              <a:rPr sz="1800" b="0">
+              <a:rPr sz="1600" b="0">
                 <a:solidFill>
                   <a:srgbClr val="F2F4F8"/>
                 </a:solidFill>
                 <a:latin typeface="Calibri"/>
               </a:rPr>
-              <a:t>Transportation &amp; Logistics · Financial Services</a:t>
+              <a:t>Joint Cisco + Splunk strength</a:t>
             </a:r>
           </a:p>
           <a:p>
             <a:pPr algn="l">
               <a:spcAft>
-                <a:spcPts val="1200"/>
+                <a:spcPts val="1100"/>
               </a:spcAft>
             </a:pPr>
             <a:r>
-              <a:rPr sz="1800" b="1">
+              <a:rPr sz="1600" b="1">
                 <a:solidFill>
                   <a:srgbClr val="00BCEB"/>
                 </a:solidFill>
@@ -12177,45 +15946,576 @@
               <a:t>•  </a:t>
             </a:r>
             <a:r>
-              <a:rPr sz="1800" b="0">
+              <a:rPr sz="1600" b="0">
                 <a:solidFill>
                   <a:srgbClr val="F2F4F8"/>
                 </a:solidFill>
                 <a:latin typeface="Calibri"/>
               </a:rPr>
-              <a:t>Healthcare · Public Sector / Critical Infrastructure</a:t>
-            </a:r>
-          </a:p>
+              <a:t>The list is swappable</a:t>
+            </a:r>
+          </a:p>
+        </p:txBody>
+      </p:sp>
+      <p:sp>
+        <p:nvSpPr>
+          <p:cNvPr id="8" name="Rectangle 7"/>
+          <p:cNvSpPr/>
+          <p:nvPr/>
+        </p:nvSpPr>
+        <p:spPr>
+          <a:xfrm>
+            <a:off x="6263640" y="2331720"/>
+            <a:ext cx="5349240" cy="3931920"/>
+          </a:xfrm>
+          <a:prstGeom prst="rect">
+            <a:avLst/>
+          </a:prstGeom>
+          <a:solidFill>
+            <a:srgbClr val="1A1A2E"/>
+          </a:solidFill>
+          <a:ln w="12700">
+            <a:solidFill>
+              <a:srgbClr val="2C2C3A"/>
+            </a:solidFill>
+          </a:ln>
+          <a:effectLst/>
+        </p:spPr>
+        <p:style>
+          <a:lnRef idx="1">
+            <a:schemeClr val="accent1"/>
+          </a:lnRef>
+          <a:fillRef idx="3">
+            <a:schemeClr val="accent1"/>
+          </a:fillRef>
+          <a:effectRef idx="2">
+            <a:schemeClr val="accent1"/>
+          </a:effectRef>
+          <a:fontRef idx="minor">
+            <a:schemeClr val="lt1"/>
+          </a:fontRef>
+        </p:style>
+        <p:txBody>
+          <a:bodyPr rtlCol="0" anchor="ctr"/>
+          <a:lstStyle/>
+          <a:p>
+            <a:pPr algn="ctr"/>
+          </a:p>
+        </p:txBody>
+      </p:sp>
+      <p:sp>
+        <p:nvSpPr>
+          <p:cNvPr id="9" name="TextBox 8"/>
+          <p:cNvSpPr txBox="1"/>
+          <p:nvPr/>
+        </p:nvSpPr>
+        <p:spPr>
+          <a:xfrm>
+            <a:off x="6583679" y="2496312"/>
+            <a:ext cx="4709159" cy="256032"/>
+          </a:xfrm>
+          <a:prstGeom prst="rect">
+            <a:avLst/>
+          </a:prstGeom>
+          <a:noFill/>
+        </p:spPr>
+        <p:txBody>
+          <a:bodyPr wrap="square" anchor="t">
+            <a:spAutoFit/>
+          </a:bodyPr>
+          <a:lstStyle/>
           <a:p>
             <a:pPr algn="l">
               <a:spcAft>
-                <a:spcPts val="1200"/>
+                <a:spcPts val="600"/>
               </a:spcAft>
             </a:pPr>
             <a:r>
-              <a:rPr sz="1800" b="1">
-                <a:solidFill>
-                  <a:srgbClr val="00BCEB"/>
-                </a:solidFill>
-                <a:latin typeface="Calibri"/>
-              </a:rPr>
-              <a:t>•  </a:t>
-            </a:r>
-            <a:r>
-              <a:rPr sz="1800" b="0">
+              <a:rPr sz="1000" b="1">
+                <a:solidFill>
+                  <a:srgbClr val="9AA3B2"/>
+                </a:solidFill>
+                <a:latin typeface="Calibri"/>
+              </a:rPr>
+              <a:t>3 + 1 ARCHITECTURES</a:t>
+            </a:r>
+          </a:p>
+        </p:txBody>
+      </p:sp>
+      <p:sp>
+        <p:nvSpPr>
+          <p:cNvPr id="10" name="Rounded Rectangle 9"/>
+          <p:cNvSpPr/>
+          <p:nvPr/>
+        </p:nvSpPr>
+        <p:spPr>
+          <a:xfrm>
+            <a:off x="6583679" y="2788920"/>
+            <a:ext cx="1040129" cy="640080"/>
+          </a:xfrm>
+          <a:prstGeom prst="roundRect">
+            <a:avLst/>
+          </a:prstGeom>
+          <a:solidFill>
+            <a:srgbClr val="00BCEB"/>
+          </a:solidFill>
+          <a:ln>
+            <a:noFill/>
+          </a:ln>
+          <a:effectLst/>
+        </p:spPr>
+        <p:style>
+          <a:lnRef idx="1">
+            <a:schemeClr val="accent1"/>
+          </a:lnRef>
+          <a:fillRef idx="3">
+            <a:schemeClr val="accent1"/>
+          </a:fillRef>
+          <a:effectRef idx="2">
+            <a:schemeClr val="accent1"/>
+          </a:effectRef>
+          <a:fontRef idx="minor">
+            <a:schemeClr val="lt1"/>
+          </a:fontRef>
+        </p:style>
+        <p:txBody>
+          <a:bodyPr rtlCol="0" anchor="ctr" wrap="square" lIns="45720" rIns="45720" tIns="18288" bIns="18288"/>
+          <a:lstStyle/>
+          <a:p>
+            <a:pPr algn="ctr"/>
+            <a:r>
+              <a:rPr sz="1050" b="1">
+                <a:solidFill>
+                  <a:srgbClr val="101014"/>
+                </a:solidFill>
+                <a:latin typeface="Calibri"/>
+              </a:rPr>
+              <a:t>Networking</a:t>
+            </a:r>
+          </a:p>
+        </p:txBody>
+      </p:sp>
+      <p:sp>
+        <p:nvSpPr>
+          <p:cNvPr id="11" name="Rounded Rectangle 10"/>
+          <p:cNvSpPr/>
+          <p:nvPr/>
+        </p:nvSpPr>
+        <p:spPr>
+          <a:xfrm>
+            <a:off x="7806690" y="2788920"/>
+            <a:ext cx="1040129" cy="640080"/>
+          </a:xfrm>
+          <a:prstGeom prst="roundRect">
+            <a:avLst/>
+          </a:prstGeom>
+          <a:solidFill>
+            <a:srgbClr val="00BCEB"/>
+          </a:solidFill>
+          <a:ln>
+            <a:noFill/>
+          </a:ln>
+          <a:effectLst/>
+        </p:spPr>
+        <p:style>
+          <a:lnRef idx="1">
+            <a:schemeClr val="accent1"/>
+          </a:lnRef>
+          <a:fillRef idx="3">
+            <a:schemeClr val="accent1"/>
+          </a:fillRef>
+          <a:effectRef idx="2">
+            <a:schemeClr val="accent1"/>
+          </a:effectRef>
+          <a:fontRef idx="minor">
+            <a:schemeClr val="lt1"/>
+          </a:fontRef>
+        </p:style>
+        <p:txBody>
+          <a:bodyPr rtlCol="0" anchor="ctr" wrap="square" lIns="45720" rIns="45720" tIns="18288" bIns="18288"/>
+          <a:lstStyle/>
+          <a:p>
+            <a:pPr algn="ctr"/>
+            <a:r>
+              <a:rPr sz="1050" b="1">
+                <a:solidFill>
+                  <a:srgbClr val="101014"/>
+                </a:solidFill>
+                <a:latin typeface="Calibri"/>
+              </a:rPr>
+              <a:t>Observe</a:t>
+            </a:r>
+          </a:p>
+        </p:txBody>
+      </p:sp>
+      <p:sp>
+        <p:nvSpPr>
+          <p:cNvPr id="12" name="Rounded Rectangle 11"/>
+          <p:cNvSpPr/>
+          <p:nvPr/>
+        </p:nvSpPr>
+        <p:spPr>
+          <a:xfrm>
+            <a:off x="9029699" y="2788920"/>
+            <a:ext cx="1040129" cy="640080"/>
+          </a:xfrm>
+          <a:prstGeom prst="roundRect">
+            <a:avLst/>
+          </a:prstGeom>
+          <a:solidFill>
+            <a:srgbClr val="00BCEB"/>
+          </a:solidFill>
+          <a:ln>
+            <a:noFill/>
+          </a:ln>
+          <a:effectLst/>
+        </p:spPr>
+        <p:style>
+          <a:lnRef idx="1">
+            <a:schemeClr val="accent1"/>
+          </a:lnRef>
+          <a:fillRef idx="3">
+            <a:schemeClr val="accent1"/>
+          </a:fillRef>
+          <a:effectRef idx="2">
+            <a:schemeClr val="accent1"/>
+          </a:effectRef>
+          <a:fontRef idx="minor">
+            <a:schemeClr val="lt1"/>
+          </a:fontRef>
+        </p:style>
+        <p:txBody>
+          <a:bodyPr rtlCol="0" anchor="ctr" wrap="square" lIns="45720" rIns="45720" tIns="18288" bIns="18288"/>
+          <a:lstStyle/>
+          <a:p>
+            <a:pPr algn="ctr"/>
+            <a:r>
+              <a:rPr sz="1050" b="1">
+                <a:solidFill>
+                  <a:srgbClr val="101014"/>
+                </a:solidFill>
+                <a:latin typeface="Calibri"/>
+              </a:rPr>
+              <a:t>SecOps</a:t>
+            </a:r>
+          </a:p>
+        </p:txBody>
+      </p:sp>
+      <p:sp>
+        <p:nvSpPr>
+          <p:cNvPr id="13" name="Rounded Rectangle 12"/>
+          <p:cNvSpPr/>
+          <p:nvPr/>
+        </p:nvSpPr>
+        <p:spPr>
+          <a:xfrm>
+            <a:off x="10252709" y="2788920"/>
+            <a:ext cx="1040129" cy="640080"/>
+          </a:xfrm>
+          <a:prstGeom prst="roundRect">
+            <a:avLst/>
+          </a:prstGeom>
+          <a:solidFill>
+            <a:srgbClr val="00A4FD"/>
+          </a:solidFill>
+          <a:ln>
+            <a:noFill/>
+          </a:ln>
+          <a:effectLst/>
+        </p:spPr>
+        <p:style>
+          <a:lnRef idx="1">
+            <a:schemeClr val="accent1"/>
+          </a:lnRef>
+          <a:fillRef idx="3">
+            <a:schemeClr val="accent1"/>
+          </a:fillRef>
+          <a:effectRef idx="2">
+            <a:schemeClr val="accent1"/>
+          </a:effectRef>
+          <a:fontRef idx="minor">
+            <a:schemeClr val="lt1"/>
+          </a:fontRef>
+        </p:style>
+        <p:txBody>
+          <a:bodyPr rtlCol="0" anchor="ctr" wrap="square" lIns="45720" rIns="45720" tIns="18288" bIns="18288"/>
+          <a:lstStyle/>
+          <a:p>
+            <a:pPr algn="ctr"/>
+            <a:r>
+              <a:rPr sz="1050" b="1">
+                <a:solidFill>
+                  <a:srgbClr val="101014"/>
+                </a:solidFill>
+                <a:latin typeface="Calibri"/>
+              </a:rPr>
+              <a:t>+1 AI</a:t>
+            </a:r>
+          </a:p>
+        </p:txBody>
+      </p:sp>
+      <p:sp>
+        <p:nvSpPr>
+          <p:cNvPr id="14" name="TextBox 13"/>
+          <p:cNvSpPr txBox="1"/>
+          <p:nvPr/>
+        </p:nvSpPr>
+        <p:spPr>
+          <a:xfrm>
+            <a:off x="6583679" y="3611879"/>
+            <a:ext cx="4709159" cy="256032"/>
+          </a:xfrm>
+          <a:prstGeom prst="rect">
+            <a:avLst/>
+          </a:prstGeom>
+          <a:noFill/>
+        </p:spPr>
+        <p:txBody>
+          <a:bodyPr wrap="square" anchor="t">
+            <a:spAutoFit/>
+          </a:bodyPr>
+          <a:lstStyle/>
+          <a:p>
+            <a:pPr algn="l">
+              <a:spcAft>
+                <a:spcPts val="600"/>
+              </a:spcAft>
+            </a:pPr>
+            <a:r>
+              <a:rPr sz="1000" b="1">
+                <a:solidFill>
+                  <a:srgbClr val="9AA3B2"/>
+                </a:solidFill>
+                <a:latin typeface="Calibri"/>
+              </a:rPr>
+              <a:t>4 VERTICALS</a:t>
+            </a:r>
+          </a:p>
+        </p:txBody>
+      </p:sp>
+      <p:sp>
+        <p:nvSpPr>
+          <p:cNvPr id="15" name="Rounded Rectangle 14"/>
+          <p:cNvSpPr/>
+          <p:nvPr/>
+        </p:nvSpPr>
+        <p:spPr>
+          <a:xfrm>
+            <a:off x="6583679" y="3904487"/>
+            <a:ext cx="2240279" cy="640080"/>
+          </a:xfrm>
+          <a:prstGeom prst="roundRect">
+            <a:avLst/>
+          </a:prstGeom>
+          <a:solidFill>
+            <a:srgbClr val="24243C"/>
+          </a:solidFill>
+          <a:ln w="9525">
+            <a:solidFill>
+              <a:srgbClr val="9AA3B2"/>
+            </a:solidFill>
+          </a:ln>
+          <a:effectLst/>
+        </p:spPr>
+        <p:style>
+          <a:lnRef idx="1">
+            <a:schemeClr val="accent1"/>
+          </a:lnRef>
+          <a:fillRef idx="3">
+            <a:schemeClr val="accent1"/>
+          </a:fillRef>
+          <a:effectRef idx="2">
+            <a:schemeClr val="accent1"/>
+          </a:effectRef>
+          <a:fontRef idx="minor">
+            <a:schemeClr val="lt1"/>
+          </a:fontRef>
+        </p:style>
+        <p:txBody>
+          <a:bodyPr rtlCol="0" anchor="ctr" wrap="square" lIns="45720" rIns="45720" tIns="18288" bIns="18288"/>
+          <a:lstStyle/>
+          <a:p>
+            <a:pPr algn="ctr"/>
+            <a:r>
+              <a:rPr sz="1200" b="0">
                 <a:solidFill>
                   <a:srgbClr val="F2F4F8"/>
                 </a:solidFill>
                 <a:latin typeface="Calibri"/>
               </a:rPr>
-              <a:t>Chosen for cross-attach + regulatory pull; the list is swappable</a:t>
-            </a:r>
-          </a:p>
-        </p:txBody>
-      </p:sp>
-      <p:sp>
-        <p:nvSpPr>
-          <p:cNvPr id="8" name="TextBox 7"/>
+              <a:t>Transportation</a:t>
+            </a:r>
+          </a:p>
+        </p:txBody>
+      </p:sp>
+      <p:sp>
+        <p:nvSpPr>
+          <p:cNvPr id="16" name="Rounded Rectangle 15"/>
+          <p:cNvSpPr/>
+          <p:nvPr/>
+        </p:nvSpPr>
+        <p:spPr>
+          <a:xfrm>
+            <a:off x="9052559" y="3904487"/>
+            <a:ext cx="2240279" cy="640080"/>
+          </a:xfrm>
+          <a:prstGeom prst="roundRect">
+            <a:avLst/>
+          </a:prstGeom>
+          <a:solidFill>
+            <a:srgbClr val="24243C"/>
+          </a:solidFill>
+          <a:ln w="9525">
+            <a:solidFill>
+              <a:srgbClr val="9AA3B2"/>
+            </a:solidFill>
+          </a:ln>
+          <a:effectLst/>
+        </p:spPr>
+        <p:style>
+          <a:lnRef idx="1">
+            <a:schemeClr val="accent1"/>
+          </a:lnRef>
+          <a:fillRef idx="3">
+            <a:schemeClr val="accent1"/>
+          </a:fillRef>
+          <a:effectRef idx="2">
+            <a:schemeClr val="accent1"/>
+          </a:effectRef>
+          <a:fontRef idx="minor">
+            <a:schemeClr val="lt1"/>
+          </a:fontRef>
+        </p:style>
+        <p:txBody>
+          <a:bodyPr rtlCol="0" anchor="ctr" wrap="square" lIns="45720" rIns="45720" tIns="18288" bIns="18288"/>
+          <a:lstStyle/>
+          <a:p>
+            <a:pPr algn="ctr"/>
+            <a:r>
+              <a:rPr sz="1200" b="0">
+                <a:solidFill>
+                  <a:srgbClr val="F2F4F8"/>
+                </a:solidFill>
+                <a:latin typeface="Calibri"/>
+              </a:rPr>
+              <a:t>Financial Svcs</a:t>
+            </a:r>
+          </a:p>
+        </p:txBody>
+      </p:sp>
+      <p:sp>
+        <p:nvSpPr>
+          <p:cNvPr id="17" name="Rounded Rectangle 16"/>
+          <p:cNvSpPr/>
+          <p:nvPr/>
+        </p:nvSpPr>
+        <p:spPr>
+          <a:xfrm>
+            <a:off x="6583679" y="4745736"/>
+            <a:ext cx="2240279" cy="640080"/>
+          </a:xfrm>
+          <a:prstGeom prst="roundRect">
+            <a:avLst/>
+          </a:prstGeom>
+          <a:solidFill>
+            <a:srgbClr val="24243C"/>
+          </a:solidFill>
+          <a:ln w="9525">
+            <a:solidFill>
+              <a:srgbClr val="9AA3B2"/>
+            </a:solidFill>
+          </a:ln>
+          <a:effectLst/>
+        </p:spPr>
+        <p:style>
+          <a:lnRef idx="1">
+            <a:schemeClr val="accent1"/>
+          </a:lnRef>
+          <a:fillRef idx="3">
+            <a:schemeClr val="accent1"/>
+          </a:fillRef>
+          <a:effectRef idx="2">
+            <a:schemeClr val="accent1"/>
+          </a:effectRef>
+          <a:fontRef idx="minor">
+            <a:schemeClr val="lt1"/>
+          </a:fontRef>
+        </p:style>
+        <p:txBody>
+          <a:bodyPr rtlCol="0" anchor="ctr" wrap="square" lIns="45720" rIns="45720" tIns="18288" bIns="18288"/>
+          <a:lstStyle/>
+          <a:p>
+            <a:pPr algn="ctr"/>
+            <a:r>
+              <a:rPr sz="1200" b="0">
+                <a:solidFill>
+                  <a:srgbClr val="F2F4F8"/>
+                </a:solidFill>
+                <a:latin typeface="Calibri"/>
+              </a:rPr>
+              <a:t>Healthcare</a:t>
+            </a:r>
+          </a:p>
+        </p:txBody>
+      </p:sp>
+      <p:sp>
+        <p:nvSpPr>
+          <p:cNvPr id="18" name="Rounded Rectangle 17"/>
+          <p:cNvSpPr/>
+          <p:nvPr/>
+        </p:nvSpPr>
+        <p:spPr>
+          <a:xfrm>
+            <a:off x="9052559" y="4745736"/>
+            <a:ext cx="2240279" cy="640080"/>
+          </a:xfrm>
+          <a:prstGeom prst="roundRect">
+            <a:avLst/>
+          </a:prstGeom>
+          <a:solidFill>
+            <a:srgbClr val="24243C"/>
+          </a:solidFill>
+          <a:ln w="9525">
+            <a:solidFill>
+              <a:srgbClr val="9AA3B2"/>
+            </a:solidFill>
+          </a:ln>
+          <a:effectLst/>
+        </p:spPr>
+        <p:style>
+          <a:lnRef idx="1">
+            <a:schemeClr val="accent1"/>
+          </a:lnRef>
+          <a:fillRef idx="3">
+            <a:schemeClr val="accent1"/>
+          </a:fillRef>
+          <a:effectRef idx="2">
+            <a:schemeClr val="accent1"/>
+          </a:effectRef>
+          <a:fontRef idx="minor">
+            <a:schemeClr val="lt1"/>
+          </a:fontRef>
+        </p:style>
+        <p:txBody>
+          <a:bodyPr rtlCol="0" anchor="ctr" wrap="square" lIns="45720" rIns="45720" tIns="18288" bIns="18288"/>
+          <a:lstStyle/>
+          <a:p>
+            <a:pPr algn="ctr"/>
+            <a:r>
+              <a:rPr sz="1200" b="0">
+                <a:solidFill>
+                  <a:srgbClr val="F2F4F8"/>
+                </a:solidFill>
+                <a:latin typeface="Calibri"/>
+              </a:rPr>
+              <a:t>Public Sector</a:t>
+            </a:r>
+          </a:p>
+        </p:txBody>
+      </p:sp>
+      <p:sp>
+        <p:nvSpPr>
+          <p:cNvPr id="19" name="TextBox 18"/>
           <p:cNvSpPr txBox="1"/>
           <p:nvPr/>
         </p:nvSpPr>
@@ -12362,7 +16662,7 @@
         <p:spPr>
           <a:xfrm>
             <a:off x="548640" y="868680"/>
-            <a:ext cx="1280160" cy="50800"/>
+            <a:ext cx="1280160" cy="50292"/>
           </a:xfrm>
           <a:prstGeom prst="rect">
             <a:avLst/>
@@ -12373,6 +16673,7 @@
           <a:ln>
             <a:noFill/>
           </a:ln>
+          <a:effectLst/>
         </p:spPr>
         <p:style>
           <a:lnRef idx="1">
@@ -12424,7 +16725,7 @@
               </a:spcAft>
             </a:pPr>
             <a:r>
-              <a:rPr sz="2800" b="1">
+              <a:rPr sz="2700" b="1">
                 <a:solidFill>
                   <a:srgbClr val="F2F4F8"/>
                 </a:solidFill>
@@ -12444,7 +16745,7 @@
         <p:spPr>
           <a:xfrm>
             <a:off x="548640" y="2331720"/>
-            <a:ext cx="11064240" cy="3931920"/>
+            <a:ext cx="5486400" cy="3931920"/>
           </a:xfrm>
           <a:prstGeom prst="rect">
             <a:avLst/>
@@ -12457,6 +16758,7 @@
               <a:srgbClr val="2C2C3A"/>
             </a:solidFill>
           </a:ln>
+          <a:effectLst/>
         </p:spPr>
         <p:style>
           <a:lnRef idx="1">
@@ -12488,8 +16790,8 @@
         </p:nvSpPr>
         <p:spPr>
           <a:xfrm>
-            <a:off x="914400" y="2560320"/>
-            <a:ext cx="10332720" cy="3566160"/>
+            <a:off x="822960" y="2542032"/>
+            <a:ext cx="4937760" cy="3566160"/>
           </a:xfrm>
           <a:prstGeom prst="rect">
             <a:avLst/>
@@ -12504,11 +16806,11 @@
           <a:p>
             <a:pPr algn="l">
               <a:spcAft>
-                <a:spcPts val="1200"/>
+                <a:spcPts val="1100"/>
               </a:spcAft>
             </a:pPr>
             <a:r>
-              <a:rPr sz="1800" b="1">
+              <a:rPr sz="1600" b="1">
                 <a:solidFill>
                   <a:srgbClr val="00BCEB"/>
                 </a:solidFill>
@@ -12517,23 +16819,23 @@
               <a:t>•  </a:t>
             </a:r>
             <a:r>
-              <a:rPr sz="1800" b="0">
+              <a:rPr sz="1600" b="0">
                 <a:solidFill>
                   <a:srgbClr val="F2F4F8"/>
                 </a:solidFill>
                 <a:latin typeface="Calibri"/>
               </a:rPr>
-              <a:t>Select → Frame → Architect → Value → Close → Expand</a:t>
+              <a:t>A repeatable, six-stage lifecycle</a:t>
             </a:r>
           </a:p>
           <a:p>
             <a:pPr algn="l">
               <a:spcAft>
-                <a:spcPts val="1200"/>
+                <a:spcPts val="1100"/>
               </a:spcAft>
             </a:pPr>
             <a:r>
-              <a:rPr sz="1800" b="1">
+              <a:rPr sz="1600" b="1">
                 <a:solidFill>
                   <a:srgbClr val="00BCEB"/>
                 </a:solidFill>
@@ -12542,23 +16844,23 @@
               <a:t>•  </a:t>
             </a:r>
             <a:r>
-              <a:rPr sz="1800" b="0">
+              <a:rPr sz="1600" b="0">
                 <a:solidFill>
                   <a:srgbClr val="F2F4F8"/>
                 </a:solidFill>
                 <a:latin typeface="Calibri"/>
               </a:rPr>
-              <a:t>Plays: Splunk-attach, SOC modernization, full-stack DX, passive OT, consolidation TCO</a:t>
+              <a:t>A library of packaged plays</a:t>
             </a:r>
           </a:p>
           <a:p>
             <a:pPr algn="l">
               <a:spcAft>
-                <a:spcPts val="1200"/>
+                <a:spcPts val="1100"/>
               </a:spcAft>
             </a:pPr>
             <a:r>
-              <a:rPr sz="1800" b="1">
+              <a:rPr sz="1600" b="1">
                 <a:solidFill>
                   <a:srgbClr val="00BCEB"/>
                 </a:solidFill>
@@ -12567,20 +16869,639 @@
               <a:t>•  </a:t>
             </a:r>
             <a:r>
-              <a:rPr sz="1800" b="0">
+              <a:rPr sz="1600" b="0">
                 <a:solidFill>
                   <a:srgbClr val="F2F4F8"/>
                 </a:solidFill>
                 <a:latin typeface="Calibri"/>
               </a:rPr>
-              <a:t>Each play = discovery script + reference architecture + value case + proof</a:t>
-            </a:r>
-          </a:p>
-        </p:txBody>
-      </p:sp>
-      <p:sp>
-        <p:nvSpPr>
-          <p:cNvPr id="8" name="TextBox 7"/>
+              <a:t>Play = script + architecture + value + proof</a:t>
+            </a:r>
+          </a:p>
+          <a:p>
+            <a:pPr algn="l">
+              <a:spcAft>
+                <a:spcPts val="1100"/>
+              </a:spcAft>
+            </a:pPr>
+            <a:r>
+              <a:rPr sz="1600" b="1">
+                <a:solidFill>
+                  <a:srgbClr val="00BCEB"/>
+                </a:solidFill>
+                <a:latin typeface="Calibri"/>
+              </a:rPr>
+              <a:t>•  </a:t>
+            </a:r>
+            <a:r>
+              <a:rPr sz="1600" b="0">
+                <a:solidFill>
+                  <a:srgbClr val="F2F4F8"/>
+                </a:solidFill>
+                <a:latin typeface="Calibri"/>
+              </a:rPr>
+              <a:t>Scales; survives key-person risk</a:t>
+            </a:r>
+          </a:p>
+        </p:txBody>
+      </p:sp>
+      <p:sp>
+        <p:nvSpPr>
+          <p:cNvPr id="8" name="Rectangle 7"/>
+          <p:cNvSpPr/>
+          <p:nvPr/>
+        </p:nvSpPr>
+        <p:spPr>
+          <a:xfrm>
+            <a:off x="6263640" y="2331720"/>
+            <a:ext cx="5349240" cy="3931920"/>
+          </a:xfrm>
+          <a:prstGeom prst="rect">
+            <a:avLst/>
+          </a:prstGeom>
+          <a:solidFill>
+            <a:srgbClr val="1A1A2E"/>
+          </a:solidFill>
+          <a:ln w="12700">
+            <a:solidFill>
+              <a:srgbClr val="2C2C3A"/>
+            </a:solidFill>
+          </a:ln>
+          <a:effectLst/>
+        </p:spPr>
+        <p:style>
+          <a:lnRef idx="1">
+            <a:schemeClr val="accent1"/>
+          </a:lnRef>
+          <a:fillRef idx="3">
+            <a:schemeClr val="accent1"/>
+          </a:fillRef>
+          <a:effectRef idx="2">
+            <a:schemeClr val="accent1"/>
+          </a:effectRef>
+          <a:fontRef idx="minor">
+            <a:schemeClr val="lt1"/>
+          </a:fontRef>
+        </p:style>
+        <p:txBody>
+          <a:bodyPr rtlCol="0" anchor="ctr"/>
+          <a:lstStyle/>
+          <a:p>
+            <a:pPr algn="ctr"/>
+          </a:p>
+        </p:txBody>
+      </p:sp>
+      <p:sp>
+        <p:nvSpPr>
+          <p:cNvPr id="9" name="Rounded Rectangle 8"/>
+          <p:cNvSpPr/>
+          <p:nvPr/>
+        </p:nvSpPr>
+        <p:spPr>
+          <a:xfrm>
+            <a:off x="6629400" y="2606039"/>
+            <a:ext cx="4617720" cy="365759"/>
+          </a:xfrm>
+          <a:prstGeom prst="roundRect">
+            <a:avLst/>
+          </a:prstGeom>
+          <a:solidFill>
+            <a:srgbClr val="24243C"/>
+          </a:solidFill>
+          <a:ln w="9525">
+            <a:solidFill>
+              <a:srgbClr val="9AA3B2"/>
+            </a:solidFill>
+          </a:ln>
+          <a:effectLst/>
+        </p:spPr>
+        <p:style>
+          <a:lnRef idx="1">
+            <a:schemeClr val="accent1"/>
+          </a:lnRef>
+          <a:fillRef idx="3">
+            <a:schemeClr val="accent1"/>
+          </a:fillRef>
+          <a:effectRef idx="2">
+            <a:schemeClr val="accent1"/>
+          </a:effectRef>
+          <a:fontRef idx="minor">
+            <a:schemeClr val="lt1"/>
+          </a:fontRef>
+        </p:style>
+        <p:txBody>
+          <a:bodyPr rtlCol="0" anchor="ctr" wrap="square" lIns="45720" rIns="45720" tIns="18288" bIns="18288"/>
+          <a:lstStyle/>
+          <a:p>
+            <a:pPr algn="ctr"/>
+            <a:r>
+              <a:rPr sz="1100" b="0">
+                <a:solidFill>
+                  <a:srgbClr val="F2F4F8"/>
+                </a:solidFill>
+                <a:latin typeface="Calibri"/>
+              </a:rPr>
+              <a:t>Select</a:t>
+            </a:r>
+          </a:p>
+        </p:txBody>
+      </p:sp>
+      <p:sp>
+        <p:nvSpPr>
+          <p:cNvPr id="10" name="Down Arrow 9"/>
+          <p:cNvSpPr/>
+          <p:nvPr/>
+        </p:nvSpPr>
+        <p:spPr>
+          <a:xfrm>
+            <a:off x="8791955" y="2990087"/>
+            <a:ext cx="292608" cy="192024"/>
+          </a:xfrm>
+          <a:prstGeom prst="downArrow">
+            <a:avLst/>
+          </a:prstGeom>
+          <a:solidFill>
+            <a:srgbClr val="00BCEB"/>
+          </a:solidFill>
+          <a:ln>
+            <a:noFill/>
+          </a:ln>
+          <a:effectLst/>
+        </p:spPr>
+        <p:style>
+          <a:lnRef idx="1">
+            <a:schemeClr val="accent1"/>
+          </a:lnRef>
+          <a:fillRef idx="3">
+            <a:schemeClr val="accent1"/>
+          </a:fillRef>
+          <a:effectRef idx="2">
+            <a:schemeClr val="accent1"/>
+          </a:effectRef>
+          <a:fontRef idx="minor">
+            <a:schemeClr val="lt1"/>
+          </a:fontRef>
+        </p:style>
+        <p:txBody>
+          <a:bodyPr rtlCol="0" anchor="ctr"/>
+          <a:lstStyle/>
+          <a:p>
+            <a:pPr algn="ctr"/>
+          </a:p>
+        </p:txBody>
+      </p:sp>
+      <p:sp>
+        <p:nvSpPr>
+          <p:cNvPr id="11" name="Rounded Rectangle 10"/>
+          <p:cNvSpPr/>
+          <p:nvPr/>
+        </p:nvSpPr>
+        <p:spPr>
+          <a:xfrm>
+            <a:off x="6629400" y="3209544"/>
+            <a:ext cx="4617720" cy="365759"/>
+          </a:xfrm>
+          <a:prstGeom prst="roundRect">
+            <a:avLst/>
+          </a:prstGeom>
+          <a:solidFill>
+            <a:srgbClr val="24243C"/>
+          </a:solidFill>
+          <a:ln w="9525">
+            <a:solidFill>
+              <a:srgbClr val="9AA3B2"/>
+            </a:solidFill>
+          </a:ln>
+          <a:effectLst/>
+        </p:spPr>
+        <p:style>
+          <a:lnRef idx="1">
+            <a:schemeClr val="accent1"/>
+          </a:lnRef>
+          <a:fillRef idx="3">
+            <a:schemeClr val="accent1"/>
+          </a:fillRef>
+          <a:effectRef idx="2">
+            <a:schemeClr val="accent1"/>
+          </a:effectRef>
+          <a:fontRef idx="minor">
+            <a:schemeClr val="lt1"/>
+          </a:fontRef>
+        </p:style>
+        <p:txBody>
+          <a:bodyPr rtlCol="0" anchor="ctr" wrap="square" lIns="45720" rIns="45720" tIns="18288" bIns="18288"/>
+          <a:lstStyle/>
+          <a:p>
+            <a:pPr algn="ctr"/>
+            <a:r>
+              <a:rPr sz="1100" b="0">
+                <a:solidFill>
+                  <a:srgbClr val="F2F4F8"/>
+                </a:solidFill>
+                <a:latin typeface="Calibri"/>
+              </a:rPr>
+              <a:t>Frame</a:t>
+            </a:r>
+          </a:p>
+        </p:txBody>
+      </p:sp>
+      <p:sp>
+        <p:nvSpPr>
+          <p:cNvPr id="12" name="Down Arrow 11"/>
+          <p:cNvSpPr/>
+          <p:nvPr/>
+        </p:nvSpPr>
+        <p:spPr>
+          <a:xfrm>
+            <a:off x="8791955" y="3593591"/>
+            <a:ext cx="292608" cy="192024"/>
+          </a:xfrm>
+          <a:prstGeom prst="downArrow">
+            <a:avLst/>
+          </a:prstGeom>
+          <a:solidFill>
+            <a:srgbClr val="00BCEB"/>
+          </a:solidFill>
+          <a:ln>
+            <a:noFill/>
+          </a:ln>
+          <a:effectLst/>
+        </p:spPr>
+        <p:style>
+          <a:lnRef idx="1">
+            <a:schemeClr val="accent1"/>
+          </a:lnRef>
+          <a:fillRef idx="3">
+            <a:schemeClr val="accent1"/>
+          </a:fillRef>
+          <a:effectRef idx="2">
+            <a:schemeClr val="accent1"/>
+          </a:effectRef>
+          <a:fontRef idx="minor">
+            <a:schemeClr val="lt1"/>
+          </a:fontRef>
+        </p:style>
+        <p:txBody>
+          <a:bodyPr rtlCol="0" anchor="ctr"/>
+          <a:lstStyle/>
+          <a:p>
+            <a:pPr algn="ctr"/>
+          </a:p>
+        </p:txBody>
+      </p:sp>
+      <p:sp>
+        <p:nvSpPr>
+          <p:cNvPr id="13" name="Rounded Rectangle 12"/>
+          <p:cNvSpPr/>
+          <p:nvPr/>
+        </p:nvSpPr>
+        <p:spPr>
+          <a:xfrm>
+            <a:off x="6629400" y="3813048"/>
+            <a:ext cx="4617720" cy="365759"/>
+          </a:xfrm>
+          <a:prstGeom prst="roundRect">
+            <a:avLst/>
+          </a:prstGeom>
+          <a:solidFill>
+            <a:srgbClr val="24243C"/>
+          </a:solidFill>
+          <a:ln w="9525">
+            <a:solidFill>
+              <a:srgbClr val="9AA3B2"/>
+            </a:solidFill>
+          </a:ln>
+          <a:effectLst/>
+        </p:spPr>
+        <p:style>
+          <a:lnRef idx="1">
+            <a:schemeClr val="accent1"/>
+          </a:lnRef>
+          <a:fillRef idx="3">
+            <a:schemeClr val="accent1"/>
+          </a:fillRef>
+          <a:effectRef idx="2">
+            <a:schemeClr val="accent1"/>
+          </a:effectRef>
+          <a:fontRef idx="minor">
+            <a:schemeClr val="lt1"/>
+          </a:fontRef>
+        </p:style>
+        <p:txBody>
+          <a:bodyPr rtlCol="0" anchor="ctr" wrap="square" lIns="45720" rIns="45720" tIns="18288" bIns="18288"/>
+          <a:lstStyle/>
+          <a:p>
+            <a:pPr algn="ctr"/>
+            <a:r>
+              <a:rPr sz="1100" b="0">
+                <a:solidFill>
+                  <a:srgbClr val="F2F4F8"/>
+                </a:solidFill>
+                <a:latin typeface="Calibri"/>
+              </a:rPr>
+              <a:t>Architect</a:t>
+            </a:r>
+          </a:p>
+        </p:txBody>
+      </p:sp>
+      <p:sp>
+        <p:nvSpPr>
+          <p:cNvPr id="14" name="Down Arrow 13"/>
+          <p:cNvSpPr/>
+          <p:nvPr/>
+        </p:nvSpPr>
+        <p:spPr>
+          <a:xfrm>
+            <a:off x="8791955" y="4197096"/>
+            <a:ext cx="292608" cy="192024"/>
+          </a:xfrm>
+          <a:prstGeom prst="downArrow">
+            <a:avLst/>
+          </a:prstGeom>
+          <a:solidFill>
+            <a:srgbClr val="00BCEB"/>
+          </a:solidFill>
+          <a:ln>
+            <a:noFill/>
+          </a:ln>
+          <a:effectLst/>
+        </p:spPr>
+        <p:style>
+          <a:lnRef idx="1">
+            <a:schemeClr val="accent1"/>
+          </a:lnRef>
+          <a:fillRef idx="3">
+            <a:schemeClr val="accent1"/>
+          </a:fillRef>
+          <a:effectRef idx="2">
+            <a:schemeClr val="accent1"/>
+          </a:effectRef>
+          <a:fontRef idx="minor">
+            <a:schemeClr val="lt1"/>
+          </a:fontRef>
+        </p:style>
+        <p:txBody>
+          <a:bodyPr rtlCol="0" anchor="ctr"/>
+          <a:lstStyle/>
+          <a:p>
+            <a:pPr algn="ctr"/>
+          </a:p>
+        </p:txBody>
+      </p:sp>
+      <p:sp>
+        <p:nvSpPr>
+          <p:cNvPr id="15" name="Rounded Rectangle 14"/>
+          <p:cNvSpPr/>
+          <p:nvPr/>
+        </p:nvSpPr>
+        <p:spPr>
+          <a:xfrm>
+            <a:off x="6629400" y="4416552"/>
+            <a:ext cx="4617720" cy="365759"/>
+          </a:xfrm>
+          <a:prstGeom prst="roundRect">
+            <a:avLst/>
+          </a:prstGeom>
+          <a:solidFill>
+            <a:srgbClr val="24243C"/>
+          </a:solidFill>
+          <a:ln w="9525">
+            <a:solidFill>
+              <a:srgbClr val="9AA3B2"/>
+            </a:solidFill>
+          </a:ln>
+          <a:effectLst/>
+        </p:spPr>
+        <p:style>
+          <a:lnRef idx="1">
+            <a:schemeClr val="accent1"/>
+          </a:lnRef>
+          <a:fillRef idx="3">
+            <a:schemeClr val="accent1"/>
+          </a:fillRef>
+          <a:effectRef idx="2">
+            <a:schemeClr val="accent1"/>
+          </a:effectRef>
+          <a:fontRef idx="minor">
+            <a:schemeClr val="lt1"/>
+          </a:fontRef>
+        </p:style>
+        <p:txBody>
+          <a:bodyPr rtlCol="0" anchor="ctr" wrap="square" lIns="45720" rIns="45720" tIns="18288" bIns="18288"/>
+          <a:lstStyle/>
+          <a:p>
+            <a:pPr algn="ctr"/>
+            <a:r>
+              <a:rPr sz="1100" b="0">
+                <a:solidFill>
+                  <a:srgbClr val="F2F4F8"/>
+                </a:solidFill>
+                <a:latin typeface="Calibri"/>
+              </a:rPr>
+              <a:t>Value</a:t>
+            </a:r>
+          </a:p>
+        </p:txBody>
+      </p:sp>
+      <p:sp>
+        <p:nvSpPr>
+          <p:cNvPr id="16" name="Down Arrow 15"/>
+          <p:cNvSpPr/>
+          <p:nvPr/>
+        </p:nvSpPr>
+        <p:spPr>
+          <a:xfrm>
+            <a:off x="8791955" y="4800600"/>
+            <a:ext cx="292608" cy="192024"/>
+          </a:xfrm>
+          <a:prstGeom prst="downArrow">
+            <a:avLst/>
+          </a:prstGeom>
+          <a:solidFill>
+            <a:srgbClr val="00BCEB"/>
+          </a:solidFill>
+          <a:ln>
+            <a:noFill/>
+          </a:ln>
+          <a:effectLst/>
+        </p:spPr>
+        <p:style>
+          <a:lnRef idx="1">
+            <a:schemeClr val="accent1"/>
+          </a:lnRef>
+          <a:fillRef idx="3">
+            <a:schemeClr val="accent1"/>
+          </a:fillRef>
+          <a:effectRef idx="2">
+            <a:schemeClr val="accent1"/>
+          </a:effectRef>
+          <a:fontRef idx="minor">
+            <a:schemeClr val="lt1"/>
+          </a:fontRef>
+        </p:style>
+        <p:txBody>
+          <a:bodyPr rtlCol="0" anchor="ctr"/>
+          <a:lstStyle/>
+          <a:p>
+            <a:pPr algn="ctr"/>
+          </a:p>
+        </p:txBody>
+      </p:sp>
+      <p:sp>
+        <p:nvSpPr>
+          <p:cNvPr id="17" name="Rounded Rectangle 16"/>
+          <p:cNvSpPr/>
+          <p:nvPr/>
+        </p:nvSpPr>
+        <p:spPr>
+          <a:xfrm>
+            <a:off x="6629400" y="5020056"/>
+            <a:ext cx="4617720" cy="365759"/>
+          </a:xfrm>
+          <a:prstGeom prst="roundRect">
+            <a:avLst/>
+          </a:prstGeom>
+          <a:solidFill>
+            <a:srgbClr val="24243C"/>
+          </a:solidFill>
+          <a:ln w="9525">
+            <a:solidFill>
+              <a:srgbClr val="9AA3B2"/>
+            </a:solidFill>
+          </a:ln>
+          <a:effectLst/>
+        </p:spPr>
+        <p:style>
+          <a:lnRef idx="1">
+            <a:schemeClr val="accent1"/>
+          </a:lnRef>
+          <a:fillRef idx="3">
+            <a:schemeClr val="accent1"/>
+          </a:fillRef>
+          <a:effectRef idx="2">
+            <a:schemeClr val="accent1"/>
+          </a:effectRef>
+          <a:fontRef idx="minor">
+            <a:schemeClr val="lt1"/>
+          </a:fontRef>
+        </p:style>
+        <p:txBody>
+          <a:bodyPr rtlCol="0" anchor="ctr" wrap="square" lIns="45720" rIns="45720" tIns="18288" bIns="18288"/>
+          <a:lstStyle/>
+          <a:p>
+            <a:pPr algn="ctr"/>
+            <a:r>
+              <a:rPr sz="1100" b="0">
+                <a:solidFill>
+                  <a:srgbClr val="F2F4F8"/>
+                </a:solidFill>
+                <a:latin typeface="Calibri"/>
+              </a:rPr>
+              <a:t>Close</a:t>
+            </a:r>
+          </a:p>
+        </p:txBody>
+      </p:sp>
+      <p:sp>
+        <p:nvSpPr>
+          <p:cNvPr id="18" name="Down Arrow 17"/>
+          <p:cNvSpPr/>
+          <p:nvPr/>
+        </p:nvSpPr>
+        <p:spPr>
+          <a:xfrm>
+            <a:off x="8791955" y="5404104"/>
+            <a:ext cx="292608" cy="192024"/>
+          </a:xfrm>
+          <a:prstGeom prst="downArrow">
+            <a:avLst/>
+          </a:prstGeom>
+          <a:solidFill>
+            <a:srgbClr val="00BCEB"/>
+          </a:solidFill>
+          <a:ln>
+            <a:noFill/>
+          </a:ln>
+          <a:effectLst/>
+        </p:spPr>
+        <p:style>
+          <a:lnRef idx="1">
+            <a:schemeClr val="accent1"/>
+          </a:lnRef>
+          <a:fillRef idx="3">
+            <a:schemeClr val="accent1"/>
+          </a:fillRef>
+          <a:effectRef idx="2">
+            <a:schemeClr val="accent1"/>
+          </a:effectRef>
+          <a:fontRef idx="minor">
+            <a:schemeClr val="lt1"/>
+          </a:fontRef>
+        </p:style>
+        <p:txBody>
+          <a:bodyPr rtlCol="0" anchor="ctr"/>
+          <a:lstStyle/>
+          <a:p>
+            <a:pPr algn="ctr"/>
+          </a:p>
+        </p:txBody>
+      </p:sp>
+      <p:sp>
+        <p:nvSpPr>
+          <p:cNvPr id="19" name="Rounded Rectangle 18"/>
+          <p:cNvSpPr/>
+          <p:nvPr/>
+        </p:nvSpPr>
+        <p:spPr>
+          <a:xfrm>
+            <a:off x="6629400" y="5623560"/>
+            <a:ext cx="4617720" cy="365759"/>
+          </a:xfrm>
+          <a:prstGeom prst="roundRect">
+            <a:avLst/>
+          </a:prstGeom>
+          <a:solidFill>
+            <a:srgbClr val="00BCEB"/>
+          </a:solidFill>
+          <a:ln>
+            <a:noFill/>
+          </a:ln>
+          <a:effectLst/>
+        </p:spPr>
+        <p:style>
+          <a:lnRef idx="1">
+            <a:schemeClr val="accent1"/>
+          </a:lnRef>
+          <a:fillRef idx="3">
+            <a:schemeClr val="accent1"/>
+          </a:fillRef>
+          <a:effectRef idx="2">
+            <a:schemeClr val="accent1"/>
+          </a:effectRef>
+          <a:fontRef idx="minor">
+            <a:schemeClr val="lt1"/>
+          </a:fontRef>
+        </p:style>
+        <p:txBody>
+          <a:bodyPr rtlCol="0" anchor="ctr" wrap="square" lIns="45720" rIns="45720" tIns="18288" bIns="18288"/>
+          <a:lstStyle/>
+          <a:p>
+            <a:pPr algn="ctr"/>
+            <a:r>
+              <a:rPr sz="1100" b="1">
+                <a:solidFill>
+                  <a:srgbClr val="101014"/>
+                </a:solidFill>
+                <a:latin typeface="Calibri"/>
+              </a:rPr>
+              <a:t>Expand</a:t>
+            </a:r>
+          </a:p>
+        </p:txBody>
+      </p:sp>
+      <p:sp>
+        <p:nvSpPr>
+          <p:cNvPr id="20" name="TextBox 19"/>
           <p:cNvSpPr txBox="1"/>
           <p:nvPr/>
         </p:nvSpPr>
@@ -12727,7 +17648,7 @@
         <p:spPr>
           <a:xfrm>
             <a:off x="548640" y="868680"/>
-            <a:ext cx="1280160" cy="50800"/>
+            <a:ext cx="1280160" cy="50292"/>
           </a:xfrm>
           <a:prstGeom prst="rect">
             <a:avLst/>
@@ -12738,6 +17659,7 @@
           <a:ln>
             <a:noFill/>
           </a:ln>
+          <a:effectLst/>
         </p:spPr>
         <p:style>
           <a:lnRef idx="1">
@@ -12789,7 +17711,7 @@
               </a:spcAft>
             </a:pPr>
             <a:r>
-              <a:rPr sz="2800" b="1">
+              <a:rPr sz="2700" b="1">
                 <a:solidFill>
                   <a:srgbClr val="F2F4F8"/>
                 </a:solidFill>
@@ -12809,7 +17731,7 @@
         <p:spPr>
           <a:xfrm>
             <a:off x="548640" y="2331720"/>
-            <a:ext cx="11064240" cy="3931920"/>
+            <a:ext cx="5486400" cy="3931920"/>
           </a:xfrm>
           <a:prstGeom prst="rect">
             <a:avLst/>
@@ -12822,6 +17744,7 @@
               <a:srgbClr val="2C2C3A"/>
             </a:solidFill>
           </a:ln>
+          <a:effectLst/>
         </p:spPr>
         <p:style>
           <a:lnRef idx="1">
@@ -12853,8 +17776,8 @@
         </p:nvSpPr>
         <p:spPr>
           <a:xfrm>
-            <a:off x="914400" y="2560320"/>
-            <a:ext cx="10332720" cy="3566160"/>
+            <a:off x="822960" y="2542032"/>
+            <a:ext cx="4937760" cy="3566160"/>
           </a:xfrm>
           <a:prstGeom prst="rect">
             <a:avLst/>
@@ -12869,11 +17792,11 @@
           <a:p>
             <a:pPr algn="l">
               <a:spcAft>
-                <a:spcPts val="1200"/>
+                <a:spcPts val="1100"/>
               </a:spcAft>
             </a:pPr>
             <a:r>
-              <a:rPr sz="1800" b="1">
+              <a:rPr sz="1600" b="1">
                 <a:solidFill>
                   <a:srgbClr val="00BCEB"/>
                 </a:solidFill>
@@ -12882,23 +17805,23 @@
               <a:t>•  </a:t>
             </a:r>
             <a:r>
-              <a:rPr sz="1800" b="0">
+              <a:rPr sz="1600" b="0">
                 <a:solidFill>
                   <a:srgbClr val="F2F4F8"/>
                 </a:solidFill>
                 <a:latin typeface="Calibri"/>
               </a:rPr>
-              <a:t>OT-heavy hub + NIS2 + a Terminal 4 build</a:t>
+              <a:t>OT hub + NIS2 + a Terminal 4 build</a:t>
             </a:r>
           </a:p>
           <a:p>
             <a:pPr algn="l">
               <a:spcAft>
-                <a:spcPts val="1200"/>
+                <a:spcPts val="1100"/>
               </a:spcAft>
             </a:pPr>
             <a:r>
-              <a:rPr sz="1800" b="1">
+              <a:rPr sz="1600" b="1">
                 <a:solidFill>
                   <a:srgbClr val="00BCEB"/>
                 </a:solidFill>
@@ -12907,23 +17830,23 @@
               <a:t>•  </a:t>
             </a:r>
             <a:r>
-              <a:rPr sz="1800" b="0">
+              <a:rPr sz="1600" b="0">
                 <a:solidFill>
                   <a:srgbClr val="F2F4F8"/>
                 </a:solidFill>
                 <a:latin typeface="Calibri"/>
               </a:rPr>
-              <a:t>SI about to lock the architecture — pod convened</a:t>
+              <a:t>SI about to lock — pod convened</a:t>
             </a:r>
           </a:p>
           <a:p>
             <a:pPr algn="l">
               <a:spcAft>
-                <a:spcPts val="1200"/>
+                <a:spcPts val="1100"/>
               </a:spcAft>
             </a:pPr>
             <a:r>
-              <a:rPr sz="1800" b="1">
+              <a:rPr sz="1600" b="1">
                 <a:solidFill>
                   <a:srgbClr val="00BCEB"/>
                 </a:solidFill>
@@ -12932,23 +17855,23 @@
               <a:t>•  </a:t>
             </a:r>
             <a:r>
-              <a:rPr sz="1800" b="0">
+              <a:rPr sz="1600" b="0">
                 <a:solidFill>
                   <a:srgbClr val="F2F4F8"/>
                 </a:solidFill>
                 <a:latin typeface="Calibri"/>
               </a:rPr>
-              <a:t>Reframed as board-level operational resilience</a:t>
+              <a:t>Reframed as board-level resilience</a:t>
             </a:r>
           </a:p>
           <a:p>
             <a:pPr algn="l">
               <a:spcAft>
-                <a:spcPts val="1200"/>
+                <a:spcPts val="1100"/>
               </a:spcAft>
             </a:pPr>
             <a:r>
-              <a:rPr sz="1800" b="1">
+              <a:rPr sz="1600" b="1">
                 <a:solidFill>
                   <a:srgbClr val="00BCEB"/>
                 </a:solidFill>
@@ -12957,23 +17880,23 @@
               <a:t>•  </a:t>
             </a:r>
             <a:r>
-              <a:rPr sz="1800" b="0">
+              <a:rPr sz="1600" b="0">
                 <a:solidFill>
                   <a:srgbClr val="F2F4F8"/>
                 </a:solidFill>
                 <a:latin typeface="Calibri"/>
               </a:rPr>
-              <a:t>One X-Arch architecture: passive OT + segmentation + SD-WAN + SOC + edge AI</a:t>
+              <a:t>One architecture across the stack</a:t>
             </a:r>
           </a:p>
           <a:p>
             <a:pPr algn="l">
               <a:spcAft>
-                <a:spcPts val="1200"/>
+                <a:spcPts val="1100"/>
               </a:spcAft>
             </a:pPr>
             <a:r>
-              <a:rPr sz="1800" b="1">
+              <a:rPr sz="1600" b="1">
                 <a:solidFill>
                   <a:srgbClr val="00BCEB"/>
                 </a:solidFill>
@@ -12982,20 +17905,278 @@
               <a:t>•  </a:t>
             </a:r>
             <a:r>
-              <a:rPr sz="1800" b="0">
+              <a:rPr sz="1600" b="0">
                 <a:solidFill>
                   <a:srgbClr val="F2F4F8"/>
                 </a:solidFill>
                 <a:latin typeface="Calibri"/>
               </a:rPr>
-              <a:t>Won OT trust (read-only), then handed back to scale</a:t>
-            </a:r>
-          </a:p>
-        </p:txBody>
-      </p:sp>
-      <p:sp>
-        <p:nvSpPr>
-          <p:cNvPr id="8" name="TextBox 7"/>
+              <a:t>Won OT trust, then handed back</a:t>
+            </a:r>
+          </a:p>
+        </p:txBody>
+      </p:sp>
+      <p:sp>
+        <p:nvSpPr>
+          <p:cNvPr id="8" name="Rectangle 7"/>
+          <p:cNvSpPr/>
+          <p:nvPr/>
+        </p:nvSpPr>
+        <p:spPr>
+          <a:xfrm>
+            <a:off x="6263640" y="2331720"/>
+            <a:ext cx="5349240" cy="3931920"/>
+          </a:xfrm>
+          <a:prstGeom prst="rect">
+            <a:avLst/>
+          </a:prstGeom>
+          <a:solidFill>
+            <a:srgbClr val="1A1A2E"/>
+          </a:solidFill>
+          <a:ln w="12700">
+            <a:solidFill>
+              <a:srgbClr val="2C2C3A"/>
+            </a:solidFill>
+          </a:ln>
+          <a:effectLst/>
+        </p:spPr>
+        <p:style>
+          <a:lnRef idx="1">
+            <a:schemeClr val="accent1"/>
+          </a:lnRef>
+          <a:fillRef idx="3">
+            <a:schemeClr val="accent1"/>
+          </a:fillRef>
+          <a:effectRef idx="2">
+            <a:schemeClr val="accent1"/>
+          </a:effectRef>
+          <a:fontRef idx="minor">
+            <a:schemeClr val="lt1"/>
+          </a:fontRef>
+        </p:style>
+        <p:txBody>
+          <a:bodyPr rtlCol="0" anchor="ctr"/>
+          <a:lstStyle/>
+          <a:p>
+            <a:pPr algn="ctr"/>
+          </a:p>
+        </p:txBody>
+      </p:sp>
+      <p:sp>
+        <p:nvSpPr>
+          <p:cNvPr id="9" name="Rounded Rectangle 8"/>
+          <p:cNvSpPr/>
+          <p:nvPr/>
+        </p:nvSpPr>
+        <p:spPr>
+          <a:xfrm>
+            <a:off x="6629400" y="5244083"/>
+            <a:ext cx="4617720" cy="699515"/>
+          </a:xfrm>
+          <a:prstGeom prst="roundRect">
+            <a:avLst/>
+          </a:prstGeom>
+          <a:solidFill>
+            <a:srgbClr val="00A4FD"/>
+          </a:solidFill>
+          <a:ln>
+            <a:noFill/>
+          </a:ln>
+          <a:effectLst/>
+        </p:spPr>
+        <p:style>
+          <a:lnRef idx="1">
+            <a:schemeClr val="accent1"/>
+          </a:lnRef>
+          <a:fillRef idx="3">
+            <a:schemeClr val="accent1"/>
+          </a:fillRef>
+          <a:effectRef idx="2">
+            <a:schemeClr val="accent1"/>
+          </a:effectRef>
+          <a:fontRef idx="minor">
+            <a:schemeClr val="lt1"/>
+          </a:fontRef>
+        </p:style>
+        <p:txBody>
+          <a:bodyPr rtlCol="0" anchor="ctr" wrap="square" lIns="45720" rIns="45720" tIns="18288" bIns="18288"/>
+          <a:lstStyle/>
+          <a:p>
+            <a:pPr algn="ctr"/>
+            <a:r>
+              <a:rPr sz="1200" b="1">
+                <a:solidFill>
+                  <a:srgbClr val="101014"/>
+                </a:solidFill>
+                <a:latin typeface="Calibri"/>
+              </a:rPr>
+              <a:t>OT — read-only / passive</a:t>
+            </a:r>
+          </a:p>
+        </p:txBody>
+      </p:sp>
+      <p:sp>
+        <p:nvSpPr>
+          <p:cNvPr id="10" name="Rounded Rectangle 9"/>
+          <p:cNvSpPr/>
+          <p:nvPr/>
+        </p:nvSpPr>
+        <p:spPr>
+          <a:xfrm>
+            <a:off x="6629400" y="4379975"/>
+            <a:ext cx="4617720" cy="699515"/>
+          </a:xfrm>
+          <a:prstGeom prst="roundRect">
+            <a:avLst/>
+          </a:prstGeom>
+          <a:solidFill>
+            <a:srgbClr val="00BCEB"/>
+          </a:solidFill>
+          <a:ln>
+            <a:noFill/>
+          </a:ln>
+          <a:effectLst/>
+        </p:spPr>
+        <p:style>
+          <a:lnRef idx="1">
+            <a:schemeClr val="accent1"/>
+          </a:lnRef>
+          <a:fillRef idx="3">
+            <a:schemeClr val="accent1"/>
+          </a:fillRef>
+          <a:effectRef idx="2">
+            <a:schemeClr val="accent1"/>
+          </a:effectRef>
+          <a:fontRef idx="minor">
+            <a:schemeClr val="lt1"/>
+          </a:fontRef>
+        </p:style>
+        <p:txBody>
+          <a:bodyPr rtlCol="0" anchor="ctr" wrap="square" lIns="45720" rIns="45720" tIns="18288" bIns="18288"/>
+          <a:lstStyle/>
+          <a:p>
+            <a:pPr algn="ctr"/>
+            <a:r>
+              <a:rPr sz="1200" b="1">
+                <a:solidFill>
+                  <a:srgbClr val="101014"/>
+                </a:solidFill>
+                <a:latin typeface="Calibri"/>
+              </a:rPr>
+              <a:t>Secure Networking — segmentation + SD-WAN</a:t>
+            </a:r>
+          </a:p>
+        </p:txBody>
+      </p:sp>
+      <p:sp>
+        <p:nvSpPr>
+          <p:cNvPr id="11" name="Rounded Rectangle 10"/>
+          <p:cNvSpPr/>
+          <p:nvPr/>
+        </p:nvSpPr>
+        <p:spPr>
+          <a:xfrm>
+            <a:off x="6629400" y="3515868"/>
+            <a:ext cx="4617720" cy="699515"/>
+          </a:xfrm>
+          <a:prstGeom prst="roundRect">
+            <a:avLst/>
+          </a:prstGeom>
+          <a:solidFill>
+            <a:srgbClr val="00A4FD"/>
+          </a:solidFill>
+          <a:ln>
+            <a:noFill/>
+          </a:ln>
+          <a:effectLst/>
+        </p:spPr>
+        <p:style>
+          <a:lnRef idx="1">
+            <a:schemeClr val="accent1"/>
+          </a:lnRef>
+          <a:fillRef idx="3">
+            <a:schemeClr val="accent1"/>
+          </a:fillRef>
+          <a:effectRef idx="2">
+            <a:schemeClr val="accent1"/>
+          </a:effectRef>
+          <a:fontRef idx="minor">
+            <a:schemeClr val="lt1"/>
+          </a:fontRef>
+        </p:style>
+        <p:txBody>
+          <a:bodyPr rtlCol="0" anchor="ctr" wrap="square" lIns="45720" rIns="45720" tIns="18288" bIns="18288"/>
+          <a:lstStyle/>
+          <a:p>
+            <a:pPr algn="ctr"/>
+            <a:r>
+              <a:rPr sz="1200" b="1">
+                <a:solidFill>
+                  <a:srgbClr val="101014"/>
+                </a:solidFill>
+                <a:latin typeface="Calibri"/>
+              </a:rPr>
+              <a:t>Observability — Splunk OT / ITSI</a:t>
+            </a:r>
+          </a:p>
+        </p:txBody>
+      </p:sp>
+      <p:sp>
+        <p:nvSpPr>
+          <p:cNvPr id="12" name="Rounded Rectangle 11"/>
+          <p:cNvSpPr/>
+          <p:nvPr/>
+        </p:nvSpPr>
+        <p:spPr>
+          <a:xfrm>
+            <a:off x="6629400" y="2651760"/>
+            <a:ext cx="4617720" cy="699515"/>
+          </a:xfrm>
+          <a:prstGeom prst="roundRect">
+            <a:avLst/>
+          </a:prstGeom>
+          <a:solidFill>
+            <a:srgbClr val="00BCEB"/>
+          </a:solidFill>
+          <a:ln>
+            <a:noFill/>
+          </a:ln>
+          <a:effectLst/>
+        </p:spPr>
+        <p:style>
+          <a:lnRef idx="1">
+            <a:schemeClr val="accent1"/>
+          </a:lnRef>
+          <a:fillRef idx="3">
+            <a:schemeClr val="accent1"/>
+          </a:fillRef>
+          <a:effectRef idx="2">
+            <a:schemeClr val="accent1"/>
+          </a:effectRef>
+          <a:fontRef idx="minor">
+            <a:schemeClr val="lt1"/>
+          </a:fontRef>
+        </p:style>
+        <p:txBody>
+          <a:bodyPr rtlCol="0" anchor="ctr" wrap="square" lIns="45720" rIns="45720" tIns="18288" bIns="18288"/>
+          <a:lstStyle/>
+          <a:p>
+            <a:pPr algn="ctr"/>
+            <a:r>
+              <a:rPr sz="1200" b="1">
+                <a:solidFill>
+                  <a:srgbClr val="101014"/>
+                </a:solidFill>
+                <a:latin typeface="Calibri"/>
+              </a:rPr>
+              <a:t>Resilience — Splunk ES + Cisco XDR</a:t>
+            </a:r>
+          </a:p>
+        </p:txBody>
+      </p:sp>
+      <p:sp>
+        <p:nvSpPr>
+          <p:cNvPr id="13" name="TextBox 12"/>
           <p:cNvSpPr txBox="1"/>
           <p:nvPr/>
         </p:nvSpPr>

--- a/Field-CTO-XArch-Business-Case.pptx
+++ b/Field-CTO-XArch-Business-Case.pptx
@@ -5206,7 +5206,458 @@
       </p:sp>
       <p:sp>
         <p:nvSpPr>
-          <p:cNvPr id="7" name="TextBox 6"/>
+          <p:cNvPr id="7" name="Rounded Rectangle 6"/>
+          <p:cNvSpPr/>
+          <p:nvPr/>
+        </p:nvSpPr>
+        <p:spPr>
+          <a:xfrm>
+            <a:off x="860907" y="4892040"/>
+            <a:ext cx="1691640" cy="548640"/>
+          </a:xfrm>
+          <a:prstGeom prst="roundRect">
+            <a:avLst/>
+          </a:prstGeom>
+          <a:solidFill>
+            <a:srgbClr val="24243C"/>
+          </a:solidFill>
+          <a:ln w="12700">
+            <a:solidFill>
+              <a:srgbClr val="00BCEB"/>
+            </a:solidFill>
+          </a:ln>
+          <a:effectLst/>
+        </p:spPr>
+        <p:style>
+          <a:lnRef idx="1">
+            <a:schemeClr val="accent1"/>
+          </a:lnRef>
+          <a:fillRef idx="3">
+            <a:schemeClr val="accent1"/>
+          </a:fillRef>
+          <a:effectRef idx="2">
+            <a:schemeClr val="accent1"/>
+          </a:effectRef>
+          <a:fontRef idx="minor">
+            <a:schemeClr val="lt1"/>
+          </a:fontRef>
+        </p:style>
+        <p:txBody>
+          <a:bodyPr rtlCol="0" anchor="ctr" wrap="square" lIns="45720" rIns="45720" tIns="18288" bIns="18288"/>
+          <a:lstStyle/>
+          <a:p>
+            <a:pPr algn="ctr"/>
+            <a:r>
+              <a:rPr sz="1300" b="1">
+                <a:solidFill>
+                  <a:srgbClr val="00BCEB"/>
+                </a:solidFill>
+                <a:latin typeface="Calibri"/>
+              </a:rPr>
+              <a:t>Sense</a:t>
+            </a:r>
+          </a:p>
+        </p:txBody>
+      </p:sp>
+      <p:sp>
+        <p:nvSpPr>
+          <p:cNvPr id="8" name="Right Arrow 7"/>
+          <p:cNvSpPr/>
+          <p:nvPr/>
+        </p:nvSpPr>
+        <p:spPr>
+          <a:xfrm>
+            <a:off x="2625699" y="5065776"/>
+            <a:ext cx="356616" cy="201168"/>
+          </a:xfrm>
+          <a:prstGeom prst="rightArrow">
+            <a:avLst/>
+          </a:prstGeom>
+          <a:solidFill>
+            <a:srgbClr val="00BCEB"/>
+          </a:solidFill>
+          <a:ln>
+            <a:noFill/>
+          </a:ln>
+          <a:effectLst/>
+        </p:spPr>
+        <p:style>
+          <a:lnRef idx="1">
+            <a:schemeClr val="accent1"/>
+          </a:lnRef>
+          <a:fillRef idx="3">
+            <a:schemeClr val="accent1"/>
+          </a:fillRef>
+          <a:effectRef idx="2">
+            <a:schemeClr val="accent1"/>
+          </a:effectRef>
+          <a:fontRef idx="minor">
+            <a:schemeClr val="lt1"/>
+          </a:fontRef>
+        </p:style>
+        <p:txBody>
+          <a:bodyPr rtlCol="0" anchor="ctr"/>
+          <a:lstStyle/>
+          <a:p>
+            <a:pPr algn="ctr"/>
+          </a:p>
+        </p:txBody>
+      </p:sp>
+      <p:sp>
+        <p:nvSpPr>
+          <p:cNvPr id="9" name="Rounded Rectangle 8"/>
+          <p:cNvSpPr/>
+          <p:nvPr/>
+        </p:nvSpPr>
+        <p:spPr>
+          <a:xfrm>
+            <a:off x="3055467" y="4892040"/>
+            <a:ext cx="1691640" cy="548640"/>
+          </a:xfrm>
+          <a:prstGeom prst="roundRect">
+            <a:avLst/>
+          </a:prstGeom>
+          <a:solidFill>
+            <a:srgbClr val="24243C"/>
+          </a:solidFill>
+          <a:ln w="12700">
+            <a:solidFill>
+              <a:srgbClr val="00BCEB"/>
+            </a:solidFill>
+          </a:ln>
+          <a:effectLst/>
+        </p:spPr>
+        <p:style>
+          <a:lnRef idx="1">
+            <a:schemeClr val="accent1"/>
+          </a:lnRef>
+          <a:fillRef idx="3">
+            <a:schemeClr val="accent1"/>
+          </a:fillRef>
+          <a:effectRef idx="2">
+            <a:schemeClr val="accent1"/>
+          </a:effectRef>
+          <a:fontRef idx="minor">
+            <a:schemeClr val="lt1"/>
+          </a:fontRef>
+        </p:style>
+        <p:txBody>
+          <a:bodyPr rtlCol="0" anchor="ctr" wrap="square" lIns="45720" rIns="45720" tIns="18288" bIns="18288"/>
+          <a:lstStyle/>
+          <a:p>
+            <a:pPr algn="ctr"/>
+            <a:r>
+              <a:rPr sz="1300" b="1">
+                <a:solidFill>
+                  <a:srgbClr val="00BCEB"/>
+                </a:solidFill>
+                <a:latin typeface="Calibri"/>
+              </a:rPr>
+              <a:t>Connect</a:t>
+            </a:r>
+          </a:p>
+        </p:txBody>
+      </p:sp>
+      <p:sp>
+        <p:nvSpPr>
+          <p:cNvPr id="10" name="Right Arrow 9"/>
+          <p:cNvSpPr/>
+          <p:nvPr/>
+        </p:nvSpPr>
+        <p:spPr>
+          <a:xfrm>
+            <a:off x="4820259" y="5065776"/>
+            <a:ext cx="356616" cy="201168"/>
+          </a:xfrm>
+          <a:prstGeom prst="rightArrow">
+            <a:avLst/>
+          </a:prstGeom>
+          <a:solidFill>
+            <a:srgbClr val="00BCEB"/>
+          </a:solidFill>
+          <a:ln>
+            <a:noFill/>
+          </a:ln>
+          <a:effectLst/>
+        </p:spPr>
+        <p:style>
+          <a:lnRef idx="1">
+            <a:schemeClr val="accent1"/>
+          </a:lnRef>
+          <a:fillRef idx="3">
+            <a:schemeClr val="accent1"/>
+          </a:fillRef>
+          <a:effectRef idx="2">
+            <a:schemeClr val="accent1"/>
+          </a:effectRef>
+          <a:fontRef idx="minor">
+            <a:schemeClr val="lt1"/>
+          </a:fontRef>
+        </p:style>
+        <p:txBody>
+          <a:bodyPr rtlCol="0" anchor="ctr"/>
+          <a:lstStyle/>
+          <a:p>
+            <a:pPr algn="ctr"/>
+          </a:p>
+        </p:txBody>
+      </p:sp>
+      <p:sp>
+        <p:nvSpPr>
+          <p:cNvPr id="11" name="Rounded Rectangle 10"/>
+          <p:cNvSpPr/>
+          <p:nvPr/>
+        </p:nvSpPr>
+        <p:spPr>
+          <a:xfrm>
+            <a:off x="5250027" y="4892040"/>
+            <a:ext cx="1691640" cy="548640"/>
+          </a:xfrm>
+          <a:prstGeom prst="roundRect">
+            <a:avLst/>
+          </a:prstGeom>
+          <a:solidFill>
+            <a:srgbClr val="24243C"/>
+          </a:solidFill>
+          <a:ln w="12700">
+            <a:solidFill>
+              <a:srgbClr val="00BCEB"/>
+            </a:solidFill>
+          </a:ln>
+          <a:effectLst/>
+        </p:spPr>
+        <p:style>
+          <a:lnRef idx="1">
+            <a:schemeClr val="accent1"/>
+          </a:lnRef>
+          <a:fillRef idx="3">
+            <a:schemeClr val="accent1"/>
+          </a:fillRef>
+          <a:effectRef idx="2">
+            <a:schemeClr val="accent1"/>
+          </a:effectRef>
+          <a:fontRef idx="minor">
+            <a:schemeClr val="lt1"/>
+          </a:fontRef>
+        </p:style>
+        <p:txBody>
+          <a:bodyPr rtlCol="0" anchor="ctr" wrap="square" lIns="45720" rIns="45720" tIns="18288" bIns="18288"/>
+          <a:lstStyle/>
+          <a:p>
+            <a:pPr algn="ctr"/>
+            <a:r>
+              <a:rPr sz="1300" b="1">
+                <a:solidFill>
+                  <a:srgbClr val="00BCEB"/>
+                </a:solidFill>
+                <a:latin typeface="Calibri"/>
+              </a:rPr>
+              <a:t>Secure</a:t>
+            </a:r>
+          </a:p>
+        </p:txBody>
+      </p:sp>
+      <p:sp>
+        <p:nvSpPr>
+          <p:cNvPr id="12" name="Right Arrow 11"/>
+          <p:cNvSpPr/>
+          <p:nvPr/>
+        </p:nvSpPr>
+        <p:spPr>
+          <a:xfrm>
+            <a:off x="7014819" y="5065776"/>
+            <a:ext cx="356616" cy="201168"/>
+          </a:xfrm>
+          <a:prstGeom prst="rightArrow">
+            <a:avLst/>
+          </a:prstGeom>
+          <a:solidFill>
+            <a:srgbClr val="00BCEB"/>
+          </a:solidFill>
+          <a:ln>
+            <a:noFill/>
+          </a:ln>
+          <a:effectLst/>
+        </p:spPr>
+        <p:style>
+          <a:lnRef idx="1">
+            <a:schemeClr val="accent1"/>
+          </a:lnRef>
+          <a:fillRef idx="3">
+            <a:schemeClr val="accent1"/>
+          </a:fillRef>
+          <a:effectRef idx="2">
+            <a:schemeClr val="accent1"/>
+          </a:effectRef>
+          <a:fontRef idx="minor">
+            <a:schemeClr val="lt1"/>
+          </a:fontRef>
+        </p:style>
+        <p:txBody>
+          <a:bodyPr rtlCol="0" anchor="ctr"/>
+          <a:lstStyle/>
+          <a:p>
+            <a:pPr algn="ctr"/>
+          </a:p>
+        </p:txBody>
+      </p:sp>
+      <p:sp>
+        <p:nvSpPr>
+          <p:cNvPr id="13" name="Rounded Rectangle 12"/>
+          <p:cNvSpPr/>
+          <p:nvPr/>
+        </p:nvSpPr>
+        <p:spPr>
+          <a:xfrm>
+            <a:off x="7444587" y="4892040"/>
+            <a:ext cx="1691640" cy="548640"/>
+          </a:xfrm>
+          <a:prstGeom prst="roundRect">
+            <a:avLst/>
+          </a:prstGeom>
+          <a:solidFill>
+            <a:srgbClr val="24243C"/>
+          </a:solidFill>
+          <a:ln w="12700">
+            <a:solidFill>
+              <a:srgbClr val="00BCEB"/>
+            </a:solidFill>
+          </a:ln>
+          <a:effectLst/>
+        </p:spPr>
+        <p:style>
+          <a:lnRef idx="1">
+            <a:schemeClr val="accent1"/>
+          </a:lnRef>
+          <a:fillRef idx="3">
+            <a:schemeClr val="accent1"/>
+          </a:fillRef>
+          <a:effectRef idx="2">
+            <a:schemeClr val="accent1"/>
+          </a:effectRef>
+          <a:fontRef idx="minor">
+            <a:schemeClr val="lt1"/>
+          </a:fontRef>
+        </p:style>
+        <p:txBody>
+          <a:bodyPr rtlCol="0" anchor="ctr" wrap="square" lIns="45720" rIns="45720" tIns="18288" bIns="18288"/>
+          <a:lstStyle/>
+          <a:p>
+            <a:pPr algn="ctr"/>
+            <a:r>
+              <a:rPr sz="1300" b="1">
+                <a:solidFill>
+                  <a:srgbClr val="00BCEB"/>
+                </a:solidFill>
+                <a:latin typeface="Calibri"/>
+              </a:rPr>
+              <a:t>Understand</a:t>
+            </a:r>
+          </a:p>
+        </p:txBody>
+      </p:sp>
+      <p:sp>
+        <p:nvSpPr>
+          <p:cNvPr id="14" name="Right Arrow 13"/>
+          <p:cNvSpPr/>
+          <p:nvPr/>
+        </p:nvSpPr>
+        <p:spPr>
+          <a:xfrm>
+            <a:off x="9209379" y="5065776"/>
+            <a:ext cx="356616" cy="201168"/>
+          </a:xfrm>
+          <a:prstGeom prst="rightArrow">
+            <a:avLst/>
+          </a:prstGeom>
+          <a:solidFill>
+            <a:srgbClr val="00BCEB"/>
+          </a:solidFill>
+          <a:ln>
+            <a:noFill/>
+          </a:ln>
+          <a:effectLst/>
+        </p:spPr>
+        <p:style>
+          <a:lnRef idx="1">
+            <a:schemeClr val="accent1"/>
+          </a:lnRef>
+          <a:fillRef idx="3">
+            <a:schemeClr val="accent1"/>
+          </a:fillRef>
+          <a:effectRef idx="2">
+            <a:schemeClr val="accent1"/>
+          </a:effectRef>
+          <a:fontRef idx="minor">
+            <a:schemeClr val="lt1"/>
+          </a:fontRef>
+        </p:style>
+        <p:txBody>
+          <a:bodyPr rtlCol="0" anchor="ctr"/>
+          <a:lstStyle/>
+          <a:p>
+            <a:pPr algn="ctr"/>
+          </a:p>
+        </p:txBody>
+      </p:sp>
+      <p:sp>
+        <p:nvSpPr>
+          <p:cNvPr id="15" name="Rounded Rectangle 14"/>
+          <p:cNvSpPr/>
+          <p:nvPr/>
+        </p:nvSpPr>
+        <p:spPr>
+          <a:xfrm>
+            <a:off x="9639147" y="4892040"/>
+            <a:ext cx="1691640" cy="548640"/>
+          </a:xfrm>
+          <a:prstGeom prst="roundRect">
+            <a:avLst/>
+          </a:prstGeom>
+          <a:solidFill>
+            <a:srgbClr val="24243C"/>
+          </a:solidFill>
+          <a:ln w="12700">
+            <a:solidFill>
+              <a:srgbClr val="00BCEB"/>
+            </a:solidFill>
+          </a:ln>
+          <a:effectLst/>
+        </p:spPr>
+        <p:style>
+          <a:lnRef idx="1">
+            <a:schemeClr val="accent1"/>
+          </a:lnRef>
+          <a:fillRef idx="3">
+            <a:schemeClr val="accent1"/>
+          </a:fillRef>
+          <a:effectRef idx="2">
+            <a:schemeClr val="accent1"/>
+          </a:effectRef>
+          <a:fontRef idx="minor">
+            <a:schemeClr val="lt1"/>
+          </a:fontRef>
+        </p:style>
+        <p:txBody>
+          <a:bodyPr rtlCol="0" anchor="ctr" wrap="square" lIns="45720" rIns="45720" tIns="18288" bIns="18288"/>
+          <a:lstStyle/>
+          <a:p>
+            <a:pPr algn="ctr"/>
+            <a:r>
+              <a:rPr sz="1300" b="1">
+                <a:solidFill>
+                  <a:srgbClr val="00BCEB"/>
+                </a:solidFill>
+                <a:latin typeface="Calibri"/>
+              </a:rPr>
+              <a:t>Act</a:t>
+            </a:r>
+          </a:p>
+        </p:txBody>
+      </p:sp>
+      <p:sp>
+        <p:nvSpPr>
+          <p:cNvPr id="16" name="TextBox 15"/>
           <p:cNvSpPr txBox="1"/>
           <p:nvPr/>
         </p:nvSpPr>
@@ -5435,6 +5886,50 @@
         </p:nvSpPr>
         <p:spPr>
           <a:xfrm>
+            <a:off x="548640" y="2167128"/>
+            <a:ext cx="11091672" cy="12801"/>
+          </a:xfrm>
+          <a:prstGeom prst="rect">
+            <a:avLst/>
+          </a:prstGeom>
+          <a:solidFill>
+            <a:srgbClr val="2C2C3A"/>
+          </a:solidFill>
+          <a:ln>
+            <a:noFill/>
+          </a:ln>
+          <a:effectLst/>
+        </p:spPr>
+        <p:style>
+          <a:lnRef idx="1">
+            <a:schemeClr val="accent1"/>
+          </a:lnRef>
+          <a:fillRef idx="3">
+            <a:schemeClr val="accent1"/>
+          </a:fillRef>
+          <a:effectRef idx="2">
+            <a:schemeClr val="accent1"/>
+          </a:effectRef>
+          <a:fontRef idx="minor">
+            <a:schemeClr val="lt1"/>
+          </a:fontRef>
+        </p:style>
+        <p:txBody>
+          <a:bodyPr rtlCol="0" anchor="ctr"/>
+          <a:lstStyle/>
+          <a:p>
+            <a:pPr algn="ctr"/>
+          </a:p>
+        </p:txBody>
+      </p:sp>
+      <p:sp>
+        <p:nvSpPr>
+          <p:cNvPr id="7" name="Rectangle 6"/>
+          <p:cNvSpPr/>
+          <p:nvPr/>
+        </p:nvSpPr>
+        <p:spPr>
+          <a:xfrm>
             <a:off x="548640" y="2331720"/>
             <a:ext cx="5486400" cy="3931920"/>
           </a:xfrm>
@@ -5475,7 +5970,7 @@
       </p:sp>
       <p:sp>
         <p:nvSpPr>
-          <p:cNvPr id="7" name="TextBox 6"/>
+          <p:cNvPr id="8" name="TextBox 7"/>
           <p:cNvSpPr txBox="1"/>
           <p:nvPr/>
         </p:nvSpPr>
@@ -5598,7 +6093,7 @@
       </p:sp>
       <p:sp>
         <p:nvSpPr>
-          <p:cNvPr id="8" name="Rectangle 7"/>
+          <p:cNvPr id="9" name="Rectangle 8"/>
           <p:cNvSpPr/>
           <p:nvPr/>
         </p:nvSpPr>
@@ -5644,7 +6139,7 @@
       </p:sp>
       <p:sp>
         <p:nvSpPr>
-          <p:cNvPr id="9" name="TextBox 8"/>
+          <p:cNvPr id="10" name="TextBox 9"/>
           <p:cNvSpPr txBox="1"/>
           <p:nvPr/>
         </p:nvSpPr>
@@ -5683,14 +6178,14 @@
       </p:sp>
       <p:sp>
         <p:nvSpPr>
-          <p:cNvPr id="10" name="Rectangle 9"/>
+          <p:cNvPr id="11" name="Rectangle 10"/>
           <p:cNvSpPr/>
           <p:nvPr/>
         </p:nvSpPr>
         <p:spPr>
           <a:xfrm>
-            <a:off x="7128509" y="5148775"/>
-            <a:ext cx="723900" cy="474784"/>
+            <a:off x="7128509" y="4951827"/>
+            <a:ext cx="723900" cy="443132"/>
           </a:xfrm>
           <a:prstGeom prst="rect">
             <a:avLst/>
@@ -5727,13 +6222,13 @@
       </p:sp>
       <p:sp>
         <p:nvSpPr>
-          <p:cNvPr id="11" name="TextBox 10"/>
+          <p:cNvPr id="12" name="TextBox 11"/>
           <p:cNvSpPr txBox="1"/>
           <p:nvPr/>
         </p:nvSpPr>
         <p:spPr>
           <a:xfrm>
-            <a:off x="6945629" y="4837879"/>
+            <a:off x="6945629" y="4640931"/>
             <a:ext cx="1089660" cy="274320"/>
           </a:xfrm>
           <a:prstGeom prst="rect">
@@ -5766,13 +6261,13 @@
       </p:sp>
       <p:sp>
         <p:nvSpPr>
-          <p:cNvPr id="12" name="TextBox 11"/>
+          <p:cNvPr id="13" name="TextBox 12"/>
           <p:cNvSpPr txBox="1"/>
           <p:nvPr/>
         </p:nvSpPr>
         <p:spPr>
           <a:xfrm>
-            <a:off x="6899909" y="5678423"/>
+            <a:off x="6899909" y="5440679"/>
             <a:ext cx="1181099" cy="274320"/>
           </a:xfrm>
           <a:prstGeom prst="rect">
@@ -5805,14 +6300,14 @@
       </p:sp>
       <p:sp>
         <p:nvSpPr>
-          <p:cNvPr id="13" name="Rectangle 12"/>
+          <p:cNvPr id="14" name="Rectangle 13"/>
           <p:cNvSpPr/>
           <p:nvPr/>
         </p:nvSpPr>
         <p:spPr>
           <a:xfrm>
-            <a:off x="8576310" y="3988190"/>
-            <a:ext cx="723900" cy="1635369"/>
+            <a:off x="8576310" y="3868615"/>
+            <a:ext cx="723900" cy="1526344"/>
           </a:xfrm>
           <a:prstGeom prst="rect">
             <a:avLst/>
@@ -5849,13 +6344,13 @@
       </p:sp>
       <p:sp>
         <p:nvSpPr>
-          <p:cNvPr id="14" name="TextBox 13"/>
+          <p:cNvPr id="15" name="TextBox 14"/>
           <p:cNvSpPr txBox="1"/>
           <p:nvPr/>
         </p:nvSpPr>
         <p:spPr>
           <a:xfrm>
-            <a:off x="8393430" y="3677294"/>
+            <a:off x="8393430" y="3557719"/>
             <a:ext cx="1089660" cy="274320"/>
           </a:xfrm>
           <a:prstGeom prst="rect">
@@ -5888,13 +6383,13 @@
       </p:sp>
       <p:sp>
         <p:nvSpPr>
-          <p:cNvPr id="15" name="TextBox 14"/>
+          <p:cNvPr id="16" name="TextBox 15"/>
           <p:cNvSpPr txBox="1"/>
           <p:nvPr/>
         </p:nvSpPr>
         <p:spPr>
           <a:xfrm>
-            <a:off x="8347710" y="5678423"/>
+            <a:off x="8347710" y="5440679"/>
             <a:ext cx="1181099" cy="274320"/>
           </a:xfrm>
           <a:prstGeom prst="rect">
@@ -5927,14 +6422,14 @@
       </p:sp>
       <p:sp>
         <p:nvSpPr>
-          <p:cNvPr id="16" name="Rectangle 15"/>
+          <p:cNvPr id="17" name="Rectangle 16"/>
           <p:cNvSpPr/>
           <p:nvPr/>
         </p:nvSpPr>
         <p:spPr>
           <a:xfrm>
-            <a:off x="10024110" y="3196883"/>
-            <a:ext cx="723900" cy="2426676"/>
+            <a:off x="10024110" y="3130061"/>
+            <a:ext cx="723900" cy="2264898"/>
           </a:xfrm>
           <a:prstGeom prst="rect">
             <a:avLst/>
@@ -5971,13 +6466,13 @@
       </p:sp>
       <p:sp>
         <p:nvSpPr>
-          <p:cNvPr id="17" name="TextBox 16"/>
+          <p:cNvPr id="18" name="TextBox 17"/>
           <p:cNvSpPr txBox="1"/>
           <p:nvPr/>
         </p:nvSpPr>
         <p:spPr>
           <a:xfrm>
-            <a:off x="9841230" y="2885987"/>
+            <a:off x="9841230" y="2819165"/>
             <a:ext cx="1089660" cy="274320"/>
           </a:xfrm>
           <a:prstGeom prst="rect">
@@ -6010,13 +6505,13 @@
       </p:sp>
       <p:sp>
         <p:nvSpPr>
-          <p:cNvPr id="18" name="TextBox 17"/>
+          <p:cNvPr id="19" name="TextBox 18"/>
           <p:cNvSpPr txBox="1"/>
           <p:nvPr/>
         </p:nvSpPr>
         <p:spPr>
           <a:xfrm>
-            <a:off x="9795510" y="5678423"/>
+            <a:off x="9795510" y="5440679"/>
             <a:ext cx="1181099" cy="274320"/>
           </a:xfrm>
           <a:prstGeom prst="rect">
@@ -6049,13 +6544,13 @@
       </p:sp>
       <p:cxnSp>
         <p:nvCxnSpPr>
-          <p:cNvPr id="19" name="Connector 18"/>
+          <p:cNvPr id="20" name="Connector 19"/>
           <p:cNvCxnSpPr/>
           <p:nvPr/>
         </p:nvCxnSpPr>
         <p:spPr>
           <a:xfrm>
-            <a:off x="6675120" y="5623559"/>
+            <a:off x="6675120" y="5394959"/>
             <a:ext cx="4526279" cy="0"/>
           </a:xfrm>
           <a:prstGeom prst="line">
@@ -6085,14 +6580,97 @@
       </p:cxnSp>
       <p:sp>
         <p:nvSpPr>
-          <p:cNvPr id="20" name="TextBox 19"/>
+          <p:cNvPr id="21" name="TextBox 20"/>
           <p:cNvSpPr txBox="1"/>
           <p:nvPr/>
         </p:nvSpPr>
         <p:spPr>
           <a:xfrm>
-            <a:off x="548640" y="6419088"/>
-            <a:ext cx="11064240" cy="320040"/>
+            <a:off x="6537959" y="5779007"/>
+            <a:ext cx="4800600" cy="274320"/>
+          </a:xfrm>
+          <a:prstGeom prst="rect">
+            <a:avLst/>
+          </a:prstGeom>
+          <a:noFill/>
+        </p:spPr>
+        <p:txBody>
+          <a:bodyPr wrap="square" anchor="t">
+            <a:spAutoFit/>
+          </a:bodyPr>
+          <a:lstStyle/>
+          <a:p>
+            <a:pPr algn="ctr">
+              <a:spcAft>
+                <a:spcPts val="600"/>
+              </a:spcAft>
+            </a:pPr>
+            <a:r>
+              <a:rPr sz="950" b="0">
+                <a:solidFill>
+                  <a:srgbClr val="9AA3B2"/>
+                </a:solidFill>
+                <a:latin typeface="Calibri"/>
+              </a:rPr>
+              <a:t>Break-even ≈ $9M bookings (~5 deals) — every scenario clears it</a:t>
+            </a:r>
+          </a:p>
+        </p:txBody>
+      </p:sp>
+      <p:sp>
+        <p:nvSpPr>
+          <p:cNvPr id="22" name="Rectangle 21"/>
+          <p:cNvSpPr/>
+          <p:nvPr/>
+        </p:nvSpPr>
+        <p:spPr>
+          <a:xfrm>
+            <a:off x="548640" y="6364224"/>
+            <a:ext cx="11091672" cy="10972"/>
+          </a:xfrm>
+          <a:prstGeom prst="rect">
+            <a:avLst/>
+          </a:prstGeom>
+          <a:solidFill>
+            <a:srgbClr val="2C2C3A"/>
+          </a:solidFill>
+          <a:ln>
+            <a:noFill/>
+          </a:ln>
+          <a:effectLst/>
+        </p:spPr>
+        <p:style>
+          <a:lnRef idx="1">
+            <a:schemeClr val="accent1"/>
+          </a:lnRef>
+          <a:fillRef idx="3">
+            <a:schemeClr val="accent1"/>
+          </a:fillRef>
+          <a:effectRef idx="2">
+            <a:schemeClr val="accent1"/>
+          </a:effectRef>
+          <a:fontRef idx="minor">
+            <a:schemeClr val="lt1"/>
+          </a:fontRef>
+        </p:style>
+        <p:txBody>
+          <a:bodyPr rtlCol="0" anchor="ctr"/>
+          <a:lstStyle/>
+          <a:p>
+            <a:pPr algn="ctr"/>
+          </a:p>
+        </p:txBody>
+      </p:sp>
+      <p:sp>
+        <p:nvSpPr>
+          <p:cNvPr id="23" name="TextBox 22"/>
+          <p:cNvSpPr txBox="1"/>
+          <p:nvPr/>
+        </p:nvSpPr>
+        <p:spPr>
+          <a:xfrm>
+            <a:off x="548640" y="6428232"/>
+            <a:ext cx="9692640" cy="292608"/>
           </a:xfrm>
           <a:prstGeom prst="rect">
             <a:avLst/>
@@ -6111,13 +6689,61 @@
               </a:spcAft>
             </a:pPr>
             <a:r>
+              <a:rPr sz="900" b="1">
+                <a:solidFill>
+                  <a:srgbClr val="9AA3B2"/>
+                </a:solidFill>
+                <a:latin typeface="Calibri"/>
+              </a:rPr>
+              <a:t>FIELD CTO · X-ARCH SELLING</a:t>
+            </a:r>
+            <a:r>
+              <a:rPr sz="900" b="0">
+                <a:solidFill>
+                  <a:srgbClr val="9AA3B2"/>
+                </a:solidFill>
+                <a:latin typeface="Calibri"/>
+              </a:rPr>
+              <a:t>      Illustrative figures — replace with actuals before presenting.</a:t>
+            </a:r>
+          </a:p>
+        </p:txBody>
+      </p:sp>
+      <p:sp>
+        <p:nvSpPr>
+          <p:cNvPr id="24" name="TextBox 23"/>
+          <p:cNvSpPr txBox="1"/>
+          <p:nvPr/>
+        </p:nvSpPr>
+        <p:spPr>
+          <a:xfrm>
+            <a:off x="10515600" y="6428232"/>
+            <a:ext cx="1124712" cy="274320"/>
+          </a:xfrm>
+          <a:prstGeom prst="rect">
+            <a:avLst/>
+          </a:prstGeom>
+          <a:noFill/>
+        </p:spPr>
+        <p:txBody>
+          <a:bodyPr wrap="square" anchor="t">
+            <a:spAutoFit/>
+          </a:bodyPr>
+          <a:lstStyle/>
+          <a:p>
+            <a:pPr algn="r">
+              <a:spcAft>
+                <a:spcPts val="600"/>
+              </a:spcAft>
+            </a:pPr>
+            <a:r>
               <a:rPr sz="1000" b="0">
                 <a:solidFill>
                   <a:srgbClr val="9AA3B2"/>
                 </a:solidFill>
                 <a:latin typeface="Calibri"/>
               </a:rPr>
-              <a:t>Illustrative figures — replace with actuals before presenting.</a:t>
+              <a:t>10 / 22</a:t>
             </a:r>
           </a:p>
         </p:txBody>
@@ -6314,6 +6940,50 @@
         </p:nvSpPr>
         <p:spPr>
           <a:xfrm>
+            <a:off x="548640" y="2167128"/>
+            <a:ext cx="11091672" cy="12801"/>
+          </a:xfrm>
+          <a:prstGeom prst="rect">
+            <a:avLst/>
+          </a:prstGeom>
+          <a:solidFill>
+            <a:srgbClr val="2C2C3A"/>
+          </a:solidFill>
+          <a:ln>
+            <a:noFill/>
+          </a:ln>
+          <a:effectLst/>
+        </p:spPr>
+        <p:style>
+          <a:lnRef idx="1">
+            <a:schemeClr val="accent1"/>
+          </a:lnRef>
+          <a:fillRef idx="3">
+            <a:schemeClr val="accent1"/>
+          </a:fillRef>
+          <a:effectRef idx="2">
+            <a:schemeClr val="accent1"/>
+          </a:effectRef>
+          <a:fontRef idx="minor">
+            <a:schemeClr val="lt1"/>
+          </a:fontRef>
+        </p:style>
+        <p:txBody>
+          <a:bodyPr rtlCol="0" anchor="ctr"/>
+          <a:lstStyle/>
+          <a:p>
+            <a:pPr algn="ctr"/>
+          </a:p>
+        </p:txBody>
+      </p:sp>
+      <p:sp>
+        <p:nvSpPr>
+          <p:cNvPr id="7" name="Rectangle 6"/>
+          <p:cNvSpPr/>
+          <p:nvPr/>
+        </p:nvSpPr>
+        <p:spPr>
+          <a:xfrm>
             <a:off x="548640" y="2331720"/>
             <a:ext cx="5486400" cy="3931920"/>
           </a:xfrm>
@@ -6354,7 +7024,7 @@
       </p:sp>
       <p:sp>
         <p:nvSpPr>
-          <p:cNvPr id="7" name="TextBox 6"/>
+          <p:cNvPr id="8" name="TextBox 7"/>
           <p:cNvSpPr txBox="1"/>
           <p:nvPr/>
         </p:nvSpPr>
@@ -6477,7 +7147,7 @@
       </p:sp>
       <p:sp>
         <p:nvSpPr>
-          <p:cNvPr id="8" name="Rectangle 7"/>
+          <p:cNvPr id="9" name="Rectangle 8"/>
           <p:cNvSpPr/>
           <p:nvPr/>
         </p:nvSpPr>
@@ -6523,7 +7193,7 @@
       </p:sp>
       <p:sp>
         <p:nvSpPr>
-          <p:cNvPr id="9" name="Rounded Rectangle 8"/>
+          <p:cNvPr id="10" name="Rounded Rectangle 9"/>
           <p:cNvSpPr/>
           <p:nvPr/>
         </p:nvSpPr>
@@ -6578,7 +7248,7 @@
       </p:sp>
       <p:sp>
         <p:nvSpPr>
-          <p:cNvPr id="10" name="Rounded Rectangle 9"/>
+          <p:cNvPr id="11" name="Rounded Rectangle 10"/>
           <p:cNvSpPr/>
           <p:nvPr/>
         </p:nvSpPr>
@@ -6633,7 +7303,7 @@
       </p:sp>
       <p:sp>
         <p:nvSpPr>
-          <p:cNvPr id="11" name="Rounded Rectangle 10"/>
+          <p:cNvPr id="12" name="Rounded Rectangle 11"/>
           <p:cNvSpPr/>
           <p:nvPr/>
         </p:nvSpPr>
@@ -6688,7 +7358,7 @@
       </p:sp>
       <p:sp>
         <p:nvSpPr>
-          <p:cNvPr id="12" name="Rounded Rectangle 11"/>
+          <p:cNvPr id="13" name="Rounded Rectangle 12"/>
           <p:cNvSpPr/>
           <p:nvPr/>
         </p:nvSpPr>
@@ -6743,7 +7413,7 @@
       </p:sp>
       <p:sp>
         <p:nvSpPr>
-          <p:cNvPr id="13" name="Rounded Rectangle 12"/>
+          <p:cNvPr id="14" name="Rounded Rectangle 13"/>
           <p:cNvSpPr/>
           <p:nvPr/>
         </p:nvSpPr>
@@ -6796,14 +7466,58 @@
       </p:sp>
       <p:sp>
         <p:nvSpPr>
-          <p:cNvPr id="14" name="TextBox 13"/>
+          <p:cNvPr id="15" name="Rectangle 14"/>
+          <p:cNvSpPr/>
+          <p:nvPr/>
+        </p:nvSpPr>
+        <p:spPr>
+          <a:xfrm>
+            <a:off x="548640" y="6364224"/>
+            <a:ext cx="11091672" cy="10972"/>
+          </a:xfrm>
+          <a:prstGeom prst="rect">
+            <a:avLst/>
+          </a:prstGeom>
+          <a:solidFill>
+            <a:srgbClr val="2C2C3A"/>
+          </a:solidFill>
+          <a:ln>
+            <a:noFill/>
+          </a:ln>
+          <a:effectLst/>
+        </p:spPr>
+        <p:style>
+          <a:lnRef idx="1">
+            <a:schemeClr val="accent1"/>
+          </a:lnRef>
+          <a:fillRef idx="3">
+            <a:schemeClr val="accent1"/>
+          </a:fillRef>
+          <a:effectRef idx="2">
+            <a:schemeClr val="accent1"/>
+          </a:effectRef>
+          <a:fontRef idx="minor">
+            <a:schemeClr val="lt1"/>
+          </a:fontRef>
+        </p:style>
+        <p:txBody>
+          <a:bodyPr rtlCol="0" anchor="ctr"/>
+          <a:lstStyle/>
+          <a:p>
+            <a:pPr algn="ctr"/>
+          </a:p>
+        </p:txBody>
+      </p:sp>
+      <p:sp>
+        <p:nvSpPr>
+          <p:cNvPr id="16" name="TextBox 15"/>
           <p:cNvSpPr txBox="1"/>
           <p:nvPr/>
         </p:nvSpPr>
         <p:spPr>
           <a:xfrm>
-            <a:off x="548640" y="6419088"/>
-            <a:ext cx="11064240" cy="320040"/>
+            <a:off x="548640" y="6428232"/>
+            <a:ext cx="9692640" cy="292608"/>
           </a:xfrm>
           <a:prstGeom prst="rect">
             <a:avLst/>
@@ -6822,13 +7536,61 @@
               </a:spcAft>
             </a:pPr>
             <a:r>
+              <a:rPr sz="900" b="1">
+                <a:solidFill>
+                  <a:srgbClr val="9AA3B2"/>
+                </a:solidFill>
+                <a:latin typeface="Calibri"/>
+              </a:rPr>
+              <a:t>FIELD CTO · X-ARCH SELLING</a:t>
+            </a:r>
+            <a:r>
+              <a:rPr sz="900" b="0">
+                <a:solidFill>
+                  <a:srgbClr val="9AA3B2"/>
+                </a:solidFill>
+                <a:latin typeface="Calibri"/>
+              </a:rPr>
+              <a:t>      Illustrative figures — replace with actuals before presenting.</a:t>
+            </a:r>
+          </a:p>
+        </p:txBody>
+      </p:sp>
+      <p:sp>
+        <p:nvSpPr>
+          <p:cNvPr id="17" name="TextBox 16"/>
+          <p:cNvSpPr txBox="1"/>
+          <p:nvPr/>
+        </p:nvSpPr>
+        <p:spPr>
+          <a:xfrm>
+            <a:off x="10515600" y="6428232"/>
+            <a:ext cx="1124712" cy="274320"/>
+          </a:xfrm>
+          <a:prstGeom prst="rect">
+            <a:avLst/>
+          </a:prstGeom>
+          <a:noFill/>
+        </p:spPr>
+        <p:txBody>
+          <a:bodyPr wrap="square" anchor="t">
+            <a:spAutoFit/>
+          </a:bodyPr>
+          <a:lstStyle/>
+          <a:p>
+            <a:pPr algn="r">
+              <a:spcAft>
+                <a:spcPts val="600"/>
+              </a:spcAft>
+            </a:pPr>
+            <a:r>
               <a:rPr sz="1000" b="0">
                 <a:solidFill>
                   <a:srgbClr val="9AA3B2"/>
                 </a:solidFill>
                 <a:latin typeface="Calibri"/>
               </a:rPr>
-              <a:t>Illustrative figures — replace with actuals before presenting.</a:t>
+              <a:t>11 / 22</a:t>
             </a:r>
           </a:p>
         </p:txBody>
@@ -7025,6 +7787,50 @@
         </p:nvSpPr>
         <p:spPr>
           <a:xfrm>
+            <a:off x="548640" y="2167128"/>
+            <a:ext cx="11091672" cy="12801"/>
+          </a:xfrm>
+          <a:prstGeom prst="rect">
+            <a:avLst/>
+          </a:prstGeom>
+          <a:solidFill>
+            <a:srgbClr val="2C2C3A"/>
+          </a:solidFill>
+          <a:ln>
+            <a:noFill/>
+          </a:ln>
+          <a:effectLst/>
+        </p:spPr>
+        <p:style>
+          <a:lnRef idx="1">
+            <a:schemeClr val="accent1"/>
+          </a:lnRef>
+          <a:fillRef idx="3">
+            <a:schemeClr val="accent1"/>
+          </a:fillRef>
+          <a:effectRef idx="2">
+            <a:schemeClr val="accent1"/>
+          </a:effectRef>
+          <a:fontRef idx="minor">
+            <a:schemeClr val="lt1"/>
+          </a:fontRef>
+        </p:style>
+        <p:txBody>
+          <a:bodyPr rtlCol="0" anchor="ctr"/>
+          <a:lstStyle/>
+          <a:p>
+            <a:pPr algn="ctr"/>
+          </a:p>
+        </p:txBody>
+      </p:sp>
+      <p:sp>
+        <p:nvSpPr>
+          <p:cNvPr id="7" name="Rectangle 6"/>
+          <p:cNvSpPr/>
+          <p:nvPr/>
+        </p:nvSpPr>
+        <p:spPr>
+          <a:xfrm>
             <a:off x="548640" y="2331720"/>
             <a:ext cx="5486400" cy="3931920"/>
           </a:xfrm>
@@ -7065,7 +7871,7 @@
       </p:sp>
       <p:sp>
         <p:nvSpPr>
-          <p:cNvPr id="7" name="TextBox 6"/>
+          <p:cNvPr id="8" name="TextBox 7"/>
           <p:cNvSpPr txBox="1"/>
           <p:nvPr/>
         </p:nvSpPr>
@@ -7188,7 +7994,7 @@
       </p:sp>
       <p:sp>
         <p:nvSpPr>
-          <p:cNvPr id="8" name="Rectangle 7"/>
+          <p:cNvPr id="9" name="Rectangle 8"/>
           <p:cNvSpPr/>
           <p:nvPr/>
         </p:nvSpPr>
@@ -7234,7 +8040,7 @@
       </p:sp>
       <p:sp>
         <p:nvSpPr>
-          <p:cNvPr id="9" name="Diamond 8"/>
+          <p:cNvPr id="10" name="Diamond 9"/>
           <p:cNvSpPr/>
           <p:nvPr/>
         </p:nvSpPr>
@@ -7287,7 +8093,7 @@
       </p:sp>
       <p:cxnSp>
         <p:nvCxnSpPr>
-          <p:cNvPr id="10" name="Connector 9"/>
+          <p:cNvPr id="11" name="Connector 10"/>
           <p:cNvCxnSpPr/>
           <p:nvPr/>
         </p:nvCxnSpPr>
@@ -7323,7 +8129,7 @@
       </p:cxnSp>
       <p:cxnSp>
         <p:nvCxnSpPr>
-          <p:cNvPr id="11" name="Connector 10"/>
+          <p:cNvPr id="12" name="Connector 11"/>
           <p:cNvCxnSpPr/>
           <p:nvPr/>
         </p:nvCxnSpPr>
@@ -7359,7 +8165,7 @@
       </p:cxnSp>
       <p:sp>
         <p:nvSpPr>
-          <p:cNvPr id="12" name="Rounded Rectangle 11"/>
+          <p:cNvPr id="13" name="Rounded Rectangle 12"/>
           <p:cNvSpPr/>
           <p:nvPr/>
         </p:nvSpPr>
@@ -7412,7 +8218,7 @@
       </p:sp>
       <p:sp>
         <p:nvSpPr>
-          <p:cNvPr id="13" name="Rounded Rectangle 12"/>
+          <p:cNvPr id="14" name="Rounded Rectangle 13"/>
           <p:cNvSpPr/>
           <p:nvPr/>
         </p:nvSpPr>
@@ -7467,7 +8273,7 @@
       </p:sp>
       <p:sp>
         <p:nvSpPr>
-          <p:cNvPr id="14" name="TextBox 13"/>
+          <p:cNvPr id="15" name="TextBox 14"/>
           <p:cNvSpPr txBox="1"/>
           <p:nvPr/>
         </p:nvSpPr>
@@ -7506,14 +8312,58 @@
       </p:sp>
       <p:sp>
         <p:nvSpPr>
-          <p:cNvPr id="15" name="TextBox 14"/>
+          <p:cNvPr id="16" name="Rectangle 15"/>
+          <p:cNvSpPr/>
+          <p:nvPr/>
+        </p:nvSpPr>
+        <p:spPr>
+          <a:xfrm>
+            <a:off x="548640" y="6364224"/>
+            <a:ext cx="11091672" cy="10972"/>
+          </a:xfrm>
+          <a:prstGeom prst="rect">
+            <a:avLst/>
+          </a:prstGeom>
+          <a:solidFill>
+            <a:srgbClr val="2C2C3A"/>
+          </a:solidFill>
+          <a:ln>
+            <a:noFill/>
+          </a:ln>
+          <a:effectLst/>
+        </p:spPr>
+        <p:style>
+          <a:lnRef idx="1">
+            <a:schemeClr val="accent1"/>
+          </a:lnRef>
+          <a:fillRef idx="3">
+            <a:schemeClr val="accent1"/>
+          </a:fillRef>
+          <a:effectRef idx="2">
+            <a:schemeClr val="accent1"/>
+          </a:effectRef>
+          <a:fontRef idx="minor">
+            <a:schemeClr val="lt1"/>
+          </a:fontRef>
+        </p:style>
+        <p:txBody>
+          <a:bodyPr rtlCol="0" anchor="ctr"/>
+          <a:lstStyle/>
+          <a:p>
+            <a:pPr algn="ctr"/>
+          </a:p>
+        </p:txBody>
+      </p:sp>
+      <p:sp>
+        <p:nvSpPr>
+          <p:cNvPr id="17" name="TextBox 16"/>
           <p:cNvSpPr txBox="1"/>
           <p:nvPr/>
         </p:nvSpPr>
         <p:spPr>
           <a:xfrm>
-            <a:off x="548640" y="6419088"/>
-            <a:ext cx="11064240" cy="320040"/>
+            <a:off x="548640" y="6428232"/>
+            <a:ext cx="9692640" cy="292608"/>
           </a:xfrm>
           <a:prstGeom prst="rect">
             <a:avLst/>
@@ -7532,13 +8382,61 @@
               </a:spcAft>
             </a:pPr>
             <a:r>
+              <a:rPr sz="900" b="1">
+                <a:solidFill>
+                  <a:srgbClr val="9AA3B2"/>
+                </a:solidFill>
+                <a:latin typeface="Calibri"/>
+              </a:rPr>
+              <a:t>FIELD CTO · X-ARCH SELLING</a:t>
+            </a:r>
+            <a:r>
+              <a:rPr sz="900" b="0">
+                <a:solidFill>
+                  <a:srgbClr val="9AA3B2"/>
+                </a:solidFill>
+                <a:latin typeface="Calibri"/>
+              </a:rPr>
+              <a:t>      Illustrative figures — replace with actuals before presenting.</a:t>
+            </a:r>
+          </a:p>
+        </p:txBody>
+      </p:sp>
+      <p:sp>
+        <p:nvSpPr>
+          <p:cNvPr id="18" name="TextBox 17"/>
+          <p:cNvSpPr txBox="1"/>
+          <p:nvPr/>
+        </p:nvSpPr>
+        <p:spPr>
+          <a:xfrm>
+            <a:off x="10515600" y="6428232"/>
+            <a:ext cx="1124712" cy="274320"/>
+          </a:xfrm>
+          <a:prstGeom prst="rect">
+            <a:avLst/>
+          </a:prstGeom>
+          <a:noFill/>
+        </p:spPr>
+        <p:txBody>
+          <a:bodyPr wrap="square" anchor="t">
+            <a:spAutoFit/>
+          </a:bodyPr>
+          <a:lstStyle/>
+          <a:p>
+            <a:pPr algn="r">
+              <a:spcAft>
+                <a:spcPts val="600"/>
+              </a:spcAft>
+            </a:pPr>
+            <a:r>
               <a:rPr sz="1000" b="0">
                 <a:solidFill>
                   <a:srgbClr val="9AA3B2"/>
                 </a:solidFill>
                 <a:latin typeface="Calibri"/>
               </a:rPr>
-              <a:t>Illustrative figures — replace with actuals before presenting.</a:t>
+              <a:t>12 / 22</a:t>
             </a:r>
           </a:p>
         </p:txBody>
@@ -7735,6 +8633,50 @@
         </p:nvSpPr>
         <p:spPr>
           <a:xfrm>
+            <a:off x="548640" y="2167128"/>
+            <a:ext cx="11091672" cy="12801"/>
+          </a:xfrm>
+          <a:prstGeom prst="rect">
+            <a:avLst/>
+          </a:prstGeom>
+          <a:solidFill>
+            <a:srgbClr val="2C2C3A"/>
+          </a:solidFill>
+          <a:ln>
+            <a:noFill/>
+          </a:ln>
+          <a:effectLst/>
+        </p:spPr>
+        <p:style>
+          <a:lnRef idx="1">
+            <a:schemeClr val="accent1"/>
+          </a:lnRef>
+          <a:fillRef idx="3">
+            <a:schemeClr val="accent1"/>
+          </a:fillRef>
+          <a:effectRef idx="2">
+            <a:schemeClr val="accent1"/>
+          </a:effectRef>
+          <a:fontRef idx="minor">
+            <a:schemeClr val="lt1"/>
+          </a:fontRef>
+        </p:style>
+        <p:txBody>
+          <a:bodyPr rtlCol="0" anchor="ctr"/>
+          <a:lstStyle/>
+          <a:p>
+            <a:pPr algn="ctr"/>
+          </a:p>
+        </p:txBody>
+      </p:sp>
+      <p:sp>
+        <p:nvSpPr>
+          <p:cNvPr id="7" name="Rectangle 6"/>
+          <p:cNvSpPr/>
+          <p:nvPr/>
+        </p:nvSpPr>
+        <p:spPr>
+          <a:xfrm>
             <a:off x="548640" y="2331720"/>
             <a:ext cx="5486400" cy="3931920"/>
           </a:xfrm>
@@ -7775,7 +8717,7 @@
       </p:sp>
       <p:sp>
         <p:nvSpPr>
-          <p:cNvPr id="7" name="TextBox 6"/>
+          <p:cNvPr id="8" name="TextBox 7"/>
           <p:cNvSpPr txBox="1"/>
           <p:nvPr/>
         </p:nvSpPr>
@@ -7898,7 +8840,7 @@
       </p:sp>
       <p:sp>
         <p:nvSpPr>
-          <p:cNvPr id="8" name="Rectangle 7"/>
+          <p:cNvPr id="9" name="Rectangle 8"/>
           <p:cNvSpPr/>
           <p:nvPr/>
         </p:nvSpPr>
@@ -7944,7 +8886,7 @@
       </p:sp>
       <p:cxnSp>
         <p:nvCxnSpPr>
-          <p:cNvPr id="9" name="Connector 8"/>
+          <p:cNvPr id="10" name="Connector 9"/>
           <p:cNvCxnSpPr/>
           <p:nvPr/>
         </p:nvCxnSpPr>
@@ -7980,7 +8922,7 @@
       </p:cxnSp>
       <p:sp>
         <p:nvSpPr>
-          <p:cNvPr id="10" name="Oval 9"/>
+          <p:cNvPr id="11" name="Oval 10"/>
           <p:cNvSpPr/>
           <p:nvPr/>
         </p:nvSpPr>
@@ -8024,7 +8966,7 @@
       </p:sp>
       <p:sp>
         <p:nvSpPr>
-          <p:cNvPr id="11" name="TextBox 10"/>
+          <p:cNvPr id="12" name="TextBox 11"/>
           <p:cNvSpPr txBox="1"/>
           <p:nvPr/>
         </p:nvSpPr>
@@ -8063,7 +9005,7 @@
       </p:sp>
       <p:sp>
         <p:nvSpPr>
-          <p:cNvPr id="12" name="TextBox 11"/>
+          <p:cNvPr id="13" name="TextBox 12"/>
           <p:cNvSpPr txBox="1"/>
           <p:nvPr/>
         </p:nvSpPr>
@@ -8102,7 +9044,7 @@
       </p:sp>
       <p:sp>
         <p:nvSpPr>
-          <p:cNvPr id="13" name="Oval 12"/>
+          <p:cNvPr id="14" name="Oval 13"/>
           <p:cNvSpPr/>
           <p:nvPr/>
         </p:nvSpPr>
@@ -8146,7 +9088,7 @@
       </p:sp>
       <p:sp>
         <p:nvSpPr>
-          <p:cNvPr id="14" name="TextBox 13"/>
+          <p:cNvPr id="15" name="TextBox 14"/>
           <p:cNvSpPr txBox="1"/>
           <p:nvPr/>
         </p:nvSpPr>
@@ -8185,7 +9127,7 @@
       </p:sp>
       <p:sp>
         <p:nvSpPr>
-          <p:cNvPr id="15" name="TextBox 14"/>
+          <p:cNvPr id="16" name="TextBox 15"/>
           <p:cNvSpPr txBox="1"/>
           <p:nvPr/>
         </p:nvSpPr>
@@ -8224,7 +9166,7 @@
       </p:sp>
       <p:sp>
         <p:nvSpPr>
-          <p:cNvPr id="16" name="Oval 15"/>
+          <p:cNvPr id="17" name="Oval 16"/>
           <p:cNvSpPr/>
           <p:nvPr/>
         </p:nvSpPr>
@@ -8268,7 +9210,7 @@
       </p:sp>
       <p:sp>
         <p:nvSpPr>
-          <p:cNvPr id="17" name="TextBox 16"/>
+          <p:cNvPr id="18" name="TextBox 17"/>
           <p:cNvSpPr txBox="1"/>
           <p:nvPr/>
         </p:nvSpPr>
@@ -8307,7 +9249,7 @@
       </p:sp>
       <p:sp>
         <p:nvSpPr>
-          <p:cNvPr id="18" name="TextBox 17"/>
+          <p:cNvPr id="19" name="TextBox 18"/>
           <p:cNvSpPr txBox="1"/>
           <p:nvPr/>
         </p:nvSpPr>
@@ -8346,7 +9288,7 @@
       </p:sp>
       <p:sp>
         <p:nvSpPr>
-          <p:cNvPr id="19" name="Oval 18"/>
+          <p:cNvPr id="20" name="Oval 19"/>
           <p:cNvSpPr/>
           <p:nvPr/>
         </p:nvSpPr>
@@ -8390,7 +9332,7 @@
       </p:sp>
       <p:sp>
         <p:nvSpPr>
-          <p:cNvPr id="20" name="TextBox 19"/>
+          <p:cNvPr id="21" name="TextBox 20"/>
           <p:cNvSpPr txBox="1"/>
           <p:nvPr/>
         </p:nvSpPr>
@@ -8429,7 +9371,7 @@
       </p:sp>
       <p:sp>
         <p:nvSpPr>
-          <p:cNvPr id="21" name="TextBox 20"/>
+          <p:cNvPr id="22" name="TextBox 21"/>
           <p:cNvSpPr txBox="1"/>
           <p:nvPr/>
         </p:nvSpPr>
@@ -8468,14 +9410,58 @@
       </p:sp>
       <p:sp>
         <p:nvSpPr>
-          <p:cNvPr id="22" name="TextBox 21"/>
+          <p:cNvPr id="23" name="Rectangle 22"/>
+          <p:cNvSpPr/>
+          <p:nvPr/>
+        </p:nvSpPr>
+        <p:spPr>
+          <a:xfrm>
+            <a:off x="548640" y="6364224"/>
+            <a:ext cx="11091672" cy="10972"/>
+          </a:xfrm>
+          <a:prstGeom prst="rect">
+            <a:avLst/>
+          </a:prstGeom>
+          <a:solidFill>
+            <a:srgbClr val="2C2C3A"/>
+          </a:solidFill>
+          <a:ln>
+            <a:noFill/>
+          </a:ln>
+          <a:effectLst/>
+        </p:spPr>
+        <p:style>
+          <a:lnRef idx="1">
+            <a:schemeClr val="accent1"/>
+          </a:lnRef>
+          <a:fillRef idx="3">
+            <a:schemeClr val="accent1"/>
+          </a:fillRef>
+          <a:effectRef idx="2">
+            <a:schemeClr val="accent1"/>
+          </a:effectRef>
+          <a:fontRef idx="minor">
+            <a:schemeClr val="lt1"/>
+          </a:fontRef>
+        </p:style>
+        <p:txBody>
+          <a:bodyPr rtlCol="0" anchor="ctr"/>
+          <a:lstStyle/>
+          <a:p>
+            <a:pPr algn="ctr"/>
+          </a:p>
+        </p:txBody>
+      </p:sp>
+      <p:sp>
+        <p:nvSpPr>
+          <p:cNvPr id="24" name="TextBox 23"/>
           <p:cNvSpPr txBox="1"/>
           <p:nvPr/>
         </p:nvSpPr>
         <p:spPr>
           <a:xfrm>
-            <a:off x="548640" y="6419088"/>
-            <a:ext cx="11064240" cy="320040"/>
+            <a:off x="548640" y="6428232"/>
+            <a:ext cx="9692640" cy="292608"/>
           </a:xfrm>
           <a:prstGeom prst="rect">
             <a:avLst/>
@@ -8494,13 +9480,61 @@
               </a:spcAft>
             </a:pPr>
             <a:r>
+              <a:rPr sz="900" b="1">
+                <a:solidFill>
+                  <a:srgbClr val="9AA3B2"/>
+                </a:solidFill>
+                <a:latin typeface="Calibri"/>
+              </a:rPr>
+              <a:t>FIELD CTO · X-ARCH SELLING</a:t>
+            </a:r>
+            <a:r>
+              <a:rPr sz="900" b="0">
+                <a:solidFill>
+                  <a:srgbClr val="9AA3B2"/>
+                </a:solidFill>
+                <a:latin typeface="Calibri"/>
+              </a:rPr>
+              <a:t>      Illustrative figures — replace with actuals before presenting.</a:t>
+            </a:r>
+          </a:p>
+        </p:txBody>
+      </p:sp>
+      <p:sp>
+        <p:nvSpPr>
+          <p:cNvPr id="25" name="TextBox 24"/>
+          <p:cNvSpPr txBox="1"/>
+          <p:nvPr/>
+        </p:nvSpPr>
+        <p:spPr>
+          <a:xfrm>
+            <a:off x="10515600" y="6428232"/>
+            <a:ext cx="1124712" cy="274320"/>
+          </a:xfrm>
+          <a:prstGeom prst="rect">
+            <a:avLst/>
+          </a:prstGeom>
+          <a:noFill/>
+        </p:spPr>
+        <p:txBody>
+          <a:bodyPr wrap="square" anchor="t">
+            <a:spAutoFit/>
+          </a:bodyPr>
+          <a:lstStyle/>
+          <a:p>
+            <a:pPr algn="r">
+              <a:spcAft>
+                <a:spcPts val="600"/>
+              </a:spcAft>
+            </a:pPr>
+            <a:r>
               <a:rPr sz="1000" b="0">
                 <a:solidFill>
                   <a:srgbClr val="9AA3B2"/>
                 </a:solidFill>
                 <a:latin typeface="Calibri"/>
               </a:rPr>
-              <a:t>Illustrative figures — replace with actuals before presenting.</a:t>
+              <a:t>13 / 22</a:t>
             </a:r>
           </a:p>
         </p:txBody>
@@ -8569,14 +9603,58 @@
       </p:sp>
       <p:sp>
         <p:nvSpPr>
-          <p:cNvPr id="3" name="TextBox 2"/>
+          <p:cNvPr id="3" name="Rectangle 2"/>
+          <p:cNvSpPr/>
+          <p:nvPr/>
+        </p:nvSpPr>
+        <p:spPr>
+          <a:xfrm>
+            <a:off x="548640" y="822960"/>
+            <a:ext cx="128016" cy="1234440"/>
+          </a:xfrm>
+          <a:prstGeom prst="rect">
+            <a:avLst/>
+          </a:prstGeom>
+          <a:solidFill>
+            <a:srgbClr val="00BCEB"/>
+          </a:solidFill>
+          <a:ln>
+            <a:noFill/>
+          </a:ln>
+          <a:effectLst/>
+        </p:spPr>
+        <p:style>
+          <a:lnRef idx="1">
+            <a:schemeClr val="accent1"/>
+          </a:lnRef>
+          <a:fillRef idx="3">
+            <a:schemeClr val="accent1"/>
+          </a:fillRef>
+          <a:effectRef idx="2">
+            <a:schemeClr val="accent1"/>
+          </a:effectRef>
+          <a:fontRef idx="minor">
+            <a:schemeClr val="lt1"/>
+          </a:fontRef>
+        </p:style>
+        <p:txBody>
+          <a:bodyPr rtlCol="0" anchor="ctr"/>
+          <a:lstStyle/>
+          <a:p>
+            <a:pPr algn="ctr"/>
+          </a:p>
+        </p:txBody>
+      </p:sp>
+      <p:sp>
+        <p:nvSpPr>
+          <p:cNvPr id="4" name="TextBox 3"/>
           <p:cNvSpPr txBox="1"/>
           <p:nvPr/>
         </p:nvSpPr>
         <p:spPr>
           <a:xfrm>
-            <a:off x="731520" y="2743200"/>
-            <a:ext cx="10698480" cy="914400"/>
+            <a:off x="868680" y="868680"/>
+            <a:ext cx="10698480" cy="365760"/>
           </a:xfrm>
           <a:prstGeom prst="rect">
             <a:avLst/>
@@ -8595,7 +9673,7 @@
               </a:spcAft>
             </a:pPr>
             <a:r>
-              <a:rPr sz="1600" b="1">
+              <a:rPr sz="1300" b="1">
                 <a:solidFill>
                   <a:srgbClr val="00BCEB"/>
                 </a:solidFill>
@@ -8608,14 +9686,14 @@
       </p:sp>
       <p:sp>
         <p:nvSpPr>
-          <p:cNvPr id="4" name="TextBox 3"/>
+          <p:cNvPr id="5" name="TextBox 4"/>
           <p:cNvSpPr txBox="1"/>
           <p:nvPr/>
         </p:nvSpPr>
         <p:spPr>
           <a:xfrm>
-            <a:off x="731520" y="3200400"/>
-            <a:ext cx="10698480" cy="914400"/>
+            <a:off x="868680" y="1234440"/>
+            <a:ext cx="10698480" cy="822960"/>
           </a:xfrm>
           <a:prstGeom prst="rect">
             <a:avLst/>
@@ -8641,6 +9719,485 @@
                 <a:latin typeface="Calibri"/>
               </a:rPr>
               <a:t>Detail held in reserve for Q&amp;A</a:t>
+            </a:r>
+          </a:p>
+        </p:txBody>
+      </p:sp>
+      <p:sp>
+        <p:nvSpPr>
+          <p:cNvPr id="6" name="Rounded Rectangle 5"/>
+          <p:cNvSpPr/>
+          <p:nvPr/>
+        </p:nvSpPr>
+        <p:spPr>
+          <a:xfrm>
+            <a:off x="731520" y="2834640"/>
+            <a:ext cx="2475738" cy="777240"/>
+          </a:xfrm>
+          <a:prstGeom prst="roundRect">
+            <a:avLst/>
+          </a:prstGeom>
+          <a:solidFill>
+            <a:srgbClr val="24243C"/>
+          </a:solidFill>
+          <a:ln w="9525">
+            <a:solidFill>
+              <a:srgbClr val="9AA3B2"/>
+            </a:solidFill>
+          </a:ln>
+          <a:effectLst/>
+        </p:spPr>
+        <p:style>
+          <a:lnRef idx="1">
+            <a:schemeClr val="accent1"/>
+          </a:lnRef>
+          <a:fillRef idx="3">
+            <a:schemeClr val="accent1"/>
+          </a:fillRef>
+          <a:effectRef idx="2">
+            <a:schemeClr val="accent1"/>
+          </a:effectRef>
+          <a:fontRef idx="minor">
+            <a:schemeClr val="lt1"/>
+          </a:fontRef>
+        </p:style>
+        <p:txBody>
+          <a:bodyPr rtlCol="0" anchor="ctr" wrap="square" lIns="45720" rIns="45720" tIns="18288" bIns="18288"/>
+          <a:lstStyle/>
+          <a:p>
+            <a:pPr algn="ctr"/>
+            <a:r>
+              <a:rPr sz="1200" b="0">
+                <a:solidFill>
+                  <a:srgbClr val="F2F4F8"/>
+                </a:solidFill>
+                <a:latin typeface="Calibri"/>
+              </a:rPr>
+              <a:t>A1 · Role &amp; skills</a:t>
+            </a:r>
+          </a:p>
+        </p:txBody>
+      </p:sp>
+      <p:sp>
+        <p:nvSpPr>
+          <p:cNvPr id="7" name="Rounded Rectangle 6"/>
+          <p:cNvSpPr/>
+          <p:nvPr/>
+        </p:nvSpPr>
+        <p:spPr>
+          <a:xfrm>
+            <a:off x="3481578" y="2834640"/>
+            <a:ext cx="2475738" cy="777240"/>
+          </a:xfrm>
+          <a:prstGeom prst="roundRect">
+            <a:avLst/>
+          </a:prstGeom>
+          <a:solidFill>
+            <a:srgbClr val="24243C"/>
+          </a:solidFill>
+          <a:ln w="9525">
+            <a:solidFill>
+              <a:srgbClr val="9AA3B2"/>
+            </a:solidFill>
+          </a:ln>
+          <a:effectLst/>
+        </p:spPr>
+        <p:style>
+          <a:lnRef idx="1">
+            <a:schemeClr val="accent1"/>
+          </a:lnRef>
+          <a:fillRef idx="3">
+            <a:schemeClr val="accent1"/>
+          </a:fillRef>
+          <a:effectRef idx="2">
+            <a:schemeClr val="accent1"/>
+          </a:effectRef>
+          <a:fontRef idx="minor">
+            <a:schemeClr val="lt1"/>
+          </a:fontRef>
+        </p:style>
+        <p:txBody>
+          <a:bodyPr rtlCol="0" anchor="ctr" wrap="square" lIns="45720" rIns="45720" tIns="18288" bIns="18288"/>
+          <a:lstStyle/>
+          <a:p>
+            <a:pPr algn="ctr"/>
+            <a:r>
+              <a:rPr sz="1200" b="0">
+                <a:solidFill>
+                  <a:srgbClr val="F2F4F8"/>
+                </a:solidFill>
+                <a:latin typeface="Calibri"/>
+              </a:rPr>
+              <a:t>A2 · Org &amp; RACI</a:t>
+            </a:r>
+          </a:p>
+        </p:txBody>
+      </p:sp>
+      <p:sp>
+        <p:nvSpPr>
+          <p:cNvPr id="8" name="Rounded Rectangle 7"/>
+          <p:cNvSpPr/>
+          <p:nvPr/>
+        </p:nvSpPr>
+        <p:spPr>
+          <a:xfrm>
+            <a:off x="6231636" y="2834640"/>
+            <a:ext cx="2475738" cy="777240"/>
+          </a:xfrm>
+          <a:prstGeom prst="roundRect">
+            <a:avLst/>
+          </a:prstGeom>
+          <a:solidFill>
+            <a:srgbClr val="24243C"/>
+          </a:solidFill>
+          <a:ln w="9525">
+            <a:solidFill>
+              <a:srgbClr val="9AA3B2"/>
+            </a:solidFill>
+          </a:ln>
+          <a:effectLst/>
+        </p:spPr>
+        <p:style>
+          <a:lnRef idx="1">
+            <a:schemeClr val="accent1"/>
+          </a:lnRef>
+          <a:fillRef idx="3">
+            <a:schemeClr val="accent1"/>
+          </a:fillRef>
+          <a:effectRef idx="2">
+            <a:schemeClr val="accent1"/>
+          </a:effectRef>
+          <a:fontRef idx="minor">
+            <a:schemeClr val="lt1"/>
+          </a:fontRef>
+        </p:style>
+        <p:txBody>
+          <a:bodyPr rtlCol="0" anchor="ctr" wrap="square" lIns="45720" rIns="45720" tIns="18288" bIns="18288"/>
+          <a:lstStyle/>
+          <a:p>
+            <a:pPr algn="ctr"/>
+            <a:r>
+              <a:rPr sz="1200" b="0">
+                <a:solidFill>
+                  <a:srgbClr val="F2F4F8"/>
+                </a:solidFill>
+                <a:latin typeface="Calibri"/>
+              </a:rPr>
+              <a:t>A3 · Vertical kits</a:t>
+            </a:r>
+          </a:p>
+        </p:txBody>
+      </p:sp>
+      <p:sp>
+        <p:nvSpPr>
+          <p:cNvPr id="9" name="Rounded Rectangle 8"/>
+          <p:cNvSpPr/>
+          <p:nvPr/>
+        </p:nvSpPr>
+        <p:spPr>
+          <a:xfrm>
+            <a:off x="8981694" y="2834640"/>
+            <a:ext cx="2475738" cy="777240"/>
+          </a:xfrm>
+          <a:prstGeom prst="roundRect">
+            <a:avLst/>
+          </a:prstGeom>
+          <a:solidFill>
+            <a:srgbClr val="24243C"/>
+          </a:solidFill>
+          <a:ln w="9525">
+            <a:solidFill>
+              <a:srgbClr val="9AA3B2"/>
+            </a:solidFill>
+          </a:ln>
+          <a:effectLst/>
+        </p:spPr>
+        <p:style>
+          <a:lnRef idx="1">
+            <a:schemeClr val="accent1"/>
+          </a:lnRef>
+          <a:fillRef idx="3">
+            <a:schemeClr val="accent1"/>
+          </a:fillRef>
+          <a:effectRef idx="2">
+            <a:schemeClr val="accent1"/>
+          </a:effectRef>
+          <a:fontRef idx="minor">
+            <a:schemeClr val="lt1"/>
+          </a:fontRef>
+        </p:style>
+        <p:txBody>
+          <a:bodyPr rtlCol="0" anchor="ctr" wrap="square" lIns="45720" rIns="45720" tIns="18288" bIns="18288"/>
+          <a:lstStyle/>
+          <a:p>
+            <a:pPr algn="ctr"/>
+            <a:r>
+              <a:rPr sz="1200" b="0">
+                <a:solidFill>
+                  <a:srgbClr val="F2F4F8"/>
+                </a:solidFill>
+                <a:latin typeface="Calibri"/>
+              </a:rPr>
+              <a:t>A4 · OT safety</a:t>
+            </a:r>
+          </a:p>
+        </p:txBody>
+      </p:sp>
+      <p:sp>
+        <p:nvSpPr>
+          <p:cNvPr id="10" name="Rounded Rectangle 9"/>
+          <p:cNvSpPr/>
+          <p:nvPr/>
+        </p:nvSpPr>
+        <p:spPr>
+          <a:xfrm>
+            <a:off x="731520" y="3931920"/>
+            <a:ext cx="2475738" cy="777240"/>
+          </a:xfrm>
+          <a:prstGeom prst="roundRect">
+            <a:avLst/>
+          </a:prstGeom>
+          <a:solidFill>
+            <a:srgbClr val="24243C"/>
+          </a:solidFill>
+          <a:ln w="9525">
+            <a:solidFill>
+              <a:srgbClr val="9AA3B2"/>
+            </a:solidFill>
+          </a:ln>
+          <a:effectLst/>
+        </p:spPr>
+        <p:style>
+          <a:lnRef idx="1">
+            <a:schemeClr val="accent1"/>
+          </a:lnRef>
+          <a:fillRef idx="3">
+            <a:schemeClr val="accent1"/>
+          </a:fillRef>
+          <a:effectRef idx="2">
+            <a:schemeClr val="accent1"/>
+          </a:effectRef>
+          <a:fontRef idx="minor">
+            <a:schemeClr val="lt1"/>
+          </a:fontRef>
+        </p:style>
+        <p:txBody>
+          <a:bodyPr rtlCol="0" anchor="ctr" wrap="square" lIns="45720" rIns="45720" tIns="18288" bIns="18288"/>
+          <a:lstStyle/>
+          <a:p>
+            <a:pPr algn="ctr"/>
+            <a:r>
+              <a:rPr sz="1200" b="0">
+                <a:solidFill>
+                  <a:srgbClr val="F2F4F8"/>
+                </a:solidFill>
+                <a:latin typeface="Calibri"/>
+              </a:rPr>
+              <a:t>A5 · P&amp;L</a:t>
+            </a:r>
+          </a:p>
+        </p:txBody>
+      </p:sp>
+      <p:sp>
+        <p:nvSpPr>
+          <p:cNvPr id="11" name="Rounded Rectangle 10"/>
+          <p:cNvSpPr/>
+          <p:nvPr/>
+        </p:nvSpPr>
+        <p:spPr>
+          <a:xfrm>
+            <a:off x="3481578" y="3931920"/>
+            <a:ext cx="2475738" cy="777240"/>
+          </a:xfrm>
+          <a:prstGeom prst="roundRect">
+            <a:avLst/>
+          </a:prstGeom>
+          <a:solidFill>
+            <a:srgbClr val="24243C"/>
+          </a:solidFill>
+          <a:ln w="9525">
+            <a:solidFill>
+              <a:srgbClr val="9AA3B2"/>
+            </a:solidFill>
+          </a:ln>
+          <a:effectLst/>
+        </p:spPr>
+        <p:style>
+          <a:lnRef idx="1">
+            <a:schemeClr val="accent1"/>
+          </a:lnRef>
+          <a:fillRef idx="3">
+            <a:schemeClr val="accent1"/>
+          </a:fillRef>
+          <a:effectRef idx="2">
+            <a:schemeClr val="accent1"/>
+          </a:effectRef>
+          <a:fontRef idx="minor">
+            <a:schemeClr val="lt1"/>
+          </a:fontRef>
+        </p:style>
+        <p:txBody>
+          <a:bodyPr rtlCol="0" anchor="ctr" wrap="square" lIns="45720" rIns="45720" tIns="18288" bIns="18288"/>
+          <a:lstStyle/>
+          <a:p>
+            <a:pPr algn="ctr"/>
+            <a:r>
+              <a:rPr sz="1200" b="0">
+                <a:solidFill>
+                  <a:srgbClr val="F2F4F8"/>
+                </a:solidFill>
+                <a:latin typeface="Calibri"/>
+              </a:rPr>
+              <a:t>A6 · Comp</a:t>
+            </a:r>
+          </a:p>
+        </p:txBody>
+      </p:sp>
+      <p:sp>
+        <p:nvSpPr>
+          <p:cNvPr id="12" name="Rounded Rectangle 11"/>
+          <p:cNvSpPr/>
+          <p:nvPr/>
+        </p:nvSpPr>
+        <p:spPr>
+          <a:xfrm>
+            <a:off x="6231636" y="3931920"/>
+            <a:ext cx="2475738" cy="777240"/>
+          </a:xfrm>
+          <a:prstGeom prst="roundRect">
+            <a:avLst/>
+          </a:prstGeom>
+          <a:solidFill>
+            <a:srgbClr val="24243C"/>
+          </a:solidFill>
+          <a:ln w="9525">
+            <a:solidFill>
+              <a:srgbClr val="9AA3B2"/>
+            </a:solidFill>
+          </a:ln>
+          <a:effectLst/>
+        </p:spPr>
+        <p:style>
+          <a:lnRef idx="1">
+            <a:schemeClr val="accent1"/>
+          </a:lnRef>
+          <a:fillRef idx="3">
+            <a:schemeClr val="accent1"/>
+          </a:fillRef>
+          <a:effectRef idx="2">
+            <a:schemeClr val="accent1"/>
+          </a:effectRef>
+          <a:fontRef idx="minor">
+            <a:schemeClr val="lt1"/>
+          </a:fontRef>
+        </p:style>
+        <p:txBody>
+          <a:bodyPr rtlCol="0" anchor="ctr" wrap="square" lIns="45720" rIns="45720" tIns="18288" bIns="18288"/>
+          <a:lstStyle/>
+          <a:p>
+            <a:pPr algn="ctr"/>
+            <a:r>
+              <a:rPr sz="1200" b="0">
+                <a:solidFill>
+                  <a:srgbClr val="F2F4F8"/>
+                </a:solidFill>
+                <a:latin typeface="Calibri"/>
+              </a:rPr>
+              <a:t>A7 · Competitive</a:t>
+            </a:r>
+          </a:p>
+        </p:txBody>
+      </p:sp>
+      <p:sp>
+        <p:nvSpPr>
+          <p:cNvPr id="13" name="Rounded Rectangle 12"/>
+          <p:cNvSpPr/>
+          <p:nvPr/>
+        </p:nvSpPr>
+        <p:spPr>
+          <a:xfrm>
+            <a:off x="8981694" y="3931920"/>
+            <a:ext cx="2475738" cy="777240"/>
+          </a:xfrm>
+          <a:prstGeom prst="roundRect">
+            <a:avLst/>
+          </a:prstGeom>
+          <a:solidFill>
+            <a:srgbClr val="24243C"/>
+          </a:solidFill>
+          <a:ln w="9525">
+            <a:solidFill>
+              <a:srgbClr val="9AA3B2"/>
+            </a:solidFill>
+          </a:ln>
+          <a:effectLst/>
+        </p:spPr>
+        <p:style>
+          <a:lnRef idx="1">
+            <a:schemeClr val="accent1"/>
+          </a:lnRef>
+          <a:fillRef idx="3">
+            <a:schemeClr val="accent1"/>
+          </a:fillRef>
+          <a:effectRef idx="2">
+            <a:schemeClr val="accent1"/>
+          </a:effectRef>
+          <a:fontRef idx="minor">
+            <a:schemeClr val="lt1"/>
+          </a:fontRef>
+        </p:style>
+        <p:txBody>
+          <a:bodyPr rtlCol="0" anchor="ctr" wrap="square" lIns="45720" rIns="45720" tIns="18288" bIns="18288"/>
+          <a:lstStyle/>
+          <a:p>
+            <a:pPr algn="ctr"/>
+            <a:r>
+              <a:rPr sz="1200" b="0">
+                <a:solidFill>
+                  <a:srgbClr val="F2F4F8"/>
+                </a:solidFill>
+                <a:latin typeface="Calibri"/>
+              </a:rPr>
+              <a:t>A8 · Risk register</a:t>
+            </a:r>
+          </a:p>
+        </p:txBody>
+      </p:sp>
+      <p:sp>
+        <p:nvSpPr>
+          <p:cNvPr id="14" name="TextBox 13"/>
+          <p:cNvSpPr txBox="1"/>
+          <p:nvPr/>
+        </p:nvSpPr>
+        <p:spPr>
+          <a:xfrm>
+            <a:off x="10515600" y="6428232"/>
+            <a:ext cx="1124712" cy="274320"/>
+          </a:xfrm>
+          <a:prstGeom prst="rect">
+            <a:avLst/>
+          </a:prstGeom>
+          <a:noFill/>
+        </p:spPr>
+        <p:txBody>
+          <a:bodyPr wrap="square" anchor="t">
+            <a:spAutoFit/>
+          </a:bodyPr>
+          <a:lstStyle/>
+          <a:p>
+            <a:pPr algn="r">
+              <a:spcAft>
+                <a:spcPts val="600"/>
+              </a:spcAft>
+            </a:pPr>
+            <a:r>
+              <a:rPr sz="1000" b="0">
+                <a:solidFill>
+                  <a:srgbClr val="9AA3B2"/>
+                </a:solidFill>
+                <a:latin typeface="Calibri"/>
+              </a:rPr>
+              <a:t>14 / 22</a:t>
             </a:r>
           </a:p>
         </p:txBody>
@@ -8837,8 +10394,52 @@
         </p:nvSpPr>
         <p:spPr>
           <a:xfrm>
+            <a:off x="548640" y="2167128"/>
+            <a:ext cx="11091672" cy="12801"/>
+          </a:xfrm>
+          <a:prstGeom prst="rect">
+            <a:avLst/>
+          </a:prstGeom>
+          <a:solidFill>
+            <a:srgbClr val="2C2C3A"/>
+          </a:solidFill>
+          <a:ln>
+            <a:noFill/>
+          </a:ln>
+          <a:effectLst/>
+        </p:spPr>
+        <p:style>
+          <a:lnRef idx="1">
+            <a:schemeClr val="accent1"/>
+          </a:lnRef>
+          <a:fillRef idx="3">
+            <a:schemeClr val="accent1"/>
+          </a:fillRef>
+          <a:effectRef idx="2">
+            <a:schemeClr val="accent1"/>
+          </a:effectRef>
+          <a:fontRef idx="minor">
+            <a:schemeClr val="lt1"/>
+          </a:fontRef>
+        </p:style>
+        <p:txBody>
+          <a:bodyPr rtlCol="0" anchor="ctr"/>
+          <a:lstStyle/>
+          <a:p>
+            <a:pPr algn="ctr"/>
+          </a:p>
+        </p:txBody>
+      </p:sp>
+      <p:sp>
+        <p:nvSpPr>
+          <p:cNvPr id="7" name="Rectangle 6"/>
+          <p:cNvSpPr/>
+          <p:nvPr/>
+        </p:nvSpPr>
+        <p:spPr>
+          <a:xfrm>
             <a:off x="548640" y="2331720"/>
-            <a:ext cx="11064240" cy="3931920"/>
+            <a:ext cx="5486400" cy="3931920"/>
           </a:xfrm>
           <a:prstGeom prst="rect">
             <a:avLst/>
@@ -8877,14 +10478,14 @@
       </p:sp>
       <p:sp>
         <p:nvSpPr>
-          <p:cNvPr id="7" name="TextBox 6"/>
+          <p:cNvPr id="8" name="TextBox 7"/>
           <p:cNvSpPr txBox="1"/>
           <p:nvPr/>
         </p:nvSpPr>
         <p:spPr>
           <a:xfrm>
-            <a:off x="914400" y="2560320"/>
-            <a:ext cx="10332720" cy="3566160"/>
+            <a:off x="822960" y="2542032"/>
+            <a:ext cx="4937760" cy="3566160"/>
           </a:xfrm>
           <a:prstGeom prst="rect">
             <a:avLst/>
@@ -8899,11 +10500,11 @@
           <a:p>
             <a:pPr algn="l">
               <a:spcAft>
-                <a:spcPts val="1200"/>
+                <a:spcPts val="1100"/>
               </a:spcAft>
             </a:pPr>
             <a:r>
-              <a:rPr sz="1800" b="1">
+              <a:rPr sz="1600" b="1">
                 <a:solidFill>
                   <a:srgbClr val="00BCEB"/>
                 </a:solidFill>
@@ -8912,7 +10513,7 @@
               <a:t>•  </a:t>
             </a:r>
             <a:r>
-              <a:rPr sz="1800" b="0">
+              <a:rPr sz="1600" b="0">
                 <a:solidFill>
                   <a:srgbClr val="F2F4F8"/>
                 </a:solidFill>
@@ -8924,11 +10525,11 @@
           <a:p>
             <a:pPr algn="l">
               <a:spcAft>
-                <a:spcPts val="1200"/>
+                <a:spcPts val="1100"/>
               </a:spcAft>
             </a:pPr>
             <a:r>
-              <a:rPr sz="1800" b="1">
+              <a:rPr sz="1600" b="1">
                 <a:solidFill>
                   <a:srgbClr val="00BCEB"/>
                 </a:solidFill>
@@ -8937,7 +10538,7 @@
               <a:t>•  </a:t>
             </a:r>
             <a:r>
-              <a:rPr sz="1800" b="0">
+              <a:rPr sz="1600" b="0">
                 <a:solidFill>
                   <a:srgbClr val="F2F4F8"/>
                 </a:solidFill>
@@ -8949,11 +10550,11 @@
           <a:p>
             <a:pPr algn="l">
               <a:spcAft>
-                <a:spcPts val="1200"/>
+                <a:spcPts val="1100"/>
               </a:spcAft>
             </a:pPr>
             <a:r>
-              <a:rPr sz="1800" b="1">
+              <a:rPr sz="1600" b="1">
                 <a:solidFill>
                   <a:srgbClr val="00BCEB"/>
                 </a:solidFill>
@@ -8962,7 +10563,7 @@
               <a:t>•  </a:t>
             </a:r>
             <a:r>
-              <a:rPr sz="1800" b="0">
+              <a:rPr sz="1600" b="0">
                 <a:solidFill>
                   <a:srgbClr val="F2F4F8"/>
                 </a:solidFill>
@@ -8975,14 +10576,253 @@
       </p:sp>
       <p:sp>
         <p:nvSpPr>
-          <p:cNvPr id="8" name="TextBox 7"/>
+          <p:cNvPr id="9" name="Rectangle 8"/>
+          <p:cNvSpPr/>
+          <p:nvPr/>
+        </p:nvSpPr>
+        <p:spPr>
+          <a:xfrm>
+            <a:off x="6263640" y="2331720"/>
+            <a:ext cx="5349240" cy="3931920"/>
+          </a:xfrm>
+          <a:prstGeom prst="rect">
+            <a:avLst/>
+          </a:prstGeom>
+          <a:solidFill>
+            <a:srgbClr val="1A1A2E"/>
+          </a:solidFill>
+          <a:ln w="12700">
+            <a:solidFill>
+              <a:srgbClr val="2C2C3A"/>
+            </a:solidFill>
+          </a:ln>
+          <a:effectLst/>
+        </p:spPr>
+        <p:style>
+          <a:lnRef idx="1">
+            <a:schemeClr val="accent1"/>
+          </a:lnRef>
+          <a:fillRef idx="3">
+            <a:schemeClr val="accent1"/>
+          </a:fillRef>
+          <a:effectRef idx="2">
+            <a:schemeClr val="accent1"/>
+          </a:effectRef>
+          <a:fontRef idx="minor">
+            <a:schemeClr val="lt1"/>
+          </a:fontRef>
+        </p:style>
+        <p:txBody>
+          <a:bodyPr rtlCol="0" anchor="ctr"/>
+          <a:lstStyle/>
+          <a:p>
+            <a:pPr algn="ctr"/>
+          </a:p>
+        </p:txBody>
+      </p:sp>
+      <p:sp>
+        <p:nvSpPr>
+          <p:cNvPr id="10" name="Rounded Rectangle 9"/>
+          <p:cNvSpPr/>
+          <p:nvPr/>
+        </p:nvSpPr>
+        <p:spPr>
+          <a:xfrm>
+            <a:off x="8161019" y="2834639"/>
+            <a:ext cx="1554480" cy="1280160"/>
+          </a:xfrm>
+          <a:prstGeom prst="roundRect">
+            <a:avLst/>
+          </a:prstGeom>
+          <a:solidFill>
+            <a:srgbClr val="24243C"/>
+          </a:solidFill>
+          <a:ln w="15875">
+            <a:solidFill>
+              <a:srgbClr val="00BCEB"/>
+            </a:solidFill>
+          </a:ln>
+          <a:effectLst/>
+        </p:spPr>
+        <p:style>
+          <a:lnRef idx="1">
+            <a:schemeClr val="accent1"/>
+          </a:lnRef>
+          <a:fillRef idx="3">
+            <a:schemeClr val="accent1"/>
+          </a:fillRef>
+          <a:effectRef idx="2">
+            <a:schemeClr val="accent1"/>
+          </a:effectRef>
+          <a:fontRef idx="minor">
+            <a:schemeClr val="lt1"/>
+          </a:fontRef>
+        </p:style>
+        <p:txBody>
+          <a:bodyPr rtlCol="0" anchor="ctr" wrap="square" lIns="45720" rIns="45720" tIns="18288" bIns="18288"/>
+          <a:lstStyle/>
+          <a:p>
+            <a:pPr algn="ctr"/>
+            <a:r>
+              <a:rPr sz="4000" b="1">
+                <a:solidFill>
+                  <a:srgbClr val="00BCEB"/>
+                </a:solidFill>
+                <a:latin typeface="Calibri"/>
+              </a:rPr>
+              <a:t>A1</a:t>
+            </a:r>
+          </a:p>
+        </p:txBody>
+      </p:sp>
+      <p:sp>
+        <p:nvSpPr>
+          <p:cNvPr id="11" name="TextBox 10"/>
           <p:cNvSpPr txBox="1"/>
           <p:nvPr/>
         </p:nvSpPr>
         <p:spPr>
           <a:xfrm>
-            <a:off x="548640" y="6419088"/>
-            <a:ext cx="11064240" cy="320040"/>
+            <a:off x="6629400" y="4343400"/>
+            <a:ext cx="4617720" cy="365760"/>
+          </a:xfrm>
+          <a:prstGeom prst="rect">
+            <a:avLst/>
+          </a:prstGeom>
+          <a:noFill/>
+        </p:spPr>
+        <p:txBody>
+          <a:bodyPr wrap="square" anchor="t">
+            <a:spAutoFit/>
+          </a:bodyPr>
+          <a:lstStyle/>
+          <a:p>
+            <a:pPr algn="ctr">
+              <a:spcAft>
+                <a:spcPts val="600"/>
+              </a:spcAft>
+            </a:pPr>
+            <a:r>
+              <a:rPr sz="1500" b="0">
+                <a:solidFill>
+                  <a:srgbClr val="9AA3B2"/>
+                </a:solidFill>
+                <a:latin typeface="Calibri"/>
+              </a:rPr>
+              <a:t>Reserve for Q&amp;A</a:t>
+            </a:r>
+          </a:p>
+        </p:txBody>
+      </p:sp>
+      <p:sp>
+        <p:nvSpPr>
+          <p:cNvPr id="12" name="Rounded Rectangle 11"/>
+          <p:cNvSpPr/>
+          <p:nvPr/>
+        </p:nvSpPr>
+        <p:spPr>
+          <a:xfrm>
+            <a:off x="7109459" y="5074920"/>
+            <a:ext cx="3657600" cy="566928"/>
+          </a:xfrm>
+          <a:prstGeom prst="roundRect">
+            <a:avLst/>
+          </a:prstGeom>
+          <a:solidFill>
+            <a:srgbClr val="1A1A2E"/>
+          </a:solidFill>
+          <a:ln w="9525">
+            <a:solidFill>
+              <a:srgbClr val="2C2C3A"/>
+            </a:solidFill>
+          </a:ln>
+          <a:effectLst/>
+        </p:spPr>
+        <p:style>
+          <a:lnRef idx="1">
+            <a:schemeClr val="accent1"/>
+          </a:lnRef>
+          <a:fillRef idx="3">
+            <a:schemeClr val="accent1"/>
+          </a:fillRef>
+          <a:effectRef idx="2">
+            <a:schemeClr val="accent1"/>
+          </a:effectRef>
+          <a:fontRef idx="minor">
+            <a:schemeClr val="lt1"/>
+          </a:fontRef>
+        </p:style>
+        <p:txBody>
+          <a:bodyPr rtlCol="0" anchor="ctr" wrap="square" lIns="45720" rIns="45720" tIns="18288" bIns="18288"/>
+          <a:lstStyle/>
+          <a:p>
+            <a:pPr algn="ctr"/>
+            <a:r>
+              <a:rPr sz="1200" b="0">
+                <a:solidFill>
+                  <a:srgbClr val="F2F4F8"/>
+                </a:solidFill>
+                <a:latin typeface="Calibri"/>
+              </a:rPr>
+              <a:t>Source · 03 §1–3</a:t>
+            </a:r>
+          </a:p>
+        </p:txBody>
+      </p:sp>
+      <p:sp>
+        <p:nvSpPr>
+          <p:cNvPr id="13" name="Rectangle 12"/>
+          <p:cNvSpPr/>
+          <p:nvPr/>
+        </p:nvSpPr>
+        <p:spPr>
+          <a:xfrm>
+            <a:off x="548640" y="6364224"/>
+            <a:ext cx="11091672" cy="10972"/>
+          </a:xfrm>
+          <a:prstGeom prst="rect">
+            <a:avLst/>
+          </a:prstGeom>
+          <a:solidFill>
+            <a:srgbClr val="2C2C3A"/>
+          </a:solidFill>
+          <a:ln>
+            <a:noFill/>
+          </a:ln>
+          <a:effectLst/>
+        </p:spPr>
+        <p:style>
+          <a:lnRef idx="1">
+            <a:schemeClr val="accent1"/>
+          </a:lnRef>
+          <a:fillRef idx="3">
+            <a:schemeClr val="accent1"/>
+          </a:fillRef>
+          <a:effectRef idx="2">
+            <a:schemeClr val="accent1"/>
+          </a:effectRef>
+          <a:fontRef idx="minor">
+            <a:schemeClr val="lt1"/>
+          </a:fontRef>
+        </p:style>
+        <p:txBody>
+          <a:bodyPr rtlCol="0" anchor="ctr"/>
+          <a:lstStyle/>
+          <a:p>
+            <a:pPr algn="ctr"/>
+          </a:p>
+        </p:txBody>
+      </p:sp>
+      <p:sp>
+        <p:nvSpPr>
+          <p:cNvPr id="14" name="TextBox 13"/>
+          <p:cNvSpPr txBox="1"/>
+          <p:nvPr/>
+        </p:nvSpPr>
+        <p:spPr>
+          <a:xfrm>
+            <a:off x="548640" y="6428232"/>
+            <a:ext cx="9692640" cy="292608"/>
           </a:xfrm>
           <a:prstGeom prst="rect">
             <a:avLst/>
@@ -9001,13 +10841,61 @@
               </a:spcAft>
             </a:pPr>
             <a:r>
+              <a:rPr sz="900" b="1">
+                <a:solidFill>
+                  <a:srgbClr val="9AA3B2"/>
+                </a:solidFill>
+                <a:latin typeface="Calibri"/>
+              </a:rPr>
+              <a:t>FIELD CTO · X-ARCH SELLING</a:t>
+            </a:r>
+            <a:r>
+              <a:rPr sz="900" b="0">
+                <a:solidFill>
+                  <a:srgbClr val="9AA3B2"/>
+                </a:solidFill>
+                <a:latin typeface="Calibri"/>
+              </a:rPr>
+              <a:t>      Appendix — reserve for Q&amp;A. Illustrative figures.</a:t>
+            </a:r>
+          </a:p>
+        </p:txBody>
+      </p:sp>
+      <p:sp>
+        <p:nvSpPr>
+          <p:cNvPr id="15" name="TextBox 14"/>
+          <p:cNvSpPr txBox="1"/>
+          <p:nvPr/>
+        </p:nvSpPr>
+        <p:spPr>
+          <a:xfrm>
+            <a:off x="10515600" y="6428232"/>
+            <a:ext cx="1124712" cy="274320"/>
+          </a:xfrm>
+          <a:prstGeom prst="rect">
+            <a:avLst/>
+          </a:prstGeom>
+          <a:noFill/>
+        </p:spPr>
+        <p:txBody>
+          <a:bodyPr wrap="square" anchor="t">
+            <a:spAutoFit/>
+          </a:bodyPr>
+          <a:lstStyle/>
+          <a:p>
+            <a:pPr algn="r">
+              <a:spcAft>
+                <a:spcPts val="600"/>
+              </a:spcAft>
+            </a:pPr>
+            <a:r>
               <a:rPr sz="1000" b="0">
                 <a:solidFill>
                   <a:srgbClr val="9AA3B2"/>
                 </a:solidFill>
                 <a:latin typeface="Calibri"/>
               </a:rPr>
-              <a:t>Appendix — reserve for Q&amp;A. Illustrative figures.</a:t>
+              <a:t>15 / 22</a:t>
             </a:r>
           </a:p>
         </p:txBody>
@@ -9204,8 +11092,52 @@
         </p:nvSpPr>
         <p:spPr>
           <a:xfrm>
+            <a:off x="548640" y="2167128"/>
+            <a:ext cx="11091672" cy="12801"/>
+          </a:xfrm>
+          <a:prstGeom prst="rect">
+            <a:avLst/>
+          </a:prstGeom>
+          <a:solidFill>
+            <a:srgbClr val="2C2C3A"/>
+          </a:solidFill>
+          <a:ln>
+            <a:noFill/>
+          </a:ln>
+          <a:effectLst/>
+        </p:spPr>
+        <p:style>
+          <a:lnRef idx="1">
+            <a:schemeClr val="accent1"/>
+          </a:lnRef>
+          <a:fillRef idx="3">
+            <a:schemeClr val="accent1"/>
+          </a:fillRef>
+          <a:effectRef idx="2">
+            <a:schemeClr val="accent1"/>
+          </a:effectRef>
+          <a:fontRef idx="minor">
+            <a:schemeClr val="lt1"/>
+          </a:fontRef>
+        </p:style>
+        <p:txBody>
+          <a:bodyPr rtlCol="0" anchor="ctr"/>
+          <a:lstStyle/>
+          <a:p>
+            <a:pPr algn="ctr"/>
+          </a:p>
+        </p:txBody>
+      </p:sp>
+      <p:sp>
+        <p:nvSpPr>
+          <p:cNvPr id="7" name="Rectangle 6"/>
+          <p:cNvSpPr/>
+          <p:nvPr/>
+        </p:nvSpPr>
+        <p:spPr>
+          <a:xfrm>
             <a:off x="548640" y="2331720"/>
-            <a:ext cx="11064240" cy="3931920"/>
+            <a:ext cx="5486400" cy="3931920"/>
           </a:xfrm>
           <a:prstGeom prst="rect">
             <a:avLst/>
@@ -9244,14 +11176,14 @@
       </p:sp>
       <p:sp>
         <p:nvSpPr>
-          <p:cNvPr id="7" name="TextBox 6"/>
+          <p:cNvPr id="8" name="TextBox 7"/>
           <p:cNvSpPr txBox="1"/>
           <p:nvPr/>
         </p:nvSpPr>
         <p:spPr>
           <a:xfrm>
-            <a:off x="914400" y="2560320"/>
-            <a:ext cx="10332720" cy="3566160"/>
+            <a:off x="822960" y="2542032"/>
+            <a:ext cx="4937760" cy="3566160"/>
           </a:xfrm>
           <a:prstGeom prst="rect">
             <a:avLst/>
@@ -9266,11 +11198,11 @@
           <a:p>
             <a:pPr algn="l">
               <a:spcAft>
-                <a:spcPts val="1200"/>
+                <a:spcPts val="1100"/>
               </a:spcAft>
             </a:pPr>
             <a:r>
-              <a:rPr sz="1800" b="1">
+              <a:rPr sz="1600" b="1">
                 <a:solidFill>
                   <a:srgbClr val="00BCEB"/>
                 </a:solidFill>
@@ -9279,7 +11211,7 @@
               <a:t>•  </a:t>
             </a:r>
             <a:r>
-              <a:rPr sz="1800" b="0">
+              <a:rPr sz="1600" b="0">
                 <a:solidFill>
                   <a:srgbClr val="F2F4F8"/>
                 </a:solidFill>
@@ -9291,11 +11223,11 @@
           <a:p>
             <a:pPr algn="l">
               <a:spcAft>
-                <a:spcPts val="1200"/>
+                <a:spcPts val="1100"/>
               </a:spcAft>
             </a:pPr>
             <a:r>
-              <a:rPr sz="1800" b="1">
+              <a:rPr sz="1600" b="1">
                 <a:solidFill>
                   <a:srgbClr val="00BCEB"/>
                 </a:solidFill>
@@ -9304,7 +11236,7 @@
               <a:t>•  </a:t>
             </a:r>
             <a:r>
-              <a:rPr sz="1800" b="0">
+              <a:rPr sz="1600" b="0">
                 <a:solidFill>
                   <a:srgbClr val="F2F4F8"/>
                 </a:solidFill>
@@ -9316,11 +11248,11 @@
           <a:p>
             <a:pPr algn="l">
               <a:spcAft>
-                <a:spcPts val="1200"/>
+                <a:spcPts val="1100"/>
               </a:spcAft>
             </a:pPr>
             <a:r>
-              <a:rPr sz="1800" b="1">
+              <a:rPr sz="1600" b="1">
                 <a:solidFill>
                   <a:srgbClr val="00BCEB"/>
                 </a:solidFill>
@@ -9329,7 +11261,7 @@
               <a:t>•  </a:t>
             </a:r>
             <a:r>
-              <a:rPr sz="1800" b="0">
+              <a:rPr sz="1600" b="0">
                 <a:solidFill>
                   <a:srgbClr val="F2F4F8"/>
                 </a:solidFill>
@@ -9342,14 +11274,253 @@
       </p:sp>
       <p:sp>
         <p:nvSpPr>
-          <p:cNvPr id="8" name="TextBox 7"/>
+          <p:cNvPr id="9" name="Rectangle 8"/>
+          <p:cNvSpPr/>
+          <p:nvPr/>
+        </p:nvSpPr>
+        <p:spPr>
+          <a:xfrm>
+            <a:off x="6263640" y="2331720"/>
+            <a:ext cx="5349240" cy="3931920"/>
+          </a:xfrm>
+          <a:prstGeom prst="rect">
+            <a:avLst/>
+          </a:prstGeom>
+          <a:solidFill>
+            <a:srgbClr val="1A1A2E"/>
+          </a:solidFill>
+          <a:ln w="12700">
+            <a:solidFill>
+              <a:srgbClr val="2C2C3A"/>
+            </a:solidFill>
+          </a:ln>
+          <a:effectLst/>
+        </p:spPr>
+        <p:style>
+          <a:lnRef idx="1">
+            <a:schemeClr val="accent1"/>
+          </a:lnRef>
+          <a:fillRef idx="3">
+            <a:schemeClr val="accent1"/>
+          </a:fillRef>
+          <a:effectRef idx="2">
+            <a:schemeClr val="accent1"/>
+          </a:effectRef>
+          <a:fontRef idx="minor">
+            <a:schemeClr val="lt1"/>
+          </a:fontRef>
+        </p:style>
+        <p:txBody>
+          <a:bodyPr rtlCol="0" anchor="ctr"/>
+          <a:lstStyle/>
+          <a:p>
+            <a:pPr algn="ctr"/>
+          </a:p>
+        </p:txBody>
+      </p:sp>
+      <p:sp>
+        <p:nvSpPr>
+          <p:cNvPr id="10" name="Rounded Rectangle 9"/>
+          <p:cNvSpPr/>
+          <p:nvPr/>
+        </p:nvSpPr>
+        <p:spPr>
+          <a:xfrm>
+            <a:off x="8161019" y="2834639"/>
+            <a:ext cx="1554480" cy="1280160"/>
+          </a:xfrm>
+          <a:prstGeom prst="roundRect">
+            <a:avLst/>
+          </a:prstGeom>
+          <a:solidFill>
+            <a:srgbClr val="24243C"/>
+          </a:solidFill>
+          <a:ln w="15875">
+            <a:solidFill>
+              <a:srgbClr val="00BCEB"/>
+            </a:solidFill>
+          </a:ln>
+          <a:effectLst/>
+        </p:spPr>
+        <p:style>
+          <a:lnRef idx="1">
+            <a:schemeClr val="accent1"/>
+          </a:lnRef>
+          <a:fillRef idx="3">
+            <a:schemeClr val="accent1"/>
+          </a:fillRef>
+          <a:effectRef idx="2">
+            <a:schemeClr val="accent1"/>
+          </a:effectRef>
+          <a:fontRef idx="minor">
+            <a:schemeClr val="lt1"/>
+          </a:fontRef>
+        </p:style>
+        <p:txBody>
+          <a:bodyPr rtlCol="0" anchor="ctr" wrap="square" lIns="45720" rIns="45720" tIns="18288" bIns="18288"/>
+          <a:lstStyle/>
+          <a:p>
+            <a:pPr algn="ctr"/>
+            <a:r>
+              <a:rPr sz="4000" b="1">
+                <a:solidFill>
+                  <a:srgbClr val="00BCEB"/>
+                </a:solidFill>
+                <a:latin typeface="Calibri"/>
+              </a:rPr>
+              <a:t>A2</a:t>
+            </a:r>
+          </a:p>
+        </p:txBody>
+      </p:sp>
+      <p:sp>
+        <p:nvSpPr>
+          <p:cNvPr id="11" name="TextBox 10"/>
           <p:cNvSpPr txBox="1"/>
           <p:nvPr/>
         </p:nvSpPr>
         <p:spPr>
           <a:xfrm>
-            <a:off x="548640" y="6419088"/>
-            <a:ext cx="11064240" cy="320040"/>
+            <a:off x="6629400" y="4343400"/>
+            <a:ext cx="4617720" cy="365760"/>
+          </a:xfrm>
+          <a:prstGeom prst="rect">
+            <a:avLst/>
+          </a:prstGeom>
+          <a:noFill/>
+        </p:spPr>
+        <p:txBody>
+          <a:bodyPr wrap="square" anchor="t">
+            <a:spAutoFit/>
+          </a:bodyPr>
+          <a:lstStyle/>
+          <a:p>
+            <a:pPr algn="ctr">
+              <a:spcAft>
+                <a:spcPts val="600"/>
+              </a:spcAft>
+            </a:pPr>
+            <a:r>
+              <a:rPr sz="1500" b="0">
+                <a:solidFill>
+                  <a:srgbClr val="9AA3B2"/>
+                </a:solidFill>
+                <a:latin typeface="Calibri"/>
+              </a:rPr>
+              <a:t>Reserve for Q&amp;A</a:t>
+            </a:r>
+          </a:p>
+        </p:txBody>
+      </p:sp>
+      <p:sp>
+        <p:nvSpPr>
+          <p:cNvPr id="12" name="Rounded Rectangle 11"/>
+          <p:cNvSpPr/>
+          <p:nvPr/>
+        </p:nvSpPr>
+        <p:spPr>
+          <a:xfrm>
+            <a:off x="7109459" y="5074920"/>
+            <a:ext cx="3657600" cy="566928"/>
+          </a:xfrm>
+          <a:prstGeom prst="roundRect">
+            <a:avLst/>
+          </a:prstGeom>
+          <a:solidFill>
+            <a:srgbClr val="1A1A2E"/>
+          </a:solidFill>
+          <a:ln w="9525">
+            <a:solidFill>
+              <a:srgbClr val="2C2C3A"/>
+            </a:solidFill>
+          </a:ln>
+          <a:effectLst/>
+        </p:spPr>
+        <p:style>
+          <a:lnRef idx="1">
+            <a:schemeClr val="accent1"/>
+          </a:lnRef>
+          <a:fillRef idx="3">
+            <a:schemeClr val="accent1"/>
+          </a:fillRef>
+          <a:effectRef idx="2">
+            <a:schemeClr val="accent1"/>
+          </a:effectRef>
+          <a:fontRef idx="minor">
+            <a:schemeClr val="lt1"/>
+          </a:fontRef>
+        </p:style>
+        <p:txBody>
+          <a:bodyPr rtlCol="0" anchor="ctr" wrap="square" lIns="45720" rIns="45720" tIns="18288" bIns="18288"/>
+          <a:lstStyle/>
+          <a:p>
+            <a:pPr algn="ctr"/>
+            <a:r>
+              <a:rPr sz="1200" b="0">
+                <a:solidFill>
+                  <a:srgbClr val="F2F4F8"/>
+                </a:solidFill>
+                <a:latin typeface="Calibri"/>
+              </a:rPr>
+              <a:t>Source · 03 §5, §8</a:t>
+            </a:r>
+          </a:p>
+        </p:txBody>
+      </p:sp>
+      <p:sp>
+        <p:nvSpPr>
+          <p:cNvPr id="13" name="Rectangle 12"/>
+          <p:cNvSpPr/>
+          <p:nvPr/>
+        </p:nvSpPr>
+        <p:spPr>
+          <a:xfrm>
+            <a:off x="548640" y="6364224"/>
+            <a:ext cx="11091672" cy="10972"/>
+          </a:xfrm>
+          <a:prstGeom prst="rect">
+            <a:avLst/>
+          </a:prstGeom>
+          <a:solidFill>
+            <a:srgbClr val="2C2C3A"/>
+          </a:solidFill>
+          <a:ln>
+            <a:noFill/>
+          </a:ln>
+          <a:effectLst/>
+        </p:spPr>
+        <p:style>
+          <a:lnRef idx="1">
+            <a:schemeClr val="accent1"/>
+          </a:lnRef>
+          <a:fillRef idx="3">
+            <a:schemeClr val="accent1"/>
+          </a:fillRef>
+          <a:effectRef idx="2">
+            <a:schemeClr val="accent1"/>
+          </a:effectRef>
+          <a:fontRef idx="minor">
+            <a:schemeClr val="lt1"/>
+          </a:fontRef>
+        </p:style>
+        <p:txBody>
+          <a:bodyPr rtlCol="0" anchor="ctr"/>
+          <a:lstStyle/>
+          <a:p>
+            <a:pPr algn="ctr"/>
+          </a:p>
+        </p:txBody>
+      </p:sp>
+      <p:sp>
+        <p:nvSpPr>
+          <p:cNvPr id="14" name="TextBox 13"/>
+          <p:cNvSpPr txBox="1"/>
+          <p:nvPr/>
+        </p:nvSpPr>
+        <p:spPr>
+          <a:xfrm>
+            <a:off x="548640" y="6428232"/>
+            <a:ext cx="9692640" cy="292608"/>
           </a:xfrm>
           <a:prstGeom prst="rect">
             <a:avLst/>
@@ -9368,13 +11539,61 @@
               </a:spcAft>
             </a:pPr>
             <a:r>
+              <a:rPr sz="900" b="1">
+                <a:solidFill>
+                  <a:srgbClr val="9AA3B2"/>
+                </a:solidFill>
+                <a:latin typeface="Calibri"/>
+              </a:rPr>
+              <a:t>FIELD CTO · X-ARCH SELLING</a:t>
+            </a:r>
+            <a:r>
+              <a:rPr sz="900" b="0">
+                <a:solidFill>
+                  <a:srgbClr val="9AA3B2"/>
+                </a:solidFill>
+                <a:latin typeface="Calibri"/>
+              </a:rPr>
+              <a:t>      Appendix — reserve for Q&amp;A. Illustrative figures.</a:t>
+            </a:r>
+          </a:p>
+        </p:txBody>
+      </p:sp>
+      <p:sp>
+        <p:nvSpPr>
+          <p:cNvPr id="15" name="TextBox 14"/>
+          <p:cNvSpPr txBox="1"/>
+          <p:nvPr/>
+        </p:nvSpPr>
+        <p:spPr>
+          <a:xfrm>
+            <a:off x="10515600" y="6428232"/>
+            <a:ext cx="1124712" cy="274320"/>
+          </a:xfrm>
+          <a:prstGeom prst="rect">
+            <a:avLst/>
+          </a:prstGeom>
+          <a:noFill/>
+        </p:spPr>
+        <p:txBody>
+          <a:bodyPr wrap="square" anchor="t">
+            <a:spAutoFit/>
+          </a:bodyPr>
+          <a:lstStyle/>
+          <a:p>
+            <a:pPr algn="r">
+              <a:spcAft>
+                <a:spcPts val="600"/>
+              </a:spcAft>
+            </a:pPr>
+            <a:r>
               <a:rPr sz="1000" b="0">
                 <a:solidFill>
                   <a:srgbClr val="9AA3B2"/>
                 </a:solidFill>
                 <a:latin typeface="Calibri"/>
               </a:rPr>
-              <a:t>Appendix — reserve for Q&amp;A. Illustrative figures.</a:t>
+              <a:t>16 / 22</a:t>
             </a:r>
           </a:p>
         </p:txBody>
@@ -9571,8 +11790,52 @@
         </p:nvSpPr>
         <p:spPr>
           <a:xfrm>
+            <a:off x="548640" y="2167128"/>
+            <a:ext cx="11091672" cy="12801"/>
+          </a:xfrm>
+          <a:prstGeom prst="rect">
+            <a:avLst/>
+          </a:prstGeom>
+          <a:solidFill>
+            <a:srgbClr val="2C2C3A"/>
+          </a:solidFill>
+          <a:ln>
+            <a:noFill/>
+          </a:ln>
+          <a:effectLst/>
+        </p:spPr>
+        <p:style>
+          <a:lnRef idx="1">
+            <a:schemeClr val="accent1"/>
+          </a:lnRef>
+          <a:fillRef idx="3">
+            <a:schemeClr val="accent1"/>
+          </a:fillRef>
+          <a:effectRef idx="2">
+            <a:schemeClr val="accent1"/>
+          </a:effectRef>
+          <a:fontRef idx="minor">
+            <a:schemeClr val="lt1"/>
+          </a:fontRef>
+        </p:style>
+        <p:txBody>
+          <a:bodyPr rtlCol="0" anchor="ctr"/>
+          <a:lstStyle/>
+          <a:p>
+            <a:pPr algn="ctr"/>
+          </a:p>
+        </p:txBody>
+      </p:sp>
+      <p:sp>
+        <p:nvSpPr>
+          <p:cNvPr id="7" name="Rectangle 6"/>
+          <p:cNvSpPr/>
+          <p:nvPr/>
+        </p:nvSpPr>
+        <p:spPr>
+          <a:xfrm>
             <a:off x="548640" y="2331720"/>
-            <a:ext cx="11064240" cy="3931920"/>
+            <a:ext cx="5486400" cy="3931920"/>
           </a:xfrm>
           <a:prstGeom prst="rect">
             <a:avLst/>
@@ -9611,14 +11874,14 @@
       </p:sp>
       <p:sp>
         <p:nvSpPr>
-          <p:cNvPr id="7" name="TextBox 6"/>
+          <p:cNvPr id="8" name="TextBox 7"/>
           <p:cNvSpPr txBox="1"/>
           <p:nvPr/>
         </p:nvSpPr>
         <p:spPr>
           <a:xfrm>
-            <a:off x="914400" y="2560320"/>
-            <a:ext cx="10332720" cy="3566160"/>
+            <a:off x="822960" y="2542032"/>
+            <a:ext cx="4937760" cy="3566160"/>
           </a:xfrm>
           <a:prstGeom prst="rect">
             <a:avLst/>
@@ -9633,11 +11896,11 @@
           <a:p>
             <a:pPr algn="l">
               <a:spcAft>
-                <a:spcPts val="1200"/>
+                <a:spcPts val="1100"/>
               </a:spcAft>
             </a:pPr>
             <a:r>
-              <a:rPr sz="1800" b="1">
+              <a:rPr sz="1600" b="1">
                 <a:solidFill>
                   <a:srgbClr val="00BCEB"/>
                 </a:solidFill>
@@ -9646,7 +11909,7 @@
               <a:t>•  </a:t>
             </a:r>
             <a:r>
-              <a:rPr sz="1800" b="0">
+              <a:rPr sz="1600" b="0">
                 <a:solidFill>
                   <a:srgbClr val="F2F4F8"/>
                 </a:solidFill>
@@ -9658,11 +11921,11 @@
           <a:p>
             <a:pPr algn="l">
               <a:spcAft>
-                <a:spcPts val="1200"/>
+                <a:spcPts val="1100"/>
               </a:spcAft>
             </a:pPr>
             <a:r>
-              <a:rPr sz="1800" b="1">
+              <a:rPr sz="1600" b="1">
                 <a:solidFill>
                   <a:srgbClr val="00BCEB"/>
                 </a:solidFill>
@@ -9671,7 +11934,7 @@
               <a:t>•  </a:t>
             </a:r>
             <a:r>
-              <a:rPr sz="1800" b="0">
+              <a:rPr sz="1600" b="0">
                 <a:solidFill>
                   <a:srgbClr val="F2F4F8"/>
                 </a:solidFill>
@@ -9683,11 +11946,11 @@
           <a:p>
             <a:pPr algn="l">
               <a:spcAft>
-                <a:spcPts val="1200"/>
+                <a:spcPts val="1100"/>
               </a:spcAft>
             </a:pPr>
             <a:r>
-              <a:rPr sz="1800" b="1">
+              <a:rPr sz="1600" b="1">
                 <a:solidFill>
                   <a:srgbClr val="00BCEB"/>
                 </a:solidFill>
@@ -9696,7 +11959,7 @@
               <a:t>•  </a:t>
             </a:r>
             <a:r>
-              <a:rPr sz="1800" b="0">
+              <a:rPr sz="1600" b="0">
                 <a:solidFill>
                   <a:srgbClr val="F2F4F8"/>
                 </a:solidFill>
@@ -9709,14 +11972,253 @@
       </p:sp>
       <p:sp>
         <p:nvSpPr>
-          <p:cNvPr id="8" name="TextBox 7"/>
+          <p:cNvPr id="9" name="Rectangle 8"/>
+          <p:cNvSpPr/>
+          <p:nvPr/>
+        </p:nvSpPr>
+        <p:spPr>
+          <a:xfrm>
+            <a:off x="6263640" y="2331720"/>
+            <a:ext cx="5349240" cy="3931920"/>
+          </a:xfrm>
+          <a:prstGeom prst="rect">
+            <a:avLst/>
+          </a:prstGeom>
+          <a:solidFill>
+            <a:srgbClr val="1A1A2E"/>
+          </a:solidFill>
+          <a:ln w="12700">
+            <a:solidFill>
+              <a:srgbClr val="2C2C3A"/>
+            </a:solidFill>
+          </a:ln>
+          <a:effectLst/>
+        </p:spPr>
+        <p:style>
+          <a:lnRef idx="1">
+            <a:schemeClr val="accent1"/>
+          </a:lnRef>
+          <a:fillRef idx="3">
+            <a:schemeClr val="accent1"/>
+          </a:fillRef>
+          <a:effectRef idx="2">
+            <a:schemeClr val="accent1"/>
+          </a:effectRef>
+          <a:fontRef idx="minor">
+            <a:schemeClr val="lt1"/>
+          </a:fontRef>
+        </p:style>
+        <p:txBody>
+          <a:bodyPr rtlCol="0" anchor="ctr"/>
+          <a:lstStyle/>
+          <a:p>
+            <a:pPr algn="ctr"/>
+          </a:p>
+        </p:txBody>
+      </p:sp>
+      <p:sp>
+        <p:nvSpPr>
+          <p:cNvPr id="10" name="Rounded Rectangle 9"/>
+          <p:cNvSpPr/>
+          <p:nvPr/>
+        </p:nvSpPr>
+        <p:spPr>
+          <a:xfrm>
+            <a:off x="8161019" y="2834639"/>
+            <a:ext cx="1554480" cy="1280160"/>
+          </a:xfrm>
+          <a:prstGeom prst="roundRect">
+            <a:avLst/>
+          </a:prstGeom>
+          <a:solidFill>
+            <a:srgbClr val="24243C"/>
+          </a:solidFill>
+          <a:ln w="15875">
+            <a:solidFill>
+              <a:srgbClr val="00BCEB"/>
+            </a:solidFill>
+          </a:ln>
+          <a:effectLst/>
+        </p:spPr>
+        <p:style>
+          <a:lnRef idx="1">
+            <a:schemeClr val="accent1"/>
+          </a:lnRef>
+          <a:fillRef idx="3">
+            <a:schemeClr val="accent1"/>
+          </a:fillRef>
+          <a:effectRef idx="2">
+            <a:schemeClr val="accent1"/>
+          </a:effectRef>
+          <a:fontRef idx="minor">
+            <a:schemeClr val="lt1"/>
+          </a:fontRef>
+        </p:style>
+        <p:txBody>
+          <a:bodyPr rtlCol="0" anchor="ctr" wrap="square" lIns="45720" rIns="45720" tIns="18288" bIns="18288"/>
+          <a:lstStyle/>
+          <a:p>
+            <a:pPr algn="ctr"/>
+            <a:r>
+              <a:rPr sz="4000" b="1">
+                <a:solidFill>
+                  <a:srgbClr val="00BCEB"/>
+                </a:solidFill>
+                <a:latin typeface="Calibri"/>
+              </a:rPr>
+              <a:t>A3</a:t>
+            </a:r>
+          </a:p>
+        </p:txBody>
+      </p:sp>
+      <p:sp>
+        <p:nvSpPr>
+          <p:cNvPr id="11" name="TextBox 10"/>
           <p:cNvSpPr txBox="1"/>
           <p:nvPr/>
         </p:nvSpPr>
         <p:spPr>
           <a:xfrm>
-            <a:off x="548640" y="6419088"/>
-            <a:ext cx="11064240" cy="320040"/>
+            <a:off x="6629400" y="4343400"/>
+            <a:ext cx="4617720" cy="365760"/>
+          </a:xfrm>
+          <a:prstGeom prst="rect">
+            <a:avLst/>
+          </a:prstGeom>
+          <a:noFill/>
+        </p:spPr>
+        <p:txBody>
+          <a:bodyPr wrap="square" anchor="t">
+            <a:spAutoFit/>
+          </a:bodyPr>
+          <a:lstStyle/>
+          <a:p>
+            <a:pPr algn="ctr">
+              <a:spcAft>
+                <a:spcPts val="600"/>
+              </a:spcAft>
+            </a:pPr>
+            <a:r>
+              <a:rPr sz="1500" b="0">
+                <a:solidFill>
+                  <a:srgbClr val="9AA3B2"/>
+                </a:solidFill>
+                <a:latin typeface="Calibri"/>
+              </a:rPr>
+              <a:t>Reserve for Q&amp;A</a:t>
+            </a:r>
+          </a:p>
+        </p:txBody>
+      </p:sp>
+      <p:sp>
+        <p:nvSpPr>
+          <p:cNvPr id="12" name="Rounded Rectangle 11"/>
+          <p:cNvSpPr/>
+          <p:nvPr/>
+        </p:nvSpPr>
+        <p:spPr>
+          <a:xfrm>
+            <a:off x="7109459" y="5074920"/>
+            <a:ext cx="3657600" cy="566928"/>
+          </a:xfrm>
+          <a:prstGeom prst="roundRect">
+            <a:avLst/>
+          </a:prstGeom>
+          <a:solidFill>
+            <a:srgbClr val="1A1A2E"/>
+          </a:solidFill>
+          <a:ln w="9525">
+            <a:solidFill>
+              <a:srgbClr val="2C2C3A"/>
+            </a:solidFill>
+          </a:ln>
+          <a:effectLst/>
+        </p:spPr>
+        <p:style>
+          <a:lnRef idx="1">
+            <a:schemeClr val="accent1"/>
+          </a:lnRef>
+          <a:fillRef idx="3">
+            <a:schemeClr val="accent1"/>
+          </a:fillRef>
+          <a:effectRef idx="2">
+            <a:schemeClr val="accent1"/>
+          </a:effectRef>
+          <a:fontRef idx="minor">
+            <a:schemeClr val="lt1"/>
+          </a:fontRef>
+        </p:style>
+        <p:txBody>
+          <a:bodyPr rtlCol="0" anchor="ctr" wrap="square" lIns="45720" rIns="45720" tIns="18288" bIns="18288"/>
+          <a:lstStyle/>
+          <a:p>
+            <a:pPr algn="ctr"/>
+            <a:r>
+              <a:rPr sz="1200" b="0">
+                <a:solidFill>
+                  <a:srgbClr val="F2F4F8"/>
+                </a:solidFill>
+                <a:latin typeface="Calibri"/>
+              </a:rPr>
+              <a:t>Source · 04 §1–4</a:t>
+            </a:r>
+          </a:p>
+        </p:txBody>
+      </p:sp>
+      <p:sp>
+        <p:nvSpPr>
+          <p:cNvPr id="13" name="Rectangle 12"/>
+          <p:cNvSpPr/>
+          <p:nvPr/>
+        </p:nvSpPr>
+        <p:spPr>
+          <a:xfrm>
+            <a:off x="548640" y="6364224"/>
+            <a:ext cx="11091672" cy="10972"/>
+          </a:xfrm>
+          <a:prstGeom prst="rect">
+            <a:avLst/>
+          </a:prstGeom>
+          <a:solidFill>
+            <a:srgbClr val="2C2C3A"/>
+          </a:solidFill>
+          <a:ln>
+            <a:noFill/>
+          </a:ln>
+          <a:effectLst/>
+        </p:spPr>
+        <p:style>
+          <a:lnRef idx="1">
+            <a:schemeClr val="accent1"/>
+          </a:lnRef>
+          <a:fillRef idx="3">
+            <a:schemeClr val="accent1"/>
+          </a:fillRef>
+          <a:effectRef idx="2">
+            <a:schemeClr val="accent1"/>
+          </a:effectRef>
+          <a:fontRef idx="minor">
+            <a:schemeClr val="lt1"/>
+          </a:fontRef>
+        </p:style>
+        <p:txBody>
+          <a:bodyPr rtlCol="0" anchor="ctr"/>
+          <a:lstStyle/>
+          <a:p>
+            <a:pPr algn="ctr"/>
+          </a:p>
+        </p:txBody>
+      </p:sp>
+      <p:sp>
+        <p:nvSpPr>
+          <p:cNvPr id="14" name="TextBox 13"/>
+          <p:cNvSpPr txBox="1"/>
+          <p:nvPr/>
+        </p:nvSpPr>
+        <p:spPr>
+          <a:xfrm>
+            <a:off x="548640" y="6428232"/>
+            <a:ext cx="9692640" cy="292608"/>
           </a:xfrm>
           <a:prstGeom prst="rect">
             <a:avLst/>
@@ -9735,13 +12237,61 @@
               </a:spcAft>
             </a:pPr>
             <a:r>
+              <a:rPr sz="900" b="1">
+                <a:solidFill>
+                  <a:srgbClr val="9AA3B2"/>
+                </a:solidFill>
+                <a:latin typeface="Calibri"/>
+              </a:rPr>
+              <a:t>FIELD CTO · X-ARCH SELLING</a:t>
+            </a:r>
+            <a:r>
+              <a:rPr sz="900" b="0">
+                <a:solidFill>
+                  <a:srgbClr val="9AA3B2"/>
+                </a:solidFill>
+                <a:latin typeface="Calibri"/>
+              </a:rPr>
+              <a:t>      Appendix — reserve for Q&amp;A. Illustrative figures.</a:t>
+            </a:r>
+          </a:p>
+        </p:txBody>
+      </p:sp>
+      <p:sp>
+        <p:nvSpPr>
+          <p:cNvPr id="15" name="TextBox 14"/>
+          <p:cNvSpPr txBox="1"/>
+          <p:nvPr/>
+        </p:nvSpPr>
+        <p:spPr>
+          <a:xfrm>
+            <a:off x="10515600" y="6428232"/>
+            <a:ext cx="1124712" cy="274320"/>
+          </a:xfrm>
+          <a:prstGeom prst="rect">
+            <a:avLst/>
+          </a:prstGeom>
+          <a:noFill/>
+        </p:spPr>
+        <p:txBody>
+          <a:bodyPr wrap="square" anchor="t">
+            <a:spAutoFit/>
+          </a:bodyPr>
+          <a:lstStyle/>
+          <a:p>
+            <a:pPr algn="r">
+              <a:spcAft>
+                <a:spcPts val="600"/>
+              </a:spcAft>
+            </a:pPr>
+            <a:r>
               <a:rPr sz="1000" b="0">
                 <a:solidFill>
                   <a:srgbClr val="9AA3B2"/>
                 </a:solidFill>
                 <a:latin typeface="Calibri"/>
               </a:rPr>
-              <a:t>Appendix — reserve for Q&amp;A. Illustrative figures.</a:t>
+              <a:t>17 / 22</a:t>
             </a:r>
           </a:p>
         </p:txBody>
@@ -9938,8 +12488,52 @@
         </p:nvSpPr>
         <p:spPr>
           <a:xfrm>
+            <a:off x="548640" y="2167128"/>
+            <a:ext cx="11091672" cy="12801"/>
+          </a:xfrm>
+          <a:prstGeom prst="rect">
+            <a:avLst/>
+          </a:prstGeom>
+          <a:solidFill>
+            <a:srgbClr val="2C2C3A"/>
+          </a:solidFill>
+          <a:ln>
+            <a:noFill/>
+          </a:ln>
+          <a:effectLst/>
+        </p:spPr>
+        <p:style>
+          <a:lnRef idx="1">
+            <a:schemeClr val="accent1"/>
+          </a:lnRef>
+          <a:fillRef idx="3">
+            <a:schemeClr val="accent1"/>
+          </a:fillRef>
+          <a:effectRef idx="2">
+            <a:schemeClr val="accent1"/>
+          </a:effectRef>
+          <a:fontRef idx="minor">
+            <a:schemeClr val="lt1"/>
+          </a:fontRef>
+        </p:style>
+        <p:txBody>
+          <a:bodyPr rtlCol="0" anchor="ctr"/>
+          <a:lstStyle/>
+          <a:p>
+            <a:pPr algn="ctr"/>
+          </a:p>
+        </p:txBody>
+      </p:sp>
+      <p:sp>
+        <p:nvSpPr>
+          <p:cNvPr id="7" name="Rectangle 6"/>
+          <p:cNvSpPr/>
+          <p:nvPr/>
+        </p:nvSpPr>
+        <p:spPr>
+          <a:xfrm>
             <a:off x="548640" y="2331720"/>
-            <a:ext cx="11064240" cy="3931920"/>
+            <a:ext cx="5486400" cy="3931920"/>
           </a:xfrm>
           <a:prstGeom prst="rect">
             <a:avLst/>
@@ -9978,14 +12572,14 @@
       </p:sp>
       <p:sp>
         <p:nvSpPr>
-          <p:cNvPr id="7" name="TextBox 6"/>
+          <p:cNvPr id="8" name="TextBox 7"/>
           <p:cNvSpPr txBox="1"/>
           <p:nvPr/>
         </p:nvSpPr>
         <p:spPr>
           <a:xfrm>
-            <a:off x="914400" y="2560320"/>
-            <a:ext cx="10332720" cy="3566160"/>
+            <a:off x="822960" y="2542032"/>
+            <a:ext cx="4937760" cy="3566160"/>
           </a:xfrm>
           <a:prstGeom prst="rect">
             <a:avLst/>
@@ -10000,11 +12594,11 @@
           <a:p>
             <a:pPr algn="l">
               <a:spcAft>
-                <a:spcPts val="1200"/>
+                <a:spcPts val="1100"/>
               </a:spcAft>
             </a:pPr>
             <a:r>
-              <a:rPr sz="1800" b="1">
+              <a:rPr sz="1600" b="1">
                 <a:solidFill>
                   <a:srgbClr val="00BCEB"/>
                 </a:solidFill>
@@ -10013,7 +12607,7 @@
               <a:t>•  </a:t>
             </a:r>
             <a:r>
-              <a:rPr sz="1800" b="0">
+              <a:rPr sz="1600" b="0">
                 <a:solidFill>
                   <a:srgbClr val="F2F4F8"/>
                 </a:solidFill>
@@ -10025,11 +12619,11 @@
           <a:p>
             <a:pPr algn="l">
               <a:spcAft>
-                <a:spcPts val="1200"/>
+                <a:spcPts val="1100"/>
               </a:spcAft>
             </a:pPr>
             <a:r>
-              <a:rPr sz="1800" b="1">
+              <a:rPr sz="1600" b="1">
                 <a:solidFill>
                   <a:srgbClr val="00BCEB"/>
                 </a:solidFill>
@@ -10038,7 +12632,7 @@
               <a:t>•  </a:t>
             </a:r>
             <a:r>
-              <a:rPr sz="1800" b="0">
+              <a:rPr sz="1600" b="0">
                 <a:solidFill>
                   <a:srgbClr val="F2F4F8"/>
                 </a:solidFill>
@@ -10050,11 +12644,11 @@
           <a:p>
             <a:pPr algn="l">
               <a:spcAft>
-                <a:spcPts val="1200"/>
+                <a:spcPts val="1100"/>
               </a:spcAft>
             </a:pPr>
             <a:r>
-              <a:rPr sz="1800" b="1">
+              <a:rPr sz="1600" b="1">
                 <a:solidFill>
                   <a:srgbClr val="00BCEB"/>
                 </a:solidFill>
@@ -10063,7 +12657,7 @@
               <a:t>•  </a:t>
             </a:r>
             <a:r>
-              <a:rPr sz="1800" b="0">
+              <a:rPr sz="1600" b="0">
                 <a:solidFill>
                   <a:srgbClr val="F2F4F8"/>
                 </a:solidFill>
@@ -10076,14 +12670,253 @@
       </p:sp>
       <p:sp>
         <p:nvSpPr>
-          <p:cNvPr id="8" name="TextBox 7"/>
+          <p:cNvPr id="9" name="Rectangle 8"/>
+          <p:cNvSpPr/>
+          <p:nvPr/>
+        </p:nvSpPr>
+        <p:spPr>
+          <a:xfrm>
+            <a:off x="6263640" y="2331720"/>
+            <a:ext cx="5349240" cy="3931920"/>
+          </a:xfrm>
+          <a:prstGeom prst="rect">
+            <a:avLst/>
+          </a:prstGeom>
+          <a:solidFill>
+            <a:srgbClr val="1A1A2E"/>
+          </a:solidFill>
+          <a:ln w="12700">
+            <a:solidFill>
+              <a:srgbClr val="2C2C3A"/>
+            </a:solidFill>
+          </a:ln>
+          <a:effectLst/>
+        </p:spPr>
+        <p:style>
+          <a:lnRef idx="1">
+            <a:schemeClr val="accent1"/>
+          </a:lnRef>
+          <a:fillRef idx="3">
+            <a:schemeClr val="accent1"/>
+          </a:fillRef>
+          <a:effectRef idx="2">
+            <a:schemeClr val="accent1"/>
+          </a:effectRef>
+          <a:fontRef idx="minor">
+            <a:schemeClr val="lt1"/>
+          </a:fontRef>
+        </p:style>
+        <p:txBody>
+          <a:bodyPr rtlCol="0" anchor="ctr"/>
+          <a:lstStyle/>
+          <a:p>
+            <a:pPr algn="ctr"/>
+          </a:p>
+        </p:txBody>
+      </p:sp>
+      <p:sp>
+        <p:nvSpPr>
+          <p:cNvPr id="10" name="Rounded Rectangle 9"/>
+          <p:cNvSpPr/>
+          <p:nvPr/>
+        </p:nvSpPr>
+        <p:spPr>
+          <a:xfrm>
+            <a:off x="8161019" y="2834639"/>
+            <a:ext cx="1554480" cy="1280160"/>
+          </a:xfrm>
+          <a:prstGeom prst="roundRect">
+            <a:avLst/>
+          </a:prstGeom>
+          <a:solidFill>
+            <a:srgbClr val="24243C"/>
+          </a:solidFill>
+          <a:ln w="15875">
+            <a:solidFill>
+              <a:srgbClr val="00BCEB"/>
+            </a:solidFill>
+          </a:ln>
+          <a:effectLst/>
+        </p:spPr>
+        <p:style>
+          <a:lnRef idx="1">
+            <a:schemeClr val="accent1"/>
+          </a:lnRef>
+          <a:fillRef idx="3">
+            <a:schemeClr val="accent1"/>
+          </a:fillRef>
+          <a:effectRef idx="2">
+            <a:schemeClr val="accent1"/>
+          </a:effectRef>
+          <a:fontRef idx="minor">
+            <a:schemeClr val="lt1"/>
+          </a:fontRef>
+        </p:style>
+        <p:txBody>
+          <a:bodyPr rtlCol="0" anchor="ctr" wrap="square" lIns="45720" rIns="45720" tIns="18288" bIns="18288"/>
+          <a:lstStyle/>
+          <a:p>
+            <a:pPr algn="ctr"/>
+            <a:r>
+              <a:rPr sz="4000" b="1">
+                <a:solidFill>
+                  <a:srgbClr val="00BCEB"/>
+                </a:solidFill>
+                <a:latin typeface="Calibri"/>
+              </a:rPr>
+              <a:t>A4</a:t>
+            </a:r>
+          </a:p>
+        </p:txBody>
+      </p:sp>
+      <p:sp>
+        <p:nvSpPr>
+          <p:cNvPr id="11" name="TextBox 10"/>
           <p:cNvSpPr txBox="1"/>
           <p:nvPr/>
         </p:nvSpPr>
         <p:spPr>
           <a:xfrm>
-            <a:off x="548640" y="6419088"/>
-            <a:ext cx="11064240" cy="320040"/>
+            <a:off x="6629400" y="4343400"/>
+            <a:ext cx="4617720" cy="365760"/>
+          </a:xfrm>
+          <a:prstGeom prst="rect">
+            <a:avLst/>
+          </a:prstGeom>
+          <a:noFill/>
+        </p:spPr>
+        <p:txBody>
+          <a:bodyPr wrap="square" anchor="t">
+            <a:spAutoFit/>
+          </a:bodyPr>
+          <a:lstStyle/>
+          <a:p>
+            <a:pPr algn="ctr">
+              <a:spcAft>
+                <a:spcPts val="600"/>
+              </a:spcAft>
+            </a:pPr>
+            <a:r>
+              <a:rPr sz="1500" b="0">
+                <a:solidFill>
+                  <a:srgbClr val="9AA3B2"/>
+                </a:solidFill>
+                <a:latin typeface="Calibri"/>
+              </a:rPr>
+              <a:t>Reserve for Q&amp;A</a:t>
+            </a:r>
+          </a:p>
+        </p:txBody>
+      </p:sp>
+      <p:sp>
+        <p:nvSpPr>
+          <p:cNvPr id="12" name="Rounded Rectangle 11"/>
+          <p:cNvSpPr/>
+          <p:nvPr/>
+        </p:nvSpPr>
+        <p:spPr>
+          <a:xfrm>
+            <a:off x="7109459" y="5074920"/>
+            <a:ext cx="3657600" cy="566928"/>
+          </a:xfrm>
+          <a:prstGeom prst="roundRect">
+            <a:avLst/>
+          </a:prstGeom>
+          <a:solidFill>
+            <a:srgbClr val="1A1A2E"/>
+          </a:solidFill>
+          <a:ln w="9525">
+            <a:solidFill>
+              <a:srgbClr val="2C2C3A"/>
+            </a:solidFill>
+          </a:ln>
+          <a:effectLst/>
+        </p:spPr>
+        <p:style>
+          <a:lnRef idx="1">
+            <a:schemeClr val="accent1"/>
+          </a:lnRef>
+          <a:fillRef idx="3">
+            <a:schemeClr val="accent1"/>
+          </a:fillRef>
+          <a:effectRef idx="2">
+            <a:schemeClr val="accent1"/>
+          </a:effectRef>
+          <a:fontRef idx="minor">
+            <a:schemeClr val="lt1"/>
+          </a:fontRef>
+        </p:style>
+        <p:txBody>
+          <a:bodyPr rtlCol="0" anchor="ctr" wrap="square" lIns="45720" rIns="45720" tIns="18288" bIns="18288"/>
+          <a:lstStyle/>
+          <a:p>
+            <a:pPr algn="ctr"/>
+            <a:r>
+              <a:rPr sz="1200" b="0">
+                <a:solidFill>
+                  <a:srgbClr val="F2F4F8"/>
+                </a:solidFill>
+                <a:latin typeface="Calibri"/>
+              </a:rPr>
+              <a:t>Source · 04 OT boundary</a:t>
+            </a:r>
+          </a:p>
+        </p:txBody>
+      </p:sp>
+      <p:sp>
+        <p:nvSpPr>
+          <p:cNvPr id="13" name="Rectangle 12"/>
+          <p:cNvSpPr/>
+          <p:nvPr/>
+        </p:nvSpPr>
+        <p:spPr>
+          <a:xfrm>
+            <a:off x="548640" y="6364224"/>
+            <a:ext cx="11091672" cy="10972"/>
+          </a:xfrm>
+          <a:prstGeom prst="rect">
+            <a:avLst/>
+          </a:prstGeom>
+          <a:solidFill>
+            <a:srgbClr val="2C2C3A"/>
+          </a:solidFill>
+          <a:ln>
+            <a:noFill/>
+          </a:ln>
+          <a:effectLst/>
+        </p:spPr>
+        <p:style>
+          <a:lnRef idx="1">
+            <a:schemeClr val="accent1"/>
+          </a:lnRef>
+          <a:fillRef idx="3">
+            <a:schemeClr val="accent1"/>
+          </a:fillRef>
+          <a:effectRef idx="2">
+            <a:schemeClr val="accent1"/>
+          </a:effectRef>
+          <a:fontRef idx="minor">
+            <a:schemeClr val="lt1"/>
+          </a:fontRef>
+        </p:style>
+        <p:txBody>
+          <a:bodyPr rtlCol="0" anchor="ctr"/>
+          <a:lstStyle/>
+          <a:p>
+            <a:pPr algn="ctr"/>
+          </a:p>
+        </p:txBody>
+      </p:sp>
+      <p:sp>
+        <p:nvSpPr>
+          <p:cNvPr id="14" name="TextBox 13"/>
+          <p:cNvSpPr txBox="1"/>
+          <p:nvPr/>
+        </p:nvSpPr>
+        <p:spPr>
+          <a:xfrm>
+            <a:off x="548640" y="6428232"/>
+            <a:ext cx="9692640" cy="292608"/>
           </a:xfrm>
           <a:prstGeom prst="rect">
             <a:avLst/>
@@ -10102,13 +12935,61 @@
               </a:spcAft>
             </a:pPr>
             <a:r>
+              <a:rPr sz="900" b="1">
+                <a:solidFill>
+                  <a:srgbClr val="9AA3B2"/>
+                </a:solidFill>
+                <a:latin typeface="Calibri"/>
+              </a:rPr>
+              <a:t>FIELD CTO · X-ARCH SELLING</a:t>
+            </a:r>
+            <a:r>
+              <a:rPr sz="900" b="0">
+                <a:solidFill>
+                  <a:srgbClr val="9AA3B2"/>
+                </a:solidFill>
+                <a:latin typeface="Calibri"/>
+              </a:rPr>
+              <a:t>      Appendix — reserve for Q&amp;A. Illustrative figures.</a:t>
+            </a:r>
+          </a:p>
+        </p:txBody>
+      </p:sp>
+      <p:sp>
+        <p:nvSpPr>
+          <p:cNvPr id="15" name="TextBox 14"/>
+          <p:cNvSpPr txBox="1"/>
+          <p:nvPr/>
+        </p:nvSpPr>
+        <p:spPr>
+          <a:xfrm>
+            <a:off x="10515600" y="6428232"/>
+            <a:ext cx="1124712" cy="274320"/>
+          </a:xfrm>
+          <a:prstGeom prst="rect">
+            <a:avLst/>
+          </a:prstGeom>
+          <a:noFill/>
+        </p:spPr>
+        <p:txBody>
+          <a:bodyPr wrap="square" anchor="t">
+            <a:spAutoFit/>
+          </a:bodyPr>
+          <a:lstStyle/>
+          <a:p>
+            <a:pPr algn="r">
+              <a:spcAft>
+                <a:spcPts val="600"/>
+              </a:spcAft>
+            </a:pPr>
+            <a:r>
               <a:rPr sz="1000" b="0">
                 <a:solidFill>
                   <a:srgbClr val="9AA3B2"/>
                 </a:solidFill>
                 <a:latin typeface="Calibri"/>
               </a:rPr>
-              <a:t>Appendix — reserve for Q&amp;A. Illustrative figures.</a:t>
+              <a:t>18 / 22</a:t>
             </a:r>
           </a:p>
         </p:txBody>
@@ -10305,8 +13186,52 @@
         </p:nvSpPr>
         <p:spPr>
           <a:xfrm>
+            <a:off x="548640" y="2167128"/>
+            <a:ext cx="11091672" cy="12801"/>
+          </a:xfrm>
+          <a:prstGeom prst="rect">
+            <a:avLst/>
+          </a:prstGeom>
+          <a:solidFill>
+            <a:srgbClr val="2C2C3A"/>
+          </a:solidFill>
+          <a:ln>
+            <a:noFill/>
+          </a:ln>
+          <a:effectLst/>
+        </p:spPr>
+        <p:style>
+          <a:lnRef idx="1">
+            <a:schemeClr val="accent1"/>
+          </a:lnRef>
+          <a:fillRef idx="3">
+            <a:schemeClr val="accent1"/>
+          </a:fillRef>
+          <a:effectRef idx="2">
+            <a:schemeClr val="accent1"/>
+          </a:effectRef>
+          <a:fontRef idx="minor">
+            <a:schemeClr val="lt1"/>
+          </a:fontRef>
+        </p:style>
+        <p:txBody>
+          <a:bodyPr rtlCol="0" anchor="ctr"/>
+          <a:lstStyle/>
+          <a:p>
+            <a:pPr algn="ctr"/>
+          </a:p>
+        </p:txBody>
+      </p:sp>
+      <p:sp>
+        <p:nvSpPr>
+          <p:cNvPr id="7" name="Rectangle 6"/>
+          <p:cNvSpPr/>
+          <p:nvPr/>
+        </p:nvSpPr>
+        <p:spPr>
+          <a:xfrm>
             <a:off x="548640" y="2331720"/>
-            <a:ext cx="11064240" cy="3931920"/>
+            <a:ext cx="5486400" cy="3931920"/>
           </a:xfrm>
           <a:prstGeom prst="rect">
             <a:avLst/>
@@ -10345,14 +13270,14 @@
       </p:sp>
       <p:sp>
         <p:nvSpPr>
-          <p:cNvPr id="7" name="TextBox 6"/>
+          <p:cNvPr id="8" name="TextBox 7"/>
           <p:cNvSpPr txBox="1"/>
           <p:nvPr/>
         </p:nvSpPr>
         <p:spPr>
           <a:xfrm>
-            <a:off x="914400" y="2560320"/>
-            <a:ext cx="10332720" cy="3566160"/>
+            <a:off x="822960" y="2542032"/>
+            <a:ext cx="4937760" cy="3566160"/>
           </a:xfrm>
           <a:prstGeom prst="rect">
             <a:avLst/>
@@ -10367,11 +13292,11 @@
           <a:p>
             <a:pPr algn="l">
               <a:spcAft>
-                <a:spcPts val="1200"/>
+                <a:spcPts val="1100"/>
               </a:spcAft>
             </a:pPr>
             <a:r>
-              <a:rPr sz="1800" b="1">
+              <a:rPr sz="1600" b="1">
                 <a:solidFill>
                   <a:srgbClr val="00BCEB"/>
                 </a:solidFill>
@@ -10380,7 +13305,7 @@
               <a:t>•  </a:t>
             </a:r>
             <a:r>
-              <a:rPr sz="1800" b="0">
+              <a:rPr sz="1600" b="0">
                 <a:solidFill>
                   <a:srgbClr val="F2F4F8"/>
                 </a:solidFill>
@@ -10392,11 +13317,11 @@
           <a:p>
             <a:pPr algn="l">
               <a:spcAft>
-                <a:spcPts val="1200"/>
+                <a:spcPts val="1100"/>
               </a:spcAft>
             </a:pPr>
             <a:r>
-              <a:rPr sz="1800" b="1">
+              <a:rPr sz="1600" b="1">
                 <a:solidFill>
                   <a:srgbClr val="00BCEB"/>
                 </a:solidFill>
@@ -10405,7 +13330,7 @@
               <a:t>•  </a:t>
             </a:r>
             <a:r>
-              <a:rPr sz="1800" b="0">
+              <a:rPr sz="1600" b="0">
                 <a:solidFill>
                   <a:srgbClr val="F2F4F8"/>
                 </a:solidFill>
@@ -10417,11 +13342,11 @@
           <a:p>
             <a:pPr algn="l">
               <a:spcAft>
-                <a:spcPts val="1200"/>
+                <a:spcPts val="1100"/>
               </a:spcAft>
             </a:pPr>
             <a:r>
-              <a:rPr sz="1800" b="1">
+              <a:rPr sz="1600" b="1">
                 <a:solidFill>
                   <a:srgbClr val="00BCEB"/>
                 </a:solidFill>
@@ -10430,7 +13355,7 @@
               <a:t>•  </a:t>
             </a:r>
             <a:r>
-              <a:rPr sz="1800" b="0">
+              <a:rPr sz="1600" b="0">
                 <a:solidFill>
                   <a:srgbClr val="F2F4F8"/>
                 </a:solidFill>
@@ -10443,14 +13368,253 @@
       </p:sp>
       <p:sp>
         <p:nvSpPr>
-          <p:cNvPr id="8" name="TextBox 7"/>
+          <p:cNvPr id="9" name="Rectangle 8"/>
+          <p:cNvSpPr/>
+          <p:nvPr/>
+        </p:nvSpPr>
+        <p:spPr>
+          <a:xfrm>
+            <a:off x="6263640" y="2331720"/>
+            <a:ext cx="5349240" cy="3931920"/>
+          </a:xfrm>
+          <a:prstGeom prst="rect">
+            <a:avLst/>
+          </a:prstGeom>
+          <a:solidFill>
+            <a:srgbClr val="1A1A2E"/>
+          </a:solidFill>
+          <a:ln w="12700">
+            <a:solidFill>
+              <a:srgbClr val="2C2C3A"/>
+            </a:solidFill>
+          </a:ln>
+          <a:effectLst/>
+        </p:spPr>
+        <p:style>
+          <a:lnRef idx="1">
+            <a:schemeClr val="accent1"/>
+          </a:lnRef>
+          <a:fillRef idx="3">
+            <a:schemeClr val="accent1"/>
+          </a:fillRef>
+          <a:effectRef idx="2">
+            <a:schemeClr val="accent1"/>
+          </a:effectRef>
+          <a:fontRef idx="minor">
+            <a:schemeClr val="lt1"/>
+          </a:fontRef>
+        </p:style>
+        <p:txBody>
+          <a:bodyPr rtlCol="0" anchor="ctr"/>
+          <a:lstStyle/>
+          <a:p>
+            <a:pPr algn="ctr"/>
+          </a:p>
+        </p:txBody>
+      </p:sp>
+      <p:sp>
+        <p:nvSpPr>
+          <p:cNvPr id="10" name="Rounded Rectangle 9"/>
+          <p:cNvSpPr/>
+          <p:nvPr/>
+        </p:nvSpPr>
+        <p:spPr>
+          <a:xfrm>
+            <a:off x="8161019" y="2834639"/>
+            <a:ext cx="1554480" cy="1280160"/>
+          </a:xfrm>
+          <a:prstGeom prst="roundRect">
+            <a:avLst/>
+          </a:prstGeom>
+          <a:solidFill>
+            <a:srgbClr val="24243C"/>
+          </a:solidFill>
+          <a:ln w="15875">
+            <a:solidFill>
+              <a:srgbClr val="00BCEB"/>
+            </a:solidFill>
+          </a:ln>
+          <a:effectLst/>
+        </p:spPr>
+        <p:style>
+          <a:lnRef idx="1">
+            <a:schemeClr val="accent1"/>
+          </a:lnRef>
+          <a:fillRef idx="3">
+            <a:schemeClr val="accent1"/>
+          </a:fillRef>
+          <a:effectRef idx="2">
+            <a:schemeClr val="accent1"/>
+          </a:effectRef>
+          <a:fontRef idx="minor">
+            <a:schemeClr val="lt1"/>
+          </a:fontRef>
+        </p:style>
+        <p:txBody>
+          <a:bodyPr rtlCol="0" anchor="ctr" wrap="square" lIns="45720" rIns="45720" tIns="18288" bIns="18288"/>
+          <a:lstStyle/>
+          <a:p>
+            <a:pPr algn="ctr"/>
+            <a:r>
+              <a:rPr sz="4000" b="1">
+                <a:solidFill>
+                  <a:srgbClr val="00BCEB"/>
+                </a:solidFill>
+                <a:latin typeface="Calibri"/>
+              </a:rPr>
+              <a:t>A5</a:t>
+            </a:r>
+          </a:p>
+        </p:txBody>
+      </p:sp>
+      <p:sp>
+        <p:nvSpPr>
+          <p:cNvPr id="11" name="TextBox 10"/>
           <p:cNvSpPr txBox="1"/>
           <p:nvPr/>
         </p:nvSpPr>
         <p:spPr>
           <a:xfrm>
-            <a:off x="548640" y="6419088"/>
-            <a:ext cx="11064240" cy="320040"/>
+            <a:off x="6629400" y="4343400"/>
+            <a:ext cx="4617720" cy="365760"/>
+          </a:xfrm>
+          <a:prstGeom prst="rect">
+            <a:avLst/>
+          </a:prstGeom>
+          <a:noFill/>
+        </p:spPr>
+        <p:txBody>
+          <a:bodyPr wrap="square" anchor="t">
+            <a:spAutoFit/>
+          </a:bodyPr>
+          <a:lstStyle/>
+          <a:p>
+            <a:pPr algn="ctr">
+              <a:spcAft>
+                <a:spcPts val="600"/>
+              </a:spcAft>
+            </a:pPr>
+            <a:r>
+              <a:rPr sz="1500" b="0">
+                <a:solidFill>
+                  <a:srgbClr val="9AA3B2"/>
+                </a:solidFill>
+                <a:latin typeface="Calibri"/>
+              </a:rPr>
+              <a:t>Reserve for Q&amp;A</a:t>
+            </a:r>
+          </a:p>
+        </p:txBody>
+      </p:sp>
+      <p:sp>
+        <p:nvSpPr>
+          <p:cNvPr id="12" name="Rounded Rectangle 11"/>
+          <p:cNvSpPr/>
+          <p:nvPr/>
+        </p:nvSpPr>
+        <p:spPr>
+          <a:xfrm>
+            <a:off x="7109459" y="5074920"/>
+            <a:ext cx="3657600" cy="566928"/>
+          </a:xfrm>
+          <a:prstGeom prst="roundRect">
+            <a:avLst/>
+          </a:prstGeom>
+          <a:solidFill>
+            <a:srgbClr val="1A1A2E"/>
+          </a:solidFill>
+          <a:ln w="9525">
+            <a:solidFill>
+              <a:srgbClr val="2C2C3A"/>
+            </a:solidFill>
+          </a:ln>
+          <a:effectLst/>
+        </p:spPr>
+        <p:style>
+          <a:lnRef idx="1">
+            <a:schemeClr val="accent1"/>
+          </a:lnRef>
+          <a:fillRef idx="3">
+            <a:schemeClr val="accent1"/>
+          </a:fillRef>
+          <a:effectRef idx="2">
+            <a:schemeClr val="accent1"/>
+          </a:effectRef>
+          <a:fontRef idx="minor">
+            <a:schemeClr val="lt1"/>
+          </a:fontRef>
+        </p:style>
+        <p:txBody>
+          <a:bodyPr rtlCol="0" anchor="ctr" wrap="square" lIns="45720" rIns="45720" tIns="18288" bIns="18288"/>
+          <a:lstStyle/>
+          <a:p>
+            <a:pPr algn="ctr"/>
+            <a:r>
+              <a:rPr sz="1200" b="0">
+                <a:solidFill>
+                  <a:srgbClr val="F2F4F8"/>
+                </a:solidFill>
+                <a:latin typeface="Calibri"/>
+              </a:rPr>
+              <a:t>Source · 06 §0, §4</a:t>
+            </a:r>
+          </a:p>
+        </p:txBody>
+      </p:sp>
+      <p:sp>
+        <p:nvSpPr>
+          <p:cNvPr id="13" name="Rectangle 12"/>
+          <p:cNvSpPr/>
+          <p:nvPr/>
+        </p:nvSpPr>
+        <p:spPr>
+          <a:xfrm>
+            <a:off x="548640" y="6364224"/>
+            <a:ext cx="11091672" cy="10972"/>
+          </a:xfrm>
+          <a:prstGeom prst="rect">
+            <a:avLst/>
+          </a:prstGeom>
+          <a:solidFill>
+            <a:srgbClr val="2C2C3A"/>
+          </a:solidFill>
+          <a:ln>
+            <a:noFill/>
+          </a:ln>
+          <a:effectLst/>
+        </p:spPr>
+        <p:style>
+          <a:lnRef idx="1">
+            <a:schemeClr val="accent1"/>
+          </a:lnRef>
+          <a:fillRef idx="3">
+            <a:schemeClr val="accent1"/>
+          </a:fillRef>
+          <a:effectRef idx="2">
+            <a:schemeClr val="accent1"/>
+          </a:effectRef>
+          <a:fontRef idx="minor">
+            <a:schemeClr val="lt1"/>
+          </a:fontRef>
+        </p:style>
+        <p:txBody>
+          <a:bodyPr rtlCol="0" anchor="ctr"/>
+          <a:lstStyle/>
+          <a:p>
+            <a:pPr algn="ctr"/>
+          </a:p>
+        </p:txBody>
+      </p:sp>
+      <p:sp>
+        <p:nvSpPr>
+          <p:cNvPr id="14" name="TextBox 13"/>
+          <p:cNvSpPr txBox="1"/>
+          <p:nvPr/>
+        </p:nvSpPr>
+        <p:spPr>
+          <a:xfrm>
+            <a:off x="548640" y="6428232"/>
+            <a:ext cx="9692640" cy="292608"/>
           </a:xfrm>
           <a:prstGeom prst="rect">
             <a:avLst/>
@@ -10469,13 +13633,61 @@
               </a:spcAft>
             </a:pPr>
             <a:r>
+              <a:rPr sz="900" b="1">
+                <a:solidFill>
+                  <a:srgbClr val="9AA3B2"/>
+                </a:solidFill>
+                <a:latin typeface="Calibri"/>
+              </a:rPr>
+              <a:t>FIELD CTO · X-ARCH SELLING</a:t>
+            </a:r>
+            <a:r>
+              <a:rPr sz="900" b="0">
+                <a:solidFill>
+                  <a:srgbClr val="9AA3B2"/>
+                </a:solidFill>
+                <a:latin typeface="Calibri"/>
+              </a:rPr>
+              <a:t>      Appendix — reserve for Q&amp;A. Illustrative figures.</a:t>
+            </a:r>
+          </a:p>
+        </p:txBody>
+      </p:sp>
+      <p:sp>
+        <p:nvSpPr>
+          <p:cNvPr id="15" name="TextBox 14"/>
+          <p:cNvSpPr txBox="1"/>
+          <p:nvPr/>
+        </p:nvSpPr>
+        <p:spPr>
+          <a:xfrm>
+            <a:off x="10515600" y="6428232"/>
+            <a:ext cx="1124712" cy="274320"/>
+          </a:xfrm>
+          <a:prstGeom prst="rect">
+            <a:avLst/>
+          </a:prstGeom>
+          <a:noFill/>
+        </p:spPr>
+        <p:txBody>
+          <a:bodyPr wrap="square" anchor="t">
+            <a:spAutoFit/>
+          </a:bodyPr>
+          <a:lstStyle/>
+          <a:p>
+            <a:pPr algn="r">
+              <a:spcAft>
+                <a:spcPts val="600"/>
+              </a:spcAft>
+            </a:pPr>
+            <a:r>
               <a:rPr sz="1000" b="0">
                 <a:solidFill>
                   <a:srgbClr val="9AA3B2"/>
                 </a:solidFill>
                 <a:latin typeface="Calibri"/>
               </a:rPr>
-              <a:t>Appendix — reserve for Q&amp;A. Illustrative figures.</a:t>
+              <a:t>19 / 22</a:t>
             </a:r>
           </a:p>
         </p:txBody>
@@ -10672,6 +13884,50 @@
         </p:nvSpPr>
         <p:spPr>
           <a:xfrm>
+            <a:off x="548640" y="2167128"/>
+            <a:ext cx="11091672" cy="12801"/>
+          </a:xfrm>
+          <a:prstGeom prst="rect">
+            <a:avLst/>
+          </a:prstGeom>
+          <a:solidFill>
+            <a:srgbClr val="2C2C3A"/>
+          </a:solidFill>
+          <a:ln>
+            <a:noFill/>
+          </a:ln>
+          <a:effectLst/>
+        </p:spPr>
+        <p:style>
+          <a:lnRef idx="1">
+            <a:schemeClr val="accent1"/>
+          </a:lnRef>
+          <a:fillRef idx="3">
+            <a:schemeClr val="accent1"/>
+          </a:fillRef>
+          <a:effectRef idx="2">
+            <a:schemeClr val="accent1"/>
+          </a:effectRef>
+          <a:fontRef idx="minor">
+            <a:schemeClr val="lt1"/>
+          </a:fontRef>
+        </p:style>
+        <p:txBody>
+          <a:bodyPr rtlCol="0" anchor="ctr"/>
+          <a:lstStyle/>
+          <a:p>
+            <a:pPr algn="ctr"/>
+          </a:p>
+        </p:txBody>
+      </p:sp>
+      <p:sp>
+        <p:nvSpPr>
+          <p:cNvPr id="7" name="Rectangle 6"/>
+          <p:cNvSpPr/>
+          <p:nvPr/>
+        </p:nvSpPr>
+        <p:spPr>
+          <a:xfrm>
             <a:off x="548640" y="2331720"/>
             <a:ext cx="5486400" cy="3931920"/>
           </a:xfrm>
@@ -10712,7 +13968,7 @@
       </p:sp>
       <p:sp>
         <p:nvSpPr>
-          <p:cNvPr id="7" name="TextBox 6"/>
+          <p:cNvPr id="8" name="TextBox 7"/>
           <p:cNvSpPr txBox="1"/>
           <p:nvPr/>
         </p:nvSpPr>
@@ -10860,7 +14116,7 @@
       </p:sp>
       <p:sp>
         <p:nvSpPr>
-          <p:cNvPr id="8" name="Rectangle 7"/>
+          <p:cNvPr id="9" name="Rectangle 8"/>
           <p:cNvSpPr/>
           <p:nvPr/>
         </p:nvSpPr>
@@ -10906,7 +14162,7 @@
       </p:sp>
       <p:sp>
         <p:nvSpPr>
-          <p:cNvPr id="9" name="Rounded Rectangle 8"/>
+          <p:cNvPr id="10" name="Rounded Rectangle 9"/>
           <p:cNvSpPr/>
           <p:nvPr/>
         </p:nvSpPr>
@@ -10961,7 +14217,7 @@
       </p:sp>
       <p:sp>
         <p:nvSpPr>
-          <p:cNvPr id="10" name="Rounded Rectangle 9"/>
+          <p:cNvPr id="11" name="Rounded Rectangle 10"/>
           <p:cNvSpPr/>
           <p:nvPr/>
         </p:nvSpPr>
@@ -11016,7 +14272,7 @@
       </p:sp>
       <p:sp>
         <p:nvSpPr>
-          <p:cNvPr id="11" name="Rounded Rectangle 10"/>
+          <p:cNvPr id="12" name="Rounded Rectangle 11"/>
           <p:cNvSpPr/>
           <p:nvPr/>
         </p:nvSpPr>
@@ -11071,7 +14327,7 @@
       </p:sp>
       <p:sp>
         <p:nvSpPr>
-          <p:cNvPr id="12" name="Rounded Rectangle 11"/>
+          <p:cNvPr id="13" name="Rounded Rectangle 12"/>
           <p:cNvSpPr/>
           <p:nvPr/>
         </p:nvSpPr>
@@ -11126,7 +14382,7 @@
       </p:sp>
       <p:sp>
         <p:nvSpPr>
-          <p:cNvPr id="13" name="Down Arrow 12"/>
+          <p:cNvPr id="14" name="Down Arrow 13"/>
           <p:cNvSpPr/>
           <p:nvPr/>
         </p:nvSpPr>
@@ -11179,7 +14435,7 @@
       </p:sp>
       <p:sp>
         <p:nvSpPr>
-          <p:cNvPr id="14" name="Rounded Rectangle 13"/>
+          <p:cNvPr id="15" name="Rounded Rectangle 14"/>
           <p:cNvSpPr/>
           <p:nvPr/>
         </p:nvSpPr>
@@ -11232,14 +14488,58 @@
       </p:sp>
       <p:sp>
         <p:nvSpPr>
-          <p:cNvPr id="15" name="TextBox 14"/>
+          <p:cNvPr id="16" name="Rectangle 15"/>
+          <p:cNvSpPr/>
+          <p:nvPr/>
+        </p:nvSpPr>
+        <p:spPr>
+          <a:xfrm>
+            <a:off x="548640" y="6364224"/>
+            <a:ext cx="11091672" cy="10972"/>
+          </a:xfrm>
+          <a:prstGeom prst="rect">
+            <a:avLst/>
+          </a:prstGeom>
+          <a:solidFill>
+            <a:srgbClr val="2C2C3A"/>
+          </a:solidFill>
+          <a:ln>
+            <a:noFill/>
+          </a:ln>
+          <a:effectLst/>
+        </p:spPr>
+        <p:style>
+          <a:lnRef idx="1">
+            <a:schemeClr val="accent1"/>
+          </a:lnRef>
+          <a:fillRef idx="3">
+            <a:schemeClr val="accent1"/>
+          </a:fillRef>
+          <a:effectRef idx="2">
+            <a:schemeClr val="accent1"/>
+          </a:effectRef>
+          <a:fontRef idx="minor">
+            <a:schemeClr val="lt1"/>
+          </a:fontRef>
+        </p:style>
+        <p:txBody>
+          <a:bodyPr rtlCol="0" anchor="ctr"/>
+          <a:lstStyle/>
+          <a:p>
+            <a:pPr algn="ctr"/>
+          </a:p>
+        </p:txBody>
+      </p:sp>
+      <p:sp>
+        <p:nvSpPr>
+          <p:cNvPr id="17" name="TextBox 16"/>
           <p:cNvSpPr txBox="1"/>
           <p:nvPr/>
         </p:nvSpPr>
         <p:spPr>
           <a:xfrm>
-            <a:off x="548640" y="6419088"/>
-            <a:ext cx="11064240" cy="320040"/>
+            <a:off x="548640" y="6428232"/>
+            <a:ext cx="9692640" cy="292608"/>
           </a:xfrm>
           <a:prstGeom prst="rect">
             <a:avLst/>
@@ -11258,13 +14558,61 @@
               </a:spcAft>
             </a:pPr>
             <a:r>
+              <a:rPr sz="900" b="1">
+                <a:solidFill>
+                  <a:srgbClr val="9AA3B2"/>
+                </a:solidFill>
+                <a:latin typeface="Calibri"/>
+              </a:rPr>
+              <a:t>FIELD CTO · X-ARCH SELLING</a:t>
+            </a:r>
+            <a:r>
+              <a:rPr sz="900" b="0">
+                <a:solidFill>
+                  <a:srgbClr val="9AA3B2"/>
+                </a:solidFill>
+                <a:latin typeface="Calibri"/>
+              </a:rPr>
+              <a:t>      Illustrative figures — replace with actuals before presenting.</a:t>
+            </a:r>
+          </a:p>
+        </p:txBody>
+      </p:sp>
+      <p:sp>
+        <p:nvSpPr>
+          <p:cNvPr id="18" name="TextBox 17"/>
+          <p:cNvSpPr txBox="1"/>
+          <p:nvPr/>
+        </p:nvSpPr>
+        <p:spPr>
+          <a:xfrm>
+            <a:off x="10515600" y="6428232"/>
+            <a:ext cx="1124712" cy="274320"/>
+          </a:xfrm>
+          <a:prstGeom prst="rect">
+            <a:avLst/>
+          </a:prstGeom>
+          <a:noFill/>
+        </p:spPr>
+        <p:txBody>
+          <a:bodyPr wrap="square" anchor="t">
+            <a:spAutoFit/>
+          </a:bodyPr>
+          <a:lstStyle/>
+          <a:p>
+            <a:pPr algn="r">
+              <a:spcAft>
+                <a:spcPts val="600"/>
+              </a:spcAft>
+            </a:pPr>
+            <a:r>
               <a:rPr sz="1000" b="0">
                 <a:solidFill>
                   <a:srgbClr val="9AA3B2"/>
                 </a:solidFill>
                 <a:latin typeface="Calibri"/>
               </a:rPr>
-              <a:t>Illustrative figures — replace with actuals before presenting.</a:t>
+              <a:t>2 / 22</a:t>
             </a:r>
           </a:p>
         </p:txBody>
@@ -11461,8 +14809,52 @@
         </p:nvSpPr>
         <p:spPr>
           <a:xfrm>
+            <a:off x="548640" y="2167128"/>
+            <a:ext cx="11091672" cy="12801"/>
+          </a:xfrm>
+          <a:prstGeom prst="rect">
+            <a:avLst/>
+          </a:prstGeom>
+          <a:solidFill>
+            <a:srgbClr val="2C2C3A"/>
+          </a:solidFill>
+          <a:ln>
+            <a:noFill/>
+          </a:ln>
+          <a:effectLst/>
+        </p:spPr>
+        <p:style>
+          <a:lnRef idx="1">
+            <a:schemeClr val="accent1"/>
+          </a:lnRef>
+          <a:fillRef idx="3">
+            <a:schemeClr val="accent1"/>
+          </a:fillRef>
+          <a:effectRef idx="2">
+            <a:schemeClr val="accent1"/>
+          </a:effectRef>
+          <a:fontRef idx="minor">
+            <a:schemeClr val="lt1"/>
+          </a:fontRef>
+        </p:style>
+        <p:txBody>
+          <a:bodyPr rtlCol="0" anchor="ctr"/>
+          <a:lstStyle/>
+          <a:p>
+            <a:pPr algn="ctr"/>
+          </a:p>
+        </p:txBody>
+      </p:sp>
+      <p:sp>
+        <p:nvSpPr>
+          <p:cNvPr id="7" name="Rectangle 6"/>
+          <p:cNvSpPr/>
+          <p:nvPr/>
+        </p:nvSpPr>
+        <p:spPr>
+          <a:xfrm>
             <a:off x="548640" y="2331720"/>
-            <a:ext cx="11064240" cy="3931920"/>
+            <a:ext cx="5486400" cy="3931920"/>
           </a:xfrm>
           <a:prstGeom prst="rect">
             <a:avLst/>
@@ -11501,14 +14893,14 @@
       </p:sp>
       <p:sp>
         <p:nvSpPr>
-          <p:cNvPr id="7" name="TextBox 6"/>
+          <p:cNvPr id="8" name="TextBox 7"/>
           <p:cNvSpPr txBox="1"/>
           <p:nvPr/>
         </p:nvSpPr>
         <p:spPr>
           <a:xfrm>
-            <a:off x="914400" y="2560320"/>
-            <a:ext cx="10332720" cy="3566160"/>
+            <a:off x="822960" y="2542032"/>
+            <a:ext cx="4937760" cy="3566160"/>
           </a:xfrm>
           <a:prstGeom prst="rect">
             <a:avLst/>
@@ -11523,11 +14915,11 @@
           <a:p>
             <a:pPr algn="l">
               <a:spcAft>
-                <a:spcPts val="1200"/>
+                <a:spcPts val="1100"/>
               </a:spcAft>
             </a:pPr>
             <a:r>
-              <a:rPr sz="1800" b="1">
+              <a:rPr sz="1600" b="1">
                 <a:solidFill>
                   <a:srgbClr val="00BCEB"/>
                 </a:solidFill>
@@ -11536,7 +14928,7 @@
               <a:t>•  </a:t>
             </a:r>
             <a:r>
-              <a:rPr sz="1800" b="0">
+              <a:rPr sz="1600" b="0">
                 <a:solidFill>
                   <a:srgbClr val="F2F4F8"/>
                 </a:solidFill>
@@ -11548,11 +14940,11 @@
           <a:p>
             <a:pPr algn="l">
               <a:spcAft>
-                <a:spcPts val="1200"/>
+                <a:spcPts val="1100"/>
               </a:spcAft>
             </a:pPr>
             <a:r>
-              <a:rPr sz="1800" b="1">
+              <a:rPr sz="1600" b="1">
                 <a:solidFill>
                   <a:srgbClr val="00BCEB"/>
                 </a:solidFill>
@@ -11561,7 +14953,7 @@
               <a:t>•  </a:t>
             </a:r>
             <a:r>
-              <a:rPr sz="1800" b="0">
+              <a:rPr sz="1600" b="0">
                 <a:solidFill>
                   <a:srgbClr val="F2F4F8"/>
                 </a:solidFill>
@@ -11573,11 +14965,11 @@
           <a:p>
             <a:pPr algn="l">
               <a:spcAft>
-                <a:spcPts val="1200"/>
+                <a:spcPts val="1100"/>
               </a:spcAft>
             </a:pPr>
             <a:r>
-              <a:rPr sz="1800" b="1">
+              <a:rPr sz="1600" b="1">
                 <a:solidFill>
                   <a:srgbClr val="00BCEB"/>
                 </a:solidFill>
@@ -11586,7 +14978,7 @@
               <a:t>•  </a:t>
             </a:r>
             <a:r>
-              <a:rPr sz="1800" b="0">
+              <a:rPr sz="1600" b="0">
                 <a:solidFill>
                   <a:srgbClr val="F2F4F8"/>
                 </a:solidFill>
@@ -11599,14 +14991,253 @@
       </p:sp>
       <p:sp>
         <p:nvSpPr>
-          <p:cNvPr id="8" name="TextBox 7"/>
+          <p:cNvPr id="9" name="Rectangle 8"/>
+          <p:cNvSpPr/>
+          <p:nvPr/>
+        </p:nvSpPr>
+        <p:spPr>
+          <a:xfrm>
+            <a:off x="6263640" y="2331720"/>
+            <a:ext cx="5349240" cy="3931920"/>
+          </a:xfrm>
+          <a:prstGeom prst="rect">
+            <a:avLst/>
+          </a:prstGeom>
+          <a:solidFill>
+            <a:srgbClr val="1A1A2E"/>
+          </a:solidFill>
+          <a:ln w="12700">
+            <a:solidFill>
+              <a:srgbClr val="2C2C3A"/>
+            </a:solidFill>
+          </a:ln>
+          <a:effectLst/>
+        </p:spPr>
+        <p:style>
+          <a:lnRef idx="1">
+            <a:schemeClr val="accent1"/>
+          </a:lnRef>
+          <a:fillRef idx="3">
+            <a:schemeClr val="accent1"/>
+          </a:fillRef>
+          <a:effectRef idx="2">
+            <a:schemeClr val="accent1"/>
+          </a:effectRef>
+          <a:fontRef idx="minor">
+            <a:schemeClr val="lt1"/>
+          </a:fontRef>
+        </p:style>
+        <p:txBody>
+          <a:bodyPr rtlCol="0" anchor="ctr"/>
+          <a:lstStyle/>
+          <a:p>
+            <a:pPr algn="ctr"/>
+          </a:p>
+        </p:txBody>
+      </p:sp>
+      <p:sp>
+        <p:nvSpPr>
+          <p:cNvPr id="10" name="Rounded Rectangle 9"/>
+          <p:cNvSpPr/>
+          <p:nvPr/>
+        </p:nvSpPr>
+        <p:spPr>
+          <a:xfrm>
+            <a:off x="8161019" y="2834639"/>
+            <a:ext cx="1554480" cy="1280160"/>
+          </a:xfrm>
+          <a:prstGeom prst="roundRect">
+            <a:avLst/>
+          </a:prstGeom>
+          <a:solidFill>
+            <a:srgbClr val="24243C"/>
+          </a:solidFill>
+          <a:ln w="15875">
+            <a:solidFill>
+              <a:srgbClr val="00BCEB"/>
+            </a:solidFill>
+          </a:ln>
+          <a:effectLst/>
+        </p:spPr>
+        <p:style>
+          <a:lnRef idx="1">
+            <a:schemeClr val="accent1"/>
+          </a:lnRef>
+          <a:fillRef idx="3">
+            <a:schemeClr val="accent1"/>
+          </a:fillRef>
+          <a:effectRef idx="2">
+            <a:schemeClr val="accent1"/>
+          </a:effectRef>
+          <a:fontRef idx="minor">
+            <a:schemeClr val="lt1"/>
+          </a:fontRef>
+        </p:style>
+        <p:txBody>
+          <a:bodyPr rtlCol="0" anchor="ctr" wrap="square" lIns="45720" rIns="45720" tIns="18288" bIns="18288"/>
+          <a:lstStyle/>
+          <a:p>
+            <a:pPr algn="ctr"/>
+            <a:r>
+              <a:rPr sz="4000" b="1">
+                <a:solidFill>
+                  <a:srgbClr val="00BCEB"/>
+                </a:solidFill>
+                <a:latin typeface="Calibri"/>
+              </a:rPr>
+              <a:t>A6</a:t>
+            </a:r>
+          </a:p>
+        </p:txBody>
+      </p:sp>
+      <p:sp>
+        <p:nvSpPr>
+          <p:cNvPr id="11" name="TextBox 10"/>
           <p:cNvSpPr txBox="1"/>
           <p:nvPr/>
         </p:nvSpPr>
         <p:spPr>
           <a:xfrm>
-            <a:off x="548640" y="6419088"/>
-            <a:ext cx="11064240" cy="320040"/>
+            <a:off x="6629400" y="4343400"/>
+            <a:ext cx="4617720" cy="365760"/>
+          </a:xfrm>
+          <a:prstGeom prst="rect">
+            <a:avLst/>
+          </a:prstGeom>
+          <a:noFill/>
+        </p:spPr>
+        <p:txBody>
+          <a:bodyPr wrap="square" anchor="t">
+            <a:spAutoFit/>
+          </a:bodyPr>
+          <a:lstStyle/>
+          <a:p>
+            <a:pPr algn="ctr">
+              <a:spcAft>
+                <a:spcPts val="600"/>
+              </a:spcAft>
+            </a:pPr>
+            <a:r>
+              <a:rPr sz="1500" b="0">
+                <a:solidFill>
+                  <a:srgbClr val="9AA3B2"/>
+                </a:solidFill>
+                <a:latin typeface="Calibri"/>
+              </a:rPr>
+              <a:t>Reserve for Q&amp;A</a:t>
+            </a:r>
+          </a:p>
+        </p:txBody>
+      </p:sp>
+      <p:sp>
+        <p:nvSpPr>
+          <p:cNvPr id="12" name="Rounded Rectangle 11"/>
+          <p:cNvSpPr/>
+          <p:nvPr/>
+        </p:nvSpPr>
+        <p:spPr>
+          <a:xfrm>
+            <a:off x="7109459" y="5074920"/>
+            <a:ext cx="3657600" cy="566928"/>
+          </a:xfrm>
+          <a:prstGeom prst="roundRect">
+            <a:avLst/>
+          </a:prstGeom>
+          <a:solidFill>
+            <a:srgbClr val="1A1A2E"/>
+          </a:solidFill>
+          <a:ln w="9525">
+            <a:solidFill>
+              <a:srgbClr val="2C2C3A"/>
+            </a:solidFill>
+          </a:ln>
+          <a:effectLst/>
+        </p:spPr>
+        <p:style>
+          <a:lnRef idx="1">
+            <a:schemeClr val="accent1"/>
+          </a:lnRef>
+          <a:fillRef idx="3">
+            <a:schemeClr val="accent1"/>
+          </a:fillRef>
+          <a:effectRef idx="2">
+            <a:schemeClr val="accent1"/>
+          </a:effectRef>
+          <a:fontRef idx="minor">
+            <a:schemeClr val="lt1"/>
+          </a:fontRef>
+        </p:style>
+        <p:txBody>
+          <a:bodyPr rtlCol="0" anchor="ctr" wrap="square" lIns="45720" rIns="45720" tIns="18288" bIns="18288"/>
+          <a:lstStyle/>
+          <a:p>
+            <a:pPr algn="ctr"/>
+            <a:r>
+              <a:rPr sz="1200" b="0">
+                <a:solidFill>
+                  <a:srgbClr val="F2F4F8"/>
+                </a:solidFill>
+                <a:latin typeface="Calibri"/>
+              </a:rPr>
+              <a:t>Source · 05 §6</a:t>
+            </a:r>
+          </a:p>
+        </p:txBody>
+      </p:sp>
+      <p:sp>
+        <p:nvSpPr>
+          <p:cNvPr id="13" name="Rectangle 12"/>
+          <p:cNvSpPr/>
+          <p:nvPr/>
+        </p:nvSpPr>
+        <p:spPr>
+          <a:xfrm>
+            <a:off x="548640" y="6364224"/>
+            <a:ext cx="11091672" cy="10972"/>
+          </a:xfrm>
+          <a:prstGeom prst="rect">
+            <a:avLst/>
+          </a:prstGeom>
+          <a:solidFill>
+            <a:srgbClr val="2C2C3A"/>
+          </a:solidFill>
+          <a:ln>
+            <a:noFill/>
+          </a:ln>
+          <a:effectLst/>
+        </p:spPr>
+        <p:style>
+          <a:lnRef idx="1">
+            <a:schemeClr val="accent1"/>
+          </a:lnRef>
+          <a:fillRef idx="3">
+            <a:schemeClr val="accent1"/>
+          </a:fillRef>
+          <a:effectRef idx="2">
+            <a:schemeClr val="accent1"/>
+          </a:effectRef>
+          <a:fontRef idx="minor">
+            <a:schemeClr val="lt1"/>
+          </a:fontRef>
+        </p:style>
+        <p:txBody>
+          <a:bodyPr rtlCol="0" anchor="ctr"/>
+          <a:lstStyle/>
+          <a:p>
+            <a:pPr algn="ctr"/>
+          </a:p>
+        </p:txBody>
+      </p:sp>
+      <p:sp>
+        <p:nvSpPr>
+          <p:cNvPr id="14" name="TextBox 13"/>
+          <p:cNvSpPr txBox="1"/>
+          <p:nvPr/>
+        </p:nvSpPr>
+        <p:spPr>
+          <a:xfrm>
+            <a:off x="548640" y="6428232"/>
+            <a:ext cx="9692640" cy="292608"/>
           </a:xfrm>
           <a:prstGeom prst="rect">
             <a:avLst/>
@@ -11625,13 +15256,61 @@
               </a:spcAft>
             </a:pPr>
             <a:r>
+              <a:rPr sz="900" b="1">
+                <a:solidFill>
+                  <a:srgbClr val="9AA3B2"/>
+                </a:solidFill>
+                <a:latin typeface="Calibri"/>
+              </a:rPr>
+              <a:t>FIELD CTO · X-ARCH SELLING</a:t>
+            </a:r>
+            <a:r>
+              <a:rPr sz="900" b="0">
+                <a:solidFill>
+                  <a:srgbClr val="9AA3B2"/>
+                </a:solidFill>
+                <a:latin typeface="Calibri"/>
+              </a:rPr>
+              <a:t>      Appendix — reserve for Q&amp;A. Illustrative figures.</a:t>
+            </a:r>
+          </a:p>
+        </p:txBody>
+      </p:sp>
+      <p:sp>
+        <p:nvSpPr>
+          <p:cNvPr id="15" name="TextBox 14"/>
+          <p:cNvSpPr txBox="1"/>
+          <p:nvPr/>
+        </p:nvSpPr>
+        <p:spPr>
+          <a:xfrm>
+            <a:off x="10515600" y="6428232"/>
+            <a:ext cx="1124712" cy="274320"/>
+          </a:xfrm>
+          <a:prstGeom prst="rect">
+            <a:avLst/>
+          </a:prstGeom>
+          <a:noFill/>
+        </p:spPr>
+        <p:txBody>
+          <a:bodyPr wrap="square" anchor="t">
+            <a:spAutoFit/>
+          </a:bodyPr>
+          <a:lstStyle/>
+          <a:p>
+            <a:pPr algn="r">
+              <a:spcAft>
+                <a:spcPts val="600"/>
+              </a:spcAft>
+            </a:pPr>
+            <a:r>
               <a:rPr sz="1000" b="0">
                 <a:solidFill>
                   <a:srgbClr val="9AA3B2"/>
                 </a:solidFill>
                 <a:latin typeface="Calibri"/>
               </a:rPr>
-              <a:t>Appendix — reserve for Q&amp;A. Illustrative figures.</a:t>
+              <a:t>20 / 22</a:t>
             </a:r>
           </a:p>
         </p:txBody>
@@ -11828,8 +15507,52 @@
         </p:nvSpPr>
         <p:spPr>
           <a:xfrm>
+            <a:off x="548640" y="2167128"/>
+            <a:ext cx="11091672" cy="12801"/>
+          </a:xfrm>
+          <a:prstGeom prst="rect">
+            <a:avLst/>
+          </a:prstGeom>
+          <a:solidFill>
+            <a:srgbClr val="2C2C3A"/>
+          </a:solidFill>
+          <a:ln>
+            <a:noFill/>
+          </a:ln>
+          <a:effectLst/>
+        </p:spPr>
+        <p:style>
+          <a:lnRef idx="1">
+            <a:schemeClr val="accent1"/>
+          </a:lnRef>
+          <a:fillRef idx="3">
+            <a:schemeClr val="accent1"/>
+          </a:fillRef>
+          <a:effectRef idx="2">
+            <a:schemeClr val="accent1"/>
+          </a:effectRef>
+          <a:fontRef idx="minor">
+            <a:schemeClr val="lt1"/>
+          </a:fontRef>
+        </p:style>
+        <p:txBody>
+          <a:bodyPr rtlCol="0" anchor="ctr"/>
+          <a:lstStyle/>
+          <a:p>
+            <a:pPr algn="ctr"/>
+          </a:p>
+        </p:txBody>
+      </p:sp>
+      <p:sp>
+        <p:nvSpPr>
+          <p:cNvPr id="7" name="Rectangle 6"/>
+          <p:cNvSpPr/>
+          <p:nvPr/>
+        </p:nvSpPr>
+        <p:spPr>
+          <a:xfrm>
             <a:off x="548640" y="2331720"/>
-            <a:ext cx="11064240" cy="3931920"/>
+            <a:ext cx="5486400" cy="3931920"/>
           </a:xfrm>
           <a:prstGeom prst="rect">
             <a:avLst/>
@@ -11868,14 +15591,14 @@
       </p:sp>
       <p:sp>
         <p:nvSpPr>
-          <p:cNvPr id="7" name="TextBox 6"/>
+          <p:cNvPr id="8" name="TextBox 7"/>
           <p:cNvSpPr txBox="1"/>
           <p:nvPr/>
         </p:nvSpPr>
         <p:spPr>
           <a:xfrm>
-            <a:off x="914400" y="2560320"/>
-            <a:ext cx="10332720" cy="3566160"/>
+            <a:off x="822960" y="2542032"/>
+            <a:ext cx="4937760" cy="3566160"/>
           </a:xfrm>
           <a:prstGeom prst="rect">
             <a:avLst/>
@@ -11890,11 +15613,11 @@
           <a:p>
             <a:pPr algn="l">
               <a:spcAft>
-                <a:spcPts val="1200"/>
+                <a:spcPts val="1100"/>
               </a:spcAft>
             </a:pPr>
             <a:r>
-              <a:rPr sz="1800" b="1">
+              <a:rPr sz="1600" b="1">
                 <a:solidFill>
                   <a:srgbClr val="00BCEB"/>
                 </a:solidFill>
@@ -11903,7 +15626,7 @@
               <a:t>•  </a:t>
             </a:r>
             <a:r>
-              <a:rPr sz="1800" b="0">
+              <a:rPr sz="1600" b="0">
                 <a:solidFill>
                   <a:srgbClr val="F2F4F8"/>
                 </a:solidFill>
@@ -11915,11 +15638,11 @@
           <a:p>
             <a:pPr algn="l">
               <a:spcAft>
-                <a:spcPts val="1200"/>
+                <a:spcPts val="1100"/>
               </a:spcAft>
             </a:pPr>
             <a:r>
-              <a:rPr sz="1800" b="1">
+              <a:rPr sz="1600" b="1">
                 <a:solidFill>
                   <a:srgbClr val="00BCEB"/>
                 </a:solidFill>
@@ -11928,7 +15651,7 @@
               <a:t>•  </a:t>
             </a:r>
             <a:r>
-              <a:rPr sz="1800" b="0">
+              <a:rPr sz="1600" b="0">
                 <a:solidFill>
                   <a:srgbClr val="F2F4F8"/>
                 </a:solidFill>
@@ -11940,11 +15663,11 @@
           <a:p>
             <a:pPr algn="l">
               <a:spcAft>
-                <a:spcPts val="1200"/>
+                <a:spcPts val="1100"/>
               </a:spcAft>
             </a:pPr>
             <a:r>
-              <a:rPr sz="1800" b="1">
+              <a:rPr sz="1600" b="1">
                 <a:solidFill>
                   <a:srgbClr val="00BCEB"/>
                 </a:solidFill>
@@ -11953,7 +15676,7 @@
               <a:t>•  </a:t>
             </a:r>
             <a:r>
-              <a:rPr sz="1800" b="0">
+              <a:rPr sz="1600" b="0">
                 <a:solidFill>
                   <a:srgbClr val="F2F4F8"/>
                 </a:solidFill>
@@ -11966,14 +15689,253 @@
       </p:sp>
       <p:sp>
         <p:nvSpPr>
-          <p:cNvPr id="8" name="TextBox 7"/>
+          <p:cNvPr id="9" name="Rectangle 8"/>
+          <p:cNvSpPr/>
+          <p:nvPr/>
+        </p:nvSpPr>
+        <p:spPr>
+          <a:xfrm>
+            <a:off x="6263640" y="2331720"/>
+            <a:ext cx="5349240" cy="3931920"/>
+          </a:xfrm>
+          <a:prstGeom prst="rect">
+            <a:avLst/>
+          </a:prstGeom>
+          <a:solidFill>
+            <a:srgbClr val="1A1A2E"/>
+          </a:solidFill>
+          <a:ln w="12700">
+            <a:solidFill>
+              <a:srgbClr val="2C2C3A"/>
+            </a:solidFill>
+          </a:ln>
+          <a:effectLst/>
+        </p:spPr>
+        <p:style>
+          <a:lnRef idx="1">
+            <a:schemeClr val="accent1"/>
+          </a:lnRef>
+          <a:fillRef idx="3">
+            <a:schemeClr val="accent1"/>
+          </a:fillRef>
+          <a:effectRef idx="2">
+            <a:schemeClr val="accent1"/>
+          </a:effectRef>
+          <a:fontRef idx="minor">
+            <a:schemeClr val="lt1"/>
+          </a:fontRef>
+        </p:style>
+        <p:txBody>
+          <a:bodyPr rtlCol="0" anchor="ctr"/>
+          <a:lstStyle/>
+          <a:p>
+            <a:pPr algn="ctr"/>
+          </a:p>
+        </p:txBody>
+      </p:sp>
+      <p:sp>
+        <p:nvSpPr>
+          <p:cNvPr id="10" name="Rounded Rectangle 9"/>
+          <p:cNvSpPr/>
+          <p:nvPr/>
+        </p:nvSpPr>
+        <p:spPr>
+          <a:xfrm>
+            <a:off x="8161019" y="2834639"/>
+            <a:ext cx="1554480" cy="1280160"/>
+          </a:xfrm>
+          <a:prstGeom prst="roundRect">
+            <a:avLst/>
+          </a:prstGeom>
+          <a:solidFill>
+            <a:srgbClr val="24243C"/>
+          </a:solidFill>
+          <a:ln w="15875">
+            <a:solidFill>
+              <a:srgbClr val="00BCEB"/>
+            </a:solidFill>
+          </a:ln>
+          <a:effectLst/>
+        </p:spPr>
+        <p:style>
+          <a:lnRef idx="1">
+            <a:schemeClr val="accent1"/>
+          </a:lnRef>
+          <a:fillRef idx="3">
+            <a:schemeClr val="accent1"/>
+          </a:fillRef>
+          <a:effectRef idx="2">
+            <a:schemeClr val="accent1"/>
+          </a:effectRef>
+          <a:fontRef idx="minor">
+            <a:schemeClr val="lt1"/>
+          </a:fontRef>
+        </p:style>
+        <p:txBody>
+          <a:bodyPr rtlCol="0" anchor="ctr" wrap="square" lIns="45720" rIns="45720" tIns="18288" bIns="18288"/>
+          <a:lstStyle/>
+          <a:p>
+            <a:pPr algn="ctr"/>
+            <a:r>
+              <a:rPr sz="4000" b="1">
+                <a:solidFill>
+                  <a:srgbClr val="00BCEB"/>
+                </a:solidFill>
+                <a:latin typeface="Calibri"/>
+              </a:rPr>
+              <a:t>A7</a:t>
+            </a:r>
+          </a:p>
+        </p:txBody>
+      </p:sp>
+      <p:sp>
+        <p:nvSpPr>
+          <p:cNvPr id="11" name="TextBox 10"/>
           <p:cNvSpPr txBox="1"/>
           <p:nvPr/>
         </p:nvSpPr>
         <p:spPr>
           <a:xfrm>
-            <a:off x="548640" y="6419088"/>
-            <a:ext cx="11064240" cy="320040"/>
+            <a:off x="6629400" y="4343400"/>
+            <a:ext cx="4617720" cy="365760"/>
+          </a:xfrm>
+          <a:prstGeom prst="rect">
+            <a:avLst/>
+          </a:prstGeom>
+          <a:noFill/>
+        </p:spPr>
+        <p:txBody>
+          <a:bodyPr wrap="square" anchor="t">
+            <a:spAutoFit/>
+          </a:bodyPr>
+          <a:lstStyle/>
+          <a:p>
+            <a:pPr algn="ctr">
+              <a:spcAft>
+                <a:spcPts val="600"/>
+              </a:spcAft>
+            </a:pPr>
+            <a:r>
+              <a:rPr sz="1500" b="0">
+                <a:solidFill>
+                  <a:srgbClr val="9AA3B2"/>
+                </a:solidFill>
+                <a:latin typeface="Calibri"/>
+              </a:rPr>
+              <a:t>Reserve for Q&amp;A</a:t>
+            </a:r>
+          </a:p>
+        </p:txBody>
+      </p:sp>
+      <p:sp>
+        <p:nvSpPr>
+          <p:cNvPr id="12" name="Rounded Rectangle 11"/>
+          <p:cNvSpPr/>
+          <p:nvPr/>
+        </p:nvSpPr>
+        <p:spPr>
+          <a:xfrm>
+            <a:off x="7109459" y="5074920"/>
+            <a:ext cx="3657600" cy="566928"/>
+          </a:xfrm>
+          <a:prstGeom prst="roundRect">
+            <a:avLst/>
+          </a:prstGeom>
+          <a:solidFill>
+            <a:srgbClr val="1A1A2E"/>
+          </a:solidFill>
+          <a:ln w="9525">
+            <a:solidFill>
+              <a:srgbClr val="2C2C3A"/>
+            </a:solidFill>
+          </a:ln>
+          <a:effectLst/>
+        </p:spPr>
+        <p:style>
+          <a:lnRef idx="1">
+            <a:schemeClr val="accent1"/>
+          </a:lnRef>
+          <a:fillRef idx="3">
+            <a:schemeClr val="accent1"/>
+          </a:fillRef>
+          <a:effectRef idx="2">
+            <a:schemeClr val="accent1"/>
+          </a:effectRef>
+          <a:fontRef idx="minor">
+            <a:schemeClr val="lt1"/>
+          </a:fontRef>
+        </p:style>
+        <p:txBody>
+          <a:bodyPr rtlCol="0" anchor="ctr" wrap="square" lIns="45720" rIns="45720" tIns="18288" bIns="18288"/>
+          <a:lstStyle/>
+          <a:p>
+            <a:pPr algn="ctr"/>
+            <a:r>
+              <a:rPr sz="1200" b="0">
+                <a:solidFill>
+                  <a:srgbClr val="F2F4F8"/>
+                </a:solidFill>
+                <a:latin typeface="Calibri"/>
+              </a:rPr>
+              <a:t>Source · 02 §7</a:t>
+            </a:r>
+          </a:p>
+        </p:txBody>
+      </p:sp>
+      <p:sp>
+        <p:nvSpPr>
+          <p:cNvPr id="13" name="Rectangle 12"/>
+          <p:cNvSpPr/>
+          <p:nvPr/>
+        </p:nvSpPr>
+        <p:spPr>
+          <a:xfrm>
+            <a:off x="548640" y="6364224"/>
+            <a:ext cx="11091672" cy="10972"/>
+          </a:xfrm>
+          <a:prstGeom prst="rect">
+            <a:avLst/>
+          </a:prstGeom>
+          <a:solidFill>
+            <a:srgbClr val="2C2C3A"/>
+          </a:solidFill>
+          <a:ln>
+            <a:noFill/>
+          </a:ln>
+          <a:effectLst/>
+        </p:spPr>
+        <p:style>
+          <a:lnRef idx="1">
+            <a:schemeClr val="accent1"/>
+          </a:lnRef>
+          <a:fillRef idx="3">
+            <a:schemeClr val="accent1"/>
+          </a:fillRef>
+          <a:effectRef idx="2">
+            <a:schemeClr val="accent1"/>
+          </a:effectRef>
+          <a:fontRef idx="minor">
+            <a:schemeClr val="lt1"/>
+          </a:fontRef>
+        </p:style>
+        <p:txBody>
+          <a:bodyPr rtlCol="0" anchor="ctr"/>
+          <a:lstStyle/>
+          <a:p>
+            <a:pPr algn="ctr"/>
+          </a:p>
+        </p:txBody>
+      </p:sp>
+      <p:sp>
+        <p:nvSpPr>
+          <p:cNvPr id="14" name="TextBox 13"/>
+          <p:cNvSpPr txBox="1"/>
+          <p:nvPr/>
+        </p:nvSpPr>
+        <p:spPr>
+          <a:xfrm>
+            <a:off x="548640" y="6428232"/>
+            <a:ext cx="9692640" cy="292608"/>
           </a:xfrm>
           <a:prstGeom prst="rect">
             <a:avLst/>
@@ -11992,13 +15954,61 @@
               </a:spcAft>
             </a:pPr>
             <a:r>
+              <a:rPr sz="900" b="1">
+                <a:solidFill>
+                  <a:srgbClr val="9AA3B2"/>
+                </a:solidFill>
+                <a:latin typeface="Calibri"/>
+              </a:rPr>
+              <a:t>FIELD CTO · X-ARCH SELLING</a:t>
+            </a:r>
+            <a:r>
+              <a:rPr sz="900" b="0">
+                <a:solidFill>
+                  <a:srgbClr val="9AA3B2"/>
+                </a:solidFill>
+                <a:latin typeface="Calibri"/>
+              </a:rPr>
+              <a:t>      Appendix — reserve for Q&amp;A. Illustrative figures.</a:t>
+            </a:r>
+          </a:p>
+        </p:txBody>
+      </p:sp>
+      <p:sp>
+        <p:nvSpPr>
+          <p:cNvPr id="15" name="TextBox 14"/>
+          <p:cNvSpPr txBox="1"/>
+          <p:nvPr/>
+        </p:nvSpPr>
+        <p:spPr>
+          <a:xfrm>
+            <a:off x="10515600" y="6428232"/>
+            <a:ext cx="1124712" cy="274320"/>
+          </a:xfrm>
+          <a:prstGeom prst="rect">
+            <a:avLst/>
+          </a:prstGeom>
+          <a:noFill/>
+        </p:spPr>
+        <p:txBody>
+          <a:bodyPr wrap="square" anchor="t">
+            <a:spAutoFit/>
+          </a:bodyPr>
+          <a:lstStyle/>
+          <a:p>
+            <a:pPr algn="r">
+              <a:spcAft>
+                <a:spcPts val="600"/>
+              </a:spcAft>
+            </a:pPr>
+            <a:r>
               <a:rPr sz="1000" b="0">
                 <a:solidFill>
                   <a:srgbClr val="9AA3B2"/>
                 </a:solidFill>
                 <a:latin typeface="Calibri"/>
               </a:rPr>
-              <a:t>Appendix — reserve for Q&amp;A. Illustrative figures.</a:t>
+              <a:t>21 / 22</a:t>
             </a:r>
           </a:p>
         </p:txBody>
@@ -12195,8 +16205,52 @@
         </p:nvSpPr>
         <p:spPr>
           <a:xfrm>
+            <a:off x="548640" y="2167128"/>
+            <a:ext cx="11091672" cy="12801"/>
+          </a:xfrm>
+          <a:prstGeom prst="rect">
+            <a:avLst/>
+          </a:prstGeom>
+          <a:solidFill>
+            <a:srgbClr val="2C2C3A"/>
+          </a:solidFill>
+          <a:ln>
+            <a:noFill/>
+          </a:ln>
+          <a:effectLst/>
+        </p:spPr>
+        <p:style>
+          <a:lnRef idx="1">
+            <a:schemeClr val="accent1"/>
+          </a:lnRef>
+          <a:fillRef idx="3">
+            <a:schemeClr val="accent1"/>
+          </a:fillRef>
+          <a:effectRef idx="2">
+            <a:schemeClr val="accent1"/>
+          </a:effectRef>
+          <a:fontRef idx="minor">
+            <a:schemeClr val="lt1"/>
+          </a:fontRef>
+        </p:style>
+        <p:txBody>
+          <a:bodyPr rtlCol="0" anchor="ctr"/>
+          <a:lstStyle/>
+          <a:p>
+            <a:pPr algn="ctr"/>
+          </a:p>
+        </p:txBody>
+      </p:sp>
+      <p:sp>
+        <p:nvSpPr>
+          <p:cNvPr id="7" name="Rectangle 6"/>
+          <p:cNvSpPr/>
+          <p:nvPr/>
+        </p:nvSpPr>
+        <p:spPr>
+          <a:xfrm>
             <a:off x="548640" y="2331720"/>
-            <a:ext cx="11064240" cy="3931920"/>
+            <a:ext cx="5486400" cy="3931920"/>
           </a:xfrm>
           <a:prstGeom prst="rect">
             <a:avLst/>
@@ -12235,14 +16289,14 @@
       </p:sp>
       <p:sp>
         <p:nvSpPr>
-          <p:cNvPr id="7" name="TextBox 6"/>
+          <p:cNvPr id="8" name="TextBox 7"/>
           <p:cNvSpPr txBox="1"/>
           <p:nvPr/>
         </p:nvSpPr>
         <p:spPr>
           <a:xfrm>
-            <a:off x="914400" y="2560320"/>
-            <a:ext cx="10332720" cy="3566160"/>
+            <a:off x="822960" y="2542032"/>
+            <a:ext cx="4937760" cy="3566160"/>
           </a:xfrm>
           <a:prstGeom prst="rect">
             <a:avLst/>
@@ -12257,11 +16311,11 @@
           <a:p>
             <a:pPr algn="l">
               <a:spcAft>
-                <a:spcPts val="1200"/>
+                <a:spcPts val="1100"/>
               </a:spcAft>
             </a:pPr>
             <a:r>
-              <a:rPr sz="1800" b="1">
+              <a:rPr sz="1600" b="1">
                 <a:solidFill>
                   <a:srgbClr val="00BCEB"/>
                 </a:solidFill>
@@ -12270,7 +16324,7 @@
               <a:t>•  </a:t>
             </a:r>
             <a:r>
-              <a:rPr sz="1800" b="0">
+              <a:rPr sz="1600" b="0">
                 <a:solidFill>
                   <a:srgbClr val="F2F4F8"/>
                 </a:solidFill>
@@ -12282,11 +16336,11 @@
           <a:p>
             <a:pPr algn="l">
               <a:spcAft>
-                <a:spcPts val="1200"/>
+                <a:spcPts val="1100"/>
               </a:spcAft>
             </a:pPr>
             <a:r>
-              <a:rPr sz="1800" b="1">
+              <a:rPr sz="1600" b="1">
                 <a:solidFill>
                   <a:srgbClr val="00BCEB"/>
                 </a:solidFill>
@@ -12295,7 +16349,7 @@
               <a:t>•  </a:t>
             </a:r>
             <a:r>
-              <a:rPr sz="1800" b="0">
+              <a:rPr sz="1600" b="0">
                 <a:solidFill>
                   <a:srgbClr val="F2F4F8"/>
                 </a:solidFill>
@@ -12307,11 +16361,11 @@
           <a:p>
             <a:pPr algn="l">
               <a:spcAft>
-                <a:spcPts val="1200"/>
+                <a:spcPts val="1100"/>
               </a:spcAft>
             </a:pPr>
             <a:r>
-              <a:rPr sz="1800" b="1">
+              <a:rPr sz="1600" b="1">
                 <a:solidFill>
                   <a:srgbClr val="00BCEB"/>
                 </a:solidFill>
@@ -12320,7 +16374,7 @@
               <a:t>•  </a:t>
             </a:r>
             <a:r>
-              <a:rPr sz="1800" b="0">
+              <a:rPr sz="1600" b="0">
                 <a:solidFill>
                   <a:srgbClr val="F2F4F8"/>
                 </a:solidFill>
@@ -12333,14 +16387,253 @@
       </p:sp>
       <p:sp>
         <p:nvSpPr>
-          <p:cNvPr id="8" name="TextBox 7"/>
+          <p:cNvPr id="9" name="Rectangle 8"/>
+          <p:cNvSpPr/>
+          <p:nvPr/>
+        </p:nvSpPr>
+        <p:spPr>
+          <a:xfrm>
+            <a:off x="6263640" y="2331720"/>
+            <a:ext cx="5349240" cy="3931920"/>
+          </a:xfrm>
+          <a:prstGeom prst="rect">
+            <a:avLst/>
+          </a:prstGeom>
+          <a:solidFill>
+            <a:srgbClr val="1A1A2E"/>
+          </a:solidFill>
+          <a:ln w="12700">
+            <a:solidFill>
+              <a:srgbClr val="2C2C3A"/>
+            </a:solidFill>
+          </a:ln>
+          <a:effectLst/>
+        </p:spPr>
+        <p:style>
+          <a:lnRef idx="1">
+            <a:schemeClr val="accent1"/>
+          </a:lnRef>
+          <a:fillRef idx="3">
+            <a:schemeClr val="accent1"/>
+          </a:fillRef>
+          <a:effectRef idx="2">
+            <a:schemeClr val="accent1"/>
+          </a:effectRef>
+          <a:fontRef idx="minor">
+            <a:schemeClr val="lt1"/>
+          </a:fontRef>
+        </p:style>
+        <p:txBody>
+          <a:bodyPr rtlCol="0" anchor="ctr"/>
+          <a:lstStyle/>
+          <a:p>
+            <a:pPr algn="ctr"/>
+          </a:p>
+        </p:txBody>
+      </p:sp>
+      <p:sp>
+        <p:nvSpPr>
+          <p:cNvPr id="10" name="Rounded Rectangle 9"/>
+          <p:cNvSpPr/>
+          <p:nvPr/>
+        </p:nvSpPr>
+        <p:spPr>
+          <a:xfrm>
+            <a:off x="8161019" y="2834639"/>
+            <a:ext cx="1554480" cy="1280160"/>
+          </a:xfrm>
+          <a:prstGeom prst="roundRect">
+            <a:avLst/>
+          </a:prstGeom>
+          <a:solidFill>
+            <a:srgbClr val="24243C"/>
+          </a:solidFill>
+          <a:ln w="15875">
+            <a:solidFill>
+              <a:srgbClr val="00BCEB"/>
+            </a:solidFill>
+          </a:ln>
+          <a:effectLst/>
+        </p:spPr>
+        <p:style>
+          <a:lnRef idx="1">
+            <a:schemeClr val="accent1"/>
+          </a:lnRef>
+          <a:fillRef idx="3">
+            <a:schemeClr val="accent1"/>
+          </a:fillRef>
+          <a:effectRef idx="2">
+            <a:schemeClr val="accent1"/>
+          </a:effectRef>
+          <a:fontRef idx="minor">
+            <a:schemeClr val="lt1"/>
+          </a:fontRef>
+        </p:style>
+        <p:txBody>
+          <a:bodyPr rtlCol="0" anchor="ctr" wrap="square" lIns="45720" rIns="45720" tIns="18288" bIns="18288"/>
+          <a:lstStyle/>
+          <a:p>
+            <a:pPr algn="ctr"/>
+            <a:r>
+              <a:rPr sz="4000" b="1">
+                <a:solidFill>
+                  <a:srgbClr val="00BCEB"/>
+                </a:solidFill>
+                <a:latin typeface="Calibri"/>
+              </a:rPr>
+              <a:t>A8</a:t>
+            </a:r>
+          </a:p>
+        </p:txBody>
+      </p:sp>
+      <p:sp>
+        <p:nvSpPr>
+          <p:cNvPr id="11" name="TextBox 10"/>
           <p:cNvSpPr txBox="1"/>
           <p:nvPr/>
         </p:nvSpPr>
         <p:spPr>
           <a:xfrm>
-            <a:off x="548640" y="6419088"/>
-            <a:ext cx="11064240" cy="320040"/>
+            <a:off x="6629400" y="4343400"/>
+            <a:ext cx="4617720" cy="365760"/>
+          </a:xfrm>
+          <a:prstGeom prst="rect">
+            <a:avLst/>
+          </a:prstGeom>
+          <a:noFill/>
+        </p:spPr>
+        <p:txBody>
+          <a:bodyPr wrap="square" anchor="t">
+            <a:spAutoFit/>
+          </a:bodyPr>
+          <a:lstStyle/>
+          <a:p>
+            <a:pPr algn="ctr">
+              <a:spcAft>
+                <a:spcPts val="600"/>
+              </a:spcAft>
+            </a:pPr>
+            <a:r>
+              <a:rPr sz="1500" b="0">
+                <a:solidFill>
+                  <a:srgbClr val="9AA3B2"/>
+                </a:solidFill>
+                <a:latin typeface="Calibri"/>
+              </a:rPr>
+              <a:t>Reserve for Q&amp;A</a:t>
+            </a:r>
+          </a:p>
+        </p:txBody>
+      </p:sp>
+      <p:sp>
+        <p:nvSpPr>
+          <p:cNvPr id="12" name="Rounded Rectangle 11"/>
+          <p:cNvSpPr/>
+          <p:nvPr/>
+        </p:nvSpPr>
+        <p:spPr>
+          <a:xfrm>
+            <a:off x="7109459" y="5074920"/>
+            <a:ext cx="3657600" cy="566928"/>
+          </a:xfrm>
+          <a:prstGeom prst="roundRect">
+            <a:avLst/>
+          </a:prstGeom>
+          <a:solidFill>
+            <a:srgbClr val="1A1A2E"/>
+          </a:solidFill>
+          <a:ln w="9525">
+            <a:solidFill>
+              <a:srgbClr val="2C2C3A"/>
+            </a:solidFill>
+          </a:ln>
+          <a:effectLst/>
+        </p:spPr>
+        <p:style>
+          <a:lnRef idx="1">
+            <a:schemeClr val="accent1"/>
+          </a:lnRef>
+          <a:fillRef idx="3">
+            <a:schemeClr val="accent1"/>
+          </a:fillRef>
+          <a:effectRef idx="2">
+            <a:schemeClr val="accent1"/>
+          </a:effectRef>
+          <a:fontRef idx="minor">
+            <a:schemeClr val="lt1"/>
+          </a:fontRef>
+        </p:style>
+        <p:txBody>
+          <a:bodyPr rtlCol="0" anchor="ctr" wrap="square" lIns="45720" rIns="45720" tIns="18288" bIns="18288"/>
+          <a:lstStyle/>
+          <a:p>
+            <a:pPr algn="ctr"/>
+            <a:r>
+              <a:rPr sz="1200" b="0">
+                <a:solidFill>
+                  <a:srgbClr val="F2F4F8"/>
+                </a:solidFill>
+                <a:latin typeface="Calibri"/>
+              </a:rPr>
+              <a:t>Source · 07 §3</a:t>
+            </a:r>
+          </a:p>
+        </p:txBody>
+      </p:sp>
+      <p:sp>
+        <p:nvSpPr>
+          <p:cNvPr id="13" name="Rectangle 12"/>
+          <p:cNvSpPr/>
+          <p:nvPr/>
+        </p:nvSpPr>
+        <p:spPr>
+          <a:xfrm>
+            <a:off x="548640" y="6364224"/>
+            <a:ext cx="11091672" cy="10972"/>
+          </a:xfrm>
+          <a:prstGeom prst="rect">
+            <a:avLst/>
+          </a:prstGeom>
+          <a:solidFill>
+            <a:srgbClr val="2C2C3A"/>
+          </a:solidFill>
+          <a:ln>
+            <a:noFill/>
+          </a:ln>
+          <a:effectLst/>
+        </p:spPr>
+        <p:style>
+          <a:lnRef idx="1">
+            <a:schemeClr val="accent1"/>
+          </a:lnRef>
+          <a:fillRef idx="3">
+            <a:schemeClr val="accent1"/>
+          </a:fillRef>
+          <a:effectRef idx="2">
+            <a:schemeClr val="accent1"/>
+          </a:effectRef>
+          <a:fontRef idx="minor">
+            <a:schemeClr val="lt1"/>
+          </a:fontRef>
+        </p:style>
+        <p:txBody>
+          <a:bodyPr rtlCol="0" anchor="ctr"/>
+          <a:lstStyle/>
+          <a:p>
+            <a:pPr algn="ctr"/>
+          </a:p>
+        </p:txBody>
+      </p:sp>
+      <p:sp>
+        <p:nvSpPr>
+          <p:cNvPr id="14" name="TextBox 13"/>
+          <p:cNvSpPr txBox="1"/>
+          <p:nvPr/>
+        </p:nvSpPr>
+        <p:spPr>
+          <a:xfrm>
+            <a:off x="548640" y="6428232"/>
+            <a:ext cx="9692640" cy="292608"/>
           </a:xfrm>
           <a:prstGeom prst="rect">
             <a:avLst/>
@@ -12359,13 +16652,61 @@
               </a:spcAft>
             </a:pPr>
             <a:r>
+              <a:rPr sz="900" b="1">
+                <a:solidFill>
+                  <a:srgbClr val="9AA3B2"/>
+                </a:solidFill>
+                <a:latin typeface="Calibri"/>
+              </a:rPr>
+              <a:t>FIELD CTO · X-ARCH SELLING</a:t>
+            </a:r>
+            <a:r>
+              <a:rPr sz="900" b="0">
+                <a:solidFill>
+                  <a:srgbClr val="9AA3B2"/>
+                </a:solidFill>
+                <a:latin typeface="Calibri"/>
+              </a:rPr>
+              <a:t>      Appendix — reserve for Q&amp;A. Illustrative figures.</a:t>
+            </a:r>
+          </a:p>
+        </p:txBody>
+      </p:sp>
+      <p:sp>
+        <p:nvSpPr>
+          <p:cNvPr id="15" name="TextBox 14"/>
+          <p:cNvSpPr txBox="1"/>
+          <p:nvPr/>
+        </p:nvSpPr>
+        <p:spPr>
+          <a:xfrm>
+            <a:off x="10515600" y="6428232"/>
+            <a:ext cx="1124712" cy="274320"/>
+          </a:xfrm>
+          <a:prstGeom prst="rect">
+            <a:avLst/>
+          </a:prstGeom>
+          <a:noFill/>
+        </p:spPr>
+        <p:txBody>
+          <a:bodyPr wrap="square" anchor="t">
+            <a:spAutoFit/>
+          </a:bodyPr>
+          <a:lstStyle/>
+          <a:p>
+            <a:pPr algn="r">
+              <a:spcAft>
+                <a:spcPts val="600"/>
+              </a:spcAft>
+            </a:pPr>
+            <a:r>
               <a:rPr sz="1000" b="0">
                 <a:solidFill>
                   <a:srgbClr val="9AA3B2"/>
                 </a:solidFill>
                 <a:latin typeface="Calibri"/>
               </a:rPr>
-              <a:t>Appendix — reserve for Q&amp;A. Illustrative figures.</a:t>
+              <a:t>22 / 22</a:t>
             </a:r>
           </a:p>
         </p:txBody>
@@ -12562,6 +16903,50 @@
         </p:nvSpPr>
         <p:spPr>
           <a:xfrm>
+            <a:off x="548640" y="2167128"/>
+            <a:ext cx="11091672" cy="12801"/>
+          </a:xfrm>
+          <a:prstGeom prst="rect">
+            <a:avLst/>
+          </a:prstGeom>
+          <a:solidFill>
+            <a:srgbClr val="2C2C3A"/>
+          </a:solidFill>
+          <a:ln>
+            <a:noFill/>
+          </a:ln>
+          <a:effectLst/>
+        </p:spPr>
+        <p:style>
+          <a:lnRef idx="1">
+            <a:schemeClr val="accent1"/>
+          </a:lnRef>
+          <a:fillRef idx="3">
+            <a:schemeClr val="accent1"/>
+          </a:fillRef>
+          <a:effectRef idx="2">
+            <a:schemeClr val="accent1"/>
+          </a:effectRef>
+          <a:fontRef idx="minor">
+            <a:schemeClr val="lt1"/>
+          </a:fontRef>
+        </p:style>
+        <p:txBody>
+          <a:bodyPr rtlCol="0" anchor="ctr"/>
+          <a:lstStyle/>
+          <a:p>
+            <a:pPr algn="ctr"/>
+          </a:p>
+        </p:txBody>
+      </p:sp>
+      <p:sp>
+        <p:nvSpPr>
+          <p:cNvPr id="7" name="Rectangle 6"/>
+          <p:cNvSpPr/>
+          <p:nvPr/>
+        </p:nvSpPr>
+        <p:spPr>
+          <a:xfrm>
             <a:off x="548640" y="2331720"/>
             <a:ext cx="5486400" cy="3931920"/>
           </a:xfrm>
@@ -12602,7 +16987,7 @@
       </p:sp>
       <p:sp>
         <p:nvSpPr>
-          <p:cNvPr id="7" name="TextBox 6"/>
+          <p:cNvPr id="8" name="TextBox 7"/>
           <p:cNvSpPr txBox="1"/>
           <p:nvPr/>
         </p:nvSpPr>
@@ -12725,7 +17110,7 @@
       </p:sp>
       <p:sp>
         <p:nvSpPr>
-          <p:cNvPr id="8" name="Rectangle 7"/>
+          <p:cNvPr id="9" name="Rectangle 8"/>
           <p:cNvSpPr/>
           <p:nvPr/>
         </p:nvSpPr>
@@ -12771,14 +17156,338 @@
       </p:sp>
       <p:sp>
         <p:nvSpPr>
-          <p:cNvPr id="9" name="Rounded Rectangle 8"/>
+          <p:cNvPr id="10" name="TextBox 9"/>
+          <p:cNvSpPr txBox="1"/>
+          <p:nvPr/>
+        </p:nvSpPr>
+        <p:spPr>
+          <a:xfrm>
+            <a:off x="6629400" y="2478024"/>
+            <a:ext cx="4617720" cy="256032"/>
+          </a:xfrm>
+          <a:prstGeom prst="rect">
+            <a:avLst/>
+          </a:prstGeom>
+          <a:noFill/>
+        </p:spPr>
+        <p:txBody>
+          <a:bodyPr wrap="square" anchor="t">
+            <a:spAutoFit/>
+          </a:bodyPr>
+          <a:lstStyle/>
+          <a:p>
+            <a:pPr algn="l">
+              <a:spcAft>
+                <a:spcPts val="600"/>
+              </a:spcAft>
+            </a:pPr>
+            <a:r>
+              <a:rPr sz="1000" b="1">
+                <a:solidFill>
+                  <a:srgbClr val="9AA3B2"/>
+                </a:solidFill>
+                <a:latin typeface="Calibri"/>
+              </a:rPr>
+              <a:t>THE POST-SPLUNK WINDOW</a:t>
+            </a:r>
+          </a:p>
+        </p:txBody>
+      </p:sp>
+      <p:sp>
+        <p:nvSpPr>
+          <p:cNvPr id="11" name="Rectangle 10"/>
           <p:cNvSpPr/>
           <p:nvPr/>
         </p:nvSpPr>
         <p:spPr>
           <a:xfrm>
-            <a:off x="6629400" y="2697479"/>
-            <a:ext cx="4617720" cy="628650"/>
+            <a:off x="6629400" y="3429000"/>
+            <a:ext cx="1154430" cy="640080"/>
+          </a:xfrm>
+          <a:prstGeom prst="rect">
+            <a:avLst/>
+          </a:prstGeom>
+          <a:solidFill>
+            <a:srgbClr val="24243C"/>
+          </a:solidFill>
+          <a:ln w="9525">
+            <a:solidFill>
+              <a:srgbClr val="2C2C3A"/>
+            </a:solidFill>
+          </a:ln>
+          <a:effectLst/>
+        </p:spPr>
+        <p:style>
+          <a:lnRef idx="1">
+            <a:schemeClr val="accent1"/>
+          </a:lnRef>
+          <a:fillRef idx="3">
+            <a:schemeClr val="accent1"/>
+          </a:fillRef>
+          <a:effectRef idx="2">
+            <a:schemeClr val="accent1"/>
+          </a:effectRef>
+          <a:fontRef idx="minor">
+            <a:schemeClr val="lt1"/>
+          </a:fontRef>
+        </p:style>
+        <p:txBody>
+          <a:bodyPr rtlCol="0" anchor="ctr" wrap="square" lIns="45720" rIns="45720" tIns="18288" bIns="18288"/>
+          <a:lstStyle/>
+          <a:p>
+            <a:pPr algn="ctr"/>
+            <a:r>
+              <a:rPr sz="1000" b="0">
+                <a:solidFill>
+                  <a:srgbClr val="9AA3B2"/>
+                </a:solidFill>
+                <a:latin typeface="Calibri"/>
+              </a:rPr>
+              <a:t>Splunk close</a:t>
+            </a:r>
+          </a:p>
+        </p:txBody>
+      </p:sp>
+      <p:sp>
+        <p:nvSpPr>
+          <p:cNvPr id="12" name="Rectangle 11"/>
+          <p:cNvSpPr/>
+          <p:nvPr/>
+        </p:nvSpPr>
+        <p:spPr>
+          <a:xfrm>
+            <a:off x="7783829" y="3429000"/>
+            <a:ext cx="2308860" cy="640080"/>
+          </a:xfrm>
+          <a:prstGeom prst="rect">
+            <a:avLst/>
+          </a:prstGeom>
+          <a:solidFill>
+            <a:srgbClr val="00BCEB"/>
+          </a:solidFill>
+          <a:ln>
+            <a:noFill/>
+          </a:ln>
+          <a:effectLst/>
+        </p:spPr>
+        <p:style>
+          <a:lnRef idx="1">
+            <a:schemeClr val="accent1"/>
+          </a:lnRef>
+          <a:fillRef idx="3">
+            <a:schemeClr val="accent1"/>
+          </a:fillRef>
+          <a:effectRef idx="2">
+            <a:schemeClr val="accent1"/>
+          </a:effectRef>
+          <a:fontRef idx="minor">
+            <a:schemeClr val="lt1"/>
+          </a:fontRef>
+        </p:style>
+        <p:txBody>
+          <a:bodyPr rtlCol="0" anchor="ctr" wrap="square" lIns="45720" rIns="45720" tIns="18288" bIns="18288"/>
+          <a:lstStyle/>
+          <a:p>
+            <a:pPr algn="ctr"/>
+            <a:r>
+              <a:rPr sz="1200" b="1">
+                <a:solidFill>
+                  <a:srgbClr val="101014"/>
+                </a:solidFill>
+                <a:latin typeface="Calibri"/>
+              </a:rPr>
+              <a:t>OPEN WINDOW — NOW</a:t>
+            </a:r>
+          </a:p>
+        </p:txBody>
+      </p:sp>
+      <p:sp>
+        <p:nvSpPr>
+          <p:cNvPr id="13" name="Rectangle 12"/>
+          <p:cNvSpPr/>
+          <p:nvPr/>
+        </p:nvSpPr>
+        <p:spPr>
+          <a:xfrm>
+            <a:off x="10092690" y="3429000"/>
+            <a:ext cx="1154430" cy="640080"/>
+          </a:xfrm>
+          <a:prstGeom prst="rect">
+            <a:avLst/>
+          </a:prstGeom>
+          <a:solidFill>
+            <a:srgbClr val="24243C"/>
+          </a:solidFill>
+          <a:ln w="9525">
+            <a:solidFill>
+              <a:srgbClr val="2C2C3A"/>
+            </a:solidFill>
+          </a:ln>
+          <a:effectLst/>
+        </p:spPr>
+        <p:style>
+          <a:lnRef idx="1">
+            <a:schemeClr val="accent1"/>
+          </a:lnRef>
+          <a:fillRef idx="3">
+            <a:schemeClr val="accent1"/>
+          </a:fillRef>
+          <a:effectRef idx="2">
+            <a:schemeClr val="accent1"/>
+          </a:effectRef>
+          <a:fontRef idx="minor">
+            <a:schemeClr val="lt1"/>
+          </a:fontRef>
+        </p:style>
+        <p:txBody>
+          <a:bodyPr rtlCol="0" anchor="ctr" wrap="square" lIns="45720" rIns="45720" tIns="18288" bIns="18288"/>
+          <a:lstStyle/>
+          <a:p>
+            <a:pPr algn="ctr"/>
+            <a:r>
+              <a:rPr sz="1000" b="0">
+                <a:solidFill>
+                  <a:srgbClr val="9AA3B2"/>
+                </a:solidFill>
+                <a:latin typeface="Calibri"/>
+              </a:rPr>
+              <a:t>Commoditized</a:t>
+            </a:r>
+          </a:p>
+        </p:txBody>
+      </p:sp>
+      <p:sp>
+        <p:nvSpPr>
+          <p:cNvPr id="14" name="TextBox 13"/>
+          <p:cNvSpPr txBox="1"/>
+          <p:nvPr/>
+        </p:nvSpPr>
+        <p:spPr>
+          <a:xfrm>
+            <a:off x="7749540" y="2679192"/>
+            <a:ext cx="2377440" cy="274320"/>
+          </a:xfrm>
+          <a:prstGeom prst="rect">
+            <a:avLst/>
+          </a:prstGeom>
+          <a:noFill/>
+        </p:spPr>
+        <p:txBody>
+          <a:bodyPr wrap="square" anchor="t">
+            <a:spAutoFit/>
+          </a:bodyPr>
+          <a:lstStyle/>
+          <a:p>
+            <a:pPr algn="ctr">
+              <a:spcAft>
+                <a:spcPts val="600"/>
+              </a:spcAft>
+            </a:pPr>
+            <a:r>
+              <a:rPr sz="1100" b="1">
+                <a:solidFill>
+                  <a:srgbClr val="00BCEB"/>
+                </a:solidFill>
+                <a:latin typeface="Calibri"/>
+              </a:rPr>
+              <a:t>First-mover advantage</a:t>
+            </a:r>
+          </a:p>
+        </p:txBody>
+      </p:sp>
+      <p:sp>
+        <p:nvSpPr>
+          <p:cNvPr id="15" name="Down Arrow 14"/>
+          <p:cNvSpPr/>
+          <p:nvPr/>
+        </p:nvSpPr>
+        <p:spPr>
+          <a:xfrm>
+            <a:off x="8801100" y="3026664"/>
+            <a:ext cx="274320" cy="365760"/>
+          </a:xfrm>
+          <a:prstGeom prst="downArrow">
+            <a:avLst/>
+          </a:prstGeom>
+          <a:solidFill>
+            <a:srgbClr val="00BCEB"/>
+          </a:solidFill>
+          <a:ln>
+            <a:noFill/>
+          </a:ln>
+          <a:effectLst/>
+        </p:spPr>
+        <p:style>
+          <a:lnRef idx="1">
+            <a:schemeClr val="accent1"/>
+          </a:lnRef>
+          <a:fillRef idx="3">
+            <a:schemeClr val="accent1"/>
+          </a:fillRef>
+          <a:effectRef idx="2">
+            <a:schemeClr val="accent1"/>
+          </a:effectRef>
+          <a:fontRef idx="minor">
+            <a:schemeClr val="lt1"/>
+          </a:fontRef>
+        </p:style>
+        <p:txBody>
+          <a:bodyPr rtlCol="0" anchor="ctr"/>
+          <a:lstStyle/>
+          <a:p>
+            <a:pPr algn="ctr"/>
+          </a:p>
+        </p:txBody>
+      </p:sp>
+      <p:sp>
+        <p:nvSpPr>
+          <p:cNvPr id="16" name="TextBox 15"/>
+          <p:cNvSpPr txBox="1"/>
+          <p:nvPr/>
+        </p:nvSpPr>
+        <p:spPr>
+          <a:xfrm>
+            <a:off x="6629400" y="4215384"/>
+            <a:ext cx="4617720" cy="256032"/>
+          </a:xfrm>
+          <a:prstGeom prst="rect">
+            <a:avLst/>
+          </a:prstGeom>
+          <a:noFill/>
+        </p:spPr>
+        <p:txBody>
+          <a:bodyPr wrap="square" anchor="t">
+            <a:spAutoFit/>
+          </a:bodyPr>
+          <a:lstStyle/>
+          <a:p>
+            <a:pPr algn="l">
+              <a:spcAft>
+                <a:spcPts val="600"/>
+              </a:spcAft>
+            </a:pPr>
+            <a:r>
+              <a:rPr sz="1000" b="1">
+                <a:solidFill>
+                  <a:srgbClr val="9AA3B2"/>
+                </a:solidFill>
+                <a:latin typeface="Calibri"/>
+              </a:rPr>
+              <a:t>FORCES PULLING IT FORWARD</a:t>
+            </a:r>
+          </a:p>
+        </p:txBody>
+      </p:sp>
+      <p:sp>
+        <p:nvSpPr>
+          <p:cNvPr id="17" name="Rounded Rectangle 16"/>
+          <p:cNvSpPr/>
+          <p:nvPr/>
+        </p:nvSpPr>
+        <p:spPr>
+          <a:xfrm>
+            <a:off x="6629400" y="4489704"/>
+            <a:ext cx="1017269" cy="566928"/>
           </a:xfrm>
           <a:prstGeom prst="roundRect">
             <a:avLst/>
@@ -12813,27 +17522,27 @@
           <a:p>
             <a:pPr algn="ctr"/>
             <a:r>
-              <a:rPr sz="1300" b="0">
+              <a:rPr sz="1100" b="0">
                 <a:solidFill>
                   <a:srgbClr val="F2F4F8"/>
                 </a:solidFill>
                 <a:latin typeface="Calibri"/>
               </a:rPr>
-              <a:t>Portfolio complete: edge → SOC</a:t>
-            </a:r>
-          </a:p>
-        </p:txBody>
-      </p:sp>
-      <p:sp>
-        <p:nvSpPr>
-          <p:cNvPr id="10" name="Rounded Rectangle 9"/>
+              <a:t>Portfolio</a:t>
+            </a:r>
+          </a:p>
+        </p:txBody>
+      </p:sp>
+      <p:sp>
+        <p:nvSpPr>
+          <p:cNvPr id="18" name="Rounded Rectangle 17"/>
           <p:cNvSpPr/>
           <p:nvPr/>
         </p:nvSpPr>
         <p:spPr>
           <a:xfrm>
-            <a:off x="6629400" y="3554729"/>
-            <a:ext cx="4617720" cy="628650"/>
+            <a:off x="7829550" y="4489704"/>
+            <a:ext cx="1017269" cy="566928"/>
           </a:xfrm>
           <a:prstGeom prst="roundRect">
             <a:avLst/>
@@ -12868,27 +17577,27 @@
           <a:p>
             <a:pPr algn="ctr"/>
             <a:r>
-              <a:rPr sz="1300" b="0">
+              <a:rPr sz="1100" b="0">
                 <a:solidFill>
                   <a:srgbClr val="F2F4F8"/>
                 </a:solidFill>
                 <a:latin typeface="Calibri"/>
               </a:rPr>
-              <a:t>Integrations: XDR+ES, TE+AppD, Cyber Vision+OT</a:t>
-            </a:r>
-          </a:p>
-        </p:txBody>
-      </p:sp>
-      <p:sp>
-        <p:nvSpPr>
-          <p:cNvPr id="11" name="Rounded Rectangle 10"/>
+              <a:t>Integrations</a:t>
+            </a:r>
+          </a:p>
+        </p:txBody>
+      </p:sp>
+      <p:sp>
+        <p:nvSpPr>
+          <p:cNvPr id="19" name="Rounded Rectangle 18"/>
           <p:cNvSpPr/>
           <p:nvPr/>
         </p:nvSpPr>
         <p:spPr>
           <a:xfrm>
-            <a:off x="6629400" y="4411979"/>
-            <a:ext cx="4617720" cy="628650"/>
+            <a:off x="9029700" y="4489704"/>
+            <a:ext cx="1017269" cy="566928"/>
           </a:xfrm>
           <a:prstGeom prst="roundRect">
             <a:avLst/>
@@ -12923,27 +17632,27 @@
           <a:p>
             <a:pPr algn="ctr"/>
             <a:r>
-              <a:rPr sz="1300" b="0">
+              <a:rPr sz="1100" b="0">
                 <a:solidFill>
                   <a:srgbClr val="F2F4F8"/>
                 </a:solidFill>
                 <a:latin typeface="Calibri"/>
               </a:rPr>
-              <a:t>Vendor consolidation → C-suite frame</a:t>
-            </a:r>
-          </a:p>
-        </p:txBody>
-      </p:sp>
-      <p:sp>
-        <p:nvSpPr>
-          <p:cNvPr id="12" name="Rounded Rectangle 11"/>
+              <a:t>Consolidate</a:t>
+            </a:r>
+          </a:p>
+        </p:txBody>
+      </p:sp>
+      <p:sp>
+        <p:nvSpPr>
+          <p:cNvPr id="20" name="Rounded Rectangle 19"/>
           <p:cNvSpPr/>
           <p:nvPr/>
         </p:nvSpPr>
         <p:spPr>
           <a:xfrm>
-            <a:off x="6629400" y="5269229"/>
-            <a:ext cx="4617720" cy="628650"/>
+            <a:off x="10229850" y="4489704"/>
+            <a:ext cx="1017269" cy="566928"/>
           </a:xfrm>
           <a:prstGeom prst="roundRect">
             <a:avLst/>
@@ -12978,27 +17687,71 @@
           <a:p>
             <a:pPr algn="ctr"/>
             <a:r>
-              <a:rPr sz="1300" b="0">
+              <a:rPr sz="1100" b="0">
                 <a:solidFill>
                   <a:srgbClr val="F2F4F8"/>
                 </a:solidFill>
                 <a:latin typeface="Calibri"/>
               </a:rPr>
-              <a:t>AI build-outs pull all pillars forward</a:t>
-            </a:r>
-          </a:p>
-        </p:txBody>
-      </p:sp>
-      <p:sp>
-        <p:nvSpPr>
-          <p:cNvPr id="13" name="TextBox 12"/>
+              <a:t>AI build-outs</a:t>
+            </a:r>
+          </a:p>
+        </p:txBody>
+      </p:sp>
+      <p:sp>
+        <p:nvSpPr>
+          <p:cNvPr id="21" name="Rectangle 20"/>
+          <p:cNvSpPr/>
+          <p:nvPr/>
+        </p:nvSpPr>
+        <p:spPr>
+          <a:xfrm>
+            <a:off x="548640" y="6364224"/>
+            <a:ext cx="11091672" cy="10972"/>
+          </a:xfrm>
+          <a:prstGeom prst="rect">
+            <a:avLst/>
+          </a:prstGeom>
+          <a:solidFill>
+            <a:srgbClr val="2C2C3A"/>
+          </a:solidFill>
+          <a:ln>
+            <a:noFill/>
+          </a:ln>
+          <a:effectLst/>
+        </p:spPr>
+        <p:style>
+          <a:lnRef idx="1">
+            <a:schemeClr val="accent1"/>
+          </a:lnRef>
+          <a:fillRef idx="3">
+            <a:schemeClr val="accent1"/>
+          </a:fillRef>
+          <a:effectRef idx="2">
+            <a:schemeClr val="accent1"/>
+          </a:effectRef>
+          <a:fontRef idx="minor">
+            <a:schemeClr val="lt1"/>
+          </a:fontRef>
+        </p:style>
+        <p:txBody>
+          <a:bodyPr rtlCol="0" anchor="ctr"/>
+          <a:lstStyle/>
+          <a:p>
+            <a:pPr algn="ctr"/>
+          </a:p>
+        </p:txBody>
+      </p:sp>
+      <p:sp>
+        <p:nvSpPr>
+          <p:cNvPr id="22" name="TextBox 21"/>
           <p:cNvSpPr txBox="1"/>
           <p:nvPr/>
         </p:nvSpPr>
         <p:spPr>
           <a:xfrm>
-            <a:off x="548640" y="6419088"/>
-            <a:ext cx="11064240" cy="320040"/>
+            <a:off x="548640" y="6428232"/>
+            <a:ext cx="9692640" cy="292608"/>
           </a:xfrm>
           <a:prstGeom prst="rect">
             <a:avLst/>
@@ -13017,13 +17770,61 @@
               </a:spcAft>
             </a:pPr>
             <a:r>
+              <a:rPr sz="900" b="1">
+                <a:solidFill>
+                  <a:srgbClr val="9AA3B2"/>
+                </a:solidFill>
+                <a:latin typeface="Calibri"/>
+              </a:rPr>
+              <a:t>FIELD CTO · X-ARCH SELLING</a:t>
+            </a:r>
+            <a:r>
+              <a:rPr sz="900" b="0">
+                <a:solidFill>
+                  <a:srgbClr val="9AA3B2"/>
+                </a:solidFill>
+                <a:latin typeface="Calibri"/>
+              </a:rPr>
+              <a:t>      Illustrative figures — replace with actuals before presenting.</a:t>
+            </a:r>
+          </a:p>
+        </p:txBody>
+      </p:sp>
+      <p:sp>
+        <p:nvSpPr>
+          <p:cNvPr id="23" name="TextBox 22"/>
+          <p:cNvSpPr txBox="1"/>
+          <p:nvPr/>
+        </p:nvSpPr>
+        <p:spPr>
+          <a:xfrm>
+            <a:off x="10515600" y="6428232"/>
+            <a:ext cx="1124712" cy="274320"/>
+          </a:xfrm>
+          <a:prstGeom prst="rect">
+            <a:avLst/>
+          </a:prstGeom>
+          <a:noFill/>
+        </p:spPr>
+        <p:txBody>
+          <a:bodyPr wrap="square" anchor="t">
+            <a:spAutoFit/>
+          </a:bodyPr>
+          <a:lstStyle/>
+          <a:p>
+            <a:pPr algn="r">
+              <a:spcAft>
+                <a:spcPts val="600"/>
+              </a:spcAft>
+            </a:pPr>
+            <a:r>
               <a:rPr sz="1000" b="0">
                 <a:solidFill>
                   <a:srgbClr val="9AA3B2"/>
                 </a:solidFill>
                 <a:latin typeface="Calibri"/>
               </a:rPr>
-              <a:t>Illustrative figures — replace with actuals before presenting.</a:t>
+              <a:t>3 / 22</a:t>
             </a:r>
           </a:p>
         </p:txBody>
@@ -13220,6 +18021,50 @@
         </p:nvSpPr>
         <p:spPr>
           <a:xfrm>
+            <a:off x="548640" y="2167128"/>
+            <a:ext cx="11091672" cy="12801"/>
+          </a:xfrm>
+          <a:prstGeom prst="rect">
+            <a:avLst/>
+          </a:prstGeom>
+          <a:solidFill>
+            <a:srgbClr val="2C2C3A"/>
+          </a:solidFill>
+          <a:ln>
+            <a:noFill/>
+          </a:ln>
+          <a:effectLst/>
+        </p:spPr>
+        <p:style>
+          <a:lnRef idx="1">
+            <a:schemeClr val="accent1"/>
+          </a:lnRef>
+          <a:fillRef idx="3">
+            <a:schemeClr val="accent1"/>
+          </a:fillRef>
+          <a:effectRef idx="2">
+            <a:schemeClr val="accent1"/>
+          </a:effectRef>
+          <a:fontRef idx="minor">
+            <a:schemeClr val="lt1"/>
+          </a:fontRef>
+        </p:style>
+        <p:txBody>
+          <a:bodyPr rtlCol="0" anchor="ctr"/>
+          <a:lstStyle/>
+          <a:p>
+            <a:pPr algn="ctr"/>
+          </a:p>
+        </p:txBody>
+      </p:sp>
+      <p:sp>
+        <p:nvSpPr>
+          <p:cNvPr id="7" name="Rectangle 6"/>
+          <p:cNvSpPr/>
+          <p:nvPr/>
+        </p:nvSpPr>
+        <p:spPr>
+          <a:xfrm>
             <a:off x="548640" y="2331720"/>
             <a:ext cx="5486400" cy="3931920"/>
           </a:xfrm>
@@ -13260,7 +18105,7 @@
       </p:sp>
       <p:sp>
         <p:nvSpPr>
-          <p:cNvPr id="7" name="TextBox 6"/>
+          <p:cNvPr id="8" name="TextBox 7"/>
           <p:cNvSpPr txBox="1"/>
           <p:nvPr/>
         </p:nvSpPr>
@@ -13383,7 +18228,7 @@
       </p:sp>
       <p:sp>
         <p:nvSpPr>
-          <p:cNvPr id="8" name="Rectangle 7"/>
+          <p:cNvPr id="9" name="Rectangle 8"/>
           <p:cNvSpPr/>
           <p:nvPr/>
         </p:nvSpPr>
@@ -13429,7 +18274,7 @@
       </p:sp>
       <p:sp>
         <p:nvSpPr>
-          <p:cNvPr id="9" name="Rounded Rectangle 8"/>
+          <p:cNvPr id="10" name="Rounded Rectangle 9"/>
           <p:cNvSpPr/>
           <p:nvPr/>
         </p:nvSpPr>
@@ -13482,7 +18327,7 @@
       </p:sp>
       <p:sp>
         <p:nvSpPr>
-          <p:cNvPr id="10" name="Down Arrow 9"/>
+          <p:cNvPr id="11" name="Down Arrow 10"/>
           <p:cNvSpPr/>
           <p:nvPr/>
         </p:nvSpPr>
@@ -13526,7 +18371,7 @@
       </p:sp>
       <p:sp>
         <p:nvSpPr>
-          <p:cNvPr id="11" name="Rounded Rectangle 10"/>
+          <p:cNvPr id="12" name="Rounded Rectangle 11"/>
           <p:cNvSpPr/>
           <p:nvPr/>
         </p:nvSpPr>
@@ -13579,7 +18424,7 @@
       </p:sp>
       <p:sp>
         <p:nvSpPr>
-          <p:cNvPr id="12" name="Down Arrow 11"/>
+          <p:cNvPr id="13" name="Down Arrow 12"/>
           <p:cNvSpPr/>
           <p:nvPr/>
         </p:nvSpPr>
@@ -13623,7 +18468,7 @@
       </p:sp>
       <p:sp>
         <p:nvSpPr>
-          <p:cNvPr id="13" name="Rounded Rectangle 12"/>
+          <p:cNvPr id="14" name="Rounded Rectangle 13"/>
           <p:cNvSpPr/>
           <p:nvPr/>
         </p:nvSpPr>
@@ -13676,7 +18521,7 @@
       </p:sp>
       <p:sp>
         <p:nvSpPr>
-          <p:cNvPr id="14" name="Down Arrow 13"/>
+          <p:cNvPr id="15" name="Down Arrow 14"/>
           <p:cNvSpPr/>
           <p:nvPr/>
         </p:nvSpPr>
@@ -13720,7 +18565,7 @@
       </p:sp>
       <p:sp>
         <p:nvSpPr>
-          <p:cNvPr id="15" name="Rounded Rectangle 14"/>
+          <p:cNvPr id="16" name="Rounded Rectangle 15"/>
           <p:cNvSpPr/>
           <p:nvPr/>
         </p:nvSpPr>
@@ -13773,7 +18618,7 @@
       </p:sp>
       <p:sp>
         <p:nvSpPr>
-          <p:cNvPr id="16" name="Down Arrow 15"/>
+          <p:cNvPr id="17" name="Down Arrow 16"/>
           <p:cNvSpPr/>
           <p:nvPr/>
         </p:nvSpPr>
@@ -13817,7 +18662,7 @@
       </p:sp>
       <p:sp>
         <p:nvSpPr>
-          <p:cNvPr id="17" name="Rounded Rectangle 16"/>
+          <p:cNvPr id="18" name="Rounded Rectangle 17"/>
           <p:cNvSpPr/>
           <p:nvPr/>
         </p:nvSpPr>
@@ -13870,14 +18715,58 @@
       </p:sp>
       <p:sp>
         <p:nvSpPr>
-          <p:cNvPr id="18" name="TextBox 17"/>
+          <p:cNvPr id="19" name="Rectangle 18"/>
+          <p:cNvSpPr/>
+          <p:nvPr/>
+        </p:nvSpPr>
+        <p:spPr>
+          <a:xfrm>
+            <a:off x="548640" y="6364224"/>
+            <a:ext cx="11091672" cy="10972"/>
+          </a:xfrm>
+          <a:prstGeom prst="rect">
+            <a:avLst/>
+          </a:prstGeom>
+          <a:solidFill>
+            <a:srgbClr val="2C2C3A"/>
+          </a:solidFill>
+          <a:ln>
+            <a:noFill/>
+          </a:ln>
+          <a:effectLst/>
+        </p:spPr>
+        <p:style>
+          <a:lnRef idx="1">
+            <a:schemeClr val="accent1"/>
+          </a:lnRef>
+          <a:fillRef idx="3">
+            <a:schemeClr val="accent1"/>
+          </a:fillRef>
+          <a:effectRef idx="2">
+            <a:schemeClr val="accent1"/>
+          </a:effectRef>
+          <a:fontRef idx="minor">
+            <a:schemeClr val="lt1"/>
+          </a:fontRef>
+        </p:style>
+        <p:txBody>
+          <a:bodyPr rtlCol="0" anchor="ctr"/>
+          <a:lstStyle/>
+          <a:p>
+            <a:pPr algn="ctr"/>
+          </a:p>
+        </p:txBody>
+      </p:sp>
+      <p:sp>
+        <p:nvSpPr>
+          <p:cNvPr id="20" name="TextBox 19"/>
           <p:cNvSpPr txBox="1"/>
           <p:nvPr/>
         </p:nvSpPr>
         <p:spPr>
           <a:xfrm>
-            <a:off x="548640" y="6419088"/>
-            <a:ext cx="11064240" cy="320040"/>
+            <a:off x="548640" y="6428232"/>
+            <a:ext cx="9692640" cy="292608"/>
           </a:xfrm>
           <a:prstGeom prst="rect">
             <a:avLst/>
@@ -13896,13 +18785,61 @@
               </a:spcAft>
             </a:pPr>
             <a:r>
+              <a:rPr sz="900" b="1">
+                <a:solidFill>
+                  <a:srgbClr val="9AA3B2"/>
+                </a:solidFill>
+                <a:latin typeface="Calibri"/>
+              </a:rPr>
+              <a:t>FIELD CTO · X-ARCH SELLING</a:t>
+            </a:r>
+            <a:r>
+              <a:rPr sz="900" b="0">
+                <a:solidFill>
+                  <a:srgbClr val="9AA3B2"/>
+                </a:solidFill>
+                <a:latin typeface="Calibri"/>
+              </a:rPr>
+              <a:t>      Illustrative figures — replace with actuals before presenting.</a:t>
+            </a:r>
+          </a:p>
+        </p:txBody>
+      </p:sp>
+      <p:sp>
+        <p:nvSpPr>
+          <p:cNvPr id="21" name="TextBox 20"/>
+          <p:cNvSpPr txBox="1"/>
+          <p:nvPr/>
+        </p:nvSpPr>
+        <p:spPr>
+          <a:xfrm>
+            <a:off x="10515600" y="6428232"/>
+            <a:ext cx="1124712" cy="274320"/>
+          </a:xfrm>
+          <a:prstGeom prst="rect">
+            <a:avLst/>
+          </a:prstGeom>
+          <a:noFill/>
+        </p:spPr>
+        <p:txBody>
+          <a:bodyPr wrap="square" anchor="t">
+            <a:spAutoFit/>
+          </a:bodyPr>
+          <a:lstStyle/>
+          <a:p>
+            <a:pPr algn="r">
+              <a:spcAft>
+                <a:spcPts val="600"/>
+              </a:spcAft>
+            </a:pPr>
+            <a:r>
               <a:rPr sz="1000" b="0">
                 <a:solidFill>
                   <a:srgbClr val="9AA3B2"/>
                 </a:solidFill>
                 <a:latin typeface="Calibri"/>
               </a:rPr>
-              <a:t>Illustrative figures — replace with actuals before presenting.</a:t>
+              <a:t>4 / 22</a:t>
             </a:r>
           </a:p>
         </p:txBody>
@@ -14099,6 +19036,50 @@
         </p:nvSpPr>
         <p:spPr>
           <a:xfrm>
+            <a:off x="548640" y="2167128"/>
+            <a:ext cx="11091672" cy="12801"/>
+          </a:xfrm>
+          <a:prstGeom prst="rect">
+            <a:avLst/>
+          </a:prstGeom>
+          <a:solidFill>
+            <a:srgbClr val="2C2C3A"/>
+          </a:solidFill>
+          <a:ln>
+            <a:noFill/>
+          </a:ln>
+          <a:effectLst/>
+        </p:spPr>
+        <p:style>
+          <a:lnRef idx="1">
+            <a:schemeClr val="accent1"/>
+          </a:lnRef>
+          <a:fillRef idx="3">
+            <a:schemeClr val="accent1"/>
+          </a:fillRef>
+          <a:effectRef idx="2">
+            <a:schemeClr val="accent1"/>
+          </a:effectRef>
+          <a:fontRef idx="minor">
+            <a:schemeClr val="lt1"/>
+          </a:fontRef>
+        </p:style>
+        <p:txBody>
+          <a:bodyPr rtlCol="0" anchor="ctr"/>
+          <a:lstStyle/>
+          <a:p>
+            <a:pPr algn="ctr"/>
+          </a:p>
+        </p:txBody>
+      </p:sp>
+      <p:sp>
+        <p:nvSpPr>
+          <p:cNvPr id="7" name="Rectangle 6"/>
+          <p:cNvSpPr/>
+          <p:nvPr/>
+        </p:nvSpPr>
+        <p:spPr>
+          <a:xfrm>
             <a:off x="548640" y="2331720"/>
             <a:ext cx="5486400" cy="3931920"/>
           </a:xfrm>
@@ -14139,7 +19120,7 @@
       </p:sp>
       <p:sp>
         <p:nvSpPr>
-          <p:cNvPr id="7" name="TextBox 6"/>
+          <p:cNvPr id="8" name="TextBox 7"/>
           <p:cNvSpPr txBox="1"/>
           <p:nvPr/>
         </p:nvSpPr>
@@ -14262,7 +19243,7 @@
       </p:sp>
       <p:sp>
         <p:nvSpPr>
-          <p:cNvPr id="8" name="Rectangle 7"/>
+          <p:cNvPr id="9" name="Rectangle 8"/>
           <p:cNvSpPr/>
           <p:nvPr/>
         </p:nvSpPr>
@@ -14308,7 +19289,7 @@
       </p:sp>
       <p:cxnSp>
         <p:nvCxnSpPr>
-          <p:cNvPr id="9" name="Connector 8"/>
+          <p:cNvPr id="10" name="Connector 9"/>
           <p:cNvCxnSpPr/>
           <p:nvPr/>
         </p:nvCxnSpPr>
@@ -14316,42 +19297,6 @@
           <a:xfrm flipV="1">
             <a:off x="8938259" y="2971799"/>
             <a:ext cx="0" cy="1325880"/>
-          </a:xfrm>
-          <a:prstGeom prst="line">
-            <a:avLst/>
-          </a:prstGeom>
-          <a:ln w="15875">
-            <a:solidFill>
-              <a:srgbClr val="00A4FD"/>
-            </a:solidFill>
-          </a:ln>
-          <a:effectLst/>
-        </p:spPr>
-        <p:style>
-          <a:lnRef idx="2">
-            <a:schemeClr val="accent1"/>
-          </a:lnRef>
-          <a:fillRef idx="0">
-            <a:schemeClr val="accent1"/>
-          </a:fillRef>
-          <a:effectRef idx="1">
-            <a:schemeClr val="accent1"/>
-          </a:effectRef>
-          <a:fontRef idx="minor">
-            <a:schemeClr val="tx1"/>
-          </a:fontRef>
-        </p:style>
-      </p:cxnSp>
-      <p:cxnSp>
-        <p:nvCxnSpPr>
-          <p:cNvPr id="10" name="Connector 9"/>
-          <p:cNvCxnSpPr/>
-          <p:nvPr/>
-        </p:nvCxnSpPr>
-        <p:spPr>
-          <a:xfrm flipV="1">
-            <a:off x="8938259" y="3887960"/>
-            <a:ext cx="1695810" cy="409719"/>
           </a:xfrm>
           <a:prstGeom prst="line">
             <a:avLst/>
@@ -14385,9 +19330,9 @@
           <p:nvPr/>
         </p:nvCxnSpPr>
         <p:spPr>
-          <a:xfrm>
-            <a:off x="8938259" y="4297679"/>
-            <a:ext cx="1048069" cy="1072660"/>
+          <a:xfrm flipV="1">
+            <a:off x="8938259" y="3887960"/>
+            <a:ext cx="1695810" cy="409719"/>
           </a:xfrm>
           <a:prstGeom prst="line">
             <a:avLst/>
@@ -14421,9 +19366,9 @@
           <p:nvPr/>
         </p:nvCxnSpPr>
         <p:spPr>
-          <a:xfrm flipH="1">
-            <a:off x="7890191" y="4297679"/>
-            <a:ext cx="1048068" cy="1072660"/>
+          <a:xfrm>
+            <a:off x="8938259" y="4297679"/>
+            <a:ext cx="1048069" cy="1072660"/>
           </a:xfrm>
           <a:prstGeom prst="line">
             <a:avLst/>
@@ -14457,9 +19402,9 @@
           <p:nvPr/>
         </p:nvCxnSpPr>
         <p:spPr>
-          <a:xfrm flipH="1" flipV="1">
-            <a:off x="7242450" y="3887960"/>
-            <a:ext cx="1695809" cy="409719"/>
+          <a:xfrm flipH="1">
+            <a:off x="7890191" y="4297679"/>
+            <a:ext cx="1048068" cy="1072660"/>
           </a:xfrm>
           <a:prstGeom prst="line">
             <a:avLst/>
@@ -14486,9 +19431,45 @@
           </a:fontRef>
         </p:style>
       </p:cxnSp>
-      <p:sp>
-        <p:nvSpPr>
-          <p:cNvPr id="14" name="Rounded Rectangle 13"/>
+      <p:cxnSp>
+        <p:nvCxnSpPr>
+          <p:cNvPr id="14" name="Connector 13"/>
+          <p:cNvCxnSpPr/>
+          <p:nvPr/>
+        </p:nvCxnSpPr>
+        <p:spPr>
+          <a:xfrm flipH="1" flipV="1">
+            <a:off x="7242450" y="3887960"/>
+            <a:ext cx="1695809" cy="409719"/>
+          </a:xfrm>
+          <a:prstGeom prst="line">
+            <a:avLst/>
+          </a:prstGeom>
+          <a:ln w="15875">
+            <a:solidFill>
+              <a:srgbClr val="00A4FD"/>
+            </a:solidFill>
+          </a:ln>
+          <a:effectLst/>
+        </p:spPr>
+        <p:style>
+          <a:lnRef idx="2">
+            <a:schemeClr val="accent1"/>
+          </a:lnRef>
+          <a:fillRef idx="0">
+            <a:schemeClr val="accent1"/>
+          </a:fillRef>
+          <a:effectRef idx="1">
+            <a:schemeClr val="accent1"/>
+          </a:effectRef>
+          <a:fontRef idx="minor">
+            <a:schemeClr val="tx1"/>
+          </a:fontRef>
+        </p:style>
+      </p:cxnSp>
+      <p:sp>
+        <p:nvSpPr>
+          <p:cNvPr id="15" name="Rounded Rectangle 14"/>
           <p:cNvSpPr/>
           <p:nvPr/>
         </p:nvSpPr>
@@ -14543,7 +19524,7 @@
       </p:sp>
       <p:sp>
         <p:nvSpPr>
-          <p:cNvPr id="15" name="Rounded Rectangle 14"/>
+          <p:cNvPr id="16" name="Rounded Rectangle 15"/>
           <p:cNvSpPr/>
           <p:nvPr/>
         </p:nvSpPr>
@@ -14598,7 +19579,7 @@
       </p:sp>
       <p:sp>
         <p:nvSpPr>
-          <p:cNvPr id="16" name="Rounded Rectangle 15"/>
+          <p:cNvPr id="17" name="Rounded Rectangle 16"/>
           <p:cNvSpPr/>
           <p:nvPr/>
         </p:nvSpPr>
@@ -14653,7 +19634,7 @@
       </p:sp>
       <p:sp>
         <p:nvSpPr>
-          <p:cNvPr id="17" name="Rounded Rectangle 16"/>
+          <p:cNvPr id="18" name="Rounded Rectangle 17"/>
           <p:cNvSpPr/>
           <p:nvPr/>
         </p:nvSpPr>
@@ -14708,7 +19689,7 @@
       </p:sp>
       <p:sp>
         <p:nvSpPr>
-          <p:cNvPr id="18" name="Rounded Rectangle 17"/>
+          <p:cNvPr id="19" name="Rounded Rectangle 18"/>
           <p:cNvSpPr/>
           <p:nvPr/>
         </p:nvSpPr>
@@ -14763,7 +19744,7 @@
       </p:sp>
       <p:sp>
         <p:nvSpPr>
-          <p:cNvPr id="19" name="Oval 18"/>
+          <p:cNvPr id="20" name="Oval 19"/>
           <p:cNvSpPr/>
           <p:nvPr/>
         </p:nvSpPr>
@@ -14816,14 +19797,58 @@
       </p:sp>
       <p:sp>
         <p:nvSpPr>
-          <p:cNvPr id="20" name="TextBox 19"/>
+          <p:cNvPr id="21" name="Rectangle 20"/>
+          <p:cNvSpPr/>
+          <p:nvPr/>
+        </p:nvSpPr>
+        <p:spPr>
+          <a:xfrm>
+            <a:off x="548640" y="6364224"/>
+            <a:ext cx="11091672" cy="10972"/>
+          </a:xfrm>
+          <a:prstGeom prst="rect">
+            <a:avLst/>
+          </a:prstGeom>
+          <a:solidFill>
+            <a:srgbClr val="2C2C3A"/>
+          </a:solidFill>
+          <a:ln>
+            <a:noFill/>
+          </a:ln>
+          <a:effectLst/>
+        </p:spPr>
+        <p:style>
+          <a:lnRef idx="1">
+            <a:schemeClr val="accent1"/>
+          </a:lnRef>
+          <a:fillRef idx="3">
+            <a:schemeClr val="accent1"/>
+          </a:fillRef>
+          <a:effectRef idx="2">
+            <a:schemeClr val="accent1"/>
+          </a:effectRef>
+          <a:fontRef idx="minor">
+            <a:schemeClr val="lt1"/>
+          </a:fontRef>
+        </p:style>
+        <p:txBody>
+          <a:bodyPr rtlCol="0" anchor="ctr"/>
+          <a:lstStyle/>
+          <a:p>
+            <a:pPr algn="ctr"/>
+          </a:p>
+        </p:txBody>
+      </p:sp>
+      <p:sp>
+        <p:nvSpPr>
+          <p:cNvPr id="22" name="TextBox 21"/>
           <p:cNvSpPr txBox="1"/>
           <p:nvPr/>
         </p:nvSpPr>
         <p:spPr>
           <a:xfrm>
-            <a:off x="548640" y="6419088"/>
-            <a:ext cx="11064240" cy="320040"/>
+            <a:off x="548640" y="6428232"/>
+            <a:ext cx="9692640" cy="292608"/>
           </a:xfrm>
           <a:prstGeom prst="rect">
             <a:avLst/>
@@ -14842,13 +19867,61 @@
               </a:spcAft>
             </a:pPr>
             <a:r>
+              <a:rPr sz="900" b="1">
+                <a:solidFill>
+                  <a:srgbClr val="9AA3B2"/>
+                </a:solidFill>
+                <a:latin typeface="Calibri"/>
+              </a:rPr>
+              <a:t>FIELD CTO · X-ARCH SELLING</a:t>
+            </a:r>
+            <a:r>
+              <a:rPr sz="900" b="0">
+                <a:solidFill>
+                  <a:srgbClr val="9AA3B2"/>
+                </a:solidFill>
+                <a:latin typeface="Calibri"/>
+              </a:rPr>
+              <a:t>      Illustrative figures — replace with actuals before presenting.</a:t>
+            </a:r>
+          </a:p>
+        </p:txBody>
+      </p:sp>
+      <p:sp>
+        <p:nvSpPr>
+          <p:cNvPr id="23" name="TextBox 22"/>
+          <p:cNvSpPr txBox="1"/>
+          <p:nvPr/>
+        </p:nvSpPr>
+        <p:spPr>
+          <a:xfrm>
+            <a:off x="10515600" y="6428232"/>
+            <a:ext cx="1124712" cy="274320"/>
+          </a:xfrm>
+          <a:prstGeom prst="rect">
+            <a:avLst/>
+          </a:prstGeom>
+          <a:noFill/>
+        </p:spPr>
+        <p:txBody>
+          <a:bodyPr wrap="square" anchor="t">
+            <a:spAutoFit/>
+          </a:bodyPr>
+          <a:lstStyle/>
+          <a:p>
+            <a:pPr algn="r">
+              <a:spcAft>
+                <a:spcPts val="600"/>
+              </a:spcAft>
+            </a:pPr>
+            <a:r>
               <a:rPr sz="1000" b="0">
                 <a:solidFill>
                   <a:srgbClr val="9AA3B2"/>
                 </a:solidFill>
                 <a:latin typeface="Calibri"/>
               </a:rPr>
-              <a:t>Illustrative figures — replace with actuals before presenting.</a:t>
+              <a:t>5 / 22</a:t>
             </a:r>
           </a:p>
         </p:txBody>
@@ -15045,6 +20118,50 @@
         </p:nvSpPr>
         <p:spPr>
           <a:xfrm>
+            <a:off x="548640" y="2167128"/>
+            <a:ext cx="11091672" cy="12801"/>
+          </a:xfrm>
+          <a:prstGeom prst="rect">
+            <a:avLst/>
+          </a:prstGeom>
+          <a:solidFill>
+            <a:srgbClr val="2C2C3A"/>
+          </a:solidFill>
+          <a:ln>
+            <a:noFill/>
+          </a:ln>
+          <a:effectLst/>
+        </p:spPr>
+        <p:style>
+          <a:lnRef idx="1">
+            <a:schemeClr val="accent1"/>
+          </a:lnRef>
+          <a:fillRef idx="3">
+            <a:schemeClr val="accent1"/>
+          </a:fillRef>
+          <a:effectRef idx="2">
+            <a:schemeClr val="accent1"/>
+          </a:effectRef>
+          <a:fontRef idx="minor">
+            <a:schemeClr val="lt1"/>
+          </a:fontRef>
+        </p:style>
+        <p:txBody>
+          <a:bodyPr rtlCol="0" anchor="ctr"/>
+          <a:lstStyle/>
+          <a:p>
+            <a:pPr algn="ctr"/>
+          </a:p>
+        </p:txBody>
+      </p:sp>
+      <p:sp>
+        <p:nvSpPr>
+          <p:cNvPr id="7" name="Rectangle 6"/>
+          <p:cNvSpPr/>
+          <p:nvPr/>
+        </p:nvSpPr>
+        <p:spPr>
+          <a:xfrm>
             <a:off x="548640" y="2331720"/>
             <a:ext cx="5486400" cy="3931920"/>
           </a:xfrm>
@@ -15085,7 +20202,7 @@
       </p:sp>
       <p:sp>
         <p:nvSpPr>
-          <p:cNvPr id="7" name="TextBox 6"/>
+          <p:cNvPr id="8" name="TextBox 7"/>
           <p:cNvSpPr txBox="1"/>
           <p:nvPr/>
         </p:nvSpPr>
@@ -15233,7 +20350,7 @@
       </p:sp>
       <p:sp>
         <p:nvSpPr>
-          <p:cNvPr id="8" name="Rectangle 7"/>
+          <p:cNvPr id="9" name="Rectangle 8"/>
           <p:cNvSpPr/>
           <p:nvPr/>
         </p:nvSpPr>
@@ -15279,7 +20396,7 @@
       </p:sp>
       <p:sp>
         <p:nvSpPr>
-          <p:cNvPr id="9" name="Rounded Rectangle 8"/>
+          <p:cNvPr id="10" name="Rounded Rectangle 9"/>
           <p:cNvSpPr/>
           <p:nvPr/>
         </p:nvSpPr>
@@ -15334,7 +20451,7 @@
       </p:sp>
       <p:sp>
         <p:nvSpPr>
-          <p:cNvPr id="10" name="Down Arrow 9"/>
+          <p:cNvPr id="11" name="Down Arrow 10"/>
           <p:cNvSpPr/>
           <p:nvPr/>
         </p:nvSpPr>
@@ -15378,7 +20495,7 @@
       </p:sp>
       <p:sp>
         <p:nvSpPr>
-          <p:cNvPr id="11" name="Rounded Rectangle 10"/>
+          <p:cNvPr id="12" name="Rounded Rectangle 11"/>
           <p:cNvSpPr/>
           <p:nvPr/>
         </p:nvSpPr>
@@ -15431,7 +20548,7 @@
       </p:sp>
       <p:sp>
         <p:nvSpPr>
-          <p:cNvPr id="12" name="Down Arrow 11"/>
+          <p:cNvPr id="13" name="Down Arrow 12"/>
           <p:cNvSpPr/>
           <p:nvPr/>
         </p:nvSpPr>
@@ -15475,7 +20592,7 @@
       </p:sp>
       <p:sp>
         <p:nvSpPr>
-          <p:cNvPr id="13" name="Rounded Rectangle 12"/>
+          <p:cNvPr id="14" name="Rounded Rectangle 13"/>
           <p:cNvSpPr/>
           <p:nvPr/>
         </p:nvSpPr>
@@ -15528,7 +20645,7 @@
       </p:sp>
       <p:sp>
         <p:nvSpPr>
-          <p:cNvPr id="14" name="TextBox 13"/>
+          <p:cNvPr id="15" name="TextBox 14"/>
           <p:cNvSpPr txBox="1"/>
           <p:nvPr/>
         </p:nvSpPr>
@@ -15567,14 +20684,58 @@
       </p:sp>
       <p:sp>
         <p:nvSpPr>
-          <p:cNvPr id="15" name="TextBox 14"/>
+          <p:cNvPr id="16" name="Rectangle 15"/>
+          <p:cNvSpPr/>
+          <p:nvPr/>
+        </p:nvSpPr>
+        <p:spPr>
+          <a:xfrm>
+            <a:off x="548640" y="6364224"/>
+            <a:ext cx="11091672" cy="10972"/>
+          </a:xfrm>
+          <a:prstGeom prst="rect">
+            <a:avLst/>
+          </a:prstGeom>
+          <a:solidFill>
+            <a:srgbClr val="2C2C3A"/>
+          </a:solidFill>
+          <a:ln>
+            <a:noFill/>
+          </a:ln>
+          <a:effectLst/>
+        </p:spPr>
+        <p:style>
+          <a:lnRef idx="1">
+            <a:schemeClr val="accent1"/>
+          </a:lnRef>
+          <a:fillRef idx="3">
+            <a:schemeClr val="accent1"/>
+          </a:fillRef>
+          <a:effectRef idx="2">
+            <a:schemeClr val="accent1"/>
+          </a:effectRef>
+          <a:fontRef idx="minor">
+            <a:schemeClr val="lt1"/>
+          </a:fontRef>
+        </p:style>
+        <p:txBody>
+          <a:bodyPr rtlCol="0" anchor="ctr"/>
+          <a:lstStyle/>
+          <a:p>
+            <a:pPr algn="ctr"/>
+          </a:p>
+        </p:txBody>
+      </p:sp>
+      <p:sp>
+        <p:nvSpPr>
+          <p:cNvPr id="17" name="TextBox 16"/>
           <p:cNvSpPr txBox="1"/>
           <p:nvPr/>
         </p:nvSpPr>
         <p:spPr>
           <a:xfrm>
-            <a:off x="548640" y="6419088"/>
-            <a:ext cx="11064240" cy="320040"/>
+            <a:off x="548640" y="6428232"/>
+            <a:ext cx="9692640" cy="292608"/>
           </a:xfrm>
           <a:prstGeom prst="rect">
             <a:avLst/>
@@ -15593,13 +20754,61 @@
               </a:spcAft>
             </a:pPr>
             <a:r>
+              <a:rPr sz="900" b="1">
+                <a:solidFill>
+                  <a:srgbClr val="9AA3B2"/>
+                </a:solidFill>
+                <a:latin typeface="Calibri"/>
+              </a:rPr>
+              <a:t>FIELD CTO · X-ARCH SELLING</a:t>
+            </a:r>
+            <a:r>
+              <a:rPr sz="900" b="0">
+                <a:solidFill>
+                  <a:srgbClr val="9AA3B2"/>
+                </a:solidFill>
+                <a:latin typeface="Calibri"/>
+              </a:rPr>
+              <a:t>      Illustrative figures — replace with actuals before presenting.</a:t>
+            </a:r>
+          </a:p>
+        </p:txBody>
+      </p:sp>
+      <p:sp>
+        <p:nvSpPr>
+          <p:cNvPr id="18" name="TextBox 17"/>
+          <p:cNvSpPr txBox="1"/>
+          <p:nvPr/>
+        </p:nvSpPr>
+        <p:spPr>
+          <a:xfrm>
+            <a:off x="10515600" y="6428232"/>
+            <a:ext cx="1124712" cy="274320"/>
+          </a:xfrm>
+          <a:prstGeom prst="rect">
+            <a:avLst/>
+          </a:prstGeom>
+          <a:noFill/>
+        </p:spPr>
+        <p:txBody>
+          <a:bodyPr wrap="square" anchor="t">
+            <a:spAutoFit/>
+          </a:bodyPr>
+          <a:lstStyle/>
+          <a:p>
+            <a:pPr algn="r">
+              <a:spcAft>
+                <a:spcPts val="600"/>
+              </a:spcAft>
+            </a:pPr>
+            <a:r>
               <a:rPr sz="1000" b="0">
                 <a:solidFill>
                   <a:srgbClr val="9AA3B2"/>
                 </a:solidFill>
                 <a:latin typeface="Calibri"/>
               </a:rPr>
-              <a:t>Illustrative figures — replace with actuals before presenting.</a:t>
+              <a:t>6 / 22</a:t>
             </a:r>
           </a:p>
         </p:txBody>
@@ -15796,6 +21005,50 @@
         </p:nvSpPr>
         <p:spPr>
           <a:xfrm>
+            <a:off x="548640" y="2167128"/>
+            <a:ext cx="11091672" cy="12801"/>
+          </a:xfrm>
+          <a:prstGeom prst="rect">
+            <a:avLst/>
+          </a:prstGeom>
+          <a:solidFill>
+            <a:srgbClr val="2C2C3A"/>
+          </a:solidFill>
+          <a:ln>
+            <a:noFill/>
+          </a:ln>
+          <a:effectLst/>
+        </p:spPr>
+        <p:style>
+          <a:lnRef idx="1">
+            <a:schemeClr val="accent1"/>
+          </a:lnRef>
+          <a:fillRef idx="3">
+            <a:schemeClr val="accent1"/>
+          </a:fillRef>
+          <a:effectRef idx="2">
+            <a:schemeClr val="accent1"/>
+          </a:effectRef>
+          <a:fontRef idx="minor">
+            <a:schemeClr val="lt1"/>
+          </a:fontRef>
+        </p:style>
+        <p:txBody>
+          <a:bodyPr rtlCol="0" anchor="ctr"/>
+          <a:lstStyle/>
+          <a:p>
+            <a:pPr algn="ctr"/>
+          </a:p>
+        </p:txBody>
+      </p:sp>
+      <p:sp>
+        <p:nvSpPr>
+          <p:cNvPr id="7" name="Rectangle 6"/>
+          <p:cNvSpPr/>
+          <p:nvPr/>
+        </p:nvSpPr>
+        <p:spPr>
+          <a:xfrm>
             <a:off x="548640" y="2331720"/>
             <a:ext cx="5486400" cy="3931920"/>
           </a:xfrm>
@@ -15836,7 +21089,7 @@
       </p:sp>
       <p:sp>
         <p:nvSpPr>
-          <p:cNvPr id="7" name="TextBox 6"/>
+          <p:cNvPr id="8" name="TextBox 7"/>
           <p:cNvSpPr txBox="1"/>
           <p:nvPr/>
         </p:nvSpPr>
@@ -15959,7 +21212,7 @@
       </p:sp>
       <p:sp>
         <p:nvSpPr>
-          <p:cNvPr id="8" name="Rectangle 7"/>
+          <p:cNvPr id="9" name="Rectangle 8"/>
           <p:cNvSpPr/>
           <p:nvPr/>
         </p:nvSpPr>
@@ -16005,7 +21258,7 @@
       </p:sp>
       <p:sp>
         <p:nvSpPr>
-          <p:cNvPr id="9" name="TextBox 8"/>
+          <p:cNvPr id="10" name="TextBox 9"/>
           <p:cNvSpPr txBox="1"/>
           <p:nvPr/>
         </p:nvSpPr>
@@ -16044,7 +21297,7 @@
       </p:sp>
       <p:sp>
         <p:nvSpPr>
-          <p:cNvPr id="10" name="Rounded Rectangle 9"/>
+          <p:cNvPr id="11" name="Rounded Rectangle 10"/>
           <p:cNvSpPr/>
           <p:nvPr/>
         </p:nvSpPr>
@@ -16097,7 +21350,7 @@
       </p:sp>
       <p:sp>
         <p:nvSpPr>
-          <p:cNvPr id="11" name="Rounded Rectangle 10"/>
+          <p:cNvPr id="12" name="Rounded Rectangle 11"/>
           <p:cNvSpPr/>
           <p:nvPr/>
         </p:nvSpPr>
@@ -16150,7 +21403,7 @@
       </p:sp>
       <p:sp>
         <p:nvSpPr>
-          <p:cNvPr id="12" name="Rounded Rectangle 11"/>
+          <p:cNvPr id="13" name="Rounded Rectangle 12"/>
           <p:cNvSpPr/>
           <p:nvPr/>
         </p:nvSpPr>
@@ -16203,7 +21456,7 @@
       </p:sp>
       <p:sp>
         <p:nvSpPr>
-          <p:cNvPr id="13" name="Rounded Rectangle 12"/>
+          <p:cNvPr id="14" name="Rounded Rectangle 13"/>
           <p:cNvSpPr/>
           <p:nvPr/>
         </p:nvSpPr>
@@ -16256,7 +21509,7 @@
       </p:sp>
       <p:sp>
         <p:nvSpPr>
-          <p:cNvPr id="14" name="TextBox 13"/>
+          <p:cNvPr id="15" name="TextBox 14"/>
           <p:cNvSpPr txBox="1"/>
           <p:nvPr/>
         </p:nvSpPr>
@@ -16295,7 +21548,7 @@
       </p:sp>
       <p:sp>
         <p:nvSpPr>
-          <p:cNvPr id="15" name="Rounded Rectangle 14"/>
+          <p:cNvPr id="16" name="Rounded Rectangle 15"/>
           <p:cNvSpPr/>
           <p:nvPr/>
         </p:nvSpPr>
@@ -16350,7 +21603,7 @@
       </p:sp>
       <p:sp>
         <p:nvSpPr>
-          <p:cNvPr id="16" name="Rounded Rectangle 15"/>
+          <p:cNvPr id="17" name="Rounded Rectangle 16"/>
           <p:cNvSpPr/>
           <p:nvPr/>
         </p:nvSpPr>
@@ -16405,7 +21658,7 @@
       </p:sp>
       <p:sp>
         <p:nvSpPr>
-          <p:cNvPr id="17" name="Rounded Rectangle 16"/>
+          <p:cNvPr id="18" name="Rounded Rectangle 17"/>
           <p:cNvSpPr/>
           <p:nvPr/>
         </p:nvSpPr>
@@ -16460,7 +21713,7 @@
       </p:sp>
       <p:sp>
         <p:nvSpPr>
-          <p:cNvPr id="18" name="Rounded Rectangle 17"/>
+          <p:cNvPr id="19" name="Rounded Rectangle 18"/>
           <p:cNvSpPr/>
           <p:nvPr/>
         </p:nvSpPr>
@@ -16515,14 +21768,58 @@
       </p:sp>
       <p:sp>
         <p:nvSpPr>
-          <p:cNvPr id="19" name="TextBox 18"/>
+          <p:cNvPr id="20" name="Rectangle 19"/>
+          <p:cNvSpPr/>
+          <p:nvPr/>
+        </p:nvSpPr>
+        <p:spPr>
+          <a:xfrm>
+            <a:off x="548640" y="6364224"/>
+            <a:ext cx="11091672" cy="10972"/>
+          </a:xfrm>
+          <a:prstGeom prst="rect">
+            <a:avLst/>
+          </a:prstGeom>
+          <a:solidFill>
+            <a:srgbClr val="2C2C3A"/>
+          </a:solidFill>
+          <a:ln>
+            <a:noFill/>
+          </a:ln>
+          <a:effectLst/>
+        </p:spPr>
+        <p:style>
+          <a:lnRef idx="1">
+            <a:schemeClr val="accent1"/>
+          </a:lnRef>
+          <a:fillRef idx="3">
+            <a:schemeClr val="accent1"/>
+          </a:fillRef>
+          <a:effectRef idx="2">
+            <a:schemeClr val="accent1"/>
+          </a:effectRef>
+          <a:fontRef idx="minor">
+            <a:schemeClr val="lt1"/>
+          </a:fontRef>
+        </p:style>
+        <p:txBody>
+          <a:bodyPr rtlCol="0" anchor="ctr"/>
+          <a:lstStyle/>
+          <a:p>
+            <a:pPr algn="ctr"/>
+          </a:p>
+        </p:txBody>
+      </p:sp>
+      <p:sp>
+        <p:nvSpPr>
+          <p:cNvPr id="21" name="TextBox 20"/>
           <p:cNvSpPr txBox="1"/>
           <p:nvPr/>
         </p:nvSpPr>
         <p:spPr>
           <a:xfrm>
-            <a:off x="548640" y="6419088"/>
-            <a:ext cx="11064240" cy="320040"/>
+            <a:off x="548640" y="6428232"/>
+            <a:ext cx="9692640" cy="292608"/>
           </a:xfrm>
           <a:prstGeom prst="rect">
             <a:avLst/>
@@ -16541,13 +21838,61 @@
               </a:spcAft>
             </a:pPr>
             <a:r>
+              <a:rPr sz="900" b="1">
+                <a:solidFill>
+                  <a:srgbClr val="9AA3B2"/>
+                </a:solidFill>
+                <a:latin typeface="Calibri"/>
+              </a:rPr>
+              <a:t>FIELD CTO · X-ARCH SELLING</a:t>
+            </a:r>
+            <a:r>
+              <a:rPr sz="900" b="0">
+                <a:solidFill>
+                  <a:srgbClr val="9AA3B2"/>
+                </a:solidFill>
+                <a:latin typeface="Calibri"/>
+              </a:rPr>
+              <a:t>      Illustrative figures — replace with actuals before presenting.</a:t>
+            </a:r>
+          </a:p>
+        </p:txBody>
+      </p:sp>
+      <p:sp>
+        <p:nvSpPr>
+          <p:cNvPr id="22" name="TextBox 21"/>
+          <p:cNvSpPr txBox="1"/>
+          <p:nvPr/>
+        </p:nvSpPr>
+        <p:spPr>
+          <a:xfrm>
+            <a:off x="10515600" y="6428232"/>
+            <a:ext cx="1124712" cy="274320"/>
+          </a:xfrm>
+          <a:prstGeom prst="rect">
+            <a:avLst/>
+          </a:prstGeom>
+          <a:noFill/>
+        </p:spPr>
+        <p:txBody>
+          <a:bodyPr wrap="square" anchor="t">
+            <a:spAutoFit/>
+          </a:bodyPr>
+          <a:lstStyle/>
+          <a:p>
+            <a:pPr algn="r">
+              <a:spcAft>
+                <a:spcPts val="600"/>
+              </a:spcAft>
+            </a:pPr>
+            <a:r>
               <a:rPr sz="1000" b="0">
                 <a:solidFill>
                   <a:srgbClr val="9AA3B2"/>
                 </a:solidFill>
                 <a:latin typeface="Calibri"/>
               </a:rPr>
-              <a:t>Illustrative figures — replace with actuals before presenting.</a:t>
+              <a:t>7 / 22</a:t>
             </a:r>
           </a:p>
         </p:txBody>
@@ -16744,6 +22089,50 @@
         </p:nvSpPr>
         <p:spPr>
           <a:xfrm>
+            <a:off x="548640" y="2167128"/>
+            <a:ext cx="11091672" cy="12801"/>
+          </a:xfrm>
+          <a:prstGeom prst="rect">
+            <a:avLst/>
+          </a:prstGeom>
+          <a:solidFill>
+            <a:srgbClr val="2C2C3A"/>
+          </a:solidFill>
+          <a:ln>
+            <a:noFill/>
+          </a:ln>
+          <a:effectLst/>
+        </p:spPr>
+        <p:style>
+          <a:lnRef idx="1">
+            <a:schemeClr val="accent1"/>
+          </a:lnRef>
+          <a:fillRef idx="3">
+            <a:schemeClr val="accent1"/>
+          </a:fillRef>
+          <a:effectRef idx="2">
+            <a:schemeClr val="accent1"/>
+          </a:effectRef>
+          <a:fontRef idx="minor">
+            <a:schemeClr val="lt1"/>
+          </a:fontRef>
+        </p:style>
+        <p:txBody>
+          <a:bodyPr rtlCol="0" anchor="ctr"/>
+          <a:lstStyle/>
+          <a:p>
+            <a:pPr algn="ctr"/>
+          </a:p>
+        </p:txBody>
+      </p:sp>
+      <p:sp>
+        <p:nvSpPr>
+          <p:cNvPr id="7" name="Rectangle 6"/>
+          <p:cNvSpPr/>
+          <p:nvPr/>
+        </p:nvSpPr>
+        <p:spPr>
+          <a:xfrm>
             <a:off x="548640" y="2331720"/>
             <a:ext cx="5486400" cy="3931920"/>
           </a:xfrm>
@@ -16784,7 +22173,7 @@
       </p:sp>
       <p:sp>
         <p:nvSpPr>
-          <p:cNvPr id="7" name="TextBox 6"/>
+          <p:cNvPr id="8" name="TextBox 7"/>
           <p:cNvSpPr txBox="1"/>
           <p:nvPr/>
         </p:nvSpPr>
@@ -16907,7 +22296,7 @@
       </p:sp>
       <p:sp>
         <p:nvSpPr>
-          <p:cNvPr id="8" name="Rectangle 7"/>
+          <p:cNvPr id="9" name="Rectangle 8"/>
           <p:cNvSpPr/>
           <p:nvPr/>
         </p:nvSpPr>
@@ -16953,7 +22342,7 @@
       </p:sp>
       <p:sp>
         <p:nvSpPr>
-          <p:cNvPr id="9" name="Rounded Rectangle 8"/>
+          <p:cNvPr id="10" name="Rounded Rectangle 9"/>
           <p:cNvSpPr/>
           <p:nvPr/>
         </p:nvSpPr>
@@ -17008,7 +22397,7 @@
       </p:sp>
       <p:sp>
         <p:nvSpPr>
-          <p:cNvPr id="10" name="Down Arrow 9"/>
+          <p:cNvPr id="11" name="Down Arrow 10"/>
           <p:cNvSpPr/>
           <p:nvPr/>
         </p:nvSpPr>
@@ -17052,7 +22441,7 @@
       </p:sp>
       <p:sp>
         <p:nvSpPr>
-          <p:cNvPr id="11" name="Rounded Rectangle 10"/>
+          <p:cNvPr id="12" name="Rounded Rectangle 11"/>
           <p:cNvSpPr/>
           <p:nvPr/>
         </p:nvSpPr>
@@ -17107,7 +22496,7 @@
       </p:sp>
       <p:sp>
         <p:nvSpPr>
-          <p:cNvPr id="12" name="Down Arrow 11"/>
+          <p:cNvPr id="13" name="Down Arrow 12"/>
           <p:cNvSpPr/>
           <p:nvPr/>
         </p:nvSpPr>
@@ -17151,7 +22540,7 @@
       </p:sp>
       <p:sp>
         <p:nvSpPr>
-          <p:cNvPr id="13" name="Rounded Rectangle 12"/>
+          <p:cNvPr id="14" name="Rounded Rectangle 13"/>
           <p:cNvSpPr/>
           <p:nvPr/>
         </p:nvSpPr>
@@ -17206,7 +22595,7 @@
       </p:sp>
       <p:sp>
         <p:nvSpPr>
-          <p:cNvPr id="14" name="Down Arrow 13"/>
+          <p:cNvPr id="15" name="Down Arrow 14"/>
           <p:cNvSpPr/>
           <p:nvPr/>
         </p:nvSpPr>
@@ -17250,7 +22639,7 @@
       </p:sp>
       <p:sp>
         <p:nvSpPr>
-          <p:cNvPr id="15" name="Rounded Rectangle 14"/>
+          <p:cNvPr id="16" name="Rounded Rectangle 15"/>
           <p:cNvSpPr/>
           <p:nvPr/>
         </p:nvSpPr>
@@ -17305,7 +22694,7 @@
       </p:sp>
       <p:sp>
         <p:nvSpPr>
-          <p:cNvPr id="16" name="Down Arrow 15"/>
+          <p:cNvPr id="17" name="Down Arrow 16"/>
           <p:cNvSpPr/>
           <p:nvPr/>
         </p:nvSpPr>
@@ -17349,7 +22738,7 @@
       </p:sp>
       <p:sp>
         <p:nvSpPr>
-          <p:cNvPr id="17" name="Rounded Rectangle 16"/>
+          <p:cNvPr id="18" name="Rounded Rectangle 17"/>
           <p:cNvSpPr/>
           <p:nvPr/>
         </p:nvSpPr>
@@ -17404,7 +22793,7 @@
       </p:sp>
       <p:sp>
         <p:nvSpPr>
-          <p:cNvPr id="18" name="Down Arrow 17"/>
+          <p:cNvPr id="19" name="Down Arrow 18"/>
           <p:cNvSpPr/>
           <p:nvPr/>
         </p:nvSpPr>
@@ -17448,7 +22837,7 @@
       </p:sp>
       <p:sp>
         <p:nvSpPr>
-          <p:cNvPr id="19" name="Rounded Rectangle 18"/>
+          <p:cNvPr id="20" name="Rounded Rectangle 19"/>
           <p:cNvSpPr/>
           <p:nvPr/>
         </p:nvSpPr>
@@ -17501,14 +22890,58 @@
       </p:sp>
       <p:sp>
         <p:nvSpPr>
-          <p:cNvPr id="20" name="TextBox 19"/>
+          <p:cNvPr id="21" name="Rectangle 20"/>
+          <p:cNvSpPr/>
+          <p:nvPr/>
+        </p:nvSpPr>
+        <p:spPr>
+          <a:xfrm>
+            <a:off x="548640" y="6364224"/>
+            <a:ext cx="11091672" cy="10972"/>
+          </a:xfrm>
+          <a:prstGeom prst="rect">
+            <a:avLst/>
+          </a:prstGeom>
+          <a:solidFill>
+            <a:srgbClr val="2C2C3A"/>
+          </a:solidFill>
+          <a:ln>
+            <a:noFill/>
+          </a:ln>
+          <a:effectLst/>
+        </p:spPr>
+        <p:style>
+          <a:lnRef idx="1">
+            <a:schemeClr val="accent1"/>
+          </a:lnRef>
+          <a:fillRef idx="3">
+            <a:schemeClr val="accent1"/>
+          </a:fillRef>
+          <a:effectRef idx="2">
+            <a:schemeClr val="accent1"/>
+          </a:effectRef>
+          <a:fontRef idx="minor">
+            <a:schemeClr val="lt1"/>
+          </a:fontRef>
+        </p:style>
+        <p:txBody>
+          <a:bodyPr rtlCol="0" anchor="ctr"/>
+          <a:lstStyle/>
+          <a:p>
+            <a:pPr algn="ctr"/>
+          </a:p>
+        </p:txBody>
+      </p:sp>
+      <p:sp>
+        <p:nvSpPr>
+          <p:cNvPr id="22" name="TextBox 21"/>
           <p:cNvSpPr txBox="1"/>
           <p:nvPr/>
         </p:nvSpPr>
         <p:spPr>
           <a:xfrm>
-            <a:off x="548640" y="6419088"/>
-            <a:ext cx="11064240" cy="320040"/>
+            <a:off x="548640" y="6428232"/>
+            <a:ext cx="9692640" cy="292608"/>
           </a:xfrm>
           <a:prstGeom prst="rect">
             <a:avLst/>
@@ -17527,13 +22960,61 @@
               </a:spcAft>
             </a:pPr>
             <a:r>
+              <a:rPr sz="900" b="1">
+                <a:solidFill>
+                  <a:srgbClr val="9AA3B2"/>
+                </a:solidFill>
+                <a:latin typeface="Calibri"/>
+              </a:rPr>
+              <a:t>FIELD CTO · X-ARCH SELLING</a:t>
+            </a:r>
+            <a:r>
+              <a:rPr sz="900" b="0">
+                <a:solidFill>
+                  <a:srgbClr val="9AA3B2"/>
+                </a:solidFill>
+                <a:latin typeface="Calibri"/>
+              </a:rPr>
+              <a:t>      Illustrative figures — replace with actuals before presenting.</a:t>
+            </a:r>
+          </a:p>
+        </p:txBody>
+      </p:sp>
+      <p:sp>
+        <p:nvSpPr>
+          <p:cNvPr id="23" name="TextBox 22"/>
+          <p:cNvSpPr txBox="1"/>
+          <p:nvPr/>
+        </p:nvSpPr>
+        <p:spPr>
+          <a:xfrm>
+            <a:off x="10515600" y="6428232"/>
+            <a:ext cx="1124712" cy="274320"/>
+          </a:xfrm>
+          <a:prstGeom prst="rect">
+            <a:avLst/>
+          </a:prstGeom>
+          <a:noFill/>
+        </p:spPr>
+        <p:txBody>
+          <a:bodyPr wrap="square" anchor="t">
+            <a:spAutoFit/>
+          </a:bodyPr>
+          <a:lstStyle/>
+          <a:p>
+            <a:pPr algn="r">
+              <a:spcAft>
+                <a:spcPts val="600"/>
+              </a:spcAft>
+            </a:pPr>
+            <a:r>
               <a:rPr sz="1000" b="0">
                 <a:solidFill>
                   <a:srgbClr val="9AA3B2"/>
                 </a:solidFill>
                 <a:latin typeface="Calibri"/>
               </a:rPr>
-              <a:t>Illustrative figures — replace with actuals before presenting.</a:t>
+              <a:t>8 / 22</a:t>
             </a:r>
           </a:p>
         </p:txBody>
@@ -17730,6 +23211,50 @@
         </p:nvSpPr>
         <p:spPr>
           <a:xfrm>
+            <a:off x="548640" y="2167128"/>
+            <a:ext cx="11091672" cy="12801"/>
+          </a:xfrm>
+          <a:prstGeom prst="rect">
+            <a:avLst/>
+          </a:prstGeom>
+          <a:solidFill>
+            <a:srgbClr val="2C2C3A"/>
+          </a:solidFill>
+          <a:ln>
+            <a:noFill/>
+          </a:ln>
+          <a:effectLst/>
+        </p:spPr>
+        <p:style>
+          <a:lnRef idx="1">
+            <a:schemeClr val="accent1"/>
+          </a:lnRef>
+          <a:fillRef idx="3">
+            <a:schemeClr val="accent1"/>
+          </a:fillRef>
+          <a:effectRef idx="2">
+            <a:schemeClr val="accent1"/>
+          </a:effectRef>
+          <a:fontRef idx="minor">
+            <a:schemeClr val="lt1"/>
+          </a:fontRef>
+        </p:style>
+        <p:txBody>
+          <a:bodyPr rtlCol="0" anchor="ctr"/>
+          <a:lstStyle/>
+          <a:p>
+            <a:pPr algn="ctr"/>
+          </a:p>
+        </p:txBody>
+      </p:sp>
+      <p:sp>
+        <p:nvSpPr>
+          <p:cNvPr id="7" name="Rectangle 6"/>
+          <p:cNvSpPr/>
+          <p:nvPr/>
+        </p:nvSpPr>
+        <p:spPr>
+          <a:xfrm>
             <a:off x="548640" y="2331720"/>
             <a:ext cx="5486400" cy="3931920"/>
           </a:xfrm>
@@ -17770,7 +23295,7 @@
       </p:sp>
       <p:sp>
         <p:nvSpPr>
-          <p:cNvPr id="7" name="TextBox 6"/>
+          <p:cNvPr id="8" name="TextBox 7"/>
           <p:cNvSpPr txBox="1"/>
           <p:nvPr/>
         </p:nvSpPr>
@@ -17918,7 +23443,7 @@
       </p:sp>
       <p:sp>
         <p:nvSpPr>
-          <p:cNvPr id="8" name="Rectangle 7"/>
+          <p:cNvPr id="9" name="Rectangle 8"/>
           <p:cNvSpPr/>
           <p:nvPr/>
         </p:nvSpPr>
@@ -17964,7 +23489,7 @@
       </p:sp>
       <p:sp>
         <p:nvSpPr>
-          <p:cNvPr id="9" name="Rounded Rectangle 8"/>
+          <p:cNvPr id="10" name="Rounded Rectangle 9"/>
           <p:cNvSpPr/>
           <p:nvPr/>
         </p:nvSpPr>
@@ -18017,7 +23542,7 @@
       </p:sp>
       <p:sp>
         <p:nvSpPr>
-          <p:cNvPr id="10" name="Rounded Rectangle 9"/>
+          <p:cNvPr id="11" name="Rounded Rectangle 10"/>
           <p:cNvSpPr/>
           <p:nvPr/>
         </p:nvSpPr>
@@ -18070,7 +23595,7 @@
       </p:sp>
       <p:sp>
         <p:nvSpPr>
-          <p:cNvPr id="11" name="Rounded Rectangle 10"/>
+          <p:cNvPr id="12" name="Rounded Rectangle 11"/>
           <p:cNvSpPr/>
           <p:nvPr/>
         </p:nvSpPr>
@@ -18123,7 +23648,7 @@
       </p:sp>
       <p:sp>
         <p:nvSpPr>
-          <p:cNvPr id="12" name="Rounded Rectangle 11"/>
+          <p:cNvPr id="13" name="Rounded Rectangle 12"/>
           <p:cNvSpPr/>
           <p:nvPr/>
         </p:nvSpPr>
@@ -18176,14 +23701,58 @@
       </p:sp>
       <p:sp>
         <p:nvSpPr>
-          <p:cNvPr id="13" name="TextBox 12"/>
+          <p:cNvPr id="14" name="Rectangle 13"/>
+          <p:cNvSpPr/>
+          <p:nvPr/>
+        </p:nvSpPr>
+        <p:spPr>
+          <a:xfrm>
+            <a:off x="548640" y="6364224"/>
+            <a:ext cx="11091672" cy="10972"/>
+          </a:xfrm>
+          <a:prstGeom prst="rect">
+            <a:avLst/>
+          </a:prstGeom>
+          <a:solidFill>
+            <a:srgbClr val="2C2C3A"/>
+          </a:solidFill>
+          <a:ln>
+            <a:noFill/>
+          </a:ln>
+          <a:effectLst/>
+        </p:spPr>
+        <p:style>
+          <a:lnRef idx="1">
+            <a:schemeClr val="accent1"/>
+          </a:lnRef>
+          <a:fillRef idx="3">
+            <a:schemeClr val="accent1"/>
+          </a:fillRef>
+          <a:effectRef idx="2">
+            <a:schemeClr val="accent1"/>
+          </a:effectRef>
+          <a:fontRef idx="minor">
+            <a:schemeClr val="lt1"/>
+          </a:fontRef>
+        </p:style>
+        <p:txBody>
+          <a:bodyPr rtlCol="0" anchor="ctr"/>
+          <a:lstStyle/>
+          <a:p>
+            <a:pPr algn="ctr"/>
+          </a:p>
+        </p:txBody>
+      </p:sp>
+      <p:sp>
+        <p:nvSpPr>
+          <p:cNvPr id="15" name="TextBox 14"/>
           <p:cNvSpPr txBox="1"/>
           <p:nvPr/>
         </p:nvSpPr>
         <p:spPr>
           <a:xfrm>
-            <a:off x="548640" y="6419088"/>
-            <a:ext cx="11064240" cy="320040"/>
+            <a:off x="548640" y="6428232"/>
+            <a:ext cx="9692640" cy="292608"/>
           </a:xfrm>
           <a:prstGeom prst="rect">
             <a:avLst/>
@@ -18202,13 +23771,61 @@
               </a:spcAft>
             </a:pPr>
             <a:r>
+              <a:rPr sz="900" b="1">
+                <a:solidFill>
+                  <a:srgbClr val="9AA3B2"/>
+                </a:solidFill>
+                <a:latin typeface="Calibri"/>
+              </a:rPr>
+              <a:t>FIELD CTO · X-ARCH SELLING</a:t>
+            </a:r>
+            <a:r>
+              <a:rPr sz="900" b="0">
+                <a:solidFill>
+                  <a:srgbClr val="9AA3B2"/>
+                </a:solidFill>
+                <a:latin typeface="Calibri"/>
+              </a:rPr>
+              <a:t>      Illustrative figures — replace with actuals before presenting.</a:t>
+            </a:r>
+          </a:p>
+        </p:txBody>
+      </p:sp>
+      <p:sp>
+        <p:nvSpPr>
+          <p:cNvPr id="16" name="TextBox 15"/>
+          <p:cNvSpPr txBox="1"/>
+          <p:nvPr/>
+        </p:nvSpPr>
+        <p:spPr>
+          <a:xfrm>
+            <a:off x="10515600" y="6428232"/>
+            <a:ext cx="1124712" cy="274320"/>
+          </a:xfrm>
+          <a:prstGeom prst="rect">
+            <a:avLst/>
+          </a:prstGeom>
+          <a:noFill/>
+        </p:spPr>
+        <p:txBody>
+          <a:bodyPr wrap="square" anchor="t">
+            <a:spAutoFit/>
+          </a:bodyPr>
+          <a:lstStyle/>
+          <a:p>
+            <a:pPr algn="r">
+              <a:spcAft>
+                <a:spcPts val="600"/>
+              </a:spcAft>
+            </a:pPr>
+            <a:r>
               <a:rPr sz="1000" b="0">
                 <a:solidFill>
                   <a:srgbClr val="9AA3B2"/>
                 </a:solidFill>
                 <a:latin typeface="Calibri"/>
               </a:rPr>
-              <a:t>Illustrative figures — replace with actuals before presenting.</a:t>
+              <a:t>9 / 22</a:t>
             </a:r>
           </a:p>
         </p:txBody>
